--- a/소설쓰기_가이드.pptx
+++ b/소설쓰기_가이드.pptx
@@ -3270,7 +3270,7 @@
         <p:spPr>
           <a:xfrm>
             <a:off x="777240" y="1536192"/>
-            <a:ext cx="5669280" cy="1691640"/>
+            <a:ext cx="5669280" cy="1860279"/>
           </a:xfrm>
           <a:prstGeom prst="rect">
             <a:avLst/>
@@ -3296,8 +3296,18 @@
                 <a:latin typeface="Noto Sans CJK KR"/>
                 <a:ea typeface="Noto Sans CJK KR"/>
               </a:rPr>
-              <a:t>매혹적인
-소설 쓰기의 기술</a:t>
+              <a:t>매혹적인</a:t>
+            </a:r>
+            <a:br/>
+            <a:r>
+              <a:rPr sz="4200" b="1" i="0">
+                <a:solidFill>
+                  <a:srgbClr val="F2EFE9"/>
+                </a:solidFill>
+                <a:latin typeface="Noto Sans CJK KR"/>
+                <a:ea typeface="Noto Sans CJK KR"/>
+              </a:rPr>
+              <a:t>소설 쓰기의 기술</a:t>
             </a:r>
           </a:p>
         </p:txBody>
@@ -3310,7 +3320,7 @@
         </p:nvSpPr>
         <p:spPr>
           <a:xfrm>
-            <a:off x="777240" y="3337560"/>
+            <a:off x="777240" y="3487911"/>
             <a:ext cx="1463040" cy="64008"/>
           </a:xfrm>
           <a:prstGeom prst="rect">
@@ -3354,8 +3364,8 @@
         </p:nvSpPr>
         <p:spPr>
           <a:xfrm>
-            <a:off x="777240" y="3584448"/>
-            <a:ext cx="5486400" cy="868680"/>
+            <a:off x="777240" y="3643359"/>
+            <a:ext cx="5486400" cy="804062"/>
           </a:xfrm>
           <a:prstGeom prst="rect">
             <a:avLst/>
@@ -3381,8 +3391,18 @@
                 <a:latin typeface="Noto Sans CJK KR"/>
                 <a:ea typeface="Noto Sans CJK KR"/>
               </a:rPr>
-              <a:t>아이디어의 첫 불꽃부터 마지막 문장의 퇴고까지,
-독자의 밤을 빼앗는 서사 설계의 10가지 핵심 원칙</a:t>
+              <a:t>아이디어의 첫 불꽃부터 마지막 문장의 퇴고까지,</a:t>
+            </a:r>
+            <a:br/>
+            <a:r>
+              <a:rPr sz="1500" b="0" i="0">
+                <a:solidFill>
+                  <a:srgbClr val="B2BAC6"/>
+                </a:solidFill>
+                <a:latin typeface="Noto Sans CJK KR"/>
+                <a:ea typeface="Noto Sans CJK KR"/>
+              </a:rPr>
+              <a:t>독자의 밤을 빼앗는 서사 설계의 10가지 핵심 원칙</a:t>
             </a:r>
           </a:p>
         </p:txBody>
@@ -3547,7 +3567,7 @@
               </a:lnSpc>
             </a:pPr>
             <a:r>
-              <a:rPr sz="1450" b="1" i="0">
+              <a:rPr sz="1350" b="1" i="0">
                 <a:solidFill>
                   <a:srgbClr val="F2EFE9"/>
                 </a:solidFill>
@@ -3759,7 +3779,7 @@
               </a:lnSpc>
             </a:pPr>
             <a:r>
-              <a:rPr sz="1450" b="1" i="0">
+              <a:rPr sz="1350" b="1" i="0">
                 <a:solidFill>
                   <a:srgbClr val="F2EFE9"/>
                 </a:solidFill>
@@ -3971,7 +3991,7 @@
               </a:lnSpc>
             </a:pPr>
             <a:r>
-              <a:rPr sz="1450" b="1" i="0">
+              <a:rPr sz="1350" b="1" i="0">
                 <a:solidFill>
                   <a:srgbClr val="F2EFE9"/>
                 </a:solidFill>
@@ -4183,7 +4203,7 @@
               </a:lnSpc>
             </a:pPr>
             <a:r>
-              <a:rPr sz="1450" b="1" i="0">
+              <a:rPr sz="1350" b="1" i="0">
                 <a:solidFill>
                   <a:srgbClr val="F2EFE9"/>
                 </a:solidFill>
@@ -4263,14 +4283,134 @@
       <p:grpSpPr/>
       <p:sp>
         <p:nvSpPr>
-          <p:cNvPr id="2" name="Rectangle 1"/>
+          <p:cNvPr id="2" name="TextBox 1"/>
+          <p:cNvSpPr txBox="1"/>
+          <p:nvPr/>
+        </p:nvSpPr>
+        <p:spPr>
+          <a:xfrm>
+            <a:off x="768096" y="329184"/>
+            <a:ext cx="10789920" cy="219760"/>
+          </a:xfrm>
+          <a:prstGeom prst="rect">
+            <a:avLst/>
+          </a:prstGeom>
+          <a:noFill/>
+        </p:spPr>
+        <p:txBody>
+          <a:bodyPr wrap="square" anchor="t" lIns="18288" rIns="18288" tIns="12801" bIns="12801">
+            <a:spAutoFit/>
+          </a:bodyPr>
+          <a:lstStyle/>
+          <a:p>
+            <a:pPr algn="l">
+              <a:lnSpc>
+                <a:spcPct val="125000"/>
+              </a:lnSpc>
+            </a:pPr>
+            <a:r>
+              <a:rPr sz="800" b="1" i="0">
+                <a:solidFill>
+                  <a:srgbClr val="D19830"/>
+                </a:solidFill>
+                <a:latin typeface="Noto Sans CJK KR"/>
+                <a:ea typeface="Noto Sans CJK KR"/>
+              </a:rPr>
+              <a:t>09  |  THE WRITER'S HABIT &amp; NEXT STEPS</a:t>
+            </a:r>
+          </a:p>
+        </p:txBody>
+      </p:sp>
+      <p:sp>
+        <p:nvSpPr>
+          <p:cNvPr id="3" name="TextBox 2"/>
+          <p:cNvSpPr txBox="1"/>
+          <p:nvPr/>
+        </p:nvSpPr>
+        <p:spPr>
+          <a:xfrm>
+            <a:off x="768096" y="631240"/>
+            <a:ext cx="10789920" cy="423164"/>
+          </a:xfrm>
+          <a:prstGeom prst="rect">
+            <a:avLst/>
+          </a:prstGeom>
+          <a:noFill/>
+        </p:spPr>
+        <p:txBody>
+          <a:bodyPr wrap="square" anchor="t" lIns="18288" rIns="18288" tIns="12801" bIns="12801">
+            <a:spAutoFit/>
+          </a:bodyPr>
+          <a:lstStyle/>
+          <a:p>
+            <a:pPr algn="l">
+              <a:lnSpc>
+                <a:spcPct val="125000"/>
+              </a:lnSpc>
+            </a:pPr>
+            <a:r>
+              <a:rPr sz="1700" b="1" i="0">
+                <a:solidFill>
+                  <a:srgbClr val="F2EFE9"/>
+                </a:solidFill>
+                <a:latin typeface="Noto Sans CJK KR"/>
+                <a:ea typeface="Noto Sans CJK KR"/>
+              </a:rPr>
+              <a:t>완벽한 첫 문장을 기다리지 말고, 지금 당장 첫 장면을 시작하라</a:t>
+            </a:r>
+          </a:p>
+        </p:txBody>
+      </p:sp>
+      <p:sp>
+        <p:nvSpPr>
+          <p:cNvPr id="4" name="TextBox 3"/>
+          <p:cNvSpPr txBox="1"/>
+          <p:nvPr/>
+        </p:nvSpPr>
+        <p:spPr>
+          <a:xfrm>
+            <a:off x="768096" y="1136700"/>
+            <a:ext cx="10789920" cy="247497"/>
+          </a:xfrm>
+          <a:prstGeom prst="rect">
+            <a:avLst/>
+          </a:prstGeom>
+          <a:noFill/>
+        </p:spPr>
+        <p:txBody>
+          <a:bodyPr wrap="square" anchor="t" lIns="18288" rIns="18288" tIns="12801" bIns="12801">
+            <a:spAutoFit/>
+          </a:bodyPr>
+          <a:lstStyle/>
+          <a:p>
+            <a:pPr algn="l">
+              <a:lnSpc>
+                <a:spcPct val="125000"/>
+              </a:lnSpc>
+            </a:pPr>
+            <a:r>
+              <a:rPr sz="950" b="0" i="0">
+                <a:solidFill>
+                  <a:srgbClr val="B2BAC6"/>
+                </a:solidFill>
+                <a:latin typeface="Noto Sans CJK KR"/>
+                <a:ea typeface="Noto Sans CJK KR"/>
+              </a:rPr>
+              <a:t>재능보다 강력한 것은 매일 책상 앞에 앉는 루틴과 끝까지 마침표를 찍어본 완주의 근육이다</a:t>
+            </a:r>
+          </a:p>
+        </p:txBody>
+      </p:sp>
+      <p:sp>
+        <p:nvSpPr>
+          <p:cNvPr id="5" name="Rectangle 4"/>
           <p:cNvSpPr/>
           <p:nvPr/>
         </p:nvSpPr>
         <p:spPr>
           <a:xfrm>
             <a:off x="594360" y="384048"/>
-            <a:ext cx="73152" cy="713232"/>
+            <a:ext cx="73152" cy="917854"/>
           </a:xfrm>
           <a:prstGeom prst="rect">
             <a:avLst/>
@@ -4307,133 +4447,13 @@
       </p:sp>
       <p:sp>
         <p:nvSpPr>
-          <p:cNvPr id="3" name="TextBox 2"/>
-          <p:cNvSpPr txBox="1"/>
-          <p:nvPr/>
-        </p:nvSpPr>
-        <p:spPr>
-          <a:xfrm>
-            <a:off x="768096" y="329184"/>
-            <a:ext cx="8229600" cy="256032"/>
-          </a:xfrm>
-          <a:prstGeom prst="rect">
-            <a:avLst/>
-          </a:prstGeom>
-          <a:noFill/>
-        </p:spPr>
-        <p:txBody>
-          <a:bodyPr wrap="square" anchor="t" lIns="18288" rIns="18288" tIns="12801" bIns="12801">
-            <a:spAutoFit/>
-          </a:bodyPr>
-          <a:lstStyle/>
-          <a:p>
-            <a:pPr algn="l">
-              <a:lnSpc>
-                <a:spcPct val="125000"/>
-              </a:lnSpc>
-            </a:pPr>
-            <a:r>
-              <a:rPr sz="1050" b="1" i="0">
-                <a:solidFill>
-                  <a:srgbClr val="D19830"/>
-                </a:solidFill>
-                <a:latin typeface="Noto Sans CJK KR"/>
-                <a:ea typeface="Noto Sans CJK KR"/>
-              </a:rPr>
-              <a:t>09  |  THE WRITER'S HABIT &amp; NEXT STEPS</a:t>
-            </a:r>
-          </a:p>
-        </p:txBody>
-      </p:sp>
-      <p:sp>
-        <p:nvSpPr>
-          <p:cNvPr id="4" name="TextBox 3"/>
-          <p:cNvSpPr txBox="1"/>
-          <p:nvPr/>
-        </p:nvSpPr>
-        <p:spPr>
-          <a:xfrm>
-            <a:off x="768096" y="548640"/>
-            <a:ext cx="10789920" cy="402336"/>
-          </a:xfrm>
-          <a:prstGeom prst="rect">
-            <a:avLst/>
-          </a:prstGeom>
-          <a:noFill/>
-        </p:spPr>
-        <p:txBody>
-          <a:bodyPr wrap="square" anchor="t" lIns="18288" rIns="18288" tIns="12801" bIns="12801">
-            <a:spAutoFit/>
-          </a:bodyPr>
-          <a:lstStyle/>
-          <a:p>
-            <a:pPr algn="l">
-              <a:lnSpc>
-                <a:spcPct val="125000"/>
-              </a:lnSpc>
-            </a:pPr>
-            <a:r>
-              <a:rPr sz="2150" b="1" i="0">
-                <a:solidFill>
-                  <a:srgbClr val="F2EFE9"/>
-                </a:solidFill>
-                <a:latin typeface="Noto Sans CJK KR"/>
-                <a:ea typeface="Noto Sans CJK KR"/>
-              </a:rPr>
-              <a:t>완벽한 첫 문장을 기다리지 말고, 지금 당장 첫 장면을 시작하라</a:t>
-            </a:r>
-          </a:p>
-        </p:txBody>
-      </p:sp>
-      <p:sp>
-        <p:nvSpPr>
-          <p:cNvPr id="5" name="TextBox 4"/>
-          <p:cNvSpPr txBox="1"/>
-          <p:nvPr/>
-        </p:nvSpPr>
-        <p:spPr>
-          <a:xfrm>
-            <a:off x="768096" y="923544"/>
-            <a:ext cx="10789920" cy="292608"/>
-          </a:xfrm>
-          <a:prstGeom prst="rect">
-            <a:avLst/>
-          </a:prstGeom>
-          <a:noFill/>
-        </p:spPr>
-        <p:txBody>
-          <a:bodyPr wrap="square" anchor="t" lIns="18288" rIns="18288" tIns="12801" bIns="12801">
-            <a:spAutoFit/>
-          </a:bodyPr>
-          <a:lstStyle/>
-          <a:p>
-            <a:pPr algn="l">
-              <a:lnSpc>
-                <a:spcPct val="125000"/>
-              </a:lnSpc>
-            </a:pPr>
-            <a:r>
-              <a:rPr sz="1200" b="0" i="0">
-                <a:solidFill>
-                  <a:srgbClr val="B2BAC6"/>
-                </a:solidFill>
-                <a:latin typeface="Noto Sans CJK KR"/>
-                <a:ea typeface="Noto Sans CJK KR"/>
-              </a:rPr>
-              <a:t>재능보다 강력한 것은 매일 책상 앞에 앉는 루틴과 끝까지 마침표를 찍어본 완주의 근육이다</a:t>
-            </a:r>
-          </a:p>
-        </p:txBody>
-      </p:sp>
-      <p:sp>
-        <p:nvSpPr>
           <p:cNvPr id="6" name="Rectangle 5"/>
           <p:cNvSpPr/>
           <p:nvPr/>
         </p:nvSpPr>
         <p:spPr>
           <a:xfrm>
-            <a:off x="594360" y="1261872"/>
+            <a:off x="594360" y="1457350"/>
             <a:ext cx="11000232" cy="13716"/>
           </a:xfrm>
           <a:prstGeom prst="rect">
@@ -4713,7 +4733,7 @@
               </a:lnSpc>
             </a:pPr>
             <a:r>
-              <a:rPr sz="1000" b="1" i="0">
+              <a:rPr sz="950" b="1" i="0">
                 <a:solidFill>
                   <a:srgbClr val="C6532D"/>
                 </a:solidFill>
@@ -4753,7 +4773,7 @@
               </a:lnSpc>
             </a:pPr>
             <a:r>
-              <a:rPr sz="1450" b="1" i="0">
+              <a:rPr sz="1350" b="1" i="0">
                 <a:solidFill>
                   <a:srgbClr val="F2EFE9"/>
                 </a:solidFill>
@@ -4888,9 +4908,29 @@
                 <a:latin typeface="Noto Sans CJK KR"/>
                 <a:ea typeface="Noto Sans CJK KR"/>
               </a:rPr>
-              <a:t>• 매일 같은 시간, 같은 장소에서 정해진 분량(예: 하루 1,000자~2,000자 또는 45분)을 채우는 시스템 구축
-• 다음 날 글쓰기가 막막하지 않도록, 오늘 가장 잘 써지는 장면의 문장 중간에서 멈추는 ‘헤밍웨이 기법’ 활용
-• 하루 1,500자씩 60일이면 단편 3편 또는 경장편 1권 분량(원고지 450매)이 완성된다</a:t>
+              <a:t>• 매일 같은 시간, 같은 장소에서 정해진 분량(예: 하루 1,000자~2,000자 또는 45분)을 채우는 시스템 구축</a:t>
+            </a:r>
+            <a:br/>
+            <a:r>
+              <a:rPr sz="1030" b="0" i="0">
+                <a:solidFill>
+                  <a:srgbClr val="B2BAC6"/>
+                </a:solidFill>
+                <a:latin typeface="Noto Sans CJK KR"/>
+                <a:ea typeface="Noto Sans CJK KR"/>
+              </a:rPr>
+              <a:t>• 다음 날 글쓰기가 막막하지 않도록, 오늘 가장 잘 써지는 장면의 문장 중간에서 멈추는 ‘헤밍웨이 기법’ 활용</a:t>
+            </a:r>
+            <a:br/>
+            <a:r>
+              <a:rPr sz="1030" b="0" i="0">
+                <a:solidFill>
+                  <a:srgbClr val="B2BAC6"/>
+                </a:solidFill>
+                <a:latin typeface="Noto Sans CJK KR"/>
+                <a:ea typeface="Noto Sans CJK KR"/>
+              </a:rPr>
+              <a:t>• 하루 1,500자씩 60일이면 단편 3편 또는 경장편 1권 분량(원고지 450매)이 완성된다</a:t>
             </a:r>
           </a:p>
         </p:txBody>
@@ -5015,7 +5055,7 @@
               </a:lnSpc>
             </a:pPr>
             <a:r>
-              <a:rPr sz="1000" b="1" i="0">
+              <a:rPr sz="950" b="1" i="0">
                 <a:solidFill>
                   <a:srgbClr val="D19830"/>
                 </a:solidFill>
@@ -5055,7 +5095,7 @@
               </a:lnSpc>
             </a:pPr>
             <a:r>
-              <a:rPr sz="1450" b="1" i="0">
+              <a:rPr sz="1350" b="1" i="0">
                 <a:solidFill>
                   <a:srgbClr val="F2EFE9"/>
                 </a:solidFill>
@@ -5190,9 +5230,29 @@
                 <a:latin typeface="Noto Sans CJK KR"/>
                 <a:ea typeface="Noto Sans CJK KR"/>
               </a:rPr>
-              <a:t>• 지하철에서 들은 기묘한 대화 한 줄, 독특한 직업군의 은어, 계절별 빛과 냄새를 메모장에 즉시 기록
-• 마음에 드는 소설을 읽을 때는 독자로서 한 번, 작가로서 ‘어떻게 이 감정을 설계했는가’ 분석하며 한 번 더 필사·해부
-• 막힐 때마다 꺼내 쓸 수 있는 나만의 ‘인물·장면·어휘 창고’를 상시 비축</a:t>
+              <a:t>• 지하철에서 들은 기묘한 대화 한 줄, 독특한 직업군의 은어, 계절별 빛과 냄새를 메모장에 즉시 기록</a:t>
+            </a:r>
+            <a:br/>
+            <a:r>
+              <a:rPr sz="1030" b="0" i="0">
+                <a:solidFill>
+                  <a:srgbClr val="B2BAC6"/>
+                </a:solidFill>
+                <a:latin typeface="Noto Sans CJK KR"/>
+                <a:ea typeface="Noto Sans CJK KR"/>
+              </a:rPr>
+              <a:t>• 마음에 드는 소설을 읽을 때는 독자로서 한 번, 작가로서 ‘어떻게 이 감정을 설계했는가’ 분석하며 한 번 더 필사·해부</a:t>
+            </a:r>
+            <a:br/>
+            <a:r>
+              <a:rPr sz="1030" b="0" i="0">
+                <a:solidFill>
+                  <a:srgbClr val="B2BAC6"/>
+                </a:solidFill>
+                <a:latin typeface="Noto Sans CJK KR"/>
+                <a:ea typeface="Noto Sans CJK KR"/>
+              </a:rPr>
+              <a:t>• 막힐 때마다 꺼내 쓸 수 있는 나만의 ‘인물·장면·어휘 창고’를 상시 비축</a:t>
             </a:r>
           </a:p>
         </p:txBody>
@@ -5317,7 +5377,7 @@
               </a:lnSpc>
             </a:pPr>
             <a:r>
-              <a:rPr sz="1000" b="1" i="0">
+              <a:rPr sz="950" b="1" i="0">
                 <a:solidFill>
                   <a:srgbClr val="316B69"/>
                 </a:solidFill>
@@ -5357,7 +5417,7 @@
               </a:lnSpc>
             </a:pPr>
             <a:r>
-              <a:rPr sz="1450" b="1" i="0">
+              <a:rPr sz="1350" b="1" i="0">
                 <a:solidFill>
                   <a:srgbClr val="F2EFE9"/>
                 </a:solidFill>
@@ -5492,9 +5552,29 @@
                 <a:latin typeface="Noto Sans CJK KR"/>
                 <a:ea typeface="Noto Sans CJK KR"/>
               </a:rPr>
-              <a:t>• 처음부터 거대한 10권짜리 세계관에 매몰되기보다, 원고지 70~100매 분량의 단편으로 기승전결 완주 훈련
-• 첫 초고가 마음에 들지 않는 것은 당신의 재능이 부족해서가 아니라 안목이 높기 때문임을 기억
-• 오늘 당장 주인공의 이름과 그가 처한 첫 번째 작은 위기 한 줄을 적는 것으로 시작하라</a:t>
+              <a:t>• 처음부터 거대한 10권짜리 세계관에 매몰되기보다, 원고지 70~100매 분량의 단편으로 기승전결 완주 훈련</a:t>
+            </a:r>
+            <a:br/>
+            <a:r>
+              <a:rPr sz="1030" b="0" i="0">
+                <a:solidFill>
+                  <a:srgbClr val="B2BAC6"/>
+                </a:solidFill>
+                <a:latin typeface="Noto Sans CJK KR"/>
+                <a:ea typeface="Noto Sans CJK KR"/>
+              </a:rPr>
+              <a:t>• 첫 초고가 마음에 들지 않는 것은 당신의 재능이 부족해서가 아니라 안목이 높기 때문임을 기억</a:t>
+            </a:r>
+            <a:br/>
+            <a:r>
+              <a:rPr sz="1030" b="0" i="0">
+                <a:solidFill>
+                  <a:srgbClr val="B2BAC6"/>
+                </a:solidFill>
+                <a:latin typeface="Noto Sans CJK KR"/>
+                <a:ea typeface="Noto Sans CJK KR"/>
+              </a:rPr>
+              <a:t>• 오늘 당장 주인공의 이름과 그가 처한 첫 번째 작은 위기 한 줄을 적는 것으로 시작하라</a:t>
             </a:r>
           </a:p>
         </p:txBody>
@@ -5593,7 +5673,7 @@
         </p:nvSpPr>
         <p:spPr>
           <a:xfrm>
-            <a:off x="777240" y="5907024"/>
+            <a:off x="777240" y="5934456"/>
             <a:ext cx="10634472" cy="292608"/>
           </a:xfrm>
           <a:prstGeom prst="rect">
@@ -5613,7 +5693,7 @@
               </a:lnSpc>
             </a:pPr>
             <a:r>
-              <a:rPr sz="1100" b="0" i="0">
+              <a:rPr sz="900" b="0" i="0">
                 <a:solidFill>
                   <a:srgbClr val="FBF4E4"/>
                 </a:solidFill>
@@ -5653,14 +5733,134 @@
       <p:grpSpPr/>
       <p:sp>
         <p:nvSpPr>
-          <p:cNvPr id="2" name="Rectangle 1"/>
+          <p:cNvPr id="2" name="TextBox 1"/>
+          <p:cNvSpPr txBox="1"/>
+          <p:nvPr/>
+        </p:nvSpPr>
+        <p:spPr>
+          <a:xfrm>
+            <a:off x="768096" y="329184"/>
+            <a:ext cx="10789920" cy="219760"/>
+          </a:xfrm>
+          <a:prstGeom prst="rect">
+            <a:avLst/>
+          </a:prstGeom>
+          <a:noFill/>
+        </p:spPr>
+        <p:txBody>
+          <a:bodyPr wrap="square" anchor="t" lIns="18288" rIns="18288" tIns="12801" bIns="12801">
+            <a:spAutoFit/>
+          </a:bodyPr>
+          <a:lstStyle/>
+          <a:p>
+            <a:pPr algn="l">
+              <a:lnSpc>
+                <a:spcPct val="125000"/>
+              </a:lnSpc>
+            </a:pPr>
+            <a:r>
+              <a:rPr sz="800" b="1" i="0">
+                <a:solidFill>
+                  <a:srgbClr val="C6532D"/>
+                </a:solidFill>
+                <a:latin typeface="Noto Sans CJK KR"/>
+                <a:ea typeface="Noto Sans CJK KR"/>
+              </a:rPr>
+              <a:t>01  |  FICTION ARCHITECTURE</a:t>
+            </a:r>
+          </a:p>
+        </p:txBody>
+      </p:sp>
+      <p:sp>
+        <p:nvSpPr>
+          <p:cNvPr id="3" name="TextBox 2"/>
+          <p:cNvSpPr txBox="1"/>
+          <p:nvPr/>
+        </p:nvSpPr>
+        <p:spPr>
+          <a:xfrm>
+            <a:off x="768096" y="631240"/>
+            <a:ext cx="10789920" cy="423164"/>
+          </a:xfrm>
+          <a:prstGeom prst="rect">
+            <a:avLst/>
+          </a:prstGeom>
+          <a:noFill/>
+        </p:spPr>
+        <p:txBody>
+          <a:bodyPr wrap="square" anchor="t" lIns="18288" rIns="18288" tIns="12801" bIns="12801">
+            <a:spAutoFit/>
+          </a:bodyPr>
+          <a:lstStyle/>
+          <a:p>
+            <a:pPr algn="l">
+              <a:lnSpc>
+                <a:spcPct val="125000"/>
+              </a:lnSpc>
+            </a:pPr>
+            <a:r>
+              <a:rPr sz="1700" b="1" i="0">
+                <a:solidFill>
+                  <a:srgbClr val="1A212E"/>
+                </a:solidFill>
+                <a:latin typeface="Noto Sans CJK KR"/>
+                <a:ea typeface="Noto Sans CJK KR"/>
+              </a:rPr>
+              <a:t>완성도 높은 소설은 소재·인물·플롯·문체의 4대 축으로 작동한다</a:t>
+            </a:r>
+          </a:p>
+        </p:txBody>
+      </p:sp>
+      <p:sp>
+        <p:nvSpPr>
+          <p:cNvPr id="4" name="TextBox 3"/>
+          <p:cNvSpPr txBox="1"/>
+          <p:nvPr/>
+        </p:nvSpPr>
+        <p:spPr>
+          <a:xfrm>
+            <a:off x="768096" y="1136700"/>
+            <a:ext cx="10789920" cy="247497"/>
+          </a:xfrm>
+          <a:prstGeom prst="rect">
+            <a:avLst/>
+          </a:prstGeom>
+          <a:noFill/>
+        </p:spPr>
+        <p:txBody>
+          <a:bodyPr wrap="square" anchor="t" lIns="18288" rIns="18288" tIns="12801" bIns="12801">
+            <a:spAutoFit/>
+          </a:bodyPr>
+          <a:lstStyle/>
+          <a:p>
+            <a:pPr algn="l">
+              <a:lnSpc>
+                <a:spcPct val="125000"/>
+              </a:lnSpc>
+            </a:pPr>
+            <a:r>
+              <a:rPr sz="950" b="0" i="0">
+                <a:solidFill>
+                  <a:srgbClr val="555E6C"/>
+                </a:solidFill>
+                <a:latin typeface="Noto Sans CJK KR"/>
+                <a:ea typeface="Noto Sans CJK KR"/>
+              </a:rPr>
+              <a:t>네 가지 기둥 중 하나라도 무너지면 서사의 설득력이 급격히 약화된다</a:t>
+            </a:r>
+          </a:p>
+        </p:txBody>
+      </p:sp>
+      <p:sp>
+        <p:nvSpPr>
+          <p:cNvPr id="5" name="Rectangle 4"/>
           <p:cNvSpPr/>
           <p:nvPr/>
         </p:nvSpPr>
         <p:spPr>
           <a:xfrm>
             <a:off x="594360" y="384048"/>
-            <a:ext cx="73152" cy="713232"/>
+            <a:ext cx="73152" cy="917854"/>
           </a:xfrm>
           <a:prstGeom prst="rect">
             <a:avLst/>
@@ -5697,133 +5897,13 @@
       </p:sp>
       <p:sp>
         <p:nvSpPr>
-          <p:cNvPr id="3" name="TextBox 2"/>
-          <p:cNvSpPr txBox="1"/>
-          <p:nvPr/>
-        </p:nvSpPr>
-        <p:spPr>
-          <a:xfrm>
-            <a:off x="768096" y="329184"/>
-            <a:ext cx="8229600" cy="256032"/>
-          </a:xfrm>
-          <a:prstGeom prst="rect">
-            <a:avLst/>
-          </a:prstGeom>
-          <a:noFill/>
-        </p:spPr>
-        <p:txBody>
-          <a:bodyPr wrap="square" anchor="t" lIns="18288" rIns="18288" tIns="12801" bIns="12801">
-            <a:spAutoFit/>
-          </a:bodyPr>
-          <a:lstStyle/>
-          <a:p>
-            <a:pPr algn="l">
-              <a:lnSpc>
-                <a:spcPct val="125000"/>
-              </a:lnSpc>
-            </a:pPr>
-            <a:r>
-              <a:rPr sz="1050" b="1" i="0">
-                <a:solidFill>
-                  <a:srgbClr val="C6532D"/>
-                </a:solidFill>
-                <a:latin typeface="Noto Sans CJK KR"/>
-                <a:ea typeface="Noto Sans CJK KR"/>
-              </a:rPr>
-              <a:t>01  |  FICTION ARCHITECTURE</a:t>
-            </a:r>
-          </a:p>
-        </p:txBody>
-      </p:sp>
-      <p:sp>
-        <p:nvSpPr>
-          <p:cNvPr id="4" name="TextBox 3"/>
-          <p:cNvSpPr txBox="1"/>
-          <p:nvPr/>
-        </p:nvSpPr>
-        <p:spPr>
-          <a:xfrm>
-            <a:off x="768096" y="548640"/>
-            <a:ext cx="10789920" cy="402336"/>
-          </a:xfrm>
-          <a:prstGeom prst="rect">
-            <a:avLst/>
-          </a:prstGeom>
-          <a:noFill/>
-        </p:spPr>
-        <p:txBody>
-          <a:bodyPr wrap="square" anchor="t" lIns="18288" rIns="18288" tIns="12801" bIns="12801">
-            <a:spAutoFit/>
-          </a:bodyPr>
-          <a:lstStyle/>
-          <a:p>
-            <a:pPr algn="l">
-              <a:lnSpc>
-                <a:spcPct val="125000"/>
-              </a:lnSpc>
-            </a:pPr>
-            <a:r>
-              <a:rPr sz="2150" b="1" i="0">
-                <a:solidFill>
-                  <a:srgbClr val="1A212E"/>
-                </a:solidFill>
-                <a:latin typeface="Noto Sans CJK KR"/>
-                <a:ea typeface="Noto Sans CJK KR"/>
-              </a:rPr>
-              <a:t>완성도 높은 소설은 소재·인물·플롯·문체의 4대 축으로 작동한다</a:t>
-            </a:r>
-          </a:p>
-        </p:txBody>
-      </p:sp>
-      <p:sp>
-        <p:nvSpPr>
-          <p:cNvPr id="5" name="TextBox 4"/>
-          <p:cNvSpPr txBox="1"/>
-          <p:nvPr/>
-        </p:nvSpPr>
-        <p:spPr>
-          <a:xfrm>
-            <a:off x="768096" y="923544"/>
-            <a:ext cx="10789920" cy="292608"/>
-          </a:xfrm>
-          <a:prstGeom prst="rect">
-            <a:avLst/>
-          </a:prstGeom>
-          <a:noFill/>
-        </p:spPr>
-        <p:txBody>
-          <a:bodyPr wrap="square" anchor="t" lIns="18288" rIns="18288" tIns="12801" bIns="12801">
-            <a:spAutoFit/>
-          </a:bodyPr>
-          <a:lstStyle/>
-          <a:p>
-            <a:pPr algn="l">
-              <a:lnSpc>
-                <a:spcPct val="125000"/>
-              </a:lnSpc>
-            </a:pPr>
-            <a:r>
-              <a:rPr sz="1200" b="0" i="0">
-                <a:solidFill>
-                  <a:srgbClr val="555E6C"/>
-                </a:solidFill>
-                <a:latin typeface="Noto Sans CJK KR"/>
-                <a:ea typeface="Noto Sans CJK KR"/>
-              </a:rPr>
-              <a:t>네 가지 기둥 중 하나라도 무너지면 서사의 설득력이 급격히 약화된다</a:t>
-            </a:r>
-          </a:p>
-        </p:txBody>
-      </p:sp>
-      <p:sp>
-        <p:nvSpPr>
           <p:cNvPr id="6" name="Rectangle 5"/>
           <p:cNvSpPr/>
           <p:nvPr/>
         </p:nvSpPr>
         <p:spPr>
           <a:xfrm>
-            <a:off x="594360" y="1261872"/>
+            <a:off x="594360" y="1457350"/>
             <a:ext cx="11000232" cy="13716"/>
           </a:xfrm>
           <a:prstGeom prst="rect">
@@ -6189,7 +6269,7 @@
               </a:lnSpc>
             </a:pPr>
             <a:r>
-              <a:rPr sz="1550" b="1" i="0">
+              <a:rPr sz="1250" b="1" i="0">
                 <a:solidFill>
                   <a:srgbClr val="1A212E"/>
                 </a:solidFill>
@@ -6209,7 +6289,7 @@
         </p:nvSpPr>
         <p:spPr>
           <a:xfrm>
-            <a:off x="1453895" y="1874520"/>
+            <a:off x="1453895" y="1911095"/>
             <a:ext cx="4389120" cy="237744"/>
           </a:xfrm>
           <a:prstGeom prst="rect">
@@ -6229,7 +6309,7 @@
               </a:lnSpc>
             </a:pPr>
             <a:r>
-              <a:rPr sz="1080" b="1" i="0">
+              <a:rPr sz="930" b="1" i="0">
                 <a:solidFill>
                   <a:srgbClr val="C6532D"/>
                 </a:solidFill>
@@ -6276,9 +6356,29 @@
                 <a:latin typeface="Noto Sans CJK KR"/>
                 <a:ea typeface="Noto Sans CJK KR"/>
               </a:rPr>
-              <a:t>• 익숙한 일상 속 낯선 균열을 포착해 독자의 질문을 유도
-• 단순한 설정 나열이 아닌 주인공이 겪을 윤리적·현실적 딜레마 내포
-• 한 문장의 로그라인으로 압축될 때 서사의 방향성이 흔들리지 않음</a:t>
+              <a:t>• 익숙한 일상 속 낯선 균열을 포착해 독자의 질문을 유도</a:t>
+            </a:r>
+            <a:br/>
+            <a:r>
+              <a:rPr sz="1080" b="0" i="0">
+                <a:solidFill>
+                  <a:srgbClr val="555E6C"/>
+                </a:solidFill>
+                <a:latin typeface="Noto Sans CJK KR"/>
+                <a:ea typeface="Noto Sans CJK KR"/>
+              </a:rPr>
+              <a:t>• 단순한 설정 나열이 아닌 주인공이 겪을 윤리적·현실적 딜레마 내포</a:t>
+            </a:r>
+            <a:br/>
+            <a:r>
+              <a:rPr sz="1080" b="0" i="0">
+                <a:solidFill>
+                  <a:srgbClr val="555E6C"/>
+                </a:solidFill>
+                <a:latin typeface="Noto Sans CJK KR"/>
+                <a:ea typeface="Noto Sans CJK KR"/>
+              </a:rPr>
+              <a:t>• 한 문장의 로그라인으로 압축될 때 서사의 방향성이 흔들리지 않음</a:t>
             </a:r>
           </a:p>
         </p:txBody>
@@ -6575,7 +6675,7 @@
               </a:lnSpc>
             </a:pPr>
             <a:r>
-              <a:rPr sz="1550" b="1" i="0">
+              <a:rPr sz="1250" b="1" i="0">
                 <a:solidFill>
                   <a:srgbClr val="1A212E"/>
                 </a:solidFill>
@@ -6595,7 +6695,7 @@
         </p:nvSpPr>
         <p:spPr>
           <a:xfrm>
-            <a:off x="7059168" y="1874520"/>
+            <a:off x="7059168" y="1911095"/>
             <a:ext cx="4389120" cy="237744"/>
           </a:xfrm>
           <a:prstGeom prst="rect">
@@ -6615,7 +6715,7 @@
               </a:lnSpc>
             </a:pPr>
             <a:r>
-              <a:rPr sz="1080" b="1" i="0">
+              <a:rPr sz="930" b="1" i="0">
                 <a:solidFill>
                   <a:srgbClr val="316B69"/>
                 </a:solidFill>
@@ -6662,9 +6762,29 @@
                 <a:latin typeface="Noto Sans CJK KR"/>
                 <a:ea typeface="Noto Sans CJK KR"/>
               </a:rPr>
-              <a:t>• 완벽한 영웅보다 결함과 모순을 지닌 인물에게 독자가 감정이입
-• 외면적 목표를 추구하는 과정에서 내면의 거짓 믿음이 깨지는 성장
-• 주인공의 약점을 정확히 파고드는 대립자(Antagonist)와의 상호작용</a:t>
+              <a:t>• 완벽한 영웅보다 결함과 모순을 지닌 인물에게 독자가 감정이입</a:t>
+            </a:r>
+            <a:br/>
+            <a:r>
+              <a:rPr sz="1080" b="0" i="0">
+                <a:solidFill>
+                  <a:srgbClr val="555E6C"/>
+                </a:solidFill>
+                <a:latin typeface="Noto Sans CJK KR"/>
+                <a:ea typeface="Noto Sans CJK KR"/>
+              </a:rPr>
+              <a:t>• 외면적 목표를 추구하는 과정에서 내면의 거짓 믿음이 깨지는 성장</a:t>
+            </a:r>
+            <a:br/>
+            <a:r>
+              <a:rPr sz="1080" b="0" i="0">
+                <a:solidFill>
+                  <a:srgbClr val="555E6C"/>
+                </a:solidFill>
+                <a:latin typeface="Noto Sans CJK KR"/>
+                <a:ea typeface="Noto Sans CJK KR"/>
+              </a:rPr>
+              <a:t>• 주인공의 약점을 정확히 파고드는 대립자(Antagonist)와의 상호작용</a:t>
             </a:r>
           </a:p>
         </p:txBody>
@@ -6961,7 +7081,7 @@
               </a:lnSpc>
             </a:pPr>
             <a:r>
-              <a:rPr sz="1550" b="1" i="0">
+              <a:rPr sz="1250" b="1" i="0">
                 <a:solidFill>
                   <a:srgbClr val="1A212E"/>
                 </a:solidFill>
@@ -6981,7 +7101,7 @@
         </p:nvSpPr>
         <p:spPr>
           <a:xfrm>
-            <a:off x="1453895" y="4087368"/>
+            <a:off x="1453895" y="4123944"/>
             <a:ext cx="4389120" cy="237744"/>
           </a:xfrm>
           <a:prstGeom prst="rect">
@@ -7001,7 +7121,7 @@
               </a:lnSpc>
             </a:pPr>
             <a:r>
-              <a:rPr sz="1080" b="1" i="0">
+              <a:rPr sz="930" b="1" i="0">
                 <a:solidFill>
                   <a:srgbClr val="D19830"/>
                 </a:solidFill>
@@ -7048,9 +7168,29 @@
                 <a:latin typeface="Noto Sans CJK KR"/>
                 <a:ea typeface="Noto Sans CJK KR"/>
               </a:rPr>
-              <a:t>• 우연에 기댄 해결(데우스 엑스 마키나)을 배제하고 인물의 선택으로 전개
-• 점진적으로 판돈(Stakes)을 높여 주인공을 퇴로 없는 막다른 골목으로 압박
-• 3막 구조의 5대 전환점을 통해 긴장과 이완의 서사적 리듬을 설계</a:t>
+              <a:t>• 우연에 기댄 해결(데우스 엑스 마키나)을 배제하고 인물의 선택으로 전개</a:t>
+            </a:r>
+            <a:br/>
+            <a:r>
+              <a:rPr sz="1080" b="0" i="0">
+                <a:solidFill>
+                  <a:srgbClr val="555E6C"/>
+                </a:solidFill>
+                <a:latin typeface="Noto Sans CJK KR"/>
+                <a:ea typeface="Noto Sans CJK KR"/>
+              </a:rPr>
+              <a:t>• 점진적으로 판돈(Stakes)을 높여 주인공을 퇴로 없는 막다른 골목으로 압박</a:t>
+            </a:r>
+            <a:br/>
+            <a:r>
+              <a:rPr sz="1080" b="0" i="0">
+                <a:solidFill>
+                  <a:srgbClr val="555E6C"/>
+                </a:solidFill>
+                <a:latin typeface="Noto Sans CJK KR"/>
+                <a:ea typeface="Noto Sans CJK KR"/>
+              </a:rPr>
+              <a:t>• 3막 구조의 5대 전환점을 통해 긴장과 이완의 서사적 리듬을 설계</a:t>
             </a:r>
           </a:p>
         </p:txBody>
@@ -7347,7 +7487,7 @@
               </a:lnSpc>
             </a:pPr>
             <a:r>
-              <a:rPr sz="1550" b="1" i="0">
+              <a:rPr sz="1250" b="1" i="0">
                 <a:solidFill>
                   <a:srgbClr val="1A212E"/>
                 </a:solidFill>
@@ -7367,7 +7507,7 @@
         </p:nvSpPr>
         <p:spPr>
           <a:xfrm>
-            <a:off x="7059168" y="4087368"/>
+            <a:off x="7059168" y="4123944"/>
             <a:ext cx="4389120" cy="237744"/>
           </a:xfrm>
           <a:prstGeom prst="rect">
@@ -7387,7 +7527,7 @@
               </a:lnSpc>
             </a:pPr>
             <a:r>
-              <a:rPr sz="1080" b="1" i="0">
+              <a:rPr sz="930" b="1" i="0">
                 <a:solidFill>
                   <a:srgbClr val="8E3542"/>
                 </a:solidFill>
@@ -7434,9 +7574,29 @@
                 <a:latin typeface="Noto Sans CJK KR"/>
                 <a:ea typeface="Noto Sans CJK KR"/>
               </a:rPr>
-              <a:t>• 오감의 디테일과 구체적 행동으로 인물의 감정선을 시각화
-• 인물의 성격과 관계의 권력 구도가 묻어나는 입체적인 대사 설계
-• 불필요한 수식어를 덜어내고 장면의 속도에 맞춘 문장 호흡 조율</a:t>
+              <a:t>• 오감의 디테일과 구체적 행동으로 인물의 감정선을 시각화</a:t>
+            </a:r>
+            <a:br/>
+            <a:r>
+              <a:rPr sz="1080" b="0" i="0">
+                <a:solidFill>
+                  <a:srgbClr val="555E6C"/>
+                </a:solidFill>
+                <a:latin typeface="Noto Sans CJK KR"/>
+                <a:ea typeface="Noto Sans CJK KR"/>
+              </a:rPr>
+              <a:t>• 인물의 성격과 관계의 권력 구도가 묻어나는 입체적인 대사 설계</a:t>
+            </a:r>
+            <a:br/>
+            <a:r>
+              <a:rPr sz="1080" b="0" i="0">
+                <a:solidFill>
+                  <a:srgbClr val="555E6C"/>
+                </a:solidFill>
+                <a:latin typeface="Noto Sans CJK KR"/>
+                <a:ea typeface="Noto Sans CJK KR"/>
+              </a:rPr>
+              <a:t>• 불필요한 수식어를 덜어내고 장면의 속도에 맞춘 문장 호흡 조율</a:t>
             </a:r>
           </a:p>
         </p:txBody>
@@ -7641,14 +7801,134 @@
       <p:grpSpPr/>
       <p:sp>
         <p:nvSpPr>
-          <p:cNvPr id="2" name="Rectangle 1"/>
+          <p:cNvPr id="2" name="TextBox 1"/>
+          <p:cNvSpPr txBox="1"/>
+          <p:nvPr/>
+        </p:nvSpPr>
+        <p:spPr>
+          <a:xfrm>
+            <a:off x="768096" y="329184"/>
+            <a:ext cx="10789920" cy="219760"/>
+          </a:xfrm>
+          <a:prstGeom prst="rect">
+            <a:avLst/>
+          </a:prstGeom>
+          <a:noFill/>
+        </p:spPr>
+        <p:txBody>
+          <a:bodyPr wrap="square" anchor="t" lIns="18288" rIns="18288" tIns="12801" bIns="12801">
+            <a:spAutoFit/>
+          </a:bodyPr>
+          <a:lstStyle/>
+          <a:p>
+            <a:pPr algn="l">
+              <a:lnSpc>
+                <a:spcPct val="125000"/>
+              </a:lnSpc>
+            </a:pPr>
+            <a:r>
+              <a:rPr sz="800" b="1" i="0">
+                <a:solidFill>
+                  <a:srgbClr val="C6532D"/>
+                </a:solidFill>
+                <a:latin typeface="Noto Sans CJK KR"/>
+                <a:ea typeface="Noto Sans CJK KR"/>
+              </a:rPr>
+              <a:t>02  |  IDEA &amp; LOGLINE DESIGN</a:t>
+            </a:r>
+          </a:p>
+        </p:txBody>
+      </p:sp>
+      <p:sp>
+        <p:nvSpPr>
+          <p:cNvPr id="3" name="TextBox 2"/>
+          <p:cNvSpPr txBox="1"/>
+          <p:nvPr/>
+        </p:nvSpPr>
+        <p:spPr>
+          <a:xfrm>
+            <a:off x="768096" y="631240"/>
+            <a:ext cx="10789920" cy="423164"/>
+          </a:xfrm>
+          <a:prstGeom prst="rect">
+            <a:avLst/>
+          </a:prstGeom>
+          <a:noFill/>
+        </p:spPr>
+        <p:txBody>
+          <a:bodyPr wrap="square" anchor="t" lIns="18288" rIns="18288" tIns="12801" bIns="12801">
+            <a:spAutoFit/>
+          </a:bodyPr>
+          <a:lstStyle/>
+          <a:p>
+            <a:pPr algn="l">
+              <a:lnSpc>
+                <a:spcPct val="125000"/>
+              </a:lnSpc>
+            </a:pPr>
+            <a:r>
+              <a:rPr sz="1700" b="1" i="0">
+                <a:solidFill>
+                  <a:srgbClr val="1A212E"/>
+                </a:solidFill>
+                <a:latin typeface="Noto Sans CJK KR"/>
+                <a:ea typeface="Noto Sans CJK KR"/>
+              </a:rPr>
+              <a:t>막연한 소재를 한 문장의 로그라인(Logline)으로 압축해 서사의 나침반을 세운다</a:t>
+            </a:r>
+          </a:p>
+        </p:txBody>
+      </p:sp>
+      <p:sp>
+        <p:nvSpPr>
+          <p:cNvPr id="4" name="TextBox 3"/>
+          <p:cNvSpPr txBox="1"/>
+          <p:nvPr/>
+        </p:nvSpPr>
+        <p:spPr>
+          <a:xfrm>
+            <a:off x="768096" y="1136700"/>
+            <a:ext cx="10789920" cy="247497"/>
+          </a:xfrm>
+          <a:prstGeom prst="rect">
+            <a:avLst/>
+          </a:prstGeom>
+          <a:noFill/>
+        </p:spPr>
+        <p:txBody>
+          <a:bodyPr wrap="square" anchor="t" lIns="18288" rIns="18288" tIns="12801" bIns="12801">
+            <a:spAutoFit/>
+          </a:bodyPr>
+          <a:lstStyle/>
+          <a:p>
+            <a:pPr algn="l">
+              <a:lnSpc>
+                <a:spcPct val="125000"/>
+              </a:lnSpc>
+            </a:pPr>
+            <a:r>
+              <a:rPr sz="950" b="0" i="0">
+                <a:solidFill>
+                  <a:srgbClr val="555E6C"/>
+                </a:solidFill>
+                <a:latin typeface="Noto Sans CJK KR"/>
+                <a:ea typeface="Noto Sans CJK KR"/>
+              </a:rPr>
+              <a:t>좋은 로그라인은 주인공, 촉발 사건, 핵심 목표, 그리고 실패 시 치러야 할 대가(Stakes)를 명확히 보여준다</a:t>
+            </a:r>
+          </a:p>
+        </p:txBody>
+      </p:sp>
+      <p:sp>
+        <p:nvSpPr>
+          <p:cNvPr id="5" name="Rectangle 4"/>
           <p:cNvSpPr/>
           <p:nvPr/>
         </p:nvSpPr>
         <p:spPr>
           <a:xfrm>
             <a:off x="594360" y="384048"/>
-            <a:ext cx="73152" cy="713232"/>
+            <a:ext cx="73152" cy="917854"/>
           </a:xfrm>
           <a:prstGeom prst="rect">
             <a:avLst/>
@@ -7685,133 +7965,13 @@
       </p:sp>
       <p:sp>
         <p:nvSpPr>
-          <p:cNvPr id="3" name="TextBox 2"/>
-          <p:cNvSpPr txBox="1"/>
-          <p:nvPr/>
-        </p:nvSpPr>
-        <p:spPr>
-          <a:xfrm>
-            <a:off x="768096" y="329184"/>
-            <a:ext cx="8229600" cy="256032"/>
-          </a:xfrm>
-          <a:prstGeom prst="rect">
-            <a:avLst/>
-          </a:prstGeom>
-          <a:noFill/>
-        </p:spPr>
-        <p:txBody>
-          <a:bodyPr wrap="square" anchor="t" lIns="18288" rIns="18288" tIns="12801" bIns="12801">
-            <a:spAutoFit/>
-          </a:bodyPr>
-          <a:lstStyle/>
-          <a:p>
-            <a:pPr algn="l">
-              <a:lnSpc>
-                <a:spcPct val="125000"/>
-              </a:lnSpc>
-            </a:pPr>
-            <a:r>
-              <a:rPr sz="1050" b="1" i="0">
-                <a:solidFill>
-                  <a:srgbClr val="C6532D"/>
-                </a:solidFill>
-                <a:latin typeface="Noto Sans CJK KR"/>
-                <a:ea typeface="Noto Sans CJK KR"/>
-              </a:rPr>
-              <a:t>02  |  IDEA &amp; LOGLINE DESIGN</a:t>
-            </a:r>
-          </a:p>
-        </p:txBody>
-      </p:sp>
-      <p:sp>
-        <p:nvSpPr>
-          <p:cNvPr id="4" name="TextBox 3"/>
-          <p:cNvSpPr txBox="1"/>
-          <p:nvPr/>
-        </p:nvSpPr>
-        <p:spPr>
-          <a:xfrm>
-            <a:off x="768096" y="548640"/>
-            <a:ext cx="10789920" cy="402336"/>
-          </a:xfrm>
-          <a:prstGeom prst="rect">
-            <a:avLst/>
-          </a:prstGeom>
-          <a:noFill/>
-        </p:spPr>
-        <p:txBody>
-          <a:bodyPr wrap="square" anchor="t" lIns="18288" rIns="18288" tIns="12801" bIns="12801">
-            <a:spAutoFit/>
-          </a:bodyPr>
-          <a:lstStyle/>
-          <a:p>
-            <a:pPr algn="l">
-              <a:lnSpc>
-                <a:spcPct val="125000"/>
-              </a:lnSpc>
-            </a:pPr>
-            <a:r>
-              <a:rPr sz="2150" b="1" i="0">
-                <a:solidFill>
-                  <a:srgbClr val="1A212E"/>
-                </a:solidFill>
-                <a:latin typeface="Noto Sans CJK KR"/>
-                <a:ea typeface="Noto Sans CJK KR"/>
-              </a:rPr>
-              <a:t>막연한 소재를 한 문장의 로그라인(Logline)으로 압축해 서사의 나침반을 세운다</a:t>
-            </a:r>
-          </a:p>
-        </p:txBody>
-      </p:sp>
-      <p:sp>
-        <p:nvSpPr>
-          <p:cNvPr id="5" name="TextBox 4"/>
-          <p:cNvSpPr txBox="1"/>
-          <p:nvPr/>
-        </p:nvSpPr>
-        <p:spPr>
-          <a:xfrm>
-            <a:off x="768096" y="923544"/>
-            <a:ext cx="10789920" cy="292608"/>
-          </a:xfrm>
-          <a:prstGeom prst="rect">
-            <a:avLst/>
-          </a:prstGeom>
-          <a:noFill/>
-        </p:spPr>
-        <p:txBody>
-          <a:bodyPr wrap="square" anchor="t" lIns="18288" rIns="18288" tIns="12801" bIns="12801">
-            <a:spAutoFit/>
-          </a:bodyPr>
-          <a:lstStyle/>
-          <a:p>
-            <a:pPr algn="l">
-              <a:lnSpc>
-                <a:spcPct val="125000"/>
-              </a:lnSpc>
-            </a:pPr>
-            <a:r>
-              <a:rPr sz="1200" b="0" i="0">
-                <a:solidFill>
-                  <a:srgbClr val="555E6C"/>
-                </a:solidFill>
-                <a:latin typeface="Noto Sans CJK KR"/>
-                <a:ea typeface="Noto Sans CJK KR"/>
-              </a:rPr>
-              <a:t>좋은 로그라인은 주인공, 촉발 사건, 핵심 목표, 그리고 실패 시 치러야 할 대가(Stakes)를 명확히 보여준다</a:t>
-            </a:r>
-          </a:p>
-        </p:txBody>
-      </p:sp>
-      <p:sp>
-        <p:nvSpPr>
           <p:cNvPr id="6" name="Rectangle 5"/>
           <p:cNvSpPr/>
           <p:nvPr/>
         </p:nvSpPr>
         <p:spPr>
           <a:xfrm>
-            <a:off x="594360" y="1261872"/>
+            <a:off x="594360" y="1457350"/>
             <a:ext cx="11000232" cy="13716"/>
           </a:xfrm>
           <a:prstGeom prst="rect">
@@ -8047,7 +8207,7 @@
               </a:lnSpc>
             </a:pPr>
             <a:r>
-              <a:rPr sz="1150" b="1" i="0">
+              <a:rPr sz="1050" b="1" i="0">
                 <a:solidFill>
                   <a:srgbClr val="C6532D"/>
                 </a:solidFill>
@@ -8215,7 +8375,7 @@
               </a:lnSpc>
             </a:pPr>
             <a:r>
-              <a:rPr sz="1800" b="1" i="0">
+              <a:rPr sz="1250" b="1" i="0">
                 <a:solidFill>
                   <a:srgbClr val="C6532D"/>
                 </a:solidFill>
@@ -8383,7 +8543,7 @@
               </a:lnSpc>
             </a:pPr>
             <a:r>
-              <a:rPr sz="1800" b="1" i="0">
+              <a:rPr sz="1250" b="1" i="0">
                 <a:solidFill>
                   <a:srgbClr val="C6532D"/>
                 </a:solidFill>
@@ -8551,7 +8711,7 @@
               </a:lnSpc>
             </a:pPr>
             <a:r>
-              <a:rPr sz="1800" b="1" i="0">
+              <a:rPr sz="1250" b="1" i="0">
                 <a:solidFill>
                   <a:srgbClr val="C6532D"/>
                 </a:solidFill>
@@ -8719,7 +8879,7 @@
               </a:lnSpc>
             </a:pPr>
             <a:r>
-              <a:rPr sz="1350" b="1" i="0">
+              <a:rPr sz="1200" b="1" i="0">
                 <a:solidFill>
                   <a:srgbClr val="1A212E"/>
                 </a:solidFill>
@@ -8807,7 +8967,7 @@
               </a:lnSpc>
             </a:pPr>
             <a:r>
-              <a:rPr sz="980" b="1" i="0">
+              <a:rPr sz="880" b="1" i="0">
                 <a:solidFill>
                   <a:srgbClr val="878E99"/>
                 </a:solidFill>
@@ -8887,7 +9047,7 @@
               </a:lnSpc>
             </a:pPr>
             <a:r>
-              <a:rPr sz="2000" b="1" i="0">
+              <a:rPr sz="1400" b="1" i="0">
                 <a:solidFill>
                   <a:srgbClr val="C6532D"/>
                 </a:solidFill>
@@ -9019,7 +9179,7 @@
               </a:lnSpc>
             </a:pPr>
             <a:r>
-              <a:rPr sz="980" b="1" i="0">
+              <a:rPr sz="880" b="1" i="0">
                 <a:solidFill>
                   <a:srgbClr val="C6532D"/>
                 </a:solidFill>
@@ -9040,7 +9200,7 @@
         <p:spPr>
           <a:xfrm>
             <a:off x="8915400" y="3401568"/>
-            <a:ext cx="2542032" cy="219456"/>
+            <a:ext cx="2542032" cy="246888"/>
           </a:xfrm>
           <a:prstGeom prst="roundRect">
             <a:avLst>
@@ -9086,7 +9246,7 @@
         <p:spPr>
           <a:xfrm>
             <a:off x="8915400" y="3401568"/>
-            <a:ext cx="2542032" cy="219456"/>
+            <a:ext cx="2542032" cy="246888"/>
           </a:xfrm>
           <a:prstGeom prst="rect">
             <a:avLst/>
@@ -9101,7 +9261,7 @@
           <a:p>
             <a:pPr algn="ctr">
               <a:lnSpc>
-                <a:spcPct val="125000"/>
+                <a:spcPct val="100000"/>
               </a:lnSpc>
             </a:pPr>
             <a:r>
@@ -9233,7 +9393,7 @@
               </a:lnSpc>
             </a:pPr>
             <a:r>
-              <a:rPr sz="980" b="1" i="0">
+              <a:rPr sz="880" b="1" i="0">
                 <a:solidFill>
                   <a:srgbClr val="878E99"/>
                 </a:solidFill>
@@ -9313,7 +9473,7 @@
               </a:lnSpc>
             </a:pPr>
             <a:r>
-              <a:rPr sz="2000" b="1" i="0">
+              <a:rPr sz="1400" b="1" i="0">
                 <a:solidFill>
                   <a:srgbClr val="C6532D"/>
                 </a:solidFill>
@@ -9445,7 +9605,7 @@
               </a:lnSpc>
             </a:pPr>
             <a:r>
-              <a:rPr sz="980" b="1" i="0">
+              <a:rPr sz="880" b="1" i="0">
                 <a:solidFill>
                   <a:srgbClr val="C6532D"/>
                 </a:solidFill>
@@ -9466,7 +9626,7 @@
         <p:spPr>
           <a:xfrm>
             <a:off x="8915400" y="4389120"/>
-            <a:ext cx="2542032" cy="219456"/>
+            <a:ext cx="2542032" cy="246888"/>
           </a:xfrm>
           <a:prstGeom prst="roundRect">
             <a:avLst>
@@ -9512,7 +9672,7 @@
         <p:spPr>
           <a:xfrm>
             <a:off x="8915400" y="4389120"/>
-            <a:ext cx="2542032" cy="219456"/>
+            <a:ext cx="2542032" cy="246888"/>
           </a:xfrm>
           <a:prstGeom prst="rect">
             <a:avLst/>
@@ -9527,7 +9687,7 @@
           <a:p>
             <a:pPr algn="ctr">
               <a:lnSpc>
-                <a:spcPct val="125000"/>
+                <a:spcPct val="100000"/>
               </a:lnSpc>
             </a:pPr>
             <a:r>
@@ -9659,7 +9819,7 @@
               </a:lnSpc>
             </a:pPr>
             <a:r>
-              <a:rPr sz="980" b="1" i="0">
+              <a:rPr sz="880" b="1" i="0">
                 <a:solidFill>
                   <a:srgbClr val="878E99"/>
                 </a:solidFill>
@@ -9739,7 +9899,7 @@
               </a:lnSpc>
             </a:pPr>
             <a:r>
-              <a:rPr sz="2000" b="1" i="0">
+              <a:rPr sz="1400" b="1" i="0">
                 <a:solidFill>
                   <a:srgbClr val="C6532D"/>
                 </a:solidFill>
@@ -9871,7 +10031,7 @@
               </a:lnSpc>
             </a:pPr>
             <a:r>
-              <a:rPr sz="980" b="1" i="0">
+              <a:rPr sz="880" b="1" i="0">
                 <a:solidFill>
                   <a:srgbClr val="C6532D"/>
                 </a:solidFill>
@@ -9892,7 +10052,7 @@
         <p:spPr>
           <a:xfrm>
             <a:off x="8915400" y="5376672"/>
-            <a:ext cx="2542032" cy="219456"/>
+            <a:ext cx="2542032" cy="246888"/>
           </a:xfrm>
           <a:prstGeom prst="roundRect">
             <a:avLst>
@@ -9938,7 +10098,7 @@
         <p:spPr>
           <a:xfrm>
             <a:off x="8915400" y="5376672"/>
-            <a:ext cx="2542032" cy="219456"/>
+            <a:ext cx="2542032" cy="246888"/>
           </a:xfrm>
           <a:prstGeom prst="rect">
             <a:avLst/>
@@ -9953,7 +10113,7 @@
           <a:p>
             <a:pPr algn="ctr">
               <a:lnSpc>
-                <a:spcPct val="125000"/>
+                <a:spcPct val="100000"/>
               </a:lnSpc>
             </a:pPr>
             <a:r>
@@ -10037,14 +10197,134 @@
       <p:grpSpPr/>
       <p:sp>
         <p:nvSpPr>
-          <p:cNvPr id="2" name="Rectangle 1"/>
+          <p:cNvPr id="2" name="TextBox 1"/>
+          <p:cNvSpPr txBox="1"/>
+          <p:nvPr/>
+        </p:nvSpPr>
+        <p:spPr>
+          <a:xfrm>
+            <a:off x="768096" y="329184"/>
+            <a:ext cx="10789920" cy="219760"/>
+          </a:xfrm>
+          <a:prstGeom prst="rect">
+            <a:avLst/>
+          </a:prstGeom>
+          <a:noFill/>
+        </p:spPr>
+        <p:txBody>
+          <a:bodyPr wrap="square" anchor="t" lIns="18288" rIns="18288" tIns="12801" bIns="12801">
+            <a:spAutoFit/>
+          </a:bodyPr>
+          <a:lstStyle/>
+          <a:p>
+            <a:pPr algn="l">
+              <a:lnSpc>
+                <a:spcPct val="125000"/>
+              </a:lnSpc>
+            </a:pPr>
+            <a:r>
+              <a:rPr sz="800" b="1" i="0">
+                <a:solidFill>
+                  <a:srgbClr val="C6532D"/>
+                </a:solidFill>
+                <a:latin typeface="Noto Sans CJK KR"/>
+                <a:ea typeface="Noto Sans CJK KR"/>
+              </a:rPr>
+              <a:t>03  |  CHARACTER PSYCHOLOGY</a:t>
+            </a:r>
+          </a:p>
+        </p:txBody>
+      </p:sp>
+      <p:sp>
+        <p:nvSpPr>
+          <p:cNvPr id="3" name="TextBox 2"/>
+          <p:cNvSpPr txBox="1"/>
+          <p:nvPr/>
+        </p:nvSpPr>
+        <p:spPr>
+          <a:xfrm>
+            <a:off x="768096" y="631240"/>
+            <a:ext cx="10789920" cy="423164"/>
+          </a:xfrm>
+          <a:prstGeom prst="rect">
+            <a:avLst/>
+          </a:prstGeom>
+          <a:noFill/>
+        </p:spPr>
+        <p:txBody>
+          <a:bodyPr wrap="square" anchor="t" lIns="18288" rIns="18288" tIns="12801" bIns="12801">
+            <a:spAutoFit/>
+          </a:bodyPr>
+          <a:lstStyle/>
+          <a:p>
+            <a:pPr algn="l">
+              <a:lnSpc>
+                <a:spcPct val="125000"/>
+              </a:lnSpc>
+            </a:pPr>
+            <a:r>
+              <a:rPr sz="1700" b="1" i="0">
+                <a:solidFill>
+                  <a:srgbClr val="1A212E"/>
+                </a:solidFill>
+                <a:latin typeface="Noto Sans CJK KR"/>
+                <a:ea typeface="Noto Sans CJK KR"/>
+              </a:rPr>
+              <a:t>독자가 사랑하는 인물은 외면적 목표(Want)와 내면적 결핍(Need)의 간극에서 탄생한다</a:t>
+            </a:r>
+          </a:p>
+        </p:txBody>
+      </p:sp>
+      <p:sp>
+        <p:nvSpPr>
+          <p:cNvPr id="4" name="TextBox 3"/>
+          <p:cNvSpPr txBox="1"/>
+          <p:nvPr/>
+        </p:nvSpPr>
+        <p:spPr>
+          <a:xfrm>
+            <a:off x="768096" y="1136700"/>
+            <a:ext cx="10789920" cy="247497"/>
+          </a:xfrm>
+          <a:prstGeom prst="rect">
+            <a:avLst/>
+          </a:prstGeom>
+          <a:noFill/>
+        </p:spPr>
+        <p:txBody>
+          <a:bodyPr wrap="square" anchor="t" lIns="18288" rIns="18288" tIns="12801" bIns="12801">
+            <a:spAutoFit/>
+          </a:bodyPr>
+          <a:lstStyle/>
+          <a:p>
+            <a:pPr algn="l">
+              <a:lnSpc>
+                <a:spcPct val="125000"/>
+              </a:lnSpc>
+            </a:pPr>
+            <a:r>
+              <a:rPr sz="950" b="0" i="0">
+                <a:solidFill>
+                  <a:srgbClr val="555E6C"/>
+                </a:solidFill>
+                <a:latin typeface="Noto Sans CJK KR"/>
+                <a:ea typeface="Noto Sans CJK KR"/>
+              </a:rPr>
+              <a:t>인물의 프로필을 나열하는 대신, 과거의 상처(Ghost)가 만든 거짓 믿음(Lie)과 행동 동기를 설계하라</a:t>
+            </a:r>
+          </a:p>
+        </p:txBody>
+      </p:sp>
+      <p:sp>
+        <p:nvSpPr>
+          <p:cNvPr id="5" name="Rectangle 4"/>
           <p:cNvSpPr/>
           <p:nvPr/>
         </p:nvSpPr>
         <p:spPr>
           <a:xfrm>
             <a:off x="594360" y="384048"/>
-            <a:ext cx="73152" cy="713232"/>
+            <a:ext cx="73152" cy="917854"/>
           </a:xfrm>
           <a:prstGeom prst="rect">
             <a:avLst/>
@@ -10081,133 +10361,13 @@
       </p:sp>
       <p:sp>
         <p:nvSpPr>
-          <p:cNvPr id="3" name="TextBox 2"/>
-          <p:cNvSpPr txBox="1"/>
-          <p:nvPr/>
-        </p:nvSpPr>
-        <p:spPr>
-          <a:xfrm>
-            <a:off x="768096" y="329184"/>
-            <a:ext cx="8229600" cy="256032"/>
-          </a:xfrm>
-          <a:prstGeom prst="rect">
-            <a:avLst/>
-          </a:prstGeom>
-          <a:noFill/>
-        </p:spPr>
-        <p:txBody>
-          <a:bodyPr wrap="square" anchor="t" lIns="18288" rIns="18288" tIns="12801" bIns="12801">
-            <a:spAutoFit/>
-          </a:bodyPr>
-          <a:lstStyle/>
-          <a:p>
-            <a:pPr algn="l">
-              <a:lnSpc>
-                <a:spcPct val="125000"/>
-              </a:lnSpc>
-            </a:pPr>
-            <a:r>
-              <a:rPr sz="1050" b="1" i="0">
-                <a:solidFill>
-                  <a:srgbClr val="C6532D"/>
-                </a:solidFill>
-                <a:latin typeface="Noto Sans CJK KR"/>
-                <a:ea typeface="Noto Sans CJK KR"/>
-              </a:rPr>
-              <a:t>03  |  CHARACTER PSYCHOLOGY</a:t>
-            </a:r>
-          </a:p>
-        </p:txBody>
-      </p:sp>
-      <p:sp>
-        <p:nvSpPr>
-          <p:cNvPr id="4" name="TextBox 3"/>
-          <p:cNvSpPr txBox="1"/>
-          <p:nvPr/>
-        </p:nvSpPr>
-        <p:spPr>
-          <a:xfrm>
-            <a:off x="768096" y="548640"/>
-            <a:ext cx="10789920" cy="402336"/>
-          </a:xfrm>
-          <a:prstGeom prst="rect">
-            <a:avLst/>
-          </a:prstGeom>
-          <a:noFill/>
-        </p:spPr>
-        <p:txBody>
-          <a:bodyPr wrap="square" anchor="t" lIns="18288" rIns="18288" tIns="12801" bIns="12801">
-            <a:spAutoFit/>
-          </a:bodyPr>
-          <a:lstStyle/>
-          <a:p>
-            <a:pPr algn="l">
-              <a:lnSpc>
-                <a:spcPct val="125000"/>
-              </a:lnSpc>
-            </a:pPr>
-            <a:r>
-              <a:rPr sz="2150" b="1" i="0">
-                <a:solidFill>
-                  <a:srgbClr val="1A212E"/>
-                </a:solidFill>
-                <a:latin typeface="Noto Sans CJK KR"/>
-                <a:ea typeface="Noto Sans CJK KR"/>
-              </a:rPr>
-              <a:t>독자가 사랑하는 인물은 외면적 목표(Want)와 내면적 결핍(Need)의 간극에서 탄생한다</a:t>
-            </a:r>
-          </a:p>
-        </p:txBody>
-      </p:sp>
-      <p:sp>
-        <p:nvSpPr>
-          <p:cNvPr id="5" name="TextBox 4"/>
-          <p:cNvSpPr txBox="1"/>
-          <p:nvPr/>
-        </p:nvSpPr>
-        <p:spPr>
-          <a:xfrm>
-            <a:off x="768096" y="923544"/>
-            <a:ext cx="10789920" cy="292608"/>
-          </a:xfrm>
-          <a:prstGeom prst="rect">
-            <a:avLst/>
-          </a:prstGeom>
-          <a:noFill/>
-        </p:spPr>
-        <p:txBody>
-          <a:bodyPr wrap="square" anchor="t" lIns="18288" rIns="18288" tIns="12801" bIns="12801">
-            <a:spAutoFit/>
-          </a:bodyPr>
-          <a:lstStyle/>
-          <a:p>
-            <a:pPr algn="l">
-              <a:lnSpc>
-                <a:spcPct val="125000"/>
-              </a:lnSpc>
-            </a:pPr>
-            <a:r>
-              <a:rPr sz="1200" b="0" i="0">
-                <a:solidFill>
-                  <a:srgbClr val="555E6C"/>
-                </a:solidFill>
-                <a:latin typeface="Noto Sans CJK KR"/>
-                <a:ea typeface="Noto Sans CJK KR"/>
-              </a:rPr>
-              <a:t>인물의 프로필을 나열하는 대신, 과거의 상처(Ghost)가 만든 거짓 믿음(Lie)과 행동 동기를 설계하라</a:t>
-            </a:r>
-          </a:p>
-        </p:txBody>
-      </p:sp>
-      <p:sp>
-        <p:nvSpPr>
           <p:cNvPr id="6" name="Rectangle 5"/>
           <p:cNvSpPr/>
           <p:nvPr/>
         </p:nvSpPr>
         <p:spPr>
           <a:xfrm>
-            <a:off x="594360" y="1261872"/>
+            <a:off x="594360" y="1457350"/>
             <a:ext cx="11000232" cy="13716"/>
           </a:xfrm>
           <a:prstGeom prst="rect">
@@ -10443,7 +10603,7 @@
               </a:lnSpc>
             </a:pPr>
             <a:r>
-              <a:rPr sz="1300" b="1" i="0">
+              <a:rPr sz="1200" b="1" i="0">
                 <a:solidFill>
                   <a:srgbClr val="1A212E"/>
                 </a:solidFill>
@@ -10599,7 +10759,7 @@
               </a:lnSpc>
             </a:pPr>
             <a:r>
-              <a:rPr sz="1300" b="1" i="0">
+              <a:rPr sz="1050" b="1" i="0">
                 <a:solidFill>
                   <a:srgbClr val="1A212E"/>
                 </a:solidFill>
@@ -10639,7 +10799,7 @@
               </a:lnSpc>
             </a:pPr>
             <a:r>
-              <a:rPr sz="1060" b="0" i="0">
+              <a:rPr sz="1010" b="0" i="0">
                 <a:solidFill>
                   <a:srgbClr val="555E6C"/>
                 </a:solidFill>
@@ -10771,7 +10931,7 @@
               </a:lnSpc>
             </a:pPr>
             <a:r>
-              <a:rPr sz="1300" b="1" i="0">
+              <a:rPr sz="1050" b="1" i="0">
                 <a:solidFill>
                   <a:srgbClr val="1A212E"/>
                 </a:solidFill>
@@ -10811,7 +10971,7 @@
               </a:lnSpc>
             </a:pPr>
             <a:r>
-              <a:rPr sz="1060" b="0" i="0">
+              <a:rPr sz="1010" b="0" i="0">
                 <a:solidFill>
                   <a:srgbClr val="555E6C"/>
                 </a:solidFill>
@@ -10943,7 +11103,7 @@
               </a:lnSpc>
             </a:pPr>
             <a:r>
-              <a:rPr sz="1300" b="1" i="0">
+              <a:rPr sz="1050" b="1" i="0">
                 <a:solidFill>
                   <a:srgbClr val="1A212E"/>
                 </a:solidFill>
@@ -10983,7 +11143,7 @@
               </a:lnSpc>
             </a:pPr>
             <a:r>
-              <a:rPr sz="1060" b="0" i="0">
+              <a:rPr sz="1010" b="0" i="0">
                 <a:solidFill>
                   <a:srgbClr val="555E6C"/>
                 </a:solidFill>
@@ -11069,7 +11229,7 @@
               </a:lnSpc>
             </a:pPr>
             <a:r>
-              <a:rPr sz="1200" b="1" i="0">
+              <a:rPr sz="1050" b="1" i="0">
                 <a:solidFill>
                   <a:srgbClr val="D19830"/>
                 </a:solidFill>
@@ -11429,14 +11589,134 @@
       <p:grpSpPr/>
       <p:sp>
         <p:nvSpPr>
-          <p:cNvPr id="2" name="Rectangle 1"/>
+          <p:cNvPr id="2" name="TextBox 1"/>
+          <p:cNvSpPr txBox="1"/>
+          <p:nvPr/>
+        </p:nvSpPr>
+        <p:spPr>
+          <a:xfrm>
+            <a:off x="768096" y="329184"/>
+            <a:ext cx="10789920" cy="219760"/>
+          </a:xfrm>
+          <a:prstGeom prst="rect">
+            <a:avLst/>
+          </a:prstGeom>
+          <a:noFill/>
+        </p:spPr>
+        <p:txBody>
+          <a:bodyPr wrap="square" anchor="t" lIns="18288" rIns="18288" tIns="12801" bIns="12801">
+            <a:spAutoFit/>
+          </a:bodyPr>
+          <a:lstStyle/>
+          <a:p>
+            <a:pPr algn="l">
+              <a:lnSpc>
+                <a:spcPct val="125000"/>
+              </a:lnSpc>
+            </a:pPr>
+            <a:r>
+              <a:rPr sz="800" b="1" i="0">
+                <a:solidFill>
+                  <a:srgbClr val="C6532D"/>
+                </a:solidFill>
+                <a:latin typeface="Noto Sans CJK KR"/>
+                <a:ea typeface="Noto Sans CJK KR"/>
+              </a:rPr>
+              <a:t>04  |  THREE-ACT STRUCTURE &amp; PLOT BEATS</a:t>
+            </a:r>
+          </a:p>
+        </p:txBody>
+      </p:sp>
+      <p:sp>
+        <p:nvSpPr>
+          <p:cNvPr id="3" name="TextBox 2"/>
+          <p:cNvSpPr txBox="1"/>
+          <p:nvPr/>
+        </p:nvSpPr>
+        <p:spPr>
+          <a:xfrm>
+            <a:off x="768096" y="631240"/>
+            <a:ext cx="10789920" cy="423164"/>
+          </a:xfrm>
+          <a:prstGeom prst="rect">
+            <a:avLst/>
+          </a:prstGeom>
+          <a:noFill/>
+        </p:spPr>
+        <p:txBody>
+          <a:bodyPr wrap="square" anchor="t" lIns="18288" rIns="18288" tIns="12801" bIns="12801">
+            <a:spAutoFit/>
+          </a:bodyPr>
+          <a:lstStyle/>
+          <a:p>
+            <a:pPr algn="l">
+              <a:lnSpc>
+                <a:spcPct val="125000"/>
+              </a:lnSpc>
+            </a:pPr>
+            <a:r>
+              <a:rPr sz="1700" b="1" i="0">
+                <a:solidFill>
+                  <a:srgbClr val="1A212E"/>
+                </a:solidFill>
+                <a:latin typeface="Noto Sans CJK KR"/>
+                <a:ea typeface="Noto Sans CJK KR"/>
+              </a:rPr>
+              <a:t>3막 구조와 5대 전환점(Plot Beats)으로 독자가 책을 덮지 못하는 긴장감을 조율한다</a:t>
+            </a:r>
+          </a:p>
+        </p:txBody>
+      </p:sp>
+      <p:sp>
+        <p:nvSpPr>
+          <p:cNvPr id="4" name="TextBox 3"/>
+          <p:cNvSpPr txBox="1"/>
+          <p:nvPr/>
+        </p:nvSpPr>
+        <p:spPr>
+          <a:xfrm>
+            <a:off x="768096" y="1136700"/>
+            <a:ext cx="10789920" cy="247497"/>
+          </a:xfrm>
+          <a:prstGeom prst="rect">
+            <a:avLst/>
+          </a:prstGeom>
+          <a:noFill/>
+        </p:spPr>
+        <p:txBody>
+          <a:bodyPr wrap="square" anchor="t" lIns="18288" rIns="18288" tIns="12801" bIns="12801">
+            <a:spAutoFit/>
+          </a:bodyPr>
+          <a:lstStyle/>
+          <a:p>
+            <a:pPr algn="l">
+              <a:lnSpc>
+                <a:spcPct val="125000"/>
+              </a:lnSpc>
+            </a:pPr>
+            <a:r>
+              <a:rPr sz="950" b="0" i="0">
+                <a:solidFill>
+                  <a:srgbClr val="555E6C"/>
+                </a:solidFill>
+                <a:latin typeface="Noto Sans CJK KR"/>
+                <a:ea typeface="Noto Sans CJK KR"/>
+              </a:rPr>
+              <a:t>서사의 황금 비율(1막 25% : 2막 50% : 3막 25%)을 통해 위기의 고조와 해소의 쾌감을 정교하게 배치한다</a:t>
+            </a:r>
+          </a:p>
+        </p:txBody>
+      </p:sp>
+      <p:sp>
+        <p:nvSpPr>
+          <p:cNvPr id="5" name="Rectangle 4"/>
           <p:cNvSpPr/>
           <p:nvPr/>
         </p:nvSpPr>
         <p:spPr>
           <a:xfrm>
             <a:off x="594360" y="384048"/>
-            <a:ext cx="73152" cy="713232"/>
+            <a:ext cx="73152" cy="917854"/>
           </a:xfrm>
           <a:prstGeom prst="rect">
             <a:avLst/>
@@ -11473,133 +11753,13 @@
       </p:sp>
       <p:sp>
         <p:nvSpPr>
-          <p:cNvPr id="3" name="TextBox 2"/>
-          <p:cNvSpPr txBox="1"/>
-          <p:nvPr/>
-        </p:nvSpPr>
-        <p:spPr>
-          <a:xfrm>
-            <a:off x="768096" y="329184"/>
-            <a:ext cx="8229600" cy="256032"/>
-          </a:xfrm>
-          <a:prstGeom prst="rect">
-            <a:avLst/>
-          </a:prstGeom>
-          <a:noFill/>
-        </p:spPr>
-        <p:txBody>
-          <a:bodyPr wrap="square" anchor="t" lIns="18288" rIns="18288" tIns="12801" bIns="12801">
-            <a:spAutoFit/>
-          </a:bodyPr>
-          <a:lstStyle/>
-          <a:p>
-            <a:pPr algn="l">
-              <a:lnSpc>
-                <a:spcPct val="125000"/>
-              </a:lnSpc>
-            </a:pPr>
-            <a:r>
-              <a:rPr sz="1050" b="1" i="0">
-                <a:solidFill>
-                  <a:srgbClr val="C6532D"/>
-                </a:solidFill>
-                <a:latin typeface="Noto Sans CJK KR"/>
-                <a:ea typeface="Noto Sans CJK KR"/>
-              </a:rPr>
-              <a:t>04  |  THREE-ACT STRUCTURE &amp; PLOT BEATS</a:t>
-            </a:r>
-          </a:p>
-        </p:txBody>
-      </p:sp>
-      <p:sp>
-        <p:nvSpPr>
-          <p:cNvPr id="4" name="TextBox 3"/>
-          <p:cNvSpPr txBox="1"/>
-          <p:nvPr/>
-        </p:nvSpPr>
-        <p:spPr>
-          <a:xfrm>
-            <a:off x="768096" y="548640"/>
-            <a:ext cx="10789920" cy="402336"/>
-          </a:xfrm>
-          <a:prstGeom prst="rect">
-            <a:avLst/>
-          </a:prstGeom>
-          <a:noFill/>
-        </p:spPr>
-        <p:txBody>
-          <a:bodyPr wrap="square" anchor="t" lIns="18288" rIns="18288" tIns="12801" bIns="12801">
-            <a:spAutoFit/>
-          </a:bodyPr>
-          <a:lstStyle/>
-          <a:p>
-            <a:pPr algn="l">
-              <a:lnSpc>
-                <a:spcPct val="125000"/>
-              </a:lnSpc>
-            </a:pPr>
-            <a:r>
-              <a:rPr sz="2150" b="1" i="0">
-                <a:solidFill>
-                  <a:srgbClr val="1A212E"/>
-                </a:solidFill>
-                <a:latin typeface="Noto Sans CJK KR"/>
-                <a:ea typeface="Noto Sans CJK KR"/>
-              </a:rPr>
-              <a:t>3막 구조와 5대 전환점(Plot Beats)으로 독자가 책을 덮지 못하는 긴장감을 조율한다</a:t>
-            </a:r>
-          </a:p>
-        </p:txBody>
-      </p:sp>
-      <p:sp>
-        <p:nvSpPr>
-          <p:cNvPr id="5" name="TextBox 4"/>
-          <p:cNvSpPr txBox="1"/>
-          <p:nvPr/>
-        </p:nvSpPr>
-        <p:spPr>
-          <a:xfrm>
-            <a:off x="768096" y="923544"/>
-            <a:ext cx="10789920" cy="292608"/>
-          </a:xfrm>
-          <a:prstGeom prst="rect">
-            <a:avLst/>
-          </a:prstGeom>
-          <a:noFill/>
-        </p:spPr>
-        <p:txBody>
-          <a:bodyPr wrap="square" anchor="t" lIns="18288" rIns="18288" tIns="12801" bIns="12801">
-            <a:spAutoFit/>
-          </a:bodyPr>
-          <a:lstStyle/>
-          <a:p>
-            <a:pPr algn="l">
-              <a:lnSpc>
-                <a:spcPct val="125000"/>
-              </a:lnSpc>
-            </a:pPr>
-            <a:r>
-              <a:rPr sz="1200" b="0" i="0">
-                <a:solidFill>
-                  <a:srgbClr val="555E6C"/>
-                </a:solidFill>
-                <a:latin typeface="Noto Sans CJK KR"/>
-                <a:ea typeface="Noto Sans CJK KR"/>
-              </a:rPr>
-              <a:t>서사의 황금 비율(1막 25% : 2막 50% : 3막 25%)을 통해 위기의 고조와 해소의 쾌감을 정교하게 배치한다</a:t>
-            </a:r>
-          </a:p>
-        </p:txBody>
-      </p:sp>
-      <p:sp>
-        <p:nvSpPr>
           <p:cNvPr id="6" name="Rectangle 5"/>
           <p:cNvSpPr/>
           <p:nvPr/>
         </p:nvSpPr>
         <p:spPr>
           <a:xfrm>
-            <a:off x="594360" y="1261872"/>
+            <a:off x="594360" y="1457350"/>
             <a:ext cx="11000232" cy="13716"/>
           </a:xfrm>
           <a:prstGeom prst="rect">
@@ -11951,7 +12111,7 @@
               </a:lnSpc>
             </a:pPr>
             <a:r>
-              <a:rPr sz="1150" b="1" i="0">
+              <a:rPr sz="1050" b="1" i="0">
                 <a:solidFill>
                   <a:srgbClr val="C6532D"/>
                 </a:solidFill>
@@ -11991,7 +12151,7 @@
               </a:lnSpc>
             </a:pPr>
             <a:r>
-              <a:rPr sz="1100" b="1" i="0">
+              <a:rPr sz="950" b="1" i="0">
                 <a:solidFill>
                   <a:srgbClr val="1A212E"/>
                 </a:solidFill>
@@ -12163,7 +12323,7 @@
               </a:lnSpc>
             </a:pPr>
             <a:r>
-              <a:rPr sz="1150" b="1" i="0">
+              <a:rPr sz="1050" b="1" i="0">
                 <a:solidFill>
                   <a:srgbClr val="316B69"/>
                 </a:solidFill>
@@ -12203,7 +12363,7 @@
               </a:lnSpc>
             </a:pPr>
             <a:r>
-              <a:rPr sz="1100" b="1" i="0">
+              <a:rPr sz="950" b="1" i="0">
                 <a:solidFill>
                   <a:srgbClr val="1A212E"/>
                 </a:solidFill>
@@ -12375,7 +12535,7 @@
               </a:lnSpc>
             </a:pPr>
             <a:r>
-              <a:rPr sz="1150" b="1" i="0">
+              <a:rPr sz="1050" b="1" i="0">
                 <a:solidFill>
                   <a:srgbClr val="D19830"/>
                 </a:solidFill>
@@ -12415,7 +12575,7 @@
               </a:lnSpc>
             </a:pPr>
             <a:r>
-              <a:rPr sz="1100" b="1" i="0">
+              <a:rPr sz="950" b="1" i="0">
                 <a:solidFill>
                   <a:srgbClr val="1A212E"/>
                 </a:solidFill>
@@ -12587,7 +12747,7 @@
               </a:lnSpc>
             </a:pPr>
             <a:r>
-              <a:rPr sz="1150" b="1" i="0">
+              <a:rPr sz="1050" b="1" i="0">
                 <a:solidFill>
                   <a:srgbClr val="8E3542"/>
                 </a:solidFill>
@@ -12627,7 +12787,7 @@
               </a:lnSpc>
             </a:pPr>
             <a:r>
-              <a:rPr sz="1100" b="1" i="0">
+              <a:rPr sz="950" b="1" i="0">
                 <a:solidFill>
                   <a:srgbClr val="1A212E"/>
                 </a:solidFill>
@@ -12799,7 +12959,7 @@
               </a:lnSpc>
             </a:pPr>
             <a:r>
-              <a:rPr sz="1150" b="1" i="0">
+              <a:rPr sz="1050" b="1" i="0">
                 <a:solidFill>
                   <a:srgbClr val="1A212E"/>
                 </a:solidFill>
@@ -12839,7 +12999,7 @@
               </a:lnSpc>
             </a:pPr>
             <a:r>
-              <a:rPr sz="1100" b="1" i="0">
+              <a:rPr sz="950" b="1" i="0">
                 <a:solidFill>
                   <a:srgbClr val="1A212E"/>
                 </a:solidFill>
@@ -12919,14 +13079,134 @@
       <p:grpSpPr/>
       <p:sp>
         <p:nvSpPr>
-          <p:cNvPr id="2" name="Rectangle 1"/>
+          <p:cNvPr id="2" name="TextBox 1"/>
+          <p:cNvSpPr txBox="1"/>
+          <p:nvPr/>
+        </p:nvSpPr>
+        <p:spPr>
+          <a:xfrm>
+            <a:off x="768096" y="329184"/>
+            <a:ext cx="10789920" cy="219760"/>
+          </a:xfrm>
+          <a:prstGeom prst="rect">
+            <a:avLst/>
+          </a:prstGeom>
+          <a:noFill/>
+        </p:spPr>
+        <p:txBody>
+          <a:bodyPr wrap="square" anchor="t" lIns="18288" rIns="18288" tIns="12801" bIns="12801">
+            <a:spAutoFit/>
+          </a:bodyPr>
+          <a:lstStyle/>
+          <a:p>
+            <a:pPr algn="l">
+              <a:lnSpc>
+                <a:spcPct val="125000"/>
+              </a:lnSpc>
+            </a:pPr>
+            <a:r>
+              <a:rPr sz="800" b="1" i="0">
+                <a:solidFill>
+                  <a:srgbClr val="C6532D"/>
+                </a:solidFill>
+                <a:latin typeface="Noto Sans CJK KR"/>
+                <a:ea typeface="Noto Sans CJK KR"/>
+              </a:rPr>
+              <a:t>05  |  SCENE &amp; SEQUEL DYNAMICS</a:t>
+            </a:r>
+          </a:p>
+        </p:txBody>
+      </p:sp>
+      <p:sp>
+        <p:nvSpPr>
+          <p:cNvPr id="3" name="TextBox 2"/>
+          <p:cNvSpPr txBox="1"/>
+          <p:nvPr/>
+        </p:nvSpPr>
+        <p:spPr>
+          <a:xfrm>
+            <a:off x="768096" y="631240"/>
+            <a:ext cx="10789920" cy="423164"/>
+          </a:xfrm>
+          <a:prstGeom prst="rect">
+            <a:avLst/>
+          </a:prstGeom>
+          <a:noFill/>
+        </p:spPr>
+        <p:txBody>
+          <a:bodyPr wrap="square" anchor="t" lIns="18288" rIns="18288" tIns="12801" bIns="12801">
+            <a:spAutoFit/>
+          </a:bodyPr>
+          <a:lstStyle/>
+          <a:p>
+            <a:pPr algn="l">
+              <a:lnSpc>
+                <a:spcPct val="125000"/>
+              </a:lnSpc>
+            </a:pPr>
+            <a:r>
+              <a:rPr sz="1700" b="1" i="0">
+                <a:solidFill>
+                  <a:srgbClr val="1A212E"/>
+                </a:solidFill>
+                <a:latin typeface="Noto Sans CJK KR"/>
+                <a:ea typeface="Noto Sans CJK KR"/>
+              </a:rPr>
+              <a:t>모든 장면(Scene)은 목표·충돌·전환으로 전진하고 반추(Sequel)로 호흡을 조절한다</a:t>
+            </a:r>
+          </a:p>
+        </p:txBody>
+      </p:sp>
+      <p:sp>
+        <p:nvSpPr>
+          <p:cNvPr id="4" name="TextBox 3"/>
+          <p:cNvSpPr txBox="1"/>
+          <p:nvPr/>
+        </p:nvSpPr>
+        <p:spPr>
+          <a:xfrm>
+            <a:off x="768096" y="1136700"/>
+            <a:ext cx="10789920" cy="247497"/>
+          </a:xfrm>
+          <a:prstGeom prst="rect">
+            <a:avLst/>
+          </a:prstGeom>
+          <a:noFill/>
+        </p:spPr>
+        <p:txBody>
+          <a:bodyPr wrap="square" anchor="t" lIns="18288" rIns="18288" tIns="12801" bIns="12801">
+            <a:spAutoFit/>
+          </a:bodyPr>
+          <a:lstStyle/>
+          <a:p>
+            <a:pPr algn="l">
+              <a:lnSpc>
+                <a:spcPct val="125000"/>
+              </a:lnSpc>
+            </a:pPr>
+            <a:r>
+              <a:rPr sz="950" b="0" i="0">
+                <a:solidFill>
+                  <a:srgbClr val="555E6C"/>
+                </a:solidFill>
+                <a:latin typeface="Noto Sans CJK KR"/>
+                <a:ea typeface="Noto Sans CJK KR"/>
+              </a:rPr>
+              <a:t>외면적 사건의 속도감(Scene)과 내면적 감정 소화(Sequel)를 교차 배치해 독자의 피로도를 막고 몰입을 깊게 만든다</a:t>
+            </a:r>
+          </a:p>
+        </p:txBody>
+      </p:sp>
+      <p:sp>
+        <p:nvSpPr>
+          <p:cNvPr id="5" name="Rectangle 4"/>
           <p:cNvSpPr/>
           <p:nvPr/>
         </p:nvSpPr>
         <p:spPr>
           <a:xfrm>
             <a:off x="594360" y="384048"/>
-            <a:ext cx="73152" cy="713232"/>
+            <a:ext cx="73152" cy="917854"/>
           </a:xfrm>
           <a:prstGeom prst="rect">
             <a:avLst/>
@@ -12963,133 +13243,13 @@
       </p:sp>
       <p:sp>
         <p:nvSpPr>
-          <p:cNvPr id="3" name="TextBox 2"/>
-          <p:cNvSpPr txBox="1"/>
-          <p:nvPr/>
-        </p:nvSpPr>
-        <p:spPr>
-          <a:xfrm>
-            <a:off x="768096" y="329184"/>
-            <a:ext cx="8229600" cy="256032"/>
-          </a:xfrm>
-          <a:prstGeom prst="rect">
-            <a:avLst/>
-          </a:prstGeom>
-          <a:noFill/>
-        </p:spPr>
-        <p:txBody>
-          <a:bodyPr wrap="square" anchor="t" lIns="18288" rIns="18288" tIns="12801" bIns="12801">
-            <a:spAutoFit/>
-          </a:bodyPr>
-          <a:lstStyle/>
-          <a:p>
-            <a:pPr algn="l">
-              <a:lnSpc>
-                <a:spcPct val="125000"/>
-              </a:lnSpc>
-            </a:pPr>
-            <a:r>
-              <a:rPr sz="1050" b="1" i="0">
-                <a:solidFill>
-                  <a:srgbClr val="C6532D"/>
-                </a:solidFill>
-                <a:latin typeface="Noto Sans CJK KR"/>
-                <a:ea typeface="Noto Sans CJK KR"/>
-              </a:rPr>
-              <a:t>05  |  SCENE &amp; SEQUEL DYNAMICS</a:t>
-            </a:r>
-          </a:p>
-        </p:txBody>
-      </p:sp>
-      <p:sp>
-        <p:nvSpPr>
-          <p:cNvPr id="4" name="TextBox 3"/>
-          <p:cNvSpPr txBox="1"/>
-          <p:nvPr/>
-        </p:nvSpPr>
-        <p:spPr>
-          <a:xfrm>
-            <a:off x="768096" y="548640"/>
-            <a:ext cx="10789920" cy="402336"/>
-          </a:xfrm>
-          <a:prstGeom prst="rect">
-            <a:avLst/>
-          </a:prstGeom>
-          <a:noFill/>
-        </p:spPr>
-        <p:txBody>
-          <a:bodyPr wrap="square" anchor="t" lIns="18288" rIns="18288" tIns="12801" bIns="12801">
-            <a:spAutoFit/>
-          </a:bodyPr>
-          <a:lstStyle/>
-          <a:p>
-            <a:pPr algn="l">
-              <a:lnSpc>
-                <a:spcPct val="125000"/>
-              </a:lnSpc>
-            </a:pPr>
-            <a:r>
-              <a:rPr sz="2150" b="1" i="0">
-                <a:solidFill>
-                  <a:srgbClr val="1A212E"/>
-                </a:solidFill>
-                <a:latin typeface="Noto Sans CJK KR"/>
-                <a:ea typeface="Noto Sans CJK KR"/>
-              </a:rPr>
-              <a:t>모든 장면(Scene)은 목표·충돌·전환으로 전진하고 반추(Sequel)로 호흡을 조절한다</a:t>
-            </a:r>
-          </a:p>
-        </p:txBody>
-      </p:sp>
-      <p:sp>
-        <p:nvSpPr>
-          <p:cNvPr id="5" name="TextBox 4"/>
-          <p:cNvSpPr txBox="1"/>
-          <p:nvPr/>
-        </p:nvSpPr>
-        <p:spPr>
-          <a:xfrm>
-            <a:off x="768096" y="923544"/>
-            <a:ext cx="10789920" cy="292608"/>
-          </a:xfrm>
-          <a:prstGeom prst="rect">
-            <a:avLst/>
-          </a:prstGeom>
-          <a:noFill/>
-        </p:spPr>
-        <p:txBody>
-          <a:bodyPr wrap="square" anchor="t" lIns="18288" rIns="18288" tIns="12801" bIns="12801">
-            <a:spAutoFit/>
-          </a:bodyPr>
-          <a:lstStyle/>
-          <a:p>
-            <a:pPr algn="l">
-              <a:lnSpc>
-                <a:spcPct val="125000"/>
-              </a:lnSpc>
-            </a:pPr>
-            <a:r>
-              <a:rPr sz="1200" b="0" i="0">
-                <a:solidFill>
-                  <a:srgbClr val="555E6C"/>
-                </a:solidFill>
-                <a:latin typeface="Noto Sans CJK KR"/>
-                <a:ea typeface="Noto Sans CJK KR"/>
-              </a:rPr>
-              <a:t>외면적 사건의 속도감(Scene)과 내면적 감정 소화(Sequel)를 교차 배치해 독자의 피로도를 막고 몰입을 깊게 만든다</a:t>
-            </a:r>
-          </a:p>
-        </p:txBody>
-      </p:sp>
-      <p:sp>
-        <p:nvSpPr>
           <p:cNvPr id="6" name="Rectangle 5"/>
           <p:cNvSpPr/>
           <p:nvPr/>
         </p:nvSpPr>
         <p:spPr>
           <a:xfrm>
-            <a:off x="594360" y="1261872"/>
+            <a:off x="594360" y="1457350"/>
             <a:ext cx="11000232" cy="13716"/>
           </a:xfrm>
           <a:prstGeom prst="rect">
@@ -13325,7 +13485,7 @@
               </a:lnSpc>
             </a:pPr>
             <a:r>
-              <a:rPr sz="1350" b="1" i="0">
+              <a:rPr sz="1250" b="1" i="0">
                 <a:solidFill>
                   <a:srgbClr val="1A212E"/>
                 </a:solidFill>
@@ -13413,7 +13573,7 @@
               </a:lnSpc>
             </a:pPr>
             <a:r>
-              <a:rPr sz="1180" b="1" i="0">
+              <a:rPr sz="1130" b="1" i="0">
                 <a:solidFill>
                   <a:srgbClr val="C6532D"/>
                 </a:solidFill>
@@ -13885,7 +14045,7 @@
               </a:lnSpc>
             </a:pPr>
             <a:r>
-              <a:rPr sz="1180" b="1" i="0">
+              <a:rPr sz="1130" b="1" i="0">
                 <a:solidFill>
                   <a:srgbClr val="316B69"/>
                 </a:solidFill>
@@ -14357,7 +14517,7 @@
               </a:lnSpc>
             </a:pPr>
             <a:r>
-              <a:rPr sz="1300" b="1" i="0">
+              <a:rPr sz="1200" b="1" i="0">
                 <a:solidFill>
                   <a:srgbClr val="1A212E"/>
                 </a:solidFill>
@@ -14489,7 +14649,7 @@
               </a:lnSpc>
             </a:pPr>
             <a:r>
-              <a:rPr sz="1120" b="1" i="0">
+              <a:rPr sz="869" b="1" i="0">
                 <a:solidFill>
                   <a:srgbClr val="C6532D"/>
                 </a:solidFill>
@@ -14661,7 +14821,7 @@
               </a:lnSpc>
             </a:pPr>
             <a:r>
-              <a:rPr sz="1120" b="1" i="0">
+              <a:rPr sz="869" b="1" i="0">
                 <a:solidFill>
                   <a:srgbClr val="316B69"/>
                 </a:solidFill>
@@ -14833,7 +14993,7 @@
               </a:lnSpc>
             </a:pPr>
             <a:r>
-              <a:rPr sz="1120" b="1" i="0">
+              <a:rPr sz="869" b="1" i="0">
                 <a:solidFill>
                   <a:srgbClr val="D19830"/>
                 </a:solidFill>
@@ -14959,7 +15119,7 @@
               </a:lnSpc>
             </a:pPr>
             <a:r>
-              <a:rPr sz="1200" b="1" i="0">
+              <a:rPr sz="1050" b="1" i="0">
                 <a:solidFill>
                   <a:srgbClr val="D19830"/>
                 </a:solidFill>
@@ -15006,9 +15166,29 @@
                 <a:latin typeface="Noto Sans CJK KR"/>
                 <a:ea typeface="Noto Sans CJK KR"/>
               </a:rPr>
-              <a:t>• 장면의 시작과 끝 사이에 인물의 상황·감정의 부호(+/-)가 바뀌었는가?
-• 플롯을 전진시키거나 인물의 핵심 본성을 드러내는가?
-→ 둘 다 아니라면 아무리 문장이 아름다워도 과감히 삭제하라.</a:t>
+              <a:t>• 장면의 시작과 끝 사이에 인물의 상황·감정의 부호(+/-)가 바뀌었는가?</a:t>
+            </a:r>
+            <a:br/>
+            <a:r>
+              <a:rPr sz="1000" b="0" i="0">
+                <a:solidFill>
+                  <a:srgbClr val="F2EFE9"/>
+                </a:solidFill>
+                <a:latin typeface="Noto Sans CJK KR"/>
+                <a:ea typeface="Noto Sans CJK KR"/>
+              </a:rPr>
+              <a:t>• 플롯을 전진시키거나 인물의 핵심 본성을 드러내는가?</a:t>
+            </a:r>
+            <a:br/>
+            <a:r>
+              <a:rPr sz="1000" b="0" i="0">
+                <a:solidFill>
+                  <a:srgbClr val="F2EFE9"/>
+                </a:solidFill>
+                <a:latin typeface="Noto Sans CJK KR"/>
+                <a:ea typeface="Noto Sans CJK KR"/>
+              </a:rPr>
+              <a:t>→ 둘 다 아니라면 아무리 문장이 아름다워도 과감히 삭제하라.</a:t>
             </a:r>
           </a:p>
         </p:txBody>
@@ -15041,14 +15221,134 @@
       <p:grpSpPr/>
       <p:sp>
         <p:nvSpPr>
-          <p:cNvPr id="2" name="Rectangle 1"/>
+          <p:cNvPr id="2" name="TextBox 1"/>
+          <p:cNvSpPr txBox="1"/>
+          <p:nvPr/>
+        </p:nvSpPr>
+        <p:spPr>
+          <a:xfrm>
+            <a:off x="768096" y="329184"/>
+            <a:ext cx="10789920" cy="219760"/>
+          </a:xfrm>
+          <a:prstGeom prst="rect">
+            <a:avLst/>
+          </a:prstGeom>
+          <a:noFill/>
+        </p:spPr>
+        <p:txBody>
+          <a:bodyPr wrap="square" anchor="t" lIns="18288" rIns="18288" tIns="12801" bIns="12801">
+            <a:spAutoFit/>
+          </a:bodyPr>
+          <a:lstStyle/>
+          <a:p>
+            <a:pPr algn="l">
+              <a:lnSpc>
+                <a:spcPct val="125000"/>
+              </a:lnSpc>
+            </a:pPr>
+            <a:r>
+              <a:rPr sz="800" b="1" i="0">
+                <a:solidFill>
+                  <a:srgbClr val="C6532D"/>
+                </a:solidFill>
+                <a:latin typeface="Noto Sans CJK KR"/>
+                <a:ea typeface="Noto Sans CJK KR"/>
+              </a:rPr>
+              <a:t>06  |  POINT OF VIEW (POV) &amp; NARRATIVE DISTANCE</a:t>
+            </a:r>
+          </a:p>
+        </p:txBody>
+      </p:sp>
+      <p:sp>
+        <p:nvSpPr>
+          <p:cNvPr id="3" name="TextBox 2"/>
+          <p:cNvSpPr txBox="1"/>
+          <p:nvPr/>
+        </p:nvSpPr>
+        <p:spPr>
+          <a:xfrm>
+            <a:off x="768096" y="631240"/>
+            <a:ext cx="10789920" cy="423164"/>
+          </a:xfrm>
+          <a:prstGeom prst="rect">
+            <a:avLst/>
+          </a:prstGeom>
+          <a:noFill/>
+        </p:spPr>
+        <p:txBody>
+          <a:bodyPr wrap="square" anchor="t" lIns="18288" rIns="18288" tIns="12801" bIns="12801">
+            <a:spAutoFit/>
+          </a:bodyPr>
+          <a:lstStyle/>
+          <a:p>
+            <a:pPr algn="l">
+              <a:lnSpc>
+                <a:spcPct val="125000"/>
+              </a:lnSpc>
+            </a:pPr>
+            <a:r>
+              <a:rPr sz="1700" b="1" i="0">
+                <a:solidFill>
+                  <a:srgbClr val="1A212E"/>
+                </a:solidFill>
+                <a:latin typeface="Noto Sans CJK KR"/>
+                <a:ea typeface="Noto Sans CJK KR"/>
+              </a:rPr>
+              <a:t>누구의 눈으로 어디까지 보여줄 것인가: 시점(POV)이 소설의 몰입도를 결정한다</a:t>
+            </a:r>
+          </a:p>
+        </p:txBody>
+      </p:sp>
+      <p:sp>
+        <p:nvSpPr>
+          <p:cNvPr id="4" name="TextBox 3"/>
+          <p:cNvSpPr txBox="1"/>
+          <p:nvPr/>
+        </p:nvSpPr>
+        <p:spPr>
+          <a:xfrm>
+            <a:off x="768096" y="1136700"/>
+            <a:ext cx="10789920" cy="247497"/>
+          </a:xfrm>
+          <a:prstGeom prst="rect">
+            <a:avLst/>
+          </a:prstGeom>
+          <a:noFill/>
+        </p:spPr>
+        <p:txBody>
+          <a:bodyPr wrap="square" anchor="t" lIns="18288" rIns="18288" tIns="12801" bIns="12801">
+            <a:spAutoFit/>
+          </a:bodyPr>
+          <a:lstStyle/>
+          <a:p>
+            <a:pPr algn="l">
+              <a:lnSpc>
+                <a:spcPct val="125000"/>
+              </a:lnSpc>
+            </a:pPr>
+            <a:r>
+              <a:rPr sz="950" b="0" i="0">
+                <a:solidFill>
+                  <a:srgbClr val="555E6C"/>
+                </a:solidFill>
+                <a:latin typeface="Noto Sans CJK KR"/>
+                <a:ea typeface="Noto Sans CJK KR"/>
+              </a:rPr>
+              <a:t>각 시점의 정보 통제 범위와 심리적 거리를 이해하고, 한 장면 안에서는 단일 시점을 엄격히 유지하라</a:t>
+            </a:r>
+          </a:p>
+        </p:txBody>
+      </p:sp>
+      <p:sp>
+        <p:nvSpPr>
+          <p:cNvPr id="5" name="Rectangle 4"/>
           <p:cNvSpPr/>
           <p:nvPr/>
         </p:nvSpPr>
         <p:spPr>
           <a:xfrm>
             <a:off x="594360" y="384048"/>
-            <a:ext cx="73152" cy="713232"/>
+            <a:ext cx="73152" cy="917854"/>
           </a:xfrm>
           <a:prstGeom prst="rect">
             <a:avLst/>
@@ -15085,133 +15385,13 @@
       </p:sp>
       <p:sp>
         <p:nvSpPr>
-          <p:cNvPr id="3" name="TextBox 2"/>
-          <p:cNvSpPr txBox="1"/>
-          <p:nvPr/>
-        </p:nvSpPr>
-        <p:spPr>
-          <a:xfrm>
-            <a:off x="768096" y="329184"/>
-            <a:ext cx="8229600" cy="256032"/>
-          </a:xfrm>
-          <a:prstGeom prst="rect">
-            <a:avLst/>
-          </a:prstGeom>
-          <a:noFill/>
-        </p:spPr>
-        <p:txBody>
-          <a:bodyPr wrap="square" anchor="t" lIns="18288" rIns="18288" tIns="12801" bIns="12801">
-            <a:spAutoFit/>
-          </a:bodyPr>
-          <a:lstStyle/>
-          <a:p>
-            <a:pPr algn="l">
-              <a:lnSpc>
-                <a:spcPct val="125000"/>
-              </a:lnSpc>
-            </a:pPr>
-            <a:r>
-              <a:rPr sz="1050" b="1" i="0">
-                <a:solidFill>
-                  <a:srgbClr val="C6532D"/>
-                </a:solidFill>
-                <a:latin typeface="Noto Sans CJK KR"/>
-                <a:ea typeface="Noto Sans CJK KR"/>
-              </a:rPr>
-              <a:t>06  |  POINT OF VIEW (POV) &amp; NARRATIVE DISTANCE</a:t>
-            </a:r>
-          </a:p>
-        </p:txBody>
-      </p:sp>
-      <p:sp>
-        <p:nvSpPr>
-          <p:cNvPr id="4" name="TextBox 3"/>
-          <p:cNvSpPr txBox="1"/>
-          <p:nvPr/>
-        </p:nvSpPr>
-        <p:spPr>
-          <a:xfrm>
-            <a:off x="768096" y="548640"/>
-            <a:ext cx="10789920" cy="402336"/>
-          </a:xfrm>
-          <a:prstGeom prst="rect">
-            <a:avLst/>
-          </a:prstGeom>
-          <a:noFill/>
-        </p:spPr>
-        <p:txBody>
-          <a:bodyPr wrap="square" anchor="t" lIns="18288" rIns="18288" tIns="12801" bIns="12801">
-            <a:spAutoFit/>
-          </a:bodyPr>
-          <a:lstStyle/>
-          <a:p>
-            <a:pPr algn="l">
-              <a:lnSpc>
-                <a:spcPct val="125000"/>
-              </a:lnSpc>
-            </a:pPr>
-            <a:r>
-              <a:rPr sz="2150" b="1" i="0">
-                <a:solidFill>
-                  <a:srgbClr val="1A212E"/>
-                </a:solidFill>
-                <a:latin typeface="Noto Sans CJK KR"/>
-                <a:ea typeface="Noto Sans CJK KR"/>
-              </a:rPr>
-              <a:t>누구의 눈으로 어디까지 보여줄 것인가: 시점(POV)이 소설의 몰입도를 결정한다</a:t>
-            </a:r>
-          </a:p>
-        </p:txBody>
-      </p:sp>
-      <p:sp>
-        <p:nvSpPr>
-          <p:cNvPr id="5" name="TextBox 4"/>
-          <p:cNvSpPr txBox="1"/>
-          <p:nvPr/>
-        </p:nvSpPr>
-        <p:spPr>
-          <a:xfrm>
-            <a:off x="768096" y="923544"/>
-            <a:ext cx="10789920" cy="292608"/>
-          </a:xfrm>
-          <a:prstGeom prst="rect">
-            <a:avLst/>
-          </a:prstGeom>
-          <a:noFill/>
-        </p:spPr>
-        <p:txBody>
-          <a:bodyPr wrap="square" anchor="t" lIns="18288" rIns="18288" tIns="12801" bIns="12801">
-            <a:spAutoFit/>
-          </a:bodyPr>
-          <a:lstStyle/>
-          <a:p>
-            <a:pPr algn="l">
-              <a:lnSpc>
-                <a:spcPct val="125000"/>
-              </a:lnSpc>
-            </a:pPr>
-            <a:r>
-              <a:rPr sz="1200" b="0" i="0">
-                <a:solidFill>
-                  <a:srgbClr val="555E6C"/>
-                </a:solidFill>
-                <a:latin typeface="Noto Sans CJK KR"/>
-                <a:ea typeface="Noto Sans CJK KR"/>
-              </a:rPr>
-              <a:t>각 시점의 정보 통제 범위와 심리적 거리를 이해하고, 한 장면 안에서는 단일 시점을 엄격히 유지하라</a:t>
-            </a:r>
-          </a:p>
-        </p:txBody>
-      </p:sp>
-      <p:sp>
-        <p:nvSpPr>
           <p:cNvPr id="6" name="Rectangle 5"/>
           <p:cNvSpPr/>
           <p:nvPr/>
         </p:nvSpPr>
         <p:spPr>
           <a:xfrm>
-            <a:off x="594360" y="1261872"/>
+            <a:off x="594360" y="1457350"/>
             <a:ext cx="11000232" cy="13716"/>
           </a:xfrm>
           <a:prstGeom prst="rect">
@@ -15882,8 +16062,18 @@
                 <a:latin typeface="Noto Sans CJK KR"/>
                 <a:ea typeface="Noto Sans CJK KR"/>
               </a:rPr>
-              <a:t>1인칭 주인공 시점
-(‘나’의 서술)</a:t>
+              <a:t>1인칭 주인공 시점</a:t>
+            </a:r>
+            <a:br/>
+            <a:r>
+              <a:rPr sz="1050" b="1" i="0">
+                <a:solidFill>
+                  <a:srgbClr val="1A212E"/>
+                </a:solidFill>
+                <a:latin typeface="Noto Sans CJK KR"/>
+                <a:ea typeface="Noto Sans CJK KR"/>
+              </a:rPr>
+              <a:t>(‘나’의 서술)</a:t>
             </a:r>
           </a:p>
         </p:txBody>
@@ -16055,9 +16245,29 @@
                 <a:latin typeface="Noto Sans CJK KR"/>
                 <a:ea typeface="Noto Sans CJK KR"/>
               </a:rPr>
-              <a:t>• 독자와 주인공의 즉각적 밀착
-• 화자의 독특한 목소리·유머 극대화
-• ‘신뢰할 수 없는 화자’ 트릭에 유리</a:t>
+              <a:t>• 독자와 주인공의 즉각적 밀착</a:t>
+            </a:r>
+            <a:br/>
+            <a:r>
+              <a:rPr sz="990" b="0" i="0">
+                <a:solidFill>
+                  <a:srgbClr val="555E6C"/>
+                </a:solidFill>
+                <a:latin typeface="Noto Sans CJK KR"/>
+                <a:ea typeface="Noto Sans CJK KR"/>
+              </a:rPr>
+              <a:t>• 화자의 독특한 목소리·유머 극대화</a:t>
+            </a:r>
+            <a:br/>
+            <a:r>
+              <a:rPr sz="990" b="0" i="0">
+                <a:solidFill>
+                  <a:srgbClr val="555E6C"/>
+                </a:solidFill>
+                <a:latin typeface="Noto Sans CJK KR"/>
+                <a:ea typeface="Noto Sans CJK KR"/>
+              </a:rPr>
+              <a:t>• ‘신뢰할 수 없는 화자’ 트릭에 유리</a:t>
             </a:r>
           </a:p>
         </p:txBody>
@@ -16143,8 +16353,18 @@
                 <a:latin typeface="Noto Sans CJK KR"/>
                 <a:ea typeface="Noto Sans CJK KR"/>
               </a:rPr>
-              <a:t>• 주인공이 없는 현장의 사건 서술 불가
-• 지나친 자기연민이나 독백 과잉 위험</a:t>
+              <a:t>• 주인공이 없는 현장의 사건 서술 불가</a:t>
+            </a:r>
+            <a:br/>
+            <a:r>
+              <a:rPr sz="990" b="0" i="0">
+                <a:solidFill>
+                  <a:srgbClr val="555E6C"/>
+                </a:solidFill>
+                <a:latin typeface="Noto Sans CJK KR"/>
+                <a:ea typeface="Noto Sans CJK KR"/>
+              </a:rPr>
+              <a:t>• 지나친 자기연민이나 독백 과잉 위험</a:t>
             </a:r>
           </a:p>
         </p:txBody>
@@ -16230,8 +16450,18 @@
                 <a:latin typeface="Noto Sans CJK KR"/>
                 <a:ea typeface="Noto Sans CJK KR"/>
               </a:rPr>
-              <a:t>청춘 성장소설, 느와르,
-심리 미스터리, 고백록</a:t>
+              <a:t>청춘 성장소설, 느와르,</a:t>
+            </a:r>
+            <a:br/>
+            <a:r>
+              <a:rPr sz="990" b="0" i="0">
+                <a:solidFill>
+                  <a:srgbClr val="555E6C"/>
+                </a:solidFill>
+                <a:latin typeface="Noto Sans CJK KR"/>
+                <a:ea typeface="Noto Sans CJK KR"/>
+              </a:rPr>
+              <a:t>심리 미스터리, 고백록</a:t>
             </a:r>
           </a:p>
         </p:txBody>
@@ -16317,8 +16547,18 @@
                 <a:latin typeface="Noto Sans CJK KR"/>
                 <a:ea typeface="Noto Sans CJK KR"/>
               </a:rPr>
-              <a:t>3인칭 제한 시점
-(현대 소설의 표준)</a:t>
+              <a:t>3인칭 제한 시점</a:t>
+            </a:r>
+            <a:br/>
+            <a:r>
+              <a:rPr sz="1050" b="1" i="0">
+                <a:solidFill>
+                  <a:srgbClr val="C6532D"/>
+                </a:solidFill>
+                <a:latin typeface="Noto Sans CJK KR"/>
+                <a:ea typeface="Noto Sans CJK KR"/>
+              </a:rPr>
+              <a:t>(현대 소설의 표준)</a:t>
             </a:r>
           </a:p>
         </p:txBody>
@@ -16490,8 +16730,18 @@
                 <a:latin typeface="Noto Sans CJK KR"/>
                 <a:ea typeface="Noto Sans CJK KR"/>
               </a:rPr>
-              <a:t>• 1인칭의 깊은 정서적 몰입감과 3인칭의 객관적 묘사력을 동시에 확보
-• 서사적 거리를 유연하게 줌인/줌아웃</a:t>
+              <a:t>• 1인칭의 깊은 정서적 몰입감과 3인칭의 객관적 묘사력을 동시에 확보</a:t>
+            </a:r>
+            <a:br/>
+            <a:r>
+              <a:rPr sz="990" b="0" i="0">
+                <a:solidFill>
+                  <a:srgbClr val="555E6C"/>
+                </a:solidFill>
+                <a:latin typeface="Noto Sans CJK KR"/>
+                <a:ea typeface="Noto Sans CJK KR"/>
+              </a:rPr>
+              <a:t>• 서사적 거리를 유연하게 줌인/줌아웃</a:t>
             </a:r>
           </a:p>
         </p:txBody>
@@ -16663,8 +16913,18 @@
                 <a:latin typeface="Noto Sans CJK KR"/>
                 <a:ea typeface="Noto Sans CJK KR"/>
               </a:rPr>
-              <a:t>현대 문학 전반, 장르소설,
-장편 드라마의 가장 안정적 선택</a:t>
+              <a:t>현대 문학 전반, 장르소설,</a:t>
+            </a:r>
+            <a:br/>
+            <a:r>
+              <a:rPr sz="990" b="0" i="0">
+                <a:solidFill>
+                  <a:srgbClr val="555E6C"/>
+                </a:solidFill>
+                <a:latin typeface="Noto Sans CJK KR"/>
+                <a:ea typeface="Noto Sans CJK KR"/>
+              </a:rPr>
+              <a:t>장편 드라마의 가장 안정적 선택</a:t>
             </a:r>
           </a:p>
         </p:txBody>
@@ -16750,8 +17010,18 @@
                 <a:latin typeface="Noto Sans CJK KR"/>
                 <a:ea typeface="Noto Sans CJK KR"/>
               </a:rPr>
-              <a:t>3인칭 전지적 시점
-(신적 조망)</a:t>
+              <a:t>3인칭 전지적 시점</a:t>
+            </a:r>
+            <a:br/>
+            <a:r>
+              <a:rPr sz="1050" b="1" i="0">
+                <a:solidFill>
+                  <a:srgbClr val="1A212E"/>
+                </a:solidFill>
+                <a:latin typeface="Noto Sans CJK KR"/>
+                <a:ea typeface="Noto Sans CJK KR"/>
+              </a:rPr>
+              <a:t>(신적 조망)</a:t>
             </a:r>
           </a:p>
         </p:txBody>
@@ -16923,8 +17193,18 @@
                 <a:latin typeface="Noto Sans CJK KR"/>
                 <a:ea typeface="Noto Sans CJK KR"/>
               </a:rPr>
-              <a:t>• 방대한 세계관과 시대상을 조망
-• 인물 간의 오해와 극적 아이러니를 독자에게 입체적으로 제시</a:t>
+              <a:t>• 방대한 세계관과 시대상을 조망</a:t>
+            </a:r>
+            <a:br/>
+            <a:r>
+              <a:rPr sz="990" b="0" i="0">
+                <a:solidFill>
+                  <a:srgbClr val="555E6C"/>
+                </a:solidFill>
+                <a:latin typeface="Noto Sans CJK KR"/>
+                <a:ea typeface="Noto Sans CJK KR"/>
+              </a:rPr>
+              <a:t>• 인물 간의 오해와 극적 아이러니를 독자에게 입체적으로 제시</a:t>
             </a:r>
           </a:p>
         </p:txBody>
@@ -17096,8 +17376,18 @@
                 <a:latin typeface="Noto Sans CJK KR"/>
                 <a:ea typeface="Noto Sans CJK KR"/>
               </a:rPr>
-              <a:t>대하 역사소설, 가족 사가(Saga),
-우화적·철학적 서사</a:t>
+              <a:t>대하 역사소설, 가족 사가(Saga),</a:t>
+            </a:r>
+            <a:br/>
+            <a:r>
+              <a:rPr sz="990" b="0" i="0">
+                <a:solidFill>
+                  <a:srgbClr val="555E6C"/>
+                </a:solidFill>
+                <a:latin typeface="Noto Sans CJK KR"/>
+                <a:ea typeface="Noto Sans CJK KR"/>
+              </a:rPr>
+              <a:t>우화적·철학적 서사</a:t>
             </a:r>
           </a:p>
         </p:txBody>
@@ -17183,8 +17473,18 @@
                 <a:latin typeface="Noto Sans CJK KR"/>
                 <a:ea typeface="Noto Sans CJK KR"/>
               </a:rPr>
-              <a:t>다중 교차 시점
-(챕터별 3인칭/1인칭)</a:t>
+              <a:t>다중 교차 시점</a:t>
+            </a:r>
+            <a:br/>
+            <a:r>
+              <a:rPr sz="1050" b="1" i="0">
+                <a:solidFill>
+                  <a:srgbClr val="1A212E"/>
+                </a:solidFill>
+                <a:latin typeface="Noto Sans CJK KR"/>
+                <a:ea typeface="Noto Sans CJK KR"/>
+              </a:rPr>
+              <a:t>(챕터별 3인칭/1인칭)</a:t>
             </a:r>
           </a:p>
         </p:txBody>
@@ -17356,8 +17656,18 @@
                 <a:latin typeface="Noto Sans CJK KR"/>
                 <a:ea typeface="Noto Sans CJK KR"/>
               </a:rPr>
-              <a:t>• 주인공과 적대자 양측의 정당성 부여
-• 시점 교차 절단신공(Cliffhanger)으로 페이지 터너 효과 극대화</a:t>
+              <a:t>• 주인공과 적대자 양측의 정당성 부여</a:t>
+            </a:r>
+            <a:br/>
+            <a:r>
+              <a:rPr sz="990" b="0" i="0">
+                <a:solidFill>
+                  <a:srgbClr val="555E6C"/>
+                </a:solidFill>
+                <a:latin typeface="Noto Sans CJK KR"/>
+                <a:ea typeface="Noto Sans CJK KR"/>
+              </a:rPr>
+              <a:t>• 시점 교차 절단신공(Cliffhanger)으로 페이지 터너 효과 극대화</a:t>
             </a:r>
           </a:p>
         </p:txBody>
@@ -17436,15 +17746,25 @@
               </a:lnSpc>
             </a:pPr>
             <a:r>
-              <a:rPr sz="990" b="0" i="0">
+              <a:rPr sz="890" b="0" i="0">
                 <a:solidFill>
                   <a:srgbClr val="555E6C"/>
                 </a:solidFill>
                 <a:latin typeface="Noto Sans CJK KR"/>
                 <a:ea typeface="Noto Sans CJK KR"/>
               </a:rPr>
-              <a:t>• 시점 인물 간 목소리가 비슷하면 독자가 화자를 혼동
-• 서사 밀도가 낮은 시점 챕터가 지루해짐</a:t>
+              <a:t>• 시점 인물 간 목소리가 비슷하면 독자가 화자를 혼동</a:t>
+            </a:r>
+            <a:br/>
+            <a:r>
+              <a:rPr sz="890" b="0" i="0">
+                <a:solidFill>
+                  <a:srgbClr val="555E6C"/>
+                </a:solidFill>
+                <a:latin typeface="Noto Sans CJK KR"/>
+                <a:ea typeface="Noto Sans CJK KR"/>
+              </a:rPr>
+              <a:t>• 서사 밀도가 낮은 시점 챕터가 지루해짐</a:t>
             </a:r>
           </a:p>
         </p:txBody>
@@ -17530,8 +17850,18 @@
                 <a:latin typeface="Noto Sans CJK KR"/>
                 <a:ea typeface="Noto Sans CJK KR"/>
               </a:rPr>
-              <a:t>군상극, 범죄 스릴러,
-거대 판타지, 로맨스(쌍방 시점)</a:t>
+              <a:t>군상극, 범죄 스릴러,</a:t>
+            </a:r>
+            <a:br/>
+            <a:r>
+              <a:rPr sz="990" b="0" i="0">
+                <a:solidFill>
+                  <a:srgbClr val="555E6C"/>
+                </a:solidFill>
+                <a:latin typeface="Noto Sans CJK KR"/>
+                <a:ea typeface="Noto Sans CJK KR"/>
+              </a:rPr>
+              <a:t>거대 판타지, 로맨스(쌍방 시점)</a:t>
             </a:r>
           </a:p>
         </p:txBody>
@@ -17652,14 +17982,134 @@
       <p:grpSpPr/>
       <p:sp>
         <p:nvSpPr>
-          <p:cNvPr id="2" name="Rectangle 1"/>
+          <p:cNvPr id="2" name="TextBox 1"/>
+          <p:cNvSpPr txBox="1"/>
+          <p:nvPr/>
+        </p:nvSpPr>
+        <p:spPr>
+          <a:xfrm>
+            <a:off x="768096" y="329184"/>
+            <a:ext cx="10789920" cy="219760"/>
+          </a:xfrm>
+          <a:prstGeom prst="rect">
+            <a:avLst/>
+          </a:prstGeom>
+          <a:noFill/>
+        </p:spPr>
+        <p:txBody>
+          <a:bodyPr wrap="square" anchor="t" lIns="18288" rIns="18288" tIns="12801" bIns="12801">
+            <a:spAutoFit/>
+          </a:bodyPr>
+          <a:lstStyle/>
+          <a:p>
+            <a:pPr algn="l">
+              <a:lnSpc>
+                <a:spcPct val="125000"/>
+              </a:lnSpc>
+            </a:pPr>
+            <a:r>
+              <a:rPr sz="800" b="1" i="0">
+                <a:solidFill>
+                  <a:srgbClr val="C6532D"/>
+                </a:solidFill>
+                <a:latin typeface="Noto Sans CJK KR"/>
+                <a:ea typeface="Noto Sans CJK KR"/>
+              </a:rPr>
+              <a:t>07  |  STYLE &amp; DESCRIPTION CLINIC (SHOW, DON'T TELL)</a:t>
+            </a:r>
+          </a:p>
+        </p:txBody>
+      </p:sp>
+      <p:sp>
+        <p:nvSpPr>
+          <p:cNvPr id="3" name="TextBox 2"/>
+          <p:cNvSpPr txBox="1"/>
+          <p:nvPr/>
+        </p:nvSpPr>
+        <p:spPr>
+          <a:xfrm>
+            <a:off x="768096" y="631240"/>
+            <a:ext cx="10789920" cy="423164"/>
+          </a:xfrm>
+          <a:prstGeom prst="rect">
+            <a:avLst/>
+          </a:prstGeom>
+          <a:noFill/>
+        </p:spPr>
+        <p:txBody>
+          <a:bodyPr wrap="square" anchor="t" lIns="18288" rIns="18288" tIns="12801" bIns="12801">
+            <a:spAutoFit/>
+          </a:bodyPr>
+          <a:lstStyle/>
+          <a:p>
+            <a:pPr algn="l">
+              <a:lnSpc>
+                <a:spcPct val="125000"/>
+              </a:lnSpc>
+            </a:pPr>
+            <a:r>
+              <a:rPr sz="1700" b="1" i="0">
+                <a:solidFill>
+                  <a:srgbClr val="1A212E"/>
+                </a:solidFill>
+                <a:latin typeface="Noto Sans CJK KR"/>
+                <a:ea typeface="Noto Sans CJK KR"/>
+              </a:rPr>
+              <a:t>감정을 단어로 요약(Tell)하지 말고, 오감과 행동의 디테일로 독자가 직접 느끼게 하라(Show)</a:t>
+            </a:r>
+          </a:p>
+        </p:txBody>
+      </p:sp>
+      <p:sp>
+        <p:nvSpPr>
+          <p:cNvPr id="4" name="TextBox 3"/>
+          <p:cNvSpPr txBox="1"/>
+          <p:nvPr/>
+        </p:nvSpPr>
+        <p:spPr>
+          <a:xfrm>
+            <a:off x="768096" y="1136700"/>
+            <a:ext cx="10789920" cy="247497"/>
+          </a:xfrm>
+          <a:prstGeom prst="rect">
+            <a:avLst/>
+          </a:prstGeom>
+          <a:noFill/>
+        </p:spPr>
+        <p:txBody>
+          <a:bodyPr wrap="square" anchor="t" lIns="18288" rIns="18288" tIns="12801" bIns="12801">
+            <a:spAutoFit/>
+          </a:bodyPr>
+          <a:lstStyle/>
+          <a:p>
+            <a:pPr algn="l">
+              <a:lnSpc>
+                <a:spcPct val="125000"/>
+              </a:lnSpc>
+            </a:pPr>
+            <a:r>
+              <a:rPr sz="950" b="0" i="0">
+                <a:solidFill>
+                  <a:srgbClr val="555E6C"/>
+                </a:solidFill>
+                <a:latin typeface="Noto Sans CJK KR"/>
+                <a:ea typeface="Noto Sans CJK KR"/>
+              </a:rPr>
+              <a:t>추상적인 감정어(슬펐다, 화났다, 불안했다)를 지우고 그 감정이 만들어내는 신체 반응과 사물의 이미지로 치환한다</a:t>
+            </a:r>
+          </a:p>
+        </p:txBody>
+      </p:sp>
+      <p:sp>
+        <p:nvSpPr>
+          <p:cNvPr id="5" name="Rectangle 4"/>
           <p:cNvSpPr/>
           <p:nvPr/>
         </p:nvSpPr>
         <p:spPr>
           <a:xfrm>
             <a:off x="594360" y="384048"/>
-            <a:ext cx="73152" cy="713232"/>
+            <a:ext cx="73152" cy="917854"/>
           </a:xfrm>
           <a:prstGeom prst="rect">
             <a:avLst/>
@@ -17696,133 +18146,13 @@
       </p:sp>
       <p:sp>
         <p:nvSpPr>
-          <p:cNvPr id="3" name="TextBox 2"/>
-          <p:cNvSpPr txBox="1"/>
-          <p:nvPr/>
-        </p:nvSpPr>
-        <p:spPr>
-          <a:xfrm>
-            <a:off x="768096" y="329184"/>
-            <a:ext cx="8229600" cy="256032"/>
-          </a:xfrm>
-          <a:prstGeom prst="rect">
-            <a:avLst/>
-          </a:prstGeom>
-          <a:noFill/>
-        </p:spPr>
-        <p:txBody>
-          <a:bodyPr wrap="square" anchor="t" lIns="18288" rIns="18288" tIns="12801" bIns="12801">
-            <a:spAutoFit/>
-          </a:bodyPr>
-          <a:lstStyle/>
-          <a:p>
-            <a:pPr algn="l">
-              <a:lnSpc>
-                <a:spcPct val="125000"/>
-              </a:lnSpc>
-            </a:pPr>
-            <a:r>
-              <a:rPr sz="1050" b="1" i="0">
-                <a:solidFill>
-                  <a:srgbClr val="C6532D"/>
-                </a:solidFill>
-                <a:latin typeface="Noto Sans CJK KR"/>
-                <a:ea typeface="Noto Sans CJK KR"/>
-              </a:rPr>
-              <a:t>07  |  STYLE &amp; DESCRIPTION CLINIC (SHOW, DON'T TELL)</a:t>
-            </a:r>
-          </a:p>
-        </p:txBody>
-      </p:sp>
-      <p:sp>
-        <p:nvSpPr>
-          <p:cNvPr id="4" name="TextBox 3"/>
-          <p:cNvSpPr txBox="1"/>
-          <p:nvPr/>
-        </p:nvSpPr>
-        <p:spPr>
-          <a:xfrm>
-            <a:off x="768096" y="548640"/>
-            <a:ext cx="10789920" cy="402336"/>
-          </a:xfrm>
-          <a:prstGeom prst="rect">
-            <a:avLst/>
-          </a:prstGeom>
-          <a:noFill/>
-        </p:spPr>
-        <p:txBody>
-          <a:bodyPr wrap="square" anchor="t" lIns="18288" rIns="18288" tIns="12801" bIns="12801">
-            <a:spAutoFit/>
-          </a:bodyPr>
-          <a:lstStyle/>
-          <a:p>
-            <a:pPr algn="l">
-              <a:lnSpc>
-                <a:spcPct val="125000"/>
-              </a:lnSpc>
-            </a:pPr>
-            <a:r>
-              <a:rPr sz="2150" b="1" i="0">
-                <a:solidFill>
-                  <a:srgbClr val="1A212E"/>
-                </a:solidFill>
-                <a:latin typeface="Noto Sans CJK KR"/>
-                <a:ea typeface="Noto Sans CJK KR"/>
-              </a:rPr>
-              <a:t>감정을 단어로 요약(Tell)하지 말고, 오감과 행동의 디테일로 독자가 직접 느끼게 하라(Show)</a:t>
-            </a:r>
-          </a:p>
-        </p:txBody>
-      </p:sp>
-      <p:sp>
-        <p:nvSpPr>
-          <p:cNvPr id="5" name="TextBox 4"/>
-          <p:cNvSpPr txBox="1"/>
-          <p:nvPr/>
-        </p:nvSpPr>
-        <p:spPr>
-          <a:xfrm>
-            <a:off x="768096" y="923544"/>
-            <a:ext cx="10789920" cy="292608"/>
-          </a:xfrm>
-          <a:prstGeom prst="rect">
-            <a:avLst/>
-          </a:prstGeom>
-          <a:noFill/>
-        </p:spPr>
-        <p:txBody>
-          <a:bodyPr wrap="square" anchor="t" lIns="18288" rIns="18288" tIns="12801" bIns="12801">
-            <a:spAutoFit/>
-          </a:bodyPr>
-          <a:lstStyle/>
-          <a:p>
-            <a:pPr algn="l">
-              <a:lnSpc>
-                <a:spcPct val="125000"/>
-              </a:lnSpc>
-            </a:pPr>
-            <a:r>
-              <a:rPr sz="1200" b="0" i="0">
-                <a:solidFill>
-                  <a:srgbClr val="555E6C"/>
-                </a:solidFill>
-                <a:latin typeface="Noto Sans CJK KR"/>
-                <a:ea typeface="Noto Sans CJK KR"/>
-              </a:rPr>
-              <a:t>추상적인 감정어(슬펐다, 화났다, 불안했다)를 지우고 그 감정이 만들어내는 신체 반응과 사물의 이미지로 치환한다</a:t>
-            </a:r>
-          </a:p>
-        </p:txBody>
-      </p:sp>
-      <p:sp>
-        <p:nvSpPr>
           <p:cNvPr id="6" name="Rectangle 5"/>
           <p:cNvSpPr/>
           <p:nvPr/>
         </p:nvSpPr>
         <p:spPr>
           <a:xfrm>
-            <a:off x="594360" y="1261872"/>
+            <a:off x="594360" y="1457350"/>
             <a:ext cx="11000232" cy="13716"/>
           </a:xfrm>
           <a:prstGeom prst="rect">
@@ -18058,7 +18388,7 @@
               </a:lnSpc>
             </a:pPr>
             <a:r>
-              <a:rPr sz="950" b="1" i="0">
+              <a:rPr sz="850" b="1" i="0">
                 <a:solidFill>
                   <a:srgbClr val="878E99"/>
                 </a:solidFill>
@@ -18138,7 +18468,7 @@
               </a:lnSpc>
             </a:pPr>
             <a:r>
-              <a:rPr sz="2000" b="1" i="0">
+              <a:rPr sz="1400" b="1" i="0">
                 <a:solidFill>
                   <a:srgbClr val="C6532D"/>
                 </a:solidFill>
@@ -18270,7 +18600,7 @@
               </a:lnSpc>
             </a:pPr>
             <a:r>
-              <a:rPr sz="950" b="1" i="0">
+              <a:rPr sz="850" b="1" i="0">
                 <a:solidFill>
                   <a:srgbClr val="316B69"/>
                 </a:solidFill>
@@ -18291,7 +18621,7 @@
         <p:spPr>
           <a:xfrm>
             <a:off x="8823960" y="1481328"/>
-            <a:ext cx="2633472" cy="219456"/>
+            <a:ext cx="2633472" cy="246888"/>
           </a:xfrm>
           <a:prstGeom prst="roundRect">
             <a:avLst>
@@ -18337,7 +18667,7 @@
         <p:spPr>
           <a:xfrm>
             <a:off x="8823960" y="1481328"/>
-            <a:ext cx="2633472" cy="219456"/>
+            <a:ext cx="2633472" cy="246888"/>
           </a:xfrm>
           <a:prstGeom prst="rect">
             <a:avLst/>
@@ -18352,7 +18682,7 @@
           <a:p>
             <a:pPr algn="ctr">
               <a:lnSpc>
-                <a:spcPct val="125000"/>
+                <a:spcPct val="100000"/>
               </a:lnSpc>
             </a:pPr>
             <a:r>
@@ -18484,7 +18814,7 @@
               </a:lnSpc>
             </a:pPr>
             <a:r>
-              <a:rPr sz="950" b="1" i="0">
+              <a:rPr sz="850" b="1" i="0">
                 <a:solidFill>
                   <a:srgbClr val="878E99"/>
                 </a:solidFill>
@@ -18564,7 +18894,7 @@
               </a:lnSpc>
             </a:pPr>
             <a:r>
-              <a:rPr sz="2000" b="1" i="0">
+              <a:rPr sz="1400" b="1" i="0">
                 <a:solidFill>
                   <a:srgbClr val="C6532D"/>
                 </a:solidFill>
@@ -18696,7 +19026,7 @@
               </a:lnSpc>
             </a:pPr>
             <a:r>
-              <a:rPr sz="950" b="1" i="0">
+              <a:rPr sz="850" b="1" i="0">
                 <a:solidFill>
                   <a:srgbClr val="316B69"/>
                 </a:solidFill>
@@ -18717,7 +19047,7 @@
         <p:spPr>
           <a:xfrm>
             <a:off x="8823960" y="2596896"/>
-            <a:ext cx="2633472" cy="219456"/>
+            <a:ext cx="2633472" cy="246888"/>
           </a:xfrm>
           <a:prstGeom prst="roundRect">
             <a:avLst>
@@ -18763,7 +19093,7 @@
         <p:spPr>
           <a:xfrm>
             <a:off x="8823960" y="2596896"/>
-            <a:ext cx="2633472" cy="219456"/>
+            <a:ext cx="2633472" cy="246888"/>
           </a:xfrm>
           <a:prstGeom prst="rect">
             <a:avLst/>
@@ -18778,7 +19108,7 @@
           <a:p>
             <a:pPr algn="ctr">
               <a:lnSpc>
-                <a:spcPct val="125000"/>
+                <a:spcPct val="100000"/>
               </a:lnSpc>
             </a:pPr>
             <a:r>
@@ -18910,7 +19240,7 @@
               </a:lnSpc>
             </a:pPr>
             <a:r>
-              <a:rPr sz="950" b="1" i="0">
+              <a:rPr sz="850" b="1" i="0">
                 <a:solidFill>
                   <a:srgbClr val="878E99"/>
                 </a:solidFill>
@@ -18990,7 +19320,7 @@
               </a:lnSpc>
             </a:pPr>
             <a:r>
-              <a:rPr sz="2000" b="1" i="0">
+              <a:rPr sz="1400" b="1" i="0">
                 <a:solidFill>
                   <a:srgbClr val="C6532D"/>
                 </a:solidFill>
@@ -19122,7 +19452,7 @@
               </a:lnSpc>
             </a:pPr>
             <a:r>
-              <a:rPr sz="950" b="1" i="0">
+              <a:rPr sz="850" b="1" i="0">
                 <a:solidFill>
                   <a:srgbClr val="316B69"/>
                 </a:solidFill>
@@ -19143,7 +19473,7 @@
         <p:spPr>
           <a:xfrm>
             <a:off x="8823960" y="3712463"/>
-            <a:ext cx="2633472" cy="219456"/>
+            <a:ext cx="2633472" cy="246888"/>
           </a:xfrm>
           <a:prstGeom prst="roundRect">
             <a:avLst>
@@ -19189,7 +19519,7 @@
         <p:spPr>
           <a:xfrm>
             <a:off x="8823960" y="3712463"/>
-            <a:ext cx="2633472" cy="219456"/>
+            <a:ext cx="2633472" cy="246888"/>
           </a:xfrm>
           <a:prstGeom prst="rect">
             <a:avLst/>
@@ -19204,7 +19534,7 @@
           <a:p>
             <a:pPr algn="ctr">
               <a:lnSpc>
-                <a:spcPct val="125000"/>
+                <a:spcPct val="100000"/>
               </a:lnSpc>
             </a:pPr>
             <a:r>
@@ -19334,7 +19664,7 @@
               </a:lnSpc>
             </a:pPr>
             <a:r>
-              <a:rPr sz="1200" b="1" i="0">
+              <a:rPr sz="1050" b="1" i="0">
                 <a:solidFill>
                   <a:srgbClr val="D19830"/>
                 </a:solidFill>
@@ -19422,7 +19752,7 @@
               </a:lnSpc>
             </a:pPr>
             <a:r>
-              <a:rPr sz="1080" b="1" i="0">
+              <a:rPr sz="930" b="1" i="0">
                 <a:solidFill>
                   <a:srgbClr val="F2EFE9"/>
                 </a:solidFill>
@@ -19550,7 +19880,7 @@
               </a:lnSpc>
             </a:pPr>
             <a:r>
-              <a:rPr sz="1080" b="1" i="0">
+              <a:rPr sz="930" b="1" i="0">
                 <a:solidFill>
                   <a:srgbClr val="F2EFE9"/>
                 </a:solidFill>
@@ -19678,7 +20008,7 @@
               </a:lnSpc>
             </a:pPr>
             <a:r>
-              <a:rPr sz="1080" b="1" i="0">
+              <a:rPr sz="930" b="1" i="0">
                 <a:solidFill>
                   <a:srgbClr val="F2EFE9"/>
                 </a:solidFill>
@@ -19718,7 +20048,7 @@
               </a:lnSpc>
             </a:pPr>
             <a:r>
-              <a:rPr sz="950" b="0" i="0">
+              <a:rPr sz="850" b="0" i="0">
                 <a:solidFill>
                   <a:srgbClr val="B2BAC6"/>
                 </a:solidFill>
@@ -19758,14 +20088,134 @@
       <p:grpSpPr/>
       <p:sp>
         <p:nvSpPr>
-          <p:cNvPr id="2" name="Rectangle 1"/>
+          <p:cNvPr id="2" name="TextBox 1"/>
+          <p:cNvSpPr txBox="1"/>
+          <p:nvPr/>
+        </p:nvSpPr>
+        <p:spPr>
+          <a:xfrm>
+            <a:off x="768096" y="329184"/>
+            <a:ext cx="10789920" cy="219760"/>
+          </a:xfrm>
+          <a:prstGeom prst="rect">
+            <a:avLst/>
+          </a:prstGeom>
+          <a:noFill/>
+        </p:spPr>
+        <p:txBody>
+          <a:bodyPr wrap="square" anchor="t" lIns="18288" rIns="18288" tIns="12801" bIns="12801">
+            <a:spAutoFit/>
+          </a:bodyPr>
+          <a:lstStyle/>
+          <a:p>
+            <a:pPr algn="l">
+              <a:lnSpc>
+                <a:spcPct val="125000"/>
+              </a:lnSpc>
+            </a:pPr>
+            <a:r>
+              <a:rPr sz="800" b="1" i="0">
+                <a:solidFill>
+                  <a:srgbClr val="C6532D"/>
+                </a:solidFill>
+                <a:latin typeface="Noto Sans CJK KR"/>
+                <a:ea typeface="Noto Sans CJK KR"/>
+              </a:rPr>
+              <a:t>08  |  DRAFTING &amp; 3-PASS REVISION PROCESS</a:t>
+            </a:r>
+          </a:p>
+        </p:txBody>
+      </p:sp>
+      <p:sp>
+        <p:nvSpPr>
+          <p:cNvPr id="3" name="TextBox 2"/>
+          <p:cNvSpPr txBox="1"/>
+          <p:nvPr/>
+        </p:nvSpPr>
+        <p:spPr>
+          <a:xfrm>
+            <a:off x="768096" y="631240"/>
+            <a:ext cx="10789920" cy="423164"/>
+          </a:xfrm>
+          <a:prstGeom prst="rect">
+            <a:avLst/>
+          </a:prstGeom>
+          <a:noFill/>
+        </p:spPr>
+        <p:txBody>
+          <a:bodyPr wrap="square" anchor="t" lIns="18288" rIns="18288" tIns="12801" bIns="12801">
+            <a:spAutoFit/>
+          </a:bodyPr>
+          <a:lstStyle/>
+          <a:p>
+            <a:pPr algn="l">
+              <a:lnSpc>
+                <a:spcPct val="125000"/>
+              </a:lnSpc>
+            </a:pPr>
+            <a:r>
+              <a:rPr sz="1700" b="1" i="0">
+                <a:solidFill>
+                  <a:srgbClr val="1A212E"/>
+                </a:solidFill>
+                <a:latin typeface="Noto Sans CJK KR"/>
+                <a:ea typeface="Noto Sans CJK KR"/>
+              </a:rPr>
+              <a:t>초고는 뜨거운 가슴으로 거침없이 쓰고, 퇴고는 차가운 머리로 3단계에 걸쳐 조각한다</a:t>
+            </a:r>
+          </a:p>
+        </p:txBody>
+      </p:sp>
+      <p:sp>
+        <p:nvSpPr>
+          <p:cNvPr id="4" name="TextBox 3"/>
+          <p:cNvSpPr txBox="1"/>
+          <p:nvPr/>
+        </p:nvSpPr>
+        <p:spPr>
+          <a:xfrm>
+            <a:off x="768096" y="1136700"/>
+            <a:ext cx="10789920" cy="247497"/>
+          </a:xfrm>
+          <a:prstGeom prst="rect">
+            <a:avLst/>
+          </a:prstGeom>
+          <a:noFill/>
+        </p:spPr>
+        <p:txBody>
+          <a:bodyPr wrap="square" anchor="t" lIns="18288" rIns="18288" tIns="12801" bIns="12801">
+            <a:spAutoFit/>
+          </a:bodyPr>
+          <a:lstStyle/>
+          <a:p>
+            <a:pPr algn="l">
+              <a:lnSpc>
+                <a:spcPct val="125000"/>
+              </a:lnSpc>
+            </a:pPr>
+            <a:r>
+              <a:rPr sz="950" b="0" i="0">
+                <a:solidFill>
+                  <a:srgbClr val="555E6C"/>
+                </a:solidFill>
+                <a:latin typeface="Noto Sans CJK KR"/>
+                <a:ea typeface="Noto Sans CJK KR"/>
+              </a:rPr>
+              <a:t>완벽주의 때문에 첫 장만 무한히 고치는 함정에서 벗어나, 구조·장면·문장의 순서로 해상도를 높여가며 다듬는다</a:t>
+            </a:r>
+          </a:p>
+        </p:txBody>
+      </p:sp>
+      <p:sp>
+        <p:nvSpPr>
+          <p:cNvPr id="5" name="Rectangle 4"/>
           <p:cNvSpPr/>
           <p:nvPr/>
         </p:nvSpPr>
         <p:spPr>
           <a:xfrm>
             <a:off x="594360" y="384048"/>
-            <a:ext cx="73152" cy="713232"/>
+            <a:ext cx="73152" cy="917854"/>
           </a:xfrm>
           <a:prstGeom prst="rect">
             <a:avLst/>
@@ -19802,133 +20252,13 @@
       </p:sp>
       <p:sp>
         <p:nvSpPr>
-          <p:cNvPr id="3" name="TextBox 2"/>
-          <p:cNvSpPr txBox="1"/>
-          <p:nvPr/>
-        </p:nvSpPr>
-        <p:spPr>
-          <a:xfrm>
-            <a:off x="768096" y="329184"/>
-            <a:ext cx="8229600" cy="256032"/>
-          </a:xfrm>
-          <a:prstGeom prst="rect">
-            <a:avLst/>
-          </a:prstGeom>
-          <a:noFill/>
-        </p:spPr>
-        <p:txBody>
-          <a:bodyPr wrap="square" anchor="t" lIns="18288" rIns="18288" tIns="12801" bIns="12801">
-            <a:spAutoFit/>
-          </a:bodyPr>
-          <a:lstStyle/>
-          <a:p>
-            <a:pPr algn="l">
-              <a:lnSpc>
-                <a:spcPct val="125000"/>
-              </a:lnSpc>
-            </a:pPr>
-            <a:r>
-              <a:rPr sz="1050" b="1" i="0">
-                <a:solidFill>
-                  <a:srgbClr val="C6532D"/>
-                </a:solidFill>
-                <a:latin typeface="Noto Sans CJK KR"/>
-                <a:ea typeface="Noto Sans CJK KR"/>
-              </a:rPr>
-              <a:t>08  |  DRAFTING &amp; 3-PASS REVISION PROCESS</a:t>
-            </a:r>
-          </a:p>
-        </p:txBody>
-      </p:sp>
-      <p:sp>
-        <p:nvSpPr>
-          <p:cNvPr id="4" name="TextBox 3"/>
-          <p:cNvSpPr txBox="1"/>
-          <p:nvPr/>
-        </p:nvSpPr>
-        <p:spPr>
-          <a:xfrm>
-            <a:off x="768096" y="548640"/>
-            <a:ext cx="10789920" cy="402336"/>
-          </a:xfrm>
-          <a:prstGeom prst="rect">
-            <a:avLst/>
-          </a:prstGeom>
-          <a:noFill/>
-        </p:spPr>
-        <p:txBody>
-          <a:bodyPr wrap="square" anchor="t" lIns="18288" rIns="18288" tIns="12801" bIns="12801">
-            <a:spAutoFit/>
-          </a:bodyPr>
-          <a:lstStyle/>
-          <a:p>
-            <a:pPr algn="l">
-              <a:lnSpc>
-                <a:spcPct val="125000"/>
-              </a:lnSpc>
-            </a:pPr>
-            <a:r>
-              <a:rPr sz="2150" b="1" i="0">
-                <a:solidFill>
-                  <a:srgbClr val="1A212E"/>
-                </a:solidFill>
-                <a:latin typeface="Noto Sans CJK KR"/>
-                <a:ea typeface="Noto Sans CJK KR"/>
-              </a:rPr>
-              <a:t>초고는 뜨거운 가슴으로 거침없이 쓰고, 퇴고는 차가운 머리로 3단계에 걸쳐 조각한다</a:t>
-            </a:r>
-          </a:p>
-        </p:txBody>
-      </p:sp>
-      <p:sp>
-        <p:nvSpPr>
-          <p:cNvPr id="5" name="TextBox 4"/>
-          <p:cNvSpPr txBox="1"/>
-          <p:nvPr/>
-        </p:nvSpPr>
-        <p:spPr>
-          <a:xfrm>
-            <a:off x="768096" y="923544"/>
-            <a:ext cx="10789920" cy="292608"/>
-          </a:xfrm>
-          <a:prstGeom prst="rect">
-            <a:avLst/>
-          </a:prstGeom>
-          <a:noFill/>
-        </p:spPr>
-        <p:txBody>
-          <a:bodyPr wrap="square" anchor="t" lIns="18288" rIns="18288" tIns="12801" bIns="12801">
-            <a:spAutoFit/>
-          </a:bodyPr>
-          <a:lstStyle/>
-          <a:p>
-            <a:pPr algn="l">
-              <a:lnSpc>
-                <a:spcPct val="125000"/>
-              </a:lnSpc>
-            </a:pPr>
-            <a:r>
-              <a:rPr sz="1200" b="0" i="0">
-                <a:solidFill>
-                  <a:srgbClr val="555E6C"/>
-                </a:solidFill>
-                <a:latin typeface="Noto Sans CJK KR"/>
-                <a:ea typeface="Noto Sans CJK KR"/>
-              </a:rPr>
-              <a:t>완벽주의 때문에 첫 장만 무한히 고치는 함정에서 벗어나, 구조·장면·문장의 순서로 해상도를 높여가며 다듬는다</a:t>
-            </a:r>
-          </a:p>
-        </p:txBody>
-      </p:sp>
-      <p:sp>
-        <p:nvSpPr>
           <p:cNvPr id="6" name="Rectangle 5"/>
           <p:cNvSpPr/>
           <p:nvPr/>
         </p:nvSpPr>
         <p:spPr>
           <a:xfrm>
-            <a:off x="594360" y="1261872"/>
+            <a:off x="594360" y="1457350"/>
             <a:ext cx="11000232" cy="13716"/>
           </a:xfrm>
           <a:prstGeom prst="rect">
@@ -20164,7 +20494,7 @@
               </a:lnSpc>
             </a:pPr>
             <a:r>
-              <a:rPr sz="1350" b="1" i="0">
+              <a:rPr sz="1200" b="1" i="0">
                 <a:solidFill>
                   <a:srgbClr val="C6532D"/>
                 </a:solidFill>
@@ -20204,15 +20534,36 @@
               </a:lnSpc>
             </a:pPr>
             <a:r>
-              <a:rPr sz="1100" b="0" i="0">
+              <a:rPr sz="850" b="0" i="0">
                 <a:solidFill>
                   <a:srgbClr val="1A212E"/>
                 </a:solidFill>
                 <a:latin typeface="Noto Sans CJK KR"/>
                 <a:ea typeface="Noto Sans CJK KR"/>
               </a:rPr>
-              <a:t>“초고를 쓸 때는 내면의 편집자를 방문 밖에 가두어라.”
-백지 위에서는 그 어떤 퇴고도 불가능하다. 문장이 거칠고 설정에 구멍이 나더라도 일단 결말의 마침표까지 달려가 전체 윤곽을 확보하는 것이 최우선이다.</a:t>
+              <a:t>“초고를 쓸 때는 내면의 편집자를 방문 밖에 가두어라.”</a:t>
+            </a:r>
+            <a:br/>
+            <a:r>
+              <a:rPr sz="850" b="0" i="0">
+                <a:solidFill>
+                  <a:srgbClr val="1A212E"/>
+                </a:solidFill>
+                <a:latin typeface="Noto Sans CJK KR"/>
+                <a:ea typeface="Noto Sans CJK KR"/>
+              </a:rPr>
+              <a:t/>
+            </a:r>
+            <a:br/>
+            <a:r>
+              <a:rPr sz="850" b="0" i="0">
+                <a:solidFill>
+                  <a:srgbClr val="1A212E"/>
+                </a:solidFill>
+                <a:latin typeface="Noto Sans CJK KR"/>
+                <a:ea typeface="Noto Sans CJK KR"/>
+              </a:rPr>
+              <a:t>백지 위에서는 그 어떤 퇴고도 불가능하다. 문장이 거칠고 설정에 구멍이 나더라도 일단 결말의 마침표까지 달려가 전체 윤곽을 확보하는 것이 최우선이다.</a:t>
             </a:r>
           </a:p>
         </p:txBody>
@@ -20293,7 +20644,7 @@
               </a:lnSpc>
             </a:pPr>
             <a:r>
-              <a:rPr sz="1150" b="1" i="0">
+              <a:rPr sz="1050" b="1" i="0">
                 <a:solidFill>
                   <a:srgbClr val="1A212E"/>
                 </a:solidFill>
@@ -20592,8 +20943,18 @@
                 <a:latin typeface="Noto Sans CJK KR"/>
                 <a:ea typeface="Noto Sans CJK KR"/>
               </a:rPr>
-              <a:t>• 기획·구조 설계 (20%)  • 초고 집필 (30%)
-• 3단계 퇴고 및 윤문 (50%) — 진짜 소설은 퇴고에서 태어난다.</a:t>
+              <a:t>• 기획·구조 설계 (20%)  • 초고 집필 (30%)</a:t>
+            </a:r>
+            <a:br/>
+            <a:r>
+              <a:rPr sz="980" b="0" i="0">
+                <a:solidFill>
+                  <a:srgbClr val="555E6C"/>
+                </a:solidFill>
+                <a:latin typeface="Noto Sans CJK KR"/>
+                <a:ea typeface="Noto Sans CJK KR"/>
+              </a:rPr>
+              <a:t>• 3단계 퇴고 및 윤문 (50%) — 진짜 소설은 퇴고에서 태어난다.</a:t>
             </a:r>
           </a:p>
         </p:txBody>
@@ -20672,7 +21033,7 @@
               </a:lnSpc>
             </a:pPr>
             <a:r>
-              <a:rPr sz="1150" b="1" i="0">
+              <a:rPr sz="1050" b="1" i="0">
                 <a:solidFill>
                   <a:srgbClr val="D19830"/>
                 </a:solidFill>
@@ -20930,7 +21291,7 @@
               </a:lnSpc>
             </a:pPr>
             <a:r>
-              <a:rPr sz="1400" b="1" i="0">
+              <a:rPr sz="1100" b="1" i="0">
                 <a:solidFill>
                   <a:srgbClr val="1A212E"/>
                 </a:solidFill>
@@ -20950,7 +21311,7 @@
         </p:nvSpPr>
         <p:spPr>
           <a:xfrm>
-            <a:off x="6272784" y="1810512"/>
+            <a:off x="6272784" y="1847088"/>
             <a:ext cx="5120640" cy="219456"/>
           </a:xfrm>
           <a:prstGeom prst="rect">
@@ -20970,7 +21331,7 @@
               </a:lnSpc>
             </a:pPr>
             <a:r>
-              <a:rPr sz="1019" b="1" i="0">
+              <a:rPr sz="869" b="1" i="0">
                 <a:solidFill>
                   <a:srgbClr val="C6532D"/>
                 </a:solidFill>
@@ -21017,9 +21378,29 @@
                 <a:latin typeface="Noto Sans CJK KR"/>
                 <a:ea typeface="Noto Sans CJK KR"/>
               </a:rPr>
-              <a:t>✓ 주인공의 욕망과 행동이 시작부터 클라이맥스까지 일관되게 이어지는가?
-✓ 중반부가 늘어지지 않는가? (기능이 겹치는 장면과 인물을 과감히 통합·삭제)
-✓ 복선이 회수되었으며, 결말이 우연이 아닌 주인공의 선택으로 해결되는가?</a:t>
+              <a:t>✓ 주인공의 욕망과 행동이 시작부터 클라이맥스까지 일관되게 이어지는가?</a:t>
+            </a:r>
+            <a:br/>
+            <a:r>
+              <a:rPr sz="1030" b="0" i="0">
+                <a:solidFill>
+                  <a:srgbClr val="555E6C"/>
+                </a:solidFill>
+                <a:latin typeface="Noto Sans CJK KR"/>
+                <a:ea typeface="Noto Sans CJK KR"/>
+              </a:rPr>
+              <a:t>✓ 중반부가 늘어지지 않는가? (기능이 겹치는 장면과 인물을 과감히 통합·삭제)</a:t>
+            </a:r>
+            <a:br/>
+            <a:r>
+              <a:rPr sz="1030" b="0" i="0">
+                <a:solidFill>
+                  <a:srgbClr val="555E6C"/>
+                </a:solidFill>
+                <a:latin typeface="Noto Sans CJK KR"/>
+                <a:ea typeface="Noto Sans CJK KR"/>
+              </a:rPr>
+              <a:t>✓ 복선이 회수되었으며, 결말이 우연이 아닌 주인공의 선택으로 해결되는가?</a:t>
             </a:r>
           </a:p>
         </p:txBody>
@@ -21230,7 +21611,7 @@
               </a:lnSpc>
             </a:pPr>
             <a:r>
-              <a:rPr sz="1400" b="1" i="0">
+              <a:rPr sz="1100" b="1" i="0">
                 <a:solidFill>
                   <a:srgbClr val="1A212E"/>
                 </a:solidFill>
@@ -21250,7 +21631,7 @@
         </p:nvSpPr>
         <p:spPr>
           <a:xfrm>
-            <a:off x="6272784" y="3474720"/>
+            <a:off x="6272784" y="3511296"/>
             <a:ext cx="5120640" cy="219456"/>
           </a:xfrm>
           <a:prstGeom prst="rect">
@@ -21270,7 +21651,7 @@
               </a:lnSpc>
             </a:pPr>
             <a:r>
-              <a:rPr sz="1019" b="1" i="0">
+              <a:rPr sz="869" b="1" i="0">
                 <a:solidFill>
                   <a:srgbClr val="316B69"/>
                 </a:solidFill>
@@ -21317,9 +21698,29 @@
                 <a:latin typeface="Noto Sans CJK KR"/>
                 <a:ea typeface="Noto Sans CJK KR"/>
               </a:rPr>
-              <a:t>✓ 각 장면의 첫 문장이 흥미롭고 마지막 문장이 다음 장면을 궁금하게 만드는가?
-✓ 한 장면 안에서 시점(POV)이 흔들리거나 설명(Tell)이 과도한 구간은 없는가?
-✓ 긴박한 장면에서는 단문으로 속도를 높이고, 정서적 장면에서는 호흡을 늦추었는가?</a:t>
+              <a:t>✓ 각 장면의 첫 문장이 흥미롭고 마지막 문장이 다음 장면을 궁금하게 만드는가?</a:t>
+            </a:r>
+            <a:br/>
+            <a:r>
+              <a:rPr sz="1030" b="0" i="0">
+                <a:solidFill>
+                  <a:srgbClr val="555E6C"/>
+                </a:solidFill>
+                <a:latin typeface="Noto Sans CJK KR"/>
+                <a:ea typeface="Noto Sans CJK KR"/>
+              </a:rPr>
+              <a:t>✓ 한 장면 안에서 시점(POV)이 흔들리거나 설명(Tell)이 과도한 구간은 없는가?</a:t>
+            </a:r>
+            <a:br/>
+            <a:r>
+              <a:rPr sz="1030" b="0" i="0">
+                <a:solidFill>
+                  <a:srgbClr val="555E6C"/>
+                </a:solidFill>
+                <a:latin typeface="Noto Sans CJK KR"/>
+                <a:ea typeface="Noto Sans CJK KR"/>
+              </a:rPr>
+              <a:t>✓ 긴박한 장면에서는 단문으로 속도를 높이고, 정서적 장면에서는 호흡을 늦추었는가?</a:t>
             </a:r>
           </a:p>
         </p:txBody>
@@ -21530,7 +21931,7 @@
               </a:lnSpc>
             </a:pPr>
             <a:r>
-              <a:rPr sz="1400" b="1" i="0">
+              <a:rPr sz="1100" b="1" i="0">
                 <a:solidFill>
                   <a:srgbClr val="1A212E"/>
                 </a:solidFill>
@@ -21550,7 +21951,7 @@
         </p:nvSpPr>
         <p:spPr>
           <a:xfrm>
-            <a:off x="6272784" y="5138928"/>
+            <a:off x="6272784" y="5175504"/>
             <a:ext cx="5120640" cy="219456"/>
           </a:xfrm>
           <a:prstGeom prst="rect">
@@ -21570,7 +21971,7 @@
               </a:lnSpc>
             </a:pPr>
             <a:r>
-              <a:rPr sz="1019" b="1" i="0">
+              <a:rPr sz="869" b="1" i="0">
                 <a:solidFill>
                   <a:srgbClr val="D19830"/>
                 </a:solidFill>
@@ -21617,9 +22018,29 @@
                 <a:latin typeface="Noto Sans CJK KR"/>
                 <a:ea typeface="Noto Sans CJK KR"/>
               </a:rPr>
-              <a:t>✓ 상투적 부사(‘매우, 정말, 문득, 갑자기’)와 번역투(‘~에 다름 아니다, ~로부터’) 제거
-✓ 한 문장에 중복된 주어(‘그는 ~ 그의 ~’)와 불필요한 피동형(‘~되어졌다’) 교정
-✓ 육성으로 낭독(Read Aloud)했을 때 숨이 차거나 어색하게 걸리는 대사 수정</a:t>
+              <a:t>✓ 상투적 부사(‘매우, 정말, 문득, 갑자기’)와 번역투(‘~에 다름 아니다, ~로부터’) 제거</a:t>
+            </a:r>
+            <a:br/>
+            <a:r>
+              <a:rPr sz="1030" b="0" i="0">
+                <a:solidFill>
+                  <a:srgbClr val="555E6C"/>
+                </a:solidFill>
+                <a:latin typeface="Noto Sans CJK KR"/>
+                <a:ea typeface="Noto Sans CJK KR"/>
+              </a:rPr>
+              <a:t>✓ 한 문장에 중복된 주어(‘그는 ~ 그의 ~’)와 불필요한 피동형(‘~되어졌다’) 교정</a:t>
+            </a:r>
+            <a:br/>
+            <a:r>
+              <a:rPr sz="1030" b="0" i="0">
+                <a:solidFill>
+                  <a:srgbClr val="555E6C"/>
+                </a:solidFill>
+                <a:latin typeface="Noto Sans CJK KR"/>
+                <a:ea typeface="Noto Sans CJK KR"/>
+              </a:rPr>
+              <a:t>✓ 육성으로 낭독(Read Aloud)했을 때 숨이 차거나 어색하게 걸리는 대사 수정</a:t>
             </a:r>
           </a:p>
         </p:txBody>

--- a/소설쓰기_가이드.pptx
+++ b/소설쓰기_가이드.pptx
@@ -3239,7 +3239,7 @@
         </p:spPr>
         <p:txBody>
           <a:bodyPr wrap="square" anchor="ctr" lIns="54864" rIns="54864" tIns="38404" bIns="38404">
-            <a:spAutoFit/>
+            <a:normAutofit/>
           </a:bodyPr>
           <a:lstStyle/>
           <a:p>
@@ -3279,7 +3279,7 @@
         </p:spPr>
         <p:txBody>
           <a:bodyPr wrap="square" anchor="t" lIns="18288" rIns="18288" tIns="12801" bIns="12801">
-            <a:spAutoFit/>
+            <a:normAutofit/>
           </a:bodyPr>
           <a:lstStyle/>
           <a:p>
@@ -3374,7 +3374,7 @@
         </p:spPr>
         <p:txBody>
           <a:bodyPr wrap="square" anchor="t" lIns="18288" rIns="18288" tIns="12801" bIns="12801">
-            <a:spAutoFit/>
+            <a:normAutofit/>
           </a:bodyPr>
           <a:lstStyle/>
           <a:p>
@@ -3517,7 +3517,7 @@
         </p:spPr>
         <p:txBody>
           <a:bodyPr wrap="square" anchor="t" lIns="9144" rIns="9144" tIns="6400" bIns="6400">
-            <a:spAutoFit/>
+            <a:normAutofit/>
           </a:bodyPr>
           <a:lstStyle/>
           <a:p>
@@ -3557,7 +3557,7 @@
         </p:spPr>
         <p:txBody>
           <a:bodyPr wrap="square" anchor="t" lIns="9144" rIns="9144" tIns="6400" bIns="6400">
-            <a:spAutoFit/>
+            <a:normAutofit/>
           </a:bodyPr>
           <a:lstStyle/>
           <a:p>
@@ -3597,7 +3597,7 @@
         </p:spPr>
         <p:txBody>
           <a:bodyPr wrap="square" anchor="t" lIns="9144" rIns="9144" tIns="6400" bIns="6400">
-            <a:spAutoFit/>
+            <a:normAutofit/>
           </a:bodyPr>
           <a:lstStyle/>
           <a:p>
@@ -3729,7 +3729,7 @@
         </p:spPr>
         <p:txBody>
           <a:bodyPr wrap="square" anchor="t" lIns="9144" rIns="9144" tIns="6400" bIns="6400">
-            <a:spAutoFit/>
+            <a:normAutofit/>
           </a:bodyPr>
           <a:lstStyle/>
           <a:p>
@@ -3769,7 +3769,7 @@
         </p:spPr>
         <p:txBody>
           <a:bodyPr wrap="square" anchor="t" lIns="9144" rIns="9144" tIns="6400" bIns="6400">
-            <a:spAutoFit/>
+            <a:normAutofit/>
           </a:bodyPr>
           <a:lstStyle/>
           <a:p>
@@ -3809,7 +3809,7 @@
         </p:spPr>
         <p:txBody>
           <a:bodyPr wrap="square" anchor="t" lIns="9144" rIns="9144" tIns="6400" bIns="6400">
-            <a:spAutoFit/>
+            <a:normAutofit/>
           </a:bodyPr>
           <a:lstStyle/>
           <a:p>
@@ -3941,7 +3941,7 @@
         </p:spPr>
         <p:txBody>
           <a:bodyPr wrap="square" anchor="t" lIns="9144" rIns="9144" tIns="6400" bIns="6400">
-            <a:spAutoFit/>
+            <a:normAutofit/>
           </a:bodyPr>
           <a:lstStyle/>
           <a:p>
@@ -3981,7 +3981,7 @@
         </p:spPr>
         <p:txBody>
           <a:bodyPr wrap="square" anchor="t" lIns="9144" rIns="9144" tIns="6400" bIns="6400">
-            <a:spAutoFit/>
+            <a:normAutofit/>
           </a:bodyPr>
           <a:lstStyle/>
           <a:p>
@@ -4021,7 +4021,7 @@
         </p:spPr>
         <p:txBody>
           <a:bodyPr wrap="square" anchor="t" lIns="9144" rIns="9144" tIns="6400" bIns="6400">
-            <a:spAutoFit/>
+            <a:normAutofit/>
           </a:bodyPr>
           <a:lstStyle/>
           <a:p>
@@ -4153,7 +4153,7 @@
         </p:spPr>
         <p:txBody>
           <a:bodyPr wrap="square" anchor="t" lIns="9144" rIns="9144" tIns="6400" bIns="6400">
-            <a:spAutoFit/>
+            <a:normAutofit/>
           </a:bodyPr>
           <a:lstStyle/>
           <a:p>
@@ -4193,7 +4193,7 @@
         </p:spPr>
         <p:txBody>
           <a:bodyPr wrap="square" anchor="t" lIns="9144" rIns="9144" tIns="6400" bIns="6400">
-            <a:spAutoFit/>
+            <a:normAutofit/>
           </a:bodyPr>
           <a:lstStyle/>
           <a:p>
@@ -4233,7 +4233,7 @@
         </p:spPr>
         <p:txBody>
           <a:bodyPr wrap="square" anchor="t" lIns="9144" rIns="9144" tIns="6400" bIns="6400">
-            <a:spAutoFit/>
+            <a:normAutofit/>
           </a:bodyPr>
           <a:lstStyle/>
           <a:p>
@@ -4299,7 +4299,7 @@
         </p:spPr>
         <p:txBody>
           <a:bodyPr wrap="square" anchor="t" lIns="18288" rIns="18288" tIns="12801" bIns="12801">
-            <a:spAutoFit/>
+            <a:normAutofit/>
           </a:bodyPr>
           <a:lstStyle/>
           <a:p>
@@ -4339,7 +4339,7 @@
         </p:spPr>
         <p:txBody>
           <a:bodyPr wrap="square" anchor="t" lIns="18288" rIns="18288" tIns="12801" bIns="12801">
-            <a:spAutoFit/>
+            <a:normAutofit/>
           </a:bodyPr>
           <a:lstStyle/>
           <a:p>
@@ -4379,7 +4379,7 @@
         </p:spPr>
         <p:txBody>
           <a:bodyPr wrap="square" anchor="t" lIns="18288" rIns="18288" tIns="12801" bIns="12801">
-            <a:spAutoFit/>
+            <a:normAutofit/>
           </a:bodyPr>
           <a:lstStyle/>
           <a:p>
@@ -4551,7 +4551,7 @@
         </p:spPr>
         <p:txBody>
           <a:bodyPr wrap="square" anchor="t" lIns="9144" rIns="9144" tIns="6400" bIns="6400">
-            <a:spAutoFit/>
+            <a:normAutofit/>
           </a:bodyPr>
           <a:lstStyle/>
           <a:p>
@@ -4591,7 +4591,7 @@
         </p:spPr>
         <p:txBody>
           <a:bodyPr wrap="square" anchor="t" lIns="9144" rIns="9144" tIns="6400" bIns="6400">
-            <a:spAutoFit/>
+            <a:normAutofit/>
           </a:bodyPr>
           <a:lstStyle/>
           <a:p>
@@ -4723,7 +4723,7 @@
         </p:spPr>
         <p:txBody>
           <a:bodyPr wrap="square" anchor="t" lIns="9144" rIns="9144" tIns="6400" bIns="6400">
-            <a:spAutoFit/>
+            <a:normAutofit/>
           </a:bodyPr>
           <a:lstStyle/>
           <a:p>
@@ -4763,7 +4763,7 @@
         </p:spPr>
         <p:txBody>
           <a:bodyPr wrap="square" anchor="t" lIns="9144" rIns="9144" tIns="6400" bIns="6400">
-            <a:spAutoFit/>
+            <a:normAutofit/>
           </a:bodyPr>
           <a:lstStyle/>
           <a:p>
@@ -4851,7 +4851,7 @@
         </p:spPr>
         <p:txBody>
           <a:bodyPr wrap="square" anchor="ctr" lIns="9144" rIns="9144" tIns="6400" bIns="6400">
-            <a:spAutoFit/>
+            <a:normAutofit/>
           </a:bodyPr>
           <a:lstStyle/>
           <a:p>
@@ -4891,7 +4891,7 @@
         </p:spPr>
         <p:txBody>
           <a:bodyPr wrap="square" anchor="t" lIns="9144" rIns="9144" tIns="6400" bIns="6400">
-            <a:spAutoFit/>
+            <a:normAutofit/>
           </a:bodyPr>
           <a:lstStyle/>
           <a:p>
@@ -5045,7 +5045,7 @@
         </p:spPr>
         <p:txBody>
           <a:bodyPr wrap="square" anchor="t" lIns="9144" rIns="9144" tIns="6400" bIns="6400">
-            <a:spAutoFit/>
+            <a:normAutofit/>
           </a:bodyPr>
           <a:lstStyle/>
           <a:p>
@@ -5085,7 +5085,7 @@
         </p:spPr>
         <p:txBody>
           <a:bodyPr wrap="square" anchor="t" lIns="9144" rIns="9144" tIns="6400" bIns="6400">
-            <a:spAutoFit/>
+            <a:normAutofit/>
           </a:bodyPr>
           <a:lstStyle/>
           <a:p>
@@ -5173,7 +5173,7 @@
         </p:spPr>
         <p:txBody>
           <a:bodyPr wrap="square" anchor="ctr" lIns="9144" rIns="9144" tIns="6400" bIns="6400">
-            <a:spAutoFit/>
+            <a:normAutofit/>
           </a:bodyPr>
           <a:lstStyle/>
           <a:p>
@@ -5213,7 +5213,7 @@
         </p:spPr>
         <p:txBody>
           <a:bodyPr wrap="square" anchor="t" lIns="9144" rIns="9144" tIns="6400" bIns="6400">
-            <a:spAutoFit/>
+            <a:normAutofit/>
           </a:bodyPr>
           <a:lstStyle/>
           <a:p>
@@ -5367,7 +5367,7 @@
         </p:spPr>
         <p:txBody>
           <a:bodyPr wrap="square" anchor="t" lIns="9144" rIns="9144" tIns="6400" bIns="6400">
-            <a:spAutoFit/>
+            <a:normAutofit/>
           </a:bodyPr>
           <a:lstStyle/>
           <a:p>
@@ -5407,7 +5407,7 @@
         </p:spPr>
         <p:txBody>
           <a:bodyPr wrap="square" anchor="t" lIns="9144" rIns="9144" tIns="6400" bIns="6400">
-            <a:spAutoFit/>
+            <a:normAutofit/>
           </a:bodyPr>
           <a:lstStyle/>
           <a:p>
@@ -5495,7 +5495,7 @@
         </p:spPr>
         <p:txBody>
           <a:bodyPr wrap="square" anchor="ctr" lIns="9144" rIns="9144" tIns="6400" bIns="6400">
-            <a:spAutoFit/>
+            <a:normAutofit/>
           </a:bodyPr>
           <a:lstStyle/>
           <a:p>
@@ -5535,7 +5535,7 @@
         </p:spPr>
         <p:txBody>
           <a:bodyPr wrap="square" anchor="t" lIns="9144" rIns="9144" tIns="6400" bIns="6400">
-            <a:spAutoFit/>
+            <a:normAutofit/>
           </a:bodyPr>
           <a:lstStyle/>
           <a:p>
@@ -5643,7 +5643,7 @@
         </p:spPr>
         <p:txBody>
           <a:bodyPr wrap="square" anchor="ctr" lIns="54864" rIns="54864" tIns="38404" bIns="38404">
-            <a:spAutoFit/>
+            <a:normAutofit/>
           </a:bodyPr>
           <a:lstStyle/>
           <a:p>
@@ -5683,7 +5683,7 @@
         </p:spPr>
         <p:txBody>
           <a:bodyPr wrap="square" anchor="ctr" lIns="54864" rIns="54864" tIns="38404" bIns="38404">
-            <a:spAutoFit/>
+            <a:normAutofit/>
           </a:bodyPr>
           <a:lstStyle/>
           <a:p>
@@ -5749,7 +5749,7 @@
         </p:spPr>
         <p:txBody>
           <a:bodyPr wrap="square" anchor="t" lIns="18288" rIns="18288" tIns="12801" bIns="12801">
-            <a:spAutoFit/>
+            <a:normAutofit/>
           </a:bodyPr>
           <a:lstStyle/>
           <a:p>
@@ -5789,7 +5789,7 @@
         </p:spPr>
         <p:txBody>
           <a:bodyPr wrap="square" anchor="t" lIns="18288" rIns="18288" tIns="12801" bIns="12801">
-            <a:spAutoFit/>
+            <a:normAutofit/>
           </a:bodyPr>
           <a:lstStyle/>
           <a:p>
@@ -5829,7 +5829,7 @@
         </p:spPr>
         <p:txBody>
           <a:bodyPr wrap="square" anchor="t" lIns="18288" rIns="18288" tIns="12801" bIns="12801">
-            <a:spAutoFit/>
+            <a:normAutofit/>
           </a:bodyPr>
           <a:lstStyle/>
           <a:p>
@@ -6001,7 +6001,7 @@
         </p:spPr>
         <p:txBody>
           <a:bodyPr wrap="square" anchor="t" lIns="9144" rIns="9144" tIns="6400" bIns="6400">
-            <a:spAutoFit/>
+            <a:normAutofit/>
           </a:bodyPr>
           <a:lstStyle/>
           <a:p>
@@ -6041,7 +6041,7 @@
         </p:spPr>
         <p:txBody>
           <a:bodyPr wrap="square" anchor="t" lIns="9144" rIns="9144" tIns="6400" bIns="6400">
-            <a:spAutoFit/>
+            <a:normAutofit/>
           </a:bodyPr>
           <a:lstStyle/>
           <a:p>
@@ -6219,7 +6219,7 @@
         </p:spPr>
         <p:txBody>
           <a:bodyPr wrap="square" anchor="ctr" lIns="54864" rIns="54864" tIns="38404" bIns="38404">
-            <a:spAutoFit/>
+            <a:normAutofit/>
           </a:bodyPr>
           <a:lstStyle/>
           <a:p>
@@ -6259,7 +6259,7 @@
         </p:spPr>
         <p:txBody>
           <a:bodyPr wrap="square" anchor="t" lIns="9144" rIns="9144" tIns="6400" bIns="6400">
-            <a:spAutoFit/>
+            <a:normAutofit/>
           </a:bodyPr>
           <a:lstStyle/>
           <a:p>
@@ -6299,7 +6299,7 @@
         </p:spPr>
         <p:txBody>
           <a:bodyPr wrap="square" anchor="t" lIns="9144" rIns="9144" tIns="6400" bIns="6400">
-            <a:spAutoFit/>
+            <a:normAutofit/>
           </a:bodyPr>
           <a:lstStyle/>
           <a:p>
@@ -6339,7 +6339,7 @@
         </p:spPr>
         <p:txBody>
           <a:bodyPr wrap="square" anchor="t" lIns="18288" rIns="18288" tIns="12801" bIns="12801">
-            <a:spAutoFit/>
+            <a:normAutofit/>
           </a:bodyPr>
           <a:lstStyle/>
           <a:p>
@@ -6447,7 +6447,7 @@
         </p:spPr>
         <p:txBody>
           <a:bodyPr wrap="square" anchor="ctr" lIns="9144" rIns="9144" tIns="6400" bIns="6400">
-            <a:spAutoFit/>
+            <a:normAutofit/>
           </a:bodyPr>
           <a:lstStyle/>
           <a:p>
@@ -6625,7 +6625,7 @@
         </p:spPr>
         <p:txBody>
           <a:bodyPr wrap="square" anchor="ctr" lIns="54864" rIns="54864" tIns="38404" bIns="38404">
-            <a:spAutoFit/>
+            <a:normAutofit/>
           </a:bodyPr>
           <a:lstStyle/>
           <a:p>
@@ -6665,7 +6665,7 @@
         </p:spPr>
         <p:txBody>
           <a:bodyPr wrap="square" anchor="t" lIns="9144" rIns="9144" tIns="6400" bIns="6400">
-            <a:spAutoFit/>
+            <a:normAutofit/>
           </a:bodyPr>
           <a:lstStyle/>
           <a:p>
@@ -6705,7 +6705,7 @@
         </p:spPr>
         <p:txBody>
           <a:bodyPr wrap="square" anchor="t" lIns="9144" rIns="9144" tIns="6400" bIns="6400">
-            <a:spAutoFit/>
+            <a:normAutofit/>
           </a:bodyPr>
           <a:lstStyle/>
           <a:p>
@@ -6745,7 +6745,7 @@
         </p:spPr>
         <p:txBody>
           <a:bodyPr wrap="square" anchor="t" lIns="18288" rIns="18288" tIns="12801" bIns="12801">
-            <a:spAutoFit/>
+            <a:normAutofit/>
           </a:bodyPr>
           <a:lstStyle/>
           <a:p>
@@ -6853,7 +6853,7 @@
         </p:spPr>
         <p:txBody>
           <a:bodyPr wrap="square" anchor="ctr" lIns="9144" rIns="9144" tIns="6400" bIns="6400">
-            <a:spAutoFit/>
+            <a:normAutofit/>
           </a:bodyPr>
           <a:lstStyle/>
           <a:p>
@@ -7031,7 +7031,7 @@
         </p:spPr>
         <p:txBody>
           <a:bodyPr wrap="square" anchor="ctr" lIns="54864" rIns="54864" tIns="38404" bIns="38404">
-            <a:spAutoFit/>
+            <a:normAutofit/>
           </a:bodyPr>
           <a:lstStyle/>
           <a:p>
@@ -7071,7 +7071,7 @@
         </p:spPr>
         <p:txBody>
           <a:bodyPr wrap="square" anchor="t" lIns="9144" rIns="9144" tIns="6400" bIns="6400">
-            <a:spAutoFit/>
+            <a:normAutofit/>
           </a:bodyPr>
           <a:lstStyle/>
           <a:p>
@@ -7111,7 +7111,7 @@
         </p:spPr>
         <p:txBody>
           <a:bodyPr wrap="square" anchor="t" lIns="9144" rIns="9144" tIns="6400" bIns="6400">
-            <a:spAutoFit/>
+            <a:normAutofit/>
           </a:bodyPr>
           <a:lstStyle/>
           <a:p>
@@ -7151,7 +7151,7 @@
         </p:spPr>
         <p:txBody>
           <a:bodyPr wrap="square" anchor="t" lIns="18288" rIns="18288" tIns="12801" bIns="12801">
-            <a:spAutoFit/>
+            <a:normAutofit/>
           </a:bodyPr>
           <a:lstStyle/>
           <a:p>
@@ -7259,7 +7259,7 @@
         </p:spPr>
         <p:txBody>
           <a:bodyPr wrap="square" anchor="ctr" lIns="9144" rIns="9144" tIns="6400" bIns="6400">
-            <a:spAutoFit/>
+            <a:normAutofit/>
           </a:bodyPr>
           <a:lstStyle/>
           <a:p>
@@ -7437,7 +7437,7 @@
         </p:spPr>
         <p:txBody>
           <a:bodyPr wrap="square" anchor="ctr" lIns="54864" rIns="54864" tIns="38404" bIns="38404">
-            <a:spAutoFit/>
+            <a:normAutofit/>
           </a:bodyPr>
           <a:lstStyle/>
           <a:p>
@@ -7477,7 +7477,7 @@
         </p:spPr>
         <p:txBody>
           <a:bodyPr wrap="square" anchor="t" lIns="9144" rIns="9144" tIns="6400" bIns="6400">
-            <a:spAutoFit/>
+            <a:normAutofit/>
           </a:bodyPr>
           <a:lstStyle/>
           <a:p>
@@ -7517,7 +7517,7 @@
         </p:spPr>
         <p:txBody>
           <a:bodyPr wrap="square" anchor="t" lIns="9144" rIns="9144" tIns="6400" bIns="6400">
-            <a:spAutoFit/>
+            <a:normAutofit/>
           </a:bodyPr>
           <a:lstStyle/>
           <a:p>
@@ -7557,7 +7557,7 @@
         </p:spPr>
         <p:txBody>
           <a:bodyPr wrap="square" anchor="t" lIns="18288" rIns="18288" tIns="12801" bIns="12801">
-            <a:spAutoFit/>
+            <a:normAutofit/>
           </a:bodyPr>
           <a:lstStyle/>
           <a:p>
@@ -7665,7 +7665,7 @@
         </p:spPr>
         <p:txBody>
           <a:bodyPr wrap="square" anchor="ctr" lIns="9144" rIns="9144" tIns="6400" bIns="6400">
-            <a:spAutoFit/>
+            <a:normAutofit/>
           </a:bodyPr>
           <a:lstStyle/>
           <a:p>
@@ -7751,7 +7751,7 @@
         </p:spPr>
         <p:txBody>
           <a:bodyPr wrap="square" anchor="ctr" lIns="54864" rIns="54864" tIns="38404" bIns="38404">
-            <a:spAutoFit/>
+            <a:normAutofit/>
           </a:bodyPr>
           <a:lstStyle/>
           <a:p>
@@ -7817,7 +7817,7 @@
         </p:spPr>
         <p:txBody>
           <a:bodyPr wrap="square" anchor="t" lIns="18288" rIns="18288" tIns="12801" bIns="12801">
-            <a:spAutoFit/>
+            <a:normAutofit/>
           </a:bodyPr>
           <a:lstStyle/>
           <a:p>
@@ -7857,7 +7857,7 @@
         </p:spPr>
         <p:txBody>
           <a:bodyPr wrap="square" anchor="t" lIns="18288" rIns="18288" tIns="12801" bIns="12801">
-            <a:spAutoFit/>
+            <a:normAutofit/>
           </a:bodyPr>
           <a:lstStyle/>
           <a:p>
@@ -7897,7 +7897,7 @@
         </p:spPr>
         <p:txBody>
           <a:bodyPr wrap="square" anchor="t" lIns="18288" rIns="18288" tIns="12801" bIns="12801">
-            <a:spAutoFit/>
+            <a:normAutofit/>
           </a:bodyPr>
           <a:lstStyle/>
           <a:p>
@@ -8069,7 +8069,7 @@
         </p:spPr>
         <p:txBody>
           <a:bodyPr wrap="square" anchor="t" lIns="9144" rIns="9144" tIns="6400" bIns="6400">
-            <a:spAutoFit/>
+            <a:normAutofit/>
           </a:bodyPr>
           <a:lstStyle/>
           <a:p>
@@ -8109,7 +8109,7 @@
         </p:spPr>
         <p:txBody>
           <a:bodyPr wrap="square" anchor="t" lIns="9144" rIns="9144" tIns="6400" bIns="6400">
-            <a:spAutoFit/>
+            <a:normAutofit/>
           </a:bodyPr>
           <a:lstStyle/>
           <a:p>
@@ -8197,7 +8197,7 @@
         </p:spPr>
         <p:txBody>
           <a:bodyPr wrap="square" anchor="t" lIns="9144" rIns="9144" tIns="6400" bIns="6400">
-            <a:spAutoFit/>
+            <a:normAutofit/>
           </a:bodyPr>
           <a:lstStyle/>
           <a:p>
@@ -8285,7 +8285,7 @@
         </p:spPr>
         <p:txBody>
           <a:bodyPr wrap="square" anchor="t" lIns="9144" rIns="9144" tIns="6400" bIns="6400">
-            <a:spAutoFit/>
+            <a:normAutofit/>
           </a:bodyPr>
           <a:lstStyle/>
           <a:p>
@@ -8325,7 +8325,7 @@
         </p:spPr>
         <p:txBody>
           <a:bodyPr wrap="square" anchor="t" lIns="9144" rIns="9144" tIns="6400" bIns="6400">
-            <a:spAutoFit/>
+            <a:normAutofit/>
           </a:bodyPr>
           <a:lstStyle/>
           <a:p>
@@ -8365,7 +8365,7 @@
         </p:spPr>
         <p:txBody>
           <a:bodyPr wrap="square" anchor="t" lIns="54864" rIns="54864" tIns="38404" bIns="38404">
-            <a:spAutoFit/>
+            <a:normAutofit/>
           </a:bodyPr>
           <a:lstStyle/>
           <a:p>
@@ -8453,7 +8453,7 @@
         </p:spPr>
         <p:txBody>
           <a:bodyPr wrap="square" anchor="t" lIns="9144" rIns="9144" tIns="6400" bIns="6400">
-            <a:spAutoFit/>
+            <a:normAutofit/>
           </a:bodyPr>
           <a:lstStyle/>
           <a:p>
@@ -8493,7 +8493,7 @@
         </p:spPr>
         <p:txBody>
           <a:bodyPr wrap="square" anchor="t" lIns="9144" rIns="9144" tIns="6400" bIns="6400">
-            <a:spAutoFit/>
+            <a:normAutofit/>
           </a:bodyPr>
           <a:lstStyle/>
           <a:p>
@@ -8533,7 +8533,7 @@
         </p:spPr>
         <p:txBody>
           <a:bodyPr wrap="square" anchor="t" lIns="54864" rIns="54864" tIns="38404" bIns="38404">
-            <a:spAutoFit/>
+            <a:normAutofit/>
           </a:bodyPr>
           <a:lstStyle/>
           <a:p>
@@ -8621,7 +8621,7 @@
         </p:spPr>
         <p:txBody>
           <a:bodyPr wrap="square" anchor="t" lIns="9144" rIns="9144" tIns="6400" bIns="6400">
-            <a:spAutoFit/>
+            <a:normAutofit/>
           </a:bodyPr>
           <a:lstStyle/>
           <a:p>
@@ -8661,7 +8661,7 @@
         </p:spPr>
         <p:txBody>
           <a:bodyPr wrap="square" anchor="t" lIns="9144" rIns="9144" tIns="6400" bIns="6400">
-            <a:spAutoFit/>
+            <a:normAutofit/>
           </a:bodyPr>
           <a:lstStyle/>
           <a:p>
@@ -8701,7 +8701,7 @@
         </p:spPr>
         <p:txBody>
           <a:bodyPr wrap="square" anchor="t" lIns="54864" rIns="54864" tIns="38404" bIns="38404">
-            <a:spAutoFit/>
+            <a:normAutofit/>
           </a:bodyPr>
           <a:lstStyle/>
           <a:p>
@@ -8789,7 +8789,7 @@
         </p:spPr>
         <p:txBody>
           <a:bodyPr wrap="square" anchor="t" lIns="9144" rIns="9144" tIns="6400" bIns="6400">
-            <a:spAutoFit/>
+            <a:normAutofit/>
           </a:bodyPr>
           <a:lstStyle/>
           <a:p>
@@ -8829,7 +8829,7 @@
         </p:spPr>
         <p:txBody>
           <a:bodyPr wrap="square" anchor="t" lIns="9144" rIns="9144" tIns="6400" bIns="6400">
-            <a:spAutoFit/>
+            <a:normAutofit/>
           </a:bodyPr>
           <a:lstStyle/>
           <a:p>
@@ -8869,7 +8869,7 @@
         </p:spPr>
         <p:txBody>
           <a:bodyPr wrap="square" anchor="t" lIns="9144" rIns="9144" tIns="6400" bIns="6400">
-            <a:spAutoFit/>
+            <a:normAutofit/>
           </a:bodyPr>
           <a:lstStyle/>
           <a:p>
@@ -8957,7 +8957,7 @@
         </p:spPr>
         <p:txBody>
           <a:bodyPr wrap="square" anchor="t" lIns="9144" rIns="9144" tIns="6400" bIns="6400">
-            <a:spAutoFit/>
+            <a:normAutofit/>
           </a:bodyPr>
           <a:lstStyle/>
           <a:p>
@@ -8997,7 +8997,7 @@
         </p:spPr>
         <p:txBody>
           <a:bodyPr wrap="square" anchor="t" lIns="9144" rIns="9144" tIns="6400" bIns="6400">
-            <a:spAutoFit/>
+            <a:normAutofit/>
           </a:bodyPr>
           <a:lstStyle/>
           <a:p>
@@ -9037,7 +9037,7 @@
         </p:spPr>
         <p:txBody>
           <a:bodyPr wrap="square" anchor="t" lIns="54864" rIns="54864" tIns="38404" bIns="38404">
-            <a:spAutoFit/>
+            <a:normAutofit/>
           </a:bodyPr>
           <a:lstStyle/>
           <a:p>
@@ -9169,7 +9169,7 @@
         </p:spPr>
         <p:txBody>
           <a:bodyPr wrap="square" anchor="t" lIns="9144" rIns="9144" tIns="6400" bIns="6400">
-            <a:spAutoFit/>
+            <a:normAutofit/>
           </a:bodyPr>
           <a:lstStyle/>
           <a:p>
@@ -9255,7 +9255,7 @@
         </p:spPr>
         <p:txBody>
           <a:bodyPr wrap="square" anchor="ctr" lIns="54864" rIns="54864" tIns="38404" bIns="38404">
-            <a:spAutoFit/>
+            <a:normAutofit/>
           </a:bodyPr>
           <a:lstStyle/>
           <a:p>
@@ -9295,7 +9295,7 @@
         </p:spPr>
         <p:txBody>
           <a:bodyPr wrap="square" anchor="t" lIns="9144" rIns="9144" tIns="6400" bIns="6400">
-            <a:spAutoFit/>
+            <a:normAutofit/>
           </a:bodyPr>
           <a:lstStyle/>
           <a:p>
@@ -9383,7 +9383,7 @@
         </p:spPr>
         <p:txBody>
           <a:bodyPr wrap="square" anchor="t" lIns="9144" rIns="9144" tIns="6400" bIns="6400">
-            <a:spAutoFit/>
+            <a:normAutofit/>
           </a:bodyPr>
           <a:lstStyle/>
           <a:p>
@@ -9423,7 +9423,7 @@
         </p:spPr>
         <p:txBody>
           <a:bodyPr wrap="square" anchor="t" lIns="9144" rIns="9144" tIns="6400" bIns="6400">
-            <a:spAutoFit/>
+            <a:normAutofit/>
           </a:bodyPr>
           <a:lstStyle/>
           <a:p>
@@ -9463,7 +9463,7 @@
         </p:spPr>
         <p:txBody>
           <a:bodyPr wrap="square" anchor="t" lIns="54864" rIns="54864" tIns="38404" bIns="38404">
-            <a:spAutoFit/>
+            <a:normAutofit/>
           </a:bodyPr>
           <a:lstStyle/>
           <a:p>
@@ -9595,7 +9595,7 @@
         </p:spPr>
         <p:txBody>
           <a:bodyPr wrap="square" anchor="t" lIns="9144" rIns="9144" tIns="6400" bIns="6400">
-            <a:spAutoFit/>
+            <a:normAutofit/>
           </a:bodyPr>
           <a:lstStyle/>
           <a:p>
@@ -9681,7 +9681,7 @@
         </p:spPr>
         <p:txBody>
           <a:bodyPr wrap="square" anchor="ctr" lIns="54864" rIns="54864" tIns="38404" bIns="38404">
-            <a:spAutoFit/>
+            <a:normAutofit/>
           </a:bodyPr>
           <a:lstStyle/>
           <a:p>
@@ -9721,7 +9721,7 @@
         </p:spPr>
         <p:txBody>
           <a:bodyPr wrap="square" anchor="t" lIns="9144" rIns="9144" tIns="6400" bIns="6400">
-            <a:spAutoFit/>
+            <a:normAutofit/>
           </a:bodyPr>
           <a:lstStyle/>
           <a:p>
@@ -9809,7 +9809,7 @@
         </p:spPr>
         <p:txBody>
           <a:bodyPr wrap="square" anchor="t" lIns="9144" rIns="9144" tIns="6400" bIns="6400">
-            <a:spAutoFit/>
+            <a:normAutofit/>
           </a:bodyPr>
           <a:lstStyle/>
           <a:p>
@@ -9849,7 +9849,7 @@
         </p:spPr>
         <p:txBody>
           <a:bodyPr wrap="square" anchor="t" lIns="9144" rIns="9144" tIns="6400" bIns="6400">
-            <a:spAutoFit/>
+            <a:normAutofit/>
           </a:bodyPr>
           <a:lstStyle/>
           <a:p>
@@ -9889,7 +9889,7 @@
         </p:spPr>
         <p:txBody>
           <a:bodyPr wrap="square" anchor="t" lIns="54864" rIns="54864" tIns="38404" bIns="38404">
-            <a:spAutoFit/>
+            <a:normAutofit/>
           </a:bodyPr>
           <a:lstStyle/>
           <a:p>
@@ -10021,7 +10021,7 @@
         </p:spPr>
         <p:txBody>
           <a:bodyPr wrap="square" anchor="t" lIns="9144" rIns="9144" tIns="6400" bIns="6400">
-            <a:spAutoFit/>
+            <a:normAutofit/>
           </a:bodyPr>
           <a:lstStyle/>
           <a:p>
@@ -10107,7 +10107,7 @@
         </p:spPr>
         <p:txBody>
           <a:bodyPr wrap="square" anchor="ctr" lIns="54864" rIns="54864" tIns="38404" bIns="38404">
-            <a:spAutoFit/>
+            <a:normAutofit/>
           </a:bodyPr>
           <a:lstStyle/>
           <a:p>
@@ -10147,7 +10147,7 @@
         </p:spPr>
         <p:txBody>
           <a:bodyPr wrap="square" anchor="t" lIns="9144" rIns="9144" tIns="6400" bIns="6400">
-            <a:spAutoFit/>
+            <a:normAutofit/>
           </a:bodyPr>
           <a:lstStyle/>
           <a:p>
@@ -10213,7 +10213,7 @@
         </p:spPr>
         <p:txBody>
           <a:bodyPr wrap="square" anchor="t" lIns="18288" rIns="18288" tIns="12801" bIns="12801">
-            <a:spAutoFit/>
+            <a:normAutofit/>
           </a:bodyPr>
           <a:lstStyle/>
           <a:p>
@@ -10253,7 +10253,7 @@
         </p:spPr>
         <p:txBody>
           <a:bodyPr wrap="square" anchor="t" lIns="18288" rIns="18288" tIns="12801" bIns="12801">
-            <a:spAutoFit/>
+            <a:normAutofit/>
           </a:bodyPr>
           <a:lstStyle/>
           <a:p>
@@ -10293,7 +10293,7 @@
         </p:spPr>
         <p:txBody>
           <a:bodyPr wrap="square" anchor="t" lIns="18288" rIns="18288" tIns="12801" bIns="12801">
-            <a:spAutoFit/>
+            <a:normAutofit/>
           </a:bodyPr>
           <a:lstStyle/>
           <a:p>
@@ -10465,7 +10465,7 @@
         </p:spPr>
         <p:txBody>
           <a:bodyPr wrap="square" anchor="t" lIns="9144" rIns="9144" tIns="6400" bIns="6400">
-            <a:spAutoFit/>
+            <a:normAutofit/>
           </a:bodyPr>
           <a:lstStyle/>
           <a:p>
@@ -10505,7 +10505,7 @@
         </p:spPr>
         <p:txBody>
           <a:bodyPr wrap="square" anchor="t" lIns="9144" rIns="9144" tIns="6400" bIns="6400">
-            <a:spAutoFit/>
+            <a:normAutofit/>
           </a:bodyPr>
           <a:lstStyle/>
           <a:p>
@@ -10593,7 +10593,7 @@
         </p:spPr>
         <p:txBody>
           <a:bodyPr wrap="square" anchor="t" lIns="9144" rIns="9144" tIns="6400" bIns="6400">
-            <a:spAutoFit/>
+            <a:normAutofit/>
           </a:bodyPr>
           <a:lstStyle/>
           <a:p>
@@ -10749,7 +10749,7 @@
         </p:spPr>
         <p:txBody>
           <a:bodyPr wrap="square" anchor="t" lIns="9144" rIns="9144" tIns="6400" bIns="6400">
-            <a:spAutoFit/>
+            <a:normAutofit/>
           </a:bodyPr>
           <a:lstStyle/>
           <a:p>
@@ -10789,7 +10789,7 @@
         </p:spPr>
         <p:txBody>
           <a:bodyPr wrap="square" anchor="t" lIns="9144" rIns="9144" tIns="6400" bIns="6400">
-            <a:spAutoFit/>
+            <a:normAutofit/>
           </a:bodyPr>
           <a:lstStyle/>
           <a:p>
@@ -10921,7 +10921,7 @@
         </p:spPr>
         <p:txBody>
           <a:bodyPr wrap="square" anchor="t" lIns="9144" rIns="9144" tIns="6400" bIns="6400">
-            <a:spAutoFit/>
+            <a:normAutofit/>
           </a:bodyPr>
           <a:lstStyle/>
           <a:p>
@@ -10961,7 +10961,7 @@
         </p:spPr>
         <p:txBody>
           <a:bodyPr wrap="square" anchor="t" lIns="9144" rIns="9144" tIns="6400" bIns="6400">
-            <a:spAutoFit/>
+            <a:normAutofit/>
           </a:bodyPr>
           <a:lstStyle/>
           <a:p>
@@ -11093,7 +11093,7 @@
         </p:spPr>
         <p:txBody>
           <a:bodyPr wrap="square" anchor="t" lIns="9144" rIns="9144" tIns="6400" bIns="6400">
-            <a:spAutoFit/>
+            <a:normAutofit/>
           </a:bodyPr>
           <a:lstStyle/>
           <a:p>
@@ -11133,7 +11133,7 @@
         </p:spPr>
         <p:txBody>
           <a:bodyPr wrap="square" anchor="t" lIns="9144" rIns="9144" tIns="6400" bIns="6400">
-            <a:spAutoFit/>
+            <a:normAutofit/>
           </a:bodyPr>
           <a:lstStyle/>
           <a:p>
@@ -11219,7 +11219,7 @@
         </p:spPr>
         <p:txBody>
           <a:bodyPr wrap="square" anchor="t" lIns="9144" rIns="9144" tIns="6400" bIns="6400">
-            <a:spAutoFit/>
+            <a:normAutofit/>
           </a:bodyPr>
           <a:lstStyle/>
           <a:p>
@@ -11259,7 +11259,7 @@
         </p:spPr>
         <p:txBody>
           <a:bodyPr wrap="square" anchor="t" lIns="9144" rIns="9144" tIns="6400" bIns="6400">
-            <a:spAutoFit/>
+            <a:normAutofit/>
           </a:bodyPr>
           <a:lstStyle/>
           <a:p>
@@ -11299,7 +11299,7 @@
         </p:spPr>
         <p:txBody>
           <a:bodyPr wrap="square" anchor="t" lIns="9144" rIns="9144" tIns="6400" bIns="6400">
-            <a:spAutoFit/>
+            <a:normAutofit/>
           </a:bodyPr>
           <a:lstStyle/>
           <a:p>
@@ -11339,7 +11339,7 @@
         </p:spPr>
         <p:txBody>
           <a:bodyPr wrap="square" anchor="t" lIns="9144" rIns="9144" tIns="6400" bIns="6400">
-            <a:spAutoFit/>
+            <a:normAutofit/>
           </a:bodyPr>
           <a:lstStyle/>
           <a:p>
@@ -11379,7 +11379,7 @@
         </p:spPr>
         <p:txBody>
           <a:bodyPr wrap="square" anchor="t" lIns="9144" rIns="9144" tIns="6400" bIns="6400">
-            <a:spAutoFit/>
+            <a:normAutofit/>
           </a:bodyPr>
           <a:lstStyle/>
           <a:p>
@@ -11419,7 +11419,7 @@
         </p:spPr>
         <p:txBody>
           <a:bodyPr wrap="square" anchor="t" lIns="9144" rIns="9144" tIns="6400" bIns="6400">
-            <a:spAutoFit/>
+            <a:normAutofit/>
           </a:bodyPr>
           <a:lstStyle/>
           <a:p>
@@ -11459,7 +11459,7 @@
         </p:spPr>
         <p:txBody>
           <a:bodyPr wrap="square" anchor="t" lIns="9144" rIns="9144" tIns="6400" bIns="6400">
-            <a:spAutoFit/>
+            <a:normAutofit/>
           </a:bodyPr>
           <a:lstStyle/>
           <a:p>
@@ -11499,7 +11499,7 @@
         </p:spPr>
         <p:txBody>
           <a:bodyPr wrap="square" anchor="t" lIns="9144" rIns="9144" tIns="6400" bIns="6400">
-            <a:spAutoFit/>
+            <a:normAutofit/>
           </a:bodyPr>
           <a:lstStyle/>
           <a:p>
@@ -11539,7 +11539,7 @@
         </p:spPr>
         <p:txBody>
           <a:bodyPr wrap="square" anchor="t" lIns="9144" rIns="9144" tIns="6400" bIns="6400">
-            <a:spAutoFit/>
+            <a:normAutofit/>
           </a:bodyPr>
           <a:lstStyle/>
           <a:p>
@@ -11605,7 +11605,7 @@
         </p:spPr>
         <p:txBody>
           <a:bodyPr wrap="square" anchor="t" lIns="18288" rIns="18288" tIns="12801" bIns="12801">
-            <a:spAutoFit/>
+            <a:normAutofit/>
           </a:bodyPr>
           <a:lstStyle/>
           <a:p>
@@ -11645,7 +11645,7 @@
         </p:spPr>
         <p:txBody>
           <a:bodyPr wrap="square" anchor="t" lIns="18288" rIns="18288" tIns="12801" bIns="12801">
-            <a:spAutoFit/>
+            <a:normAutofit/>
           </a:bodyPr>
           <a:lstStyle/>
           <a:p>
@@ -11685,7 +11685,7 @@
         </p:spPr>
         <p:txBody>
           <a:bodyPr wrap="square" anchor="t" lIns="18288" rIns="18288" tIns="12801" bIns="12801">
-            <a:spAutoFit/>
+            <a:normAutofit/>
           </a:bodyPr>
           <a:lstStyle/>
           <a:p>
@@ -11857,7 +11857,7 @@
         </p:spPr>
         <p:txBody>
           <a:bodyPr wrap="square" anchor="t" lIns="9144" rIns="9144" tIns="6400" bIns="6400">
-            <a:spAutoFit/>
+            <a:normAutofit/>
           </a:bodyPr>
           <a:lstStyle/>
           <a:p>
@@ -11897,7 +11897,7 @@
         </p:spPr>
         <p:txBody>
           <a:bodyPr wrap="square" anchor="t" lIns="9144" rIns="9144" tIns="6400" bIns="6400">
-            <a:spAutoFit/>
+            <a:normAutofit/>
           </a:bodyPr>
           <a:lstStyle/>
           <a:p>
@@ -12101,7 +12101,7 @@
         </p:spPr>
         <p:txBody>
           <a:bodyPr wrap="square" anchor="t" lIns="9144" rIns="9144" tIns="6400" bIns="6400">
-            <a:spAutoFit/>
+            <a:normAutofit/>
           </a:bodyPr>
           <a:lstStyle/>
           <a:p>
@@ -12141,7 +12141,7 @@
         </p:spPr>
         <p:txBody>
           <a:bodyPr wrap="square" anchor="t" lIns="9144" rIns="9144" tIns="6400" bIns="6400">
-            <a:spAutoFit/>
+            <a:normAutofit/>
           </a:bodyPr>
           <a:lstStyle/>
           <a:p>
@@ -12181,7 +12181,7 @@
         </p:spPr>
         <p:txBody>
           <a:bodyPr wrap="square" anchor="t" lIns="9144" rIns="9144" tIns="6400" bIns="6400">
-            <a:spAutoFit/>
+            <a:normAutofit/>
           </a:bodyPr>
           <a:lstStyle/>
           <a:p>
@@ -12313,7 +12313,7 @@
         </p:spPr>
         <p:txBody>
           <a:bodyPr wrap="square" anchor="t" lIns="9144" rIns="9144" tIns="6400" bIns="6400">
-            <a:spAutoFit/>
+            <a:normAutofit/>
           </a:bodyPr>
           <a:lstStyle/>
           <a:p>
@@ -12353,7 +12353,7 @@
         </p:spPr>
         <p:txBody>
           <a:bodyPr wrap="square" anchor="t" lIns="9144" rIns="9144" tIns="6400" bIns="6400">
-            <a:spAutoFit/>
+            <a:normAutofit/>
           </a:bodyPr>
           <a:lstStyle/>
           <a:p>
@@ -12393,7 +12393,7 @@
         </p:spPr>
         <p:txBody>
           <a:bodyPr wrap="square" anchor="t" lIns="9144" rIns="9144" tIns="6400" bIns="6400">
-            <a:spAutoFit/>
+            <a:normAutofit/>
           </a:bodyPr>
           <a:lstStyle/>
           <a:p>
@@ -12525,7 +12525,7 @@
         </p:spPr>
         <p:txBody>
           <a:bodyPr wrap="square" anchor="t" lIns="9144" rIns="9144" tIns="6400" bIns="6400">
-            <a:spAutoFit/>
+            <a:normAutofit/>
           </a:bodyPr>
           <a:lstStyle/>
           <a:p>
@@ -12565,7 +12565,7 @@
         </p:spPr>
         <p:txBody>
           <a:bodyPr wrap="square" anchor="t" lIns="9144" rIns="9144" tIns="6400" bIns="6400">
-            <a:spAutoFit/>
+            <a:normAutofit/>
           </a:bodyPr>
           <a:lstStyle/>
           <a:p>
@@ -12605,7 +12605,7 @@
         </p:spPr>
         <p:txBody>
           <a:bodyPr wrap="square" anchor="t" lIns="9144" rIns="9144" tIns="6400" bIns="6400">
-            <a:spAutoFit/>
+            <a:normAutofit/>
           </a:bodyPr>
           <a:lstStyle/>
           <a:p>
@@ -12737,7 +12737,7 @@
         </p:spPr>
         <p:txBody>
           <a:bodyPr wrap="square" anchor="t" lIns="9144" rIns="9144" tIns="6400" bIns="6400">
-            <a:spAutoFit/>
+            <a:normAutofit/>
           </a:bodyPr>
           <a:lstStyle/>
           <a:p>
@@ -12777,7 +12777,7 @@
         </p:spPr>
         <p:txBody>
           <a:bodyPr wrap="square" anchor="t" lIns="9144" rIns="9144" tIns="6400" bIns="6400">
-            <a:spAutoFit/>
+            <a:normAutofit/>
           </a:bodyPr>
           <a:lstStyle/>
           <a:p>
@@ -12817,7 +12817,7 @@
         </p:spPr>
         <p:txBody>
           <a:bodyPr wrap="square" anchor="t" lIns="9144" rIns="9144" tIns="6400" bIns="6400">
-            <a:spAutoFit/>
+            <a:normAutofit/>
           </a:bodyPr>
           <a:lstStyle/>
           <a:p>
@@ -12949,7 +12949,7 @@
         </p:spPr>
         <p:txBody>
           <a:bodyPr wrap="square" anchor="t" lIns="9144" rIns="9144" tIns="6400" bIns="6400">
-            <a:spAutoFit/>
+            <a:normAutofit/>
           </a:bodyPr>
           <a:lstStyle/>
           <a:p>
@@ -12989,7 +12989,7 @@
         </p:spPr>
         <p:txBody>
           <a:bodyPr wrap="square" anchor="t" lIns="9144" rIns="9144" tIns="6400" bIns="6400">
-            <a:spAutoFit/>
+            <a:normAutofit/>
           </a:bodyPr>
           <a:lstStyle/>
           <a:p>
@@ -13029,7 +13029,7 @@
         </p:spPr>
         <p:txBody>
           <a:bodyPr wrap="square" anchor="t" lIns="9144" rIns="9144" tIns="6400" bIns="6400">
-            <a:spAutoFit/>
+            <a:normAutofit/>
           </a:bodyPr>
           <a:lstStyle/>
           <a:p>
@@ -13095,7 +13095,7 @@
         </p:spPr>
         <p:txBody>
           <a:bodyPr wrap="square" anchor="t" lIns="18288" rIns="18288" tIns="12801" bIns="12801">
-            <a:spAutoFit/>
+            <a:normAutofit/>
           </a:bodyPr>
           <a:lstStyle/>
           <a:p>
@@ -13135,7 +13135,7 @@
         </p:spPr>
         <p:txBody>
           <a:bodyPr wrap="square" anchor="t" lIns="18288" rIns="18288" tIns="12801" bIns="12801">
-            <a:spAutoFit/>
+            <a:normAutofit/>
           </a:bodyPr>
           <a:lstStyle/>
           <a:p>
@@ -13175,7 +13175,7 @@
         </p:spPr>
         <p:txBody>
           <a:bodyPr wrap="square" anchor="t" lIns="18288" rIns="18288" tIns="12801" bIns="12801">
-            <a:spAutoFit/>
+            <a:normAutofit/>
           </a:bodyPr>
           <a:lstStyle/>
           <a:p>
@@ -13347,7 +13347,7 @@
         </p:spPr>
         <p:txBody>
           <a:bodyPr wrap="square" anchor="t" lIns="9144" rIns="9144" tIns="6400" bIns="6400">
-            <a:spAutoFit/>
+            <a:normAutofit/>
           </a:bodyPr>
           <a:lstStyle/>
           <a:p>
@@ -13387,7 +13387,7 @@
         </p:spPr>
         <p:txBody>
           <a:bodyPr wrap="square" anchor="t" lIns="9144" rIns="9144" tIns="6400" bIns="6400">
-            <a:spAutoFit/>
+            <a:normAutofit/>
           </a:bodyPr>
           <a:lstStyle/>
           <a:p>
@@ -13475,7 +13475,7 @@
         </p:spPr>
         <p:txBody>
           <a:bodyPr wrap="square" anchor="t" lIns="9144" rIns="9144" tIns="6400" bIns="6400">
-            <a:spAutoFit/>
+            <a:normAutofit/>
           </a:bodyPr>
           <a:lstStyle/>
           <a:p>
@@ -13563,7 +13563,7 @@
         </p:spPr>
         <p:txBody>
           <a:bodyPr wrap="square" anchor="t" lIns="9144" rIns="9144" tIns="6400" bIns="6400">
-            <a:spAutoFit/>
+            <a:normAutofit/>
           </a:bodyPr>
           <a:lstStyle/>
           <a:p>
@@ -13651,7 +13651,7 @@
         </p:spPr>
         <p:txBody>
           <a:bodyPr wrap="square" anchor="t" lIns="9144" rIns="9144" tIns="6400" bIns="6400">
-            <a:spAutoFit/>
+            <a:normAutofit/>
           </a:bodyPr>
           <a:lstStyle/>
           <a:p>
@@ -13691,7 +13691,7 @@
         </p:spPr>
         <p:txBody>
           <a:bodyPr wrap="square" anchor="t" lIns="9144" rIns="9144" tIns="6400" bIns="6400">
-            <a:spAutoFit/>
+            <a:normAutofit/>
           </a:bodyPr>
           <a:lstStyle/>
           <a:p>
@@ -13779,7 +13779,7 @@
         </p:spPr>
         <p:txBody>
           <a:bodyPr wrap="square" anchor="t" lIns="9144" rIns="9144" tIns="6400" bIns="6400">
-            <a:spAutoFit/>
+            <a:normAutofit/>
           </a:bodyPr>
           <a:lstStyle/>
           <a:p>
@@ -13819,7 +13819,7 @@
         </p:spPr>
         <p:txBody>
           <a:bodyPr wrap="square" anchor="t" lIns="9144" rIns="9144" tIns="6400" bIns="6400">
-            <a:spAutoFit/>
+            <a:normAutofit/>
           </a:bodyPr>
           <a:lstStyle/>
           <a:p>
@@ -13907,7 +13907,7 @@
         </p:spPr>
         <p:txBody>
           <a:bodyPr wrap="square" anchor="t" lIns="9144" rIns="9144" tIns="6400" bIns="6400">
-            <a:spAutoFit/>
+            <a:normAutofit/>
           </a:bodyPr>
           <a:lstStyle/>
           <a:p>
@@ -13947,7 +13947,7 @@
         </p:spPr>
         <p:txBody>
           <a:bodyPr wrap="square" anchor="t" lIns="9144" rIns="9144" tIns="6400" bIns="6400">
-            <a:spAutoFit/>
+            <a:normAutofit/>
           </a:bodyPr>
           <a:lstStyle/>
           <a:p>
@@ -14035,7 +14035,7 @@
         </p:spPr>
         <p:txBody>
           <a:bodyPr wrap="square" anchor="t" lIns="9144" rIns="9144" tIns="6400" bIns="6400">
-            <a:spAutoFit/>
+            <a:normAutofit/>
           </a:bodyPr>
           <a:lstStyle/>
           <a:p>
@@ -14123,7 +14123,7 @@
         </p:spPr>
         <p:txBody>
           <a:bodyPr wrap="square" anchor="t" lIns="9144" rIns="9144" tIns="6400" bIns="6400">
-            <a:spAutoFit/>
+            <a:normAutofit/>
           </a:bodyPr>
           <a:lstStyle/>
           <a:p>
@@ -14163,7 +14163,7 @@
         </p:spPr>
         <p:txBody>
           <a:bodyPr wrap="square" anchor="t" lIns="9144" rIns="9144" tIns="6400" bIns="6400">
-            <a:spAutoFit/>
+            <a:normAutofit/>
           </a:bodyPr>
           <a:lstStyle/>
           <a:p>
@@ -14251,7 +14251,7 @@
         </p:spPr>
         <p:txBody>
           <a:bodyPr wrap="square" anchor="t" lIns="9144" rIns="9144" tIns="6400" bIns="6400">
-            <a:spAutoFit/>
+            <a:normAutofit/>
           </a:bodyPr>
           <a:lstStyle/>
           <a:p>
@@ -14291,7 +14291,7 @@
         </p:spPr>
         <p:txBody>
           <a:bodyPr wrap="square" anchor="t" lIns="9144" rIns="9144" tIns="6400" bIns="6400">
-            <a:spAutoFit/>
+            <a:normAutofit/>
           </a:bodyPr>
           <a:lstStyle/>
           <a:p>
@@ -14379,7 +14379,7 @@
         </p:spPr>
         <p:txBody>
           <a:bodyPr wrap="square" anchor="t" lIns="9144" rIns="9144" tIns="6400" bIns="6400">
-            <a:spAutoFit/>
+            <a:normAutofit/>
           </a:bodyPr>
           <a:lstStyle/>
           <a:p>
@@ -14419,7 +14419,7 @@
         </p:spPr>
         <p:txBody>
           <a:bodyPr wrap="square" anchor="t" lIns="9144" rIns="9144" tIns="6400" bIns="6400">
-            <a:spAutoFit/>
+            <a:normAutofit/>
           </a:bodyPr>
           <a:lstStyle/>
           <a:p>
@@ -14507,7 +14507,7 @@
         </p:spPr>
         <p:txBody>
           <a:bodyPr wrap="square" anchor="t" lIns="9144" rIns="9144" tIns="6400" bIns="6400">
-            <a:spAutoFit/>
+            <a:normAutofit/>
           </a:bodyPr>
           <a:lstStyle/>
           <a:p>
@@ -14639,7 +14639,7 @@
         </p:spPr>
         <p:txBody>
           <a:bodyPr wrap="square" anchor="t" lIns="9144" rIns="9144" tIns="6400" bIns="6400">
-            <a:spAutoFit/>
+            <a:normAutofit/>
           </a:bodyPr>
           <a:lstStyle/>
           <a:p>
@@ -14679,7 +14679,7 @@
         </p:spPr>
         <p:txBody>
           <a:bodyPr wrap="square" anchor="t" lIns="9144" rIns="9144" tIns="6400" bIns="6400">
-            <a:spAutoFit/>
+            <a:normAutofit/>
           </a:bodyPr>
           <a:lstStyle/>
           <a:p>
@@ -14811,7 +14811,7 @@
         </p:spPr>
         <p:txBody>
           <a:bodyPr wrap="square" anchor="t" lIns="9144" rIns="9144" tIns="6400" bIns="6400">
-            <a:spAutoFit/>
+            <a:normAutofit/>
           </a:bodyPr>
           <a:lstStyle/>
           <a:p>
@@ -14851,7 +14851,7 @@
         </p:spPr>
         <p:txBody>
           <a:bodyPr wrap="square" anchor="t" lIns="9144" rIns="9144" tIns="6400" bIns="6400">
-            <a:spAutoFit/>
+            <a:normAutofit/>
           </a:bodyPr>
           <a:lstStyle/>
           <a:p>
@@ -14983,7 +14983,7 @@
         </p:spPr>
         <p:txBody>
           <a:bodyPr wrap="square" anchor="t" lIns="9144" rIns="9144" tIns="6400" bIns="6400">
-            <a:spAutoFit/>
+            <a:normAutofit/>
           </a:bodyPr>
           <a:lstStyle/>
           <a:p>
@@ -15023,7 +15023,7 @@
         </p:spPr>
         <p:txBody>
           <a:bodyPr wrap="square" anchor="t" lIns="9144" rIns="9144" tIns="6400" bIns="6400">
-            <a:spAutoFit/>
+            <a:normAutofit/>
           </a:bodyPr>
           <a:lstStyle/>
           <a:p>
@@ -15109,7 +15109,7 @@
         </p:spPr>
         <p:txBody>
           <a:bodyPr wrap="square" anchor="t" lIns="9144" rIns="9144" tIns="6400" bIns="6400">
-            <a:spAutoFit/>
+            <a:normAutofit/>
           </a:bodyPr>
           <a:lstStyle/>
           <a:p>
@@ -15149,7 +15149,7 @@
         </p:spPr>
         <p:txBody>
           <a:bodyPr wrap="square" anchor="t" lIns="9144" rIns="9144" tIns="6400" bIns="6400">
-            <a:spAutoFit/>
+            <a:normAutofit/>
           </a:bodyPr>
           <a:lstStyle/>
           <a:p>
@@ -15237,7 +15237,7 @@
         </p:spPr>
         <p:txBody>
           <a:bodyPr wrap="square" anchor="t" lIns="18288" rIns="18288" tIns="12801" bIns="12801">
-            <a:spAutoFit/>
+            <a:normAutofit/>
           </a:bodyPr>
           <a:lstStyle/>
           <a:p>
@@ -15277,7 +15277,7 @@
         </p:spPr>
         <p:txBody>
           <a:bodyPr wrap="square" anchor="t" lIns="18288" rIns="18288" tIns="12801" bIns="12801">
-            <a:spAutoFit/>
+            <a:normAutofit/>
           </a:bodyPr>
           <a:lstStyle/>
           <a:p>
@@ -15317,7 +15317,7 @@
         </p:spPr>
         <p:txBody>
           <a:bodyPr wrap="square" anchor="t" lIns="18288" rIns="18288" tIns="12801" bIns="12801">
-            <a:spAutoFit/>
+            <a:normAutofit/>
           </a:bodyPr>
           <a:lstStyle/>
           <a:p>
@@ -15489,7 +15489,7 @@
         </p:spPr>
         <p:txBody>
           <a:bodyPr wrap="square" anchor="t" lIns="9144" rIns="9144" tIns="6400" bIns="6400">
-            <a:spAutoFit/>
+            <a:normAutofit/>
           </a:bodyPr>
           <a:lstStyle/>
           <a:p>
@@ -15529,7 +15529,7 @@
         </p:spPr>
         <p:txBody>
           <a:bodyPr wrap="square" anchor="t" lIns="9144" rIns="9144" tIns="6400" bIns="6400">
-            <a:spAutoFit/>
+            <a:normAutofit/>
           </a:bodyPr>
           <a:lstStyle/>
           <a:p>
@@ -15615,7 +15615,7 @@
         </p:spPr>
         <p:txBody>
           <a:bodyPr wrap="square" anchor="ctr" lIns="9144" rIns="9144" tIns="6400" bIns="6400">
-            <a:spAutoFit/>
+            <a:normAutofit/>
           </a:bodyPr>
           <a:lstStyle/>
           <a:p>
@@ -15701,7 +15701,7 @@
         </p:spPr>
         <p:txBody>
           <a:bodyPr wrap="square" anchor="ctr" lIns="9144" rIns="9144" tIns="6400" bIns="6400">
-            <a:spAutoFit/>
+            <a:normAutofit/>
           </a:bodyPr>
           <a:lstStyle/>
           <a:p>
@@ -15787,7 +15787,7 @@
         </p:spPr>
         <p:txBody>
           <a:bodyPr wrap="square" anchor="ctr" lIns="9144" rIns="9144" tIns="6400" bIns="6400">
-            <a:spAutoFit/>
+            <a:normAutofit/>
           </a:bodyPr>
           <a:lstStyle/>
           <a:p>
@@ -15873,7 +15873,7 @@
         </p:spPr>
         <p:txBody>
           <a:bodyPr wrap="square" anchor="ctr" lIns="9144" rIns="9144" tIns="6400" bIns="6400">
-            <a:spAutoFit/>
+            <a:normAutofit/>
           </a:bodyPr>
           <a:lstStyle/>
           <a:p>
@@ -15959,7 +15959,7 @@
         </p:spPr>
         <p:txBody>
           <a:bodyPr wrap="square" anchor="ctr" lIns="9144" rIns="9144" tIns="6400" bIns="6400">
-            <a:spAutoFit/>
+            <a:normAutofit/>
           </a:bodyPr>
           <a:lstStyle/>
           <a:p>
@@ -16045,7 +16045,7 @@
         </p:spPr>
         <p:txBody>
           <a:bodyPr wrap="square" anchor="ctr" lIns="9144" rIns="9144" tIns="6400" bIns="6400">
-            <a:spAutoFit/>
+            <a:normAutofit/>
           </a:bodyPr>
           <a:lstStyle/>
           <a:p>
@@ -16142,7 +16142,7 @@
         </p:spPr>
         <p:txBody>
           <a:bodyPr wrap="square" anchor="ctr" lIns="9144" rIns="9144" tIns="6400" bIns="6400">
-            <a:spAutoFit/>
+            <a:normAutofit/>
           </a:bodyPr>
           <a:lstStyle/>
           <a:p>
@@ -16228,7 +16228,7 @@
         </p:spPr>
         <p:txBody>
           <a:bodyPr wrap="square" anchor="ctr" lIns="9144" rIns="9144" tIns="6400" bIns="6400">
-            <a:spAutoFit/>
+            <a:normAutofit/>
           </a:bodyPr>
           <a:lstStyle/>
           <a:p>
@@ -16336,7 +16336,7 @@
         </p:spPr>
         <p:txBody>
           <a:bodyPr wrap="square" anchor="ctr" lIns="9144" rIns="9144" tIns="6400" bIns="6400">
-            <a:spAutoFit/>
+            <a:normAutofit/>
           </a:bodyPr>
           <a:lstStyle/>
           <a:p>
@@ -16433,7 +16433,7 @@
         </p:spPr>
         <p:txBody>
           <a:bodyPr wrap="square" anchor="ctr" lIns="9144" rIns="9144" tIns="6400" bIns="6400">
-            <a:spAutoFit/>
+            <a:normAutofit/>
           </a:bodyPr>
           <a:lstStyle/>
           <a:p>
@@ -16530,7 +16530,7 @@
         </p:spPr>
         <p:txBody>
           <a:bodyPr wrap="square" anchor="ctr" lIns="9144" rIns="9144" tIns="6400" bIns="6400">
-            <a:spAutoFit/>
+            <a:normAutofit/>
           </a:bodyPr>
           <a:lstStyle/>
           <a:p>
@@ -16627,7 +16627,7 @@
         </p:spPr>
         <p:txBody>
           <a:bodyPr wrap="square" anchor="ctr" lIns="9144" rIns="9144" tIns="6400" bIns="6400">
-            <a:spAutoFit/>
+            <a:normAutofit/>
           </a:bodyPr>
           <a:lstStyle/>
           <a:p>
@@ -16713,7 +16713,7 @@
         </p:spPr>
         <p:txBody>
           <a:bodyPr wrap="square" anchor="ctr" lIns="9144" rIns="9144" tIns="6400" bIns="6400">
-            <a:spAutoFit/>
+            <a:normAutofit/>
           </a:bodyPr>
           <a:lstStyle/>
           <a:p>
@@ -16810,7 +16810,7 @@
         </p:spPr>
         <p:txBody>
           <a:bodyPr wrap="square" anchor="ctr" lIns="9144" rIns="9144" tIns="6400" bIns="6400">
-            <a:spAutoFit/>
+            <a:normAutofit/>
           </a:bodyPr>
           <a:lstStyle/>
           <a:p>
@@ -16896,7 +16896,7 @@
         </p:spPr>
         <p:txBody>
           <a:bodyPr wrap="square" anchor="ctr" lIns="9144" rIns="9144" tIns="6400" bIns="6400">
-            <a:spAutoFit/>
+            <a:normAutofit/>
           </a:bodyPr>
           <a:lstStyle/>
           <a:p>
@@ -16993,7 +16993,7 @@
         </p:spPr>
         <p:txBody>
           <a:bodyPr wrap="square" anchor="ctr" lIns="9144" rIns="9144" tIns="6400" bIns="6400">
-            <a:spAutoFit/>
+            <a:normAutofit/>
           </a:bodyPr>
           <a:lstStyle/>
           <a:p>
@@ -17090,7 +17090,7 @@
         </p:spPr>
         <p:txBody>
           <a:bodyPr wrap="square" anchor="ctr" lIns="9144" rIns="9144" tIns="6400" bIns="6400">
-            <a:spAutoFit/>
+            <a:normAutofit/>
           </a:bodyPr>
           <a:lstStyle/>
           <a:p>
@@ -17176,7 +17176,7 @@
         </p:spPr>
         <p:txBody>
           <a:bodyPr wrap="square" anchor="ctr" lIns="9144" rIns="9144" tIns="6400" bIns="6400">
-            <a:spAutoFit/>
+            <a:normAutofit/>
           </a:bodyPr>
           <a:lstStyle/>
           <a:p>
@@ -17273,7 +17273,7 @@
         </p:spPr>
         <p:txBody>
           <a:bodyPr wrap="square" anchor="ctr" lIns="9144" rIns="9144" tIns="6400" bIns="6400">
-            <a:spAutoFit/>
+            <a:normAutofit/>
           </a:bodyPr>
           <a:lstStyle/>
           <a:p>
@@ -17359,7 +17359,7 @@
         </p:spPr>
         <p:txBody>
           <a:bodyPr wrap="square" anchor="ctr" lIns="9144" rIns="9144" tIns="6400" bIns="6400">
-            <a:spAutoFit/>
+            <a:normAutofit/>
           </a:bodyPr>
           <a:lstStyle/>
           <a:p>
@@ -17456,7 +17456,7 @@
         </p:spPr>
         <p:txBody>
           <a:bodyPr wrap="square" anchor="ctr" lIns="9144" rIns="9144" tIns="6400" bIns="6400">
-            <a:spAutoFit/>
+            <a:normAutofit/>
           </a:bodyPr>
           <a:lstStyle/>
           <a:p>
@@ -17553,7 +17553,7 @@
         </p:spPr>
         <p:txBody>
           <a:bodyPr wrap="square" anchor="ctr" lIns="9144" rIns="9144" tIns="6400" bIns="6400">
-            <a:spAutoFit/>
+            <a:normAutofit/>
           </a:bodyPr>
           <a:lstStyle/>
           <a:p>
@@ -17639,7 +17639,7 @@
         </p:spPr>
         <p:txBody>
           <a:bodyPr wrap="square" anchor="ctr" lIns="9144" rIns="9144" tIns="6400" bIns="6400">
-            <a:spAutoFit/>
+            <a:normAutofit/>
           </a:bodyPr>
           <a:lstStyle/>
           <a:p>
@@ -17736,7 +17736,7 @@
         </p:spPr>
         <p:txBody>
           <a:bodyPr wrap="square" anchor="ctr" lIns="9144" rIns="9144" tIns="6400" bIns="6400">
-            <a:spAutoFit/>
+            <a:normAutofit/>
           </a:bodyPr>
           <a:lstStyle/>
           <a:p>
@@ -17833,7 +17833,7 @@
         </p:spPr>
         <p:txBody>
           <a:bodyPr wrap="square" anchor="ctr" lIns="9144" rIns="9144" tIns="6400" bIns="6400">
-            <a:spAutoFit/>
+            <a:normAutofit/>
           </a:bodyPr>
           <a:lstStyle/>
           <a:p>
@@ -17932,7 +17932,7 @@
         </p:spPr>
         <p:txBody>
           <a:bodyPr wrap="square" anchor="ctr" lIns="9144" rIns="9144" tIns="6400" bIns="6400">
-            <a:spAutoFit/>
+            <a:normAutofit/>
           </a:bodyPr>
           <a:lstStyle/>
           <a:p>
@@ -17998,7 +17998,7 @@
         </p:spPr>
         <p:txBody>
           <a:bodyPr wrap="square" anchor="t" lIns="18288" rIns="18288" tIns="12801" bIns="12801">
-            <a:spAutoFit/>
+            <a:normAutofit/>
           </a:bodyPr>
           <a:lstStyle/>
           <a:p>
@@ -18038,7 +18038,7 @@
         </p:spPr>
         <p:txBody>
           <a:bodyPr wrap="square" anchor="t" lIns="18288" rIns="18288" tIns="12801" bIns="12801">
-            <a:spAutoFit/>
+            <a:normAutofit/>
           </a:bodyPr>
           <a:lstStyle/>
           <a:p>
@@ -18078,7 +18078,7 @@
         </p:spPr>
         <p:txBody>
           <a:bodyPr wrap="square" anchor="t" lIns="18288" rIns="18288" tIns="12801" bIns="12801">
-            <a:spAutoFit/>
+            <a:normAutofit/>
           </a:bodyPr>
           <a:lstStyle/>
           <a:p>
@@ -18250,7 +18250,7 @@
         </p:spPr>
         <p:txBody>
           <a:bodyPr wrap="square" anchor="t" lIns="9144" rIns="9144" tIns="6400" bIns="6400">
-            <a:spAutoFit/>
+            <a:normAutofit/>
           </a:bodyPr>
           <a:lstStyle/>
           <a:p>
@@ -18290,7 +18290,7 @@
         </p:spPr>
         <p:txBody>
           <a:bodyPr wrap="square" anchor="t" lIns="9144" rIns="9144" tIns="6400" bIns="6400">
-            <a:spAutoFit/>
+            <a:normAutofit/>
           </a:bodyPr>
           <a:lstStyle/>
           <a:p>
@@ -18378,7 +18378,7 @@
         </p:spPr>
         <p:txBody>
           <a:bodyPr wrap="square" anchor="t" lIns="9144" rIns="9144" tIns="6400" bIns="6400">
-            <a:spAutoFit/>
+            <a:normAutofit/>
           </a:bodyPr>
           <a:lstStyle/>
           <a:p>
@@ -18418,7 +18418,7 @@
         </p:spPr>
         <p:txBody>
           <a:bodyPr wrap="square" anchor="t" lIns="9144" rIns="9144" tIns="6400" bIns="6400">
-            <a:spAutoFit/>
+            <a:normAutofit/>
           </a:bodyPr>
           <a:lstStyle/>
           <a:p>
@@ -18458,7 +18458,7 @@
         </p:spPr>
         <p:txBody>
           <a:bodyPr wrap="square" anchor="t" lIns="54864" rIns="54864" tIns="38404" bIns="38404">
-            <a:spAutoFit/>
+            <a:normAutofit/>
           </a:bodyPr>
           <a:lstStyle/>
           <a:p>
@@ -18590,7 +18590,7 @@
         </p:spPr>
         <p:txBody>
           <a:bodyPr wrap="square" anchor="t" lIns="9144" rIns="9144" tIns="6400" bIns="6400">
-            <a:spAutoFit/>
+            <a:normAutofit/>
           </a:bodyPr>
           <a:lstStyle/>
           <a:p>
@@ -18676,7 +18676,7 @@
         </p:spPr>
         <p:txBody>
           <a:bodyPr wrap="square" anchor="ctr" lIns="54864" rIns="54864" tIns="38404" bIns="38404">
-            <a:spAutoFit/>
+            <a:normAutofit/>
           </a:bodyPr>
           <a:lstStyle/>
           <a:p>
@@ -18716,7 +18716,7 @@
         </p:spPr>
         <p:txBody>
           <a:bodyPr wrap="square" anchor="t" lIns="9144" rIns="9144" tIns="6400" bIns="6400">
-            <a:spAutoFit/>
+            <a:normAutofit/>
           </a:bodyPr>
           <a:lstStyle/>
           <a:p>
@@ -18804,7 +18804,7 @@
         </p:spPr>
         <p:txBody>
           <a:bodyPr wrap="square" anchor="t" lIns="9144" rIns="9144" tIns="6400" bIns="6400">
-            <a:spAutoFit/>
+            <a:normAutofit/>
           </a:bodyPr>
           <a:lstStyle/>
           <a:p>
@@ -18844,7 +18844,7 @@
         </p:spPr>
         <p:txBody>
           <a:bodyPr wrap="square" anchor="t" lIns="9144" rIns="9144" tIns="6400" bIns="6400">
-            <a:spAutoFit/>
+            <a:normAutofit/>
           </a:bodyPr>
           <a:lstStyle/>
           <a:p>
@@ -18884,7 +18884,7 @@
         </p:spPr>
         <p:txBody>
           <a:bodyPr wrap="square" anchor="t" lIns="54864" rIns="54864" tIns="38404" bIns="38404">
-            <a:spAutoFit/>
+            <a:normAutofit/>
           </a:bodyPr>
           <a:lstStyle/>
           <a:p>
@@ -19016,7 +19016,7 @@
         </p:spPr>
         <p:txBody>
           <a:bodyPr wrap="square" anchor="t" lIns="9144" rIns="9144" tIns="6400" bIns="6400">
-            <a:spAutoFit/>
+            <a:normAutofit/>
           </a:bodyPr>
           <a:lstStyle/>
           <a:p>
@@ -19102,7 +19102,7 @@
         </p:spPr>
         <p:txBody>
           <a:bodyPr wrap="square" anchor="ctr" lIns="54864" rIns="54864" tIns="38404" bIns="38404">
-            <a:spAutoFit/>
+            <a:normAutofit/>
           </a:bodyPr>
           <a:lstStyle/>
           <a:p>
@@ -19142,7 +19142,7 @@
         </p:spPr>
         <p:txBody>
           <a:bodyPr wrap="square" anchor="t" lIns="9144" rIns="9144" tIns="6400" bIns="6400">
-            <a:spAutoFit/>
+            <a:normAutofit/>
           </a:bodyPr>
           <a:lstStyle/>
           <a:p>
@@ -19230,7 +19230,7 @@
         </p:spPr>
         <p:txBody>
           <a:bodyPr wrap="square" anchor="t" lIns="9144" rIns="9144" tIns="6400" bIns="6400">
-            <a:spAutoFit/>
+            <a:normAutofit/>
           </a:bodyPr>
           <a:lstStyle/>
           <a:p>
@@ -19270,7 +19270,7 @@
         </p:spPr>
         <p:txBody>
           <a:bodyPr wrap="square" anchor="t" lIns="9144" rIns="9144" tIns="6400" bIns="6400">
-            <a:spAutoFit/>
+            <a:normAutofit/>
           </a:bodyPr>
           <a:lstStyle/>
           <a:p>
@@ -19310,7 +19310,7 @@
         </p:spPr>
         <p:txBody>
           <a:bodyPr wrap="square" anchor="t" lIns="54864" rIns="54864" tIns="38404" bIns="38404">
-            <a:spAutoFit/>
+            <a:normAutofit/>
           </a:bodyPr>
           <a:lstStyle/>
           <a:p>
@@ -19442,7 +19442,7 @@
         </p:spPr>
         <p:txBody>
           <a:bodyPr wrap="square" anchor="t" lIns="9144" rIns="9144" tIns="6400" bIns="6400">
-            <a:spAutoFit/>
+            <a:normAutofit/>
           </a:bodyPr>
           <a:lstStyle/>
           <a:p>
@@ -19528,7 +19528,7 @@
         </p:spPr>
         <p:txBody>
           <a:bodyPr wrap="square" anchor="ctr" lIns="54864" rIns="54864" tIns="38404" bIns="38404">
-            <a:spAutoFit/>
+            <a:normAutofit/>
           </a:bodyPr>
           <a:lstStyle/>
           <a:p>
@@ -19568,7 +19568,7 @@
         </p:spPr>
         <p:txBody>
           <a:bodyPr wrap="square" anchor="t" lIns="9144" rIns="9144" tIns="6400" bIns="6400">
-            <a:spAutoFit/>
+            <a:normAutofit/>
           </a:bodyPr>
           <a:lstStyle/>
           <a:p>
@@ -19654,7 +19654,7 @@
         </p:spPr>
         <p:txBody>
           <a:bodyPr wrap="square" anchor="t" lIns="9144" rIns="9144" tIns="6400" bIns="6400">
-            <a:spAutoFit/>
+            <a:normAutofit/>
           </a:bodyPr>
           <a:lstStyle/>
           <a:p>
@@ -19742,7 +19742,7 @@
         </p:spPr>
         <p:txBody>
           <a:bodyPr wrap="square" anchor="t" lIns="9144" rIns="9144" tIns="6400" bIns="6400">
-            <a:spAutoFit/>
+            <a:normAutofit/>
           </a:bodyPr>
           <a:lstStyle/>
           <a:p>
@@ -19782,7 +19782,7 @@
         </p:spPr>
         <p:txBody>
           <a:bodyPr wrap="square" anchor="t" lIns="9144" rIns="9144" tIns="6400" bIns="6400">
-            <a:spAutoFit/>
+            <a:normAutofit/>
           </a:bodyPr>
           <a:lstStyle/>
           <a:p>
@@ -19870,7 +19870,7 @@
         </p:spPr>
         <p:txBody>
           <a:bodyPr wrap="square" anchor="t" lIns="9144" rIns="9144" tIns="6400" bIns="6400">
-            <a:spAutoFit/>
+            <a:normAutofit/>
           </a:bodyPr>
           <a:lstStyle/>
           <a:p>
@@ -19910,7 +19910,7 @@
         </p:spPr>
         <p:txBody>
           <a:bodyPr wrap="square" anchor="t" lIns="9144" rIns="9144" tIns="6400" bIns="6400">
-            <a:spAutoFit/>
+            <a:normAutofit/>
           </a:bodyPr>
           <a:lstStyle/>
           <a:p>
@@ -19998,7 +19998,7 @@
         </p:spPr>
         <p:txBody>
           <a:bodyPr wrap="square" anchor="t" lIns="9144" rIns="9144" tIns="6400" bIns="6400">
-            <a:spAutoFit/>
+            <a:normAutofit/>
           </a:bodyPr>
           <a:lstStyle/>
           <a:p>
@@ -20038,7 +20038,7 @@
         </p:spPr>
         <p:txBody>
           <a:bodyPr wrap="square" anchor="t" lIns="9144" rIns="9144" tIns="6400" bIns="6400">
-            <a:spAutoFit/>
+            <a:normAutofit/>
           </a:bodyPr>
           <a:lstStyle/>
           <a:p>
@@ -20104,7 +20104,7 @@
         </p:spPr>
         <p:txBody>
           <a:bodyPr wrap="square" anchor="t" lIns="18288" rIns="18288" tIns="12801" bIns="12801">
-            <a:spAutoFit/>
+            <a:normAutofit/>
           </a:bodyPr>
           <a:lstStyle/>
           <a:p>
@@ -20144,7 +20144,7 @@
         </p:spPr>
         <p:txBody>
           <a:bodyPr wrap="square" anchor="t" lIns="18288" rIns="18288" tIns="12801" bIns="12801">
-            <a:spAutoFit/>
+            <a:normAutofit/>
           </a:bodyPr>
           <a:lstStyle/>
           <a:p>
@@ -20184,7 +20184,7 @@
         </p:spPr>
         <p:txBody>
           <a:bodyPr wrap="square" anchor="t" lIns="18288" rIns="18288" tIns="12801" bIns="12801">
-            <a:spAutoFit/>
+            <a:normAutofit/>
           </a:bodyPr>
           <a:lstStyle/>
           <a:p>
@@ -20356,7 +20356,7 @@
         </p:spPr>
         <p:txBody>
           <a:bodyPr wrap="square" anchor="t" lIns="9144" rIns="9144" tIns="6400" bIns="6400">
-            <a:spAutoFit/>
+            <a:normAutofit/>
           </a:bodyPr>
           <a:lstStyle/>
           <a:p>
@@ -20396,7 +20396,7 @@
         </p:spPr>
         <p:txBody>
           <a:bodyPr wrap="square" anchor="t" lIns="9144" rIns="9144" tIns="6400" bIns="6400">
-            <a:spAutoFit/>
+            <a:normAutofit/>
           </a:bodyPr>
           <a:lstStyle/>
           <a:p>
@@ -20484,7 +20484,7 @@
         </p:spPr>
         <p:txBody>
           <a:bodyPr wrap="square" anchor="t" lIns="9144" rIns="9144" tIns="6400" bIns="6400">
-            <a:spAutoFit/>
+            <a:normAutofit/>
           </a:bodyPr>
           <a:lstStyle/>
           <a:p>
@@ -20524,7 +20524,7 @@
         </p:spPr>
         <p:txBody>
           <a:bodyPr wrap="square" anchor="t" lIns="9144" rIns="9144" tIns="6400" bIns="6400">
-            <a:spAutoFit/>
+            <a:normAutofit/>
           </a:bodyPr>
           <a:lstStyle/>
           <a:p>
@@ -20634,7 +20634,7 @@
         </p:spPr>
         <p:txBody>
           <a:bodyPr wrap="square" anchor="t" lIns="9144" rIns="9144" tIns="6400" bIns="6400">
-            <a:spAutoFit/>
+            <a:normAutofit/>
           </a:bodyPr>
           <a:lstStyle/>
           <a:p>
@@ -20718,7 +20718,7 @@
         </p:spPr>
         <p:txBody>
           <a:bodyPr wrap="square" anchor="ctr" lIns="54864" rIns="54864" tIns="38404" bIns="38404">
-            <a:spAutoFit/>
+            <a:normAutofit/>
           </a:bodyPr>
           <a:lstStyle/>
           <a:p>
@@ -20802,7 +20802,7 @@
         </p:spPr>
         <p:txBody>
           <a:bodyPr wrap="square" anchor="ctr" lIns="54864" rIns="54864" tIns="38404" bIns="38404">
-            <a:spAutoFit/>
+            <a:normAutofit/>
           </a:bodyPr>
           <a:lstStyle/>
           <a:p>
@@ -20886,7 +20886,7 @@
         </p:spPr>
         <p:txBody>
           <a:bodyPr wrap="square" anchor="ctr" lIns="54864" rIns="54864" tIns="38404" bIns="38404">
-            <a:spAutoFit/>
+            <a:normAutofit/>
           </a:bodyPr>
           <a:lstStyle/>
           <a:p>
@@ -20926,7 +20926,7 @@
         </p:spPr>
         <p:txBody>
           <a:bodyPr wrap="square" anchor="t" lIns="9144" rIns="9144" tIns="6400" bIns="6400">
-            <a:spAutoFit/>
+            <a:normAutofit/>
           </a:bodyPr>
           <a:lstStyle/>
           <a:p>
@@ -21023,7 +21023,7 @@
         </p:spPr>
         <p:txBody>
           <a:bodyPr wrap="square" anchor="t" lIns="9144" rIns="9144" tIns="6400" bIns="6400">
-            <a:spAutoFit/>
+            <a:normAutofit/>
           </a:bodyPr>
           <a:lstStyle/>
           <a:p>
@@ -21063,7 +21063,7 @@
         </p:spPr>
         <p:txBody>
           <a:bodyPr wrap="square" anchor="t" lIns="9144" rIns="9144" tIns="6400" bIns="6400">
-            <a:spAutoFit/>
+            <a:normAutofit/>
           </a:bodyPr>
           <a:lstStyle/>
           <a:p>
@@ -21241,7 +21241,7 @@
         </p:spPr>
         <p:txBody>
           <a:bodyPr wrap="square" anchor="ctr" lIns="54864" rIns="54864" tIns="38404" bIns="38404">
-            <a:spAutoFit/>
+            <a:normAutofit/>
           </a:bodyPr>
           <a:lstStyle/>
           <a:p>
@@ -21281,7 +21281,7 @@
         </p:spPr>
         <p:txBody>
           <a:bodyPr wrap="square" anchor="t" lIns="9144" rIns="9144" tIns="6400" bIns="6400">
-            <a:spAutoFit/>
+            <a:normAutofit/>
           </a:bodyPr>
           <a:lstStyle/>
           <a:p>
@@ -21321,7 +21321,7 @@
         </p:spPr>
         <p:txBody>
           <a:bodyPr wrap="square" anchor="t" lIns="9144" rIns="9144" tIns="6400" bIns="6400">
-            <a:spAutoFit/>
+            <a:normAutofit/>
           </a:bodyPr>
           <a:lstStyle/>
           <a:p>
@@ -21361,7 +21361,7 @@
         </p:spPr>
         <p:txBody>
           <a:bodyPr wrap="square" anchor="t" lIns="9144" rIns="9144" tIns="6400" bIns="6400">
-            <a:spAutoFit/>
+            <a:normAutofit/>
           </a:bodyPr>
           <a:lstStyle/>
           <a:p>
@@ -21561,7 +21561,7 @@
         </p:spPr>
         <p:txBody>
           <a:bodyPr wrap="square" anchor="ctr" lIns="54864" rIns="54864" tIns="38404" bIns="38404">
-            <a:spAutoFit/>
+            <a:normAutofit/>
           </a:bodyPr>
           <a:lstStyle/>
           <a:p>
@@ -21601,7 +21601,7 @@
         </p:spPr>
         <p:txBody>
           <a:bodyPr wrap="square" anchor="t" lIns="9144" rIns="9144" tIns="6400" bIns="6400">
-            <a:spAutoFit/>
+            <a:normAutofit/>
           </a:bodyPr>
           <a:lstStyle/>
           <a:p>
@@ -21641,7 +21641,7 @@
         </p:spPr>
         <p:txBody>
           <a:bodyPr wrap="square" anchor="t" lIns="9144" rIns="9144" tIns="6400" bIns="6400">
-            <a:spAutoFit/>
+            <a:normAutofit/>
           </a:bodyPr>
           <a:lstStyle/>
           <a:p>
@@ -21681,7 +21681,7 @@
         </p:spPr>
         <p:txBody>
           <a:bodyPr wrap="square" anchor="t" lIns="9144" rIns="9144" tIns="6400" bIns="6400">
-            <a:spAutoFit/>
+            <a:normAutofit/>
           </a:bodyPr>
           <a:lstStyle/>
           <a:p>
@@ -21881,7 +21881,7 @@
         </p:spPr>
         <p:txBody>
           <a:bodyPr wrap="square" anchor="ctr" lIns="54864" rIns="54864" tIns="38404" bIns="38404">
-            <a:spAutoFit/>
+            <a:normAutofit/>
           </a:bodyPr>
           <a:lstStyle/>
           <a:p>
@@ -21921,7 +21921,7 @@
         </p:spPr>
         <p:txBody>
           <a:bodyPr wrap="square" anchor="t" lIns="9144" rIns="9144" tIns="6400" bIns="6400">
-            <a:spAutoFit/>
+            <a:normAutofit/>
           </a:bodyPr>
           <a:lstStyle/>
           <a:p>
@@ -21961,7 +21961,7 @@
         </p:spPr>
         <p:txBody>
           <a:bodyPr wrap="square" anchor="t" lIns="9144" rIns="9144" tIns="6400" bIns="6400">
-            <a:spAutoFit/>
+            <a:normAutofit/>
           </a:bodyPr>
           <a:lstStyle/>
           <a:p>
@@ -22001,7 +22001,7 @@
         </p:spPr>
         <p:txBody>
           <a:bodyPr wrap="square" anchor="t" lIns="9144" rIns="9144" tIns="6400" bIns="6400">
-            <a:spAutoFit/>
+            <a:normAutofit/>
           </a:bodyPr>
           <a:lstStyle/>
           <a:p>

--- a/소설쓰기_가이드.pptx
+++ b/소설쓰기_가이드.pptx
@@ -3253,8 +3253,8 @@
                 <a:solidFill>
                   <a:srgbClr val="D19830"/>
                 </a:solidFill>
-                <a:latin typeface="Noto Sans CJK KR"/>
-                <a:ea typeface="Noto Sans CJK KR"/>
+                <a:latin typeface="Malgun Gothic"/>
+                <a:ea typeface="Malgun Gothic"/>
               </a:rPr>
               <a:t>CREATIVE WRITING MASTERCLASS</a:t>
             </a:r>
@@ -3289,23 +3289,23 @@
               </a:lnSpc>
             </a:pPr>
             <a:r>
-              <a:rPr sz="4200" b="1" i="0">
+              <a:rPr sz="3750" b="1" i="0">
                 <a:solidFill>
                   <a:srgbClr val="F2EFE9"/>
                 </a:solidFill>
-                <a:latin typeface="Noto Sans CJK KR"/>
-                <a:ea typeface="Noto Sans CJK KR"/>
+                <a:latin typeface="Malgun Gothic"/>
+                <a:ea typeface="Malgun Gothic"/>
               </a:rPr>
               <a:t>매혹적인</a:t>
             </a:r>
             <a:br/>
             <a:r>
-              <a:rPr sz="4200" b="1" i="0">
+              <a:rPr sz="3750" b="1" i="0">
                 <a:solidFill>
                   <a:srgbClr val="F2EFE9"/>
                 </a:solidFill>
-                <a:latin typeface="Noto Sans CJK KR"/>
-                <a:ea typeface="Noto Sans CJK KR"/>
+                <a:latin typeface="Malgun Gothic"/>
+                <a:ea typeface="Malgun Gothic"/>
               </a:rPr>
               <a:t>소설 쓰기의 기술</a:t>
             </a:r>
@@ -3384,23 +3384,23 @@
               </a:lnSpc>
             </a:pPr>
             <a:r>
-              <a:rPr sz="1500" b="0" i="0">
+              <a:rPr sz="1350" b="0" i="0">
                 <a:solidFill>
                   <a:srgbClr val="B2BAC6"/>
                 </a:solidFill>
-                <a:latin typeface="Noto Sans CJK KR"/>
-                <a:ea typeface="Noto Sans CJK KR"/>
+                <a:latin typeface="Malgun Gothic"/>
+                <a:ea typeface="Malgun Gothic"/>
               </a:rPr>
               <a:t>아이디어의 첫 불꽃부터 마지막 문장의 퇴고까지,</a:t>
             </a:r>
             <a:br/>
             <a:r>
-              <a:rPr sz="1500" b="0" i="0">
+              <a:rPr sz="1350" b="0" i="0">
                 <a:solidFill>
                   <a:srgbClr val="B2BAC6"/>
                 </a:solidFill>
-                <a:latin typeface="Noto Sans CJK KR"/>
-                <a:ea typeface="Noto Sans CJK KR"/>
+                <a:latin typeface="Malgun Gothic"/>
+                <a:ea typeface="Malgun Gothic"/>
               </a:rPr>
               <a:t>독자의 밤을 빼앗는 서사 설계의 10가지 핵심 원칙</a:t>
             </a:r>
@@ -3531,8 +3531,8 @@
                 <a:solidFill>
                   <a:srgbClr val="D19830"/>
                 </a:solidFill>
-                <a:latin typeface="Noto Sans CJK KR"/>
-                <a:ea typeface="Noto Sans CJK KR"/>
+                <a:latin typeface="Malgun Gothic"/>
+                <a:ea typeface="Malgun Gothic"/>
               </a:rPr>
               <a:t>PART 01</a:t>
             </a:r>
@@ -3571,8 +3571,8 @@
                 <a:solidFill>
                   <a:srgbClr val="F2EFE9"/>
                 </a:solidFill>
-                <a:latin typeface="Noto Sans CJK KR"/>
-                <a:ea typeface="Noto Sans CJK KR"/>
+                <a:latin typeface="Malgun Gothic"/>
+                <a:ea typeface="Malgun Gothic"/>
               </a:rPr>
               <a:t>발상과 캐릭터</a:t>
             </a:r>
@@ -3611,8 +3611,8 @@
                 <a:solidFill>
                   <a:srgbClr val="B2BAC6"/>
                 </a:solidFill>
-                <a:latin typeface="Noto Sans CJK KR"/>
-                <a:ea typeface="Noto Sans CJK KR"/>
+                <a:latin typeface="Malgun Gothic"/>
+                <a:ea typeface="Malgun Gothic"/>
               </a:rPr>
               <a:t>로그라인 · 욕망과 결핍</a:t>
             </a:r>
@@ -3743,8 +3743,8 @@
                 <a:solidFill>
                   <a:srgbClr val="D19830"/>
                 </a:solidFill>
-                <a:latin typeface="Noto Sans CJK KR"/>
-                <a:ea typeface="Noto Sans CJK KR"/>
+                <a:latin typeface="Malgun Gothic"/>
+                <a:ea typeface="Malgun Gothic"/>
               </a:rPr>
               <a:t>PART 02</a:t>
             </a:r>
@@ -3783,8 +3783,8 @@
                 <a:solidFill>
                   <a:srgbClr val="F2EFE9"/>
                 </a:solidFill>
-                <a:latin typeface="Noto Sans CJK KR"/>
-                <a:ea typeface="Noto Sans CJK KR"/>
+                <a:latin typeface="Malgun Gothic"/>
+                <a:ea typeface="Malgun Gothic"/>
               </a:rPr>
               <a:t>플롯과 갈등</a:t>
             </a:r>
@@ -3823,8 +3823,8 @@
                 <a:solidFill>
                   <a:srgbClr val="B2BAC6"/>
                 </a:solidFill>
-                <a:latin typeface="Noto Sans CJK KR"/>
-                <a:ea typeface="Noto Sans CJK KR"/>
+                <a:latin typeface="Malgun Gothic"/>
+                <a:ea typeface="Malgun Gothic"/>
               </a:rPr>
               <a:t>3막 구조 · 씬의 역학</a:t>
             </a:r>
@@ -3955,8 +3955,8 @@
                 <a:solidFill>
                   <a:srgbClr val="D19830"/>
                 </a:solidFill>
-                <a:latin typeface="Noto Sans CJK KR"/>
-                <a:ea typeface="Noto Sans CJK KR"/>
+                <a:latin typeface="Malgun Gothic"/>
+                <a:ea typeface="Malgun Gothic"/>
               </a:rPr>
               <a:t>PART 03</a:t>
             </a:r>
@@ -3995,8 +3995,8 @@
                 <a:solidFill>
                   <a:srgbClr val="F2EFE9"/>
                 </a:solidFill>
-                <a:latin typeface="Noto Sans CJK KR"/>
-                <a:ea typeface="Noto Sans CJK KR"/>
+                <a:latin typeface="Malgun Gothic"/>
+                <a:ea typeface="Malgun Gothic"/>
               </a:rPr>
               <a:t>시점과 문체</a:t>
             </a:r>
@@ -4035,8 +4035,8 @@
                 <a:solidFill>
                   <a:srgbClr val="B2BAC6"/>
                 </a:solidFill>
-                <a:latin typeface="Noto Sans CJK KR"/>
-                <a:ea typeface="Noto Sans CJK KR"/>
+                <a:latin typeface="Malgun Gothic"/>
+                <a:ea typeface="Malgun Gothic"/>
               </a:rPr>
               <a:t>POV · Show, Don't Tell</a:t>
             </a:r>
@@ -4167,8 +4167,8 @@
                 <a:solidFill>
                   <a:srgbClr val="D19830"/>
                 </a:solidFill>
-                <a:latin typeface="Noto Sans CJK KR"/>
-                <a:ea typeface="Noto Sans CJK KR"/>
+                <a:latin typeface="Malgun Gothic"/>
+                <a:ea typeface="Malgun Gothic"/>
               </a:rPr>
               <a:t>PART 04</a:t>
             </a:r>
@@ -4207,8 +4207,8 @@
                 <a:solidFill>
                   <a:srgbClr val="F2EFE9"/>
                 </a:solidFill>
-                <a:latin typeface="Noto Sans CJK KR"/>
-                <a:ea typeface="Noto Sans CJK KR"/>
+                <a:latin typeface="Malgun Gothic"/>
+                <a:ea typeface="Malgun Gothic"/>
               </a:rPr>
               <a:t>퇴고와 완성</a:t>
             </a:r>
@@ -4247,8 +4247,8 @@
                 <a:solidFill>
                   <a:srgbClr val="B2BAC6"/>
                 </a:solidFill>
-                <a:latin typeface="Noto Sans CJK KR"/>
-                <a:ea typeface="Noto Sans CJK KR"/>
+                <a:latin typeface="Malgun Gothic"/>
+                <a:ea typeface="Malgun Gothic"/>
               </a:rPr>
               <a:t>3단계 수정 · 작가 루틴</a:t>
             </a:r>
@@ -4313,8 +4313,8 @@
                 <a:solidFill>
                   <a:srgbClr val="D19830"/>
                 </a:solidFill>
-                <a:latin typeface="Noto Sans CJK KR"/>
-                <a:ea typeface="Noto Sans CJK KR"/>
+                <a:latin typeface="Malgun Gothic"/>
+                <a:ea typeface="Malgun Gothic"/>
               </a:rPr>
               <a:t>09  |  THE WRITER'S HABIT &amp; NEXT STEPS</a:t>
             </a:r>
@@ -4353,8 +4353,8 @@
                 <a:solidFill>
                   <a:srgbClr val="F2EFE9"/>
                 </a:solidFill>
-                <a:latin typeface="Noto Sans CJK KR"/>
-                <a:ea typeface="Noto Sans CJK KR"/>
+                <a:latin typeface="Malgun Gothic"/>
+                <a:ea typeface="Malgun Gothic"/>
               </a:rPr>
               <a:t>완벽한 첫 문장을 기다리지 말고, 지금 당장 첫 장면을 시작하라</a:t>
             </a:r>
@@ -4393,8 +4393,8 @@
                 <a:solidFill>
                   <a:srgbClr val="B2BAC6"/>
                 </a:solidFill>
-                <a:latin typeface="Noto Sans CJK KR"/>
-                <a:ea typeface="Noto Sans CJK KR"/>
+                <a:latin typeface="Malgun Gothic"/>
+                <a:ea typeface="Malgun Gothic"/>
               </a:rPr>
               <a:t>재능보다 강력한 것은 매일 책상 앞에 앉는 루틴과 끝까지 마침표를 찍어본 완주의 근육이다</a:t>
             </a:r>
@@ -4565,8 +4565,8 @@
                 <a:solidFill>
                   <a:srgbClr val="878E99"/>
                 </a:solidFill>
-                <a:latin typeface="Noto Sans CJK KR"/>
-                <a:ea typeface="Noto Sans CJK KR"/>
+                <a:latin typeface="Malgun Gothic"/>
+                <a:ea typeface="Malgun Gothic"/>
               </a:rPr>
               <a:t>THE CRAFT OF FICTION WRITING  |  소설 창작 실전 가이드</a:t>
             </a:r>
@@ -4605,8 +4605,8 @@
                 <a:solidFill>
                   <a:srgbClr val="D19830"/>
                 </a:solidFill>
-                <a:latin typeface="Noto Sans CJK KR"/>
-                <a:ea typeface="Noto Sans CJK KR"/>
+                <a:latin typeface="Malgun Gothic"/>
+                <a:ea typeface="Malgun Gothic"/>
               </a:rPr>
               <a:t>10 / 10</a:t>
             </a:r>
@@ -4737,8 +4737,8 @@
                 <a:solidFill>
                   <a:srgbClr val="C6532D"/>
                 </a:solidFill>
-                <a:latin typeface="Noto Sans CJK KR"/>
-                <a:ea typeface="Noto Sans CJK KR"/>
+                <a:latin typeface="Malgun Gothic"/>
+                <a:ea typeface="Malgun Gothic"/>
               </a:rPr>
               <a:t>HABIT 01</a:t>
             </a:r>
@@ -4777,8 +4777,8 @@
                 <a:solidFill>
                   <a:srgbClr val="F2EFE9"/>
                 </a:solidFill>
-                <a:latin typeface="Noto Sans CJK KR"/>
-                <a:ea typeface="Noto Sans CJK KR"/>
+                <a:latin typeface="Malgun Gothic"/>
+                <a:ea typeface="Malgun Gothic"/>
               </a:rPr>
               <a:t>영감이 아닌 ‘분량 루틴’으로 써라</a:t>
             </a:r>
@@ -4865,8 +4865,8 @@
                 <a:solidFill>
                   <a:srgbClr val="D19830"/>
                 </a:solidFill>
-                <a:latin typeface="Noto Sans CJK KR"/>
-                <a:ea typeface="Noto Sans CJK KR"/>
+                <a:latin typeface="Malgun Gothic"/>
+                <a:ea typeface="Malgun Gothic"/>
               </a:rPr>
               <a:t>“영감은 기다리는 자가 아니라 쓰고 있는 자에게 찾아온다.”</a:t>
             </a:r>
@@ -4905,8 +4905,8 @@
                 <a:solidFill>
                   <a:srgbClr val="B2BAC6"/>
                 </a:solidFill>
-                <a:latin typeface="Noto Sans CJK KR"/>
-                <a:ea typeface="Noto Sans CJK KR"/>
+                <a:latin typeface="Malgun Gothic"/>
+                <a:ea typeface="Malgun Gothic"/>
               </a:rPr>
               <a:t>• 매일 같은 시간, 같은 장소에서 정해진 분량(예: 하루 1,000자~2,000자 또는 45분)을 채우는 시스템 구축</a:t>
             </a:r>
@@ -4916,8 +4916,8 @@
                 <a:solidFill>
                   <a:srgbClr val="B2BAC6"/>
                 </a:solidFill>
-                <a:latin typeface="Noto Sans CJK KR"/>
-                <a:ea typeface="Noto Sans CJK KR"/>
+                <a:latin typeface="Malgun Gothic"/>
+                <a:ea typeface="Malgun Gothic"/>
               </a:rPr>
               <a:t>• 다음 날 글쓰기가 막막하지 않도록, 오늘 가장 잘 써지는 장면의 문장 중간에서 멈추는 ‘헤밍웨이 기법’ 활용</a:t>
             </a:r>
@@ -4927,8 +4927,8 @@
                 <a:solidFill>
                   <a:srgbClr val="B2BAC6"/>
                 </a:solidFill>
-                <a:latin typeface="Noto Sans CJK KR"/>
-                <a:ea typeface="Noto Sans CJK KR"/>
+                <a:latin typeface="Malgun Gothic"/>
+                <a:ea typeface="Malgun Gothic"/>
               </a:rPr>
               <a:t>• 하루 1,500자씩 60일이면 단편 3편 또는 경장편 1권 분량(원고지 450매)이 완성된다</a:t>
             </a:r>
@@ -5059,8 +5059,8 @@
                 <a:solidFill>
                   <a:srgbClr val="D19830"/>
                 </a:solidFill>
-                <a:latin typeface="Noto Sans CJK KR"/>
-                <a:ea typeface="Noto Sans CJK KR"/>
+                <a:latin typeface="Malgun Gothic"/>
+                <a:ea typeface="Malgun Gothic"/>
               </a:rPr>
               <a:t>HABIT 02</a:t>
             </a:r>
@@ -5099,8 +5099,8 @@
                 <a:solidFill>
                   <a:srgbClr val="F2EFE9"/>
                 </a:solidFill>
-                <a:latin typeface="Noto Sans CJK KR"/>
-                <a:ea typeface="Noto Sans CJK KR"/>
+                <a:latin typeface="Malgun Gothic"/>
+                <a:ea typeface="Malgun Gothic"/>
               </a:rPr>
               <a:t>일상을 채집하는 ‘작가의 수집함’</a:t>
             </a:r>
@@ -5183,12 +5183,12 @@
               </a:lnSpc>
             </a:pPr>
             <a:r>
-              <a:rPr sz="1000" b="1" i="0">
+              <a:rPr sz="900" b="1" i="0">
                 <a:solidFill>
                   <a:srgbClr val="F2EFE9"/>
                 </a:solidFill>
-                <a:latin typeface="Noto Sans CJK KR"/>
-                <a:ea typeface="Noto Sans CJK KR"/>
+                <a:latin typeface="Malgun Gothic"/>
+                <a:ea typeface="Malgun Gothic"/>
               </a:rPr>
               <a:t>“독창적인 디테일은 책상 위 공상이 아니라 날것의 관찰에서 나온다.”</a:t>
             </a:r>
@@ -5227,8 +5227,8 @@
                 <a:solidFill>
                   <a:srgbClr val="B2BAC6"/>
                 </a:solidFill>
-                <a:latin typeface="Noto Sans CJK KR"/>
-                <a:ea typeface="Noto Sans CJK KR"/>
+                <a:latin typeface="Malgun Gothic"/>
+                <a:ea typeface="Malgun Gothic"/>
               </a:rPr>
               <a:t>• 지하철에서 들은 기묘한 대화 한 줄, 독특한 직업군의 은어, 계절별 빛과 냄새를 메모장에 즉시 기록</a:t>
             </a:r>
@@ -5238,8 +5238,8 @@
                 <a:solidFill>
                   <a:srgbClr val="B2BAC6"/>
                 </a:solidFill>
-                <a:latin typeface="Noto Sans CJK KR"/>
-                <a:ea typeface="Noto Sans CJK KR"/>
+                <a:latin typeface="Malgun Gothic"/>
+                <a:ea typeface="Malgun Gothic"/>
               </a:rPr>
               <a:t>• 마음에 드는 소설을 읽을 때는 독자로서 한 번, 작가로서 ‘어떻게 이 감정을 설계했는가’ 분석하며 한 번 더 필사·해부</a:t>
             </a:r>
@@ -5249,8 +5249,8 @@
                 <a:solidFill>
                   <a:srgbClr val="B2BAC6"/>
                 </a:solidFill>
-                <a:latin typeface="Noto Sans CJK KR"/>
-                <a:ea typeface="Noto Sans CJK KR"/>
+                <a:latin typeface="Malgun Gothic"/>
+                <a:ea typeface="Malgun Gothic"/>
               </a:rPr>
               <a:t>• 막힐 때마다 꺼내 쓸 수 있는 나만의 ‘인물·장면·어휘 창고’를 상시 비축</a:t>
             </a:r>
@@ -5381,8 +5381,8 @@
                 <a:solidFill>
                   <a:srgbClr val="316B69"/>
                 </a:solidFill>
-                <a:latin typeface="Noto Sans CJK KR"/>
-                <a:ea typeface="Noto Sans CJK KR"/>
+                <a:latin typeface="Malgun Gothic"/>
+                <a:ea typeface="Malgun Gothic"/>
               </a:rPr>
               <a:t>HABIT 03</a:t>
             </a:r>
@@ -5421,8 +5421,8 @@
                 <a:solidFill>
                   <a:srgbClr val="F2EFE9"/>
                 </a:solidFill>
-                <a:latin typeface="Noto Sans CJK KR"/>
-                <a:ea typeface="Noto Sans CJK KR"/>
+                <a:latin typeface="Malgun Gothic"/>
+                <a:ea typeface="Malgun Gothic"/>
               </a:rPr>
               <a:t>미완성 대작보다 ‘완성된 단편 한 편’</a:t>
             </a:r>
@@ -5505,12 +5505,12 @@
               </a:lnSpc>
             </a:pPr>
             <a:r>
-              <a:rPr sz="1000" b="1" i="0">
+              <a:rPr sz="900" b="1" i="0">
                 <a:solidFill>
                   <a:srgbClr val="D19830"/>
                 </a:solidFill>
-                <a:latin typeface="Noto Sans CJK KR"/>
-                <a:ea typeface="Noto Sans CJK KR"/>
+                <a:latin typeface="Malgun Gothic"/>
+                <a:ea typeface="Malgun Gothic"/>
               </a:rPr>
               <a:t>“결말까지 도달해 본 경험만이 작가를 다음 단계로 성장시킨다.”</a:t>
             </a:r>
@@ -5549,8 +5549,8 @@
                 <a:solidFill>
                   <a:srgbClr val="B2BAC6"/>
                 </a:solidFill>
-                <a:latin typeface="Noto Sans CJK KR"/>
-                <a:ea typeface="Noto Sans CJK KR"/>
+                <a:latin typeface="Malgun Gothic"/>
+                <a:ea typeface="Malgun Gothic"/>
               </a:rPr>
               <a:t>• 처음부터 거대한 10권짜리 세계관에 매몰되기보다, 원고지 70~100매 분량의 단편으로 기승전결 완주 훈련</a:t>
             </a:r>
@@ -5560,8 +5560,8 @@
                 <a:solidFill>
                   <a:srgbClr val="B2BAC6"/>
                 </a:solidFill>
-                <a:latin typeface="Noto Sans CJK KR"/>
-                <a:ea typeface="Noto Sans CJK KR"/>
+                <a:latin typeface="Malgun Gothic"/>
+                <a:ea typeface="Malgun Gothic"/>
               </a:rPr>
               <a:t>• 첫 초고가 마음에 들지 않는 것은 당신의 재능이 부족해서가 아니라 안목이 높기 때문임을 기억</a:t>
             </a:r>
@@ -5571,8 +5571,8 @@
                 <a:solidFill>
                   <a:srgbClr val="B2BAC6"/>
                 </a:solidFill>
-                <a:latin typeface="Noto Sans CJK KR"/>
-                <a:ea typeface="Noto Sans CJK KR"/>
+                <a:latin typeface="Malgun Gothic"/>
+                <a:ea typeface="Malgun Gothic"/>
               </a:rPr>
               <a:t>• 오늘 당장 주인공의 이름과 그가 처한 첫 번째 작은 위기 한 줄을 적는 것으로 시작하라</a:t>
             </a:r>
@@ -5657,8 +5657,8 @@
                 <a:solidFill>
                   <a:srgbClr val="F2EFE9"/>
                 </a:solidFill>
-                <a:latin typeface="Noto Sans CJK KR"/>
-                <a:ea typeface="Noto Sans CJK KR"/>
+                <a:latin typeface="Malgun Gothic"/>
+                <a:ea typeface="Malgun Gothic"/>
               </a:rPr>
               <a:t>“최악의 초고라도 백지보다는 언제나 위대하다. 백지는 고칠 수 없지만, 쓰인 문장은 반드시 빛나게 다듬을 수 있다.”</a:t>
             </a:r>
@@ -5697,8 +5697,8 @@
                 <a:solidFill>
                   <a:srgbClr val="FBF4E4"/>
                 </a:solidFill>
-                <a:latin typeface="Noto Sans CJK KR"/>
-                <a:ea typeface="Noto Sans CJK KR"/>
+                <a:latin typeface="Malgun Gothic"/>
+                <a:ea typeface="Malgun Gothic"/>
               </a:rPr>
               <a:t>오늘 당신의 첫 번째 문장을 시작하세요  —  Happy Writing!</a:t>
             </a:r>
@@ -5763,8 +5763,8 @@
                 <a:solidFill>
                   <a:srgbClr val="C6532D"/>
                 </a:solidFill>
-                <a:latin typeface="Noto Sans CJK KR"/>
-                <a:ea typeface="Noto Sans CJK KR"/>
+                <a:latin typeface="Malgun Gothic"/>
+                <a:ea typeface="Malgun Gothic"/>
               </a:rPr>
               <a:t>01  |  FICTION ARCHITECTURE</a:t>
             </a:r>
@@ -5803,8 +5803,8 @@
                 <a:solidFill>
                   <a:srgbClr val="1A212E"/>
                 </a:solidFill>
-                <a:latin typeface="Noto Sans CJK KR"/>
-                <a:ea typeface="Noto Sans CJK KR"/>
+                <a:latin typeface="Malgun Gothic"/>
+                <a:ea typeface="Malgun Gothic"/>
               </a:rPr>
               <a:t>완성도 높은 소설은 소재·인물·플롯·문체의 4대 축으로 작동한다</a:t>
             </a:r>
@@ -5843,8 +5843,8 @@
                 <a:solidFill>
                   <a:srgbClr val="555E6C"/>
                 </a:solidFill>
-                <a:latin typeface="Noto Sans CJK KR"/>
-                <a:ea typeface="Noto Sans CJK KR"/>
+                <a:latin typeface="Malgun Gothic"/>
+                <a:ea typeface="Malgun Gothic"/>
               </a:rPr>
               <a:t>네 가지 기둥 중 하나라도 무너지면 서사의 설득력이 급격히 약화된다</a:t>
             </a:r>
@@ -6015,8 +6015,8 @@
                 <a:solidFill>
                   <a:srgbClr val="878E99"/>
                 </a:solidFill>
-                <a:latin typeface="Noto Sans CJK KR"/>
-                <a:ea typeface="Noto Sans CJK KR"/>
+                <a:latin typeface="Malgun Gothic"/>
+                <a:ea typeface="Malgun Gothic"/>
               </a:rPr>
               <a:t>THE CRAFT OF FICTION WRITING  |  소설 창작 실전 가이드</a:t>
             </a:r>
@@ -6055,8 +6055,8 @@
                 <a:solidFill>
                   <a:srgbClr val="C6532D"/>
                 </a:solidFill>
-                <a:latin typeface="Noto Sans CJK KR"/>
-                <a:ea typeface="Noto Sans CJK KR"/>
+                <a:latin typeface="Malgun Gothic"/>
+                <a:ea typeface="Malgun Gothic"/>
               </a:rPr>
               <a:t>02 / 10</a:t>
             </a:r>
@@ -6233,8 +6233,8 @@
                 <a:solidFill>
                   <a:srgbClr val="FFFFFF"/>
                 </a:solidFill>
-                <a:latin typeface="Noto Sans CJK KR"/>
-                <a:ea typeface="Noto Sans CJK KR"/>
+                <a:latin typeface="Malgun Gothic"/>
+                <a:ea typeface="Malgun Gothic"/>
               </a:rPr>
               <a:t>01</a:t>
             </a:r>
@@ -6273,8 +6273,8 @@
                 <a:solidFill>
                   <a:srgbClr val="1A212E"/>
                 </a:solidFill>
-                <a:latin typeface="Noto Sans CJK KR"/>
-                <a:ea typeface="Noto Sans CJK KR"/>
+                <a:latin typeface="Malgun Gothic"/>
+                <a:ea typeface="Malgun Gothic"/>
               </a:rPr>
               <a:t>매혹적인 전제 (Premise)</a:t>
             </a:r>
@@ -6313,8 +6313,8 @@
                 <a:solidFill>
                   <a:srgbClr val="C6532D"/>
                 </a:solidFill>
-                <a:latin typeface="Noto Sans CJK KR"/>
-                <a:ea typeface="Noto Sans CJK KR"/>
+                <a:latin typeface="Malgun Gothic"/>
+                <a:ea typeface="Malgun Gothic"/>
               </a:rPr>
               <a:t>호기심을 점화하는 '만약에(What if?)'의 질문</a:t>
             </a:r>
@@ -6349,34 +6349,34 @@
               </a:lnSpc>
             </a:pPr>
             <a:r>
-              <a:rPr sz="1080" b="0" i="0">
+              <a:rPr sz="1030" b="0" i="0">
                 <a:solidFill>
                   <a:srgbClr val="555E6C"/>
                 </a:solidFill>
-                <a:latin typeface="Noto Sans CJK KR"/>
-                <a:ea typeface="Noto Sans CJK KR"/>
+                <a:latin typeface="Malgun Gothic"/>
+                <a:ea typeface="Malgun Gothic"/>
               </a:rPr>
               <a:t>• 익숙한 일상 속 낯선 균열을 포착해 독자의 질문을 유도</a:t>
             </a:r>
             <a:br/>
             <a:r>
-              <a:rPr sz="1080" b="0" i="0">
+              <a:rPr sz="1030" b="0" i="0">
                 <a:solidFill>
                   <a:srgbClr val="555E6C"/>
                 </a:solidFill>
-                <a:latin typeface="Noto Sans CJK KR"/>
-                <a:ea typeface="Noto Sans CJK KR"/>
+                <a:latin typeface="Malgun Gothic"/>
+                <a:ea typeface="Malgun Gothic"/>
               </a:rPr>
               <a:t>• 단순한 설정 나열이 아닌 주인공이 겪을 윤리적·현실적 딜레마 내포</a:t>
             </a:r>
             <a:br/>
             <a:r>
-              <a:rPr sz="1080" b="0" i="0">
+              <a:rPr sz="1030" b="0" i="0">
                 <a:solidFill>
                   <a:srgbClr val="555E6C"/>
                 </a:solidFill>
-                <a:latin typeface="Noto Sans CJK KR"/>
-                <a:ea typeface="Noto Sans CJK KR"/>
+                <a:latin typeface="Malgun Gothic"/>
+                <a:ea typeface="Malgun Gothic"/>
               </a:rPr>
               <a:t>• 한 문장의 로그라인으로 압축될 때 서사의 방향성이 흔들리지 않음</a:t>
             </a:r>
@@ -6461,8 +6461,8 @@
                 <a:solidFill>
                   <a:srgbClr val="1A212E"/>
                 </a:solidFill>
-                <a:latin typeface="Noto Sans CJK KR"/>
-                <a:ea typeface="Noto Sans CJK KR"/>
+                <a:latin typeface="Malgun Gothic"/>
+                <a:ea typeface="Malgun Gothic"/>
               </a:rPr>
               <a:t>핵심 질문: 독자가 첫 페이지를 펼칠 이유는 무엇인가?</a:t>
             </a:r>
@@ -6639,8 +6639,8 @@
                 <a:solidFill>
                   <a:srgbClr val="FFFFFF"/>
                 </a:solidFill>
-                <a:latin typeface="Noto Sans CJK KR"/>
-                <a:ea typeface="Noto Sans CJK KR"/>
+                <a:latin typeface="Malgun Gothic"/>
+                <a:ea typeface="Malgun Gothic"/>
               </a:rPr>
               <a:t>02</a:t>
             </a:r>
@@ -6679,8 +6679,8 @@
                 <a:solidFill>
                   <a:srgbClr val="1A212E"/>
                 </a:solidFill>
-                <a:latin typeface="Noto Sans CJK KR"/>
-                <a:ea typeface="Noto Sans CJK KR"/>
+                <a:latin typeface="Malgun Gothic"/>
+                <a:ea typeface="Malgun Gothic"/>
               </a:rPr>
               <a:t>입체적 인물 (Character)</a:t>
             </a:r>
@@ -6719,8 +6719,8 @@
                 <a:solidFill>
                   <a:srgbClr val="316B69"/>
                 </a:solidFill>
-                <a:latin typeface="Noto Sans CJK KR"/>
-                <a:ea typeface="Noto Sans CJK KR"/>
+                <a:latin typeface="Malgun Gothic"/>
+                <a:ea typeface="Malgun Gothic"/>
               </a:rPr>
               <a:t>욕망(Want)과 결핍(Need)이 충돌하는 살아있는 주체</a:t>
             </a:r>
@@ -6755,34 +6755,34 @@
               </a:lnSpc>
             </a:pPr>
             <a:r>
-              <a:rPr sz="1080" b="0" i="0">
+              <a:rPr sz="1030" b="0" i="0">
                 <a:solidFill>
                   <a:srgbClr val="555E6C"/>
                 </a:solidFill>
-                <a:latin typeface="Noto Sans CJK KR"/>
-                <a:ea typeface="Noto Sans CJK KR"/>
+                <a:latin typeface="Malgun Gothic"/>
+                <a:ea typeface="Malgun Gothic"/>
               </a:rPr>
               <a:t>• 완벽한 영웅보다 결함과 모순을 지닌 인물에게 독자가 감정이입</a:t>
             </a:r>
             <a:br/>
             <a:r>
-              <a:rPr sz="1080" b="0" i="0">
+              <a:rPr sz="1030" b="0" i="0">
                 <a:solidFill>
                   <a:srgbClr val="555E6C"/>
                 </a:solidFill>
-                <a:latin typeface="Noto Sans CJK KR"/>
-                <a:ea typeface="Noto Sans CJK KR"/>
+                <a:latin typeface="Malgun Gothic"/>
+                <a:ea typeface="Malgun Gothic"/>
               </a:rPr>
               <a:t>• 외면적 목표를 추구하는 과정에서 내면의 거짓 믿음이 깨지는 성장</a:t>
             </a:r>
             <a:br/>
             <a:r>
-              <a:rPr sz="1080" b="0" i="0">
+              <a:rPr sz="1030" b="0" i="0">
                 <a:solidFill>
                   <a:srgbClr val="555E6C"/>
                 </a:solidFill>
-                <a:latin typeface="Noto Sans CJK KR"/>
-                <a:ea typeface="Noto Sans CJK KR"/>
+                <a:latin typeface="Malgun Gothic"/>
+                <a:ea typeface="Malgun Gothic"/>
               </a:rPr>
               <a:t>• 주인공의 약점을 정확히 파고드는 대립자(Antagonist)와의 상호작용</a:t>
             </a:r>
@@ -6867,8 +6867,8 @@
                 <a:solidFill>
                   <a:srgbClr val="1A212E"/>
                 </a:solidFill>
-                <a:latin typeface="Noto Sans CJK KR"/>
-                <a:ea typeface="Noto Sans CJK KR"/>
+                <a:latin typeface="Malgun Gothic"/>
+                <a:ea typeface="Malgun Gothic"/>
               </a:rPr>
               <a:t>핵심 질문: 이 인물은 무엇을 간절히 원하며 무엇을 잃을까 두려워하는가?</a:t>
             </a:r>
@@ -7045,8 +7045,8 @@
                 <a:solidFill>
                   <a:srgbClr val="FFFFFF"/>
                 </a:solidFill>
-                <a:latin typeface="Noto Sans CJK KR"/>
-                <a:ea typeface="Noto Sans CJK KR"/>
+                <a:latin typeface="Malgun Gothic"/>
+                <a:ea typeface="Malgun Gothic"/>
               </a:rPr>
               <a:t>03</a:t>
             </a:r>
@@ -7085,8 +7085,8 @@
                 <a:solidFill>
                   <a:srgbClr val="1A212E"/>
                 </a:solidFill>
-                <a:latin typeface="Noto Sans CJK KR"/>
-                <a:ea typeface="Noto Sans CJK KR"/>
+                <a:latin typeface="Malgun Gothic"/>
+                <a:ea typeface="Malgun Gothic"/>
               </a:rPr>
               <a:t>인과적 플롯 (Plot &amp; Conflict)</a:t>
             </a:r>
@@ -7125,8 +7125,8 @@
                 <a:solidFill>
                   <a:srgbClr val="D19830"/>
                 </a:solidFill>
-                <a:latin typeface="Noto Sans CJK KR"/>
-                <a:ea typeface="Noto Sans CJK KR"/>
+                <a:latin typeface="Malgun Gothic"/>
+                <a:ea typeface="Malgun Gothic"/>
               </a:rPr>
               <a:t>'그리고'가 아닌 '그래서/그러나'로 연결된 사건의 사슬</a:t>
             </a:r>
@@ -7161,34 +7161,34 @@
               </a:lnSpc>
             </a:pPr>
             <a:r>
-              <a:rPr sz="1080" b="0" i="0">
+              <a:rPr sz="1030" b="0" i="0">
                 <a:solidFill>
                   <a:srgbClr val="555E6C"/>
                 </a:solidFill>
-                <a:latin typeface="Noto Sans CJK KR"/>
-                <a:ea typeface="Noto Sans CJK KR"/>
+                <a:latin typeface="Malgun Gothic"/>
+                <a:ea typeface="Malgun Gothic"/>
               </a:rPr>
               <a:t>• 우연에 기댄 해결(데우스 엑스 마키나)을 배제하고 인물의 선택으로 전개</a:t>
             </a:r>
             <a:br/>
             <a:r>
-              <a:rPr sz="1080" b="0" i="0">
+              <a:rPr sz="1030" b="0" i="0">
                 <a:solidFill>
                   <a:srgbClr val="555E6C"/>
                 </a:solidFill>
-                <a:latin typeface="Noto Sans CJK KR"/>
-                <a:ea typeface="Noto Sans CJK KR"/>
+                <a:latin typeface="Malgun Gothic"/>
+                <a:ea typeface="Malgun Gothic"/>
               </a:rPr>
               <a:t>• 점진적으로 판돈(Stakes)을 높여 주인공을 퇴로 없는 막다른 골목으로 압박</a:t>
             </a:r>
             <a:br/>
             <a:r>
-              <a:rPr sz="1080" b="0" i="0">
+              <a:rPr sz="1030" b="0" i="0">
                 <a:solidFill>
                   <a:srgbClr val="555E6C"/>
                 </a:solidFill>
-                <a:latin typeface="Noto Sans CJK KR"/>
-                <a:ea typeface="Noto Sans CJK KR"/>
+                <a:latin typeface="Malgun Gothic"/>
+                <a:ea typeface="Malgun Gothic"/>
               </a:rPr>
               <a:t>• 3막 구조의 5대 전환점을 통해 긴장과 이완의 서사적 리듬을 설계</a:t>
             </a:r>
@@ -7273,8 +7273,8 @@
                 <a:solidFill>
                   <a:srgbClr val="1A212E"/>
                 </a:solidFill>
-                <a:latin typeface="Noto Sans CJK KR"/>
-                <a:ea typeface="Noto Sans CJK KR"/>
+                <a:latin typeface="Malgun Gothic"/>
+                <a:ea typeface="Malgun Gothic"/>
               </a:rPr>
               <a:t>핵심 질문: 이전 사건이 다음 사건을 필연적으로 강제하는가?</a:t>
             </a:r>
@@ -7451,8 +7451,8 @@
                 <a:solidFill>
                   <a:srgbClr val="FFFFFF"/>
                 </a:solidFill>
-                <a:latin typeface="Noto Sans CJK KR"/>
-                <a:ea typeface="Noto Sans CJK KR"/>
+                <a:latin typeface="Malgun Gothic"/>
+                <a:ea typeface="Malgun Gothic"/>
               </a:rPr>
               <a:t>04</a:t>
             </a:r>
@@ -7491,8 +7491,8 @@
                 <a:solidFill>
                   <a:srgbClr val="1A212E"/>
                 </a:solidFill>
-                <a:latin typeface="Noto Sans CJK KR"/>
-                <a:ea typeface="Noto Sans CJK KR"/>
+                <a:latin typeface="Malgun Gothic"/>
+                <a:ea typeface="Malgun Gothic"/>
               </a:rPr>
               <a:t>감각적 장면과 문체 (Scene &amp; Voice)</a:t>
             </a:r>
@@ -7531,8 +7531,8 @@
                 <a:solidFill>
                   <a:srgbClr val="8E3542"/>
                 </a:solidFill>
-                <a:latin typeface="Noto Sans CJK KR"/>
-                <a:ea typeface="Noto Sans CJK KR"/>
+                <a:latin typeface="Malgun Gothic"/>
+                <a:ea typeface="Malgun Gothic"/>
               </a:rPr>
               <a:t>요약 설명(Tell)을 넘어 현장을 체험하게 하는 묘사(Show)</a:t>
             </a:r>
@@ -7567,34 +7567,34 @@
               </a:lnSpc>
             </a:pPr>
             <a:r>
-              <a:rPr sz="1080" b="0" i="0">
+              <a:rPr sz="1030" b="0" i="0">
                 <a:solidFill>
                   <a:srgbClr val="555E6C"/>
                 </a:solidFill>
-                <a:latin typeface="Noto Sans CJK KR"/>
-                <a:ea typeface="Noto Sans CJK KR"/>
+                <a:latin typeface="Malgun Gothic"/>
+                <a:ea typeface="Malgun Gothic"/>
               </a:rPr>
               <a:t>• 오감의 디테일과 구체적 행동으로 인물의 감정선을 시각화</a:t>
             </a:r>
             <a:br/>
             <a:r>
-              <a:rPr sz="1080" b="0" i="0">
+              <a:rPr sz="1030" b="0" i="0">
                 <a:solidFill>
                   <a:srgbClr val="555E6C"/>
                 </a:solidFill>
-                <a:latin typeface="Noto Sans CJK KR"/>
-                <a:ea typeface="Noto Sans CJK KR"/>
+                <a:latin typeface="Malgun Gothic"/>
+                <a:ea typeface="Malgun Gothic"/>
               </a:rPr>
               <a:t>• 인물의 성격과 관계의 권력 구도가 묻어나는 입체적인 대사 설계</a:t>
             </a:r>
             <a:br/>
             <a:r>
-              <a:rPr sz="1080" b="0" i="0">
+              <a:rPr sz="1030" b="0" i="0">
                 <a:solidFill>
                   <a:srgbClr val="555E6C"/>
                 </a:solidFill>
-                <a:latin typeface="Noto Sans CJK KR"/>
-                <a:ea typeface="Noto Sans CJK KR"/>
+                <a:latin typeface="Malgun Gothic"/>
+                <a:ea typeface="Malgun Gothic"/>
               </a:rPr>
               <a:t>• 불필요한 수식어를 덜어내고 장면의 속도에 맞춘 문장 호흡 조율</a:t>
             </a:r>
@@ -7679,8 +7679,8 @@
                 <a:solidFill>
                   <a:srgbClr val="1A212E"/>
                 </a:solidFill>
-                <a:latin typeface="Noto Sans CJK KR"/>
-                <a:ea typeface="Noto Sans CJK KR"/>
+                <a:latin typeface="Malgun Gothic"/>
+                <a:ea typeface="Malgun Gothic"/>
               </a:rPr>
               <a:t>핵심 질문: 독자의 머릿속에 이 장면이 영화처럼 그려지는가?</a:t>
             </a:r>
@@ -7765,8 +7765,8 @@
                 <a:solidFill>
                   <a:srgbClr val="F2EFE9"/>
                 </a:solidFill>
-                <a:latin typeface="Noto Sans CJK KR"/>
-                <a:ea typeface="Noto Sans CJK KR"/>
+                <a:latin typeface="Malgun Gothic"/>
+                <a:ea typeface="Malgun Gothic"/>
               </a:rPr>
               <a:t>핵심 공식:  매력적인 소재(Premise)가 독자를 부르고, 입체적인 인물(Character)이 페이지를 넘기게 하며, 단단한 플롯과 문체가 여운을 완성한다.</a:t>
             </a:r>
@@ -7831,8 +7831,8 @@
                 <a:solidFill>
                   <a:srgbClr val="C6532D"/>
                 </a:solidFill>
-                <a:latin typeface="Noto Sans CJK KR"/>
-                <a:ea typeface="Noto Sans CJK KR"/>
+                <a:latin typeface="Malgun Gothic"/>
+                <a:ea typeface="Malgun Gothic"/>
               </a:rPr>
               <a:t>02  |  IDEA &amp; LOGLINE DESIGN</a:t>
             </a:r>
@@ -7871,8 +7871,8 @@
                 <a:solidFill>
                   <a:srgbClr val="1A212E"/>
                 </a:solidFill>
-                <a:latin typeface="Noto Sans CJK KR"/>
-                <a:ea typeface="Noto Sans CJK KR"/>
+                <a:latin typeface="Malgun Gothic"/>
+                <a:ea typeface="Malgun Gothic"/>
               </a:rPr>
               <a:t>막연한 소재를 한 문장의 로그라인(Logline)으로 압축해 서사의 나침반을 세운다</a:t>
             </a:r>
@@ -7911,8 +7911,8 @@
                 <a:solidFill>
                   <a:srgbClr val="555E6C"/>
                 </a:solidFill>
-                <a:latin typeface="Noto Sans CJK KR"/>
-                <a:ea typeface="Noto Sans CJK KR"/>
+                <a:latin typeface="Malgun Gothic"/>
+                <a:ea typeface="Malgun Gothic"/>
               </a:rPr>
               <a:t>좋은 로그라인은 주인공, 촉발 사건, 핵심 목표, 그리고 실패 시 치러야 할 대가(Stakes)를 명확히 보여준다</a:t>
             </a:r>
@@ -8083,8 +8083,8 @@
                 <a:solidFill>
                   <a:srgbClr val="878E99"/>
                 </a:solidFill>
-                <a:latin typeface="Noto Sans CJK KR"/>
-                <a:ea typeface="Noto Sans CJK KR"/>
+                <a:latin typeface="Malgun Gothic"/>
+                <a:ea typeface="Malgun Gothic"/>
               </a:rPr>
               <a:t>THE CRAFT OF FICTION WRITING  |  소설 창작 실전 가이드</a:t>
             </a:r>
@@ -8123,8 +8123,8 @@
                 <a:solidFill>
                   <a:srgbClr val="C6532D"/>
                 </a:solidFill>
-                <a:latin typeface="Noto Sans CJK KR"/>
-                <a:ea typeface="Noto Sans CJK KR"/>
+                <a:latin typeface="Malgun Gothic"/>
+                <a:ea typeface="Malgun Gothic"/>
               </a:rPr>
               <a:t>03 / 10</a:t>
             </a:r>
@@ -8211,8 +8211,8 @@
                 <a:solidFill>
                   <a:srgbClr val="C6532D"/>
                 </a:solidFill>
-                <a:latin typeface="Noto Sans CJK KR"/>
-                <a:ea typeface="Noto Sans CJK KR"/>
+                <a:latin typeface="Malgun Gothic"/>
+                <a:ea typeface="Malgun Gothic"/>
               </a:rPr>
               <a:t>강력한 로그라인의 4요소 공식</a:t>
             </a:r>
@@ -8299,8 +8299,8 @@
                 <a:solidFill>
                   <a:srgbClr val="1A212E"/>
                 </a:solidFill>
-                <a:latin typeface="Noto Sans CJK KR"/>
-                <a:ea typeface="Noto Sans CJK KR"/>
+                <a:latin typeface="Malgun Gothic"/>
+                <a:ea typeface="Malgun Gothic"/>
               </a:rPr>
               <a:t>1. 결핍을 지닌 주인공</a:t>
             </a:r>
@@ -8339,8 +8339,8 @@
                 <a:solidFill>
                   <a:srgbClr val="555E6C"/>
                 </a:solidFill>
-                <a:latin typeface="Noto Sans CJK KR"/>
-                <a:ea typeface="Noto Sans CJK KR"/>
+                <a:latin typeface="Malgun Gothic"/>
+                <a:ea typeface="Malgun Gothic"/>
               </a:rPr>
               <a:t>어떤 약점·상황에 처한 인물이</a:t>
             </a:r>
@@ -8379,8 +8379,8 @@
                 <a:solidFill>
                   <a:srgbClr val="C6532D"/>
                 </a:solidFill>
-                <a:latin typeface="Noto Sans CJK KR"/>
-                <a:ea typeface="Noto Sans CJK KR"/>
+                <a:latin typeface="Malgun Gothic"/>
+                <a:ea typeface="Malgun Gothic"/>
               </a:rPr>
               <a:t>+</a:t>
             </a:r>
@@ -8467,8 +8467,8 @@
                 <a:solidFill>
                   <a:srgbClr val="1A212E"/>
                 </a:solidFill>
-                <a:latin typeface="Noto Sans CJK KR"/>
-                <a:ea typeface="Noto Sans CJK KR"/>
+                <a:latin typeface="Malgun Gothic"/>
+                <a:ea typeface="Malgun Gothic"/>
               </a:rPr>
               <a:t>2. 촉발 사건 (Inciting)</a:t>
             </a:r>
@@ -8507,8 +8507,8 @@
                 <a:solidFill>
                   <a:srgbClr val="555E6C"/>
                 </a:solidFill>
-                <a:latin typeface="Noto Sans CJK KR"/>
-                <a:ea typeface="Noto Sans CJK KR"/>
+                <a:latin typeface="Malgun Gothic"/>
+                <a:ea typeface="Malgun Gothic"/>
               </a:rPr>
               <a:t>예기치 못한 사건을 겪은 뒤</a:t>
             </a:r>
@@ -8547,8 +8547,8 @@
                 <a:solidFill>
                   <a:srgbClr val="C6532D"/>
                 </a:solidFill>
-                <a:latin typeface="Noto Sans CJK KR"/>
-                <a:ea typeface="Noto Sans CJK KR"/>
+                <a:latin typeface="Malgun Gothic"/>
+                <a:ea typeface="Malgun Gothic"/>
               </a:rPr>
               <a:t>+</a:t>
             </a:r>
@@ -8635,8 +8635,8 @@
                 <a:solidFill>
                   <a:srgbClr val="1A212E"/>
                 </a:solidFill>
-                <a:latin typeface="Noto Sans CJK KR"/>
-                <a:ea typeface="Noto Sans CJK KR"/>
+                <a:latin typeface="Malgun Gothic"/>
+                <a:ea typeface="Malgun Gothic"/>
               </a:rPr>
               <a:t>3. 핵심 목표와 대립</a:t>
             </a:r>
@@ -8675,8 +8675,8 @@
                 <a:solidFill>
                   <a:srgbClr val="555E6C"/>
                 </a:solidFill>
-                <a:latin typeface="Noto Sans CJK KR"/>
-                <a:ea typeface="Noto Sans CJK KR"/>
+                <a:latin typeface="Malgun Gothic"/>
+                <a:ea typeface="Malgun Gothic"/>
               </a:rPr>
               <a:t>강력한 적수/장애물에 맞서</a:t>
             </a:r>
@@ -8715,8 +8715,8 @@
                 <a:solidFill>
                   <a:srgbClr val="C6532D"/>
                 </a:solidFill>
-                <a:latin typeface="Noto Sans CJK KR"/>
-                <a:ea typeface="Noto Sans CJK KR"/>
+                <a:latin typeface="Malgun Gothic"/>
+                <a:ea typeface="Malgun Gothic"/>
               </a:rPr>
               <a:t>+</a:t>
             </a:r>
@@ -8803,8 +8803,8 @@
                 <a:solidFill>
                   <a:srgbClr val="C6532D"/>
                 </a:solidFill>
-                <a:latin typeface="Noto Sans CJK KR"/>
-                <a:ea typeface="Noto Sans CJK KR"/>
+                <a:latin typeface="Malgun Gothic"/>
+                <a:ea typeface="Malgun Gothic"/>
               </a:rPr>
               <a:t>4. 치명적 대가 (Stakes)</a:t>
             </a:r>
@@ -8843,8 +8843,8 @@
                 <a:solidFill>
                   <a:srgbClr val="555E6C"/>
                 </a:solidFill>
-                <a:latin typeface="Noto Sans CJK KR"/>
-                <a:ea typeface="Noto Sans CJK KR"/>
+                <a:latin typeface="Malgun Gothic"/>
+                <a:ea typeface="Malgun Gothic"/>
               </a:rPr>
               <a:t>무엇을 걸고 싸우는가?</a:t>
             </a:r>
@@ -8883,8 +8883,8 @@
                 <a:solidFill>
                   <a:srgbClr val="1A212E"/>
                 </a:solidFill>
-                <a:latin typeface="Noto Sans CJK KR"/>
-                <a:ea typeface="Noto Sans CJK KR"/>
+                <a:latin typeface="Malgun Gothic"/>
+                <a:ea typeface="Malgun Gothic"/>
               </a:rPr>
               <a:t>실전 변환 예시: 추상적 소재에서 구체적 로그라인으로</a:t>
             </a:r>
@@ -8971,8 +8971,8 @@
                 <a:solidFill>
                   <a:srgbClr val="878E99"/>
                 </a:solidFill>
-                <a:latin typeface="Noto Sans CJK KR"/>
-                <a:ea typeface="Noto Sans CJK KR"/>
+                <a:latin typeface="Malgun Gothic"/>
+                <a:ea typeface="Malgun Gothic"/>
               </a:rPr>
               <a:t>[막연한 소재]  장르 01 · 미스터리 스릴러</a:t>
             </a:r>
@@ -9011,8 +9011,8 @@
                 <a:solidFill>
                   <a:srgbClr val="555E6C"/>
                 </a:solidFill>
-                <a:latin typeface="Noto Sans CJK KR"/>
-                <a:ea typeface="Noto Sans CJK KR"/>
+                <a:latin typeface="Malgun Gothic"/>
+                <a:ea typeface="Malgun Gothic"/>
               </a:rPr>
               <a:t>“기억상실증에 걸린 형사가 살인사건을 수사하는 이야기”</a:t>
             </a:r>
@@ -9051,8 +9051,8 @@
                 <a:solidFill>
                   <a:srgbClr val="C6532D"/>
                 </a:solidFill>
-                <a:latin typeface="Noto Sans CJK KR"/>
-                <a:ea typeface="Noto Sans CJK KR"/>
+                <a:latin typeface="Malgun Gothic"/>
+                <a:ea typeface="Malgun Gothic"/>
               </a:rPr>
               <a:t>→</a:t>
             </a:r>
@@ -9183,8 +9183,8 @@
                 <a:solidFill>
                   <a:srgbClr val="C6532D"/>
                 </a:solidFill>
-                <a:latin typeface="Noto Sans CJK KR"/>
-                <a:ea typeface="Noto Sans CJK KR"/>
+                <a:latin typeface="Malgun Gothic"/>
+                <a:ea typeface="Malgun Gothic"/>
               </a:rPr>
               <a:t>[완성된 로그라인]</a:t>
             </a:r>
@@ -9269,8 +9269,8 @@
                 <a:solidFill>
                   <a:srgbClr val="C6532D"/>
                 </a:solidFill>
-                <a:latin typeface="Noto Sans CJK KR"/>
-                <a:ea typeface="Noto Sans CJK KR"/>
+                <a:latin typeface="Malgun Gothic"/>
+                <a:ea typeface="Malgun Gothic"/>
               </a:rPr>
               <a:t>제한 시간(24시간) + 아이러니(자신이 용의자)</a:t>
             </a:r>
@@ -9305,12 +9305,12 @@
               </a:lnSpc>
             </a:pPr>
             <a:r>
-              <a:rPr sz="1060" b="1" i="0">
+              <a:rPr sz="910" b="1" i="0">
                 <a:solidFill>
                   <a:srgbClr val="1A212E"/>
                 </a:solidFill>
-                <a:latin typeface="Noto Sans CJK KR"/>
-                <a:ea typeface="Noto Sans CJK KR"/>
+                <a:latin typeface="Malgun Gothic"/>
+                <a:ea typeface="Malgun Gothic"/>
               </a:rPr>
               <a:t>단기 기억이 24시간마다 초기화되는 강력계 형사가, 자신의 수첩에 적힌 마지막 용의자가 바로 자신임을 알게 되면서 기억이 사라지기 전에 진범을 찾아야 하는 사투</a:t>
             </a:r>
@@ -9397,8 +9397,8 @@
                 <a:solidFill>
                   <a:srgbClr val="878E99"/>
                 </a:solidFill>
-                <a:latin typeface="Noto Sans CJK KR"/>
-                <a:ea typeface="Noto Sans CJK KR"/>
+                <a:latin typeface="Malgun Gothic"/>
+                <a:ea typeface="Malgun Gothic"/>
               </a:rPr>
               <a:t>[막연한 소재]  장르 02 · SF / 판타지</a:t>
             </a:r>
@@ -9437,8 +9437,8 @@
                 <a:solidFill>
                   <a:srgbClr val="555E6C"/>
                 </a:solidFill>
-                <a:latin typeface="Noto Sans CJK KR"/>
-                <a:ea typeface="Noto Sans CJK KR"/>
+                <a:latin typeface="Malgun Gothic"/>
+                <a:ea typeface="Malgun Gothic"/>
               </a:rPr>
               <a:t>“감정을 사고파는 미래 사회에서 벌어지는 청춘 드라마”</a:t>
             </a:r>
@@ -9477,8 +9477,8 @@
                 <a:solidFill>
                   <a:srgbClr val="C6532D"/>
                 </a:solidFill>
-                <a:latin typeface="Noto Sans CJK KR"/>
-                <a:ea typeface="Noto Sans CJK KR"/>
+                <a:latin typeface="Malgun Gothic"/>
+                <a:ea typeface="Malgun Gothic"/>
               </a:rPr>
               <a:t>→</a:t>
             </a:r>
@@ -9609,8 +9609,8 @@
                 <a:solidFill>
                   <a:srgbClr val="C6532D"/>
                 </a:solidFill>
-                <a:latin typeface="Noto Sans CJK KR"/>
-                <a:ea typeface="Noto Sans CJK KR"/>
+                <a:latin typeface="Malgun Gothic"/>
+                <a:ea typeface="Malgun Gothic"/>
               </a:rPr>
               <a:t>[완성된 로그라인]</a:t>
             </a:r>
@@ -9695,8 +9695,8 @@
                 <a:solidFill>
                   <a:srgbClr val="C6532D"/>
                 </a:solidFill>
-                <a:latin typeface="Noto Sans CJK KR"/>
-                <a:ea typeface="Noto Sans CJK KR"/>
+                <a:latin typeface="Malgun Gothic"/>
+                <a:ea typeface="Malgun Gothic"/>
               </a:rPr>
               <a:t>독창적 직업 + 개인적 절박함(실종된 동생)</a:t>
             </a:r>
@@ -9731,12 +9731,12 @@
               </a:lnSpc>
             </a:pPr>
             <a:r>
-              <a:rPr sz="1060" b="1" i="0">
+              <a:rPr sz="910" b="1" i="0">
                 <a:solidFill>
                   <a:srgbClr val="1A212E"/>
                 </a:solidFill>
-                <a:latin typeface="Noto Sans CJK KR"/>
-                <a:ea typeface="Noto Sans CJK KR"/>
+                <a:latin typeface="Malgun Gothic"/>
+                <a:ea typeface="Malgun Gothic"/>
               </a:rPr>
               <a:t>타인의 슬픔을 대신 겪어주고 돈을 버는 ‘감정 대리인’ 청년이, 의뢰인의 지워진 기억 속에서 10년 전 실종된 여동생의 흔적을 발견하고 거대 기업의 금기를 추적하는 이야기</a:t>
             </a:r>
@@ -9823,8 +9823,8 @@
                 <a:solidFill>
                   <a:srgbClr val="878E99"/>
                 </a:solidFill>
-                <a:latin typeface="Noto Sans CJK KR"/>
-                <a:ea typeface="Noto Sans CJK KR"/>
+                <a:latin typeface="Malgun Gothic"/>
+                <a:ea typeface="Malgun Gothic"/>
               </a:rPr>
               <a:t>[막연한 소재]  장르 03 · 휴먼 / 가족 드라마</a:t>
             </a:r>
@@ -9863,8 +9863,8 @@
                 <a:solidFill>
                   <a:srgbClr val="555E6C"/>
                 </a:solidFill>
-                <a:latin typeface="Noto Sans CJK KR"/>
-                <a:ea typeface="Noto Sans CJK KR"/>
+                <a:latin typeface="Malgun Gothic"/>
+                <a:ea typeface="Malgun Gothic"/>
               </a:rPr>
               <a:t>“사이가 나쁜 모녀가 함께 여행을 떠나며 화해하는 소설”</a:t>
             </a:r>
@@ -9903,8 +9903,8 @@
                 <a:solidFill>
                   <a:srgbClr val="C6532D"/>
                 </a:solidFill>
-                <a:latin typeface="Noto Sans CJK KR"/>
-                <a:ea typeface="Noto Sans CJK KR"/>
+                <a:latin typeface="Malgun Gothic"/>
+                <a:ea typeface="Malgun Gothic"/>
               </a:rPr>
               <a:t>→</a:t>
             </a:r>
@@ -10035,8 +10035,8 @@
                 <a:solidFill>
                   <a:srgbClr val="C6532D"/>
                 </a:solidFill>
-                <a:latin typeface="Noto Sans CJK KR"/>
-                <a:ea typeface="Noto Sans CJK KR"/>
+                <a:latin typeface="Malgun Gothic"/>
+                <a:ea typeface="Malgun Gothic"/>
               </a:rPr>
               <a:t>[완성된 로그라인]</a:t>
             </a:r>
@@ -10121,8 +10121,8 @@
                 <a:solidFill>
                   <a:srgbClr val="C6532D"/>
                 </a:solidFill>
-                <a:latin typeface="Noto Sans CJK KR"/>
-                <a:ea typeface="Noto Sans CJK KR"/>
+                <a:latin typeface="Malgun Gothic"/>
+                <a:ea typeface="Malgun Gothic"/>
               </a:rPr>
               <a:t>강제적 동행(유언 조건) + 내면적 화해</a:t>
             </a:r>
@@ -10157,12 +10157,12 @@
               </a:lnSpc>
             </a:pPr>
             <a:r>
-              <a:rPr sz="1060" b="1" i="0">
+              <a:rPr sz="910" b="1" i="0">
                 <a:solidFill>
                   <a:srgbClr val="1A212E"/>
                 </a:solidFill>
-                <a:latin typeface="Noto Sans CJK KR"/>
-                <a:ea typeface="Noto Sans CJK KR"/>
+                <a:latin typeface="Malgun Gothic"/>
+                <a:ea typeface="Malgun Gothic"/>
               </a:rPr>
               <a:t>평생 연락을 끊고 살던 어머니의 유언장 조건 때문에, 빚더미에 오른 딸이 어머니의 첫사랑을 찾아 일주일간 동행하며 몰랐던 어머니의 청춘과 마주하는 여정</a:t>
             </a:r>
@@ -10227,8 +10227,8 @@
                 <a:solidFill>
                   <a:srgbClr val="C6532D"/>
                 </a:solidFill>
-                <a:latin typeface="Noto Sans CJK KR"/>
-                <a:ea typeface="Noto Sans CJK KR"/>
+                <a:latin typeface="Malgun Gothic"/>
+                <a:ea typeface="Malgun Gothic"/>
               </a:rPr>
               <a:t>03  |  CHARACTER PSYCHOLOGY</a:t>
             </a:r>
@@ -10267,8 +10267,8 @@
                 <a:solidFill>
                   <a:srgbClr val="1A212E"/>
                 </a:solidFill>
-                <a:latin typeface="Noto Sans CJK KR"/>
-                <a:ea typeface="Noto Sans CJK KR"/>
+                <a:latin typeface="Malgun Gothic"/>
+                <a:ea typeface="Malgun Gothic"/>
               </a:rPr>
               <a:t>독자가 사랑하는 인물은 외면적 목표(Want)와 내면적 결핍(Need)의 간극에서 탄생한다</a:t>
             </a:r>
@@ -10307,8 +10307,8 @@
                 <a:solidFill>
                   <a:srgbClr val="555E6C"/>
                 </a:solidFill>
-                <a:latin typeface="Noto Sans CJK KR"/>
-                <a:ea typeface="Noto Sans CJK KR"/>
+                <a:latin typeface="Malgun Gothic"/>
+                <a:ea typeface="Malgun Gothic"/>
               </a:rPr>
               <a:t>인물의 프로필을 나열하는 대신, 과거의 상처(Ghost)가 만든 거짓 믿음(Lie)과 행동 동기를 설계하라</a:t>
             </a:r>
@@ -10479,8 +10479,8 @@
                 <a:solidFill>
                   <a:srgbClr val="878E99"/>
                 </a:solidFill>
-                <a:latin typeface="Noto Sans CJK KR"/>
-                <a:ea typeface="Noto Sans CJK KR"/>
+                <a:latin typeface="Malgun Gothic"/>
+                <a:ea typeface="Malgun Gothic"/>
               </a:rPr>
               <a:t>THE CRAFT OF FICTION WRITING  |  소설 창작 실전 가이드</a:t>
             </a:r>
@@ -10519,8 +10519,8 @@
                 <a:solidFill>
                   <a:srgbClr val="C6532D"/>
                 </a:solidFill>
-                <a:latin typeface="Noto Sans CJK KR"/>
-                <a:ea typeface="Noto Sans CJK KR"/>
+                <a:latin typeface="Malgun Gothic"/>
+                <a:ea typeface="Malgun Gothic"/>
               </a:rPr>
               <a:t>04 / 10</a:t>
             </a:r>
@@ -10607,8 +10607,8 @@
                 <a:solidFill>
                   <a:srgbClr val="1A212E"/>
                 </a:solidFill>
-                <a:latin typeface="Noto Sans CJK KR"/>
-                <a:ea typeface="Noto Sans CJK KR"/>
+                <a:latin typeface="Malgun Gothic"/>
+                <a:ea typeface="Malgun Gothic"/>
               </a:rPr>
               <a:t>인물 설계의 빙산 모델 (Character Iceberg)</a:t>
             </a:r>
@@ -10763,8 +10763,8 @@
                 <a:solidFill>
                   <a:srgbClr val="1A212E"/>
                 </a:solidFill>
-                <a:latin typeface="Noto Sans CJK KR"/>
-                <a:ea typeface="Noto Sans CJK KR"/>
+                <a:latin typeface="Malgun Gothic"/>
+                <a:ea typeface="Malgun Gothic"/>
               </a:rPr>
               <a:t>욕망(Want) vs 필요(Need)의 충돌</a:t>
             </a:r>
@@ -10799,12 +10799,12 @@
               </a:lnSpc>
             </a:pPr>
             <a:r>
-              <a:rPr sz="1010" b="0" i="0">
+              <a:rPr sz="910" b="0" i="0">
                 <a:solidFill>
                   <a:srgbClr val="555E6C"/>
                 </a:solidFill>
-                <a:latin typeface="Noto Sans CJK KR"/>
-                <a:ea typeface="Noto Sans CJK KR"/>
+                <a:latin typeface="Malgun Gothic"/>
+                <a:ea typeface="Malgun Gothic"/>
               </a:rPr>
               <a:t>주인공은 눈에 보이는 목표(성공·복수·탈출)를 향해 달리지만, 결말에 이르러 자신이 진짜 필요했던 것(신뢰·용서·진실)을 깨닫고 변화한다.</a:t>
             </a:r>
@@ -10935,8 +10935,8 @@
                 <a:solidFill>
                   <a:srgbClr val="1A212E"/>
                 </a:solidFill>
-                <a:latin typeface="Noto Sans CJK KR"/>
-                <a:ea typeface="Noto Sans CJK KR"/>
+                <a:latin typeface="Malgun Gothic"/>
+                <a:ea typeface="Malgun Gothic"/>
               </a:rPr>
               <a:t>적대자(Antagonist)는 주인공의 거울</a:t>
             </a:r>
@@ -10971,12 +10971,12 @@
               </a:lnSpc>
             </a:pPr>
             <a:r>
-              <a:rPr sz="1010" b="0" i="0">
+              <a:rPr sz="910" b="0" i="0">
                 <a:solidFill>
                   <a:srgbClr val="555E6C"/>
                 </a:solidFill>
-                <a:latin typeface="Noto Sans CJK KR"/>
-                <a:ea typeface="Noto Sans CJK KR"/>
+                <a:latin typeface="Malgun Gothic"/>
+                <a:ea typeface="Malgun Gothic"/>
               </a:rPr>
               <a:t>최고의 악역은 스스로를 선이라고 믿는 인물이다. 주인공과 같은 문제에 직면했지만 정반대의 선택을 한 그림자로 설계할 때 대립이 깊어진다.</a:t>
             </a:r>
@@ -11107,8 +11107,8 @@
                 <a:solidFill>
                   <a:srgbClr val="1A212E"/>
                 </a:solidFill>
-                <a:latin typeface="Noto Sans CJK KR"/>
-                <a:ea typeface="Noto Sans CJK KR"/>
+                <a:latin typeface="Malgun Gothic"/>
+                <a:ea typeface="Malgun Gothic"/>
               </a:rPr>
               <a:t>성격은 형용사가 아니라 ‘선택’으로 증명</a:t>
             </a:r>
@@ -11143,12 +11143,12 @@
               </a:lnSpc>
             </a:pPr>
             <a:r>
-              <a:rPr sz="1010" b="0" i="0">
+              <a:rPr sz="910" b="0" i="0">
                 <a:solidFill>
                   <a:srgbClr val="555E6C"/>
                 </a:solidFill>
-                <a:latin typeface="Noto Sans CJK KR"/>
-                <a:ea typeface="Noto Sans CJK KR"/>
+                <a:latin typeface="Malgun Gothic"/>
+                <a:ea typeface="Malgun Gothic"/>
               </a:rPr>
               <a:t>평화로운 순간의 친절함은 성격을 보여주지 못한다. 가장 소중한 두 가치 중 하나를 포기해야 하는 극한의 딜레마에서 내리는 선택이 진짜 캐릭터다.</a:t>
             </a:r>
@@ -11233,8 +11233,8 @@
                 <a:solidFill>
                   <a:srgbClr val="D19830"/>
                 </a:solidFill>
-                <a:latin typeface="Noto Sans CJK KR"/>
-                <a:ea typeface="Noto Sans CJK KR"/>
+                <a:latin typeface="Malgun Gothic"/>
+                <a:ea typeface="Malgun Gothic"/>
               </a:rPr>
               <a:t>실전 캐릭터 설계 시트 예시  —  &lt;폐기처분 복원가 ‘한서진’&gt;</a:t>
             </a:r>
@@ -11273,8 +11273,8 @@
                 <a:solidFill>
                   <a:srgbClr val="F2EFE9"/>
                 </a:solidFill>
-                <a:latin typeface="Noto Sans CJK KR"/>
-                <a:ea typeface="Noto Sans CJK KR"/>
+                <a:latin typeface="Malgun Gothic"/>
+                <a:ea typeface="Malgun Gothic"/>
               </a:rPr>
               <a:t>• 과거의 상처 (Ghost)</a:t>
             </a:r>
@@ -11313,8 +11313,8 @@
                 <a:solidFill>
                   <a:srgbClr val="B2BAC6"/>
                 </a:solidFill>
-                <a:latin typeface="Noto Sans CJK KR"/>
-                <a:ea typeface="Noto Sans CJK KR"/>
+                <a:latin typeface="Malgun Gothic"/>
+                <a:ea typeface="Malgun Gothic"/>
               </a:rPr>
               <a:t>어린 시절 자신의 거짓말로 가족의 유품을 잃어버린 죄책감</a:t>
             </a:r>
@@ -11353,8 +11353,8 @@
                 <a:solidFill>
                   <a:srgbClr val="F2EFE9"/>
                 </a:solidFill>
-                <a:latin typeface="Noto Sans CJK KR"/>
-                <a:ea typeface="Noto Sans CJK KR"/>
+                <a:latin typeface="Malgun Gothic"/>
+                <a:ea typeface="Malgun Gothic"/>
               </a:rPr>
               <a:t>• 거짓 믿음 (The Lie)</a:t>
             </a:r>
@@ -11393,8 +11393,8 @@
                 <a:solidFill>
                   <a:srgbClr val="B2BAC6"/>
                 </a:solidFill>
-                <a:latin typeface="Noto Sans CJK KR"/>
-                <a:ea typeface="Noto Sans CJK KR"/>
+                <a:latin typeface="Malgun Gothic"/>
+                <a:ea typeface="Malgun Gothic"/>
               </a:rPr>
               <a:t>“사람은 결국 배신하지만, 사물은 절대 거짓말을 하지 않는다.”</a:t>
             </a:r>
@@ -11433,8 +11433,8 @@
                 <a:solidFill>
                   <a:srgbClr val="F2EFE9"/>
                 </a:solidFill>
-                <a:latin typeface="Noto Sans CJK KR"/>
-                <a:ea typeface="Noto Sans CJK KR"/>
+                <a:latin typeface="Malgun Gothic"/>
+                <a:ea typeface="Malgun Gothic"/>
               </a:rPr>
               <a:t>• 외면적 목표 (Want)</a:t>
             </a:r>
@@ -11473,8 +11473,8 @@
                 <a:solidFill>
                   <a:srgbClr val="B2BAC6"/>
                 </a:solidFill>
-                <a:latin typeface="Noto Sans CJK KR"/>
-                <a:ea typeface="Noto Sans CJK KR"/>
+                <a:latin typeface="Malgun Gothic"/>
+                <a:ea typeface="Malgun Gothic"/>
               </a:rPr>
               <a:t>불타버린 고택의 미공개 유작을 완벽히 복원해 거액의 보수를 받는 것</a:t>
             </a:r>
@@ -11513,8 +11513,8 @@
                 <a:solidFill>
                   <a:srgbClr val="F2EFE9"/>
                 </a:solidFill>
-                <a:latin typeface="Noto Sans CJK KR"/>
-                <a:ea typeface="Noto Sans CJK KR"/>
+                <a:latin typeface="Malgun Gothic"/>
+                <a:ea typeface="Malgun Gothic"/>
               </a:rPr>
               <a:t>• 내면적 성장 (Need)</a:t>
             </a:r>
@@ -11553,8 +11553,8 @@
                 <a:solidFill>
                   <a:srgbClr val="B2BAC6"/>
                 </a:solidFill>
-                <a:latin typeface="Noto Sans CJK KR"/>
-                <a:ea typeface="Noto Sans CJK KR"/>
+                <a:latin typeface="Malgun Gothic"/>
+                <a:ea typeface="Malgun Gothic"/>
               </a:rPr>
               <a:t>완벽한 복원보다 남겨진 유가족의 상처를 보듬고 진실을 마주하는 용기</a:t>
             </a:r>
@@ -11619,8 +11619,8 @@
                 <a:solidFill>
                   <a:srgbClr val="C6532D"/>
                 </a:solidFill>
-                <a:latin typeface="Noto Sans CJK KR"/>
-                <a:ea typeface="Noto Sans CJK KR"/>
+                <a:latin typeface="Malgun Gothic"/>
+                <a:ea typeface="Malgun Gothic"/>
               </a:rPr>
               <a:t>04  |  THREE-ACT STRUCTURE &amp; PLOT BEATS</a:t>
             </a:r>
@@ -11659,8 +11659,8 @@
                 <a:solidFill>
                   <a:srgbClr val="1A212E"/>
                 </a:solidFill>
-                <a:latin typeface="Noto Sans CJK KR"/>
-                <a:ea typeface="Noto Sans CJK KR"/>
+                <a:latin typeface="Malgun Gothic"/>
+                <a:ea typeface="Malgun Gothic"/>
               </a:rPr>
               <a:t>3막 구조와 5대 전환점(Plot Beats)으로 독자가 책을 덮지 못하는 긴장감을 조율한다</a:t>
             </a:r>
@@ -11699,8 +11699,8 @@
                 <a:solidFill>
                   <a:srgbClr val="555E6C"/>
                 </a:solidFill>
-                <a:latin typeface="Noto Sans CJK KR"/>
-                <a:ea typeface="Noto Sans CJK KR"/>
+                <a:latin typeface="Malgun Gothic"/>
+                <a:ea typeface="Malgun Gothic"/>
               </a:rPr>
               <a:t>서사의 황금 비율(1막 25% : 2막 50% : 3막 25%)을 통해 위기의 고조와 해소의 쾌감을 정교하게 배치한다</a:t>
             </a:r>
@@ -11871,8 +11871,8 @@
                 <a:solidFill>
                   <a:srgbClr val="878E99"/>
                 </a:solidFill>
-                <a:latin typeface="Noto Sans CJK KR"/>
-                <a:ea typeface="Noto Sans CJK KR"/>
+                <a:latin typeface="Malgun Gothic"/>
+                <a:ea typeface="Malgun Gothic"/>
               </a:rPr>
               <a:t>THE CRAFT OF FICTION WRITING  |  소설 창작 실전 가이드</a:t>
             </a:r>
@@ -11911,8 +11911,8 @@
                 <a:solidFill>
                   <a:srgbClr val="C6532D"/>
                 </a:solidFill>
-                <a:latin typeface="Noto Sans CJK KR"/>
-                <a:ea typeface="Noto Sans CJK KR"/>
+                <a:latin typeface="Malgun Gothic"/>
+                <a:ea typeface="Malgun Gothic"/>
               </a:rPr>
               <a:t>05 / 10</a:t>
             </a:r>
@@ -12115,8 +12115,8 @@
                 <a:solidFill>
                   <a:srgbClr val="C6532D"/>
                 </a:solidFill>
-                <a:latin typeface="Noto Sans CJK KR"/>
-                <a:ea typeface="Noto Sans CJK KR"/>
+                <a:latin typeface="Malgun Gothic"/>
+                <a:ea typeface="Malgun Gothic"/>
               </a:rPr>
               <a:t>① 촉발 사건 (12%)</a:t>
             </a:r>
@@ -12155,8 +12155,8 @@
                 <a:solidFill>
                   <a:srgbClr val="1A212E"/>
                 </a:solidFill>
-                <a:latin typeface="Noto Sans CJK KR"/>
-                <a:ea typeface="Noto Sans CJK KR"/>
+                <a:latin typeface="Malgun Gothic"/>
+                <a:ea typeface="Malgun Gothic"/>
               </a:rPr>
               <a:t>일상의 균열</a:t>
             </a:r>
@@ -12195,8 +12195,8 @@
                 <a:solidFill>
                   <a:srgbClr val="555E6C"/>
                 </a:solidFill>
-                <a:latin typeface="Noto Sans CJK KR"/>
-                <a:ea typeface="Noto Sans CJK KR"/>
+                <a:latin typeface="Malgun Gothic"/>
+                <a:ea typeface="Malgun Gothic"/>
               </a:rPr>
               <a:t>주인공의 평온한 일상을 깨뜨리고 이야기 속으로 호출하는 사건</a:t>
             </a:r>
@@ -12327,8 +12327,8 @@
                 <a:solidFill>
                   <a:srgbClr val="316B69"/>
                 </a:solidFill>
-                <a:latin typeface="Noto Sans CJK KR"/>
-                <a:ea typeface="Noto Sans CJK KR"/>
+                <a:latin typeface="Malgun Gothic"/>
+                <a:ea typeface="Malgun Gothic"/>
               </a:rPr>
               <a:t>② 1차 관문 (25%)</a:t>
             </a:r>
@@ -12367,8 +12367,8 @@
                 <a:solidFill>
                   <a:srgbClr val="1A212E"/>
                 </a:solidFill>
-                <a:latin typeface="Noto Sans CJK KR"/>
-                <a:ea typeface="Noto Sans CJK KR"/>
+                <a:latin typeface="Malgun Gothic"/>
+                <a:ea typeface="Malgun Gothic"/>
               </a:rPr>
               <a:t>돌아갈 다리 불태우기</a:t>
             </a:r>
@@ -12407,8 +12407,8 @@
                 <a:solidFill>
                   <a:srgbClr val="555E6C"/>
                 </a:solidFill>
-                <a:latin typeface="Noto Sans CJK KR"/>
-                <a:ea typeface="Noto Sans CJK KR"/>
+                <a:latin typeface="Malgun Gothic"/>
+                <a:ea typeface="Malgun Gothic"/>
               </a:rPr>
               <a:t>주인공이 기존 세계를 떠나 본격적인 모험·대립의 세계로 진입하는 결단</a:t>
             </a:r>
@@ -12539,8 +12539,8 @@
                 <a:solidFill>
                   <a:srgbClr val="D19830"/>
                 </a:solidFill>
-                <a:latin typeface="Noto Sans CJK KR"/>
-                <a:ea typeface="Noto Sans CJK KR"/>
+                <a:latin typeface="Malgun Gothic"/>
+                <a:ea typeface="Malgun Gothic"/>
               </a:rPr>
               <a:t>③ 중간점 반전 (50%)</a:t>
             </a:r>
@@ -12579,8 +12579,8 @@
                 <a:solidFill>
                   <a:srgbClr val="1A212E"/>
                 </a:solidFill>
-                <a:latin typeface="Noto Sans CJK KR"/>
-                <a:ea typeface="Noto Sans CJK KR"/>
+                <a:latin typeface="Malgun Gothic"/>
+                <a:ea typeface="Malgun Gothic"/>
               </a:rPr>
               <a:t>시야의 전환</a:t>
             </a:r>
@@ -12619,8 +12619,8 @@
                 <a:solidFill>
                   <a:srgbClr val="555E6C"/>
                 </a:solidFill>
-                <a:latin typeface="Noto Sans CJK KR"/>
-                <a:ea typeface="Noto Sans CJK KR"/>
+                <a:latin typeface="Malgun Gothic"/>
+                <a:ea typeface="Malgun Gothic"/>
               </a:rPr>
               <a:t>숨겨진 진실이 드러나며 수동적 대응에서 능동적 공세로 전환되는 지점</a:t>
             </a:r>
@@ -12751,8 +12751,8 @@
                 <a:solidFill>
                   <a:srgbClr val="8E3542"/>
                 </a:solidFill>
-                <a:latin typeface="Noto Sans CJK KR"/>
-                <a:ea typeface="Noto Sans CJK KR"/>
+                <a:latin typeface="Malgun Gothic"/>
+                <a:ea typeface="Malgun Gothic"/>
               </a:rPr>
               <a:t>④ 암흑의 순간 (75%)</a:t>
             </a:r>
@@ -12791,8 +12791,8 @@
                 <a:solidFill>
                   <a:srgbClr val="1A212E"/>
                 </a:solidFill>
-                <a:latin typeface="Noto Sans CJK KR"/>
-                <a:ea typeface="Noto Sans CJK KR"/>
+                <a:latin typeface="Malgun Gothic"/>
+                <a:ea typeface="Malgun Gothic"/>
               </a:rPr>
               <a:t>최악의 패배</a:t>
             </a:r>
@@ -12831,8 +12831,8 @@
                 <a:solidFill>
                   <a:srgbClr val="555E6C"/>
                 </a:solidFill>
-                <a:latin typeface="Noto Sans CJK KR"/>
-                <a:ea typeface="Noto Sans CJK KR"/>
+                <a:latin typeface="Malgun Gothic"/>
+                <a:ea typeface="Malgun Gothic"/>
               </a:rPr>
               <a:t>모든 계획이 무너지고 가장 소중한 것을 잃을 위기에 처하는 절망의 바닥</a:t>
             </a:r>
@@ -12963,8 +12963,8 @@
                 <a:solidFill>
                   <a:srgbClr val="1A212E"/>
                 </a:solidFill>
-                <a:latin typeface="Noto Sans CJK KR"/>
-                <a:ea typeface="Noto Sans CJK KR"/>
+                <a:latin typeface="Malgun Gothic"/>
+                <a:ea typeface="Malgun Gothic"/>
               </a:rPr>
               <a:t>⑤ 클라이맥스 (90%)</a:t>
             </a:r>
@@ -13003,8 +13003,8 @@
                 <a:solidFill>
                   <a:srgbClr val="1A212E"/>
                 </a:solidFill>
-                <a:latin typeface="Noto Sans CJK KR"/>
-                <a:ea typeface="Noto Sans CJK KR"/>
+                <a:latin typeface="Malgun Gothic"/>
+                <a:ea typeface="Malgun Gothic"/>
               </a:rPr>
               <a:t>최후의 대결과 각성</a:t>
             </a:r>
@@ -13043,8 +13043,8 @@
                 <a:solidFill>
                   <a:srgbClr val="555E6C"/>
                 </a:solidFill>
-                <a:latin typeface="Noto Sans CJK KR"/>
-                <a:ea typeface="Noto Sans CJK KR"/>
+                <a:latin typeface="Malgun Gothic"/>
+                <a:ea typeface="Malgun Gothic"/>
               </a:rPr>
               <a:t>내면의 거짓 믿음을 극복한 주인공이 자신의 힘으로 핵심 갈등을 매듭짓는 순간</a:t>
             </a:r>
@@ -13109,8 +13109,8 @@
                 <a:solidFill>
                   <a:srgbClr val="C6532D"/>
                 </a:solidFill>
-                <a:latin typeface="Noto Sans CJK KR"/>
-                <a:ea typeface="Noto Sans CJK KR"/>
+                <a:latin typeface="Malgun Gothic"/>
+                <a:ea typeface="Malgun Gothic"/>
               </a:rPr>
               <a:t>05  |  SCENE &amp; SEQUEL DYNAMICS</a:t>
             </a:r>
@@ -13149,8 +13149,8 @@
                 <a:solidFill>
                   <a:srgbClr val="1A212E"/>
                 </a:solidFill>
-                <a:latin typeface="Noto Sans CJK KR"/>
-                <a:ea typeface="Noto Sans CJK KR"/>
+                <a:latin typeface="Malgun Gothic"/>
+                <a:ea typeface="Malgun Gothic"/>
               </a:rPr>
               <a:t>모든 장면(Scene)은 목표·충돌·전환으로 전진하고 반추(Sequel)로 호흡을 조절한다</a:t>
             </a:r>
@@ -13189,8 +13189,8 @@
                 <a:solidFill>
                   <a:srgbClr val="555E6C"/>
                 </a:solidFill>
-                <a:latin typeface="Noto Sans CJK KR"/>
-                <a:ea typeface="Noto Sans CJK KR"/>
+                <a:latin typeface="Malgun Gothic"/>
+                <a:ea typeface="Malgun Gothic"/>
               </a:rPr>
               <a:t>외면적 사건의 속도감(Scene)과 내면적 감정 소화(Sequel)를 교차 배치해 독자의 피로도를 막고 몰입을 깊게 만든다</a:t>
             </a:r>
@@ -13361,8 +13361,8 @@
                 <a:solidFill>
                   <a:srgbClr val="878E99"/>
                 </a:solidFill>
-                <a:latin typeface="Noto Sans CJK KR"/>
-                <a:ea typeface="Noto Sans CJK KR"/>
+                <a:latin typeface="Malgun Gothic"/>
+                <a:ea typeface="Malgun Gothic"/>
               </a:rPr>
               <a:t>THE CRAFT OF FICTION WRITING  |  소설 창작 실전 가이드</a:t>
             </a:r>
@@ -13401,8 +13401,8 @@
                 <a:solidFill>
                   <a:srgbClr val="C6532D"/>
                 </a:solidFill>
-                <a:latin typeface="Noto Sans CJK KR"/>
-                <a:ea typeface="Noto Sans CJK KR"/>
+                <a:latin typeface="Malgun Gothic"/>
+                <a:ea typeface="Malgun Gothic"/>
               </a:rPr>
               <a:t>06 / 10</a:t>
             </a:r>
@@ -13489,8 +13489,8 @@
                 <a:solidFill>
                   <a:srgbClr val="1A212E"/>
                 </a:solidFill>
-                <a:latin typeface="Noto Sans CJK KR"/>
-                <a:ea typeface="Noto Sans CJK KR"/>
+                <a:latin typeface="Malgun Gothic"/>
+                <a:ea typeface="Malgun Gothic"/>
               </a:rPr>
               <a:t>서사 전진의 양대 엔진: 장면(Scene)과 반추(Sequel)의 교차 리듬</a:t>
             </a:r>
@@ -13577,8 +13577,8 @@
                 <a:solidFill>
                   <a:srgbClr val="C6532D"/>
                 </a:solidFill>
-                <a:latin typeface="Noto Sans CJK KR"/>
-                <a:ea typeface="Noto Sans CJK KR"/>
+                <a:latin typeface="Malgun Gothic"/>
+                <a:ea typeface="Malgun Gothic"/>
               </a:rPr>
               <a:t>ENGINE A  |  외면적 행동 장면 (Action Scene) — 사건을 발생시키고 긴장을 고조</a:t>
             </a:r>
@@ -13665,8 +13665,8 @@
                 <a:solidFill>
                   <a:srgbClr val="1A212E"/>
                 </a:solidFill>
-                <a:latin typeface="Noto Sans CJK KR"/>
-                <a:ea typeface="Noto Sans CJK KR"/>
+                <a:latin typeface="Malgun Gothic"/>
+                <a:ea typeface="Malgun Gothic"/>
               </a:rPr>
               <a:t>1. 목표 (Goal)</a:t>
             </a:r>
@@ -13705,8 +13705,8 @@
                 <a:solidFill>
                   <a:srgbClr val="555E6C"/>
                 </a:solidFill>
-                <a:latin typeface="Noto Sans CJK KR"/>
-                <a:ea typeface="Noto Sans CJK KR"/>
+                <a:latin typeface="Malgun Gothic"/>
+                <a:ea typeface="Malgun Gothic"/>
               </a:rPr>
               <a:t>장면 시작 시 주인공이 원하는 구체적이고 가시적인 목적</a:t>
             </a:r>
@@ -13793,8 +13793,8 @@
                 <a:solidFill>
                   <a:srgbClr val="1A212E"/>
                 </a:solidFill>
-                <a:latin typeface="Noto Sans CJK KR"/>
-                <a:ea typeface="Noto Sans CJK KR"/>
+                <a:latin typeface="Malgun Gothic"/>
+                <a:ea typeface="Malgun Gothic"/>
               </a:rPr>
               <a:t>2. 충돌 (Conflict)</a:t>
             </a:r>
@@ -13833,8 +13833,8 @@
                 <a:solidFill>
                   <a:srgbClr val="555E6C"/>
                 </a:solidFill>
-                <a:latin typeface="Noto Sans CJK KR"/>
-                <a:ea typeface="Noto Sans CJK KR"/>
+                <a:latin typeface="Malgun Gothic"/>
+                <a:ea typeface="Malgun Gothic"/>
               </a:rPr>
               <a:t>목표 달성을 가로막는 상대방이나 환경과의 치열한 공방</a:t>
             </a:r>
@@ -13921,8 +13921,8 @@
                 <a:solidFill>
                   <a:srgbClr val="1A212E"/>
                 </a:solidFill>
-                <a:latin typeface="Noto Sans CJK KR"/>
-                <a:ea typeface="Noto Sans CJK KR"/>
+                <a:latin typeface="Malgun Gothic"/>
+                <a:ea typeface="Malgun Gothic"/>
               </a:rPr>
               <a:t>3. 전환/재난 (Disaster)</a:t>
             </a:r>
@@ -13961,8 +13961,8 @@
                 <a:solidFill>
                   <a:srgbClr val="555E6C"/>
                 </a:solidFill>
-                <a:latin typeface="Noto Sans CJK KR"/>
-                <a:ea typeface="Noto Sans CJK KR"/>
+                <a:latin typeface="Malgun Gothic"/>
+                <a:ea typeface="Malgun Gothic"/>
               </a:rPr>
               <a:t>‘예스, 하지만(Yes, but)’ 또는 ‘노, 심지어(No, and furthermore)’로 끝나는 위기</a:t>
             </a:r>
@@ -14049,8 +14049,8 @@
                 <a:solidFill>
                   <a:srgbClr val="316B69"/>
                 </a:solidFill>
-                <a:latin typeface="Noto Sans CJK KR"/>
-                <a:ea typeface="Noto Sans CJK KR"/>
+                <a:latin typeface="Malgun Gothic"/>
+                <a:ea typeface="Malgun Gothic"/>
               </a:rPr>
               <a:t>ENGINE B  |  내면적 반추 장면 (Reaction Sequel) — 감정을 납득시키고 다음 목표를 수립</a:t>
             </a:r>
@@ -14137,8 +14137,8 @@
                 <a:solidFill>
                   <a:srgbClr val="1A212E"/>
                 </a:solidFill>
-                <a:latin typeface="Noto Sans CJK KR"/>
-                <a:ea typeface="Noto Sans CJK KR"/>
+                <a:latin typeface="Malgun Gothic"/>
+                <a:ea typeface="Malgun Gothic"/>
               </a:rPr>
               <a:t>1. 감정 반응 (Reaction)</a:t>
             </a:r>
@@ -14177,8 +14177,8 @@
                 <a:solidFill>
                   <a:srgbClr val="555E6C"/>
                 </a:solidFill>
-                <a:latin typeface="Noto Sans CJK KR"/>
-                <a:ea typeface="Noto Sans CJK KR"/>
+                <a:latin typeface="Malgun Gothic"/>
+                <a:ea typeface="Malgun Gothic"/>
               </a:rPr>
               <a:t>직전 장면의 재난/충격에 대한 인물의 정서적·신체적 여파</a:t>
             </a:r>
@@ -14265,8 +14265,8 @@
                 <a:solidFill>
                   <a:srgbClr val="1A212E"/>
                 </a:solidFill>
-                <a:latin typeface="Noto Sans CJK KR"/>
-                <a:ea typeface="Noto Sans CJK KR"/>
+                <a:latin typeface="Malgun Gothic"/>
+                <a:ea typeface="Malgun Gothic"/>
               </a:rPr>
               <a:t>2. 딜레마 (Dilemma)</a:t>
             </a:r>
@@ -14305,8 +14305,8 @@
                 <a:solidFill>
                   <a:srgbClr val="555E6C"/>
                 </a:solidFill>
-                <a:latin typeface="Noto Sans CJK KR"/>
-                <a:ea typeface="Noto Sans CJK KR"/>
+                <a:latin typeface="Malgun Gothic"/>
+                <a:ea typeface="Malgun Gothic"/>
               </a:rPr>
               <a:t>나쁜 선택지들 사이에서 최악을 피하기 위해 고뇌하는 분석 과정</a:t>
             </a:r>
@@ -14393,8 +14393,8 @@
                 <a:solidFill>
                   <a:srgbClr val="1A212E"/>
                 </a:solidFill>
-                <a:latin typeface="Noto Sans CJK KR"/>
-                <a:ea typeface="Noto Sans CJK KR"/>
+                <a:latin typeface="Malgun Gothic"/>
+                <a:ea typeface="Malgun Gothic"/>
               </a:rPr>
               <a:t>3. 새로운 결단 (Decision)</a:t>
             </a:r>
@@ -14433,8 +14433,8 @@
                 <a:solidFill>
                   <a:srgbClr val="555E6C"/>
                 </a:solidFill>
-                <a:latin typeface="Noto Sans CJK KR"/>
-                <a:ea typeface="Noto Sans CJK KR"/>
+                <a:latin typeface="Malgun Gothic"/>
+                <a:ea typeface="Malgun Gothic"/>
               </a:rPr>
               <a:t>위험을 감수하고 다음 행동 장면(Scene)의 목표를 세우는 결심</a:t>
             </a:r>
@@ -14521,8 +14521,8 @@
                 <a:solidFill>
                   <a:srgbClr val="1A212E"/>
                 </a:solidFill>
-                <a:latin typeface="Noto Sans CJK KR"/>
-                <a:ea typeface="Noto Sans CJK KR"/>
+                <a:latin typeface="Malgun Gothic"/>
+                <a:ea typeface="Malgun Gothic"/>
               </a:rPr>
               <a:t>입체적 서사를 만드는 갈등의 3중 레이어</a:t>
             </a:r>
@@ -14653,8 +14653,8 @@
                 <a:solidFill>
                   <a:srgbClr val="C6532D"/>
                 </a:solidFill>
-                <a:latin typeface="Noto Sans CJK KR"/>
-                <a:ea typeface="Noto Sans CJK KR"/>
+                <a:latin typeface="Malgun Gothic"/>
+                <a:ea typeface="Malgun Gothic"/>
               </a:rPr>
               <a:t>내적 갈등 (Inner)</a:t>
             </a:r>
@@ -14693,8 +14693,8 @@
                 <a:solidFill>
                   <a:srgbClr val="555E6C"/>
                 </a:solidFill>
-                <a:latin typeface="Noto Sans CJK KR"/>
-                <a:ea typeface="Noto Sans CJK KR"/>
+                <a:latin typeface="Malgun Gothic"/>
+                <a:ea typeface="Malgun Gothic"/>
               </a:rPr>
               <a:t>양심 vs 욕망, 두려움 vs 의무 등 인물 내면의 심리적 분열</a:t>
             </a:r>
@@ -14825,8 +14825,8 @@
                 <a:solidFill>
                   <a:srgbClr val="316B69"/>
                 </a:solidFill>
-                <a:latin typeface="Noto Sans CJK KR"/>
-                <a:ea typeface="Noto Sans CJK KR"/>
+                <a:latin typeface="Malgun Gothic"/>
+                <a:ea typeface="Malgun Gothic"/>
               </a:rPr>
               <a:t>대인 갈등 (Personal)</a:t>
             </a:r>
@@ -14865,8 +14865,8 @@
                 <a:solidFill>
                   <a:srgbClr val="555E6C"/>
                 </a:solidFill>
-                <a:latin typeface="Noto Sans CJK KR"/>
-                <a:ea typeface="Noto Sans CJK KR"/>
+                <a:latin typeface="Malgun Gothic"/>
+                <a:ea typeface="Malgun Gothic"/>
               </a:rPr>
               <a:t>연인·가족·동료·숙적과의 이해관계 충돌과 배신</a:t>
             </a:r>
@@ -14997,8 +14997,8 @@
                 <a:solidFill>
                   <a:srgbClr val="D19830"/>
                 </a:solidFill>
-                <a:latin typeface="Noto Sans CJK KR"/>
-                <a:ea typeface="Noto Sans CJK KR"/>
+                <a:latin typeface="Malgun Gothic"/>
+                <a:ea typeface="Malgun Gothic"/>
               </a:rPr>
               <a:t>환경/사회 갈등 (Extra)</a:t>
             </a:r>
@@ -15037,8 +15037,8 @@
                 <a:solidFill>
                   <a:srgbClr val="555E6C"/>
                 </a:solidFill>
-                <a:latin typeface="Noto Sans CJK KR"/>
-                <a:ea typeface="Noto Sans CJK KR"/>
+                <a:latin typeface="Malgun Gothic"/>
+                <a:ea typeface="Malgun Gothic"/>
               </a:rPr>
               <a:t>재난, 부조리한 제도, 시간 제한 등 거대한 외부 압력</a:t>
             </a:r>
@@ -15123,8 +15123,8 @@
                 <a:solidFill>
                   <a:srgbClr val="D19830"/>
                 </a:solidFill>
-                <a:latin typeface="Noto Sans CJK KR"/>
-                <a:ea typeface="Noto Sans CJK KR"/>
+                <a:latin typeface="Malgun Gothic"/>
+                <a:ea typeface="Malgun Gothic"/>
               </a:rPr>
               <a:t>장면 생존 테스트 (Scene Value Test)</a:t>
             </a:r>
@@ -15159,34 +15159,34 @@
               </a:lnSpc>
             </a:pPr>
             <a:r>
-              <a:rPr sz="1000" b="0" i="0">
+              <a:rPr sz="950" b="0" i="0">
                 <a:solidFill>
                   <a:srgbClr val="F2EFE9"/>
                 </a:solidFill>
-                <a:latin typeface="Noto Sans CJK KR"/>
-                <a:ea typeface="Noto Sans CJK KR"/>
+                <a:latin typeface="Malgun Gothic"/>
+                <a:ea typeface="Malgun Gothic"/>
               </a:rPr>
               <a:t>• 장면의 시작과 끝 사이에 인물의 상황·감정의 부호(+/-)가 바뀌었는가?</a:t>
             </a:r>
             <a:br/>
             <a:r>
-              <a:rPr sz="1000" b="0" i="0">
+              <a:rPr sz="950" b="0" i="0">
                 <a:solidFill>
                   <a:srgbClr val="F2EFE9"/>
                 </a:solidFill>
-                <a:latin typeface="Noto Sans CJK KR"/>
-                <a:ea typeface="Noto Sans CJK KR"/>
+                <a:latin typeface="Malgun Gothic"/>
+                <a:ea typeface="Malgun Gothic"/>
               </a:rPr>
               <a:t>• 플롯을 전진시키거나 인물의 핵심 본성을 드러내는가?</a:t>
             </a:r>
             <a:br/>
             <a:r>
-              <a:rPr sz="1000" b="0" i="0">
+              <a:rPr sz="950" b="0" i="0">
                 <a:solidFill>
                   <a:srgbClr val="F2EFE9"/>
                 </a:solidFill>
-                <a:latin typeface="Noto Sans CJK KR"/>
-                <a:ea typeface="Noto Sans CJK KR"/>
+                <a:latin typeface="Malgun Gothic"/>
+                <a:ea typeface="Malgun Gothic"/>
               </a:rPr>
               <a:t>→ 둘 다 아니라면 아무리 문장이 아름다워도 과감히 삭제하라.</a:t>
             </a:r>
@@ -15251,8 +15251,8 @@
                 <a:solidFill>
                   <a:srgbClr val="C6532D"/>
                 </a:solidFill>
-                <a:latin typeface="Noto Sans CJK KR"/>
-                <a:ea typeface="Noto Sans CJK KR"/>
+                <a:latin typeface="Malgun Gothic"/>
+                <a:ea typeface="Malgun Gothic"/>
               </a:rPr>
               <a:t>06  |  POINT OF VIEW (POV) &amp; NARRATIVE DISTANCE</a:t>
             </a:r>
@@ -15291,8 +15291,8 @@
                 <a:solidFill>
                   <a:srgbClr val="1A212E"/>
                 </a:solidFill>
-                <a:latin typeface="Noto Sans CJK KR"/>
-                <a:ea typeface="Noto Sans CJK KR"/>
+                <a:latin typeface="Malgun Gothic"/>
+                <a:ea typeface="Malgun Gothic"/>
               </a:rPr>
               <a:t>누구의 눈으로 어디까지 보여줄 것인가: 시점(POV)이 소설의 몰입도를 결정한다</a:t>
             </a:r>
@@ -15331,8 +15331,8 @@
                 <a:solidFill>
                   <a:srgbClr val="555E6C"/>
                 </a:solidFill>
-                <a:latin typeface="Noto Sans CJK KR"/>
-                <a:ea typeface="Noto Sans CJK KR"/>
+                <a:latin typeface="Malgun Gothic"/>
+                <a:ea typeface="Malgun Gothic"/>
               </a:rPr>
               <a:t>각 시점의 정보 통제 범위와 심리적 거리를 이해하고, 한 장면 안에서는 단일 시점을 엄격히 유지하라</a:t>
             </a:r>
@@ -15503,8 +15503,8 @@
                 <a:solidFill>
                   <a:srgbClr val="878E99"/>
                 </a:solidFill>
-                <a:latin typeface="Noto Sans CJK KR"/>
-                <a:ea typeface="Noto Sans CJK KR"/>
+                <a:latin typeface="Malgun Gothic"/>
+                <a:ea typeface="Malgun Gothic"/>
               </a:rPr>
               <a:t>THE CRAFT OF FICTION WRITING  |  소설 창작 실전 가이드</a:t>
             </a:r>
@@ -15543,8 +15543,8 @@
                 <a:solidFill>
                   <a:srgbClr val="C6532D"/>
                 </a:solidFill>
-                <a:latin typeface="Noto Sans CJK KR"/>
-                <a:ea typeface="Noto Sans CJK KR"/>
+                <a:latin typeface="Malgun Gothic"/>
+                <a:ea typeface="Malgun Gothic"/>
               </a:rPr>
               <a:t>07 / 10</a:t>
             </a:r>
@@ -15629,8 +15629,8 @@
                 <a:solidFill>
                   <a:srgbClr val="F2EFE9"/>
                 </a:solidFill>
-                <a:latin typeface="Noto Sans CJK KR"/>
-                <a:ea typeface="Noto Sans CJK KR"/>
+                <a:latin typeface="Malgun Gothic"/>
+                <a:ea typeface="Malgun Gothic"/>
               </a:rPr>
               <a:t>시점 유형</a:t>
             </a:r>
@@ -15715,8 +15715,8 @@
                 <a:solidFill>
                   <a:srgbClr val="F2EFE9"/>
                 </a:solidFill>
-                <a:latin typeface="Noto Sans CJK KR"/>
-                <a:ea typeface="Noto Sans CJK KR"/>
+                <a:latin typeface="Malgun Gothic"/>
+                <a:ea typeface="Malgun Gothic"/>
               </a:rPr>
               <a:t>정보 통제와 서술 범위</a:t>
             </a:r>
@@ -15801,8 +15801,8 @@
                 <a:solidFill>
                   <a:srgbClr val="F2EFE9"/>
                 </a:solidFill>
-                <a:latin typeface="Noto Sans CJK KR"/>
-                <a:ea typeface="Noto Sans CJK KR"/>
+                <a:latin typeface="Malgun Gothic"/>
+                <a:ea typeface="Malgun Gothic"/>
               </a:rPr>
               <a:t>서사적 강점 (Pros)</a:t>
             </a:r>
@@ -15887,8 +15887,8 @@
                 <a:solidFill>
                   <a:srgbClr val="F2EFE9"/>
                 </a:solidFill>
-                <a:latin typeface="Noto Sans CJK KR"/>
-                <a:ea typeface="Noto Sans CJK KR"/>
+                <a:latin typeface="Malgun Gothic"/>
+                <a:ea typeface="Malgun Gothic"/>
               </a:rPr>
               <a:t>주의할 함정 (Cons)</a:t>
             </a:r>
@@ -15973,8 +15973,8 @@
                 <a:solidFill>
                   <a:srgbClr val="F2EFE9"/>
                 </a:solidFill>
-                <a:latin typeface="Noto Sans CJK KR"/>
-                <a:ea typeface="Noto Sans CJK KR"/>
+                <a:latin typeface="Malgun Gothic"/>
+                <a:ea typeface="Malgun Gothic"/>
               </a:rPr>
               <a:t>적합한 장르 및 대표 효과</a:t>
             </a:r>
@@ -16059,8 +16059,8 @@
                 <a:solidFill>
                   <a:srgbClr val="1A212E"/>
                 </a:solidFill>
-                <a:latin typeface="Noto Sans CJK KR"/>
-                <a:ea typeface="Noto Sans CJK KR"/>
+                <a:latin typeface="Malgun Gothic"/>
+                <a:ea typeface="Malgun Gothic"/>
               </a:rPr>
               <a:t>1인칭 주인공 시점</a:t>
             </a:r>
@@ -16070,8 +16070,8 @@
                 <a:solidFill>
                   <a:srgbClr val="1A212E"/>
                 </a:solidFill>
-                <a:latin typeface="Noto Sans CJK KR"/>
-                <a:ea typeface="Noto Sans CJK KR"/>
+                <a:latin typeface="Malgun Gothic"/>
+                <a:ea typeface="Malgun Gothic"/>
               </a:rPr>
               <a:t>(‘나’의 서술)</a:t>
             </a:r>
@@ -16156,8 +16156,8 @@
                 <a:solidFill>
                   <a:srgbClr val="555E6C"/>
                 </a:solidFill>
-                <a:latin typeface="Noto Sans CJK KR"/>
-                <a:ea typeface="Noto Sans CJK KR"/>
+                <a:latin typeface="Malgun Gothic"/>
+                <a:ea typeface="Malgun Gothic"/>
               </a:rPr>
               <a:t>오직 ‘나’가 보고 듣고 추측한 정보만 서술 가능</a:t>
             </a:r>
@@ -16242,8 +16242,8 @@
                 <a:solidFill>
                   <a:srgbClr val="555E6C"/>
                 </a:solidFill>
-                <a:latin typeface="Noto Sans CJK KR"/>
-                <a:ea typeface="Noto Sans CJK KR"/>
+                <a:latin typeface="Malgun Gothic"/>
+                <a:ea typeface="Malgun Gothic"/>
               </a:rPr>
               <a:t>• 독자와 주인공의 즉각적 밀착</a:t>
             </a:r>
@@ -16253,8 +16253,8 @@
                 <a:solidFill>
                   <a:srgbClr val="555E6C"/>
                 </a:solidFill>
-                <a:latin typeface="Noto Sans CJK KR"/>
-                <a:ea typeface="Noto Sans CJK KR"/>
+                <a:latin typeface="Malgun Gothic"/>
+                <a:ea typeface="Malgun Gothic"/>
               </a:rPr>
               <a:t>• 화자의 독특한 목소리·유머 극대화</a:t>
             </a:r>
@@ -16264,8 +16264,8 @@
                 <a:solidFill>
                   <a:srgbClr val="555E6C"/>
                 </a:solidFill>
-                <a:latin typeface="Noto Sans CJK KR"/>
-                <a:ea typeface="Noto Sans CJK KR"/>
+                <a:latin typeface="Malgun Gothic"/>
+                <a:ea typeface="Malgun Gothic"/>
               </a:rPr>
               <a:t>• ‘신뢰할 수 없는 화자’ 트릭에 유리</a:t>
             </a:r>
@@ -16350,8 +16350,8 @@
                 <a:solidFill>
                   <a:srgbClr val="555E6C"/>
                 </a:solidFill>
-                <a:latin typeface="Noto Sans CJK KR"/>
-                <a:ea typeface="Noto Sans CJK KR"/>
+                <a:latin typeface="Malgun Gothic"/>
+                <a:ea typeface="Malgun Gothic"/>
               </a:rPr>
               <a:t>• 주인공이 없는 현장의 사건 서술 불가</a:t>
             </a:r>
@@ -16361,8 +16361,8 @@
                 <a:solidFill>
                   <a:srgbClr val="555E6C"/>
                 </a:solidFill>
-                <a:latin typeface="Noto Sans CJK KR"/>
-                <a:ea typeface="Noto Sans CJK KR"/>
+                <a:latin typeface="Malgun Gothic"/>
+                <a:ea typeface="Malgun Gothic"/>
               </a:rPr>
               <a:t>• 지나친 자기연민이나 독백 과잉 위험</a:t>
             </a:r>
@@ -16447,8 +16447,8 @@
                 <a:solidFill>
                   <a:srgbClr val="555E6C"/>
                 </a:solidFill>
-                <a:latin typeface="Noto Sans CJK KR"/>
-                <a:ea typeface="Noto Sans CJK KR"/>
+                <a:latin typeface="Malgun Gothic"/>
+                <a:ea typeface="Malgun Gothic"/>
               </a:rPr>
               <a:t>청춘 성장소설, 느와르,</a:t>
             </a:r>
@@ -16458,8 +16458,8 @@
                 <a:solidFill>
                   <a:srgbClr val="555E6C"/>
                 </a:solidFill>
-                <a:latin typeface="Noto Sans CJK KR"/>
-                <a:ea typeface="Noto Sans CJK KR"/>
+                <a:latin typeface="Malgun Gothic"/>
+                <a:ea typeface="Malgun Gothic"/>
               </a:rPr>
               <a:t>심리 미스터리, 고백록</a:t>
             </a:r>
@@ -16544,8 +16544,8 @@
                 <a:solidFill>
                   <a:srgbClr val="C6532D"/>
                 </a:solidFill>
-                <a:latin typeface="Noto Sans CJK KR"/>
-                <a:ea typeface="Noto Sans CJK KR"/>
+                <a:latin typeface="Malgun Gothic"/>
+                <a:ea typeface="Malgun Gothic"/>
               </a:rPr>
               <a:t>3인칭 제한 시점</a:t>
             </a:r>
@@ -16555,8 +16555,8 @@
                 <a:solidFill>
                   <a:srgbClr val="C6532D"/>
                 </a:solidFill>
-                <a:latin typeface="Noto Sans CJK KR"/>
-                <a:ea typeface="Noto Sans CJK KR"/>
+                <a:latin typeface="Malgun Gothic"/>
+                <a:ea typeface="Malgun Gothic"/>
               </a:rPr>
               <a:t>(현대 소설의 표준)</a:t>
             </a:r>
@@ -16641,8 +16641,8 @@
                 <a:solidFill>
                   <a:srgbClr val="555E6C"/>
                 </a:solidFill>
-                <a:latin typeface="Noto Sans CJK KR"/>
-                <a:ea typeface="Noto Sans CJK KR"/>
+                <a:latin typeface="Malgun Gothic"/>
+                <a:ea typeface="Malgun Gothic"/>
               </a:rPr>
               <a:t>초점화된 특정 인물(‘그/그녀’)의 내면과 시선에만 밀착</a:t>
             </a:r>
@@ -16727,8 +16727,8 @@
                 <a:solidFill>
                   <a:srgbClr val="555E6C"/>
                 </a:solidFill>
-                <a:latin typeface="Noto Sans CJK KR"/>
-                <a:ea typeface="Noto Sans CJK KR"/>
+                <a:latin typeface="Malgun Gothic"/>
+                <a:ea typeface="Malgun Gothic"/>
               </a:rPr>
               <a:t>• 1인칭의 깊은 정서적 몰입감과 3인칭의 객관적 묘사력을 동시에 확보</a:t>
             </a:r>
@@ -16738,8 +16738,8 @@
                 <a:solidFill>
                   <a:srgbClr val="555E6C"/>
                 </a:solidFill>
-                <a:latin typeface="Noto Sans CJK KR"/>
-                <a:ea typeface="Noto Sans CJK KR"/>
+                <a:latin typeface="Malgun Gothic"/>
+                <a:ea typeface="Malgun Gothic"/>
               </a:rPr>
               <a:t>• 서사적 거리를 유연하게 줌인/줌아웃</a:t>
             </a:r>
@@ -16824,8 +16824,8 @@
                 <a:solidFill>
                   <a:srgbClr val="555E6C"/>
                 </a:solidFill>
-                <a:latin typeface="Noto Sans CJK KR"/>
-                <a:ea typeface="Noto Sans CJK KR"/>
+                <a:latin typeface="Malgun Gothic"/>
+                <a:ea typeface="Malgun Gothic"/>
               </a:rPr>
               <a:t>• 초점 인물이 눈치채지 못한 자신의 표정·모습을 직접 묘사하는 실수 주의</a:t>
             </a:r>
@@ -16910,8 +16910,8 @@
                 <a:solidFill>
                   <a:srgbClr val="555E6C"/>
                 </a:solidFill>
-                <a:latin typeface="Noto Sans CJK KR"/>
-                <a:ea typeface="Noto Sans CJK KR"/>
+                <a:latin typeface="Malgun Gothic"/>
+                <a:ea typeface="Malgun Gothic"/>
               </a:rPr>
               <a:t>현대 문학 전반, 장르소설,</a:t>
             </a:r>
@@ -16921,8 +16921,8 @@
                 <a:solidFill>
                   <a:srgbClr val="555E6C"/>
                 </a:solidFill>
-                <a:latin typeface="Noto Sans CJK KR"/>
-                <a:ea typeface="Noto Sans CJK KR"/>
+                <a:latin typeface="Malgun Gothic"/>
+                <a:ea typeface="Malgun Gothic"/>
               </a:rPr>
               <a:t>장편 드라마의 가장 안정적 선택</a:t>
             </a:r>
@@ -17007,8 +17007,8 @@
                 <a:solidFill>
                   <a:srgbClr val="1A212E"/>
                 </a:solidFill>
-                <a:latin typeface="Noto Sans CJK KR"/>
-                <a:ea typeface="Noto Sans CJK KR"/>
+                <a:latin typeface="Malgun Gothic"/>
+                <a:ea typeface="Malgun Gothic"/>
               </a:rPr>
               <a:t>3인칭 전지적 시점</a:t>
             </a:r>
@@ -17018,8 +17018,8 @@
                 <a:solidFill>
                   <a:srgbClr val="1A212E"/>
                 </a:solidFill>
-                <a:latin typeface="Noto Sans CJK KR"/>
-                <a:ea typeface="Noto Sans CJK KR"/>
+                <a:latin typeface="Malgun Gothic"/>
+                <a:ea typeface="Malgun Gothic"/>
               </a:rPr>
               <a:t>(신적 조망)</a:t>
             </a:r>
@@ -17104,8 +17104,8 @@
                 <a:solidFill>
                   <a:srgbClr val="555E6C"/>
                 </a:solidFill>
-                <a:latin typeface="Noto Sans CJK KR"/>
-                <a:ea typeface="Noto Sans CJK KR"/>
+                <a:latin typeface="Malgun Gothic"/>
+                <a:ea typeface="Malgun Gothic"/>
               </a:rPr>
               <a:t>모든 인물의 내면, 과거·미래, 보이지 않는 사건까지 통찰</a:t>
             </a:r>
@@ -17190,8 +17190,8 @@
                 <a:solidFill>
                   <a:srgbClr val="555E6C"/>
                 </a:solidFill>
-                <a:latin typeface="Noto Sans CJK KR"/>
-                <a:ea typeface="Noto Sans CJK KR"/>
+                <a:latin typeface="Malgun Gothic"/>
+                <a:ea typeface="Malgun Gothic"/>
               </a:rPr>
               <a:t>• 방대한 세계관과 시대상을 조망</a:t>
             </a:r>
@@ -17201,8 +17201,8 @@
                 <a:solidFill>
                   <a:srgbClr val="555E6C"/>
                 </a:solidFill>
-                <a:latin typeface="Noto Sans CJK KR"/>
-                <a:ea typeface="Noto Sans CJK KR"/>
+                <a:latin typeface="Malgun Gothic"/>
+                <a:ea typeface="Malgun Gothic"/>
               </a:rPr>
               <a:t>• 인물 간의 오해와 극적 아이러니를 독자에게 입체적으로 제시</a:t>
             </a:r>
@@ -17287,8 +17287,8 @@
                 <a:solidFill>
                   <a:srgbClr val="555E6C"/>
                 </a:solidFill>
-                <a:latin typeface="Noto Sans CJK KR"/>
-                <a:ea typeface="Noto Sans CJK KR"/>
+                <a:latin typeface="Malgun Gothic"/>
+                <a:ea typeface="Malgun Gothic"/>
               </a:rPr>
               <a:t>• 한 장면에서 여러 인물의 속마음을 오가면(Head-hopping) 긴장감 급감</a:t>
             </a:r>
@@ -17373,8 +17373,8 @@
                 <a:solidFill>
                   <a:srgbClr val="555E6C"/>
                 </a:solidFill>
-                <a:latin typeface="Noto Sans CJK KR"/>
-                <a:ea typeface="Noto Sans CJK KR"/>
+                <a:latin typeface="Malgun Gothic"/>
+                <a:ea typeface="Malgun Gothic"/>
               </a:rPr>
               <a:t>대하 역사소설, 가족 사가(Saga),</a:t>
             </a:r>
@@ -17384,8 +17384,8 @@
                 <a:solidFill>
                   <a:srgbClr val="555E6C"/>
                 </a:solidFill>
-                <a:latin typeface="Noto Sans CJK KR"/>
-                <a:ea typeface="Noto Sans CJK KR"/>
+                <a:latin typeface="Malgun Gothic"/>
+                <a:ea typeface="Malgun Gothic"/>
               </a:rPr>
               <a:t>우화적·철학적 서사</a:t>
             </a:r>
@@ -17470,8 +17470,8 @@
                 <a:solidFill>
                   <a:srgbClr val="1A212E"/>
                 </a:solidFill>
-                <a:latin typeface="Noto Sans CJK KR"/>
-                <a:ea typeface="Noto Sans CJK KR"/>
+                <a:latin typeface="Malgun Gothic"/>
+                <a:ea typeface="Malgun Gothic"/>
               </a:rPr>
               <a:t>다중 교차 시점</a:t>
             </a:r>
@@ -17481,8 +17481,8 @@
                 <a:solidFill>
                   <a:srgbClr val="1A212E"/>
                 </a:solidFill>
-                <a:latin typeface="Noto Sans CJK KR"/>
-                <a:ea typeface="Noto Sans CJK KR"/>
+                <a:latin typeface="Malgun Gothic"/>
+                <a:ea typeface="Malgun Gothic"/>
               </a:rPr>
               <a:t>(챕터별 3인칭/1인칭)</a:t>
             </a:r>
@@ -17567,8 +17567,8 @@
                 <a:solidFill>
                   <a:srgbClr val="555E6C"/>
                 </a:solidFill>
-                <a:latin typeface="Noto Sans CJK KR"/>
-                <a:ea typeface="Noto Sans CJK KR"/>
+                <a:latin typeface="Malgun Gothic"/>
+                <a:ea typeface="Malgun Gothic"/>
               </a:rPr>
               <a:t>챕터나 절(Section) 단위로 시점 인물을 교대하며 서술</a:t>
             </a:r>
@@ -17653,8 +17653,8 @@
                 <a:solidFill>
                   <a:srgbClr val="555E6C"/>
                 </a:solidFill>
-                <a:latin typeface="Noto Sans CJK KR"/>
-                <a:ea typeface="Noto Sans CJK KR"/>
+                <a:latin typeface="Malgun Gothic"/>
+                <a:ea typeface="Malgun Gothic"/>
               </a:rPr>
               <a:t>• 주인공과 적대자 양측의 정당성 부여</a:t>
             </a:r>
@@ -17664,8 +17664,8 @@
                 <a:solidFill>
                   <a:srgbClr val="555E6C"/>
                 </a:solidFill>
-                <a:latin typeface="Noto Sans CJK KR"/>
-                <a:ea typeface="Noto Sans CJK KR"/>
+                <a:latin typeface="Malgun Gothic"/>
+                <a:ea typeface="Malgun Gothic"/>
               </a:rPr>
               <a:t>• 시점 교차 절단신공(Cliffhanger)으로 페이지 터너 효과 극대화</a:t>
             </a:r>
@@ -17750,8 +17750,8 @@
                 <a:solidFill>
                   <a:srgbClr val="555E6C"/>
                 </a:solidFill>
-                <a:latin typeface="Noto Sans CJK KR"/>
-                <a:ea typeface="Noto Sans CJK KR"/>
+                <a:latin typeface="Malgun Gothic"/>
+                <a:ea typeface="Malgun Gothic"/>
               </a:rPr>
               <a:t>• 시점 인물 간 목소리가 비슷하면 독자가 화자를 혼동</a:t>
             </a:r>
@@ -17761,8 +17761,8 @@
                 <a:solidFill>
                   <a:srgbClr val="555E6C"/>
                 </a:solidFill>
-                <a:latin typeface="Noto Sans CJK KR"/>
-                <a:ea typeface="Noto Sans CJK KR"/>
+                <a:latin typeface="Malgun Gothic"/>
+                <a:ea typeface="Malgun Gothic"/>
               </a:rPr>
               <a:t>• 서사 밀도가 낮은 시점 챕터가 지루해짐</a:t>
             </a:r>
@@ -17847,8 +17847,8 @@
                 <a:solidFill>
                   <a:srgbClr val="555E6C"/>
                 </a:solidFill>
-                <a:latin typeface="Noto Sans CJK KR"/>
-                <a:ea typeface="Noto Sans CJK KR"/>
+                <a:latin typeface="Malgun Gothic"/>
+                <a:ea typeface="Malgun Gothic"/>
               </a:rPr>
               <a:t>군상극, 범죄 스릴러,</a:t>
             </a:r>
@@ -17858,8 +17858,8 @@
                 <a:solidFill>
                   <a:srgbClr val="555E6C"/>
                 </a:solidFill>
-                <a:latin typeface="Noto Sans CJK KR"/>
-                <a:ea typeface="Noto Sans CJK KR"/>
+                <a:latin typeface="Malgun Gothic"/>
+                <a:ea typeface="Malgun Gothic"/>
               </a:rPr>
               <a:t>거대 판타지, 로맨스(쌍방 시점)</a:t>
             </a:r>
@@ -17946,8 +17946,8 @@
                 <a:solidFill>
                   <a:srgbClr val="1A212E"/>
                 </a:solidFill>
-                <a:latin typeface="Noto Sans CJK KR"/>
-                <a:ea typeface="Noto Sans CJK KR"/>
+                <a:latin typeface="Malgun Gothic"/>
+                <a:ea typeface="Malgun Gothic"/>
               </a:rPr>
               <a:t>초보 작가의 대표적 실수 ‘시점 널뛰기(Head-Hopping)’ 금지:  한 장면 안에서는 카메라를 한 인물의 어깨 위에만 고정하고, 타인의 속마음은 표정·행동으로만 추론하게 하라.</a:t>
             </a:r>
@@ -18012,8 +18012,8 @@
                 <a:solidFill>
                   <a:srgbClr val="C6532D"/>
                 </a:solidFill>
-                <a:latin typeface="Noto Sans CJK KR"/>
-                <a:ea typeface="Noto Sans CJK KR"/>
+                <a:latin typeface="Malgun Gothic"/>
+                <a:ea typeface="Malgun Gothic"/>
               </a:rPr>
               <a:t>07  |  STYLE &amp; DESCRIPTION CLINIC (SHOW, DON'T TELL)</a:t>
             </a:r>
@@ -18052,8 +18052,8 @@
                 <a:solidFill>
                   <a:srgbClr val="1A212E"/>
                 </a:solidFill>
-                <a:latin typeface="Noto Sans CJK KR"/>
-                <a:ea typeface="Noto Sans CJK KR"/>
+                <a:latin typeface="Malgun Gothic"/>
+                <a:ea typeface="Malgun Gothic"/>
               </a:rPr>
               <a:t>감정을 단어로 요약(Tell)하지 말고, 오감과 행동의 디테일로 독자가 직접 느끼게 하라(Show)</a:t>
             </a:r>
@@ -18092,8 +18092,8 @@
                 <a:solidFill>
                   <a:srgbClr val="555E6C"/>
                 </a:solidFill>
-                <a:latin typeface="Noto Sans CJK KR"/>
-                <a:ea typeface="Noto Sans CJK KR"/>
+                <a:latin typeface="Malgun Gothic"/>
+                <a:ea typeface="Malgun Gothic"/>
               </a:rPr>
               <a:t>추상적인 감정어(슬펐다, 화났다, 불안했다)를 지우고 그 감정이 만들어내는 신체 반응과 사물의 이미지로 치환한다</a:t>
             </a:r>
@@ -18264,8 +18264,8 @@
                 <a:solidFill>
                   <a:srgbClr val="878E99"/>
                 </a:solidFill>
-                <a:latin typeface="Noto Sans CJK KR"/>
-                <a:ea typeface="Noto Sans CJK KR"/>
+                <a:latin typeface="Malgun Gothic"/>
+                <a:ea typeface="Malgun Gothic"/>
               </a:rPr>
               <a:t>THE CRAFT OF FICTION WRITING  |  소설 창작 실전 가이드</a:t>
             </a:r>
@@ -18304,8 +18304,8 @@
                 <a:solidFill>
                   <a:srgbClr val="C6532D"/>
                 </a:solidFill>
-                <a:latin typeface="Noto Sans CJK KR"/>
-                <a:ea typeface="Noto Sans CJK KR"/>
+                <a:latin typeface="Malgun Gothic"/>
+                <a:ea typeface="Malgun Gothic"/>
               </a:rPr>
               <a:t>08 / 10</a:t>
             </a:r>
@@ -18392,8 +18392,8 @@
                 <a:solidFill>
                   <a:srgbClr val="878E99"/>
                 </a:solidFill>
-                <a:latin typeface="Noto Sans CJK KR"/>
-                <a:ea typeface="Noto Sans CJK KR"/>
+                <a:latin typeface="Malgun Gothic"/>
+                <a:ea typeface="Malgun Gothic"/>
               </a:rPr>
               <a:t>CASE 01  |  감정과 심리 묘사  —  [요약 설명: Tell]</a:t>
             </a:r>
@@ -18432,8 +18432,8 @@
                 <a:solidFill>
                   <a:srgbClr val="555E6C"/>
                 </a:solidFill>
-                <a:latin typeface="Noto Sans CJK KR"/>
-                <a:ea typeface="Noto Sans CJK KR"/>
+                <a:latin typeface="Malgun Gothic"/>
+                <a:ea typeface="Malgun Gothic"/>
               </a:rPr>
               <a:t>“지은은 면접 결과를 기다리며 너무나 불안하고 초조해서 견딜 수가 없었다.”</a:t>
             </a:r>
@@ -18472,8 +18472,8 @@
                 <a:solidFill>
                   <a:srgbClr val="C6532D"/>
                 </a:solidFill>
-                <a:latin typeface="Noto Sans CJK KR"/>
-                <a:ea typeface="Noto Sans CJK KR"/>
+                <a:latin typeface="Malgun Gothic"/>
+                <a:ea typeface="Malgun Gothic"/>
               </a:rPr>
               <a:t>→</a:t>
             </a:r>
@@ -18604,8 +18604,8 @@
                 <a:solidFill>
                   <a:srgbClr val="316B69"/>
                 </a:solidFill>
-                <a:latin typeface="Noto Sans CJK KR"/>
-                <a:ea typeface="Noto Sans CJK KR"/>
+                <a:latin typeface="Malgun Gothic"/>
+                <a:ea typeface="Malgun Gothic"/>
               </a:rPr>
               <a:t>[신체 반응과 사물의 디테일로 치환 (Show)]</a:t>
             </a:r>
@@ -18690,8 +18690,8 @@
                 <a:solidFill>
                   <a:srgbClr val="316B69"/>
                 </a:solidFill>
-                <a:latin typeface="Noto Sans CJK KR"/>
-                <a:ea typeface="Noto Sans CJK KR"/>
+                <a:latin typeface="Malgun Gothic"/>
+                <a:ea typeface="Malgun Gothic"/>
               </a:rPr>
               <a:t>✓ 시각·촉각 행동으로 불안감 체감</a:t>
             </a:r>
@@ -18730,8 +18730,8 @@
                 <a:solidFill>
                   <a:srgbClr val="1A212E"/>
                 </a:solidFill>
-                <a:latin typeface="Noto Sans CJK KR"/>
-                <a:ea typeface="Noto Sans CJK KR"/>
+                <a:latin typeface="Malgun Gothic"/>
+                <a:ea typeface="Malgun Gothic"/>
               </a:rPr>
               <a:t>“지은은 식어버린 머그잔 손잡이를 만지작거리다, 기어이 무릎 위에 올려둔 냅킨 모서리를 손톱 끝으로 잘게 찢어놓았다.”</a:t>
             </a:r>
@@ -18818,8 +18818,8 @@
                 <a:solidFill>
                   <a:srgbClr val="878E99"/>
                 </a:solidFill>
-                <a:latin typeface="Noto Sans CJK KR"/>
-                <a:ea typeface="Noto Sans CJK KR"/>
+                <a:latin typeface="Malgun Gothic"/>
+                <a:ea typeface="Malgun Gothic"/>
               </a:rPr>
               <a:t>CASE 02  |  인물의 성격 제시  —  [요약 설명: Tell]</a:t>
             </a:r>
@@ -18858,8 +18858,8 @@
                 <a:solidFill>
                   <a:srgbClr val="555E6C"/>
                 </a:solidFill>
-                <a:latin typeface="Noto Sans CJK KR"/>
-                <a:ea typeface="Noto Sans CJK KR"/>
+                <a:latin typeface="Malgun Gothic"/>
+                <a:ea typeface="Malgun Gothic"/>
               </a:rPr>
               <a:t>“민수는 피도 눈물도 없이 냉정하고 계산적인 성격의 소유자였다.”</a:t>
             </a:r>
@@ -18898,8 +18898,8 @@
                 <a:solidFill>
                   <a:srgbClr val="C6532D"/>
                 </a:solidFill>
-                <a:latin typeface="Noto Sans CJK KR"/>
-                <a:ea typeface="Noto Sans CJK KR"/>
+                <a:latin typeface="Malgun Gothic"/>
+                <a:ea typeface="Malgun Gothic"/>
               </a:rPr>
               <a:t>→</a:t>
             </a:r>
@@ -19030,8 +19030,8 @@
                 <a:solidFill>
                   <a:srgbClr val="316B69"/>
                 </a:solidFill>
-                <a:latin typeface="Noto Sans CJK KR"/>
-                <a:ea typeface="Noto Sans CJK KR"/>
+                <a:latin typeface="Malgun Gothic"/>
+                <a:ea typeface="Malgun Gothic"/>
               </a:rPr>
               <a:t>[결정적 순간의 행동과 시선 처리 (Show)]</a:t>
             </a:r>
@@ -19116,8 +19116,8 @@
                 <a:solidFill>
                   <a:srgbClr val="316B69"/>
                 </a:solidFill>
-                <a:latin typeface="Noto Sans CJK KR"/>
-                <a:ea typeface="Noto Sans CJK KR"/>
+                <a:latin typeface="Malgun Gothic"/>
+                <a:ea typeface="Malgun Gothic"/>
               </a:rPr>
               <a:t>✓ 시계 확인 + 명함 한 장으로 냉담함 증명</a:t>
             </a:r>
@@ -19156,8 +19156,8 @@
                 <a:solidFill>
                   <a:srgbClr val="1A212E"/>
                 </a:solidFill>
-                <a:latin typeface="Noto Sans CJK KR"/>
-                <a:ea typeface="Noto Sans CJK KR"/>
+                <a:latin typeface="Malgun Gothic"/>
+                <a:ea typeface="Malgun Gothic"/>
               </a:rPr>
               <a:t>“민수는 오열하는 동생의 어깨 너머로 벽시계의 분침을 먼저 확인한 뒤, 지갑에서 명함 한 장만 꺼내 식탁 끝에 소리 없이 내려놓았다.”</a:t>
             </a:r>
@@ -19244,8 +19244,8 @@
                 <a:solidFill>
                   <a:srgbClr val="878E99"/>
                 </a:solidFill>
-                <a:latin typeface="Noto Sans CJK KR"/>
-                <a:ea typeface="Noto Sans CJK KR"/>
+                <a:latin typeface="Malgun Gothic"/>
+                <a:ea typeface="Malgun Gothic"/>
               </a:rPr>
               <a:t>CASE 03  |  공간과 분위기 구축  —  [요약 설명: Tell]</a:t>
             </a:r>
@@ -19284,8 +19284,8 @@
                 <a:solidFill>
                   <a:srgbClr val="555E6C"/>
                 </a:solidFill>
-                <a:latin typeface="Noto Sans CJK KR"/>
-                <a:ea typeface="Noto Sans CJK KR"/>
+                <a:latin typeface="Malgun Gothic"/>
+                <a:ea typeface="Malgun Gothic"/>
               </a:rPr>
               <a:t>“그곳은 오랫동안 사람이 살지 않아 무척 음산하고 불길한 폐가였다.”</a:t>
             </a:r>
@@ -19324,8 +19324,8 @@
                 <a:solidFill>
                   <a:srgbClr val="C6532D"/>
                 </a:solidFill>
-                <a:latin typeface="Noto Sans CJK KR"/>
-                <a:ea typeface="Noto Sans CJK KR"/>
+                <a:latin typeface="Malgun Gothic"/>
+                <a:ea typeface="Malgun Gothic"/>
               </a:rPr>
               <a:t>→</a:t>
             </a:r>
@@ -19456,8 +19456,8 @@
                 <a:solidFill>
                   <a:srgbClr val="316B69"/>
                 </a:solidFill>
-                <a:latin typeface="Noto Sans CJK KR"/>
-                <a:ea typeface="Noto Sans CJK KR"/>
+                <a:latin typeface="Malgun Gothic"/>
+                <a:ea typeface="Malgun Gothic"/>
               </a:rPr>
               <a:t>[청각·후각·촉각의 다중 감각 결합 (Show)]</a:t>
             </a:r>
@@ -19542,8 +19542,8 @@
                 <a:solidFill>
                   <a:srgbClr val="316B69"/>
                 </a:solidFill>
-                <a:latin typeface="Noto Sans CJK KR"/>
-                <a:ea typeface="Noto Sans CJK KR"/>
+                <a:latin typeface="Malgun Gothic"/>
+                <a:ea typeface="Malgun Gothic"/>
               </a:rPr>
               <a:t>✓ 후각(곰팡이) + 청각(벽지 소리) 입체화</a:t>
             </a:r>
@@ -19582,8 +19582,8 @@
                 <a:solidFill>
                   <a:srgbClr val="1A212E"/>
                 </a:solidFill>
-                <a:latin typeface="Noto Sans CJK KR"/>
-                <a:ea typeface="Noto Sans CJK KR"/>
+                <a:latin typeface="Malgun Gothic"/>
+                <a:ea typeface="Malgun Gothic"/>
               </a:rPr>
               <a:t>“문지방을 넘자 젖은 곰팡이 냄새가 훅 끼쳤고, 깨진 유리창 틈으로 스며든 바람에 들뜬 벽지가 뱀 허물처럼 바스락거렸다.”</a:t>
             </a:r>
@@ -19668,8 +19668,8 @@
                 <a:solidFill>
                   <a:srgbClr val="D19830"/>
                 </a:solidFill>
-                <a:latin typeface="Noto Sans CJK KR"/>
-                <a:ea typeface="Noto Sans CJK KR"/>
+                <a:latin typeface="Malgun Gothic"/>
+                <a:ea typeface="Malgun Gothic"/>
               </a:rPr>
               <a:t>살아 숨 쉬는 대사(Dialogue)를 쓰는 3가지 실전 원칙</a:t>
             </a:r>
@@ -19756,8 +19756,8 @@
                 <a:solidFill>
                   <a:srgbClr val="F2EFE9"/>
                 </a:solidFill>
-                <a:latin typeface="Noto Sans CJK KR"/>
-                <a:ea typeface="Noto Sans CJK KR"/>
+                <a:latin typeface="Malgun Gothic"/>
+                <a:ea typeface="Malgun Gothic"/>
               </a:rPr>
               <a:t>01. 정보 브리핑 대사 금지</a:t>
             </a:r>
@@ -19796,8 +19796,8 @@
                 <a:solidFill>
                   <a:srgbClr val="B2BAC6"/>
                 </a:solidFill>
-                <a:latin typeface="Noto Sans CJK KR"/>
-                <a:ea typeface="Noto Sans CJK KR"/>
+                <a:latin typeface="Malgun Gothic"/>
+                <a:ea typeface="Malgun Gothic"/>
               </a:rPr>
               <a:t>독자에게 배경설정을 알려주려고 인물끼리 이미 아는 사실을 말하게 하지 마라. 대사는 정보 전달이 아니라 ‘심리전’이다.</a:t>
             </a:r>
@@ -19884,8 +19884,8 @@
                 <a:solidFill>
                   <a:srgbClr val="F2EFE9"/>
                 </a:solidFill>
-                <a:latin typeface="Noto Sans CJK KR"/>
-                <a:ea typeface="Noto Sans CJK KR"/>
+                <a:latin typeface="Malgun Gothic"/>
+                <a:ea typeface="Malgun Gothic"/>
               </a:rPr>
               <a:t>02. 서브텍스트(행간) 활용</a:t>
             </a:r>
@@ -19924,8 +19924,8 @@
                 <a:solidFill>
                   <a:srgbClr val="B2BAC6"/>
                 </a:solidFill>
-                <a:latin typeface="Noto Sans CJK KR"/>
-                <a:ea typeface="Noto Sans CJK KR"/>
+                <a:latin typeface="Malgun Gothic"/>
+                <a:ea typeface="Malgun Gothic"/>
               </a:rPr>
               <a:t>인물이 속마음을 정직하게 다 말하면 긴장이 사라진다. 정작 하고 싶은 말은 숨기고 엉뚱한 화제로 감정을 우회시켜라.</a:t>
             </a:r>
@@ -20012,8 +20012,8 @@
                 <a:solidFill>
                   <a:srgbClr val="F2EFE9"/>
                 </a:solidFill>
-                <a:latin typeface="Noto Sans CJK KR"/>
-                <a:ea typeface="Noto Sans CJK KR"/>
+                <a:latin typeface="Malgun Gothic"/>
+                <a:ea typeface="Malgun Gothic"/>
               </a:rPr>
               <a:t>03. 지문과 행동 비트 결합</a:t>
             </a:r>
@@ -20052,8 +20052,8 @@
                 <a:solidFill>
                   <a:srgbClr val="B2BAC6"/>
                 </a:solidFill>
-                <a:latin typeface="Noto Sans CJK KR"/>
-                <a:ea typeface="Noto Sans CJK KR"/>
+                <a:latin typeface="Malgun Gothic"/>
+                <a:ea typeface="Malgun Gothic"/>
               </a:rPr>
               <a:t>“~라고 슬프게 말했다” 같은 부사형 전달동사를 줄이고, 대사 사이사이에 시선 회피나 침묵 같은 행동 비트(Action Beat)를 넣어라.</a:t>
             </a:r>
@@ -20118,8 +20118,8 @@
                 <a:solidFill>
                   <a:srgbClr val="C6532D"/>
                 </a:solidFill>
-                <a:latin typeface="Noto Sans CJK KR"/>
-                <a:ea typeface="Noto Sans CJK KR"/>
+                <a:latin typeface="Malgun Gothic"/>
+                <a:ea typeface="Malgun Gothic"/>
               </a:rPr>
               <a:t>08  |  DRAFTING &amp; 3-PASS REVISION PROCESS</a:t>
             </a:r>
@@ -20158,8 +20158,8 @@
                 <a:solidFill>
                   <a:srgbClr val="1A212E"/>
                 </a:solidFill>
-                <a:latin typeface="Noto Sans CJK KR"/>
-                <a:ea typeface="Noto Sans CJK KR"/>
+                <a:latin typeface="Malgun Gothic"/>
+                <a:ea typeface="Malgun Gothic"/>
               </a:rPr>
               <a:t>초고는 뜨거운 가슴으로 거침없이 쓰고, 퇴고는 차가운 머리로 3단계에 걸쳐 조각한다</a:t>
             </a:r>
@@ -20198,8 +20198,8 @@
                 <a:solidFill>
                   <a:srgbClr val="555E6C"/>
                 </a:solidFill>
-                <a:latin typeface="Noto Sans CJK KR"/>
-                <a:ea typeface="Noto Sans CJK KR"/>
+                <a:latin typeface="Malgun Gothic"/>
+                <a:ea typeface="Malgun Gothic"/>
               </a:rPr>
               <a:t>완벽주의 때문에 첫 장만 무한히 고치는 함정에서 벗어나, 구조·장면·문장의 순서로 해상도를 높여가며 다듬는다</a:t>
             </a:r>
@@ -20370,8 +20370,8 @@
                 <a:solidFill>
                   <a:srgbClr val="878E99"/>
                 </a:solidFill>
-                <a:latin typeface="Noto Sans CJK KR"/>
-                <a:ea typeface="Noto Sans CJK KR"/>
+                <a:latin typeface="Malgun Gothic"/>
+                <a:ea typeface="Malgun Gothic"/>
               </a:rPr>
               <a:t>THE CRAFT OF FICTION WRITING  |  소설 창작 실전 가이드</a:t>
             </a:r>
@@ -20410,8 +20410,8 @@
                 <a:solidFill>
                   <a:srgbClr val="C6532D"/>
                 </a:solidFill>
-                <a:latin typeface="Noto Sans CJK KR"/>
-                <a:ea typeface="Noto Sans CJK KR"/>
+                <a:latin typeface="Malgun Gothic"/>
+                <a:ea typeface="Malgun Gothic"/>
               </a:rPr>
               <a:t>09 / 10</a:t>
             </a:r>
@@ -20498,8 +20498,8 @@
                 <a:solidFill>
                   <a:srgbClr val="C6532D"/>
                 </a:solidFill>
-                <a:latin typeface="Noto Sans CJK KR"/>
-                <a:ea typeface="Noto Sans CJK KR"/>
+                <a:latin typeface="Malgun Gothic"/>
+                <a:ea typeface="Malgun Gothic"/>
               </a:rPr>
               <a:t>초고 완주의 제1원칙</a:t>
             </a:r>
@@ -20534,34 +20534,34 @@
               </a:lnSpc>
             </a:pPr>
             <a:r>
-              <a:rPr sz="850" b="0" i="0">
+              <a:rPr sz="900" b="0" i="0">
                 <a:solidFill>
                   <a:srgbClr val="1A212E"/>
                 </a:solidFill>
-                <a:latin typeface="Noto Sans CJK KR"/>
-                <a:ea typeface="Noto Sans CJK KR"/>
+                <a:latin typeface="Malgun Gothic"/>
+                <a:ea typeface="Malgun Gothic"/>
               </a:rPr>
               <a:t>“초고를 쓸 때는 내면의 편집자를 방문 밖에 가두어라.”</a:t>
             </a:r>
             <a:br/>
             <a:r>
-              <a:rPr sz="850" b="0" i="0">
+              <a:rPr sz="900" b="0" i="0">
                 <a:solidFill>
                   <a:srgbClr val="1A212E"/>
                 </a:solidFill>
-                <a:latin typeface="Noto Sans CJK KR"/>
-                <a:ea typeface="Noto Sans CJK KR"/>
+                <a:latin typeface="Malgun Gothic"/>
+                <a:ea typeface="Malgun Gothic"/>
               </a:rPr>
               <a:t/>
             </a:r>
             <a:br/>
             <a:r>
-              <a:rPr sz="850" b="0" i="0">
+              <a:rPr sz="900" b="0" i="0">
                 <a:solidFill>
                   <a:srgbClr val="1A212E"/>
                 </a:solidFill>
-                <a:latin typeface="Noto Sans CJK KR"/>
-                <a:ea typeface="Noto Sans CJK KR"/>
+                <a:latin typeface="Malgun Gothic"/>
+                <a:ea typeface="Malgun Gothic"/>
               </a:rPr>
               <a:t>백지 위에서는 그 어떤 퇴고도 불가능하다. 문장이 거칠고 설정에 구멍이 나더라도 일단 결말의 마침표까지 달려가 전체 윤곽을 확보하는 것이 최우선이다.</a:t>
             </a:r>
@@ -20648,8 +20648,8 @@
                 <a:solidFill>
                   <a:srgbClr val="1A212E"/>
                 </a:solidFill>
-                <a:latin typeface="Noto Sans CJK KR"/>
-                <a:ea typeface="Noto Sans CJK KR"/>
+                <a:latin typeface="Malgun Gothic"/>
+                <a:ea typeface="Malgun Gothic"/>
               </a:rPr>
               <a:t>소설 완성 에너지 배분 비율</a:t>
             </a:r>
@@ -20732,8 +20732,8 @@
                 <a:solidFill>
                   <a:srgbClr val="FFFFFF"/>
                 </a:solidFill>
-                <a:latin typeface="Noto Sans CJK KR"/>
-                <a:ea typeface="Noto Sans CJK KR"/>
+                <a:latin typeface="Malgun Gothic"/>
+                <a:ea typeface="Malgun Gothic"/>
               </a:rPr>
               <a:t>20%</a:t>
             </a:r>
@@ -20816,8 +20816,8 @@
                 <a:solidFill>
                   <a:srgbClr val="FFFFFF"/>
                 </a:solidFill>
-                <a:latin typeface="Noto Sans CJK KR"/>
-                <a:ea typeface="Noto Sans CJK KR"/>
+                <a:latin typeface="Malgun Gothic"/>
+                <a:ea typeface="Malgun Gothic"/>
               </a:rPr>
               <a:t>30%</a:t>
             </a:r>
@@ -20900,8 +20900,8 @@
                 <a:solidFill>
                   <a:srgbClr val="FFFFFF"/>
                 </a:solidFill>
-                <a:latin typeface="Noto Sans CJK KR"/>
-                <a:ea typeface="Noto Sans CJK KR"/>
+                <a:latin typeface="Malgun Gothic"/>
+                <a:ea typeface="Malgun Gothic"/>
               </a:rPr>
               <a:t>50% (퇴고)</a:t>
             </a:r>
@@ -20936,23 +20936,23 @@
               </a:lnSpc>
             </a:pPr>
             <a:r>
-              <a:rPr sz="980" b="0" i="0">
+              <a:rPr sz="930" b="0" i="0">
                 <a:solidFill>
                   <a:srgbClr val="555E6C"/>
                 </a:solidFill>
-                <a:latin typeface="Noto Sans CJK KR"/>
-                <a:ea typeface="Noto Sans CJK KR"/>
+                <a:latin typeface="Malgun Gothic"/>
+                <a:ea typeface="Malgun Gothic"/>
               </a:rPr>
               <a:t>• 기획·구조 설계 (20%)  • 초고 집필 (30%)</a:t>
             </a:r>
             <a:br/>
             <a:r>
-              <a:rPr sz="980" b="0" i="0">
+              <a:rPr sz="930" b="0" i="0">
                 <a:solidFill>
                   <a:srgbClr val="555E6C"/>
                 </a:solidFill>
-                <a:latin typeface="Noto Sans CJK KR"/>
-                <a:ea typeface="Noto Sans CJK KR"/>
+                <a:latin typeface="Malgun Gothic"/>
+                <a:ea typeface="Malgun Gothic"/>
               </a:rPr>
               <a:t>• 3단계 퇴고 및 윤문 (50%) — 진짜 소설은 퇴고에서 태어난다.</a:t>
             </a:r>
@@ -21037,8 +21037,8 @@
                 <a:solidFill>
                   <a:srgbClr val="D19830"/>
                 </a:solidFill>
-                <a:latin typeface="Noto Sans CJK KR"/>
-                <a:ea typeface="Noto Sans CJK KR"/>
+                <a:latin typeface="Malgun Gothic"/>
+                <a:ea typeface="Malgun Gothic"/>
               </a:rPr>
               <a:t>필수 과정: 원고 숙성기 (Cooling Off)</a:t>
             </a:r>
@@ -21077,8 +21077,8 @@
                 <a:solidFill>
                   <a:srgbClr val="B2BAC6"/>
                 </a:solidFill>
-                <a:latin typeface="Noto Sans CJK KR"/>
-                <a:ea typeface="Noto Sans CJK KR"/>
+                <a:latin typeface="Malgun Gothic"/>
+                <a:ea typeface="Malgun Gothic"/>
               </a:rPr>
               <a:t>초고 완성 직후에는 머릿속 설정과 실제 문장을 구별하지 못한다. 최소 며칠~2주간 원고를 서랍에 넣어두었다가 ‘낯선 독자의 눈’으로 다시 읽어라.</a:t>
             </a:r>
@@ -21255,8 +21255,8 @@
                 <a:solidFill>
                   <a:srgbClr val="FFFFFF"/>
                 </a:solidFill>
-                <a:latin typeface="Noto Sans CJK KR"/>
-                <a:ea typeface="Noto Sans CJK KR"/>
+                <a:latin typeface="Malgun Gothic"/>
+                <a:ea typeface="Malgun Gothic"/>
               </a:rPr>
               <a:t>PASS 01</a:t>
             </a:r>
@@ -21295,8 +21295,8 @@
                 <a:solidFill>
                   <a:srgbClr val="1A212E"/>
                 </a:solidFill>
-                <a:latin typeface="Noto Sans CJK KR"/>
-                <a:ea typeface="Noto Sans CJK KR"/>
+                <a:latin typeface="Malgun Gothic"/>
+                <a:ea typeface="Malgun Gothic"/>
               </a:rPr>
               <a:t>1차 구조 퇴고 (Macro / Structural Edit)</a:t>
             </a:r>
@@ -21335,8 +21335,8 @@
                 <a:solidFill>
                   <a:srgbClr val="C6532D"/>
                 </a:solidFill>
-                <a:latin typeface="Noto Sans CJK KR"/>
-                <a:ea typeface="Noto Sans CJK KR"/>
+                <a:latin typeface="Malgun Gothic"/>
+                <a:ea typeface="Malgun Gothic"/>
               </a:rPr>
               <a:t>나무가 아닌 숲을 보며 서사의 뼈대와 인과관계를 재조립하는 단계</a:t>
             </a:r>
@@ -21371,34 +21371,34 @@
               </a:lnSpc>
             </a:pPr>
             <a:r>
-              <a:rPr sz="1030" b="0" i="0">
+              <a:rPr sz="980" b="0" i="0">
                 <a:solidFill>
                   <a:srgbClr val="555E6C"/>
                 </a:solidFill>
-                <a:latin typeface="Noto Sans CJK KR"/>
-                <a:ea typeface="Noto Sans CJK KR"/>
+                <a:latin typeface="Malgun Gothic"/>
+                <a:ea typeface="Malgun Gothic"/>
               </a:rPr>
               <a:t>✓ 주인공의 욕망과 행동이 시작부터 클라이맥스까지 일관되게 이어지는가?</a:t>
             </a:r>
             <a:br/>
             <a:r>
-              <a:rPr sz="1030" b="0" i="0">
+              <a:rPr sz="980" b="0" i="0">
                 <a:solidFill>
                   <a:srgbClr val="555E6C"/>
                 </a:solidFill>
-                <a:latin typeface="Noto Sans CJK KR"/>
-                <a:ea typeface="Noto Sans CJK KR"/>
+                <a:latin typeface="Malgun Gothic"/>
+                <a:ea typeface="Malgun Gothic"/>
               </a:rPr>
               <a:t>✓ 중반부가 늘어지지 않는가? (기능이 겹치는 장면과 인물을 과감히 통합·삭제)</a:t>
             </a:r>
             <a:br/>
             <a:r>
-              <a:rPr sz="1030" b="0" i="0">
+              <a:rPr sz="980" b="0" i="0">
                 <a:solidFill>
                   <a:srgbClr val="555E6C"/>
                 </a:solidFill>
-                <a:latin typeface="Noto Sans CJK KR"/>
-                <a:ea typeface="Noto Sans CJK KR"/>
+                <a:latin typeface="Malgun Gothic"/>
+                <a:ea typeface="Malgun Gothic"/>
               </a:rPr>
               <a:t>✓ 복선이 회수되었으며, 결말이 우연이 아닌 주인공의 선택으로 해결되는가?</a:t>
             </a:r>
@@ -21575,8 +21575,8 @@
                 <a:solidFill>
                   <a:srgbClr val="FFFFFF"/>
                 </a:solidFill>
-                <a:latin typeface="Noto Sans CJK KR"/>
-                <a:ea typeface="Noto Sans CJK KR"/>
+                <a:latin typeface="Malgun Gothic"/>
+                <a:ea typeface="Malgun Gothic"/>
               </a:rPr>
               <a:t>PASS 02</a:t>
             </a:r>
@@ -21615,8 +21615,8 @@
                 <a:solidFill>
                   <a:srgbClr val="1A212E"/>
                 </a:solidFill>
-                <a:latin typeface="Noto Sans CJK KR"/>
-                <a:ea typeface="Noto Sans CJK KR"/>
+                <a:latin typeface="Malgun Gothic"/>
+                <a:ea typeface="Malgun Gothic"/>
               </a:rPr>
               <a:t>2차 장면·리듬 퇴고 (Scene &amp; Pacing Edit)</a:t>
             </a:r>
@@ -21655,8 +21655,8 @@
                 <a:solidFill>
                   <a:srgbClr val="316B69"/>
                 </a:solidFill>
-                <a:latin typeface="Noto Sans CJK KR"/>
-                <a:ea typeface="Noto Sans CJK KR"/>
+                <a:latin typeface="Malgun Gothic"/>
+                <a:ea typeface="Malgun Gothic"/>
               </a:rPr>
               <a:t>각 장면의 밀도와 대화의 텐션, 시점의 일관성을 조율하는 단계</a:t>
             </a:r>
@@ -21691,34 +21691,34 @@
               </a:lnSpc>
             </a:pPr>
             <a:r>
-              <a:rPr sz="1030" b="0" i="0">
+              <a:rPr sz="980" b="0" i="0">
                 <a:solidFill>
                   <a:srgbClr val="555E6C"/>
                 </a:solidFill>
-                <a:latin typeface="Noto Sans CJK KR"/>
-                <a:ea typeface="Noto Sans CJK KR"/>
+                <a:latin typeface="Malgun Gothic"/>
+                <a:ea typeface="Malgun Gothic"/>
               </a:rPr>
               <a:t>✓ 각 장면의 첫 문장이 흥미롭고 마지막 문장이 다음 장면을 궁금하게 만드는가?</a:t>
             </a:r>
             <a:br/>
             <a:r>
-              <a:rPr sz="1030" b="0" i="0">
+              <a:rPr sz="980" b="0" i="0">
                 <a:solidFill>
                   <a:srgbClr val="555E6C"/>
                 </a:solidFill>
-                <a:latin typeface="Noto Sans CJK KR"/>
-                <a:ea typeface="Noto Sans CJK KR"/>
+                <a:latin typeface="Malgun Gothic"/>
+                <a:ea typeface="Malgun Gothic"/>
               </a:rPr>
               <a:t>✓ 한 장면 안에서 시점(POV)이 흔들리거나 설명(Tell)이 과도한 구간은 없는가?</a:t>
             </a:r>
             <a:br/>
             <a:r>
-              <a:rPr sz="1030" b="0" i="0">
+              <a:rPr sz="980" b="0" i="0">
                 <a:solidFill>
                   <a:srgbClr val="555E6C"/>
                 </a:solidFill>
-                <a:latin typeface="Noto Sans CJK KR"/>
-                <a:ea typeface="Noto Sans CJK KR"/>
+                <a:latin typeface="Malgun Gothic"/>
+                <a:ea typeface="Malgun Gothic"/>
               </a:rPr>
               <a:t>✓ 긴박한 장면에서는 단문으로 속도를 높이고, 정서적 장면에서는 호흡을 늦추었는가?</a:t>
             </a:r>
@@ -21895,8 +21895,8 @@
                 <a:solidFill>
                   <a:srgbClr val="FFFFFF"/>
                 </a:solidFill>
-                <a:latin typeface="Noto Sans CJK KR"/>
-                <a:ea typeface="Noto Sans CJK KR"/>
+                <a:latin typeface="Malgun Gothic"/>
+                <a:ea typeface="Malgun Gothic"/>
               </a:rPr>
               <a:t>PASS 03</a:t>
             </a:r>
@@ -21935,8 +21935,8 @@
                 <a:solidFill>
                   <a:srgbClr val="1A212E"/>
                 </a:solidFill>
-                <a:latin typeface="Noto Sans CJK KR"/>
-                <a:ea typeface="Noto Sans CJK KR"/>
+                <a:latin typeface="Malgun Gothic"/>
+                <a:ea typeface="Malgun Gothic"/>
               </a:rPr>
               <a:t>3차 문장·윤문 퇴고 (Line Edit &amp; Proofreading)</a:t>
             </a:r>
@@ -21975,8 +21975,8 @@
                 <a:solidFill>
                   <a:srgbClr val="D19830"/>
                 </a:solidFill>
-                <a:latin typeface="Noto Sans CJK KR"/>
-                <a:ea typeface="Noto Sans CJK KR"/>
+                <a:latin typeface="Malgun Gothic"/>
+                <a:ea typeface="Malgun Gothic"/>
               </a:rPr>
               <a:t>소리 내어 읽으며 군더더기 수식어를 덜어내고 문장의 음악성을 다듬는 단계</a:t>
             </a:r>
@@ -22011,34 +22011,34 @@
               </a:lnSpc>
             </a:pPr>
             <a:r>
-              <a:rPr sz="1030" b="0" i="0">
+              <a:rPr sz="980" b="0" i="0">
                 <a:solidFill>
                   <a:srgbClr val="555E6C"/>
                 </a:solidFill>
-                <a:latin typeface="Noto Sans CJK KR"/>
-                <a:ea typeface="Noto Sans CJK KR"/>
+                <a:latin typeface="Malgun Gothic"/>
+                <a:ea typeface="Malgun Gothic"/>
               </a:rPr>
               <a:t>✓ 상투적 부사(‘매우, 정말, 문득, 갑자기’)와 번역투(‘~에 다름 아니다, ~로부터’) 제거</a:t>
             </a:r>
             <a:br/>
             <a:r>
-              <a:rPr sz="1030" b="0" i="0">
+              <a:rPr sz="980" b="0" i="0">
                 <a:solidFill>
                   <a:srgbClr val="555E6C"/>
                 </a:solidFill>
-                <a:latin typeface="Noto Sans CJK KR"/>
-                <a:ea typeface="Noto Sans CJK KR"/>
+                <a:latin typeface="Malgun Gothic"/>
+                <a:ea typeface="Malgun Gothic"/>
               </a:rPr>
               <a:t>✓ 한 문장에 중복된 주어(‘그는 ~ 그의 ~’)와 불필요한 피동형(‘~되어졌다’) 교정</a:t>
             </a:r>
             <a:br/>
             <a:r>
-              <a:rPr sz="1030" b="0" i="0">
+              <a:rPr sz="980" b="0" i="0">
                 <a:solidFill>
                   <a:srgbClr val="555E6C"/>
                 </a:solidFill>
-                <a:latin typeface="Noto Sans CJK KR"/>
-                <a:ea typeface="Noto Sans CJK KR"/>
+                <a:latin typeface="Malgun Gothic"/>
+                <a:ea typeface="Malgun Gothic"/>
               </a:rPr>
               <a:t>✓ 육성으로 낭독(Read Aloud)했을 때 숨이 차거나 어색하게 걸리는 대사 수정</a:t>
             </a:r>

--- a/소설쓰기_가이드.pptx
+++ b/소설쓰기_가이드.pptx
@@ -3270,7 +3270,7 @@
         <p:spPr>
           <a:xfrm>
             <a:off x="777240" y="1536192"/>
-            <a:ext cx="5669280" cy="1860279"/>
+            <a:ext cx="5669280" cy="1924287"/>
           </a:xfrm>
           <a:prstGeom prst="rect">
             <a:avLst/>
@@ -3287,6 +3287,9 @@
               <a:lnSpc>
                 <a:spcPct val="118000"/>
               </a:lnSpc>
+              <a:spcAft>
+                <a:spcPts val="450"/>
+              </a:spcAft>
             </a:pPr>
             <a:r>
               <a:rPr sz="3750" b="1" i="0">
@@ -3298,7 +3301,13 @@
               </a:rPr>
               <a:t>매혹적인</a:t>
             </a:r>
-            <a:br/>
+          </a:p>
+          <a:p>
+            <a:pPr algn="l">
+              <a:lnSpc>
+                <a:spcPct val="118000"/>
+              </a:lnSpc>
+            </a:pPr>
             <a:r>
               <a:rPr sz="3750" b="1" i="0">
                 <a:solidFill>
@@ -3320,7 +3329,7 @@
         </p:nvSpPr>
         <p:spPr>
           <a:xfrm>
-            <a:off x="777240" y="3487911"/>
+            <a:off x="777240" y="3551919"/>
             <a:ext cx="1463040" cy="64008"/>
           </a:xfrm>
           <a:prstGeom prst="rect">
@@ -3364,8 +3373,8 @@
         </p:nvSpPr>
         <p:spPr>
           <a:xfrm>
-            <a:off x="777240" y="3643359"/>
-            <a:ext cx="5486400" cy="804062"/>
+            <a:off x="777240" y="3707367"/>
+            <a:ext cx="5486400" cy="826922"/>
           </a:xfrm>
           <a:prstGeom prst="rect">
             <a:avLst/>
@@ -3382,6 +3391,9 @@
               <a:lnSpc>
                 <a:spcPct val="140000"/>
               </a:lnSpc>
+              <a:spcAft>
+                <a:spcPts val="162"/>
+              </a:spcAft>
             </a:pPr>
             <a:r>
               <a:rPr sz="1350" b="0" i="0">
@@ -3393,7 +3405,13 @@
               </a:rPr>
               <a:t>아이디어의 첫 불꽃부터 마지막 문장의 퇴고까지,</a:t>
             </a:r>
-            <a:br/>
+          </a:p>
+          <a:p>
+            <a:pPr algn="l">
+              <a:lnSpc>
+                <a:spcPct val="140000"/>
+              </a:lnSpc>
+            </a:pPr>
             <a:r>
               <a:rPr sz="1350" b="0" i="0">
                 <a:solidFill>
@@ -4899,6 +4917,9 @@
               <a:lnSpc>
                 <a:spcPct val="132000"/>
               </a:lnSpc>
+              <a:spcAft>
+                <a:spcPts val="123"/>
+              </a:spcAft>
             </a:pPr>
             <a:r>
               <a:rPr sz="1030" b="0" i="0">
@@ -4910,7 +4931,16 @@
               </a:rPr>
               <a:t>• 매일 같은 시간, 같은 장소에서 정해진 분량(예: 하루 1,000자~2,000자 또는 45분)을 채우는 시스템 구축</a:t>
             </a:r>
-            <a:br/>
+          </a:p>
+          <a:p>
+            <a:pPr algn="l">
+              <a:lnSpc>
+                <a:spcPct val="132000"/>
+              </a:lnSpc>
+              <a:spcAft>
+                <a:spcPts val="123"/>
+              </a:spcAft>
+            </a:pPr>
             <a:r>
               <a:rPr sz="1030" b="0" i="0">
                 <a:solidFill>
@@ -4921,7 +4951,13 @@
               </a:rPr>
               <a:t>• 다음 날 글쓰기가 막막하지 않도록, 오늘 가장 잘 써지는 장면의 문장 중간에서 멈추는 ‘헤밍웨이 기법’ 활용</a:t>
             </a:r>
-            <a:br/>
+          </a:p>
+          <a:p>
+            <a:pPr algn="l">
+              <a:lnSpc>
+                <a:spcPct val="132000"/>
+              </a:lnSpc>
+            </a:pPr>
             <a:r>
               <a:rPr sz="1030" b="0" i="0">
                 <a:solidFill>
@@ -5221,6 +5257,9 @@
               <a:lnSpc>
                 <a:spcPct val="132000"/>
               </a:lnSpc>
+              <a:spcAft>
+                <a:spcPts val="123"/>
+              </a:spcAft>
             </a:pPr>
             <a:r>
               <a:rPr sz="1030" b="0" i="0">
@@ -5232,7 +5271,16 @@
               </a:rPr>
               <a:t>• 지하철에서 들은 기묘한 대화 한 줄, 독특한 직업군의 은어, 계절별 빛과 냄새를 메모장에 즉시 기록</a:t>
             </a:r>
-            <a:br/>
+          </a:p>
+          <a:p>
+            <a:pPr algn="l">
+              <a:lnSpc>
+                <a:spcPct val="132000"/>
+              </a:lnSpc>
+              <a:spcAft>
+                <a:spcPts val="123"/>
+              </a:spcAft>
+            </a:pPr>
             <a:r>
               <a:rPr sz="1030" b="0" i="0">
                 <a:solidFill>
@@ -5243,7 +5291,13 @@
               </a:rPr>
               <a:t>• 마음에 드는 소설을 읽을 때는 독자로서 한 번, 작가로서 ‘어떻게 이 감정을 설계했는가’ 분석하며 한 번 더 필사·해부</a:t>
             </a:r>
-            <a:br/>
+          </a:p>
+          <a:p>
+            <a:pPr algn="l">
+              <a:lnSpc>
+                <a:spcPct val="132000"/>
+              </a:lnSpc>
+            </a:pPr>
             <a:r>
               <a:rPr sz="1030" b="0" i="0">
                 <a:solidFill>
@@ -5543,6 +5597,9 @@
               <a:lnSpc>
                 <a:spcPct val="132000"/>
               </a:lnSpc>
+              <a:spcAft>
+                <a:spcPts val="123"/>
+              </a:spcAft>
             </a:pPr>
             <a:r>
               <a:rPr sz="1030" b="0" i="0">
@@ -5554,7 +5611,16 @@
               </a:rPr>
               <a:t>• 처음부터 거대한 10권짜리 세계관에 매몰되기보다, 원고지 70~100매 분량의 단편으로 기승전결 완주 훈련</a:t>
             </a:r>
-            <a:br/>
+          </a:p>
+          <a:p>
+            <a:pPr algn="l">
+              <a:lnSpc>
+                <a:spcPct val="132000"/>
+              </a:lnSpc>
+              <a:spcAft>
+                <a:spcPts val="123"/>
+              </a:spcAft>
+            </a:pPr>
             <a:r>
               <a:rPr sz="1030" b="0" i="0">
                 <a:solidFill>
@@ -5565,7 +5631,13 @@
               </a:rPr>
               <a:t>• 첫 초고가 마음에 들지 않는 것은 당신의 재능이 부족해서가 아니라 안목이 높기 때문임을 기억</a:t>
             </a:r>
-            <a:br/>
+          </a:p>
+          <a:p>
+            <a:pPr algn="l">
+              <a:lnSpc>
+                <a:spcPct val="132000"/>
+              </a:lnSpc>
+            </a:pPr>
             <a:r>
               <a:rPr sz="1030" b="0" i="0">
                 <a:solidFill>
@@ -6347,9 +6419,12 @@
               <a:lnSpc>
                 <a:spcPct val="128000"/>
               </a:lnSpc>
-            </a:pPr>
-            <a:r>
-              <a:rPr sz="1030" b="0" i="0">
+              <a:spcAft>
+                <a:spcPts val="117"/>
+              </a:spcAft>
+            </a:pPr>
+            <a:r>
+              <a:rPr sz="980" b="0" i="0">
                 <a:solidFill>
                   <a:srgbClr val="555E6C"/>
                 </a:solidFill>
@@ -6358,9 +6433,18 @@
               </a:rPr>
               <a:t>• 익숙한 일상 속 낯선 균열을 포착해 독자의 질문을 유도</a:t>
             </a:r>
-            <a:br/>
-            <a:r>
-              <a:rPr sz="1030" b="0" i="0">
+          </a:p>
+          <a:p>
+            <a:pPr algn="l">
+              <a:lnSpc>
+                <a:spcPct val="128000"/>
+              </a:lnSpc>
+              <a:spcAft>
+                <a:spcPts val="117"/>
+              </a:spcAft>
+            </a:pPr>
+            <a:r>
+              <a:rPr sz="980" b="0" i="0">
                 <a:solidFill>
                   <a:srgbClr val="555E6C"/>
                 </a:solidFill>
@@ -6369,9 +6453,15 @@
               </a:rPr>
               <a:t>• 단순한 설정 나열이 아닌 주인공이 겪을 윤리적·현실적 딜레마 내포</a:t>
             </a:r>
-            <a:br/>
-            <a:r>
-              <a:rPr sz="1030" b="0" i="0">
+          </a:p>
+          <a:p>
+            <a:pPr algn="l">
+              <a:lnSpc>
+                <a:spcPct val="128000"/>
+              </a:lnSpc>
+            </a:pPr>
+            <a:r>
+              <a:rPr sz="980" b="0" i="0">
                 <a:solidFill>
                   <a:srgbClr val="555E6C"/>
                 </a:solidFill>
@@ -6753,9 +6843,12 @@
               <a:lnSpc>
                 <a:spcPct val="128000"/>
               </a:lnSpc>
-            </a:pPr>
-            <a:r>
-              <a:rPr sz="1030" b="0" i="0">
+              <a:spcAft>
+                <a:spcPts val="117"/>
+              </a:spcAft>
+            </a:pPr>
+            <a:r>
+              <a:rPr sz="980" b="0" i="0">
                 <a:solidFill>
                   <a:srgbClr val="555E6C"/>
                 </a:solidFill>
@@ -6764,9 +6857,18 @@
               </a:rPr>
               <a:t>• 완벽한 영웅보다 결함과 모순을 지닌 인물에게 독자가 감정이입</a:t>
             </a:r>
-            <a:br/>
-            <a:r>
-              <a:rPr sz="1030" b="0" i="0">
+          </a:p>
+          <a:p>
+            <a:pPr algn="l">
+              <a:lnSpc>
+                <a:spcPct val="128000"/>
+              </a:lnSpc>
+              <a:spcAft>
+                <a:spcPts val="117"/>
+              </a:spcAft>
+            </a:pPr>
+            <a:r>
+              <a:rPr sz="980" b="0" i="0">
                 <a:solidFill>
                   <a:srgbClr val="555E6C"/>
                 </a:solidFill>
@@ -6775,9 +6877,15 @@
               </a:rPr>
               <a:t>• 외면적 목표를 추구하는 과정에서 내면의 거짓 믿음이 깨지는 성장</a:t>
             </a:r>
-            <a:br/>
-            <a:r>
-              <a:rPr sz="1030" b="0" i="0">
+          </a:p>
+          <a:p>
+            <a:pPr algn="l">
+              <a:lnSpc>
+                <a:spcPct val="128000"/>
+              </a:lnSpc>
+            </a:pPr>
+            <a:r>
+              <a:rPr sz="980" b="0" i="0">
                 <a:solidFill>
                   <a:srgbClr val="555E6C"/>
                 </a:solidFill>
@@ -7159,9 +7267,12 @@
               <a:lnSpc>
                 <a:spcPct val="128000"/>
               </a:lnSpc>
-            </a:pPr>
-            <a:r>
-              <a:rPr sz="1030" b="0" i="0">
+              <a:spcAft>
+                <a:spcPts val="117"/>
+              </a:spcAft>
+            </a:pPr>
+            <a:r>
+              <a:rPr sz="980" b="0" i="0">
                 <a:solidFill>
                   <a:srgbClr val="555E6C"/>
                 </a:solidFill>
@@ -7170,9 +7281,18 @@
               </a:rPr>
               <a:t>• 우연에 기댄 해결(데우스 엑스 마키나)을 배제하고 인물의 선택으로 전개</a:t>
             </a:r>
-            <a:br/>
-            <a:r>
-              <a:rPr sz="1030" b="0" i="0">
+          </a:p>
+          <a:p>
+            <a:pPr algn="l">
+              <a:lnSpc>
+                <a:spcPct val="128000"/>
+              </a:lnSpc>
+              <a:spcAft>
+                <a:spcPts val="117"/>
+              </a:spcAft>
+            </a:pPr>
+            <a:r>
+              <a:rPr sz="980" b="0" i="0">
                 <a:solidFill>
                   <a:srgbClr val="555E6C"/>
                 </a:solidFill>
@@ -7181,9 +7301,15 @@
               </a:rPr>
               <a:t>• 점진적으로 판돈(Stakes)을 높여 주인공을 퇴로 없는 막다른 골목으로 압박</a:t>
             </a:r>
-            <a:br/>
-            <a:r>
-              <a:rPr sz="1030" b="0" i="0">
+          </a:p>
+          <a:p>
+            <a:pPr algn="l">
+              <a:lnSpc>
+                <a:spcPct val="128000"/>
+              </a:lnSpc>
+            </a:pPr>
+            <a:r>
+              <a:rPr sz="980" b="0" i="0">
                 <a:solidFill>
                   <a:srgbClr val="555E6C"/>
                 </a:solidFill>
@@ -7565,9 +7691,12 @@
               <a:lnSpc>
                 <a:spcPct val="128000"/>
               </a:lnSpc>
-            </a:pPr>
-            <a:r>
-              <a:rPr sz="1030" b="0" i="0">
+              <a:spcAft>
+                <a:spcPts val="117"/>
+              </a:spcAft>
+            </a:pPr>
+            <a:r>
+              <a:rPr sz="980" b="0" i="0">
                 <a:solidFill>
                   <a:srgbClr val="555E6C"/>
                 </a:solidFill>
@@ -7576,9 +7705,18 @@
               </a:rPr>
               <a:t>• 오감의 디테일과 구체적 행동으로 인물의 감정선을 시각화</a:t>
             </a:r>
-            <a:br/>
-            <a:r>
-              <a:rPr sz="1030" b="0" i="0">
+          </a:p>
+          <a:p>
+            <a:pPr algn="l">
+              <a:lnSpc>
+                <a:spcPct val="128000"/>
+              </a:lnSpc>
+              <a:spcAft>
+                <a:spcPts val="117"/>
+              </a:spcAft>
+            </a:pPr>
+            <a:r>
+              <a:rPr sz="980" b="0" i="0">
                 <a:solidFill>
                   <a:srgbClr val="555E6C"/>
                 </a:solidFill>
@@ -7587,9 +7725,15 @@
               </a:rPr>
               <a:t>• 인물의 성격과 관계의 권력 구도가 묻어나는 입체적인 대사 설계</a:t>
             </a:r>
-            <a:br/>
-            <a:r>
-              <a:rPr sz="1030" b="0" i="0">
+          </a:p>
+          <a:p>
+            <a:pPr algn="l">
+              <a:lnSpc>
+                <a:spcPct val="128000"/>
+              </a:lnSpc>
+            </a:pPr>
+            <a:r>
+              <a:rPr sz="980" b="0" i="0">
                 <a:solidFill>
                   <a:srgbClr val="555E6C"/>
                 </a:solidFill>
@@ -15157,9 +15301,12 @@
               <a:lnSpc>
                 <a:spcPct val="128000"/>
               </a:lnSpc>
-            </a:pPr>
-            <a:r>
-              <a:rPr sz="950" b="0" i="0">
+              <a:spcAft>
+                <a:spcPts val="108"/>
+              </a:spcAft>
+            </a:pPr>
+            <a:r>
+              <a:rPr sz="900" b="0" i="0">
                 <a:solidFill>
                   <a:srgbClr val="F2EFE9"/>
                 </a:solidFill>
@@ -15168,9 +15315,18 @@
               </a:rPr>
               <a:t>• 장면의 시작과 끝 사이에 인물의 상황·감정의 부호(+/-)가 바뀌었는가?</a:t>
             </a:r>
-            <a:br/>
-            <a:r>
-              <a:rPr sz="950" b="0" i="0">
+          </a:p>
+          <a:p>
+            <a:pPr algn="l">
+              <a:lnSpc>
+                <a:spcPct val="128000"/>
+              </a:lnSpc>
+              <a:spcAft>
+                <a:spcPts val="108"/>
+              </a:spcAft>
+            </a:pPr>
+            <a:r>
+              <a:rPr sz="900" b="0" i="0">
                 <a:solidFill>
                   <a:srgbClr val="F2EFE9"/>
                 </a:solidFill>
@@ -15179,9 +15335,15 @@
               </a:rPr>
               <a:t>• 플롯을 전진시키거나 인물의 핵심 본성을 드러내는가?</a:t>
             </a:r>
-            <a:br/>
-            <a:r>
-              <a:rPr sz="950" b="0" i="0">
+          </a:p>
+          <a:p>
+            <a:pPr algn="l">
+              <a:lnSpc>
+                <a:spcPct val="128000"/>
+              </a:lnSpc>
+            </a:pPr>
+            <a:r>
+              <a:rPr sz="900" b="0" i="0">
                 <a:solidFill>
                   <a:srgbClr val="F2EFE9"/>
                 </a:solidFill>
@@ -16053,6 +16215,9 @@
               <a:lnSpc>
                 <a:spcPct val="122000"/>
               </a:lnSpc>
+              <a:spcAft>
+                <a:spcPts val="126"/>
+              </a:spcAft>
             </a:pPr>
             <a:r>
               <a:rPr sz="1050" b="1" i="0">
@@ -16064,7 +16229,13 @@
               </a:rPr>
               <a:t>1인칭 주인공 시점</a:t>
             </a:r>
-            <a:br/>
+          </a:p>
+          <a:p>
+            <a:pPr algn="l">
+              <a:lnSpc>
+                <a:spcPct val="122000"/>
+              </a:lnSpc>
+            </a:pPr>
             <a:r>
               <a:rPr sz="1050" b="1" i="0">
                 <a:solidFill>
@@ -16236,6 +16407,9 @@
               <a:lnSpc>
                 <a:spcPct val="122000"/>
               </a:lnSpc>
+              <a:spcAft>
+                <a:spcPts val="118"/>
+              </a:spcAft>
             </a:pPr>
             <a:r>
               <a:rPr sz="990" b="0" i="0">
@@ -16247,7 +16421,16 @@
               </a:rPr>
               <a:t>• 독자와 주인공의 즉각적 밀착</a:t>
             </a:r>
-            <a:br/>
+          </a:p>
+          <a:p>
+            <a:pPr algn="l">
+              <a:lnSpc>
+                <a:spcPct val="122000"/>
+              </a:lnSpc>
+              <a:spcAft>
+                <a:spcPts val="118"/>
+              </a:spcAft>
+            </a:pPr>
             <a:r>
               <a:rPr sz="990" b="0" i="0">
                 <a:solidFill>
@@ -16258,7 +16441,13 @@
               </a:rPr>
               <a:t>• 화자의 독특한 목소리·유머 극대화</a:t>
             </a:r>
-            <a:br/>
+          </a:p>
+          <a:p>
+            <a:pPr algn="l">
+              <a:lnSpc>
+                <a:spcPct val="122000"/>
+              </a:lnSpc>
+            </a:pPr>
             <a:r>
               <a:rPr sz="990" b="0" i="0">
                 <a:solidFill>
@@ -16344,6 +16533,9 @@
               <a:lnSpc>
                 <a:spcPct val="122000"/>
               </a:lnSpc>
+              <a:spcAft>
+                <a:spcPts val="118"/>
+              </a:spcAft>
             </a:pPr>
             <a:r>
               <a:rPr sz="990" b="0" i="0">
@@ -16355,7 +16547,13 @@
               </a:rPr>
               <a:t>• 주인공이 없는 현장의 사건 서술 불가</a:t>
             </a:r>
-            <a:br/>
+          </a:p>
+          <a:p>
+            <a:pPr algn="l">
+              <a:lnSpc>
+                <a:spcPct val="122000"/>
+              </a:lnSpc>
+            </a:pPr>
             <a:r>
               <a:rPr sz="990" b="0" i="0">
                 <a:solidFill>
@@ -16441,6 +16639,9 @@
               <a:lnSpc>
                 <a:spcPct val="122000"/>
               </a:lnSpc>
+              <a:spcAft>
+                <a:spcPts val="118"/>
+              </a:spcAft>
             </a:pPr>
             <a:r>
               <a:rPr sz="990" b="0" i="0">
@@ -16452,7 +16653,13 @@
               </a:rPr>
               <a:t>청춘 성장소설, 느와르,</a:t>
             </a:r>
-            <a:br/>
+          </a:p>
+          <a:p>
+            <a:pPr algn="l">
+              <a:lnSpc>
+                <a:spcPct val="122000"/>
+              </a:lnSpc>
+            </a:pPr>
             <a:r>
               <a:rPr sz="990" b="0" i="0">
                 <a:solidFill>
@@ -16538,6 +16745,9 @@
               <a:lnSpc>
                 <a:spcPct val="122000"/>
               </a:lnSpc>
+              <a:spcAft>
+                <a:spcPts val="126"/>
+              </a:spcAft>
             </a:pPr>
             <a:r>
               <a:rPr sz="1050" b="1" i="0">
@@ -16549,7 +16759,13 @@
               </a:rPr>
               <a:t>3인칭 제한 시점</a:t>
             </a:r>
-            <a:br/>
+          </a:p>
+          <a:p>
+            <a:pPr algn="l">
+              <a:lnSpc>
+                <a:spcPct val="122000"/>
+              </a:lnSpc>
+            </a:pPr>
             <a:r>
               <a:rPr sz="1050" b="1" i="0">
                 <a:solidFill>
@@ -16721,6 +16937,9 @@
               <a:lnSpc>
                 <a:spcPct val="122000"/>
               </a:lnSpc>
+              <a:spcAft>
+                <a:spcPts val="118"/>
+              </a:spcAft>
             </a:pPr>
             <a:r>
               <a:rPr sz="990" b="0" i="0">
@@ -16732,7 +16951,13 @@
               </a:rPr>
               <a:t>• 1인칭의 깊은 정서적 몰입감과 3인칭의 객관적 묘사력을 동시에 확보</a:t>
             </a:r>
-            <a:br/>
+          </a:p>
+          <a:p>
+            <a:pPr algn="l">
+              <a:lnSpc>
+                <a:spcPct val="122000"/>
+              </a:lnSpc>
+            </a:pPr>
             <a:r>
               <a:rPr sz="990" b="0" i="0">
                 <a:solidFill>
@@ -16904,6 +17129,9 @@
               <a:lnSpc>
                 <a:spcPct val="122000"/>
               </a:lnSpc>
+              <a:spcAft>
+                <a:spcPts val="118"/>
+              </a:spcAft>
             </a:pPr>
             <a:r>
               <a:rPr sz="990" b="0" i="0">
@@ -16915,7 +17143,13 @@
               </a:rPr>
               <a:t>현대 문학 전반, 장르소설,</a:t>
             </a:r>
-            <a:br/>
+          </a:p>
+          <a:p>
+            <a:pPr algn="l">
+              <a:lnSpc>
+                <a:spcPct val="122000"/>
+              </a:lnSpc>
+            </a:pPr>
             <a:r>
               <a:rPr sz="990" b="0" i="0">
                 <a:solidFill>
@@ -17001,6 +17235,9 @@
               <a:lnSpc>
                 <a:spcPct val="122000"/>
               </a:lnSpc>
+              <a:spcAft>
+                <a:spcPts val="126"/>
+              </a:spcAft>
             </a:pPr>
             <a:r>
               <a:rPr sz="1050" b="1" i="0">
@@ -17012,7 +17249,13 @@
               </a:rPr>
               <a:t>3인칭 전지적 시점</a:t>
             </a:r>
-            <a:br/>
+          </a:p>
+          <a:p>
+            <a:pPr algn="l">
+              <a:lnSpc>
+                <a:spcPct val="122000"/>
+              </a:lnSpc>
+            </a:pPr>
             <a:r>
               <a:rPr sz="1050" b="1" i="0">
                 <a:solidFill>
@@ -17184,6 +17427,9 @@
               <a:lnSpc>
                 <a:spcPct val="122000"/>
               </a:lnSpc>
+              <a:spcAft>
+                <a:spcPts val="118"/>
+              </a:spcAft>
             </a:pPr>
             <a:r>
               <a:rPr sz="990" b="0" i="0">
@@ -17195,7 +17441,13 @@
               </a:rPr>
               <a:t>• 방대한 세계관과 시대상을 조망</a:t>
             </a:r>
-            <a:br/>
+          </a:p>
+          <a:p>
+            <a:pPr algn="l">
+              <a:lnSpc>
+                <a:spcPct val="122000"/>
+              </a:lnSpc>
+            </a:pPr>
             <a:r>
               <a:rPr sz="990" b="0" i="0">
                 <a:solidFill>
@@ -17367,6 +17619,9 @@
               <a:lnSpc>
                 <a:spcPct val="122000"/>
               </a:lnSpc>
+              <a:spcAft>
+                <a:spcPts val="118"/>
+              </a:spcAft>
             </a:pPr>
             <a:r>
               <a:rPr sz="990" b="0" i="0">
@@ -17378,7 +17633,13 @@
               </a:rPr>
               <a:t>대하 역사소설, 가족 사가(Saga),</a:t>
             </a:r>
-            <a:br/>
+          </a:p>
+          <a:p>
+            <a:pPr algn="l">
+              <a:lnSpc>
+                <a:spcPct val="122000"/>
+              </a:lnSpc>
+            </a:pPr>
             <a:r>
               <a:rPr sz="990" b="0" i="0">
                 <a:solidFill>
@@ -17464,6 +17725,9 @@
               <a:lnSpc>
                 <a:spcPct val="122000"/>
               </a:lnSpc>
+              <a:spcAft>
+                <a:spcPts val="126"/>
+              </a:spcAft>
             </a:pPr>
             <a:r>
               <a:rPr sz="1050" b="1" i="0">
@@ -17475,7 +17739,13 @@
               </a:rPr>
               <a:t>다중 교차 시점</a:t>
             </a:r>
-            <a:br/>
+          </a:p>
+          <a:p>
+            <a:pPr algn="l">
+              <a:lnSpc>
+                <a:spcPct val="122000"/>
+              </a:lnSpc>
+            </a:pPr>
             <a:r>
               <a:rPr sz="1050" b="1" i="0">
                 <a:solidFill>
@@ -17647,6 +17917,9 @@
               <a:lnSpc>
                 <a:spcPct val="122000"/>
               </a:lnSpc>
+              <a:spcAft>
+                <a:spcPts val="118"/>
+              </a:spcAft>
             </a:pPr>
             <a:r>
               <a:rPr sz="990" b="0" i="0">
@@ -17658,7 +17931,13 @@
               </a:rPr>
               <a:t>• 주인공과 적대자 양측의 정당성 부여</a:t>
             </a:r>
-            <a:br/>
+          </a:p>
+          <a:p>
+            <a:pPr algn="l">
+              <a:lnSpc>
+                <a:spcPct val="122000"/>
+              </a:lnSpc>
+            </a:pPr>
             <a:r>
               <a:rPr sz="990" b="0" i="0">
                 <a:solidFill>
@@ -17744,6 +18023,9 @@
               <a:lnSpc>
                 <a:spcPct val="122000"/>
               </a:lnSpc>
+              <a:spcAft>
+                <a:spcPts val="106"/>
+              </a:spcAft>
             </a:pPr>
             <a:r>
               <a:rPr sz="890" b="0" i="0">
@@ -17755,7 +18037,13 @@
               </a:rPr>
               <a:t>• 시점 인물 간 목소리가 비슷하면 독자가 화자를 혼동</a:t>
             </a:r>
-            <a:br/>
+          </a:p>
+          <a:p>
+            <a:pPr algn="l">
+              <a:lnSpc>
+                <a:spcPct val="122000"/>
+              </a:lnSpc>
+            </a:pPr>
             <a:r>
               <a:rPr sz="890" b="0" i="0">
                 <a:solidFill>
@@ -17841,6 +18129,9 @@
               <a:lnSpc>
                 <a:spcPct val="122000"/>
               </a:lnSpc>
+              <a:spcAft>
+                <a:spcPts val="118"/>
+              </a:spcAft>
             </a:pPr>
             <a:r>
               <a:rPr sz="990" b="0" i="0">
@@ -17852,7 +18143,13 @@
               </a:rPr>
               <a:t>군상극, 범죄 스릴러,</a:t>
             </a:r>
-            <a:br/>
+          </a:p>
+          <a:p>
+            <a:pPr algn="l">
+              <a:lnSpc>
+                <a:spcPct val="122000"/>
+              </a:lnSpc>
+            </a:pPr>
             <a:r>
               <a:rPr sz="990" b="0" i="0">
                 <a:solidFill>
@@ -20532,6 +20829,9 @@
               <a:lnSpc>
                 <a:spcPct val="132000"/>
               </a:lnSpc>
+              <a:spcAft>
+                <a:spcPts val="108"/>
+              </a:spcAft>
             </a:pPr>
             <a:r>
               <a:rPr sz="900" b="0" i="0">
@@ -20543,7 +20843,16 @@
               </a:rPr>
               <a:t>“초고를 쓸 때는 내면의 편집자를 방문 밖에 가두어라.”</a:t>
             </a:r>
-            <a:br/>
+          </a:p>
+          <a:p>
+            <a:pPr algn="l">
+              <a:lnSpc>
+                <a:spcPct val="132000"/>
+              </a:lnSpc>
+              <a:spcAft>
+                <a:spcPts val="108"/>
+              </a:spcAft>
+            </a:pPr>
             <a:r>
               <a:rPr sz="900" b="0" i="0">
                 <a:solidFill>
@@ -20554,7 +20863,13 @@
               </a:rPr>
               <a:t/>
             </a:r>
-            <a:br/>
+          </a:p>
+          <a:p>
+            <a:pPr algn="l">
+              <a:lnSpc>
+                <a:spcPct val="132000"/>
+              </a:lnSpc>
+            </a:pPr>
             <a:r>
               <a:rPr sz="900" b="0" i="0">
                 <a:solidFill>
@@ -20934,9 +21249,12 @@
               <a:lnSpc>
                 <a:spcPct val="125000"/>
               </a:lnSpc>
-            </a:pPr>
-            <a:r>
-              <a:rPr sz="930" b="0" i="0">
+              <a:spcAft>
+                <a:spcPts val="105"/>
+              </a:spcAft>
+            </a:pPr>
+            <a:r>
+              <a:rPr sz="880" b="0" i="0">
                 <a:solidFill>
                   <a:srgbClr val="555E6C"/>
                 </a:solidFill>
@@ -20945,9 +21263,15 @@
               </a:rPr>
               <a:t>• 기획·구조 설계 (20%)  • 초고 집필 (30%)</a:t>
             </a:r>
-            <a:br/>
-            <a:r>
-              <a:rPr sz="930" b="0" i="0">
+          </a:p>
+          <a:p>
+            <a:pPr algn="l">
+              <a:lnSpc>
+                <a:spcPct val="125000"/>
+              </a:lnSpc>
+            </a:pPr>
+            <a:r>
+              <a:rPr sz="880" b="0" i="0">
                 <a:solidFill>
                   <a:srgbClr val="555E6C"/>
                 </a:solidFill>
@@ -21369,9 +21693,12 @@
               <a:lnSpc>
                 <a:spcPct val="126000"/>
               </a:lnSpc>
-            </a:pPr>
-            <a:r>
-              <a:rPr sz="980" b="0" i="0">
+              <a:spcAft>
+                <a:spcPts val="111"/>
+              </a:spcAft>
+            </a:pPr>
+            <a:r>
+              <a:rPr sz="930" b="0" i="0">
                 <a:solidFill>
                   <a:srgbClr val="555E6C"/>
                 </a:solidFill>
@@ -21380,9 +21707,18 @@
               </a:rPr>
               <a:t>✓ 주인공의 욕망과 행동이 시작부터 클라이맥스까지 일관되게 이어지는가?</a:t>
             </a:r>
-            <a:br/>
-            <a:r>
-              <a:rPr sz="980" b="0" i="0">
+          </a:p>
+          <a:p>
+            <a:pPr algn="l">
+              <a:lnSpc>
+                <a:spcPct val="126000"/>
+              </a:lnSpc>
+              <a:spcAft>
+                <a:spcPts val="111"/>
+              </a:spcAft>
+            </a:pPr>
+            <a:r>
+              <a:rPr sz="930" b="0" i="0">
                 <a:solidFill>
                   <a:srgbClr val="555E6C"/>
                 </a:solidFill>
@@ -21391,9 +21727,15 @@
               </a:rPr>
               <a:t>✓ 중반부가 늘어지지 않는가? (기능이 겹치는 장면과 인물을 과감히 통합·삭제)</a:t>
             </a:r>
-            <a:br/>
-            <a:r>
-              <a:rPr sz="980" b="0" i="0">
+          </a:p>
+          <a:p>
+            <a:pPr algn="l">
+              <a:lnSpc>
+                <a:spcPct val="126000"/>
+              </a:lnSpc>
+            </a:pPr>
+            <a:r>
+              <a:rPr sz="930" b="0" i="0">
                 <a:solidFill>
                   <a:srgbClr val="555E6C"/>
                 </a:solidFill>
@@ -21689,9 +22031,12 @@
               <a:lnSpc>
                 <a:spcPct val="126000"/>
               </a:lnSpc>
-            </a:pPr>
-            <a:r>
-              <a:rPr sz="980" b="0" i="0">
+              <a:spcAft>
+                <a:spcPts val="111"/>
+              </a:spcAft>
+            </a:pPr>
+            <a:r>
+              <a:rPr sz="930" b="0" i="0">
                 <a:solidFill>
                   <a:srgbClr val="555E6C"/>
                 </a:solidFill>
@@ -21700,9 +22045,18 @@
               </a:rPr>
               <a:t>✓ 각 장면의 첫 문장이 흥미롭고 마지막 문장이 다음 장면을 궁금하게 만드는가?</a:t>
             </a:r>
-            <a:br/>
-            <a:r>
-              <a:rPr sz="980" b="0" i="0">
+          </a:p>
+          <a:p>
+            <a:pPr algn="l">
+              <a:lnSpc>
+                <a:spcPct val="126000"/>
+              </a:lnSpc>
+              <a:spcAft>
+                <a:spcPts val="111"/>
+              </a:spcAft>
+            </a:pPr>
+            <a:r>
+              <a:rPr sz="930" b="0" i="0">
                 <a:solidFill>
                   <a:srgbClr val="555E6C"/>
                 </a:solidFill>
@@ -21711,9 +22065,15 @@
               </a:rPr>
               <a:t>✓ 한 장면 안에서 시점(POV)이 흔들리거나 설명(Tell)이 과도한 구간은 없는가?</a:t>
             </a:r>
-            <a:br/>
-            <a:r>
-              <a:rPr sz="980" b="0" i="0">
+          </a:p>
+          <a:p>
+            <a:pPr algn="l">
+              <a:lnSpc>
+                <a:spcPct val="126000"/>
+              </a:lnSpc>
+            </a:pPr>
+            <a:r>
+              <a:rPr sz="930" b="0" i="0">
                 <a:solidFill>
                   <a:srgbClr val="555E6C"/>
                 </a:solidFill>
@@ -22009,9 +22369,12 @@
               <a:lnSpc>
                 <a:spcPct val="126000"/>
               </a:lnSpc>
-            </a:pPr>
-            <a:r>
-              <a:rPr sz="980" b="0" i="0">
+              <a:spcAft>
+                <a:spcPts val="111"/>
+              </a:spcAft>
+            </a:pPr>
+            <a:r>
+              <a:rPr sz="930" b="0" i="0">
                 <a:solidFill>
                   <a:srgbClr val="555E6C"/>
                 </a:solidFill>
@@ -22020,9 +22383,18 @@
               </a:rPr>
               <a:t>✓ 상투적 부사(‘매우, 정말, 문득, 갑자기’)와 번역투(‘~에 다름 아니다, ~로부터’) 제거</a:t>
             </a:r>
-            <a:br/>
-            <a:r>
-              <a:rPr sz="980" b="0" i="0">
+          </a:p>
+          <a:p>
+            <a:pPr algn="l">
+              <a:lnSpc>
+                <a:spcPct val="126000"/>
+              </a:lnSpc>
+              <a:spcAft>
+                <a:spcPts val="111"/>
+              </a:spcAft>
+            </a:pPr>
+            <a:r>
+              <a:rPr sz="930" b="0" i="0">
                 <a:solidFill>
                   <a:srgbClr val="555E6C"/>
                 </a:solidFill>
@@ -22031,9 +22403,15 @@
               </a:rPr>
               <a:t>✓ 한 문장에 중복된 주어(‘그는 ~ 그의 ~’)와 불필요한 피동형(‘~되어졌다’) 교정</a:t>
             </a:r>
-            <a:br/>
-            <a:r>
-              <a:rPr sz="980" b="0" i="0">
+          </a:p>
+          <a:p>
+            <a:pPr algn="l">
+              <a:lnSpc>
+                <a:spcPct val="126000"/>
+              </a:lnSpc>
+            </a:pPr>
+            <a:r>
+              <a:rPr sz="930" b="0" i="0">
                 <a:solidFill>
                   <a:srgbClr val="555E6C"/>
                 </a:solidFill>

--- a/소설쓰기_가이드.pptx
+++ b/소설쓰기_가이드.pptx
@@ -3239,7 +3239,7 @@
         </p:spPr>
         <p:txBody>
           <a:bodyPr wrap="square" anchor="ctr" lIns="54864" rIns="54864" tIns="38404" bIns="38404">
-            <a:normAutofit/>
+            <a:noAutofit/>
           </a:bodyPr>
           <a:lstStyle/>
           <a:p>
@@ -3279,7 +3279,7 @@
         </p:spPr>
         <p:txBody>
           <a:bodyPr wrap="square" anchor="t" lIns="18288" rIns="18288" tIns="12801" bIns="12801">
-            <a:normAutofit/>
+            <a:noAutofit/>
           </a:bodyPr>
           <a:lstStyle/>
           <a:p>
@@ -3383,7 +3383,7 @@
         </p:spPr>
         <p:txBody>
           <a:bodyPr wrap="square" anchor="t" lIns="18288" rIns="18288" tIns="12801" bIns="12801">
-            <a:normAutofit/>
+            <a:noAutofit/>
           </a:bodyPr>
           <a:lstStyle/>
           <a:p>
@@ -3535,7 +3535,7 @@
         </p:spPr>
         <p:txBody>
           <a:bodyPr wrap="square" anchor="t" lIns="9144" rIns="9144" tIns="6400" bIns="6400">
-            <a:normAutofit/>
+            <a:noAutofit/>
           </a:bodyPr>
           <a:lstStyle/>
           <a:p>
@@ -3575,7 +3575,7 @@
         </p:spPr>
         <p:txBody>
           <a:bodyPr wrap="square" anchor="t" lIns="9144" rIns="9144" tIns="6400" bIns="6400">
-            <a:normAutofit/>
+            <a:noAutofit/>
           </a:bodyPr>
           <a:lstStyle/>
           <a:p>
@@ -3615,7 +3615,7 @@
         </p:spPr>
         <p:txBody>
           <a:bodyPr wrap="square" anchor="t" lIns="9144" rIns="9144" tIns="6400" bIns="6400">
-            <a:normAutofit/>
+            <a:noAutofit/>
           </a:bodyPr>
           <a:lstStyle/>
           <a:p>
@@ -3747,7 +3747,7 @@
         </p:spPr>
         <p:txBody>
           <a:bodyPr wrap="square" anchor="t" lIns="9144" rIns="9144" tIns="6400" bIns="6400">
-            <a:normAutofit/>
+            <a:noAutofit/>
           </a:bodyPr>
           <a:lstStyle/>
           <a:p>
@@ -3787,7 +3787,7 @@
         </p:spPr>
         <p:txBody>
           <a:bodyPr wrap="square" anchor="t" lIns="9144" rIns="9144" tIns="6400" bIns="6400">
-            <a:normAutofit/>
+            <a:noAutofit/>
           </a:bodyPr>
           <a:lstStyle/>
           <a:p>
@@ -3827,7 +3827,7 @@
         </p:spPr>
         <p:txBody>
           <a:bodyPr wrap="square" anchor="t" lIns="9144" rIns="9144" tIns="6400" bIns="6400">
-            <a:normAutofit/>
+            <a:noAutofit/>
           </a:bodyPr>
           <a:lstStyle/>
           <a:p>
@@ -3959,7 +3959,7 @@
         </p:spPr>
         <p:txBody>
           <a:bodyPr wrap="square" anchor="t" lIns="9144" rIns="9144" tIns="6400" bIns="6400">
-            <a:normAutofit/>
+            <a:noAutofit/>
           </a:bodyPr>
           <a:lstStyle/>
           <a:p>
@@ -3999,7 +3999,7 @@
         </p:spPr>
         <p:txBody>
           <a:bodyPr wrap="square" anchor="t" lIns="9144" rIns="9144" tIns="6400" bIns="6400">
-            <a:normAutofit/>
+            <a:noAutofit/>
           </a:bodyPr>
           <a:lstStyle/>
           <a:p>
@@ -4039,7 +4039,7 @@
         </p:spPr>
         <p:txBody>
           <a:bodyPr wrap="square" anchor="t" lIns="9144" rIns="9144" tIns="6400" bIns="6400">
-            <a:normAutofit/>
+            <a:noAutofit/>
           </a:bodyPr>
           <a:lstStyle/>
           <a:p>
@@ -4171,7 +4171,7 @@
         </p:spPr>
         <p:txBody>
           <a:bodyPr wrap="square" anchor="t" lIns="9144" rIns="9144" tIns="6400" bIns="6400">
-            <a:normAutofit/>
+            <a:noAutofit/>
           </a:bodyPr>
           <a:lstStyle/>
           <a:p>
@@ -4211,7 +4211,7 @@
         </p:spPr>
         <p:txBody>
           <a:bodyPr wrap="square" anchor="t" lIns="9144" rIns="9144" tIns="6400" bIns="6400">
-            <a:normAutofit/>
+            <a:noAutofit/>
           </a:bodyPr>
           <a:lstStyle/>
           <a:p>
@@ -4251,7 +4251,7 @@
         </p:spPr>
         <p:txBody>
           <a:bodyPr wrap="square" anchor="t" lIns="9144" rIns="9144" tIns="6400" bIns="6400">
-            <a:normAutofit/>
+            <a:noAutofit/>
           </a:bodyPr>
           <a:lstStyle/>
           <a:p>
@@ -4317,7 +4317,7 @@
         </p:spPr>
         <p:txBody>
           <a:bodyPr wrap="square" anchor="t" lIns="18288" rIns="18288" tIns="12801" bIns="12801">
-            <a:normAutofit/>
+            <a:noAutofit/>
           </a:bodyPr>
           <a:lstStyle/>
           <a:p>
@@ -4357,7 +4357,7 @@
         </p:spPr>
         <p:txBody>
           <a:bodyPr wrap="square" anchor="t" lIns="18288" rIns="18288" tIns="12801" bIns="12801">
-            <a:normAutofit/>
+            <a:noAutofit/>
           </a:bodyPr>
           <a:lstStyle/>
           <a:p>
@@ -4397,7 +4397,7 @@
         </p:spPr>
         <p:txBody>
           <a:bodyPr wrap="square" anchor="t" lIns="18288" rIns="18288" tIns="12801" bIns="12801">
-            <a:normAutofit/>
+            <a:noAutofit/>
           </a:bodyPr>
           <a:lstStyle/>
           <a:p>
@@ -4569,7 +4569,7 @@
         </p:spPr>
         <p:txBody>
           <a:bodyPr wrap="square" anchor="t" lIns="9144" rIns="9144" tIns="6400" bIns="6400">
-            <a:normAutofit/>
+            <a:noAutofit/>
           </a:bodyPr>
           <a:lstStyle/>
           <a:p>
@@ -4609,7 +4609,7 @@
         </p:spPr>
         <p:txBody>
           <a:bodyPr wrap="square" anchor="t" lIns="9144" rIns="9144" tIns="6400" bIns="6400">
-            <a:normAutofit/>
+            <a:noAutofit/>
           </a:bodyPr>
           <a:lstStyle/>
           <a:p>
@@ -4741,7 +4741,7 @@
         </p:spPr>
         <p:txBody>
           <a:bodyPr wrap="square" anchor="t" lIns="9144" rIns="9144" tIns="6400" bIns="6400">
-            <a:normAutofit/>
+            <a:noAutofit/>
           </a:bodyPr>
           <a:lstStyle/>
           <a:p>
@@ -4781,7 +4781,7 @@
         </p:spPr>
         <p:txBody>
           <a:bodyPr wrap="square" anchor="t" lIns="9144" rIns="9144" tIns="6400" bIns="6400">
-            <a:normAutofit/>
+            <a:noAutofit/>
           </a:bodyPr>
           <a:lstStyle/>
           <a:p>
@@ -4869,7 +4869,7 @@
         </p:spPr>
         <p:txBody>
           <a:bodyPr wrap="square" anchor="ctr" lIns="9144" rIns="9144" tIns="6400" bIns="6400">
-            <a:normAutofit/>
+            <a:noAutofit/>
           </a:bodyPr>
           <a:lstStyle/>
           <a:p>
@@ -4909,7 +4909,7 @@
         </p:spPr>
         <p:txBody>
           <a:bodyPr wrap="square" anchor="t" lIns="9144" rIns="9144" tIns="6400" bIns="6400">
-            <a:normAutofit/>
+            <a:noAutofit/>
           </a:bodyPr>
           <a:lstStyle/>
           <a:p>
@@ -5081,7 +5081,7 @@
         </p:spPr>
         <p:txBody>
           <a:bodyPr wrap="square" anchor="t" lIns="9144" rIns="9144" tIns="6400" bIns="6400">
-            <a:normAutofit/>
+            <a:noAutofit/>
           </a:bodyPr>
           <a:lstStyle/>
           <a:p>
@@ -5121,7 +5121,7 @@
         </p:spPr>
         <p:txBody>
           <a:bodyPr wrap="square" anchor="t" lIns="9144" rIns="9144" tIns="6400" bIns="6400">
-            <a:normAutofit/>
+            <a:noAutofit/>
           </a:bodyPr>
           <a:lstStyle/>
           <a:p>
@@ -5209,7 +5209,7 @@
         </p:spPr>
         <p:txBody>
           <a:bodyPr wrap="square" anchor="ctr" lIns="9144" rIns="9144" tIns="6400" bIns="6400">
-            <a:normAutofit/>
+            <a:noAutofit/>
           </a:bodyPr>
           <a:lstStyle/>
           <a:p>
@@ -5249,7 +5249,7 @@
         </p:spPr>
         <p:txBody>
           <a:bodyPr wrap="square" anchor="t" lIns="9144" rIns="9144" tIns="6400" bIns="6400">
-            <a:normAutofit/>
+            <a:noAutofit/>
           </a:bodyPr>
           <a:lstStyle/>
           <a:p>
@@ -5421,7 +5421,7 @@
         </p:spPr>
         <p:txBody>
           <a:bodyPr wrap="square" anchor="t" lIns="9144" rIns="9144" tIns="6400" bIns="6400">
-            <a:normAutofit/>
+            <a:noAutofit/>
           </a:bodyPr>
           <a:lstStyle/>
           <a:p>
@@ -5461,7 +5461,7 @@
         </p:spPr>
         <p:txBody>
           <a:bodyPr wrap="square" anchor="t" lIns="9144" rIns="9144" tIns="6400" bIns="6400">
-            <a:normAutofit/>
+            <a:noAutofit/>
           </a:bodyPr>
           <a:lstStyle/>
           <a:p>
@@ -5549,7 +5549,7 @@
         </p:spPr>
         <p:txBody>
           <a:bodyPr wrap="square" anchor="ctr" lIns="9144" rIns="9144" tIns="6400" bIns="6400">
-            <a:normAutofit/>
+            <a:noAutofit/>
           </a:bodyPr>
           <a:lstStyle/>
           <a:p>
@@ -5589,7 +5589,7 @@
         </p:spPr>
         <p:txBody>
           <a:bodyPr wrap="square" anchor="t" lIns="9144" rIns="9144" tIns="6400" bIns="6400">
-            <a:normAutofit/>
+            <a:noAutofit/>
           </a:bodyPr>
           <a:lstStyle/>
           <a:p>
@@ -5715,7 +5715,7 @@
         </p:spPr>
         <p:txBody>
           <a:bodyPr wrap="square" anchor="ctr" lIns="54864" rIns="54864" tIns="38404" bIns="38404">
-            <a:normAutofit/>
+            <a:noAutofit/>
           </a:bodyPr>
           <a:lstStyle/>
           <a:p>
@@ -5755,7 +5755,7 @@
         </p:spPr>
         <p:txBody>
           <a:bodyPr wrap="square" anchor="ctr" lIns="54864" rIns="54864" tIns="38404" bIns="38404">
-            <a:normAutofit/>
+            <a:noAutofit/>
           </a:bodyPr>
           <a:lstStyle/>
           <a:p>
@@ -5821,7 +5821,7 @@
         </p:spPr>
         <p:txBody>
           <a:bodyPr wrap="square" anchor="t" lIns="18288" rIns="18288" tIns="12801" bIns="12801">
-            <a:normAutofit/>
+            <a:noAutofit/>
           </a:bodyPr>
           <a:lstStyle/>
           <a:p>
@@ -5861,7 +5861,7 @@
         </p:spPr>
         <p:txBody>
           <a:bodyPr wrap="square" anchor="t" lIns="18288" rIns="18288" tIns="12801" bIns="12801">
-            <a:normAutofit/>
+            <a:noAutofit/>
           </a:bodyPr>
           <a:lstStyle/>
           <a:p>
@@ -5901,7 +5901,7 @@
         </p:spPr>
         <p:txBody>
           <a:bodyPr wrap="square" anchor="t" lIns="18288" rIns="18288" tIns="12801" bIns="12801">
-            <a:normAutofit/>
+            <a:noAutofit/>
           </a:bodyPr>
           <a:lstStyle/>
           <a:p>
@@ -6073,7 +6073,7 @@
         </p:spPr>
         <p:txBody>
           <a:bodyPr wrap="square" anchor="t" lIns="9144" rIns="9144" tIns="6400" bIns="6400">
-            <a:normAutofit/>
+            <a:noAutofit/>
           </a:bodyPr>
           <a:lstStyle/>
           <a:p>
@@ -6113,7 +6113,7 @@
         </p:spPr>
         <p:txBody>
           <a:bodyPr wrap="square" anchor="t" lIns="9144" rIns="9144" tIns="6400" bIns="6400">
-            <a:normAutofit/>
+            <a:noAutofit/>
           </a:bodyPr>
           <a:lstStyle/>
           <a:p>
@@ -6291,7 +6291,7 @@
         </p:spPr>
         <p:txBody>
           <a:bodyPr wrap="square" anchor="ctr" lIns="54864" rIns="54864" tIns="38404" bIns="38404">
-            <a:normAutofit/>
+            <a:noAutofit/>
           </a:bodyPr>
           <a:lstStyle/>
           <a:p>
@@ -6331,7 +6331,7 @@
         </p:spPr>
         <p:txBody>
           <a:bodyPr wrap="square" anchor="t" lIns="9144" rIns="9144" tIns="6400" bIns="6400">
-            <a:normAutofit/>
+            <a:noAutofit/>
           </a:bodyPr>
           <a:lstStyle/>
           <a:p>
@@ -6371,7 +6371,7 @@
         </p:spPr>
         <p:txBody>
           <a:bodyPr wrap="square" anchor="t" lIns="9144" rIns="9144" tIns="6400" bIns="6400">
-            <a:normAutofit/>
+            <a:noAutofit/>
           </a:bodyPr>
           <a:lstStyle/>
           <a:p>
@@ -6411,7 +6411,7 @@
         </p:spPr>
         <p:txBody>
           <a:bodyPr wrap="square" anchor="t" lIns="18288" rIns="18288" tIns="12801" bIns="12801">
-            <a:normAutofit/>
+            <a:noAutofit/>
           </a:bodyPr>
           <a:lstStyle/>
           <a:p>
@@ -6537,7 +6537,7 @@
         </p:spPr>
         <p:txBody>
           <a:bodyPr wrap="square" anchor="ctr" lIns="9144" rIns="9144" tIns="6400" bIns="6400">
-            <a:normAutofit/>
+            <a:noAutofit/>
           </a:bodyPr>
           <a:lstStyle/>
           <a:p>
@@ -6715,7 +6715,7 @@
         </p:spPr>
         <p:txBody>
           <a:bodyPr wrap="square" anchor="ctr" lIns="54864" rIns="54864" tIns="38404" bIns="38404">
-            <a:normAutofit/>
+            <a:noAutofit/>
           </a:bodyPr>
           <a:lstStyle/>
           <a:p>
@@ -6755,7 +6755,7 @@
         </p:spPr>
         <p:txBody>
           <a:bodyPr wrap="square" anchor="t" lIns="9144" rIns="9144" tIns="6400" bIns="6400">
-            <a:normAutofit/>
+            <a:noAutofit/>
           </a:bodyPr>
           <a:lstStyle/>
           <a:p>
@@ -6795,7 +6795,7 @@
         </p:spPr>
         <p:txBody>
           <a:bodyPr wrap="square" anchor="t" lIns="9144" rIns="9144" tIns="6400" bIns="6400">
-            <a:normAutofit/>
+            <a:noAutofit/>
           </a:bodyPr>
           <a:lstStyle/>
           <a:p>
@@ -6835,7 +6835,7 @@
         </p:spPr>
         <p:txBody>
           <a:bodyPr wrap="square" anchor="t" lIns="18288" rIns="18288" tIns="12801" bIns="12801">
-            <a:normAutofit/>
+            <a:noAutofit/>
           </a:bodyPr>
           <a:lstStyle/>
           <a:p>
@@ -6961,7 +6961,7 @@
         </p:spPr>
         <p:txBody>
           <a:bodyPr wrap="square" anchor="ctr" lIns="9144" rIns="9144" tIns="6400" bIns="6400">
-            <a:normAutofit/>
+            <a:noAutofit/>
           </a:bodyPr>
           <a:lstStyle/>
           <a:p>
@@ -7139,7 +7139,7 @@
         </p:spPr>
         <p:txBody>
           <a:bodyPr wrap="square" anchor="ctr" lIns="54864" rIns="54864" tIns="38404" bIns="38404">
-            <a:normAutofit/>
+            <a:noAutofit/>
           </a:bodyPr>
           <a:lstStyle/>
           <a:p>
@@ -7179,7 +7179,7 @@
         </p:spPr>
         <p:txBody>
           <a:bodyPr wrap="square" anchor="t" lIns="9144" rIns="9144" tIns="6400" bIns="6400">
-            <a:normAutofit/>
+            <a:noAutofit/>
           </a:bodyPr>
           <a:lstStyle/>
           <a:p>
@@ -7219,7 +7219,7 @@
         </p:spPr>
         <p:txBody>
           <a:bodyPr wrap="square" anchor="t" lIns="9144" rIns="9144" tIns="6400" bIns="6400">
-            <a:normAutofit/>
+            <a:noAutofit/>
           </a:bodyPr>
           <a:lstStyle/>
           <a:p>
@@ -7259,7 +7259,7 @@
         </p:spPr>
         <p:txBody>
           <a:bodyPr wrap="square" anchor="t" lIns="18288" rIns="18288" tIns="12801" bIns="12801">
-            <a:normAutofit/>
+            <a:noAutofit/>
           </a:bodyPr>
           <a:lstStyle/>
           <a:p>
@@ -7385,7 +7385,7 @@
         </p:spPr>
         <p:txBody>
           <a:bodyPr wrap="square" anchor="ctr" lIns="9144" rIns="9144" tIns="6400" bIns="6400">
-            <a:normAutofit/>
+            <a:noAutofit/>
           </a:bodyPr>
           <a:lstStyle/>
           <a:p>
@@ -7563,7 +7563,7 @@
         </p:spPr>
         <p:txBody>
           <a:bodyPr wrap="square" anchor="ctr" lIns="54864" rIns="54864" tIns="38404" bIns="38404">
-            <a:normAutofit/>
+            <a:noAutofit/>
           </a:bodyPr>
           <a:lstStyle/>
           <a:p>
@@ -7603,7 +7603,7 @@
         </p:spPr>
         <p:txBody>
           <a:bodyPr wrap="square" anchor="t" lIns="9144" rIns="9144" tIns="6400" bIns="6400">
-            <a:normAutofit/>
+            <a:noAutofit/>
           </a:bodyPr>
           <a:lstStyle/>
           <a:p>
@@ -7643,7 +7643,7 @@
         </p:spPr>
         <p:txBody>
           <a:bodyPr wrap="square" anchor="t" lIns="9144" rIns="9144" tIns="6400" bIns="6400">
-            <a:normAutofit/>
+            <a:noAutofit/>
           </a:bodyPr>
           <a:lstStyle/>
           <a:p>
@@ -7683,7 +7683,7 @@
         </p:spPr>
         <p:txBody>
           <a:bodyPr wrap="square" anchor="t" lIns="18288" rIns="18288" tIns="12801" bIns="12801">
-            <a:normAutofit/>
+            <a:noAutofit/>
           </a:bodyPr>
           <a:lstStyle/>
           <a:p>
@@ -7809,7 +7809,7 @@
         </p:spPr>
         <p:txBody>
           <a:bodyPr wrap="square" anchor="ctr" lIns="9144" rIns="9144" tIns="6400" bIns="6400">
-            <a:normAutofit/>
+            <a:noAutofit/>
           </a:bodyPr>
           <a:lstStyle/>
           <a:p>
@@ -7895,7 +7895,7 @@
         </p:spPr>
         <p:txBody>
           <a:bodyPr wrap="square" anchor="ctr" lIns="54864" rIns="54864" tIns="38404" bIns="38404">
-            <a:normAutofit/>
+            <a:noAutofit/>
           </a:bodyPr>
           <a:lstStyle/>
           <a:p>
@@ -7961,7 +7961,7 @@
         </p:spPr>
         <p:txBody>
           <a:bodyPr wrap="square" anchor="t" lIns="18288" rIns="18288" tIns="12801" bIns="12801">
-            <a:normAutofit/>
+            <a:noAutofit/>
           </a:bodyPr>
           <a:lstStyle/>
           <a:p>
@@ -8001,7 +8001,7 @@
         </p:spPr>
         <p:txBody>
           <a:bodyPr wrap="square" anchor="t" lIns="18288" rIns="18288" tIns="12801" bIns="12801">
-            <a:normAutofit/>
+            <a:noAutofit/>
           </a:bodyPr>
           <a:lstStyle/>
           <a:p>
@@ -8041,7 +8041,7 @@
         </p:spPr>
         <p:txBody>
           <a:bodyPr wrap="square" anchor="t" lIns="18288" rIns="18288" tIns="12801" bIns="12801">
-            <a:normAutofit/>
+            <a:noAutofit/>
           </a:bodyPr>
           <a:lstStyle/>
           <a:p>
@@ -8213,7 +8213,7 @@
         </p:spPr>
         <p:txBody>
           <a:bodyPr wrap="square" anchor="t" lIns="9144" rIns="9144" tIns="6400" bIns="6400">
-            <a:normAutofit/>
+            <a:noAutofit/>
           </a:bodyPr>
           <a:lstStyle/>
           <a:p>
@@ -8253,7 +8253,7 @@
         </p:spPr>
         <p:txBody>
           <a:bodyPr wrap="square" anchor="t" lIns="9144" rIns="9144" tIns="6400" bIns="6400">
-            <a:normAutofit/>
+            <a:noAutofit/>
           </a:bodyPr>
           <a:lstStyle/>
           <a:p>
@@ -8341,7 +8341,7 @@
         </p:spPr>
         <p:txBody>
           <a:bodyPr wrap="square" anchor="t" lIns="9144" rIns="9144" tIns="6400" bIns="6400">
-            <a:normAutofit/>
+            <a:noAutofit/>
           </a:bodyPr>
           <a:lstStyle/>
           <a:p>
@@ -8429,7 +8429,7 @@
         </p:spPr>
         <p:txBody>
           <a:bodyPr wrap="square" anchor="t" lIns="9144" rIns="9144" tIns="6400" bIns="6400">
-            <a:normAutofit/>
+            <a:noAutofit/>
           </a:bodyPr>
           <a:lstStyle/>
           <a:p>
@@ -8469,7 +8469,7 @@
         </p:spPr>
         <p:txBody>
           <a:bodyPr wrap="square" anchor="t" lIns="9144" rIns="9144" tIns="6400" bIns="6400">
-            <a:normAutofit/>
+            <a:noAutofit/>
           </a:bodyPr>
           <a:lstStyle/>
           <a:p>
@@ -8509,7 +8509,7 @@
         </p:spPr>
         <p:txBody>
           <a:bodyPr wrap="square" anchor="t" lIns="54864" rIns="54864" tIns="38404" bIns="38404">
-            <a:normAutofit/>
+            <a:noAutofit/>
           </a:bodyPr>
           <a:lstStyle/>
           <a:p>
@@ -8597,7 +8597,7 @@
         </p:spPr>
         <p:txBody>
           <a:bodyPr wrap="square" anchor="t" lIns="9144" rIns="9144" tIns="6400" bIns="6400">
-            <a:normAutofit/>
+            <a:noAutofit/>
           </a:bodyPr>
           <a:lstStyle/>
           <a:p>
@@ -8637,7 +8637,7 @@
         </p:spPr>
         <p:txBody>
           <a:bodyPr wrap="square" anchor="t" lIns="9144" rIns="9144" tIns="6400" bIns="6400">
-            <a:normAutofit/>
+            <a:noAutofit/>
           </a:bodyPr>
           <a:lstStyle/>
           <a:p>
@@ -8677,7 +8677,7 @@
         </p:spPr>
         <p:txBody>
           <a:bodyPr wrap="square" anchor="t" lIns="54864" rIns="54864" tIns="38404" bIns="38404">
-            <a:normAutofit/>
+            <a:noAutofit/>
           </a:bodyPr>
           <a:lstStyle/>
           <a:p>
@@ -8765,7 +8765,7 @@
         </p:spPr>
         <p:txBody>
           <a:bodyPr wrap="square" anchor="t" lIns="9144" rIns="9144" tIns="6400" bIns="6400">
-            <a:normAutofit/>
+            <a:noAutofit/>
           </a:bodyPr>
           <a:lstStyle/>
           <a:p>
@@ -8805,7 +8805,7 @@
         </p:spPr>
         <p:txBody>
           <a:bodyPr wrap="square" anchor="t" lIns="9144" rIns="9144" tIns="6400" bIns="6400">
-            <a:normAutofit/>
+            <a:noAutofit/>
           </a:bodyPr>
           <a:lstStyle/>
           <a:p>
@@ -8845,7 +8845,7 @@
         </p:spPr>
         <p:txBody>
           <a:bodyPr wrap="square" anchor="t" lIns="54864" rIns="54864" tIns="38404" bIns="38404">
-            <a:normAutofit/>
+            <a:noAutofit/>
           </a:bodyPr>
           <a:lstStyle/>
           <a:p>
@@ -8933,7 +8933,7 @@
         </p:spPr>
         <p:txBody>
           <a:bodyPr wrap="square" anchor="t" lIns="9144" rIns="9144" tIns="6400" bIns="6400">
-            <a:normAutofit/>
+            <a:noAutofit/>
           </a:bodyPr>
           <a:lstStyle/>
           <a:p>
@@ -8973,7 +8973,7 @@
         </p:spPr>
         <p:txBody>
           <a:bodyPr wrap="square" anchor="t" lIns="9144" rIns="9144" tIns="6400" bIns="6400">
-            <a:normAutofit/>
+            <a:noAutofit/>
           </a:bodyPr>
           <a:lstStyle/>
           <a:p>
@@ -9013,7 +9013,7 @@
         </p:spPr>
         <p:txBody>
           <a:bodyPr wrap="square" anchor="t" lIns="9144" rIns="9144" tIns="6400" bIns="6400">
-            <a:normAutofit/>
+            <a:noAutofit/>
           </a:bodyPr>
           <a:lstStyle/>
           <a:p>
@@ -9101,7 +9101,7 @@
         </p:spPr>
         <p:txBody>
           <a:bodyPr wrap="square" anchor="t" lIns="9144" rIns="9144" tIns="6400" bIns="6400">
-            <a:normAutofit/>
+            <a:noAutofit/>
           </a:bodyPr>
           <a:lstStyle/>
           <a:p>
@@ -9141,7 +9141,7 @@
         </p:spPr>
         <p:txBody>
           <a:bodyPr wrap="square" anchor="t" lIns="9144" rIns="9144" tIns="6400" bIns="6400">
-            <a:normAutofit/>
+            <a:noAutofit/>
           </a:bodyPr>
           <a:lstStyle/>
           <a:p>
@@ -9181,7 +9181,7 @@
         </p:spPr>
         <p:txBody>
           <a:bodyPr wrap="square" anchor="t" lIns="54864" rIns="54864" tIns="38404" bIns="38404">
-            <a:normAutofit/>
+            <a:noAutofit/>
           </a:bodyPr>
           <a:lstStyle/>
           <a:p>
@@ -9313,7 +9313,7 @@
         </p:spPr>
         <p:txBody>
           <a:bodyPr wrap="square" anchor="t" lIns="9144" rIns="9144" tIns="6400" bIns="6400">
-            <a:normAutofit/>
+            <a:noAutofit/>
           </a:bodyPr>
           <a:lstStyle/>
           <a:p>
@@ -9399,7 +9399,7 @@
         </p:spPr>
         <p:txBody>
           <a:bodyPr wrap="square" anchor="ctr" lIns="54864" rIns="54864" tIns="38404" bIns="38404">
-            <a:normAutofit/>
+            <a:noAutofit/>
           </a:bodyPr>
           <a:lstStyle/>
           <a:p>
@@ -9439,7 +9439,7 @@
         </p:spPr>
         <p:txBody>
           <a:bodyPr wrap="square" anchor="t" lIns="9144" rIns="9144" tIns="6400" bIns="6400">
-            <a:normAutofit/>
+            <a:noAutofit/>
           </a:bodyPr>
           <a:lstStyle/>
           <a:p>
@@ -9527,7 +9527,7 @@
         </p:spPr>
         <p:txBody>
           <a:bodyPr wrap="square" anchor="t" lIns="9144" rIns="9144" tIns="6400" bIns="6400">
-            <a:normAutofit/>
+            <a:noAutofit/>
           </a:bodyPr>
           <a:lstStyle/>
           <a:p>
@@ -9567,7 +9567,7 @@
         </p:spPr>
         <p:txBody>
           <a:bodyPr wrap="square" anchor="t" lIns="9144" rIns="9144" tIns="6400" bIns="6400">
-            <a:normAutofit/>
+            <a:noAutofit/>
           </a:bodyPr>
           <a:lstStyle/>
           <a:p>
@@ -9607,7 +9607,7 @@
         </p:spPr>
         <p:txBody>
           <a:bodyPr wrap="square" anchor="t" lIns="54864" rIns="54864" tIns="38404" bIns="38404">
-            <a:normAutofit/>
+            <a:noAutofit/>
           </a:bodyPr>
           <a:lstStyle/>
           <a:p>
@@ -9739,7 +9739,7 @@
         </p:spPr>
         <p:txBody>
           <a:bodyPr wrap="square" anchor="t" lIns="9144" rIns="9144" tIns="6400" bIns="6400">
-            <a:normAutofit/>
+            <a:noAutofit/>
           </a:bodyPr>
           <a:lstStyle/>
           <a:p>
@@ -9825,7 +9825,7 @@
         </p:spPr>
         <p:txBody>
           <a:bodyPr wrap="square" anchor="ctr" lIns="54864" rIns="54864" tIns="38404" bIns="38404">
-            <a:normAutofit/>
+            <a:noAutofit/>
           </a:bodyPr>
           <a:lstStyle/>
           <a:p>
@@ -9865,7 +9865,7 @@
         </p:spPr>
         <p:txBody>
           <a:bodyPr wrap="square" anchor="t" lIns="9144" rIns="9144" tIns="6400" bIns="6400">
-            <a:normAutofit/>
+            <a:noAutofit/>
           </a:bodyPr>
           <a:lstStyle/>
           <a:p>
@@ -9953,7 +9953,7 @@
         </p:spPr>
         <p:txBody>
           <a:bodyPr wrap="square" anchor="t" lIns="9144" rIns="9144" tIns="6400" bIns="6400">
-            <a:normAutofit/>
+            <a:noAutofit/>
           </a:bodyPr>
           <a:lstStyle/>
           <a:p>
@@ -9993,7 +9993,7 @@
         </p:spPr>
         <p:txBody>
           <a:bodyPr wrap="square" anchor="t" lIns="9144" rIns="9144" tIns="6400" bIns="6400">
-            <a:normAutofit/>
+            <a:noAutofit/>
           </a:bodyPr>
           <a:lstStyle/>
           <a:p>
@@ -10033,7 +10033,7 @@
         </p:spPr>
         <p:txBody>
           <a:bodyPr wrap="square" anchor="t" lIns="54864" rIns="54864" tIns="38404" bIns="38404">
-            <a:normAutofit/>
+            <a:noAutofit/>
           </a:bodyPr>
           <a:lstStyle/>
           <a:p>
@@ -10165,7 +10165,7 @@
         </p:spPr>
         <p:txBody>
           <a:bodyPr wrap="square" anchor="t" lIns="9144" rIns="9144" tIns="6400" bIns="6400">
-            <a:normAutofit/>
+            <a:noAutofit/>
           </a:bodyPr>
           <a:lstStyle/>
           <a:p>
@@ -10251,7 +10251,7 @@
         </p:spPr>
         <p:txBody>
           <a:bodyPr wrap="square" anchor="ctr" lIns="54864" rIns="54864" tIns="38404" bIns="38404">
-            <a:normAutofit/>
+            <a:noAutofit/>
           </a:bodyPr>
           <a:lstStyle/>
           <a:p>
@@ -10291,7 +10291,7 @@
         </p:spPr>
         <p:txBody>
           <a:bodyPr wrap="square" anchor="t" lIns="9144" rIns="9144" tIns="6400" bIns="6400">
-            <a:normAutofit/>
+            <a:noAutofit/>
           </a:bodyPr>
           <a:lstStyle/>
           <a:p>
@@ -10357,7 +10357,7 @@
         </p:spPr>
         <p:txBody>
           <a:bodyPr wrap="square" anchor="t" lIns="18288" rIns="18288" tIns="12801" bIns="12801">
-            <a:normAutofit/>
+            <a:noAutofit/>
           </a:bodyPr>
           <a:lstStyle/>
           <a:p>
@@ -10397,7 +10397,7 @@
         </p:spPr>
         <p:txBody>
           <a:bodyPr wrap="square" anchor="t" lIns="18288" rIns="18288" tIns="12801" bIns="12801">
-            <a:normAutofit/>
+            <a:noAutofit/>
           </a:bodyPr>
           <a:lstStyle/>
           <a:p>
@@ -10437,7 +10437,7 @@
         </p:spPr>
         <p:txBody>
           <a:bodyPr wrap="square" anchor="t" lIns="18288" rIns="18288" tIns="12801" bIns="12801">
-            <a:normAutofit/>
+            <a:noAutofit/>
           </a:bodyPr>
           <a:lstStyle/>
           <a:p>
@@ -10609,7 +10609,7 @@
         </p:spPr>
         <p:txBody>
           <a:bodyPr wrap="square" anchor="t" lIns="9144" rIns="9144" tIns="6400" bIns="6400">
-            <a:normAutofit/>
+            <a:noAutofit/>
           </a:bodyPr>
           <a:lstStyle/>
           <a:p>
@@ -10649,7 +10649,7 @@
         </p:spPr>
         <p:txBody>
           <a:bodyPr wrap="square" anchor="t" lIns="9144" rIns="9144" tIns="6400" bIns="6400">
-            <a:normAutofit/>
+            <a:noAutofit/>
           </a:bodyPr>
           <a:lstStyle/>
           <a:p>
@@ -10737,7 +10737,7 @@
         </p:spPr>
         <p:txBody>
           <a:bodyPr wrap="square" anchor="t" lIns="9144" rIns="9144" tIns="6400" bIns="6400">
-            <a:normAutofit/>
+            <a:noAutofit/>
           </a:bodyPr>
           <a:lstStyle/>
           <a:p>
@@ -10893,7 +10893,7 @@
         </p:spPr>
         <p:txBody>
           <a:bodyPr wrap="square" anchor="t" lIns="9144" rIns="9144" tIns="6400" bIns="6400">
-            <a:normAutofit/>
+            <a:noAutofit/>
           </a:bodyPr>
           <a:lstStyle/>
           <a:p>
@@ -10933,7 +10933,7 @@
         </p:spPr>
         <p:txBody>
           <a:bodyPr wrap="square" anchor="t" lIns="9144" rIns="9144" tIns="6400" bIns="6400">
-            <a:normAutofit/>
+            <a:noAutofit/>
           </a:bodyPr>
           <a:lstStyle/>
           <a:p>
@@ -11065,7 +11065,7 @@
         </p:spPr>
         <p:txBody>
           <a:bodyPr wrap="square" anchor="t" lIns="9144" rIns="9144" tIns="6400" bIns="6400">
-            <a:normAutofit/>
+            <a:noAutofit/>
           </a:bodyPr>
           <a:lstStyle/>
           <a:p>
@@ -11105,7 +11105,7 @@
         </p:spPr>
         <p:txBody>
           <a:bodyPr wrap="square" anchor="t" lIns="9144" rIns="9144" tIns="6400" bIns="6400">
-            <a:normAutofit/>
+            <a:noAutofit/>
           </a:bodyPr>
           <a:lstStyle/>
           <a:p>
@@ -11237,7 +11237,7 @@
         </p:spPr>
         <p:txBody>
           <a:bodyPr wrap="square" anchor="t" lIns="9144" rIns="9144" tIns="6400" bIns="6400">
-            <a:normAutofit/>
+            <a:noAutofit/>
           </a:bodyPr>
           <a:lstStyle/>
           <a:p>
@@ -11277,7 +11277,7 @@
         </p:spPr>
         <p:txBody>
           <a:bodyPr wrap="square" anchor="t" lIns="9144" rIns="9144" tIns="6400" bIns="6400">
-            <a:normAutofit/>
+            <a:noAutofit/>
           </a:bodyPr>
           <a:lstStyle/>
           <a:p>
@@ -11363,7 +11363,7 @@
         </p:spPr>
         <p:txBody>
           <a:bodyPr wrap="square" anchor="t" lIns="9144" rIns="9144" tIns="6400" bIns="6400">
-            <a:normAutofit/>
+            <a:noAutofit/>
           </a:bodyPr>
           <a:lstStyle/>
           <a:p>
@@ -11403,7 +11403,7 @@
         </p:spPr>
         <p:txBody>
           <a:bodyPr wrap="square" anchor="t" lIns="9144" rIns="9144" tIns="6400" bIns="6400">
-            <a:normAutofit/>
+            <a:noAutofit/>
           </a:bodyPr>
           <a:lstStyle/>
           <a:p>
@@ -11443,7 +11443,7 @@
         </p:spPr>
         <p:txBody>
           <a:bodyPr wrap="square" anchor="t" lIns="9144" rIns="9144" tIns="6400" bIns="6400">
-            <a:normAutofit/>
+            <a:noAutofit/>
           </a:bodyPr>
           <a:lstStyle/>
           <a:p>
@@ -11483,7 +11483,7 @@
         </p:spPr>
         <p:txBody>
           <a:bodyPr wrap="square" anchor="t" lIns="9144" rIns="9144" tIns="6400" bIns="6400">
-            <a:normAutofit/>
+            <a:noAutofit/>
           </a:bodyPr>
           <a:lstStyle/>
           <a:p>
@@ -11523,7 +11523,7 @@
         </p:spPr>
         <p:txBody>
           <a:bodyPr wrap="square" anchor="t" lIns="9144" rIns="9144" tIns="6400" bIns="6400">
-            <a:normAutofit/>
+            <a:noAutofit/>
           </a:bodyPr>
           <a:lstStyle/>
           <a:p>
@@ -11563,7 +11563,7 @@
         </p:spPr>
         <p:txBody>
           <a:bodyPr wrap="square" anchor="t" lIns="9144" rIns="9144" tIns="6400" bIns="6400">
-            <a:normAutofit/>
+            <a:noAutofit/>
           </a:bodyPr>
           <a:lstStyle/>
           <a:p>
@@ -11603,7 +11603,7 @@
         </p:spPr>
         <p:txBody>
           <a:bodyPr wrap="square" anchor="t" lIns="9144" rIns="9144" tIns="6400" bIns="6400">
-            <a:normAutofit/>
+            <a:noAutofit/>
           </a:bodyPr>
           <a:lstStyle/>
           <a:p>
@@ -11643,7 +11643,7 @@
         </p:spPr>
         <p:txBody>
           <a:bodyPr wrap="square" anchor="t" lIns="9144" rIns="9144" tIns="6400" bIns="6400">
-            <a:normAutofit/>
+            <a:noAutofit/>
           </a:bodyPr>
           <a:lstStyle/>
           <a:p>
@@ -11683,7 +11683,7 @@
         </p:spPr>
         <p:txBody>
           <a:bodyPr wrap="square" anchor="t" lIns="9144" rIns="9144" tIns="6400" bIns="6400">
-            <a:normAutofit/>
+            <a:noAutofit/>
           </a:bodyPr>
           <a:lstStyle/>
           <a:p>
@@ -11749,7 +11749,7 @@
         </p:spPr>
         <p:txBody>
           <a:bodyPr wrap="square" anchor="t" lIns="18288" rIns="18288" tIns="12801" bIns="12801">
-            <a:normAutofit/>
+            <a:noAutofit/>
           </a:bodyPr>
           <a:lstStyle/>
           <a:p>
@@ -11789,7 +11789,7 @@
         </p:spPr>
         <p:txBody>
           <a:bodyPr wrap="square" anchor="t" lIns="18288" rIns="18288" tIns="12801" bIns="12801">
-            <a:normAutofit/>
+            <a:noAutofit/>
           </a:bodyPr>
           <a:lstStyle/>
           <a:p>
@@ -11829,7 +11829,7 @@
         </p:spPr>
         <p:txBody>
           <a:bodyPr wrap="square" anchor="t" lIns="18288" rIns="18288" tIns="12801" bIns="12801">
-            <a:normAutofit/>
+            <a:noAutofit/>
           </a:bodyPr>
           <a:lstStyle/>
           <a:p>
@@ -12001,7 +12001,7 @@
         </p:spPr>
         <p:txBody>
           <a:bodyPr wrap="square" anchor="t" lIns="9144" rIns="9144" tIns="6400" bIns="6400">
-            <a:normAutofit/>
+            <a:noAutofit/>
           </a:bodyPr>
           <a:lstStyle/>
           <a:p>
@@ -12041,7 +12041,7 @@
         </p:spPr>
         <p:txBody>
           <a:bodyPr wrap="square" anchor="t" lIns="9144" rIns="9144" tIns="6400" bIns="6400">
-            <a:normAutofit/>
+            <a:noAutofit/>
           </a:bodyPr>
           <a:lstStyle/>
           <a:p>
@@ -12245,7 +12245,7 @@
         </p:spPr>
         <p:txBody>
           <a:bodyPr wrap="square" anchor="t" lIns="9144" rIns="9144" tIns="6400" bIns="6400">
-            <a:normAutofit/>
+            <a:noAutofit/>
           </a:bodyPr>
           <a:lstStyle/>
           <a:p>
@@ -12285,7 +12285,7 @@
         </p:spPr>
         <p:txBody>
           <a:bodyPr wrap="square" anchor="t" lIns="9144" rIns="9144" tIns="6400" bIns="6400">
-            <a:normAutofit/>
+            <a:noAutofit/>
           </a:bodyPr>
           <a:lstStyle/>
           <a:p>
@@ -12325,7 +12325,7 @@
         </p:spPr>
         <p:txBody>
           <a:bodyPr wrap="square" anchor="t" lIns="9144" rIns="9144" tIns="6400" bIns="6400">
-            <a:normAutofit/>
+            <a:noAutofit/>
           </a:bodyPr>
           <a:lstStyle/>
           <a:p>
@@ -12457,7 +12457,7 @@
         </p:spPr>
         <p:txBody>
           <a:bodyPr wrap="square" anchor="t" lIns="9144" rIns="9144" tIns="6400" bIns="6400">
-            <a:normAutofit/>
+            <a:noAutofit/>
           </a:bodyPr>
           <a:lstStyle/>
           <a:p>
@@ -12497,7 +12497,7 @@
         </p:spPr>
         <p:txBody>
           <a:bodyPr wrap="square" anchor="t" lIns="9144" rIns="9144" tIns="6400" bIns="6400">
-            <a:normAutofit/>
+            <a:noAutofit/>
           </a:bodyPr>
           <a:lstStyle/>
           <a:p>
@@ -12537,7 +12537,7 @@
         </p:spPr>
         <p:txBody>
           <a:bodyPr wrap="square" anchor="t" lIns="9144" rIns="9144" tIns="6400" bIns="6400">
-            <a:normAutofit/>
+            <a:noAutofit/>
           </a:bodyPr>
           <a:lstStyle/>
           <a:p>
@@ -12669,7 +12669,7 @@
         </p:spPr>
         <p:txBody>
           <a:bodyPr wrap="square" anchor="t" lIns="9144" rIns="9144" tIns="6400" bIns="6400">
-            <a:normAutofit/>
+            <a:noAutofit/>
           </a:bodyPr>
           <a:lstStyle/>
           <a:p>
@@ -12709,7 +12709,7 @@
         </p:spPr>
         <p:txBody>
           <a:bodyPr wrap="square" anchor="t" lIns="9144" rIns="9144" tIns="6400" bIns="6400">
-            <a:normAutofit/>
+            <a:noAutofit/>
           </a:bodyPr>
           <a:lstStyle/>
           <a:p>
@@ -12749,7 +12749,7 @@
         </p:spPr>
         <p:txBody>
           <a:bodyPr wrap="square" anchor="t" lIns="9144" rIns="9144" tIns="6400" bIns="6400">
-            <a:normAutofit/>
+            <a:noAutofit/>
           </a:bodyPr>
           <a:lstStyle/>
           <a:p>
@@ -12881,7 +12881,7 @@
         </p:spPr>
         <p:txBody>
           <a:bodyPr wrap="square" anchor="t" lIns="9144" rIns="9144" tIns="6400" bIns="6400">
-            <a:normAutofit/>
+            <a:noAutofit/>
           </a:bodyPr>
           <a:lstStyle/>
           <a:p>
@@ -12921,7 +12921,7 @@
         </p:spPr>
         <p:txBody>
           <a:bodyPr wrap="square" anchor="t" lIns="9144" rIns="9144" tIns="6400" bIns="6400">
-            <a:normAutofit/>
+            <a:noAutofit/>
           </a:bodyPr>
           <a:lstStyle/>
           <a:p>
@@ -12961,7 +12961,7 @@
         </p:spPr>
         <p:txBody>
           <a:bodyPr wrap="square" anchor="t" lIns="9144" rIns="9144" tIns="6400" bIns="6400">
-            <a:normAutofit/>
+            <a:noAutofit/>
           </a:bodyPr>
           <a:lstStyle/>
           <a:p>
@@ -13093,7 +13093,7 @@
         </p:spPr>
         <p:txBody>
           <a:bodyPr wrap="square" anchor="t" lIns="9144" rIns="9144" tIns="6400" bIns="6400">
-            <a:normAutofit/>
+            <a:noAutofit/>
           </a:bodyPr>
           <a:lstStyle/>
           <a:p>
@@ -13133,7 +13133,7 @@
         </p:spPr>
         <p:txBody>
           <a:bodyPr wrap="square" anchor="t" lIns="9144" rIns="9144" tIns="6400" bIns="6400">
-            <a:normAutofit/>
+            <a:noAutofit/>
           </a:bodyPr>
           <a:lstStyle/>
           <a:p>
@@ -13173,7 +13173,7 @@
         </p:spPr>
         <p:txBody>
           <a:bodyPr wrap="square" anchor="t" lIns="9144" rIns="9144" tIns="6400" bIns="6400">
-            <a:normAutofit/>
+            <a:noAutofit/>
           </a:bodyPr>
           <a:lstStyle/>
           <a:p>
@@ -13239,7 +13239,7 @@
         </p:spPr>
         <p:txBody>
           <a:bodyPr wrap="square" anchor="t" lIns="18288" rIns="18288" tIns="12801" bIns="12801">
-            <a:normAutofit/>
+            <a:noAutofit/>
           </a:bodyPr>
           <a:lstStyle/>
           <a:p>
@@ -13279,7 +13279,7 @@
         </p:spPr>
         <p:txBody>
           <a:bodyPr wrap="square" anchor="t" lIns="18288" rIns="18288" tIns="12801" bIns="12801">
-            <a:normAutofit/>
+            <a:noAutofit/>
           </a:bodyPr>
           <a:lstStyle/>
           <a:p>
@@ -13319,7 +13319,7 @@
         </p:spPr>
         <p:txBody>
           <a:bodyPr wrap="square" anchor="t" lIns="18288" rIns="18288" tIns="12801" bIns="12801">
-            <a:normAutofit/>
+            <a:noAutofit/>
           </a:bodyPr>
           <a:lstStyle/>
           <a:p>
@@ -13491,7 +13491,7 @@
         </p:spPr>
         <p:txBody>
           <a:bodyPr wrap="square" anchor="t" lIns="9144" rIns="9144" tIns="6400" bIns="6400">
-            <a:normAutofit/>
+            <a:noAutofit/>
           </a:bodyPr>
           <a:lstStyle/>
           <a:p>
@@ -13531,7 +13531,7 @@
         </p:spPr>
         <p:txBody>
           <a:bodyPr wrap="square" anchor="t" lIns="9144" rIns="9144" tIns="6400" bIns="6400">
-            <a:normAutofit/>
+            <a:noAutofit/>
           </a:bodyPr>
           <a:lstStyle/>
           <a:p>
@@ -13619,7 +13619,7 @@
         </p:spPr>
         <p:txBody>
           <a:bodyPr wrap="square" anchor="t" lIns="9144" rIns="9144" tIns="6400" bIns="6400">
-            <a:normAutofit/>
+            <a:noAutofit/>
           </a:bodyPr>
           <a:lstStyle/>
           <a:p>
@@ -13707,7 +13707,7 @@
         </p:spPr>
         <p:txBody>
           <a:bodyPr wrap="square" anchor="t" lIns="9144" rIns="9144" tIns="6400" bIns="6400">
-            <a:normAutofit/>
+            <a:noAutofit/>
           </a:bodyPr>
           <a:lstStyle/>
           <a:p>
@@ -13795,7 +13795,7 @@
         </p:spPr>
         <p:txBody>
           <a:bodyPr wrap="square" anchor="t" lIns="9144" rIns="9144" tIns="6400" bIns="6400">
-            <a:normAutofit/>
+            <a:noAutofit/>
           </a:bodyPr>
           <a:lstStyle/>
           <a:p>
@@ -13835,7 +13835,7 @@
         </p:spPr>
         <p:txBody>
           <a:bodyPr wrap="square" anchor="t" lIns="9144" rIns="9144" tIns="6400" bIns="6400">
-            <a:normAutofit/>
+            <a:noAutofit/>
           </a:bodyPr>
           <a:lstStyle/>
           <a:p>
@@ -13923,7 +13923,7 @@
         </p:spPr>
         <p:txBody>
           <a:bodyPr wrap="square" anchor="t" lIns="9144" rIns="9144" tIns="6400" bIns="6400">
-            <a:normAutofit/>
+            <a:noAutofit/>
           </a:bodyPr>
           <a:lstStyle/>
           <a:p>
@@ -13963,7 +13963,7 @@
         </p:spPr>
         <p:txBody>
           <a:bodyPr wrap="square" anchor="t" lIns="9144" rIns="9144" tIns="6400" bIns="6400">
-            <a:normAutofit/>
+            <a:noAutofit/>
           </a:bodyPr>
           <a:lstStyle/>
           <a:p>
@@ -14051,7 +14051,7 @@
         </p:spPr>
         <p:txBody>
           <a:bodyPr wrap="square" anchor="t" lIns="9144" rIns="9144" tIns="6400" bIns="6400">
-            <a:normAutofit/>
+            <a:noAutofit/>
           </a:bodyPr>
           <a:lstStyle/>
           <a:p>
@@ -14091,7 +14091,7 @@
         </p:spPr>
         <p:txBody>
           <a:bodyPr wrap="square" anchor="t" lIns="9144" rIns="9144" tIns="6400" bIns="6400">
-            <a:normAutofit/>
+            <a:noAutofit/>
           </a:bodyPr>
           <a:lstStyle/>
           <a:p>
@@ -14179,7 +14179,7 @@
         </p:spPr>
         <p:txBody>
           <a:bodyPr wrap="square" anchor="t" lIns="9144" rIns="9144" tIns="6400" bIns="6400">
-            <a:normAutofit/>
+            <a:noAutofit/>
           </a:bodyPr>
           <a:lstStyle/>
           <a:p>
@@ -14267,7 +14267,7 @@
         </p:spPr>
         <p:txBody>
           <a:bodyPr wrap="square" anchor="t" lIns="9144" rIns="9144" tIns="6400" bIns="6400">
-            <a:normAutofit/>
+            <a:noAutofit/>
           </a:bodyPr>
           <a:lstStyle/>
           <a:p>
@@ -14307,7 +14307,7 @@
         </p:spPr>
         <p:txBody>
           <a:bodyPr wrap="square" anchor="t" lIns="9144" rIns="9144" tIns="6400" bIns="6400">
-            <a:normAutofit/>
+            <a:noAutofit/>
           </a:bodyPr>
           <a:lstStyle/>
           <a:p>
@@ -14395,7 +14395,7 @@
         </p:spPr>
         <p:txBody>
           <a:bodyPr wrap="square" anchor="t" lIns="9144" rIns="9144" tIns="6400" bIns="6400">
-            <a:normAutofit/>
+            <a:noAutofit/>
           </a:bodyPr>
           <a:lstStyle/>
           <a:p>
@@ -14435,7 +14435,7 @@
         </p:spPr>
         <p:txBody>
           <a:bodyPr wrap="square" anchor="t" lIns="9144" rIns="9144" tIns="6400" bIns="6400">
-            <a:normAutofit/>
+            <a:noAutofit/>
           </a:bodyPr>
           <a:lstStyle/>
           <a:p>
@@ -14523,7 +14523,7 @@
         </p:spPr>
         <p:txBody>
           <a:bodyPr wrap="square" anchor="t" lIns="9144" rIns="9144" tIns="6400" bIns="6400">
-            <a:normAutofit/>
+            <a:noAutofit/>
           </a:bodyPr>
           <a:lstStyle/>
           <a:p>
@@ -14563,7 +14563,7 @@
         </p:spPr>
         <p:txBody>
           <a:bodyPr wrap="square" anchor="t" lIns="9144" rIns="9144" tIns="6400" bIns="6400">
-            <a:normAutofit/>
+            <a:noAutofit/>
           </a:bodyPr>
           <a:lstStyle/>
           <a:p>
@@ -14651,7 +14651,7 @@
         </p:spPr>
         <p:txBody>
           <a:bodyPr wrap="square" anchor="t" lIns="9144" rIns="9144" tIns="6400" bIns="6400">
-            <a:normAutofit/>
+            <a:noAutofit/>
           </a:bodyPr>
           <a:lstStyle/>
           <a:p>
@@ -14783,7 +14783,7 @@
         </p:spPr>
         <p:txBody>
           <a:bodyPr wrap="square" anchor="t" lIns="9144" rIns="9144" tIns="6400" bIns="6400">
-            <a:normAutofit/>
+            <a:noAutofit/>
           </a:bodyPr>
           <a:lstStyle/>
           <a:p>
@@ -14823,7 +14823,7 @@
         </p:spPr>
         <p:txBody>
           <a:bodyPr wrap="square" anchor="t" lIns="9144" rIns="9144" tIns="6400" bIns="6400">
-            <a:normAutofit/>
+            <a:noAutofit/>
           </a:bodyPr>
           <a:lstStyle/>
           <a:p>
@@ -14955,7 +14955,7 @@
         </p:spPr>
         <p:txBody>
           <a:bodyPr wrap="square" anchor="t" lIns="9144" rIns="9144" tIns="6400" bIns="6400">
-            <a:normAutofit/>
+            <a:noAutofit/>
           </a:bodyPr>
           <a:lstStyle/>
           <a:p>
@@ -14995,7 +14995,7 @@
         </p:spPr>
         <p:txBody>
           <a:bodyPr wrap="square" anchor="t" lIns="9144" rIns="9144" tIns="6400" bIns="6400">
-            <a:normAutofit/>
+            <a:noAutofit/>
           </a:bodyPr>
           <a:lstStyle/>
           <a:p>
@@ -15127,7 +15127,7 @@
         </p:spPr>
         <p:txBody>
           <a:bodyPr wrap="square" anchor="t" lIns="9144" rIns="9144" tIns="6400" bIns="6400">
-            <a:normAutofit/>
+            <a:noAutofit/>
           </a:bodyPr>
           <a:lstStyle/>
           <a:p>
@@ -15167,7 +15167,7 @@
         </p:spPr>
         <p:txBody>
           <a:bodyPr wrap="square" anchor="t" lIns="9144" rIns="9144" tIns="6400" bIns="6400">
-            <a:normAutofit/>
+            <a:noAutofit/>
           </a:bodyPr>
           <a:lstStyle/>
           <a:p>
@@ -15253,7 +15253,7 @@
         </p:spPr>
         <p:txBody>
           <a:bodyPr wrap="square" anchor="t" lIns="9144" rIns="9144" tIns="6400" bIns="6400">
-            <a:normAutofit/>
+            <a:noAutofit/>
           </a:bodyPr>
           <a:lstStyle/>
           <a:p>
@@ -15293,7 +15293,7 @@
         </p:spPr>
         <p:txBody>
           <a:bodyPr wrap="square" anchor="t" lIns="9144" rIns="9144" tIns="6400" bIns="6400">
-            <a:normAutofit/>
+            <a:noAutofit/>
           </a:bodyPr>
           <a:lstStyle/>
           <a:p>
@@ -15399,7 +15399,7 @@
         </p:spPr>
         <p:txBody>
           <a:bodyPr wrap="square" anchor="t" lIns="18288" rIns="18288" tIns="12801" bIns="12801">
-            <a:normAutofit/>
+            <a:noAutofit/>
           </a:bodyPr>
           <a:lstStyle/>
           <a:p>
@@ -15439,7 +15439,7 @@
         </p:spPr>
         <p:txBody>
           <a:bodyPr wrap="square" anchor="t" lIns="18288" rIns="18288" tIns="12801" bIns="12801">
-            <a:normAutofit/>
+            <a:noAutofit/>
           </a:bodyPr>
           <a:lstStyle/>
           <a:p>
@@ -15479,7 +15479,7 @@
         </p:spPr>
         <p:txBody>
           <a:bodyPr wrap="square" anchor="t" lIns="18288" rIns="18288" tIns="12801" bIns="12801">
-            <a:normAutofit/>
+            <a:noAutofit/>
           </a:bodyPr>
           <a:lstStyle/>
           <a:p>
@@ -15651,7 +15651,7 @@
         </p:spPr>
         <p:txBody>
           <a:bodyPr wrap="square" anchor="t" lIns="9144" rIns="9144" tIns="6400" bIns="6400">
-            <a:normAutofit/>
+            <a:noAutofit/>
           </a:bodyPr>
           <a:lstStyle/>
           <a:p>
@@ -15691,7 +15691,7 @@
         </p:spPr>
         <p:txBody>
           <a:bodyPr wrap="square" anchor="t" lIns="9144" rIns="9144" tIns="6400" bIns="6400">
-            <a:normAutofit/>
+            <a:noAutofit/>
           </a:bodyPr>
           <a:lstStyle/>
           <a:p>
@@ -15777,7 +15777,7 @@
         </p:spPr>
         <p:txBody>
           <a:bodyPr wrap="square" anchor="ctr" lIns="9144" rIns="9144" tIns="6400" bIns="6400">
-            <a:normAutofit/>
+            <a:noAutofit/>
           </a:bodyPr>
           <a:lstStyle/>
           <a:p>
@@ -15863,7 +15863,7 @@
         </p:spPr>
         <p:txBody>
           <a:bodyPr wrap="square" anchor="ctr" lIns="9144" rIns="9144" tIns="6400" bIns="6400">
-            <a:normAutofit/>
+            <a:noAutofit/>
           </a:bodyPr>
           <a:lstStyle/>
           <a:p>
@@ -15949,7 +15949,7 @@
         </p:spPr>
         <p:txBody>
           <a:bodyPr wrap="square" anchor="ctr" lIns="9144" rIns="9144" tIns="6400" bIns="6400">
-            <a:normAutofit/>
+            <a:noAutofit/>
           </a:bodyPr>
           <a:lstStyle/>
           <a:p>
@@ -16035,7 +16035,7 @@
         </p:spPr>
         <p:txBody>
           <a:bodyPr wrap="square" anchor="ctr" lIns="9144" rIns="9144" tIns="6400" bIns="6400">
-            <a:normAutofit/>
+            <a:noAutofit/>
           </a:bodyPr>
           <a:lstStyle/>
           <a:p>
@@ -16121,7 +16121,7 @@
         </p:spPr>
         <p:txBody>
           <a:bodyPr wrap="square" anchor="ctr" lIns="9144" rIns="9144" tIns="6400" bIns="6400">
-            <a:normAutofit/>
+            <a:noAutofit/>
           </a:bodyPr>
           <a:lstStyle/>
           <a:p>
@@ -16207,7 +16207,7 @@
         </p:spPr>
         <p:txBody>
           <a:bodyPr wrap="square" anchor="ctr" lIns="9144" rIns="9144" tIns="6400" bIns="6400">
-            <a:normAutofit/>
+            <a:noAutofit/>
           </a:bodyPr>
           <a:lstStyle/>
           <a:p>
@@ -16313,7 +16313,7 @@
         </p:spPr>
         <p:txBody>
           <a:bodyPr wrap="square" anchor="ctr" lIns="9144" rIns="9144" tIns="6400" bIns="6400">
-            <a:normAutofit/>
+            <a:noAutofit/>
           </a:bodyPr>
           <a:lstStyle/>
           <a:p>
@@ -16399,7 +16399,7 @@
         </p:spPr>
         <p:txBody>
           <a:bodyPr wrap="square" anchor="ctr" lIns="9144" rIns="9144" tIns="6400" bIns="6400">
-            <a:normAutofit/>
+            <a:noAutofit/>
           </a:bodyPr>
           <a:lstStyle/>
           <a:p>
@@ -16525,7 +16525,7 @@
         </p:spPr>
         <p:txBody>
           <a:bodyPr wrap="square" anchor="ctr" lIns="9144" rIns="9144" tIns="6400" bIns="6400">
-            <a:normAutofit/>
+            <a:noAutofit/>
           </a:bodyPr>
           <a:lstStyle/>
           <a:p>
@@ -16631,7 +16631,7 @@
         </p:spPr>
         <p:txBody>
           <a:bodyPr wrap="square" anchor="ctr" lIns="9144" rIns="9144" tIns="6400" bIns="6400">
-            <a:normAutofit/>
+            <a:noAutofit/>
           </a:bodyPr>
           <a:lstStyle/>
           <a:p>
@@ -16737,7 +16737,7 @@
         </p:spPr>
         <p:txBody>
           <a:bodyPr wrap="square" anchor="ctr" lIns="9144" rIns="9144" tIns="6400" bIns="6400">
-            <a:normAutofit/>
+            <a:noAutofit/>
           </a:bodyPr>
           <a:lstStyle/>
           <a:p>
@@ -16843,7 +16843,7 @@
         </p:spPr>
         <p:txBody>
           <a:bodyPr wrap="square" anchor="ctr" lIns="9144" rIns="9144" tIns="6400" bIns="6400">
-            <a:normAutofit/>
+            <a:noAutofit/>
           </a:bodyPr>
           <a:lstStyle/>
           <a:p>
@@ -16929,7 +16929,7 @@
         </p:spPr>
         <p:txBody>
           <a:bodyPr wrap="square" anchor="ctr" lIns="9144" rIns="9144" tIns="6400" bIns="6400">
-            <a:normAutofit/>
+            <a:noAutofit/>
           </a:bodyPr>
           <a:lstStyle/>
           <a:p>
@@ -17035,7 +17035,7 @@
         </p:spPr>
         <p:txBody>
           <a:bodyPr wrap="square" anchor="ctr" lIns="9144" rIns="9144" tIns="6400" bIns="6400">
-            <a:normAutofit/>
+            <a:noAutofit/>
           </a:bodyPr>
           <a:lstStyle/>
           <a:p>
@@ -17121,7 +17121,7 @@
         </p:spPr>
         <p:txBody>
           <a:bodyPr wrap="square" anchor="ctr" lIns="9144" rIns="9144" tIns="6400" bIns="6400">
-            <a:normAutofit/>
+            <a:noAutofit/>
           </a:bodyPr>
           <a:lstStyle/>
           <a:p>
@@ -17227,7 +17227,7 @@
         </p:spPr>
         <p:txBody>
           <a:bodyPr wrap="square" anchor="ctr" lIns="9144" rIns="9144" tIns="6400" bIns="6400">
-            <a:normAutofit/>
+            <a:noAutofit/>
           </a:bodyPr>
           <a:lstStyle/>
           <a:p>
@@ -17333,7 +17333,7 @@
         </p:spPr>
         <p:txBody>
           <a:bodyPr wrap="square" anchor="ctr" lIns="9144" rIns="9144" tIns="6400" bIns="6400">
-            <a:normAutofit/>
+            <a:noAutofit/>
           </a:bodyPr>
           <a:lstStyle/>
           <a:p>
@@ -17419,7 +17419,7 @@
         </p:spPr>
         <p:txBody>
           <a:bodyPr wrap="square" anchor="ctr" lIns="9144" rIns="9144" tIns="6400" bIns="6400">
-            <a:normAutofit/>
+            <a:noAutofit/>
           </a:bodyPr>
           <a:lstStyle/>
           <a:p>
@@ -17525,7 +17525,7 @@
         </p:spPr>
         <p:txBody>
           <a:bodyPr wrap="square" anchor="ctr" lIns="9144" rIns="9144" tIns="6400" bIns="6400">
-            <a:normAutofit/>
+            <a:noAutofit/>
           </a:bodyPr>
           <a:lstStyle/>
           <a:p>
@@ -17611,7 +17611,7 @@
         </p:spPr>
         <p:txBody>
           <a:bodyPr wrap="square" anchor="ctr" lIns="9144" rIns="9144" tIns="6400" bIns="6400">
-            <a:normAutofit/>
+            <a:noAutofit/>
           </a:bodyPr>
           <a:lstStyle/>
           <a:p>
@@ -17717,7 +17717,7 @@
         </p:spPr>
         <p:txBody>
           <a:bodyPr wrap="square" anchor="ctr" lIns="9144" rIns="9144" tIns="6400" bIns="6400">
-            <a:normAutofit/>
+            <a:noAutofit/>
           </a:bodyPr>
           <a:lstStyle/>
           <a:p>
@@ -17823,7 +17823,7 @@
         </p:spPr>
         <p:txBody>
           <a:bodyPr wrap="square" anchor="ctr" lIns="9144" rIns="9144" tIns="6400" bIns="6400">
-            <a:normAutofit/>
+            <a:noAutofit/>
           </a:bodyPr>
           <a:lstStyle/>
           <a:p>
@@ -17909,7 +17909,7 @@
         </p:spPr>
         <p:txBody>
           <a:bodyPr wrap="square" anchor="ctr" lIns="9144" rIns="9144" tIns="6400" bIns="6400">
-            <a:normAutofit/>
+            <a:noAutofit/>
           </a:bodyPr>
           <a:lstStyle/>
           <a:p>
@@ -18015,7 +18015,7 @@
         </p:spPr>
         <p:txBody>
           <a:bodyPr wrap="square" anchor="ctr" lIns="9144" rIns="9144" tIns="6400" bIns="6400">
-            <a:normAutofit/>
+            <a:noAutofit/>
           </a:bodyPr>
           <a:lstStyle/>
           <a:p>
@@ -18121,7 +18121,7 @@
         </p:spPr>
         <p:txBody>
           <a:bodyPr wrap="square" anchor="ctr" lIns="9144" rIns="9144" tIns="6400" bIns="6400">
-            <a:normAutofit/>
+            <a:noAutofit/>
           </a:bodyPr>
           <a:lstStyle/>
           <a:p>
@@ -18229,7 +18229,7 @@
         </p:spPr>
         <p:txBody>
           <a:bodyPr wrap="square" anchor="ctr" lIns="9144" rIns="9144" tIns="6400" bIns="6400">
-            <a:normAutofit/>
+            <a:noAutofit/>
           </a:bodyPr>
           <a:lstStyle/>
           <a:p>
@@ -18295,7 +18295,7 @@
         </p:spPr>
         <p:txBody>
           <a:bodyPr wrap="square" anchor="t" lIns="18288" rIns="18288" tIns="12801" bIns="12801">
-            <a:normAutofit/>
+            <a:noAutofit/>
           </a:bodyPr>
           <a:lstStyle/>
           <a:p>
@@ -18335,7 +18335,7 @@
         </p:spPr>
         <p:txBody>
           <a:bodyPr wrap="square" anchor="t" lIns="18288" rIns="18288" tIns="12801" bIns="12801">
-            <a:normAutofit/>
+            <a:noAutofit/>
           </a:bodyPr>
           <a:lstStyle/>
           <a:p>
@@ -18375,7 +18375,7 @@
         </p:spPr>
         <p:txBody>
           <a:bodyPr wrap="square" anchor="t" lIns="18288" rIns="18288" tIns="12801" bIns="12801">
-            <a:normAutofit/>
+            <a:noAutofit/>
           </a:bodyPr>
           <a:lstStyle/>
           <a:p>
@@ -18547,7 +18547,7 @@
         </p:spPr>
         <p:txBody>
           <a:bodyPr wrap="square" anchor="t" lIns="9144" rIns="9144" tIns="6400" bIns="6400">
-            <a:normAutofit/>
+            <a:noAutofit/>
           </a:bodyPr>
           <a:lstStyle/>
           <a:p>
@@ -18587,7 +18587,7 @@
         </p:spPr>
         <p:txBody>
           <a:bodyPr wrap="square" anchor="t" lIns="9144" rIns="9144" tIns="6400" bIns="6400">
-            <a:normAutofit/>
+            <a:noAutofit/>
           </a:bodyPr>
           <a:lstStyle/>
           <a:p>
@@ -18675,7 +18675,7 @@
         </p:spPr>
         <p:txBody>
           <a:bodyPr wrap="square" anchor="t" lIns="9144" rIns="9144" tIns="6400" bIns="6400">
-            <a:normAutofit/>
+            <a:noAutofit/>
           </a:bodyPr>
           <a:lstStyle/>
           <a:p>
@@ -18715,7 +18715,7 @@
         </p:spPr>
         <p:txBody>
           <a:bodyPr wrap="square" anchor="t" lIns="9144" rIns="9144" tIns="6400" bIns="6400">
-            <a:normAutofit/>
+            <a:noAutofit/>
           </a:bodyPr>
           <a:lstStyle/>
           <a:p>
@@ -18755,7 +18755,7 @@
         </p:spPr>
         <p:txBody>
           <a:bodyPr wrap="square" anchor="t" lIns="54864" rIns="54864" tIns="38404" bIns="38404">
-            <a:normAutofit/>
+            <a:noAutofit/>
           </a:bodyPr>
           <a:lstStyle/>
           <a:p>
@@ -18887,7 +18887,7 @@
         </p:spPr>
         <p:txBody>
           <a:bodyPr wrap="square" anchor="t" lIns="9144" rIns="9144" tIns="6400" bIns="6400">
-            <a:normAutofit/>
+            <a:noAutofit/>
           </a:bodyPr>
           <a:lstStyle/>
           <a:p>
@@ -18973,7 +18973,7 @@
         </p:spPr>
         <p:txBody>
           <a:bodyPr wrap="square" anchor="ctr" lIns="54864" rIns="54864" tIns="38404" bIns="38404">
-            <a:normAutofit/>
+            <a:noAutofit/>
           </a:bodyPr>
           <a:lstStyle/>
           <a:p>
@@ -19013,7 +19013,7 @@
         </p:spPr>
         <p:txBody>
           <a:bodyPr wrap="square" anchor="t" lIns="9144" rIns="9144" tIns="6400" bIns="6400">
-            <a:normAutofit/>
+            <a:noAutofit/>
           </a:bodyPr>
           <a:lstStyle/>
           <a:p>
@@ -19101,7 +19101,7 @@
         </p:spPr>
         <p:txBody>
           <a:bodyPr wrap="square" anchor="t" lIns="9144" rIns="9144" tIns="6400" bIns="6400">
-            <a:normAutofit/>
+            <a:noAutofit/>
           </a:bodyPr>
           <a:lstStyle/>
           <a:p>
@@ -19141,7 +19141,7 @@
         </p:spPr>
         <p:txBody>
           <a:bodyPr wrap="square" anchor="t" lIns="9144" rIns="9144" tIns="6400" bIns="6400">
-            <a:normAutofit/>
+            <a:noAutofit/>
           </a:bodyPr>
           <a:lstStyle/>
           <a:p>
@@ -19181,7 +19181,7 @@
         </p:spPr>
         <p:txBody>
           <a:bodyPr wrap="square" anchor="t" lIns="54864" rIns="54864" tIns="38404" bIns="38404">
-            <a:normAutofit/>
+            <a:noAutofit/>
           </a:bodyPr>
           <a:lstStyle/>
           <a:p>
@@ -19313,7 +19313,7 @@
         </p:spPr>
         <p:txBody>
           <a:bodyPr wrap="square" anchor="t" lIns="9144" rIns="9144" tIns="6400" bIns="6400">
-            <a:normAutofit/>
+            <a:noAutofit/>
           </a:bodyPr>
           <a:lstStyle/>
           <a:p>
@@ -19399,7 +19399,7 @@
         </p:spPr>
         <p:txBody>
           <a:bodyPr wrap="square" anchor="ctr" lIns="54864" rIns="54864" tIns="38404" bIns="38404">
-            <a:normAutofit/>
+            <a:noAutofit/>
           </a:bodyPr>
           <a:lstStyle/>
           <a:p>
@@ -19439,7 +19439,7 @@
         </p:spPr>
         <p:txBody>
           <a:bodyPr wrap="square" anchor="t" lIns="9144" rIns="9144" tIns="6400" bIns="6400">
-            <a:normAutofit/>
+            <a:noAutofit/>
           </a:bodyPr>
           <a:lstStyle/>
           <a:p>
@@ -19527,7 +19527,7 @@
         </p:spPr>
         <p:txBody>
           <a:bodyPr wrap="square" anchor="t" lIns="9144" rIns="9144" tIns="6400" bIns="6400">
-            <a:normAutofit/>
+            <a:noAutofit/>
           </a:bodyPr>
           <a:lstStyle/>
           <a:p>
@@ -19567,7 +19567,7 @@
         </p:spPr>
         <p:txBody>
           <a:bodyPr wrap="square" anchor="t" lIns="9144" rIns="9144" tIns="6400" bIns="6400">
-            <a:normAutofit/>
+            <a:noAutofit/>
           </a:bodyPr>
           <a:lstStyle/>
           <a:p>
@@ -19607,7 +19607,7 @@
         </p:spPr>
         <p:txBody>
           <a:bodyPr wrap="square" anchor="t" lIns="54864" rIns="54864" tIns="38404" bIns="38404">
-            <a:normAutofit/>
+            <a:noAutofit/>
           </a:bodyPr>
           <a:lstStyle/>
           <a:p>
@@ -19739,7 +19739,7 @@
         </p:spPr>
         <p:txBody>
           <a:bodyPr wrap="square" anchor="t" lIns="9144" rIns="9144" tIns="6400" bIns="6400">
-            <a:normAutofit/>
+            <a:noAutofit/>
           </a:bodyPr>
           <a:lstStyle/>
           <a:p>
@@ -19825,7 +19825,7 @@
         </p:spPr>
         <p:txBody>
           <a:bodyPr wrap="square" anchor="ctr" lIns="54864" rIns="54864" tIns="38404" bIns="38404">
-            <a:normAutofit/>
+            <a:noAutofit/>
           </a:bodyPr>
           <a:lstStyle/>
           <a:p>
@@ -19865,7 +19865,7 @@
         </p:spPr>
         <p:txBody>
           <a:bodyPr wrap="square" anchor="t" lIns="9144" rIns="9144" tIns="6400" bIns="6400">
-            <a:normAutofit/>
+            <a:noAutofit/>
           </a:bodyPr>
           <a:lstStyle/>
           <a:p>
@@ -19951,7 +19951,7 @@
         </p:spPr>
         <p:txBody>
           <a:bodyPr wrap="square" anchor="t" lIns="9144" rIns="9144" tIns="6400" bIns="6400">
-            <a:normAutofit/>
+            <a:noAutofit/>
           </a:bodyPr>
           <a:lstStyle/>
           <a:p>
@@ -20039,7 +20039,7 @@
         </p:spPr>
         <p:txBody>
           <a:bodyPr wrap="square" anchor="t" lIns="9144" rIns="9144" tIns="6400" bIns="6400">
-            <a:normAutofit/>
+            <a:noAutofit/>
           </a:bodyPr>
           <a:lstStyle/>
           <a:p>
@@ -20079,7 +20079,7 @@
         </p:spPr>
         <p:txBody>
           <a:bodyPr wrap="square" anchor="t" lIns="9144" rIns="9144" tIns="6400" bIns="6400">
-            <a:normAutofit/>
+            <a:noAutofit/>
           </a:bodyPr>
           <a:lstStyle/>
           <a:p>
@@ -20167,7 +20167,7 @@
         </p:spPr>
         <p:txBody>
           <a:bodyPr wrap="square" anchor="t" lIns="9144" rIns="9144" tIns="6400" bIns="6400">
-            <a:normAutofit/>
+            <a:noAutofit/>
           </a:bodyPr>
           <a:lstStyle/>
           <a:p>
@@ -20207,7 +20207,7 @@
         </p:spPr>
         <p:txBody>
           <a:bodyPr wrap="square" anchor="t" lIns="9144" rIns="9144" tIns="6400" bIns="6400">
-            <a:normAutofit/>
+            <a:noAutofit/>
           </a:bodyPr>
           <a:lstStyle/>
           <a:p>
@@ -20295,7 +20295,7 @@
         </p:spPr>
         <p:txBody>
           <a:bodyPr wrap="square" anchor="t" lIns="9144" rIns="9144" tIns="6400" bIns="6400">
-            <a:normAutofit/>
+            <a:noAutofit/>
           </a:bodyPr>
           <a:lstStyle/>
           <a:p>
@@ -20335,7 +20335,7 @@
         </p:spPr>
         <p:txBody>
           <a:bodyPr wrap="square" anchor="t" lIns="9144" rIns="9144" tIns="6400" bIns="6400">
-            <a:normAutofit/>
+            <a:noAutofit/>
           </a:bodyPr>
           <a:lstStyle/>
           <a:p>
@@ -20401,7 +20401,7 @@
         </p:spPr>
         <p:txBody>
           <a:bodyPr wrap="square" anchor="t" lIns="18288" rIns="18288" tIns="12801" bIns="12801">
-            <a:normAutofit/>
+            <a:noAutofit/>
           </a:bodyPr>
           <a:lstStyle/>
           <a:p>
@@ -20441,7 +20441,7 @@
         </p:spPr>
         <p:txBody>
           <a:bodyPr wrap="square" anchor="t" lIns="18288" rIns="18288" tIns="12801" bIns="12801">
-            <a:normAutofit/>
+            <a:noAutofit/>
           </a:bodyPr>
           <a:lstStyle/>
           <a:p>
@@ -20481,7 +20481,7 @@
         </p:spPr>
         <p:txBody>
           <a:bodyPr wrap="square" anchor="t" lIns="18288" rIns="18288" tIns="12801" bIns="12801">
-            <a:normAutofit/>
+            <a:noAutofit/>
           </a:bodyPr>
           <a:lstStyle/>
           <a:p>
@@ -20653,7 +20653,7 @@
         </p:spPr>
         <p:txBody>
           <a:bodyPr wrap="square" anchor="t" lIns="9144" rIns="9144" tIns="6400" bIns="6400">
-            <a:normAutofit/>
+            <a:noAutofit/>
           </a:bodyPr>
           <a:lstStyle/>
           <a:p>
@@ -20693,7 +20693,7 @@
         </p:spPr>
         <p:txBody>
           <a:bodyPr wrap="square" anchor="t" lIns="9144" rIns="9144" tIns="6400" bIns="6400">
-            <a:normAutofit/>
+            <a:noAutofit/>
           </a:bodyPr>
           <a:lstStyle/>
           <a:p>
@@ -20781,7 +20781,7 @@
         </p:spPr>
         <p:txBody>
           <a:bodyPr wrap="square" anchor="t" lIns="9144" rIns="9144" tIns="6400" bIns="6400">
-            <a:normAutofit/>
+            <a:noAutofit/>
           </a:bodyPr>
           <a:lstStyle/>
           <a:p>
@@ -20821,7 +20821,7 @@
         </p:spPr>
         <p:txBody>
           <a:bodyPr wrap="square" anchor="t" lIns="9144" rIns="9144" tIns="6400" bIns="6400">
-            <a:normAutofit/>
+            <a:noAutofit/>
           </a:bodyPr>
           <a:lstStyle/>
           <a:p>
@@ -20949,7 +20949,7 @@
         </p:spPr>
         <p:txBody>
           <a:bodyPr wrap="square" anchor="t" lIns="9144" rIns="9144" tIns="6400" bIns="6400">
-            <a:normAutofit/>
+            <a:noAutofit/>
           </a:bodyPr>
           <a:lstStyle/>
           <a:p>
@@ -21033,7 +21033,7 @@
         </p:spPr>
         <p:txBody>
           <a:bodyPr wrap="square" anchor="ctr" lIns="54864" rIns="54864" tIns="38404" bIns="38404">
-            <a:normAutofit/>
+            <a:noAutofit/>
           </a:bodyPr>
           <a:lstStyle/>
           <a:p>
@@ -21117,7 +21117,7 @@
         </p:spPr>
         <p:txBody>
           <a:bodyPr wrap="square" anchor="ctr" lIns="54864" rIns="54864" tIns="38404" bIns="38404">
-            <a:normAutofit/>
+            <a:noAutofit/>
           </a:bodyPr>
           <a:lstStyle/>
           <a:p>
@@ -21201,7 +21201,7 @@
         </p:spPr>
         <p:txBody>
           <a:bodyPr wrap="square" anchor="ctr" lIns="54864" rIns="54864" tIns="38404" bIns="38404">
-            <a:normAutofit/>
+            <a:noAutofit/>
           </a:bodyPr>
           <a:lstStyle/>
           <a:p>
@@ -21241,7 +21241,7 @@
         </p:spPr>
         <p:txBody>
           <a:bodyPr wrap="square" anchor="t" lIns="9144" rIns="9144" tIns="6400" bIns="6400">
-            <a:normAutofit/>
+            <a:noAutofit/>
           </a:bodyPr>
           <a:lstStyle/>
           <a:p>
@@ -21347,7 +21347,7 @@
         </p:spPr>
         <p:txBody>
           <a:bodyPr wrap="square" anchor="t" lIns="9144" rIns="9144" tIns="6400" bIns="6400">
-            <a:normAutofit/>
+            <a:noAutofit/>
           </a:bodyPr>
           <a:lstStyle/>
           <a:p>
@@ -21387,7 +21387,7 @@
         </p:spPr>
         <p:txBody>
           <a:bodyPr wrap="square" anchor="t" lIns="9144" rIns="9144" tIns="6400" bIns="6400">
-            <a:normAutofit/>
+            <a:noAutofit/>
           </a:bodyPr>
           <a:lstStyle/>
           <a:p>
@@ -21565,7 +21565,7 @@
         </p:spPr>
         <p:txBody>
           <a:bodyPr wrap="square" anchor="ctr" lIns="54864" rIns="54864" tIns="38404" bIns="38404">
-            <a:normAutofit/>
+            <a:noAutofit/>
           </a:bodyPr>
           <a:lstStyle/>
           <a:p>
@@ -21605,7 +21605,7 @@
         </p:spPr>
         <p:txBody>
           <a:bodyPr wrap="square" anchor="t" lIns="9144" rIns="9144" tIns="6400" bIns="6400">
-            <a:normAutofit/>
+            <a:noAutofit/>
           </a:bodyPr>
           <a:lstStyle/>
           <a:p>
@@ -21645,7 +21645,7 @@
         </p:spPr>
         <p:txBody>
           <a:bodyPr wrap="square" anchor="t" lIns="9144" rIns="9144" tIns="6400" bIns="6400">
-            <a:normAutofit/>
+            <a:noAutofit/>
           </a:bodyPr>
           <a:lstStyle/>
           <a:p>
@@ -21685,7 +21685,7 @@
         </p:spPr>
         <p:txBody>
           <a:bodyPr wrap="square" anchor="t" lIns="9144" rIns="9144" tIns="6400" bIns="6400">
-            <a:normAutofit/>
+            <a:noAutofit/>
           </a:bodyPr>
           <a:lstStyle/>
           <a:p>
@@ -21903,7 +21903,7 @@
         </p:spPr>
         <p:txBody>
           <a:bodyPr wrap="square" anchor="ctr" lIns="54864" rIns="54864" tIns="38404" bIns="38404">
-            <a:normAutofit/>
+            <a:noAutofit/>
           </a:bodyPr>
           <a:lstStyle/>
           <a:p>
@@ -21943,7 +21943,7 @@
         </p:spPr>
         <p:txBody>
           <a:bodyPr wrap="square" anchor="t" lIns="9144" rIns="9144" tIns="6400" bIns="6400">
-            <a:normAutofit/>
+            <a:noAutofit/>
           </a:bodyPr>
           <a:lstStyle/>
           <a:p>
@@ -21983,7 +21983,7 @@
         </p:spPr>
         <p:txBody>
           <a:bodyPr wrap="square" anchor="t" lIns="9144" rIns="9144" tIns="6400" bIns="6400">
-            <a:normAutofit/>
+            <a:noAutofit/>
           </a:bodyPr>
           <a:lstStyle/>
           <a:p>
@@ -22023,7 +22023,7 @@
         </p:spPr>
         <p:txBody>
           <a:bodyPr wrap="square" anchor="t" lIns="9144" rIns="9144" tIns="6400" bIns="6400">
-            <a:normAutofit/>
+            <a:noAutofit/>
           </a:bodyPr>
           <a:lstStyle/>
           <a:p>
@@ -22241,7 +22241,7 @@
         </p:spPr>
         <p:txBody>
           <a:bodyPr wrap="square" anchor="ctr" lIns="54864" rIns="54864" tIns="38404" bIns="38404">
-            <a:normAutofit/>
+            <a:noAutofit/>
           </a:bodyPr>
           <a:lstStyle/>
           <a:p>
@@ -22281,7 +22281,7 @@
         </p:spPr>
         <p:txBody>
           <a:bodyPr wrap="square" anchor="t" lIns="9144" rIns="9144" tIns="6400" bIns="6400">
-            <a:normAutofit/>
+            <a:noAutofit/>
           </a:bodyPr>
           <a:lstStyle/>
           <a:p>
@@ -22321,7 +22321,7 @@
         </p:spPr>
         <p:txBody>
           <a:bodyPr wrap="square" anchor="t" lIns="9144" rIns="9144" tIns="6400" bIns="6400">
-            <a:normAutofit/>
+            <a:noAutofit/>
           </a:bodyPr>
           <a:lstStyle/>
           <a:p>
@@ -22361,7 +22361,7 @@
         </p:spPr>
         <p:txBody>
           <a:bodyPr wrap="square" anchor="t" lIns="9144" rIns="9144" tIns="6400" bIns="6400">
-            <a:normAutofit/>
+            <a:noAutofit/>
           </a:bodyPr>
           <a:lstStyle/>
           <a:p>

--- a/소설쓰기_가이드.pptx
+++ b/소설쓰기_가이드.pptx
@@ -3269,16 +3269,16 @@
         </p:nvSpPr>
         <p:spPr>
           <a:xfrm>
-            <a:off x="777240" y="1536192"/>
-            <a:ext cx="5669280" cy="1924287"/>
-          </a:xfrm>
-          <a:prstGeom prst="rect">
-            <a:avLst/>
-          </a:prstGeom>
-          <a:noFill/>
-        </p:spPr>
-        <p:txBody>
-          <a:bodyPr wrap="square" anchor="t" lIns="18288" rIns="18288" tIns="12801" bIns="12801">
+            <a:off x="777240" y="1548993"/>
+            <a:ext cx="5669280" cy="920767"/>
+          </a:xfrm>
+          <a:prstGeom prst="rect">
+            <a:avLst/>
+          </a:prstGeom>
+          <a:noFill/>
+        </p:spPr>
+        <p:txBody>
+          <a:bodyPr wrap="square" anchor="t" lIns="18288" rIns="18288" tIns="0" bIns="0">
             <a:noAutofit/>
           </a:bodyPr>
           <a:lstStyle/>
@@ -3287,9 +3287,6 @@
               <a:lnSpc>
                 <a:spcPct val="118000"/>
               </a:lnSpc>
-              <a:spcAft>
-                <a:spcPts val="450"/>
-              </a:spcAft>
             </a:pPr>
             <a:r>
               <a:rPr sz="3750" b="1" i="0">
@@ -3302,6 +3299,29 @@
               <a:t>매혹적인</a:t>
             </a:r>
           </a:p>
+        </p:txBody>
+      </p:sp>
+      <p:sp>
+        <p:nvSpPr>
+          <p:cNvPr id="7" name="TextBox 6"/>
+          <p:cNvSpPr txBox="1"/>
+          <p:nvPr/>
+        </p:nvSpPr>
+        <p:spPr>
+          <a:xfrm>
+            <a:off x="777240" y="2526910"/>
+            <a:ext cx="5669280" cy="920767"/>
+          </a:xfrm>
+          <a:prstGeom prst="rect">
+            <a:avLst/>
+          </a:prstGeom>
+          <a:noFill/>
+        </p:spPr>
+        <p:txBody>
+          <a:bodyPr wrap="square" anchor="t" lIns="18288" rIns="18288" tIns="0" bIns="0">
+            <a:noAutofit/>
+          </a:bodyPr>
+          <a:lstStyle/>
           <a:p>
             <a:pPr algn="l">
               <a:lnSpc>
@@ -3323,7 +3343,7 @@
       </p:sp>
       <p:sp>
         <p:nvSpPr>
-          <p:cNvPr id="7" name="Rectangle 6"/>
+          <p:cNvPr id="8" name="Rectangle 7"/>
           <p:cNvSpPr/>
           <p:nvPr/>
         </p:nvSpPr>
@@ -3367,22 +3387,22 @@
       </p:sp>
       <p:sp>
         <p:nvSpPr>
-          <p:cNvPr id="8" name="TextBox 7"/>
-          <p:cNvSpPr txBox="1"/>
-          <p:nvPr/>
-        </p:nvSpPr>
-        <p:spPr>
-          <a:xfrm>
-            <a:off x="777240" y="3707367"/>
-            <a:ext cx="5486400" cy="826922"/>
-          </a:xfrm>
-          <a:prstGeom prst="rect">
-            <a:avLst/>
-          </a:prstGeom>
-          <a:noFill/>
-        </p:spPr>
-        <p:txBody>
-          <a:bodyPr wrap="square" anchor="t" lIns="18288" rIns="18288" tIns="12801" bIns="12801">
+          <p:cNvPr id="9" name="TextBox 8"/>
+          <p:cNvSpPr txBox="1"/>
+          <p:nvPr/>
+        </p:nvSpPr>
+        <p:spPr>
+          <a:xfrm>
+            <a:off x="777240" y="3720169"/>
+            <a:ext cx="5486400" cy="390372"/>
+          </a:xfrm>
+          <a:prstGeom prst="rect">
+            <a:avLst/>
+          </a:prstGeom>
+          <a:noFill/>
+        </p:spPr>
+        <p:txBody>
+          <a:bodyPr wrap="square" anchor="t" lIns="18288" rIns="18288" tIns="0" bIns="0">
             <a:noAutofit/>
           </a:bodyPr>
           <a:lstStyle/>
@@ -3391,9 +3411,6 @@
               <a:lnSpc>
                 <a:spcPct val="140000"/>
               </a:lnSpc>
-              <a:spcAft>
-                <a:spcPts val="162"/>
-              </a:spcAft>
             </a:pPr>
             <a:r>
               <a:rPr sz="1350" b="0" i="0">
@@ -3406,6 +3423,29 @@
               <a:t>아이디어의 첫 불꽃부터 마지막 문장의 퇴고까지,</a:t>
             </a:r>
           </a:p>
+        </p:txBody>
+      </p:sp>
+      <p:sp>
+        <p:nvSpPr>
+          <p:cNvPr id="10" name="TextBox 9"/>
+          <p:cNvSpPr txBox="1"/>
+          <p:nvPr/>
+        </p:nvSpPr>
+        <p:spPr>
+          <a:xfrm>
+            <a:off x="777240" y="4131115"/>
+            <a:ext cx="5486400" cy="390372"/>
+          </a:xfrm>
+          <a:prstGeom prst="rect">
+            <a:avLst/>
+          </a:prstGeom>
+          <a:noFill/>
+        </p:spPr>
+        <p:txBody>
+          <a:bodyPr wrap="square" anchor="t" lIns="18288" rIns="18288" tIns="0" bIns="0">
+            <a:noAutofit/>
+          </a:bodyPr>
+          <a:lstStyle/>
           <a:p>
             <a:pPr algn="l">
               <a:lnSpc>
@@ -3427,7 +3467,7 @@
       </p:sp>
       <p:sp>
         <p:nvSpPr>
-          <p:cNvPr id="9" name="Rounded Rectangle 8"/>
+          <p:cNvPr id="11" name="Rounded Rectangle 10"/>
           <p:cNvSpPr/>
           <p:nvPr/>
         </p:nvSpPr>
@@ -3475,7 +3515,7 @@
       </p:sp>
       <p:sp>
         <p:nvSpPr>
-          <p:cNvPr id="10" name="Rectangle 9"/>
+          <p:cNvPr id="12" name="Rectangle 11"/>
           <p:cNvSpPr/>
           <p:nvPr/>
         </p:nvSpPr>
@@ -3519,7 +3559,7 @@
       </p:sp>
       <p:sp>
         <p:nvSpPr>
-          <p:cNvPr id="11" name="TextBox 10"/>
+          <p:cNvPr id="13" name="TextBox 12"/>
           <p:cNvSpPr txBox="1"/>
           <p:nvPr/>
         </p:nvSpPr>
@@ -3559,7 +3599,7 @@
       </p:sp>
       <p:sp>
         <p:nvSpPr>
-          <p:cNvPr id="12" name="TextBox 11"/>
+          <p:cNvPr id="14" name="TextBox 13"/>
           <p:cNvSpPr txBox="1"/>
           <p:nvPr/>
         </p:nvSpPr>
@@ -3599,7 +3639,7 @@
       </p:sp>
       <p:sp>
         <p:nvSpPr>
-          <p:cNvPr id="13" name="TextBox 12"/>
+          <p:cNvPr id="15" name="TextBox 14"/>
           <p:cNvSpPr txBox="1"/>
           <p:nvPr/>
         </p:nvSpPr>
@@ -3639,7 +3679,7 @@
       </p:sp>
       <p:sp>
         <p:nvSpPr>
-          <p:cNvPr id="14" name="Rounded Rectangle 13"/>
+          <p:cNvPr id="16" name="Rounded Rectangle 15"/>
           <p:cNvSpPr/>
           <p:nvPr/>
         </p:nvSpPr>
@@ -3687,7 +3727,7 @@
       </p:sp>
       <p:sp>
         <p:nvSpPr>
-          <p:cNvPr id="15" name="Rectangle 14"/>
+          <p:cNvPr id="17" name="Rectangle 16"/>
           <p:cNvSpPr/>
           <p:nvPr/>
         </p:nvSpPr>
@@ -3731,7 +3771,7 @@
       </p:sp>
       <p:sp>
         <p:nvSpPr>
-          <p:cNvPr id="16" name="TextBox 15"/>
+          <p:cNvPr id="18" name="TextBox 17"/>
           <p:cNvSpPr txBox="1"/>
           <p:nvPr/>
         </p:nvSpPr>
@@ -3771,7 +3811,7 @@
       </p:sp>
       <p:sp>
         <p:nvSpPr>
-          <p:cNvPr id="17" name="TextBox 16"/>
+          <p:cNvPr id="19" name="TextBox 18"/>
           <p:cNvSpPr txBox="1"/>
           <p:nvPr/>
         </p:nvSpPr>
@@ -3811,7 +3851,7 @@
       </p:sp>
       <p:sp>
         <p:nvSpPr>
-          <p:cNvPr id="18" name="TextBox 17"/>
+          <p:cNvPr id="20" name="TextBox 19"/>
           <p:cNvSpPr txBox="1"/>
           <p:nvPr/>
         </p:nvSpPr>
@@ -3851,7 +3891,7 @@
       </p:sp>
       <p:sp>
         <p:nvSpPr>
-          <p:cNvPr id="19" name="Rounded Rectangle 18"/>
+          <p:cNvPr id="21" name="Rounded Rectangle 20"/>
           <p:cNvSpPr/>
           <p:nvPr/>
         </p:nvSpPr>
@@ -3899,7 +3939,7 @@
       </p:sp>
       <p:sp>
         <p:nvSpPr>
-          <p:cNvPr id="20" name="Rectangle 19"/>
+          <p:cNvPr id="22" name="Rectangle 21"/>
           <p:cNvSpPr/>
           <p:nvPr/>
         </p:nvSpPr>
@@ -3943,7 +3983,7 @@
       </p:sp>
       <p:sp>
         <p:nvSpPr>
-          <p:cNvPr id="21" name="TextBox 20"/>
+          <p:cNvPr id="23" name="TextBox 22"/>
           <p:cNvSpPr txBox="1"/>
           <p:nvPr/>
         </p:nvSpPr>
@@ -3983,7 +4023,7 @@
       </p:sp>
       <p:sp>
         <p:nvSpPr>
-          <p:cNvPr id="22" name="TextBox 21"/>
+          <p:cNvPr id="24" name="TextBox 23"/>
           <p:cNvSpPr txBox="1"/>
           <p:nvPr/>
         </p:nvSpPr>
@@ -4023,7 +4063,7 @@
       </p:sp>
       <p:sp>
         <p:nvSpPr>
-          <p:cNvPr id="23" name="TextBox 22"/>
+          <p:cNvPr id="25" name="TextBox 24"/>
           <p:cNvSpPr txBox="1"/>
           <p:nvPr/>
         </p:nvSpPr>
@@ -4063,7 +4103,7 @@
       </p:sp>
       <p:sp>
         <p:nvSpPr>
-          <p:cNvPr id="24" name="Rounded Rectangle 23"/>
+          <p:cNvPr id="26" name="Rounded Rectangle 25"/>
           <p:cNvSpPr/>
           <p:nvPr/>
         </p:nvSpPr>
@@ -4111,7 +4151,7 @@
       </p:sp>
       <p:sp>
         <p:nvSpPr>
-          <p:cNvPr id="25" name="Rectangle 24"/>
+          <p:cNvPr id="27" name="Rectangle 26"/>
           <p:cNvSpPr/>
           <p:nvPr/>
         </p:nvSpPr>
@@ -4155,7 +4195,7 @@
       </p:sp>
       <p:sp>
         <p:nvSpPr>
-          <p:cNvPr id="26" name="TextBox 25"/>
+          <p:cNvPr id="28" name="TextBox 27"/>
           <p:cNvSpPr txBox="1"/>
           <p:nvPr/>
         </p:nvSpPr>
@@ -4195,7 +4235,7 @@
       </p:sp>
       <p:sp>
         <p:nvSpPr>
-          <p:cNvPr id="27" name="TextBox 26"/>
+          <p:cNvPr id="29" name="TextBox 28"/>
           <p:cNvSpPr txBox="1"/>
           <p:nvPr/>
         </p:nvSpPr>
@@ -4235,7 +4275,7 @@
       </p:sp>
       <p:sp>
         <p:nvSpPr>
-          <p:cNvPr id="28" name="TextBox 27"/>
+          <p:cNvPr id="30" name="TextBox 29"/>
           <p:cNvSpPr txBox="1"/>
           <p:nvPr/>
         </p:nvSpPr>
@@ -4899,16 +4939,16 @@
         </p:nvSpPr>
         <p:spPr>
           <a:xfrm>
-            <a:off x="795528" y="2999232"/>
-            <a:ext cx="3099816" cy="2103120"/>
-          </a:xfrm>
-          <a:prstGeom prst="rect">
-            <a:avLst/>
-          </a:prstGeom>
-          <a:noFill/>
-        </p:spPr>
-        <p:txBody>
-          <a:bodyPr wrap="square" anchor="t" lIns="9144" rIns="9144" tIns="6400" bIns="6400">
+            <a:off x="795528" y="3005632"/>
+            <a:ext cx="3099816" cy="686308"/>
+          </a:xfrm>
+          <a:prstGeom prst="rect">
+            <a:avLst/>
+          </a:prstGeom>
+          <a:noFill/>
+        </p:spPr>
+        <p:txBody>
+          <a:bodyPr wrap="square" anchor="t" lIns="9144" rIns="9144" tIns="0" bIns="0">
             <a:noAutofit/>
           </a:bodyPr>
           <a:lstStyle/>
@@ -4917,9 +4957,6 @@
               <a:lnSpc>
                 <a:spcPct val="132000"/>
               </a:lnSpc>
-              <a:spcAft>
-                <a:spcPts val="123"/>
-              </a:spcAft>
             </a:pPr>
             <a:r>
               <a:rPr sz="1030" b="0" i="0">
@@ -4932,14 +4969,34 @@
               <a:t>• 매일 같은 시간, 같은 장소에서 정해진 분량(예: 하루 1,000자~2,000자 또는 45분)을 채우는 시스템 구축</a:t>
             </a:r>
           </a:p>
+        </p:txBody>
+      </p:sp>
+      <p:sp>
+        <p:nvSpPr>
+          <p:cNvPr id="17" name="TextBox 16"/>
+          <p:cNvSpPr txBox="1"/>
+          <p:nvPr/>
+        </p:nvSpPr>
+        <p:spPr>
+          <a:xfrm>
+            <a:off x="795528" y="3707638"/>
+            <a:ext cx="3099816" cy="686308"/>
+          </a:xfrm>
+          <a:prstGeom prst="rect">
+            <a:avLst/>
+          </a:prstGeom>
+          <a:noFill/>
+        </p:spPr>
+        <p:txBody>
+          <a:bodyPr wrap="square" anchor="t" lIns="9144" rIns="9144" tIns="0" bIns="0">
+            <a:noAutofit/>
+          </a:bodyPr>
+          <a:lstStyle/>
           <a:p>
             <a:pPr algn="l">
               <a:lnSpc>
                 <a:spcPct val="132000"/>
               </a:lnSpc>
-              <a:spcAft>
-                <a:spcPts val="123"/>
-              </a:spcAft>
             </a:pPr>
             <a:r>
               <a:rPr sz="1030" b="0" i="0">
@@ -4952,6 +5009,29 @@
               <a:t>• 다음 날 글쓰기가 막막하지 않도록, 오늘 가장 잘 써지는 장면의 문장 중간에서 멈추는 ‘헤밍웨이 기법’ 활용</a:t>
             </a:r>
           </a:p>
+        </p:txBody>
+      </p:sp>
+      <p:sp>
+        <p:nvSpPr>
+          <p:cNvPr id="18" name="TextBox 17"/>
+          <p:cNvSpPr txBox="1"/>
+          <p:nvPr/>
+        </p:nvSpPr>
+        <p:spPr>
+          <a:xfrm>
+            <a:off x="795528" y="4409643"/>
+            <a:ext cx="3099816" cy="686308"/>
+          </a:xfrm>
+          <a:prstGeom prst="rect">
+            <a:avLst/>
+          </a:prstGeom>
+          <a:noFill/>
+        </p:spPr>
+        <p:txBody>
+          <a:bodyPr wrap="square" anchor="t" lIns="9144" rIns="9144" tIns="0" bIns="0">
+            <a:noAutofit/>
+          </a:bodyPr>
+          <a:lstStyle/>
           <a:p>
             <a:pPr algn="l">
               <a:lnSpc>
@@ -4973,7 +5053,7 @@
       </p:sp>
       <p:sp>
         <p:nvSpPr>
-          <p:cNvPr id="17" name="Rounded Rectangle 16"/>
+          <p:cNvPr id="19" name="Rounded Rectangle 18"/>
           <p:cNvSpPr/>
           <p:nvPr/>
         </p:nvSpPr>
@@ -5021,7 +5101,7 @@
       </p:sp>
       <p:sp>
         <p:nvSpPr>
-          <p:cNvPr id="18" name="Rectangle 17"/>
+          <p:cNvPr id="20" name="Rectangle 19"/>
           <p:cNvSpPr/>
           <p:nvPr/>
         </p:nvSpPr>
@@ -5065,7 +5145,7 @@
       </p:sp>
       <p:sp>
         <p:nvSpPr>
-          <p:cNvPr id="19" name="TextBox 18"/>
+          <p:cNvPr id="21" name="TextBox 20"/>
           <p:cNvSpPr txBox="1"/>
           <p:nvPr/>
         </p:nvSpPr>
@@ -5105,7 +5185,7 @@
       </p:sp>
       <p:sp>
         <p:nvSpPr>
-          <p:cNvPr id="20" name="TextBox 19"/>
+          <p:cNvPr id="22" name="TextBox 21"/>
           <p:cNvSpPr txBox="1"/>
           <p:nvPr/>
         </p:nvSpPr>
@@ -5145,7 +5225,7 @@
       </p:sp>
       <p:sp>
         <p:nvSpPr>
-          <p:cNvPr id="21" name="Rounded Rectangle 20"/>
+          <p:cNvPr id="23" name="Rounded Rectangle 22"/>
           <p:cNvSpPr/>
           <p:nvPr/>
         </p:nvSpPr>
@@ -5193,7 +5273,7 @@
       </p:sp>
       <p:sp>
         <p:nvSpPr>
-          <p:cNvPr id="22" name="TextBox 21"/>
+          <p:cNvPr id="24" name="TextBox 23"/>
           <p:cNvSpPr txBox="1"/>
           <p:nvPr/>
         </p:nvSpPr>
@@ -5233,22 +5313,22 @@
       </p:sp>
       <p:sp>
         <p:nvSpPr>
-          <p:cNvPr id="23" name="TextBox 22"/>
-          <p:cNvSpPr txBox="1"/>
-          <p:nvPr/>
-        </p:nvSpPr>
-        <p:spPr>
-          <a:xfrm>
-            <a:off x="4544568" y="2999232"/>
-            <a:ext cx="3099816" cy="2103120"/>
-          </a:xfrm>
-          <a:prstGeom prst="rect">
-            <a:avLst/>
-          </a:prstGeom>
-          <a:noFill/>
-        </p:spPr>
-        <p:txBody>
-          <a:bodyPr wrap="square" anchor="t" lIns="9144" rIns="9144" tIns="6400" bIns="6400">
+          <p:cNvPr id="25" name="TextBox 24"/>
+          <p:cNvSpPr txBox="1"/>
+          <p:nvPr/>
+        </p:nvSpPr>
+        <p:spPr>
+          <a:xfrm>
+            <a:off x="4544568" y="3005632"/>
+            <a:ext cx="3099816" cy="593194"/>
+          </a:xfrm>
+          <a:prstGeom prst="rect">
+            <a:avLst/>
+          </a:prstGeom>
+          <a:noFill/>
+        </p:spPr>
+        <p:txBody>
+          <a:bodyPr wrap="square" anchor="t" lIns="9144" rIns="9144" tIns="0" bIns="0">
             <a:noAutofit/>
           </a:bodyPr>
           <a:lstStyle/>
@@ -5257,9 +5337,6 @@
               <a:lnSpc>
                 <a:spcPct val="132000"/>
               </a:lnSpc>
-              <a:spcAft>
-                <a:spcPts val="123"/>
-              </a:spcAft>
             </a:pPr>
             <a:r>
               <a:rPr sz="1030" b="0" i="0">
@@ -5272,14 +5349,34 @@
               <a:t>• 지하철에서 들은 기묘한 대화 한 줄, 독특한 직업군의 은어, 계절별 빛과 냄새를 메모장에 즉시 기록</a:t>
             </a:r>
           </a:p>
+        </p:txBody>
+      </p:sp>
+      <p:sp>
+        <p:nvSpPr>
+          <p:cNvPr id="26" name="TextBox 25"/>
+          <p:cNvSpPr txBox="1"/>
+          <p:nvPr/>
+        </p:nvSpPr>
+        <p:spPr>
+          <a:xfrm>
+            <a:off x="4544568" y="3614524"/>
+            <a:ext cx="3099816" cy="872534"/>
+          </a:xfrm>
+          <a:prstGeom prst="rect">
+            <a:avLst/>
+          </a:prstGeom>
+          <a:noFill/>
+        </p:spPr>
+        <p:txBody>
+          <a:bodyPr wrap="square" anchor="t" lIns="9144" rIns="9144" tIns="0" bIns="0">
+            <a:noAutofit/>
+          </a:bodyPr>
+          <a:lstStyle/>
           <a:p>
             <a:pPr algn="l">
               <a:lnSpc>
                 <a:spcPct val="132000"/>
               </a:lnSpc>
-              <a:spcAft>
-                <a:spcPts val="123"/>
-              </a:spcAft>
             </a:pPr>
             <a:r>
               <a:rPr sz="1030" b="0" i="0">
@@ -5292,6 +5389,29 @@
               <a:t>• 마음에 드는 소설을 읽을 때는 독자로서 한 번, 작가로서 ‘어떻게 이 감정을 설계했는가’ 분석하며 한 번 더 필사·해부</a:t>
             </a:r>
           </a:p>
+        </p:txBody>
+      </p:sp>
+      <p:sp>
+        <p:nvSpPr>
+          <p:cNvPr id="27" name="TextBox 26"/>
+          <p:cNvSpPr txBox="1"/>
+          <p:nvPr/>
+        </p:nvSpPr>
+        <p:spPr>
+          <a:xfrm>
+            <a:off x="4544568" y="4502756"/>
+            <a:ext cx="3099816" cy="593194"/>
+          </a:xfrm>
+          <a:prstGeom prst="rect">
+            <a:avLst/>
+          </a:prstGeom>
+          <a:noFill/>
+        </p:spPr>
+        <p:txBody>
+          <a:bodyPr wrap="square" anchor="t" lIns="9144" rIns="9144" tIns="0" bIns="0">
+            <a:noAutofit/>
+          </a:bodyPr>
+          <a:lstStyle/>
           <a:p>
             <a:pPr algn="l">
               <a:lnSpc>
@@ -5313,7 +5433,7 @@
       </p:sp>
       <p:sp>
         <p:nvSpPr>
-          <p:cNvPr id="24" name="Rounded Rectangle 23"/>
+          <p:cNvPr id="28" name="Rounded Rectangle 27"/>
           <p:cNvSpPr/>
           <p:nvPr/>
         </p:nvSpPr>
@@ -5361,7 +5481,7 @@
       </p:sp>
       <p:sp>
         <p:nvSpPr>
-          <p:cNvPr id="25" name="Rectangle 24"/>
+          <p:cNvPr id="29" name="Rectangle 28"/>
           <p:cNvSpPr/>
           <p:nvPr/>
         </p:nvSpPr>
@@ -5405,7 +5525,7 @@
       </p:sp>
       <p:sp>
         <p:nvSpPr>
-          <p:cNvPr id="26" name="TextBox 25"/>
+          <p:cNvPr id="30" name="TextBox 29"/>
           <p:cNvSpPr txBox="1"/>
           <p:nvPr/>
         </p:nvSpPr>
@@ -5445,7 +5565,7 @@
       </p:sp>
       <p:sp>
         <p:nvSpPr>
-          <p:cNvPr id="27" name="TextBox 26"/>
+          <p:cNvPr id="31" name="TextBox 30"/>
           <p:cNvSpPr txBox="1"/>
           <p:nvPr/>
         </p:nvSpPr>
@@ -5485,7 +5605,7 @@
       </p:sp>
       <p:sp>
         <p:nvSpPr>
-          <p:cNvPr id="28" name="Rounded Rectangle 27"/>
+          <p:cNvPr id="32" name="Rounded Rectangle 31"/>
           <p:cNvSpPr/>
           <p:nvPr/>
         </p:nvSpPr>
@@ -5533,7 +5653,7 @@
       </p:sp>
       <p:sp>
         <p:nvSpPr>
-          <p:cNvPr id="29" name="TextBox 28"/>
+          <p:cNvPr id="33" name="TextBox 32"/>
           <p:cNvSpPr txBox="1"/>
           <p:nvPr/>
         </p:nvSpPr>
@@ -5573,22 +5693,22 @@
       </p:sp>
       <p:sp>
         <p:nvSpPr>
-          <p:cNvPr id="30" name="TextBox 29"/>
-          <p:cNvSpPr txBox="1"/>
-          <p:nvPr/>
-        </p:nvSpPr>
-        <p:spPr>
-          <a:xfrm>
-            <a:off x="8293608" y="2999232"/>
-            <a:ext cx="3099816" cy="2103120"/>
-          </a:xfrm>
-          <a:prstGeom prst="rect">
-            <a:avLst/>
-          </a:prstGeom>
-          <a:noFill/>
-        </p:spPr>
-        <p:txBody>
-          <a:bodyPr wrap="square" anchor="t" lIns="9144" rIns="9144" tIns="6400" bIns="6400">
+          <p:cNvPr id="34" name="TextBox 33"/>
+          <p:cNvSpPr txBox="1"/>
+          <p:nvPr/>
+        </p:nvSpPr>
+        <p:spPr>
+          <a:xfrm>
+            <a:off x="8293608" y="3005632"/>
+            <a:ext cx="3099816" cy="686308"/>
+          </a:xfrm>
+          <a:prstGeom prst="rect">
+            <a:avLst/>
+          </a:prstGeom>
+          <a:noFill/>
+        </p:spPr>
+        <p:txBody>
+          <a:bodyPr wrap="square" anchor="t" lIns="9144" rIns="9144" tIns="0" bIns="0">
             <a:noAutofit/>
           </a:bodyPr>
           <a:lstStyle/>
@@ -5597,9 +5717,6 @@
               <a:lnSpc>
                 <a:spcPct val="132000"/>
               </a:lnSpc>
-              <a:spcAft>
-                <a:spcPts val="123"/>
-              </a:spcAft>
             </a:pPr>
             <a:r>
               <a:rPr sz="1030" b="0" i="0">
@@ -5612,14 +5729,34 @@
               <a:t>• 처음부터 거대한 10권짜리 세계관에 매몰되기보다, 원고지 70~100매 분량의 단편으로 기승전결 완주 훈련</a:t>
             </a:r>
           </a:p>
+        </p:txBody>
+      </p:sp>
+      <p:sp>
+        <p:nvSpPr>
+          <p:cNvPr id="35" name="TextBox 34"/>
+          <p:cNvSpPr txBox="1"/>
+          <p:nvPr/>
+        </p:nvSpPr>
+        <p:spPr>
+          <a:xfrm>
+            <a:off x="8293608" y="3707638"/>
+            <a:ext cx="3099816" cy="686308"/>
+          </a:xfrm>
+          <a:prstGeom prst="rect">
+            <a:avLst/>
+          </a:prstGeom>
+          <a:noFill/>
+        </p:spPr>
+        <p:txBody>
+          <a:bodyPr wrap="square" anchor="t" lIns="9144" rIns="9144" tIns="0" bIns="0">
+            <a:noAutofit/>
+          </a:bodyPr>
+          <a:lstStyle/>
           <a:p>
             <a:pPr algn="l">
               <a:lnSpc>
                 <a:spcPct val="132000"/>
               </a:lnSpc>
-              <a:spcAft>
-                <a:spcPts val="123"/>
-              </a:spcAft>
             </a:pPr>
             <a:r>
               <a:rPr sz="1030" b="0" i="0">
@@ -5632,6 +5769,29 @@
               <a:t>• 첫 초고가 마음에 들지 않는 것은 당신의 재능이 부족해서가 아니라 안목이 높기 때문임을 기억</a:t>
             </a:r>
           </a:p>
+        </p:txBody>
+      </p:sp>
+      <p:sp>
+        <p:nvSpPr>
+          <p:cNvPr id="36" name="TextBox 35"/>
+          <p:cNvSpPr txBox="1"/>
+          <p:nvPr/>
+        </p:nvSpPr>
+        <p:spPr>
+          <a:xfrm>
+            <a:off x="8293608" y="4409643"/>
+            <a:ext cx="3099816" cy="686308"/>
+          </a:xfrm>
+          <a:prstGeom prst="rect">
+            <a:avLst/>
+          </a:prstGeom>
+          <a:noFill/>
+        </p:spPr>
+        <p:txBody>
+          <a:bodyPr wrap="square" anchor="t" lIns="9144" rIns="9144" tIns="0" bIns="0">
+            <a:noAutofit/>
+          </a:bodyPr>
+          <a:lstStyle/>
           <a:p>
             <a:pPr algn="l">
               <a:lnSpc>
@@ -5653,7 +5813,7 @@
       </p:sp>
       <p:sp>
         <p:nvSpPr>
-          <p:cNvPr id="31" name="Rounded Rectangle 30"/>
+          <p:cNvPr id="37" name="Rounded Rectangle 36"/>
           <p:cNvSpPr/>
           <p:nvPr/>
         </p:nvSpPr>
@@ -5699,7 +5859,7 @@
       </p:sp>
       <p:sp>
         <p:nvSpPr>
-          <p:cNvPr id="32" name="TextBox 31"/>
+          <p:cNvPr id="38" name="TextBox 37"/>
           <p:cNvSpPr txBox="1"/>
           <p:nvPr/>
         </p:nvSpPr>
@@ -5739,7 +5899,7 @@
       </p:sp>
       <p:sp>
         <p:nvSpPr>
-          <p:cNvPr id="33" name="TextBox 32"/>
+          <p:cNvPr id="39" name="TextBox 38"/>
           <p:cNvSpPr txBox="1"/>
           <p:nvPr/>
         </p:nvSpPr>
@@ -6401,16 +6561,16 @@
         </p:nvSpPr>
         <p:spPr>
           <a:xfrm>
-            <a:off x="832104" y="2176272"/>
-            <a:ext cx="4983480" cy="868680"/>
-          </a:xfrm>
-          <a:prstGeom prst="rect">
-            <a:avLst/>
-          </a:prstGeom>
-          <a:noFill/>
-        </p:spPr>
-        <p:txBody>
-          <a:bodyPr wrap="square" anchor="t" lIns="18288" rIns="18288" tIns="12801" bIns="12801">
+            <a:off x="832104" y="2189073"/>
+            <a:ext cx="4983480" cy="271068"/>
+          </a:xfrm>
+          <a:prstGeom prst="rect">
+            <a:avLst/>
+          </a:prstGeom>
+          <a:noFill/>
+        </p:spPr>
+        <p:txBody>
+          <a:bodyPr wrap="square" anchor="t" lIns="18288" rIns="18288" tIns="0" bIns="0">
             <a:noAutofit/>
           </a:bodyPr>
           <a:lstStyle/>
@@ -6419,9 +6579,6 @@
               <a:lnSpc>
                 <a:spcPct val="128000"/>
               </a:lnSpc>
-              <a:spcAft>
-                <a:spcPts val="117"/>
-              </a:spcAft>
             </a:pPr>
             <a:r>
               <a:rPr sz="980" b="0" i="0">
@@ -6434,14 +6591,34 @@
               <a:t>• 익숙한 일상 속 낯선 균열을 포착해 독자의 질문을 유도</a:t>
             </a:r>
           </a:p>
+        </p:txBody>
+      </p:sp>
+      <p:sp>
+        <p:nvSpPr>
+          <p:cNvPr id="17" name="TextBox 16"/>
+          <p:cNvSpPr txBox="1"/>
+          <p:nvPr/>
+        </p:nvSpPr>
+        <p:spPr>
+          <a:xfrm>
+            <a:off x="832104" y="2475077"/>
+            <a:ext cx="4983480" cy="271068"/>
+          </a:xfrm>
+          <a:prstGeom prst="rect">
+            <a:avLst/>
+          </a:prstGeom>
+          <a:noFill/>
+        </p:spPr>
+        <p:txBody>
+          <a:bodyPr wrap="square" anchor="t" lIns="18288" rIns="18288" tIns="0" bIns="0">
+            <a:noAutofit/>
+          </a:bodyPr>
+          <a:lstStyle/>
           <a:p>
             <a:pPr algn="l">
               <a:lnSpc>
                 <a:spcPct val="128000"/>
               </a:lnSpc>
-              <a:spcAft>
-                <a:spcPts val="117"/>
-              </a:spcAft>
             </a:pPr>
             <a:r>
               <a:rPr sz="980" b="0" i="0">
@@ -6454,6 +6631,29 @@
               <a:t>• 단순한 설정 나열이 아닌 주인공이 겪을 윤리적·현실적 딜레마 내포</a:t>
             </a:r>
           </a:p>
+        </p:txBody>
+      </p:sp>
+      <p:sp>
+        <p:nvSpPr>
+          <p:cNvPr id="18" name="TextBox 17"/>
+          <p:cNvSpPr txBox="1"/>
+          <p:nvPr/>
+        </p:nvSpPr>
+        <p:spPr>
+          <a:xfrm>
+            <a:off x="832104" y="2761081"/>
+            <a:ext cx="4983480" cy="271068"/>
+          </a:xfrm>
+          <a:prstGeom prst="rect">
+            <a:avLst/>
+          </a:prstGeom>
+          <a:noFill/>
+        </p:spPr>
+        <p:txBody>
+          <a:bodyPr wrap="square" anchor="t" lIns="18288" rIns="18288" tIns="0" bIns="0">
+            <a:noAutofit/>
+          </a:bodyPr>
+          <a:lstStyle/>
           <a:p>
             <a:pPr algn="l">
               <a:lnSpc>
@@ -6475,7 +6675,7 @@
       </p:sp>
       <p:sp>
         <p:nvSpPr>
-          <p:cNvPr id="17" name="Rounded Rectangle 16"/>
+          <p:cNvPr id="19" name="Rounded Rectangle 18"/>
           <p:cNvSpPr/>
           <p:nvPr/>
         </p:nvSpPr>
@@ -6521,7 +6721,7 @@
       </p:sp>
       <p:sp>
         <p:nvSpPr>
-          <p:cNvPr id="18" name="TextBox 17"/>
+          <p:cNvPr id="20" name="TextBox 19"/>
           <p:cNvSpPr txBox="1"/>
           <p:nvPr/>
         </p:nvSpPr>
@@ -6561,7 +6761,7 @@
       </p:sp>
       <p:sp>
         <p:nvSpPr>
-          <p:cNvPr id="19" name="Rounded Rectangle 18"/>
+          <p:cNvPr id="21" name="Rounded Rectangle 20"/>
           <p:cNvSpPr/>
           <p:nvPr/>
         </p:nvSpPr>
@@ -6609,7 +6809,7 @@
       </p:sp>
       <p:sp>
         <p:nvSpPr>
-          <p:cNvPr id="20" name="Rectangle 19"/>
+          <p:cNvPr id="22" name="Rectangle 21"/>
           <p:cNvSpPr/>
           <p:nvPr/>
         </p:nvSpPr>
@@ -6653,7 +6853,7 @@
       </p:sp>
       <p:sp>
         <p:nvSpPr>
-          <p:cNvPr id="21" name="Rounded Rectangle 20"/>
+          <p:cNvPr id="23" name="Rounded Rectangle 22"/>
           <p:cNvSpPr/>
           <p:nvPr/>
         </p:nvSpPr>
@@ -6699,7 +6899,7 @@
       </p:sp>
       <p:sp>
         <p:nvSpPr>
-          <p:cNvPr id="22" name="TextBox 21"/>
+          <p:cNvPr id="24" name="TextBox 23"/>
           <p:cNvSpPr txBox="1"/>
           <p:nvPr/>
         </p:nvSpPr>
@@ -6739,7 +6939,7 @@
       </p:sp>
       <p:sp>
         <p:nvSpPr>
-          <p:cNvPr id="23" name="TextBox 22"/>
+          <p:cNvPr id="25" name="TextBox 24"/>
           <p:cNvSpPr txBox="1"/>
           <p:nvPr/>
         </p:nvSpPr>
@@ -6779,7 +6979,7 @@
       </p:sp>
       <p:sp>
         <p:nvSpPr>
-          <p:cNvPr id="24" name="TextBox 23"/>
+          <p:cNvPr id="26" name="TextBox 25"/>
           <p:cNvSpPr txBox="1"/>
           <p:nvPr/>
         </p:nvSpPr>
@@ -6819,22 +7019,22 @@
       </p:sp>
       <p:sp>
         <p:nvSpPr>
-          <p:cNvPr id="25" name="TextBox 24"/>
-          <p:cNvSpPr txBox="1"/>
-          <p:nvPr/>
-        </p:nvSpPr>
-        <p:spPr>
-          <a:xfrm>
-            <a:off x="6437376" y="2176272"/>
-            <a:ext cx="4983480" cy="868680"/>
-          </a:xfrm>
-          <a:prstGeom prst="rect">
-            <a:avLst/>
-          </a:prstGeom>
-          <a:noFill/>
-        </p:spPr>
-        <p:txBody>
-          <a:bodyPr wrap="square" anchor="t" lIns="18288" rIns="18288" tIns="12801" bIns="12801">
+          <p:cNvPr id="27" name="TextBox 26"/>
+          <p:cNvSpPr txBox="1"/>
+          <p:nvPr/>
+        </p:nvSpPr>
+        <p:spPr>
+          <a:xfrm>
+            <a:off x="6437376" y="2189073"/>
+            <a:ext cx="4983480" cy="271068"/>
+          </a:xfrm>
+          <a:prstGeom prst="rect">
+            <a:avLst/>
+          </a:prstGeom>
+          <a:noFill/>
+        </p:spPr>
+        <p:txBody>
+          <a:bodyPr wrap="square" anchor="t" lIns="18288" rIns="18288" tIns="0" bIns="0">
             <a:noAutofit/>
           </a:bodyPr>
           <a:lstStyle/>
@@ -6843,9 +7043,6 @@
               <a:lnSpc>
                 <a:spcPct val="128000"/>
               </a:lnSpc>
-              <a:spcAft>
-                <a:spcPts val="117"/>
-              </a:spcAft>
             </a:pPr>
             <a:r>
               <a:rPr sz="980" b="0" i="0">
@@ -6858,14 +7055,34 @@
               <a:t>• 완벽한 영웅보다 결함과 모순을 지닌 인물에게 독자가 감정이입</a:t>
             </a:r>
           </a:p>
+        </p:txBody>
+      </p:sp>
+      <p:sp>
+        <p:nvSpPr>
+          <p:cNvPr id="28" name="TextBox 27"/>
+          <p:cNvSpPr txBox="1"/>
+          <p:nvPr/>
+        </p:nvSpPr>
+        <p:spPr>
+          <a:xfrm>
+            <a:off x="6437376" y="2475077"/>
+            <a:ext cx="4983480" cy="271068"/>
+          </a:xfrm>
+          <a:prstGeom prst="rect">
+            <a:avLst/>
+          </a:prstGeom>
+          <a:noFill/>
+        </p:spPr>
+        <p:txBody>
+          <a:bodyPr wrap="square" anchor="t" lIns="18288" rIns="18288" tIns="0" bIns="0">
+            <a:noAutofit/>
+          </a:bodyPr>
+          <a:lstStyle/>
           <a:p>
             <a:pPr algn="l">
               <a:lnSpc>
                 <a:spcPct val="128000"/>
               </a:lnSpc>
-              <a:spcAft>
-                <a:spcPts val="117"/>
-              </a:spcAft>
             </a:pPr>
             <a:r>
               <a:rPr sz="980" b="0" i="0">
@@ -6878,6 +7095,29 @@
               <a:t>• 외면적 목표를 추구하는 과정에서 내면의 거짓 믿음이 깨지는 성장</a:t>
             </a:r>
           </a:p>
+        </p:txBody>
+      </p:sp>
+      <p:sp>
+        <p:nvSpPr>
+          <p:cNvPr id="29" name="TextBox 28"/>
+          <p:cNvSpPr txBox="1"/>
+          <p:nvPr/>
+        </p:nvSpPr>
+        <p:spPr>
+          <a:xfrm>
+            <a:off x="6437376" y="2761081"/>
+            <a:ext cx="4983480" cy="271068"/>
+          </a:xfrm>
+          <a:prstGeom prst="rect">
+            <a:avLst/>
+          </a:prstGeom>
+          <a:noFill/>
+        </p:spPr>
+        <p:txBody>
+          <a:bodyPr wrap="square" anchor="t" lIns="18288" rIns="18288" tIns="0" bIns="0">
+            <a:noAutofit/>
+          </a:bodyPr>
+          <a:lstStyle/>
           <a:p>
             <a:pPr algn="l">
               <a:lnSpc>
@@ -6899,7 +7139,7 @@
       </p:sp>
       <p:sp>
         <p:nvSpPr>
-          <p:cNvPr id="26" name="Rounded Rectangle 25"/>
+          <p:cNvPr id="30" name="Rounded Rectangle 29"/>
           <p:cNvSpPr/>
           <p:nvPr/>
         </p:nvSpPr>
@@ -6945,7 +7185,7 @@
       </p:sp>
       <p:sp>
         <p:nvSpPr>
-          <p:cNvPr id="27" name="TextBox 26"/>
+          <p:cNvPr id="31" name="TextBox 30"/>
           <p:cNvSpPr txBox="1"/>
           <p:nvPr/>
         </p:nvSpPr>
@@ -6985,7 +7225,7 @@
       </p:sp>
       <p:sp>
         <p:nvSpPr>
-          <p:cNvPr id="28" name="Rounded Rectangle 27"/>
+          <p:cNvPr id="32" name="Rounded Rectangle 31"/>
           <p:cNvSpPr/>
           <p:nvPr/>
         </p:nvSpPr>
@@ -7033,7 +7273,7 @@
       </p:sp>
       <p:sp>
         <p:nvSpPr>
-          <p:cNvPr id="29" name="Rectangle 28"/>
+          <p:cNvPr id="33" name="Rectangle 32"/>
           <p:cNvSpPr/>
           <p:nvPr/>
         </p:nvSpPr>
@@ -7077,7 +7317,7 @@
       </p:sp>
       <p:sp>
         <p:nvSpPr>
-          <p:cNvPr id="30" name="Rounded Rectangle 29"/>
+          <p:cNvPr id="34" name="Rounded Rectangle 33"/>
           <p:cNvSpPr/>
           <p:nvPr/>
         </p:nvSpPr>
@@ -7123,7 +7363,7 @@
       </p:sp>
       <p:sp>
         <p:nvSpPr>
-          <p:cNvPr id="31" name="TextBox 30"/>
+          <p:cNvPr id="35" name="TextBox 34"/>
           <p:cNvSpPr txBox="1"/>
           <p:nvPr/>
         </p:nvSpPr>
@@ -7163,7 +7403,7 @@
       </p:sp>
       <p:sp>
         <p:nvSpPr>
-          <p:cNvPr id="32" name="TextBox 31"/>
+          <p:cNvPr id="36" name="TextBox 35"/>
           <p:cNvSpPr txBox="1"/>
           <p:nvPr/>
         </p:nvSpPr>
@@ -7203,7 +7443,7 @@
       </p:sp>
       <p:sp>
         <p:nvSpPr>
-          <p:cNvPr id="33" name="TextBox 32"/>
+          <p:cNvPr id="37" name="TextBox 36"/>
           <p:cNvSpPr txBox="1"/>
           <p:nvPr/>
         </p:nvSpPr>
@@ -7243,22 +7483,22 @@
       </p:sp>
       <p:sp>
         <p:nvSpPr>
-          <p:cNvPr id="34" name="TextBox 33"/>
-          <p:cNvSpPr txBox="1"/>
-          <p:nvPr/>
-        </p:nvSpPr>
-        <p:spPr>
-          <a:xfrm>
-            <a:off x="832104" y="4389120"/>
-            <a:ext cx="4983480" cy="868680"/>
-          </a:xfrm>
-          <a:prstGeom prst="rect">
-            <a:avLst/>
-          </a:prstGeom>
-          <a:noFill/>
-        </p:spPr>
-        <p:txBody>
-          <a:bodyPr wrap="square" anchor="t" lIns="18288" rIns="18288" tIns="12801" bIns="12801">
+          <p:cNvPr id="38" name="TextBox 37"/>
+          <p:cNvSpPr txBox="1"/>
+          <p:nvPr/>
+        </p:nvSpPr>
+        <p:spPr>
+          <a:xfrm>
+            <a:off x="832104" y="4401921"/>
+            <a:ext cx="4983480" cy="271068"/>
+          </a:xfrm>
+          <a:prstGeom prst="rect">
+            <a:avLst/>
+          </a:prstGeom>
+          <a:noFill/>
+        </p:spPr>
+        <p:txBody>
+          <a:bodyPr wrap="square" anchor="t" lIns="18288" rIns="18288" tIns="0" bIns="0">
             <a:noAutofit/>
           </a:bodyPr>
           <a:lstStyle/>
@@ -7267,9 +7507,6 @@
               <a:lnSpc>
                 <a:spcPct val="128000"/>
               </a:lnSpc>
-              <a:spcAft>
-                <a:spcPts val="117"/>
-              </a:spcAft>
             </a:pPr>
             <a:r>
               <a:rPr sz="980" b="0" i="0">
@@ -7282,14 +7519,34 @@
               <a:t>• 우연에 기댄 해결(데우스 엑스 마키나)을 배제하고 인물의 선택으로 전개</a:t>
             </a:r>
           </a:p>
+        </p:txBody>
+      </p:sp>
+      <p:sp>
+        <p:nvSpPr>
+          <p:cNvPr id="39" name="TextBox 38"/>
+          <p:cNvSpPr txBox="1"/>
+          <p:nvPr/>
+        </p:nvSpPr>
+        <p:spPr>
+          <a:xfrm>
+            <a:off x="832104" y="4687925"/>
+            <a:ext cx="4983480" cy="271068"/>
+          </a:xfrm>
+          <a:prstGeom prst="rect">
+            <a:avLst/>
+          </a:prstGeom>
+          <a:noFill/>
+        </p:spPr>
+        <p:txBody>
+          <a:bodyPr wrap="square" anchor="t" lIns="18288" rIns="18288" tIns="0" bIns="0">
+            <a:noAutofit/>
+          </a:bodyPr>
+          <a:lstStyle/>
           <a:p>
             <a:pPr algn="l">
               <a:lnSpc>
                 <a:spcPct val="128000"/>
               </a:lnSpc>
-              <a:spcAft>
-                <a:spcPts val="117"/>
-              </a:spcAft>
             </a:pPr>
             <a:r>
               <a:rPr sz="980" b="0" i="0">
@@ -7302,6 +7559,29 @@
               <a:t>• 점진적으로 판돈(Stakes)을 높여 주인공을 퇴로 없는 막다른 골목으로 압박</a:t>
             </a:r>
           </a:p>
+        </p:txBody>
+      </p:sp>
+      <p:sp>
+        <p:nvSpPr>
+          <p:cNvPr id="40" name="TextBox 39"/>
+          <p:cNvSpPr txBox="1"/>
+          <p:nvPr/>
+        </p:nvSpPr>
+        <p:spPr>
+          <a:xfrm>
+            <a:off x="832104" y="4973929"/>
+            <a:ext cx="4983480" cy="271068"/>
+          </a:xfrm>
+          <a:prstGeom prst="rect">
+            <a:avLst/>
+          </a:prstGeom>
+          <a:noFill/>
+        </p:spPr>
+        <p:txBody>
+          <a:bodyPr wrap="square" anchor="t" lIns="18288" rIns="18288" tIns="0" bIns="0">
+            <a:noAutofit/>
+          </a:bodyPr>
+          <a:lstStyle/>
           <a:p>
             <a:pPr algn="l">
               <a:lnSpc>
@@ -7323,7 +7603,7 @@
       </p:sp>
       <p:sp>
         <p:nvSpPr>
-          <p:cNvPr id="35" name="Rounded Rectangle 34"/>
+          <p:cNvPr id="41" name="Rounded Rectangle 40"/>
           <p:cNvSpPr/>
           <p:nvPr/>
         </p:nvSpPr>
@@ -7369,7 +7649,7 @@
       </p:sp>
       <p:sp>
         <p:nvSpPr>
-          <p:cNvPr id="36" name="TextBox 35"/>
+          <p:cNvPr id="42" name="TextBox 41"/>
           <p:cNvSpPr txBox="1"/>
           <p:nvPr/>
         </p:nvSpPr>
@@ -7409,7 +7689,7 @@
       </p:sp>
       <p:sp>
         <p:nvSpPr>
-          <p:cNvPr id="37" name="Rounded Rectangle 36"/>
+          <p:cNvPr id="43" name="Rounded Rectangle 42"/>
           <p:cNvSpPr/>
           <p:nvPr/>
         </p:nvSpPr>
@@ -7457,7 +7737,7 @@
       </p:sp>
       <p:sp>
         <p:nvSpPr>
-          <p:cNvPr id="38" name="Rectangle 37"/>
+          <p:cNvPr id="44" name="Rectangle 43"/>
           <p:cNvSpPr/>
           <p:nvPr/>
         </p:nvSpPr>
@@ -7501,7 +7781,7 @@
       </p:sp>
       <p:sp>
         <p:nvSpPr>
-          <p:cNvPr id="39" name="Rounded Rectangle 38"/>
+          <p:cNvPr id="45" name="Rounded Rectangle 44"/>
           <p:cNvSpPr/>
           <p:nvPr/>
         </p:nvSpPr>
@@ -7547,7 +7827,7 @@
       </p:sp>
       <p:sp>
         <p:nvSpPr>
-          <p:cNvPr id="40" name="TextBox 39"/>
+          <p:cNvPr id="46" name="TextBox 45"/>
           <p:cNvSpPr txBox="1"/>
           <p:nvPr/>
         </p:nvSpPr>
@@ -7587,7 +7867,7 @@
       </p:sp>
       <p:sp>
         <p:nvSpPr>
-          <p:cNvPr id="41" name="TextBox 40"/>
+          <p:cNvPr id="47" name="TextBox 46"/>
           <p:cNvSpPr txBox="1"/>
           <p:nvPr/>
         </p:nvSpPr>
@@ -7627,7 +7907,7 @@
       </p:sp>
       <p:sp>
         <p:nvSpPr>
-          <p:cNvPr id="42" name="TextBox 41"/>
+          <p:cNvPr id="48" name="TextBox 47"/>
           <p:cNvSpPr txBox="1"/>
           <p:nvPr/>
         </p:nvSpPr>
@@ -7667,22 +7947,22 @@
       </p:sp>
       <p:sp>
         <p:nvSpPr>
-          <p:cNvPr id="43" name="TextBox 42"/>
-          <p:cNvSpPr txBox="1"/>
-          <p:nvPr/>
-        </p:nvSpPr>
-        <p:spPr>
-          <a:xfrm>
-            <a:off x="6437376" y="4389120"/>
-            <a:ext cx="4983480" cy="868680"/>
-          </a:xfrm>
-          <a:prstGeom prst="rect">
-            <a:avLst/>
-          </a:prstGeom>
-          <a:noFill/>
-        </p:spPr>
-        <p:txBody>
-          <a:bodyPr wrap="square" anchor="t" lIns="18288" rIns="18288" tIns="12801" bIns="12801">
+          <p:cNvPr id="49" name="TextBox 48"/>
+          <p:cNvSpPr txBox="1"/>
+          <p:nvPr/>
+        </p:nvSpPr>
+        <p:spPr>
+          <a:xfrm>
+            <a:off x="6437376" y="4401921"/>
+            <a:ext cx="4983480" cy="271068"/>
+          </a:xfrm>
+          <a:prstGeom prst="rect">
+            <a:avLst/>
+          </a:prstGeom>
+          <a:noFill/>
+        </p:spPr>
+        <p:txBody>
+          <a:bodyPr wrap="square" anchor="t" lIns="18288" rIns="18288" tIns="0" bIns="0">
             <a:noAutofit/>
           </a:bodyPr>
           <a:lstStyle/>
@@ -7691,9 +7971,6 @@
               <a:lnSpc>
                 <a:spcPct val="128000"/>
               </a:lnSpc>
-              <a:spcAft>
-                <a:spcPts val="117"/>
-              </a:spcAft>
             </a:pPr>
             <a:r>
               <a:rPr sz="980" b="0" i="0">
@@ -7706,14 +7983,34 @@
               <a:t>• 오감의 디테일과 구체적 행동으로 인물의 감정선을 시각화</a:t>
             </a:r>
           </a:p>
+        </p:txBody>
+      </p:sp>
+      <p:sp>
+        <p:nvSpPr>
+          <p:cNvPr id="50" name="TextBox 49"/>
+          <p:cNvSpPr txBox="1"/>
+          <p:nvPr/>
+        </p:nvSpPr>
+        <p:spPr>
+          <a:xfrm>
+            <a:off x="6437376" y="4687925"/>
+            <a:ext cx="4983480" cy="271068"/>
+          </a:xfrm>
+          <a:prstGeom prst="rect">
+            <a:avLst/>
+          </a:prstGeom>
+          <a:noFill/>
+        </p:spPr>
+        <p:txBody>
+          <a:bodyPr wrap="square" anchor="t" lIns="18288" rIns="18288" tIns="0" bIns="0">
+            <a:noAutofit/>
+          </a:bodyPr>
+          <a:lstStyle/>
           <a:p>
             <a:pPr algn="l">
               <a:lnSpc>
                 <a:spcPct val="128000"/>
               </a:lnSpc>
-              <a:spcAft>
-                <a:spcPts val="117"/>
-              </a:spcAft>
             </a:pPr>
             <a:r>
               <a:rPr sz="980" b="0" i="0">
@@ -7726,6 +8023,29 @@
               <a:t>• 인물의 성격과 관계의 권력 구도가 묻어나는 입체적인 대사 설계</a:t>
             </a:r>
           </a:p>
+        </p:txBody>
+      </p:sp>
+      <p:sp>
+        <p:nvSpPr>
+          <p:cNvPr id="51" name="TextBox 50"/>
+          <p:cNvSpPr txBox="1"/>
+          <p:nvPr/>
+        </p:nvSpPr>
+        <p:spPr>
+          <a:xfrm>
+            <a:off x="6437376" y="4973929"/>
+            <a:ext cx="4983480" cy="271068"/>
+          </a:xfrm>
+          <a:prstGeom prst="rect">
+            <a:avLst/>
+          </a:prstGeom>
+          <a:noFill/>
+        </p:spPr>
+        <p:txBody>
+          <a:bodyPr wrap="square" anchor="t" lIns="18288" rIns="18288" tIns="0" bIns="0">
+            <a:noAutofit/>
+          </a:bodyPr>
+          <a:lstStyle/>
           <a:p>
             <a:pPr algn="l">
               <a:lnSpc>
@@ -7747,7 +8067,7 @@
       </p:sp>
       <p:sp>
         <p:nvSpPr>
-          <p:cNvPr id="44" name="Rounded Rectangle 43"/>
+          <p:cNvPr id="52" name="Rounded Rectangle 51"/>
           <p:cNvSpPr/>
           <p:nvPr/>
         </p:nvSpPr>
@@ -7793,7 +8113,7 @@
       </p:sp>
       <p:sp>
         <p:nvSpPr>
-          <p:cNvPr id="45" name="TextBox 44"/>
+          <p:cNvPr id="53" name="TextBox 52"/>
           <p:cNvSpPr txBox="1"/>
           <p:nvPr/>
         </p:nvSpPr>
@@ -7833,7 +8153,7 @@
       </p:sp>
       <p:sp>
         <p:nvSpPr>
-          <p:cNvPr id="46" name="Rounded Rectangle 45"/>
+          <p:cNvPr id="54" name="Rounded Rectangle 53"/>
           <p:cNvSpPr/>
           <p:nvPr/>
         </p:nvSpPr>
@@ -7879,7 +8199,7 @@
       </p:sp>
       <p:sp>
         <p:nvSpPr>
-          <p:cNvPr id="47" name="TextBox 46"/>
+          <p:cNvPr id="55" name="TextBox 54"/>
           <p:cNvSpPr txBox="1"/>
           <p:nvPr/>
         </p:nvSpPr>
@@ -15283,16 +15603,16 @@
         </p:nvSpPr>
         <p:spPr>
           <a:xfrm>
-            <a:off x="7808975" y="5157216"/>
-            <a:ext cx="3584448" cy="1024128"/>
-          </a:xfrm>
-          <a:prstGeom prst="rect">
-            <a:avLst/>
-          </a:prstGeom>
-          <a:noFill/>
-        </p:spPr>
-        <p:txBody>
-          <a:bodyPr wrap="square" anchor="t" lIns="9144" rIns="9144" tIns="6400" bIns="6400">
+            <a:off x="7808975" y="5163616"/>
+            <a:ext cx="3584448" cy="327964"/>
+          </a:xfrm>
+          <a:prstGeom prst="rect">
+            <a:avLst/>
+          </a:prstGeom>
+          <a:noFill/>
+        </p:spPr>
+        <p:txBody>
+          <a:bodyPr wrap="square" anchor="t" lIns="9144" rIns="9144" tIns="0" bIns="0">
             <a:noAutofit/>
           </a:bodyPr>
           <a:lstStyle/>
@@ -15301,9 +15621,6 @@
               <a:lnSpc>
                 <a:spcPct val="128000"/>
               </a:lnSpc>
-              <a:spcAft>
-                <a:spcPts val="108"/>
-              </a:spcAft>
             </a:pPr>
             <a:r>
               <a:rPr sz="900" b="0" i="0">
@@ -15316,14 +15633,34 @@
               <a:t>• 장면의 시작과 끝 사이에 인물의 상황·감정의 부호(+/-)가 바뀌었는가?</a:t>
             </a:r>
           </a:p>
+        </p:txBody>
+      </p:sp>
+      <p:sp>
+        <p:nvSpPr>
+          <p:cNvPr id="51" name="TextBox 50"/>
+          <p:cNvSpPr txBox="1"/>
+          <p:nvPr/>
+        </p:nvSpPr>
+        <p:spPr>
+          <a:xfrm>
+            <a:off x="7808975" y="5505297"/>
+            <a:ext cx="3584448" cy="327964"/>
+          </a:xfrm>
+          <a:prstGeom prst="rect">
+            <a:avLst/>
+          </a:prstGeom>
+          <a:noFill/>
+        </p:spPr>
+        <p:txBody>
+          <a:bodyPr wrap="square" anchor="t" lIns="9144" rIns="9144" tIns="0" bIns="0">
+            <a:noAutofit/>
+          </a:bodyPr>
+          <a:lstStyle/>
           <a:p>
             <a:pPr algn="l">
               <a:lnSpc>
                 <a:spcPct val="128000"/>
               </a:lnSpc>
-              <a:spcAft>
-                <a:spcPts val="108"/>
-              </a:spcAft>
             </a:pPr>
             <a:r>
               <a:rPr sz="900" b="0" i="0">
@@ -15336,6 +15673,29 @@
               <a:t>• 플롯을 전진시키거나 인물의 핵심 본성을 드러내는가?</a:t>
             </a:r>
           </a:p>
+        </p:txBody>
+      </p:sp>
+      <p:sp>
+        <p:nvSpPr>
+          <p:cNvPr id="52" name="TextBox 51"/>
+          <p:cNvSpPr txBox="1"/>
+          <p:nvPr/>
+        </p:nvSpPr>
+        <p:spPr>
+          <a:xfrm>
+            <a:off x="7808975" y="5846978"/>
+            <a:ext cx="3584448" cy="327964"/>
+          </a:xfrm>
+          <a:prstGeom prst="rect">
+            <a:avLst/>
+          </a:prstGeom>
+          <a:noFill/>
+        </p:spPr>
+        <p:txBody>
+          <a:bodyPr wrap="square" anchor="t" lIns="9144" rIns="9144" tIns="0" bIns="0">
+            <a:noAutofit/>
+          </a:bodyPr>
+          <a:lstStyle/>
           <a:p>
             <a:pPr algn="l">
               <a:lnSpc>
@@ -16197,16 +16557,16 @@
         </p:nvSpPr>
         <p:spPr>
           <a:xfrm>
-            <a:off x="685800" y="1920240"/>
-            <a:ext cx="1691639" cy="822960"/>
-          </a:xfrm>
-          <a:prstGeom prst="rect">
-            <a:avLst/>
-          </a:prstGeom>
-          <a:noFill/>
-        </p:spPr>
-        <p:txBody>
-          <a:bodyPr wrap="square" anchor="ctr" lIns="9144" rIns="9144" tIns="6400" bIns="6400">
+            <a:off x="685800" y="1926640"/>
+            <a:ext cx="1691639" cy="397078"/>
+          </a:xfrm>
+          <a:prstGeom prst="rect">
+            <a:avLst/>
+          </a:prstGeom>
+          <a:noFill/>
+        </p:spPr>
+        <p:txBody>
+          <a:bodyPr wrap="square" anchor="t" lIns="9144" rIns="9144" tIns="0" bIns="0">
             <a:noAutofit/>
           </a:bodyPr>
           <a:lstStyle/>
@@ -16215,9 +16575,6 @@
               <a:lnSpc>
                 <a:spcPct val="122000"/>
               </a:lnSpc>
-              <a:spcAft>
-                <a:spcPts val="126"/>
-              </a:spcAft>
             </a:pPr>
             <a:r>
               <a:rPr sz="1050" b="1" i="0">
@@ -16230,6 +16587,29 @@
               <a:t>1인칭 주인공 시점</a:t>
             </a:r>
           </a:p>
+        </p:txBody>
+      </p:sp>
+      <p:sp>
+        <p:nvSpPr>
+          <p:cNvPr id="22" name="TextBox 21"/>
+          <p:cNvSpPr txBox="1"/>
+          <p:nvPr/>
+        </p:nvSpPr>
+        <p:spPr>
+          <a:xfrm>
+            <a:off x="685800" y="2339721"/>
+            <a:ext cx="1691639" cy="397078"/>
+          </a:xfrm>
+          <a:prstGeom prst="rect">
+            <a:avLst/>
+          </a:prstGeom>
+          <a:noFill/>
+        </p:spPr>
+        <p:txBody>
+          <a:bodyPr wrap="square" anchor="t" lIns="9144" rIns="9144" tIns="0" bIns="0">
+            <a:noAutofit/>
+          </a:bodyPr>
+          <a:lstStyle/>
           <a:p>
             <a:pPr algn="l">
               <a:lnSpc>
@@ -16251,7 +16631,7 @@
       </p:sp>
       <p:sp>
         <p:nvSpPr>
-          <p:cNvPr id="22" name="Rectangle 21"/>
+          <p:cNvPr id="23" name="Rectangle 22"/>
           <p:cNvSpPr/>
           <p:nvPr/>
         </p:nvSpPr>
@@ -16297,7 +16677,7 @@
       </p:sp>
       <p:sp>
         <p:nvSpPr>
-          <p:cNvPr id="23" name="TextBox 22"/>
+          <p:cNvPr id="24" name="TextBox 23"/>
           <p:cNvSpPr txBox="1"/>
           <p:nvPr/>
         </p:nvSpPr>
@@ -16337,7 +16717,7 @@
       </p:sp>
       <p:sp>
         <p:nvSpPr>
-          <p:cNvPr id="24" name="Rectangle 23"/>
+          <p:cNvPr id="25" name="Rectangle 24"/>
           <p:cNvSpPr/>
           <p:nvPr/>
         </p:nvSpPr>
@@ -16383,22 +16763,22 @@
       </p:sp>
       <p:sp>
         <p:nvSpPr>
-          <p:cNvPr id="25" name="TextBox 24"/>
-          <p:cNvSpPr txBox="1"/>
-          <p:nvPr/>
-        </p:nvSpPr>
-        <p:spPr>
-          <a:xfrm>
-            <a:off x="5074919" y="1920240"/>
-            <a:ext cx="2148839" cy="822960"/>
-          </a:xfrm>
-          <a:prstGeom prst="rect">
-            <a:avLst/>
-          </a:prstGeom>
-          <a:noFill/>
-        </p:spPr>
-        <p:txBody>
-          <a:bodyPr wrap="square" anchor="ctr" lIns="9144" rIns="9144" tIns="6400" bIns="6400">
+          <p:cNvPr id="26" name="TextBox 25"/>
+          <p:cNvSpPr txBox="1"/>
+          <p:nvPr/>
+        </p:nvSpPr>
+        <p:spPr>
+          <a:xfrm>
+            <a:off x="5074919" y="1926640"/>
+            <a:ext cx="2148839" cy="259994"/>
+          </a:xfrm>
+          <a:prstGeom prst="rect">
+            <a:avLst/>
+          </a:prstGeom>
+          <a:noFill/>
+        </p:spPr>
+        <p:txBody>
+          <a:bodyPr wrap="square" anchor="t" lIns="9144" rIns="9144" tIns="0" bIns="0">
             <a:noAutofit/>
           </a:bodyPr>
           <a:lstStyle/>
@@ -16407,9 +16787,6 @@
               <a:lnSpc>
                 <a:spcPct val="122000"/>
               </a:lnSpc>
-              <a:spcAft>
-                <a:spcPts val="118"/>
-              </a:spcAft>
             </a:pPr>
             <a:r>
               <a:rPr sz="990" b="0" i="0">
@@ -16422,14 +16799,34 @@
               <a:t>• 독자와 주인공의 즉각적 밀착</a:t>
             </a:r>
           </a:p>
+        </p:txBody>
+      </p:sp>
+      <p:sp>
+        <p:nvSpPr>
+          <p:cNvPr id="27" name="TextBox 26"/>
+          <p:cNvSpPr txBox="1"/>
+          <p:nvPr/>
+        </p:nvSpPr>
+        <p:spPr>
+          <a:xfrm>
+            <a:off x="5074919" y="2201722"/>
+            <a:ext cx="2148839" cy="259994"/>
+          </a:xfrm>
+          <a:prstGeom prst="rect">
+            <a:avLst/>
+          </a:prstGeom>
+          <a:noFill/>
+        </p:spPr>
+        <p:txBody>
+          <a:bodyPr wrap="square" anchor="t" lIns="9144" rIns="9144" tIns="0" bIns="0">
+            <a:noAutofit/>
+          </a:bodyPr>
+          <a:lstStyle/>
           <a:p>
             <a:pPr algn="l">
               <a:lnSpc>
                 <a:spcPct val="122000"/>
               </a:lnSpc>
-              <a:spcAft>
-                <a:spcPts val="118"/>
-              </a:spcAft>
             </a:pPr>
             <a:r>
               <a:rPr sz="990" b="0" i="0">
@@ -16442,6 +16839,29 @@
               <a:t>• 화자의 독특한 목소리·유머 극대화</a:t>
             </a:r>
           </a:p>
+        </p:txBody>
+      </p:sp>
+      <p:sp>
+        <p:nvSpPr>
+          <p:cNvPr id="28" name="TextBox 27"/>
+          <p:cNvSpPr txBox="1"/>
+          <p:nvPr/>
+        </p:nvSpPr>
+        <p:spPr>
+          <a:xfrm>
+            <a:off x="5074919" y="2476804"/>
+            <a:ext cx="2148839" cy="259994"/>
+          </a:xfrm>
+          <a:prstGeom prst="rect">
+            <a:avLst/>
+          </a:prstGeom>
+          <a:noFill/>
+        </p:spPr>
+        <p:txBody>
+          <a:bodyPr wrap="square" anchor="t" lIns="9144" rIns="9144" tIns="0" bIns="0">
+            <a:noAutofit/>
+          </a:bodyPr>
+          <a:lstStyle/>
           <a:p>
             <a:pPr algn="l">
               <a:lnSpc>
@@ -16463,7 +16883,7 @@
       </p:sp>
       <p:sp>
         <p:nvSpPr>
-          <p:cNvPr id="26" name="Rectangle 25"/>
+          <p:cNvPr id="29" name="Rectangle 28"/>
           <p:cNvSpPr/>
           <p:nvPr/>
         </p:nvSpPr>
@@ -16509,22 +16929,22 @@
       </p:sp>
       <p:sp>
         <p:nvSpPr>
-          <p:cNvPr id="27" name="TextBox 26"/>
-          <p:cNvSpPr txBox="1"/>
-          <p:nvPr/>
-        </p:nvSpPr>
-        <p:spPr>
-          <a:xfrm>
-            <a:off x="7406640" y="1920240"/>
-            <a:ext cx="2057400" cy="822960"/>
-          </a:xfrm>
-          <a:prstGeom prst="rect">
-            <a:avLst/>
-          </a:prstGeom>
-          <a:noFill/>
-        </p:spPr>
-        <p:txBody>
-          <a:bodyPr wrap="square" anchor="ctr" lIns="9144" rIns="9144" tIns="6400" bIns="6400">
+          <p:cNvPr id="30" name="TextBox 29"/>
+          <p:cNvSpPr txBox="1"/>
+          <p:nvPr/>
+        </p:nvSpPr>
+        <p:spPr>
+          <a:xfrm>
+            <a:off x="7406640" y="1926640"/>
+            <a:ext cx="2057400" cy="397535"/>
+          </a:xfrm>
+          <a:prstGeom prst="rect">
+            <a:avLst/>
+          </a:prstGeom>
+          <a:noFill/>
+        </p:spPr>
+        <p:txBody>
+          <a:bodyPr wrap="square" anchor="t" lIns="9144" rIns="9144" tIns="0" bIns="0">
             <a:noAutofit/>
           </a:bodyPr>
           <a:lstStyle/>
@@ -16533,9 +16953,6 @@
               <a:lnSpc>
                 <a:spcPct val="122000"/>
               </a:lnSpc>
-              <a:spcAft>
-                <a:spcPts val="118"/>
-              </a:spcAft>
             </a:pPr>
             <a:r>
               <a:rPr sz="990" b="0" i="0">
@@ -16548,6 +16965,29 @@
               <a:t>• 주인공이 없는 현장의 사건 서술 불가</a:t>
             </a:r>
           </a:p>
+        </p:txBody>
+      </p:sp>
+      <p:sp>
+        <p:nvSpPr>
+          <p:cNvPr id="31" name="TextBox 30"/>
+          <p:cNvSpPr txBox="1"/>
+          <p:nvPr/>
+        </p:nvSpPr>
+        <p:spPr>
+          <a:xfrm>
+            <a:off x="7406640" y="2339263"/>
+            <a:ext cx="2057400" cy="397535"/>
+          </a:xfrm>
+          <a:prstGeom prst="rect">
+            <a:avLst/>
+          </a:prstGeom>
+          <a:noFill/>
+        </p:spPr>
+        <p:txBody>
+          <a:bodyPr wrap="square" anchor="t" lIns="9144" rIns="9144" tIns="0" bIns="0">
+            <a:noAutofit/>
+          </a:bodyPr>
+          <a:lstStyle/>
           <a:p>
             <a:pPr algn="l">
               <a:lnSpc>
@@ -16569,7 +17009,7 @@
       </p:sp>
       <p:sp>
         <p:nvSpPr>
-          <p:cNvPr id="28" name="Rectangle 27"/>
+          <p:cNvPr id="32" name="Rectangle 31"/>
           <p:cNvSpPr/>
           <p:nvPr/>
         </p:nvSpPr>
@@ -16615,22 +17055,22 @@
       </p:sp>
       <p:sp>
         <p:nvSpPr>
-          <p:cNvPr id="29" name="TextBox 28"/>
-          <p:cNvSpPr txBox="1"/>
-          <p:nvPr/>
-        </p:nvSpPr>
-        <p:spPr>
-          <a:xfrm>
-            <a:off x="9646919" y="1920240"/>
-            <a:ext cx="1856231" cy="822960"/>
-          </a:xfrm>
-          <a:prstGeom prst="rect">
-            <a:avLst/>
-          </a:prstGeom>
-          <a:noFill/>
-        </p:spPr>
-        <p:txBody>
-          <a:bodyPr wrap="square" anchor="ctr" lIns="9144" rIns="9144" tIns="6400" bIns="6400">
+          <p:cNvPr id="33" name="TextBox 32"/>
+          <p:cNvSpPr txBox="1"/>
+          <p:nvPr/>
+        </p:nvSpPr>
+        <p:spPr>
+          <a:xfrm>
+            <a:off x="9646919" y="1926640"/>
+            <a:ext cx="1856231" cy="397535"/>
+          </a:xfrm>
+          <a:prstGeom prst="rect">
+            <a:avLst/>
+          </a:prstGeom>
+          <a:noFill/>
+        </p:spPr>
+        <p:txBody>
+          <a:bodyPr wrap="square" anchor="t" lIns="9144" rIns="9144" tIns="0" bIns="0">
             <a:noAutofit/>
           </a:bodyPr>
           <a:lstStyle/>
@@ -16639,9 +17079,6 @@
               <a:lnSpc>
                 <a:spcPct val="122000"/>
               </a:lnSpc>
-              <a:spcAft>
-                <a:spcPts val="118"/>
-              </a:spcAft>
             </a:pPr>
             <a:r>
               <a:rPr sz="990" b="0" i="0">
@@ -16654,6 +17091,29 @@
               <a:t>청춘 성장소설, 느와르,</a:t>
             </a:r>
           </a:p>
+        </p:txBody>
+      </p:sp>
+      <p:sp>
+        <p:nvSpPr>
+          <p:cNvPr id="34" name="TextBox 33"/>
+          <p:cNvSpPr txBox="1"/>
+          <p:nvPr/>
+        </p:nvSpPr>
+        <p:spPr>
+          <a:xfrm>
+            <a:off x="9646919" y="2339263"/>
+            <a:ext cx="1856231" cy="397535"/>
+          </a:xfrm>
+          <a:prstGeom prst="rect">
+            <a:avLst/>
+          </a:prstGeom>
+          <a:noFill/>
+        </p:spPr>
+        <p:txBody>
+          <a:bodyPr wrap="square" anchor="t" lIns="9144" rIns="9144" tIns="0" bIns="0">
+            <a:noAutofit/>
+          </a:bodyPr>
+          <a:lstStyle/>
           <a:p>
             <a:pPr algn="l">
               <a:lnSpc>
@@ -16675,7 +17135,7 @@
       </p:sp>
       <p:sp>
         <p:nvSpPr>
-          <p:cNvPr id="30" name="Rectangle 29"/>
+          <p:cNvPr id="35" name="Rectangle 34"/>
           <p:cNvSpPr/>
           <p:nvPr/>
         </p:nvSpPr>
@@ -16721,22 +17181,22 @@
       </p:sp>
       <p:sp>
         <p:nvSpPr>
-          <p:cNvPr id="31" name="TextBox 30"/>
-          <p:cNvSpPr txBox="1"/>
-          <p:nvPr/>
-        </p:nvSpPr>
-        <p:spPr>
-          <a:xfrm>
-            <a:off x="685800" y="2889504"/>
-            <a:ext cx="1691639" cy="822960"/>
-          </a:xfrm>
-          <a:prstGeom prst="rect">
-            <a:avLst/>
-          </a:prstGeom>
-          <a:noFill/>
-        </p:spPr>
-        <p:txBody>
-          <a:bodyPr wrap="square" anchor="ctr" lIns="9144" rIns="9144" tIns="6400" bIns="6400">
+          <p:cNvPr id="36" name="TextBox 35"/>
+          <p:cNvSpPr txBox="1"/>
+          <p:nvPr/>
+        </p:nvSpPr>
+        <p:spPr>
+          <a:xfrm>
+            <a:off x="685800" y="2895904"/>
+            <a:ext cx="1691639" cy="397078"/>
+          </a:xfrm>
+          <a:prstGeom prst="rect">
+            <a:avLst/>
+          </a:prstGeom>
+          <a:noFill/>
+        </p:spPr>
+        <p:txBody>
+          <a:bodyPr wrap="square" anchor="t" lIns="9144" rIns="9144" tIns="0" bIns="0">
             <a:noAutofit/>
           </a:bodyPr>
           <a:lstStyle/>
@@ -16745,9 +17205,6 @@
               <a:lnSpc>
                 <a:spcPct val="122000"/>
               </a:lnSpc>
-              <a:spcAft>
-                <a:spcPts val="126"/>
-              </a:spcAft>
             </a:pPr>
             <a:r>
               <a:rPr sz="1050" b="1" i="0">
@@ -16760,6 +17217,29 @@
               <a:t>3인칭 제한 시점</a:t>
             </a:r>
           </a:p>
+        </p:txBody>
+      </p:sp>
+      <p:sp>
+        <p:nvSpPr>
+          <p:cNvPr id="37" name="TextBox 36"/>
+          <p:cNvSpPr txBox="1"/>
+          <p:nvPr/>
+        </p:nvSpPr>
+        <p:spPr>
+          <a:xfrm>
+            <a:off x="685800" y="3308985"/>
+            <a:ext cx="1691639" cy="397078"/>
+          </a:xfrm>
+          <a:prstGeom prst="rect">
+            <a:avLst/>
+          </a:prstGeom>
+          <a:noFill/>
+        </p:spPr>
+        <p:txBody>
+          <a:bodyPr wrap="square" anchor="t" lIns="9144" rIns="9144" tIns="0" bIns="0">
+            <a:noAutofit/>
+          </a:bodyPr>
+          <a:lstStyle/>
           <a:p>
             <a:pPr algn="l">
               <a:lnSpc>
@@ -16781,7 +17261,7 @@
       </p:sp>
       <p:sp>
         <p:nvSpPr>
-          <p:cNvPr id="32" name="Rectangle 31"/>
+          <p:cNvPr id="38" name="Rectangle 37"/>
           <p:cNvSpPr/>
           <p:nvPr/>
         </p:nvSpPr>
@@ -16827,7 +17307,7 @@
       </p:sp>
       <p:sp>
         <p:nvSpPr>
-          <p:cNvPr id="33" name="TextBox 32"/>
+          <p:cNvPr id="39" name="TextBox 38"/>
           <p:cNvSpPr txBox="1"/>
           <p:nvPr/>
         </p:nvSpPr>
@@ -16867,7 +17347,7 @@
       </p:sp>
       <p:sp>
         <p:nvSpPr>
-          <p:cNvPr id="34" name="Rectangle 33"/>
+          <p:cNvPr id="40" name="Rectangle 39"/>
           <p:cNvSpPr/>
           <p:nvPr/>
         </p:nvSpPr>
@@ -16913,22 +17393,22 @@
       </p:sp>
       <p:sp>
         <p:nvSpPr>
-          <p:cNvPr id="35" name="TextBox 34"/>
-          <p:cNvSpPr txBox="1"/>
-          <p:nvPr/>
-        </p:nvSpPr>
-        <p:spPr>
-          <a:xfrm>
-            <a:off x="5074919" y="2889504"/>
-            <a:ext cx="2148839" cy="822960"/>
-          </a:xfrm>
-          <a:prstGeom prst="rect">
-            <a:avLst/>
-          </a:prstGeom>
-          <a:noFill/>
-        </p:spPr>
-        <p:txBody>
-          <a:bodyPr wrap="square" anchor="ctr" lIns="9144" rIns="9144" tIns="6400" bIns="6400">
+          <p:cNvPr id="41" name="TextBox 40"/>
+          <p:cNvSpPr txBox="1"/>
+          <p:nvPr/>
+        </p:nvSpPr>
+        <p:spPr>
+          <a:xfrm>
+            <a:off x="5074919" y="2895904"/>
+            <a:ext cx="2148839" cy="534018"/>
+          </a:xfrm>
+          <a:prstGeom prst="rect">
+            <a:avLst/>
+          </a:prstGeom>
+          <a:noFill/>
+        </p:spPr>
+        <p:txBody>
+          <a:bodyPr wrap="square" anchor="t" lIns="9144" rIns="9144" tIns="0" bIns="0">
             <a:noAutofit/>
           </a:bodyPr>
           <a:lstStyle/>
@@ -16937,9 +17417,6 @@
               <a:lnSpc>
                 <a:spcPct val="122000"/>
               </a:lnSpc>
-              <a:spcAft>
-                <a:spcPts val="118"/>
-              </a:spcAft>
             </a:pPr>
             <a:r>
               <a:rPr sz="990" b="0" i="0">
@@ -16952,6 +17429,29 @@
               <a:t>• 1인칭의 깊은 정서적 몰입감과 3인칭의 객관적 묘사력을 동시에 확보</a:t>
             </a:r>
           </a:p>
+        </p:txBody>
+      </p:sp>
+      <p:sp>
+        <p:nvSpPr>
+          <p:cNvPr id="42" name="TextBox 41"/>
+          <p:cNvSpPr txBox="1"/>
+          <p:nvPr/>
+        </p:nvSpPr>
+        <p:spPr>
+          <a:xfrm>
+            <a:off x="5074919" y="3445011"/>
+            <a:ext cx="2148839" cy="261051"/>
+          </a:xfrm>
+          <a:prstGeom prst="rect">
+            <a:avLst/>
+          </a:prstGeom>
+          <a:noFill/>
+        </p:spPr>
+        <p:txBody>
+          <a:bodyPr wrap="square" anchor="t" lIns="9144" rIns="9144" tIns="0" bIns="0">
+            <a:noAutofit/>
+          </a:bodyPr>
+          <a:lstStyle/>
           <a:p>
             <a:pPr algn="l">
               <a:lnSpc>
@@ -16973,7 +17473,7 @@
       </p:sp>
       <p:sp>
         <p:nvSpPr>
-          <p:cNvPr id="36" name="Rectangle 35"/>
+          <p:cNvPr id="43" name="Rectangle 42"/>
           <p:cNvSpPr/>
           <p:nvPr/>
         </p:nvSpPr>
@@ -17019,7 +17519,7 @@
       </p:sp>
       <p:sp>
         <p:nvSpPr>
-          <p:cNvPr id="37" name="TextBox 36"/>
+          <p:cNvPr id="44" name="TextBox 43"/>
           <p:cNvSpPr txBox="1"/>
           <p:nvPr/>
         </p:nvSpPr>
@@ -17059,7 +17559,7 @@
       </p:sp>
       <p:sp>
         <p:nvSpPr>
-          <p:cNvPr id="38" name="Rectangle 37"/>
+          <p:cNvPr id="45" name="Rectangle 44"/>
           <p:cNvSpPr/>
           <p:nvPr/>
         </p:nvSpPr>
@@ -17105,22 +17605,22 @@
       </p:sp>
       <p:sp>
         <p:nvSpPr>
-          <p:cNvPr id="39" name="TextBox 38"/>
-          <p:cNvSpPr txBox="1"/>
-          <p:nvPr/>
-        </p:nvSpPr>
-        <p:spPr>
-          <a:xfrm>
-            <a:off x="9646919" y="2889504"/>
-            <a:ext cx="1856231" cy="822960"/>
-          </a:xfrm>
-          <a:prstGeom prst="rect">
-            <a:avLst/>
-          </a:prstGeom>
-          <a:noFill/>
-        </p:spPr>
-        <p:txBody>
-          <a:bodyPr wrap="square" anchor="ctr" lIns="9144" rIns="9144" tIns="6400" bIns="6400">
+          <p:cNvPr id="46" name="TextBox 45"/>
+          <p:cNvSpPr txBox="1"/>
+          <p:nvPr/>
+        </p:nvSpPr>
+        <p:spPr>
+          <a:xfrm>
+            <a:off x="9646919" y="2895904"/>
+            <a:ext cx="1856231" cy="397535"/>
+          </a:xfrm>
+          <a:prstGeom prst="rect">
+            <a:avLst/>
+          </a:prstGeom>
+          <a:noFill/>
+        </p:spPr>
+        <p:txBody>
+          <a:bodyPr wrap="square" anchor="t" lIns="9144" rIns="9144" tIns="0" bIns="0">
             <a:noAutofit/>
           </a:bodyPr>
           <a:lstStyle/>
@@ -17129,9 +17629,6 @@
               <a:lnSpc>
                 <a:spcPct val="122000"/>
               </a:lnSpc>
-              <a:spcAft>
-                <a:spcPts val="118"/>
-              </a:spcAft>
             </a:pPr>
             <a:r>
               <a:rPr sz="990" b="0" i="0">
@@ -17144,6 +17641,29 @@
               <a:t>현대 문학 전반, 장르소설,</a:t>
             </a:r>
           </a:p>
+        </p:txBody>
+      </p:sp>
+      <p:sp>
+        <p:nvSpPr>
+          <p:cNvPr id="47" name="TextBox 46"/>
+          <p:cNvSpPr txBox="1"/>
+          <p:nvPr/>
+        </p:nvSpPr>
+        <p:spPr>
+          <a:xfrm>
+            <a:off x="9646919" y="3308527"/>
+            <a:ext cx="1856231" cy="397535"/>
+          </a:xfrm>
+          <a:prstGeom prst="rect">
+            <a:avLst/>
+          </a:prstGeom>
+          <a:noFill/>
+        </p:spPr>
+        <p:txBody>
+          <a:bodyPr wrap="square" anchor="t" lIns="9144" rIns="9144" tIns="0" bIns="0">
+            <a:noAutofit/>
+          </a:bodyPr>
+          <a:lstStyle/>
           <a:p>
             <a:pPr algn="l">
               <a:lnSpc>
@@ -17165,7 +17685,7 @@
       </p:sp>
       <p:sp>
         <p:nvSpPr>
-          <p:cNvPr id="40" name="Rectangle 39"/>
+          <p:cNvPr id="48" name="Rectangle 47"/>
           <p:cNvSpPr/>
           <p:nvPr/>
         </p:nvSpPr>
@@ -17211,22 +17731,22 @@
       </p:sp>
       <p:sp>
         <p:nvSpPr>
-          <p:cNvPr id="41" name="TextBox 40"/>
-          <p:cNvSpPr txBox="1"/>
-          <p:nvPr/>
-        </p:nvSpPr>
-        <p:spPr>
-          <a:xfrm>
-            <a:off x="685800" y="3858768"/>
-            <a:ext cx="1691639" cy="822960"/>
-          </a:xfrm>
-          <a:prstGeom prst="rect">
-            <a:avLst/>
-          </a:prstGeom>
-          <a:noFill/>
-        </p:spPr>
-        <p:txBody>
-          <a:bodyPr wrap="square" anchor="ctr" lIns="9144" rIns="9144" tIns="6400" bIns="6400">
+          <p:cNvPr id="49" name="TextBox 48"/>
+          <p:cNvSpPr txBox="1"/>
+          <p:nvPr/>
+        </p:nvSpPr>
+        <p:spPr>
+          <a:xfrm>
+            <a:off x="685800" y="3865168"/>
+            <a:ext cx="1691639" cy="397078"/>
+          </a:xfrm>
+          <a:prstGeom prst="rect">
+            <a:avLst/>
+          </a:prstGeom>
+          <a:noFill/>
+        </p:spPr>
+        <p:txBody>
+          <a:bodyPr wrap="square" anchor="t" lIns="9144" rIns="9144" tIns="0" bIns="0">
             <a:noAutofit/>
           </a:bodyPr>
           <a:lstStyle/>
@@ -17235,9 +17755,6 @@
               <a:lnSpc>
                 <a:spcPct val="122000"/>
               </a:lnSpc>
-              <a:spcAft>
-                <a:spcPts val="126"/>
-              </a:spcAft>
             </a:pPr>
             <a:r>
               <a:rPr sz="1050" b="1" i="0">
@@ -17250,6 +17767,29 @@
               <a:t>3인칭 전지적 시점</a:t>
             </a:r>
           </a:p>
+        </p:txBody>
+      </p:sp>
+      <p:sp>
+        <p:nvSpPr>
+          <p:cNvPr id="50" name="TextBox 49"/>
+          <p:cNvSpPr txBox="1"/>
+          <p:nvPr/>
+        </p:nvSpPr>
+        <p:spPr>
+          <a:xfrm>
+            <a:off x="685800" y="4278249"/>
+            <a:ext cx="1691639" cy="397078"/>
+          </a:xfrm>
+          <a:prstGeom prst="rect">
+            <a:avLst/>
+          </a:prstGeom>
+          <a:noFill/>
+        </p:spPr>
+        <p:txBody>
+          <a:bodyPr wrap="square" anchor="t" lIns="9144" rIns="9144" tIns="0" bIns="0">
+            <a:noAutofit/>
+          </a:bodyPr>
+          <a:lstStyle/>
           <a:p>
             <a:pPr algn="l">
               <a:lnSpc>
@@ -17271,7 +17811,7 @@
       </p:sp>
       <p:sp>
         <p:nvSpPr>
-          <p:cNvPr id="42" name="Rectangle 41"/>
+          <p:cNvPr id="51" name="Rectangle 50"/>
           <p:cNvSpPr/>
           <p:nvPr/>
         </p:nvSpPr>
@@ -17317,7 +17857,7 @@
       </p:sp>
       <p:sp>
         <p:nvSpPr>
-          <p:cNvPr id="43" name="TextBox 42"/>
+          <p:cNvPr id="52" name="TextBox 51"/>
           <p:cNvSpPr txBox="1"/>
           <p:nvPr/>
         </p:nvSpPr>
@@ -17357,7 +17897,7 @@
       </p:sp>
       <p:sp>
         <p:nvSpPr>
-          <p:cNvPr id="44" name="Rectangle 43"/>
+          <p:cNvPr id="53" name="Rectangle 52"/>
           <p:cNvSpPr/>
           <p:nvPr/>
         </p:nvSpPr>
@@ -17403,22 +17943,22 @@
       </p:sp>
       <p:sp>
         <p:nvSpPr>
-          <p:cNvPr id="45" name="TextBox 44"/>
-          <p:cNvSpPr txBox="1"/>
-          <p:nvPr/>
-        </p:nvSpPr>
-        <p:spPr>
-          <a:xfrm>
-            <a:off x="5074919" y="3858768"/>
-            <a:ext cx="2148839" cy="822960"/>
-          </a:xfrm>
-          <a:prstGeom prst="rect">
-            <a:avLst/>
-          </a:prstGeom>
-          <a:noFill/>
-        </p:spPr>
-        <p:txBody>
-          <a:bodyPr wrap="square" anchor="ctr" lIns="9144" rIns="9144" tIns="6400" bIns="6400">
+          <p:cNvPr id="54" name="TextBox 53"/>
+          <p:cNvSpPr txBox="1"/>
+          <p:nvPr/>
+        </p:nvSpPr>
+        <p:spPr>
+          <a:xfrm>
+            <a:off x="5074919" y="3865168"/>
+            <a:ext cx="2148839" cy="261051"/>
+          </a:xfrm>
+          <a:prstGeom prst="rect">
+            <a:avLst/>
+          </a:prstGeom>
+          <a:noFill/>
+        </p:spPr>
+        <p:txBody>
+          <a:bodyPr wrap="square" anchor="t" lIns="9144" rIns="9144" tIns="0" bIns="0">
             <a:noAutofit/>
           </a:bodyPr>
           <a:lstStyle/>
@@ -17427,9 +17967,6 @@
               <a:lnSpc>
                 <a:spcPct val="122000"/>
               </a:lnSpc>
-              <a:spcAft>
-                <a:spcPts val="118"/>
-              </a:spcAft>
             </a:pPr>
             <a:r>
               <a:rPr sz="990" b="0" i="0">
@@ -17442,6 +17979,29 @@
               <a:t>• 방대한 세계관과 시대상을 조망</a:t>
             </a:r>
           </a:p>
+        </p:txBody>
+      </p:sp>
+      <p:sp>
+        <p:nvSpPr>
+          <p:cNvPr id="55" name="TextBox 54"/>
+          <p:cNvSpPr txBox="1"/>
+          <p:nvPr/>
+        </p:nvSpPr>
+        <p:spPr>
+          <a:xfrm>
+            <a:off x="5074919" y="4141308"/>
+            <a:ext cx="2148839" cy="534018"/>
+          </a:xfrm>
+          <a:prstGeom prst="rect">
+            <a:avLst/>
+          </a:prstGeom>
+          <a:noFill/>
+        </p:spPr>
+        <p:txBody>
+          <a:bodyPr wrap="square" anchor="t" lIns="9144" rIns="9144" tIns="0" bIns="0">
+            <a:noAutofit/>
+          </a:bodyPr>
+          <a:lstStyle/>
           <a:p>
             <a:pPr algn="l">
               <a:lnSpc>
@@ -17463,7 +18023,7 @@
       </p:sp>
       <p:sp>
         <p:nvSpPr>
-          <p:cNvPr id="46" name="Rectangle 45"/>
+          <p:cNvPr id="56" name="Rectangle 55"/>
           <p:cNvSpPr/>
           <p:nvPr/>
         </p:nvSpPr>
@@ -17509,7 +18069,7 @@
       </p:sp>
       <p:sp>
         <p:nvSpPr>
-          <p:cNvPr id="47" name="TextBox 46"/>
+          <p:cNvPr id="57" name="TextBox 56"/>
           <p:cNvSpPr txBox="1"/>
           <p:nvPr/>
         </p:nvSpPr>
@@ -17549,7 +18109,7 @@
       </p:sp>
       <p:sp>
         <p:nvSpPr>
-          <p:cNvPr id="48" name="Rectangle 47"/>
+          <p:cNvPr id="58" name="Rectangle 57"/>
           <p:cNvSpPr/>
           <p:nvPr/>
         </p:nvSpPr>
@@ -17595,22 +18155,22 @@
       </p:sp>
       <p:sp>
         <p:nvSpPr>
-          <p:cNvPr id="49" name="TextBox 48"/>
-          <p:cNvSpPr txBox="1"/>
-          <p:nvPr/>
-        </p:nvSpPr>
-        <p:spPr>
-          <a:xfrm>
-            <a:off x="9646919" y="3858768"/>
-            <a:ext cx="1856231" cy="822960"/>
-          </a:xfrm>
-          <a:prstGeom prst="rect">
-            <a:avLst/>
-          </a:prstGeom>
-          <a:noFill/>
-        </p:spPr>
-        <p:txBody>
-          <a:bodyPr wrap="square" anchor="ctr" lIns="9144" rIns="9144" tIns="6400" bIns="6400">
+          <p:cNvPr id="59" name="TextBox 58"/>
+          <p:cNvSpPr txBox="1"/>
+          <p:nvPr/>
+        </p:nvSpPr>
+        <p:spPr>
+          <a:xfrm>
+            <a:off x="9646919" y="3865168"/>
+            <a:ext cx="1856231" cy="397535"/>
+          </a:xfrm>
+          <a:prstGeom prst="rect">
+            <a:avLst/>
+          </a:prstGeom>
+          <a:noFill/>
+        </p:spPr>
+        <p:txBody>
+          <a:bodyPr wrap="square" anchor="t" lIns="9144" rIns="9144" tIns="0" bIns="0">
             <a:noAutofit/>
           </a:bodyPr>
           <a:lstStyle/>
@@ -17619,9 +18179,6 @@
               <a:lnSpc>
                 <a:spcPct val="122000"/>
               </a:lnSpc>
-              <a:spcAft>
-                <a:spcPts val="118"/>
-              </a:spcAft>
             </a:pPr>
             <a:r>
               <a:rPr sz="990" b="0" i="0">
@@ -17634,6 +18191,29 @@
               <a:t>대하 역사소설, 가족 사가(Saga),</a:t>
             </a:r>
           </a:p>
+        </p:txBody>
+      </p:sp>
+      <p:sp>
+        <p:nvSpPr>
+          <p:cNvPr id="60" name="TextBox 59"/>
+          <p:cNvSpPr txBox="1"/>
+          <p:nvPr/>
+        </p:nvSpPr>
+        <p:spPr>
+          <a:xfrm>
+            <a:off x="9646919" y="4277791"/>
+            <a:ext cx="1856231" cy="397535"/>
+          </a:xfrm>
+          <a:prstGeom prst="rect">
+            <a:avLst/>
+          </a:prstGeom>
+          <a:noFill/>
+        </p:spPr>
+        <p:txBody>
+          <a:bodyPr wrap="square" anchor="t" lIns="9144" rIns="9144" tIns="0" bIns="0">
+            <a:noAutofit/>
+          </a:bodyPr>
+          <a:lstStyle/>
           <a:p>
             <a:pPr algn="l">
               <a:lnSpc>
@@ -17655,7 +18235,7 @@
       </p:sp>
       <p:sp>
         <p:nvSpPr>
-          <p:cNvPr id="50" name="Rectangle 49"/>
+          <p:cNvPr id="61" name="Rectangle 60"/>
           <p:cNvSpPr/>
           <p:nvPr/>
         </p:nvSpPr>
@@ -17701,22 +18281,22 @@
       </p:sp>
       <p:sp>
         <p:nvSpPr>
-          <p:cNvPr id="51" name="TextBox 50"/>
-          <p:cNvSpPr txBox="1"/>
-          <p:nvPr/>
-        </p:nvSpPr>
-        <p:spPr>
-          <a:xfrm>
-            <a:off x="685800" y="4828032"/>
-            <a:ext cx="1691639" cy="822960"/>
-          </a:xfrm>
-          <a:prstGeom prst="rect">
-            <a:avLst/>
-          </a:prstGeom>
-          <a:noFill/>
-        </p:spPr>
-        <p:txBody>
-          <a:bodyPr wrap="square" anchor="ctr" lIns="9144" rIns="9144" tIns="6400" bIns="6400">
+          <p:cNvPr id="62" name="TextBox 61"/>
+          <p:cNvSpPr txBox="1"/>
+          <p:nvPr/>
+        </p:nvSpPr>
+        <p:spPr>
+          <a:xfrm>
+            <a:off x="685800" y="4834432"/>
+            <a:ext cx="1691639" cy="397078"/>
+          </a:xfrm>
+          <a:prstGeom prst="rect">
+            <a:avLst/>
+          </a:prstGeom>
+          <a:noFill/>
+        </p:spPr>
+        <p:txBody>
+          <a:bodyPr wrap="square" anchor="t" lIns="9144" rIns="9144" tIns="0" bIns="0">
             <a:noAutofit/>
           </a:bodyPr>
           <a:lstStyle/>
@@ -17725,9 +18305,6 @@
               <a:lnSpc>
                 <a:spcPct val="122000"/>
               </a:lnSpc>
-              <a:spcAft>
-                <a:spcPts val="126"/>
-              </a:spcAft>
             </a:pPr>
             <a:r>
               <a:rPr sz="1050" b="1" i="0">
@@ -17740,6 +18317,29 @@
               <a:t>다중 교차 시점</a:t>
             </a:r>
           </a:p>
+        </p:txBody>
+      </p:sp>
+      <p:sp>
+        <p:nvSpPr>
+          <p:cNvPr id="63" name="TextBox 62"/>
+          <p:cNvSpPr txBox="1"/>
+          <p:nvPr/>
+        </p:nvSpPr>
+        <p:spPr>
+          <a:xfrm>
+            <a:off x="685800" y="5247513"/>
+            <a:ext cx="1691639" cy="397078"/>
+          </a:xfrm>
+          <a:prstGeom prst="rect">
+            <a:avLst/>
+          </a:prstGeom>
+          <a:noFill/>
+        </p:spPr>
+        <p:txBody>
+          <a:bodyPr wrap="square" anchor="t" lIns="9144" rIns="9144" tIns="0" bIns="0">
+            <a:noAutofit/>
+          </a:bodyPr>
+          <a:lstStyle/>
           <a:p>
             <a:pPr algn="l">
               <a:lnSpc>
@@ -17761,7 +18361,7 @@
       </p:sp>
       <p:sp>
         <p:nvSpPr>
-          <p:cNvPr id="52" name="Rectangle 51"/>
+          <p:cNvPr id="64" name="Rectangle 63"/>
           <p:cNvSpPr/>
           <p:nvPr/>
         </p:nvSpPr>
@@ -17807,7 +18407,7 @@
       </p:sp>
       <p:sp>
         <p:nvSpPr>
-          <p:cNvPr id="53" name="TextBox 52"/>
+          <p:cNvPr id="65" name="TextBox 64"/>
           <p:cNvSpPr txBox="1"/>
           <p:nvPr/>
         </p:nvSpPr>
@@ -17847,7 +18447,7 @@
       </p:sp>
       <p:sp>
         <p:nvSpPr>
-          <p:cNvPr id="54" name="Rectangle 53"/>
+          <p:cNvPr id="66" name="Rectangle 65"/>
           <p:cNvSpPr/>
           <p:nvPr/>
         </p:nvSpPr>
@@ -17893,22 +18493,22 @@
       </p:sp>
       <p:sp>
         <p:nvSpPr>
-          <p:cNvPr id="55" name="TextBox 54"/>
-          <p:cNvSpPr txBox="1"/>
-          <p:nvPr/>
-        </p:nvSpPr>
-        <p:spPr>
-          <a:xfrm>
-            <a:off x="5074919" y="4828032"/>
-            <a:ext cx="2148839" cy="822960"/>
-          </a:xfrm>
-          <a:prstGeom prst="rect">
-            <a:avLst/>
-          </a:prstGeom>
-          <a:noFill/>
-        </p:spPr>
-        <p:txBody>
-          <a:bodyPr wrap="square" anchor="ctr" lIns="9144" rIns="9144" tIns="6400" bIns="6400">
+          <p:cNvPr id="67" name="TextBox 66"/>
+          <p:cNvSpPr txBox="1"/>
+          <p:nvPr/>
+        </p:nvSpPr>
+        <p:spPr>
+          <a:xfrm>
+            <a:off x="5074919" y="4834432"/>
+            <a:ext cx="2148839" cy="261051"/>
+          </a:xfrm>
+          <a:prstGeom prst="rect">
+            <a:avLst/>
+          </a:prstGeom>
+          <a:noFill/>
+        </p:spPr>
+        <p:txBody>
+          <a:bodyPr wrap="square" anchor="t" lIns="9144" rIns="9144" tIns="0" bIns="0">
             <a:noAutofit/>
           </a:bodyPr>
           <a:lstStyle/>
@@ -17917,9 +18517,6 @@
               <a:lnSpc>
                 <a:spcPct val="122000"/>
               </a:lnSpc>
-              <a:spcAft>
-                <a:spcPts val="118"/>
-              </a:spcAft>
             </a:pPr>
             <a:r>
               <a:rPr sz="990" b="0" i="0">
@@ -17932,6 +18529,29 @@
               <a:t>• 주인공과 적대자 양측의 정당성 부여</a:t>
             </a:r>
           </a:p>
+        </p:txBody>
+      </p:sp>
+      <p:sp>
+        <p:nvSpPr>
+          <p:cNvPr id="68" name="TextBox 67"/>
+          <p:cNvSpPr txBox="1"/>
+          <p:nvPr/>
+        </p:nvSpPr>
+        <p:spPr>
+          <a:xfrm>
+            <a:off x="5074919" y="5110572"/>
+            <a:ext cx="2148839" cy="534018"/>
+          </a:xfrm>
+          <a:prstGeom prst="rect">
+            <a:avLst/>
+          </a:prstGeom>
+          <a:noFill/>
+        </p:spPr>
+        <p:txBody>
+          <a:bodyPr wrap="square" anchor="t" lIns="9144" rIns="9144" tIns="0" bIns="0">
+            <a:noAutofit/>
+          </a:bodyPr>
+          <a:lstStyle/>
           <a:p>
             <a:pPr algn="l">
               <a:lnSpc>
@@ -17953,7 +18573,7 @@
       </p:sp>
       <p:sp>
         <p:nvSpPr>
-          <p:cNvPr id="56" name="Rectangle 55"/>
+          <p:cNvPr id="69" name="Rectangle 68"/>
           <p:cNvSpPr/>
           <p:nvPr/>
         </p:nvSpPr>
@@ -17999,22 +18619,22 @@
       </p:sp>
       <p:sp>
         <p:nvSpPr>
-          <p:cNvPr id="57" name="TextBox 56"/>
-          <p:cNvSpPr txBox="1"/>
-          <p:nvPr/>
-        </p:nvSpPr>
-        <p:spPr>
-          <a:xfrm>
-            <a:off x="7406640" y="4828032"/>
-            <a:ext cx="2057400" cy="822960"/>
-          </a:xfrm>
-          <a:prstGeom prst="rect">
-            <a:avLst/>
-          </a:prstGeom>
-          <a:noFill/>
-        </p:spPr>
-        <p:txBody>
-          <a:bodyPr wrap="square" anchor="ctr" lIns="9144" rIns="9144" tIns="6400" bIns="6400">
+          <p:cNvPr id="70" name="TextBox 69"/>
+          <p:cNvSpPr txBox="1"/>
+          <p:nvPr/>
+        </p:nvSpPr>
+        <p:spPr>
+          <a:xfrm>
+            <a:off x="7406640" y="4834432"/>
+            <a:ext cx="2057400" cy="520994"/>
+          </a:xfrm>
+          <a:prstGeom prst="rect">
+            <a:avLst/>
+          </a:prstGeom>
+          <a:noFill/>
+        </p:spPr>
+        <p:txBody>
+          <a:bodyPr wrap="square" anchor="t" lIns="9144" rIns="9144" tIns="0" bIns="0">
             <a:noAutofit/>
           </a:bodyPr>
           <a:lstStyle/>
@@ -18023,9 +18643,6 @@
               <a:lnSpc>
                 <a:spcPct val="122000"/>
               </a:lnSpc>
-              <a:spcAft>
-                <a:spcPts val="106"/>
-              </a:spcAft>
             </a:pPr>
             <a:r>
               <a:rPr sz="890" b="0" i="0">
@@ -18038,6 +18655,29 @@
               <a:t>• 시점 인물 간 목소리가 비슷하면 독자가 화자를 혼동</a:t>
             </a:r>
           </a:p>
+        </p:txBody>
+      </p:sp>
+      <p:sp>
+        <p:nvSpPr>
+          <p:cNvPr id="71" name="TextBox 70"/>
+          <p:cNvSpPr txBox="1"/>
+          <p:nvPr/>
+        </p:nvSpPr>
+        <p:spPr>
+          <a:xfrm>
+            <a:off x="7406640" y="5368991"/>
+            <a:ext cx="2057400" cy="275600"/>
+          </a:xfrm>
+          <a:prstGeom prst="rect">
+            <a:avLst/>
+          </a:prstGeom>
+          <a:noFill/>
+        </p:spPr>
+        <p:txBody>
+          <a:bodyPr wrap="square" anchor="t" lIns="9144" rIns="9144" tIns="0" bIns="0">
+            <a:noAutofit/>
+          </a:bodyPr>
+          <a:lstStyle/>
           <a:p>
             <a:pPr algn="l">
               <a:lnSpc>
@@ -18059,7 +18699,7 @@
       </p:sp>
       <p:sp>
         <p:nvSpPr>
-          <p:cNvPr id="58" name="Rectangle 57"/>
+          <p:cNvPr id="72" name="Rectangle 71"/>
           <p:cNvSpPr/>
           <p:nvPr/>
         </p:nvSpPr>
@@ -18105,22 +18745,22 @@
       </p:sp>
       <p:sp>
         <p:nvSpPr>
-          <p:cNvPr id="59" name="TextBox 58"/>
-          <p:cNvSpPr txBox="1"/>
-          <p:nvPr/>
-        </p:nvSpPr>
-        <p:spPr>
-          <a:xfrm>
-            <a:off x="9646919" y="4828032"/>
-            <a:ext cx="1856231" cy="822960"/>
-          </a:xfrm>
-          <a:prstGeom prst="rect">
-            <a:avLst/>
-          </a:prstGeom>
-          <a:noFill/>
-        </p:spPr>
-        <p:txBody>
-          <a:bodyPr wrap="square" anchor="ctr" lIns="9144" rIns="9144" tIns="6400" bIns="6400">
+          <p:cNvPr id="73" name="TextBox 72"/>
+          <p:cNvSpPr txBox="1"/>
+          <p:nvPr/>
+        </p:nvSpPr>
+        <p:spPr>
+          <a:xfrm>
+            <a:off x="9646919" y="4834432"/>
+            <a:ext cx="1856231" cy="397535"/>
+          </a:xfrm>
+          <a:prstGeom prst="rect">
+            <a:avLst/>
+          </a:prstGeom>
+          <a:noFill/>
+        </p:spPr>
+        <p:txBody>
+          <a:bodyPr wrap="square" anchor="t" lIns="9144" rIns="9144" tIns="0" bIns="0">
             <a:noAutofit/>
           </a:bodyPr>
           <a:lstStyle/>
@@ -18129,9 +18769,6 @@
               <a:lnSpc>
                 <a:spcPct val="122000"/>
               </a:lnSpc>
-              <a:spcAft>
-                <a:spcPts val="118"/>
-              </a:spcAft>
             </a:pPr>
             <a:r>
               <a:rPr sz="990" b="0" i="0">
@@ -18144,6 +18781,29 @@
               <a:t>군상극, 범죄 스릴러,</a:t>
             </a:r>
           </a:p>
+        </p:txBody>
+      </p:sp>
+      <p:sp>
+        <p:nvSpPr>
+          <p:cNvPr id="74" name="TextBox 73"/>
+          <p:cNvSpPr txBox="1"/>
+          <p:nvPr/>
+        </p:nvSpPr>
+        <p:spPr>
+          <a:xfrm>
+            <a:off x="9646919" y="5247055"/>
+            <a:ext cx="1856231" cy="397535"/>
+          </a:xfrm>
+          <a:prstGeom prst="rect">
+            <a:avLst/>
+          </a:prstGeom>
+          <a:noFill/>
+        </p:spPr>
+        <p:txBody>
+          <a:bodyPr wrap="square" anchor="t" lIns="9144" rIns="9144" tIns="0" bIns="0">
+            <a:noAutofit/>
+          </a:bodyPr>
+          <a:lstStyle/>
           <a:p>
             <a:pPr algn="l">
               <a:lnSpc>
@@ -18165,7 +18825,7 @@
       </p:sp>
       <p:sp>
         <p:nvSpPr>
-          <p:cNvPr id="60" name="Rounded Rectangle 59"/>
+          <p:cNvPr id="75" name="Rounded Rectangle 74"/>
           <p:cNvSpPr/>
           <p:nvPr/>
         </p:nvSpPr>
@@ -18213,7 +18873,7 @@
       </p:sp>
       <p:sp>
         <p:nvSpPr>
-          <p:cNvPr id="61" name="TextBox 60"/>
+          <p:cNvPr id="76" name="TextBox 75"/>
           <p:cNvSpPr txBox="1"/>
           <p:nvPr/>
         </p:nvSpPr>
@@ -20811,16 +21471,16 @@
         </p:nvSpPr>
         <p:spPr>
           <a:xfrm>
-            <a:off x="804672" y="1901952"/>
-            <a:ext cx="3749039" cy="1051560"/>
-          </a:xfrm>
-          <a:prstGeom prst="rect">
-            <a:avLst/>
-          </a:prstGeom>
-          <a:noFill/>
-        </p:spPr>
-        <p:txBody>
-          <a:bodyPr wrap="square" anchor="t" lIns="9144" rIns="9144" tIns="6400" bIns="6400">
+            <a:off x="804672" y="1908352"/>
+            <a:ext cx="3749039" cy="247611"/>
+          </a:xfrm>
+          <a:prstGeom prst="rect">
+            <a:avLst/>
+          </a:prstGeom>
+          <a:noFill/>
+        </p:spPr>
+        <p:txBody>
+          <a:bodyPr wrap="square" anchor="t" lIns="9144" rIns="9144" tIns="0" bIns="0">
             <a:noAutofit/>
           </a:bodyPr>
           <a:lstStyle/>
@@ -20829,9 +21489,6 @@
               <a:lnSpc>
                 <a:spcPct val="132000"/>
               </a:lnSpc>
-              <a:spcAft>
-                <a:spcPts val="108"/>
-              </a:spcAft>
             </a:pPr>
             <a:r>
               <a:rPr sz="900" b="0" i="0">
@@ -20844,14 +21501,34 @@
               <a:t>“초고를 쓸 때는 내면의 편집자를 방문 밖에 가두어라.”</a:t>
             </a:r>
           </a:p>
+        </p:txBody>
+      </p:sp>
+      <p:sp>
+        <p:nvSpPr>
+          <p:cNvPr id="13" name="TextBox 12"/>
+          <p:cNvSpPr txBox="1"/>
+          <p:nvPr/>
+        </p:nvSpPr>
+        <p:spPr>
+          <a:xfrm>
+            <a:off x="804672" y="2169680"/>
+            <a:ext cx="3749039" cy="247611"/>
+          </a:xfrm>
+          <a:prstGeom prst="rect">
+            <a:avLst/>
+          </a:prstGeom>
+          <a:noFill/>
+        </p:spPr>
+        <p:txBody>
+          <a:bodyPr wrap="square" anchor="t" lIns="9144" rIns="9144" tIns="0" bIns="0">
+            <a:noAutofit/>
+          </a:bodyPr>
+          <a:lstStyle/>
           <a:p>
             <a:pPr algn="l">
               <a:lnSpc>
                 <a:spcPct val="132000"/>
               </a:lnSpc>
-              <a:spcAft>
-                <a:spcPts val="108"/>
-              </a:spcAft>
             </a:pPr>
             <a:r>
               <a:rPr sz="900" b="0" i="0">
@@ -20864,6 +21541,29 @@
               <a:t/>
             </a:r>
           </a:p>
+        </p:txBody>
+      </p:sp>
+      <p:sp>
+        <p:nvSpPr>
+          <p:cNvPr id="14" name="TextBox 13"/>
+          <p:cNvSpPr txBox="1"/>
+          <p:nvPr/>
+        </p:nvSpPr>
+        <p:spPr>
+          <a:xfrm>
+            <a:off x="804672" y="2431007"/>
+            <a:ext cx="3749039" cy="516103"/>
+          </a:xfrm>
+          <a:prstGeom prst="rect">
+            <a:avLst/>
+          </a:prstGeom>
+          <a:noFill/>
+        </p:spPr>
+        <p:txBody>
+          <a:bodyPr wrap="square" anchor="t" lIns="9144" rIns="9144" tIns="0" bIns="0">
+            <a:noAutofit/>
+          </a:bodyPr>
+          <a:lstStyle/>
           <a:p>
             <a:pPr algn="l">
               <a:lnSpc>
@@ -20885,7 +21585,7 @@
       </p:sp>
       <p:sp>
         <p:nvSpPr>
-          <p:cNvPr id="13" name="Rounded Rectangle 12"/>
+          <p:cNvPr id="15" name="Rounded Rectangle 14"/>
           <p:cNvSpPr/>
           <p:nvPr/>
         </p:nvSpPr>
@@ -20933,7 +21633,7 @@
       </p:sp>
       <p:sp>
         <p:nvSpPr>
-          <p:cNvPr id="14" name="TextBox 13"/>
+          <p:cNvPr id="16" name="TextBox 15"/>
           <p:cNvSpPr txBox="1"/>
           <p:nvPr/>
         </p:nvSpPr>
@@ -20973,7 +21673,7 @@
       </p:sp>
       <p:sp>
         <p:nvSpPr>
-          <p:cNvPr id="15" name="Rectangle 14"/>
+          <p:cNvPr id="17" name="Rectangle 16"/>
           <p:cNvSpPr/>
           <p:nvPr/>
         </p:nvSpPr>
@@ -21017,7 +21717,7 @@
       </p:sp>
       <p:sp>
         <p:nvSpPr>
-          <p:cNvPr id="16" name="TextBox 15"/>
+          <p:cNvPr id="18" name="TextBox 17"/>
           <p:cNvSpPr txBox="1"/>
           <p:nvPr/>
         </p:nvSpPr>
@@ -21057,7 +21757,7 @@
       </p:sp>
       <p:sp>
         <p:nvSpPr>
-          <p:cNvPr id="17" name="Rectangle 16"/>
+          <p:cNvPr id="19" name="Rectangle 18"/>
           <p:cNvSpPr/>
           <p:nvPr/>
         </p:nvSpPr>
@@ -21101,7 +21801,7 @@
       </p:sp>
       <p:sp>
         <p:nvSpPr>
-          <p:cNvPr id="18" name="TextBox 17"/>
+          <p:cNvPr id="20" name="TextBox 19"/>
           <p:cNvSpPr txBox="1"/>
           <p:nvPr/>
         </p:nvSpPr>
@@ -21141,7 +21841,7 @@
       </p:sp>
       <p:sp>
         <p:nvSpPr>
-          <p:cNvPr id="19" name="Rectangle 18"/>
+          <p:cNvPr id="21" name="Rectangle 20"/>
           <p:cNvSpPr/>
           <p:nvPr/>
         </p:nvSpPr>
@@ -21185,7 +21885,7 @@
       </p:sp>
       <p:sp>
         <p:nvSpPr>
-          <p:cNvPr id="20" name="TextBox 19"/>
+          <p:cNvPr id="22" name="TextBox 21"/>
           <p:cNvSpPr txBox="1"/>
           <p:nvPr/>
         </p:nvSpPr>
@@ -21225,22 +21925,22 @@
       </p:sp>
       <p:sp>
         <p:nvSpPr>
-          <p:cNvPr id="21" name="TextBox 20"/>
-          <p:cNvSpPr txBox="1"/>
-          <p:nvPr/>
-        </p:nvSpPr>
-        <p:spPr>
-          <a:xfrm>
-            <a:off x="950976" y="4041648"/>
-            <a:ext cx="3474720" cy="502920"/>
-          </a:xfrm>
-          <a:prstGeom prst="rect">
-            <a:avLst/>
-          </a:prstGeom>
-          <a:noFill/>
-        </p:spPr>
-        <p:txBody>
-          <a:bodyPr wrap="square" anchor="t" lIns="9144" rIns="9144" tIns="6400" bIns="6400">
+          <p:cNvPr id="23" name="TextBox 22"/>
+          <p:cNvSpPr txBox="1"/>
+          <p:nvPr/>
+        </p:nvSpPr>
+        <p:spPr>
+          <a:xfrm>
+            <a:off x="950976" y="4048048"/>
+            <a:ext cx="3474720" cy="238353"/>
+          </a:xfrm>
+          <a:prstGeom prst="rect">
+            <a:avLst/>
+          </a:prstGeom>
+          <a:noFill/>
+        </p:spPr>
+        <p:txBody>
+          <a:bodyPr wrap="square" anchor="t" lIns="9144" rIns="9144" tIns="0" bIns="0">
             <a:noAutofit/>
           </a:bodyPr>
           <a:lstStyle/>
@@ -21249,9 +21949,6 @@
               <a:lnSpc>
                 <a:spcPct val="125000"/>
               </a:lnSpc>
-              <a:spcAft>
-                <a:spcPts val="105"/>
-              </a:spcAft>
             </a:pPr>
             <a:r>
               <a:rPr sz="880" b="0" i="0">
@@ -21264,6 +21961,29 @@
               <a:t>• 기획·구조 설계 (20%)  • 초고 집필 (30%)</a:t>
             </a:r>
           </a:p>
+        </p:txBody>
+      </p:sp>
+      <p:sp>
+        <p:nvSpPr>
+          <p:cNvPr id="24" name="TextBox 23"/>
+          <p:cNvSpPr txBox="1"/>
+          <p:nvPr/>
+        </p:nvSpPr>
+        <p:spPr>
+          <a:xfrm>
+            <a:off x="950976" y="4299813"/>
+            <a:ext cx="3474720" cy="238353"/>
+          </a:xfrm>
+          <a:prstGeom prst="rect">
+            <a:avLst/>
+          </a:prstGeom>
+          <a:noFill/>
+        </p:spPr>
+        <p:txBody>
+          <a:bodyPr wrap="square" anchor="t" lIns="9144" rIns="9144" tIns="0" bIns="0">
+            <a:noAutofit/>
+          </a:bodyPr>
+          <a:lstStyle/>
           <a:p>
             <a:pPr algn="l">
               <a:lnSpc>
@@ -21285,7 +22005,7 @@
       </p:sp>
       <p:sp>
         <p:nvSpPr>
-          <p:cNvPr id="22" name="Rounded Rectangle 21"/>
+          <p:cNvPr id="25" name="Rounded Rectangle 24"/>
           <p:cNvSpPr/>
           <p:nvPr/>
         </p:nvSpPr>
@@ -21331,7 +22051,7 @@
       </p:sp>
       <p:sp>
         <p:nvSpPr>
-          <p:cNvPr id="23" name="TextBox 22"/>
+          <p:cNvPr id="26" name="TextBox 25"/>
           <p:cNvSpPr txBox="1"/>
           <p:nvPr/>
         </p:nvSpPr>
@@ -21371,7 +22091,7 @@
       </p:sp>
       <p:sp>
         <p:nvSpPr>
-          <p:cNvPr id="24" name="TextBox 23"/>
+          <p:cNvPr id="27" name="TextBox 26"/>
           <p:cNvSpPr txBox="1"/>
           <p:nvPr/>
         </p:nvSpPr>
@@ -21411,7 +22131,7 @@
       </p:sp>
       <p:sp>
         <p:nvSpPr>
-          <p:cNvPr id="25" name="Rounded Rectangle 24"/>
+          <p:cNvPr id="28" name="Rounded Rectangle 27"/>
           <p:cNvSpPr/>
           <p:nvPr/>
         </p:nvSpPr>
@@ -21459,7 +22179,7 @@
       </p:sp>
       <p:sp>
         <p:nvSpPr>
-          <p:cNvPr id="26" name="Rectangle 25"/>
+          <p:cNvPr id="29" name="Rectangle 28"/>
           <p:cNvSpPr/>
           <p:nvPr/>
         </p:nvSpPr>
@@ -21503,7 +22223,7 @@
       </p:sp>
       <p:sp>
         <p:nvSpPr>
-          <p:cNvPr id="27" name="Rounded Rectangle 26"/>
+          <p:cNvPr id="30" name="Rounded Rectangle 29"/>
           <p:cNvSpPr/>
           <p:nvPr/>
         </p:nvSpPr>
@@ -21549,7 +22269,7 @@
       </p:sp>
       <p:sp>
         <p:nvSpPr>
-          <p:cNvPr id="28" name="TextBox 27"/>
+          <p:cNvPr id="31" name="TextBox 30"/>
           <p:cNvSpPr txBox="1"/>
           <p:nvPr/>
         </p:nvSpPr>
@@ -21589,7 +22309,7 @@
       </p:sp>
       <p:sp>
         <p:nvSpPr>
-          <p:cNvPr id="29" name="TextBox 28"/>
+          <p:cNvPr id="32" name="TextBox 31"/>
           <p:cNvSpPr txBox="1"/>
           <p:nvPr/>
         </p:nvSpPr>
@@ -21629,7 +22349,7 @@
       </p:sp>
       <p:sp>
         <p:nvSpPr>
-          <p:cNvPr id="30" name="TextBox 29"/>
+          <p:cNvPr id="33" name="TextBox 32"/>
           <p:cNvSpPr txBox="1"/>
           <p:nvPr/>
         </p:nvSpPr>
@@ -21669,22 +22389,22 @@
       </p:sp>
       <p:sp>
         <p:nvSpPr>
-          <p:cNvPr id="31" name="TextBox 30"/>
-          <p:cNvSpPr txBox="1"/>
-          <p:nvPr/>
-        </p:nvSpPr>
-        <p:spPr>
-          <a:xfrm>
-            <a:off x="5193792" y="2084832"/>
-            <a:ext cx="6217920" cy="804672"/>
-          </a:xfrm>
-          <a:prstGeom prst="rect">
-            <a:avLst/>
-          </a:prstGeom>
-          <a:noFill/>
-        </p:spPr>
-        <p:txBody>
-          <a:bodyPr wrap="square" anchor="t" lIns="9144" rIns="9144" tIns="6400" bIns="6400">
+          <p:cNvPr id="34" name="TextBox 33"/>
+          <p:cNvSpPr txBox="1"/>
+          <p:nvPr/>
+        </p:nvSpPr>
+        <p:spPr>
+          <a:xfrm>
+            <a:off x="5193792" y="2091232"/>
+            <a:ext cx="6217920" cy="254508"/>
+          </a:xfrm>
+          <a:prstGeom prst="rect">
+            <a:avLst/>
+          </a:prstGeom>
+          <a:noFill/>
+        </p:spPr>
+        <p:txBody>
+          <a:bodyPr wrap="square" anchor="t" lIns="9144" rIns="9144" tIns="0" bIns="0">
             <a:noAutofit/>
           </a:bodyPr>
           <a:lstStyle/>
@@ -21693,9 +22413,6 @@
               <a:lnSpc>
                 <a:spcPct val="126000"/>
               </a:lnSpc>
-              <a:spcAft>
-                <a:spcPts val="111"/>
-              </a:spcAft>
             </a:pPr>
             <a:r>
               <a:rPr sz="930" b="0" i="0">
@@ -21708,14 +22425,34 @@
               <a:t>✓ 주인공의 욕망과 행동이 시작부터 클라이맥스까지 일관되게 이어지는가?</a:t>
             </a:r>
           </a:p>
+        </p:txBody>
+      </p:sp>
+      <p:sp>
+        <p:nvSpPr>
+          <p:cNvPr id="35" name="TextBox 34"/>
+          <p:cNvSpPr txBox="1"/>
+          <p:nvPr/>
+        </p:nvSpPr>
+        <p:spPr>
+          <a:xfrm>
+            <a:off x="5193792" y="2359914"/>
+            <a:ext cx="6217920" cy="254508"/>
+          </a:xfrm>
+          <a:prstGeom prst="rect">
+            <a:avLst/>
+          </a:prstGeom>
+          <a:noFill/>
+        </p:spPr>
+        <p:txBody>
+          <a:bodyPr wrap="square" anchor="t" lIns="9144" rIns="9144" tIns="0" bIns="0">
+            <a:noAutofit/>
+          </a:bodyPr>
+          <a:lstStyle/>
           <a:p>
             <a:pPr algn="l">
               <a:lnSpc>
                 <a:spcPct val="126000"/>
               </a:lnSpc>
-              <a:spcAft>
-                <a:spcPts val="111"/>
-              </a:spcAft>
             </a:pPr>
             <a:r>
               <a:rPr sz="930" b="0" i="0">
@@ -21728,6 +22465,29 @@
               <a:t>✓ 중반부가 늘어지지 않는가? (기능이 겹치는 장면과 인물을 과감히 통합·삭제)</a:t>
             </a:r>
           </a:p>
+        </p:txBody>
+      </p:sp>
+      <p:sp>
+        <p:nvSpPr>
+          <p:cNvPr id="36" name="TextBox 35"/>
+          <p:cNvSpPr txBox="1"/>
+          <p:nvPr/>
+        </p:nvSpPr>
+        <p:spPr>
+          <a:xfrm>
+            <a:off x="5193792" y="2628595"/>
+            <a:ext cx="6217920" cy="254508"/>
+          </a:xfrm>
+          <a:prstGeom prst="rect">
+            <a:avLst/>
+          </a:prstGeom>
+          <a:noFill/>
+        </p:spPr>
+        <p:txBody>
+          <a:bodyPr wrap="square" anchor="t" lIns="9144" rIns="9144" tIns="0" bIns="0">
+            <a:noAutofit/>
+          </a:bodyPr>
+          <a:lstStyle/>
           <a:p>
             <a:pPr algn="l">
               <a:lnSpc>
@@ -21749,7 +22509,7 @@
       </p:sp>
       <p:sp>
         <p:nvSpPr>
-          <p:cNvPr id="32" name="Rounded Rectangle 31"/>
+          <p:cNvPr id="37" name="Rounded Rectangle 36"/>
           <p:cNvSpPr/>
           <p:nvPr/>
         </p:nvSpPr>
@@ -21797,7 +22557,7 @@
       </p:sp>
       <p:sp>
         <p:nvSpPr>
-          <p:cNvPr id="33" name="Rectangle 32"/>
+          <p:cNvPr id="38" name="Rectangle 37"/>
           <p:cNvSpPr/>
           <p:nvPr/>
         </p:nvSpPr>
@@ -21841,7 +22601,7 @@
       </p:sp>
       <p:sp>
         <p:nvSpPr>
-          <p:cNvPr id="34" name="Rounded Rectangle 33"/>
+          <p:cNvPr id="39" name="Rounded Rectangle 38"/>
           <p:cNvSpPr/>
           <p:nvPr/>
         </p:nvSpPr>
@@ -21887,7 +22647,7 @@
       </p:sp>
       <p:sp>
         <p:nvSpPr>
-          <p:cNvPr id="35" name="TextBox 34"/>
+          <p:cNvPr id="40" name="TextBox 39"/>
           <p:cNvSpPr txBox="1"/>
           <p:nvPr/>
         </p:nvSpPr>
@@ -21927,7 +22687,7 @@
       </p:sp>
       <p:sp>
         <p:nvSpPr>
-          <p:cNvPr id="36" name="TextBox 35"/>
+          <p:cNvPr id="41" name="TextBox 40"/>
           <p:cNvSpPr txBox="1"/>
           <p:nvPr/>
         </p:nvSpPr>
@@ -21967,7 +22727,7 @@
       </p:sp>
       <p:sp>
         <p:nvSpPr>
-          <p:cNvPr id="37" name="TextBox 36"/>
+          <p:cNvPr id="42" name="TextBox 41"/>
           <p:cNvSpPr txBox="1"/>
           <p:nvPr/>
         </p:nvSpPr>
@@ -22007,22 +22767,22 @@
       </p:sp>
       <p:sp>
         <p:nvSpPr>
-          <p:cNvPr id="38" name="TextBox 37"/>
-          <p:cNvSpPr txBox="1"/>
-          <p:nvPr/>
-        </p:nvSpPr>
-        <p:spPr>
-          <a:xfrm>
-            <a:off x="5193792" y="3749039"/>
-            <a:ext cx="6217920" cy="804672"/>
-          </a:xfrm>
-          <a:prstGeom prst="rect">
-            <a:avLst/>
-          </a:prstGeom>
-          <a:noFill/>
-        </p:spPr>
-        <p:txBody>
-          <a:bodyPr wrap="square" anchor="t" lIns="9144" rIns="9144" tIns="6400" bIns="6400">
+          <p:cNvPr id="43" name="TextBox 42"/>
+          <p:cNvSpPr txBox="1"/>
+          <p:nvPr/>
+        </p:nvSpPr>
+        <p:spPr>
+          <a:xfrm>
+            <a:off x="5193792" y="3755440"/>
+            <a:ext cx="6217920" cy="254508"/>
+          </a:xfrm>
+          <a:prstGeom prst="rect">
+            <a:avLst/>
+          </a:prstGeom>
+          <a:noFill/>
+        </p:spPr>
+        <p:txBody>
+          <a:bodyPr wrap="square" anchor="t" lIns="9144" rIns="9144" tIns="0" bIns="0">
             <a:noAutofit/>
           </a:bodyPr>
           <a:lstStyle/>
@@ -22031,9 +22791,6 @@
               <a:lnSpc>
                 <a:spcPct val="126000"/>
               </a:lnSpc>
-              <a:spcAft>
-                <a:spcPts val="111"/>
-              </a:spcAft>
             </a:pPr>
             <a:r>
               <a:rPr sz="930" b="0" i="0">
@@ -22046,14 +22803,34 @@
               <a:t>✓ 각 장면의 첫 문장이 흥미롭고 마지막 문장이 다음 장면을 궁금하게 만드는가?</a:t>
             </a:r>
           </a:p>
+        </p:txBody>
+      </p:sp>
+      <p:sp>
+        <p:nvSpPr>
+          <p:cNvPr id="44" name="TextBox 43"/>
+          <p:cNvSpPr txBox="1"/>
+          <p:nvPr/>
+        </p:nvSpPr>
+        <p:spPr>
+          <a:xfrm>
+            <a:off x="5193792" y="4024121"/>
+            <a:ext cx="6217920" cy="254508"/>
+          </a:xfrm>
+          <a:prstGeom prst="rect">
+            <a:avLst/>
+          </a:prstGeom>
+          <a:noFill/>
+        </p:spPr>
+        <p:txBody>
+          <a:bodyPr wrap="square" anchor="t" lIns="9144" rIns="9144" tIns="0" bIns="0">
+            <a:noAutofit/>
+          </a:bodyPr>
+          <a:lstStyle/>
           <a:p>
             <a:pPr algn="l">
               <a:lnSpc>
                 <a:spcPct val="126000"/>
               </a:lnSpc>
-              <a:spcAft>
-                <a:spcPts val="111"/>
-              </a:spcAft>
             </a:pPr>
             <a:r>
               <a:rPr sz="930" b="0" i="0">
@@ -22066,6 +22843,29 @@
               <a:t>✓ 한 장면 안에서 시점(POV)이 흔들리거나 설명(Tell)이 과도한 구간은 없는가?</a:t>
             </a:r>
           </a:p>
+        </p:txBody>
+      </p:sp>
+      <p:sp>
+        <p:nvSpPr>
+          <p:cNvPr id="45" name="TextBox 44"/>
+          <p:cNvSpPr txBox="1"/>
+          <p:nvPr/>
+        </p:nvSpPr>
+        <p:spPr>
+          <a:xfrm>
+            <a:off x="5193792" y="4292803"/>
+            <a:ext cx="6217920" cy="254508"/>
+          </a:xfrm>
+          <a:prstGeom prst="rect">
+            <a:avLst/>
+          </a:prstGeom>
+          <a:noFill/>
+        </p:spPr>
+        <p:txBody>
+          <a:bodyPr wrap="square" anchor="t" lIns="9144" rIns="9144" tIns="0" bIns="0">
+            <a:noAutofit/>
+          </a:bodyPr>
+          <a:lstStyle/>
           <a:p>
             <a:pPr algn="l">
               <a:lnSpc>
@@ -22087,7 +22887,7 @@
       </p:sp>
       <p:sp>
         <p:nvSpPr>
-          <p:cNvPr id="39" name="Rounded Rectangle 38"/>
+          <p:cNvPr id="46" name="Rounded Rectangle 45"/>
           <p:cNvSpPr/>
           <p:nvPr/>
         </p:nvSpPr>
@@ -22135,7 +22935,7 @@
       </p:sp>
       <p:sp>
         <p:nvSpPr>
-          <p:cNvPr id="40" name="Rectangle 39"/>
+          <p:cNvPr id="47" name="Rectangle 46"/>
           <p:cNvSpPr/>
           <p:nvPr/>
         </p:nvSpPr>
@@ -22179,7 +22979,7 @@
       </p:sp>
       <p:sp>
         <p:nvSpPr>
-          <p:cNvPr id="41" name="Rounded Rectangle 40"/>
+          <p:cNvPr id="48" name="Rounded Rectangle 47"/>
           <p:cNvSpPr/>
           <p:nvPr/>
         </p:nvSpPr>
@@ -22225,7 +23025,7 @@
       </p:sp>
       <p:sp>
         <p:nvSpPr>
-          <p:cNvPr id="42" name="TextBox 41"/>
+          <p:cNvPr id="49" name="TextBox 48"/>
           <p:cNvSpPr txBox="1"/>
           <p:nvPr/>
         </p:nvSpPr>
@@ -22265,7 +23065,7 @@
       </p:sp>
       <p:sp>
         <p:nvSpPr>
-          <p:cNvPr id="43" name="TextBox 42"/>
+          <p:cNvPr id="50" name="TextBox 49"/>
           <p:cNvSpPr txBox="1"/>
           <p:nvPr/>
         </p:nvSpPr>
@@ -22305,7 +23105,7 @@
       </p:sp>
       <p:sp>
         <p:nvSpPr>
-          <p:cNvPr id="44" name="TextBox 43"/>
+          <p:cNvPr id="51" name="TextBox 50"/>
           <p:cNvSpPr txBox="1"/>
           <p:nvPr/>
         </p:nvSpPr>
@@ -22345,22 +23145,22 @@
       </p:sp>
       <p:sp>
         <p:nvSpPr>
-          <p:cNvPr id="45" name="TextBox 44"/>
-          <p:cNvSpPr txBox="1"/>
-          <p:nvPr/>
-        </p:nvSpPr>
-        <p:spPr>
-          <a:xfrm>
-            <a:off x="5193792" y="5413248"/>
-            <a:ext cx="6217920" cy="804672"/>
-          </a:xfrm>
-          <a:prstGeom prst="rect">
-            <a:avLst/>
-          </a:prstGeom>
-          <a:noFill/>
-        </p:spPr>
-        <p:txBody>
-          <a:bodyPr wrap="square" anchor="t" lIns="9144" rIns="9144" tIns="6400" bIns="6400">
+          <p:cNvPr id="52" name="TextBox 51"/>
+          <p:cNvSpPr txBox="1"/>
+          <p:nvPr/>
+        </p:nvSpPr>
+        <p:spPr>
+          <a:xfrm>
+            <a:off x="5193792" y="5419648"/>
+            <a:ext cx="6217920" cy="254508"/>
+          </a:xfrm>
+          <a:prstGeom prst="rect">
+            <a:avLst/>
+          </a:prstGeom>
+          <a:noFill/>
+        </p:spPr>
+        <p:txBody>
+          <a:bodyPr wrap="square" anchor="t" lIns="9144" rIns="9144" tIns="0" bIns="0">
             <a:noAutofit/>
           </a:bodyPr>
           <a:lstStyle/>
@@ -22369,9 +23169,6 @@
               <a:lnSpc>
                 <a:spcPct val="126000"/>
               </a:lnSpc>
-              <a:spcAft>
-                <a:spcPts val="111"/>
-              </a:spcAft>
             </a:pPr>
             <a:r>
               <a:rPr sz="930" b="0" i="0">
@@ -22384,14 +23181,34 @@
               <a:t>✓ 상투적 부사(‘매우, 정말, 문득, 갑자기’)와 번역투(‘~에 다름 아니다, ~로부터’) 제거</a:t>
             </a:r>
           </a:p>
+        </p:txBody>
+      </p:sp>
+      <p:sp>
+        <p:nvSpPr>
+          <p:cNvPr id="53" name="TextBox 52"/>
+          <p:cNvSpPr txBox="1"/>
+          <p:nvPr/>
+        </p:nvSpPr>
+        <p:spPr>
+          <a:xfrm>
+            <a:off x="5193792" y="5688330"/>
+            <a:ext cx="6217920" cy="254508"/>
+          </a:xfrm>
+          <a:prstGeom prst="rect">
+            <a:avLst/>
+          </a:prstGeom>
+          <a:noFill/>
+        </p:spPr>
+        <p:txBody>
+          <a:bodyPr wrap="square" anchor="t" lIns="9144" rIns="9144" tIns="0" bIns="0">
+            <a:noAutofit/>
+          </a:bodyPr>
+          <a:lstStyle/>
           <a:p>
             <a:pPr algn="l">
               <a:lnSpc>
                 <a:spcPct val="126000"/>
               </a:lnSpc>
-              <a:spcAft>
-                <a:spcPts val="111"/>
-              </a:spcAft>
             </a:pPr>
             <a:r>
               <a:rPr sz="930" b="0" i="0">
@@ -22404,6 +23221,29 @@
               <a:t>✓ 한 문장에 중복된 주어(‘그는 ~ 그의 ~’)와 불필요한 피동형(‘~되어졌다’) 교정</a:t>
             </a:r>
           </a:p>
+        </p:txBody>
+      </p:sp>
+      <p:sp>
+        <p:nvSpPr>
+          <p:cNvPr id="54" name="TextBox 53"/>
+          <p:cNvSpPr txBox="1"/>
+          <p:nvPr/>
+        </p:nvSpPr>
+        <p:spPr>
+          <a:xfrm>
+            <a:off x="5193792" y="5957011"/>
+            <a:ext cx="6217920" cy="254508"/>
+          </a:xfrm>
+          <a:prstGeom prst="rect">
+            <a:avLst/>
+          </a:prstGeom>
+          <a:noFill/>
+        </p:spPr>
+        <p:txBody>
+          <a:bodyPr wrap="square" anchor="t" lIns="9144" rIns="9144" tIns="0" bIns="0">
+            <a:noAutofit/>
+          </a:bodyPr>
+          <a:lstStyle/>
           <a:p>
             <a:pPr algn="l">
               <a:lnSpc>

--- a/소설쓰기_가이드.pptx
+++ b/소설쓰기_가이드.pptx
@@ -3269,16 +3269,16 @@
         </p:nvSpPr>
         <p:spPr>
           <a:xfrm>
-            <a:off x="777240" y="1548993"/>
-            <a:ext cx="5669280" cy="920767"/>
-          </a:xfrm>
-          <a:prstGeom prst="rect">
-            <a:avLst/>
-          </a:prstGeom>
-          <a:noFill/>
-        </p:spPr>
-        <p:txBody>
-          <a:bodyPr wrap="square" anchor="t" lIns="18288" rIns="18288" tIns="0" bIns="0">
+            <a:off x="777240" y="1536192"/>
+            <a:ext cx="5669280" cy="1924287"/>
+          </a:xfrm>
+          <a:prstGeom prst="rect">
+            <a:avLst/>
+          </a:prstGeom>
+          <a:noFill/>
+        </p:spPr>
+        <p:txBody>
+          <a:bodyPr wrap="square" anchor="t" lIns="18288" rIns="18288" tIns="12801" bIns="12801">
             <a:noAutofit/>
           </a:bodyPr>
           <a:lstStyle/>
@@ -3287,6 +3287,9 @@
               <a:lnSpc>
                 <a:spcPct val="118000"/>
               </a:lnSpc>
+              <a:spcAft>
+                <a:spcPts val="450"/>
+              </a:spcAft>
             </a:pPr>
             <a:r>
               <a:rPr sz="3750" b="1" i="0">
@@ -3299,29 +3302,6 @@
               <a:t>매혹적인</a:t>
             </a:r>
           </a:p>
-        </p:txBody>
-      </p:sp>
-      <p:sp>
-        <p:nvSpPr>
-          <p:cNvPr id="7" name="TextBox 6"/>
-          <p:cNvSpPr txBox="1"/>
-          <p:nvPr/>
-        </p:nvSpPr>
-        <p:spPr>
-          <a:xfrm>
-            <a:off x="777240" y="2526910"/>
-            <a:ext cx="5669280" cy="920767"/>
-          </a:xfrm>
-          <a:prstGeom prst="rect">
-            <a:avLst/>
-          </a:prstGeom>
-          <a:noFill/>
-        </p:spPr>
-        <p:txBody>
-          <a:bodyPr wrap="square" anchor="t" lIns="18288" rIns="18288" tIns="0" bIns="0">
-            <a:noAutofit/>
-          </a:bodyPr>
-          <a:lstStyle/>
           <a:p>
             <a:pPr algn="l">
               <a:lnSpc>
@@ -3343,7 +3323,7 @@
       </p:sp>
       <p:sp>
         <p:nvSpPr>
-          <p:cNvPr id="8" name="Rectangle 7"/>
+          <p:cNvPr id="7" name="Rectangle 6"/>
           <p:cNvSpPr/>
           <p:nvPr/>
         </p:nvSpPr>
@@ -3387,22 +3367,22 @@
       </p:sp>
       <p:sp>
         <p:nvSpPr>
-          <p:cNvPr id="9" name="TextBox 8"/>
-          <p:cNvSpPr txBox="1"/>
-          <p:nvPr/>
-        </p:nvSpPr>
-        <p:spPr>
-          <a:xfrm>
-            <a:off x="777240" y="3720169"/>
-            <a:ext cx="5486400" cy="390372"/>
-          </a:xfrm>
-          <a:prstGeom prst="rect">
-            <a:avLst/>
-          </a:prstGeom>
-          <a:noFill/>
-        </p:spPr>
-        <p:txBody>
-          <a:bodyPr wrap="square" anchor="t" lIns="18288" rIns="18288" tIns="0" bIns="0">
+          <p:cNvPr id="8" name="TextBox 7"/>
+          <p:cNvSpPr txBox="1"/>
+          <p:nvPr/>
+        </p:nvSpPr>
+        <p:spPr>
+          <a:xfrm>
+            <a:off x="777240" y="3707367"/>
+            <a:ext cx="5486400" cy="826922"/>
+          </a:xfrm>
+          <a:prstGeom prst="rect">
+            <a:avLst/>
+          </a:prstGeom>
+          <a:noFill/>
+        </p:spPr>
+        <p:txBody>
+          <a:bodyPr wrap="square" anchor="t" lIns="18288" rIns="18288" tIns="12801" bIns="12801">
             <a:noAutofit/>
           </a:bodyPr>
           <a:lstStyle/>
@@ -3411,6 +3391,9 @@
               <a:lnSpc>
                 <a:spcPct val="140000"/>
               </a:lnSpc>
+              <a:spcAft>
+                <a:spcPts val="162"/>
+              </a:spcAft>
             </a:pPr>
             <a:r>
               <a:rPr sz="1350" b="0" i="0">
@@ -3423,29 +3406,6 @@
               <a:t>아이디어의 첫 불꽃부터 마지막 문장의 퇴고까지,</a:t>
             </a:r>
           </a:p>
-        </p:txBody>
-      </p:sp>
-      <p:sp>
-        <p:nvSpPr>
-          <p:cNvPr id="10" name="TextBox 9"/>
-          <p:cNvSpPr txBox="1"/>
-          <p:nvPr/>
-        </p:nvSpPr>
-        <p:spPr>
-          <a:xfrm>
-            <a:off x="777240" y="4131115"/>
-            <a:ext cx="5486400" cy="390372"/>
-          </a:xfrm>
-          <a:prstGeom prst="rect">
-            <a:avLst/>
-          </a:prstGeom>
-          <a:noFill/>
-        </p:spPr>
-        <p:txBody>
-          <a:bodyPr wrap="square" anchor="t" lIns="18288" rIns="18288" tIns="0" bIns="0">
-            <a:noAutofit/>
-          </a:bodyPr>
-          <a:lstStyle/>
           <a:p>
             <a:pPr algn="l">
               <a:lnSpc>
@@ -3467,7 +3427,7 @@
       </p:sp>
       <p:sp>
         <p:nvSpPr>
-          <p:cNvPr id="11" name="Rounded Rectangle 10"/>
+          <p:cNvPr id="9" name="Rounded Rectangle 8"/>
           <p:cNvSpPr/>
           <p:nvPr/>
         </p:nvSpPr>
@@ -3515,7 +3475,7 @@
       </p:sp>
       <p:sp>
         <p:nvSpPr>
-          <p:cNvPr id="12" name="Rectangle 11"/>
+          <p:cNvPr id="10" name="Rectangle 9"/>
           <p:cNvSpPr/>
           <p:nvPr/>
         </p:nvSpPr>
@@ -3559,7 +3519,7 @@
       </p:sp>
       <p:sp>
         <p:nvSpPr>
-          <p:cNvPr id="13" name="TextBox 12"/>
+          <p:cNvPr id="11" name="TextBox 10"/>
           <p:cNvSpPr txBox="1"/>
           <p:nvPr/>
         </p:nvSpPr>
@@ -3599,7 +3559,7 @@
       </p:sp>
       <p:sp>
         <p:nvSpPr>
-          <p:cNvPr id="14" name="TextBox 13"/>
+          <p:cNvPr id="12" name="TextBox 11"/>
           <p:cNvSpPr txBox="1"/>
           <p:nvPr/>
         </p:nvSpPr>
@@ -3639,7 +3599,7 @@
       </p:sp>
       <p:sp>
         <p:nvSpPr>
-          <p:cNvPr id="15" name="TextBox 14"/>
+          <p:cNvPr id="13" name="TextBox 12"/>
           <p:cNvSpPr txBox="1"/>
           <p:nvPr/>
         </p:nvSpPr>
@@ -3679,7 +3639,7 @@
       </p:sp>
       <p:sp>
         <p:nvSpPr>
-          <p:cNvPr id="16" name="Rounded Rectangle 15"/>
+          <p:cNvPr id="14" name="Rounded Rectangle 13"/>
           <p:cNvSpPr/>
           <p:nvPr/>
         </p:nvSpPr>
@@ -3727,7 +3687,7 @@
       </p:sp>
       <p:sp>
         <p:nvSpPr>
-          <p:cNvPr id="17" name="Rectangle 16"/>
+          <p:cNvPr id="15" name="Rectangle 14"/>
           <p:cNvSpPr/>
           <p:nvPr/>
         </p:nvSpPr>
@@ -3771,7 +3731,7 @@
       </p:sp>
       <p:sp>
         <p:nvSpPr>
-          <p:cNvPr id="18" name="TextBox 17"/>
+          <p:cNvPr id="16" name="TextBox 15"/>
           <p:cNvSpPr txBox="1"/>
           <p:nvPr/>
         </p:nvSpPr>
@@ -3811,7 +3771,7 @@
       </p:sp>
       <p:sp>
         <p:nvSpPr>
-          <p:cNvPr id="19" name="TextBox 18"/>
+          <p:cNvPr id="17" name="TextBox 16"/>
           <p:cNvSpPr txBox="1"/>
           <p:nvPr/>
         </p:nvSpPr>
@@ -3851,7 +3811,7 @@
       </p:sp>
       <p:sp>
         <p:nvSpPr>
-          <p:cNvPr id="20" name="TextBox 19"/>
+          <p:cNvPr id="18" name="TextBox 17"/>
           <p:cNvSpPr txBox="1"/>
           <p:nvPr/>
         </p:nvSpPr>
@@ -3891,7 +3851,7 @@
       </p:sp>
       <p:sp>
         <p:nvSpPr>
-          <p:cNvPr id="21" name="Rounded Rectangle 20"/>
+          <p:cNvPr id="19" name="Rounded Rectangle 18"/>
           <p:cNvSpPr/>
           <p:nvPr/>
         </p:nvSpPr>
@@ -3939,7 +3899,7 @@
       </p:sp>
       <p:sp>
         <p:nvSpPr>
-          <p:cNvPr id="22" name="Rectangle 21"/>
+          <p:cNvPr id="20" name="Rectangle 19"/>
           <p:cNvSpPr/>
           <p:nvPr/>
         </p:nvSpPr>
@@ -3983,7 +3943,7 @@
       </p:sp>
       <p:sp>
         <p:nvSpPr>
-          <p:cNvPr id="23" name="TextBox 22"/>
+          <p:cNvPr id="21" name="TextBox 20"/>
           <p:cNvSpPr txBox="1"/>
           <p:nvPr/>
         </p:nvSpPr>
@@ -4023,7 +3983,7 @@
       </p:sp>
       <p:sp>
         <p:nvSpPr>
-          <p:cNvPr id="24" name="TextBox 23"/>
+          <p:cNvPr id="22" name="TextBox 21"/>
           <p:cNvSpPr txBox="1"/>
           <p:nvPr/>
         </p:nvSpPr>
@@ -4063,7 +4023,7 @@
       </p:sp>
       <p:sp>
         <p:nvSpPr>
-          <p:cNvPr id="25" name="TextBox 24"/>
+          <p:cNvPr id="23" name="TextBox 22"/>
           <p:cNvSpPr txBox="1"/>
           <p:nvPr/>
         </p:nvSpPr>
@@ -4103,7 +4063,7 @@
       </p:sp>
       <p:sp>
         <p:nvSpPr>
-          <p:cNvPr id="26" name="Rounded Rectangle 25"/>
+          <p:cNvPr id="24" name="Rounded Rectangle 23"/>
           <p:cNvSpPr/>
           <p:nvPr/>
         </p:nvSpPr>
@@ -4151,7 +4111,7 @@
       </p:sp>
       <p:sp>
         <p:nvSpPr>
-          <p:cNvPr id="27" name="Rectangle 26"/>
+          <p:cNvPr id="25" name="Rectangle 24"/>
           <p:cNvSpPr/>
           <p:nvPr/>
         </p:nvSpPr>
@@ -4195,7 +4155,7 @@
       </p:sp>
       <p:sp>
         <p:nvSpPr>
-          <p:cNvPr id="28" name="TextBox 27"/>
+          <p:cNvPr id="26" name="TextBox 25"/>
           <p:cNvSpPr txBox="1"/>
           <p:nvPr/>
         </p:nvSpPr>
@@ -4235,7 +4195,7 @@
       </p:sp>
       <p:sp>
         <p:nvSpPr>
-          <p:cNvPr id="29" name="TextBox 28"/>
+          <p:cNvPr id="27" name="TextBox 26"/>
           <p:cNvSpPr txBox="1"/>
           <p:nvPr/>
         </p:nvSpPr>
@@ -4275,7 +4235,7 @@
       </p:sp>
       <p:sp>
         <p:nvSpPr>
-          <p:cNvPr id="30" name="TextBox 29"/>
+          <p:cNvPr id="28" name="TextBox 27"/>
           <p:cNvSpPr txBox="1"/>
           <p:nvPr/>
         </p:nvSpPr>
@@ -4939,16 +4899,16 @@
         </p:nvSpPr>
         <p:spPr>
           <a:xfrm>
-            <a:off x="795528" y="3005632"/>
-            <a:ext cx="3099816" cy="686308"/>
-          </a:xfrm>
-          <a:prstGeom prst="rect">
-            <a:avLst/>
-          </a:prstGeom>
-          <a:noFill/>
-        </p:spPr>
-        <p:txBody>
-          <a:bodyPr wrap="square" anchor="t" lIns="9144" rIns="9144" tIns="0" bIns="0">
+            <a:off x="795528" y="2999232"/>
+            <a:ext cx="3099816" cy="2103120"/>
+          </a:xfrm>
+          <a:prstGeom prst="rect">
+            <a:avLst/>
+          </a:prstGeom>
+          <a:noFill/>
+        </p:spPr>
+        <p:txBody>
+          <a:bodyPr wrap="square" anchor="t" lIns="9144" rIns="9144" tIns="6400" bIns="6400">
             <a:noAutofit/>
           </a:bodyPr>
           <a:lstStyle/>
@@ -4957,6 +4917,9 @@
               <a:lnSpc>
                 <a:spcPct val="132000"/>
               </a:lnSpc>
+              <a:spcAft>
+                <a:spcPts val="123"/>
+              </a:spcAft>
             </a:pPr>
             <a:r>
               <a:rPr sz="1030" b="0" i="0">
@@ -4969,34 +4932,14 @@
               <a:t>• 매일 같은 시간, 같은 장소에서 정해진 분량(예: 하루 1,000자~2,000자 또는 45분)을 채우는 시스템 구축</a:t>
             </a:r>
           </a:p>
-        </p:txBody>
-      </p:sp>
-      <p:sp>
-        <p:nvSpPr>
-          <p:cNvPr id="17" name="TextBox 16"/>
-          <p:cNvSpPr txBox="1"/>
-          <p:nvPr/>
-        </p:nvSpPr>
-        <p:spPr>
-          <a:xfrm>
-            <a:off x="795528" y="3707638"/>
-            <a:ext cx="3099816" cy="686308"/>
-          </a:xfrm>
-          <a:prstGeom prst="rect">
-            <a:avLst/>
-          </a:prstGeom>
-          <a:noFill/>
-        </p:spPr>
-        <p:txBody>
-          <a:bodyPr wrap="square" anchor="t" lIns="9144" rIns="9144" tIns="0" bIns="0">
-            <a:noAutofit/>
-          </a:bodyPr>
-          <a:lstStyle/>
           <a:p>
             <a:pPr algn="l">
               <a:lnSpc>
                 <a:spcPct val="132000"/>
               </a:lnSpc>
+              <a:spcAft>
+                <a:spcPts val="123"/>
+              </a:spcAft>
             </a:pPr>
             <a:r>
               <a:rPr sz="1030" b="0" i="0">
@@ -5009,29 +4952,6 @@
               <a:t>• 다음 날 글쓰기가 막막하지 않도록, 오늘 가장 잘 써지는 장면의 문장 중간에서 멈추는 ‘헤밍웨이 기법’ 활용</a:t>
             </a:r>
           </a:p>
-        </p:txBody>
-      </p:sp>
-      <p:sp>
-        <p:nvSpPr>
-          <p:cNvPr id="18" name="TextBox 17"/>
-          <p:cNvSpPr txBox="1"/>
-          <p:nvPr/>
-        </p:nvSpPr>
-        <p:spPr>
-          <a:xfrm>
-            <a:off x="795528" y="4409643"/>
-            <a:ext cx="3099816" cy="686308"/>
-          </a:xfrm>
-          <a:prstGeom prst="rect">
-            <a:avLst/>
-          </a:prstGeom>
-          <a:noFill/>
-        </p:spPr>
-        <p:txBody>
-          <a:bodyPr wrap="square" anchor="t" lIns="9144" rIns="9144" tIns="0" bIns="0">
-            <a:noAutofit/>
-          </a:bodyPr>
-          <a:lstStyle/>
           <a:p>
             <a:pPr algn="l">
               <a:lnSpc>
@@ -5053,7 +4973,7 @@
       </p:sp>
       <p:sp>
         <p:nvSpPr>
-          <p:cNvPr id="19" name="Rounded Rectangle 18"/>
+          <p:cNvPr id="17" name="Rounded Rectangle 16"/>
           <p:cNvSpPr/>
           <p:nvPr/>
         </p:nvSpPr>
@@ -5101,7 +5021,7 @@
       </p:sp>
       <p:sp>
         <p:nvSpPr>
-          <p:cNvPr id="20" name="Rectangle 19"/>
+          <p:cNvPr id="18" name="Rectangle 17"/>
           <p:cNvSpPr/>
           <p:nvPr/>
         </p:nvSpPr>
@@ -5145,7 +5065,7 @@
       </p:sp>
       <p:sp>
         <p:nvSpPr>
-          <p:cNvPr id="21" name="TextBox 20"/>
+          <p:cNvPr id="19" name="TextBox 18"/>
           <p:cNvSpPr txBox="1"/>
           <p:nvPr/>
         </p:nvSpPr>
@@ -5185,7 +5105,7 @@
       </p:sp>
       <p:sp>
         <p:nvSpPr>
-          <p:cNvPr id="22" name="TextBox 21"/>
+          <p:cNvPr id="20" name="TextBox 19"/>
           <p:cNvSpPr txBox="1"/>
           <p:nvPr/>
         </p:nvSpPr>
@@ -5225,7 +5145,7 @@
       </p:sp>
       <p:sp>
         <p:nvSpPr>
-          <p:cNvPr id="23" name="Rounded Rectangle 22"/>
+          <p:cNvPr id="21" name="Rounded Rectangle 20"/>
           <p:cNvSpPr/>
           <p:nvPr/>
         </p:nvSpPr>
@@ -5273,7 +5193,7 @@
       </p:sp>
       <p:sp>
         <p:nvSpPr>
-          <p:cNvPr id="24" name="TextBox 23"/>
+          <p:cNvPr id="22" name="TextBox 21"/>
           <p:cNvSpPr txBox="1"/>
           <p:nvPr/>
         </p:nvSpPr>
@@ -5313,22 +5233,22 @@
       </p:sp>
       <p:sp>
         <p:nvSpPr>
-          <p:cNvPr id="25" name="TextBox 24"/>
-          <p:cNvSpPr txBox="1"/>
-          <p:nvPr/>
-        </p:nvSpPr>
-        <p:spPr>
-          <a:xfrm>
-            <a:off x="4544568" y="3005632"/>
-            <a:ext cx="3099816" cy="593194"/>
-          </a:xfrm>
-          <a:prstGeom prst="rect">
-            <a:avLst/>
-          </a:prstGeom>
-          <a:noFill/>
-        </p:spPr>
-        <p:txBody>
-          <a:bodyPr wrap="square" anchor="t" lIns="9144" rIns="9144" tIns="0" bIns="0">
+          <p:cNvPr id="23" name="TextBox 22"/>
+          <p:cNvSpPr txBox="1"/>
+          <p:nvPr/>
+        </p:nvSpPr>
+        <p:spPr>
+          <a:xfrm>
+            <a:off x="4544568" y="2999232"/>
+            <a:ext cx="3099816" cy="2103120"/>
+          </a:xfrm>
+          <a:prstGeom prst="rect">
+            <a:avLst/>
+          </a:prstGeom>
+          <a:noFill/>
+        </p:spPr>
+        <p:txBody>
+          <a:bodyPr wrap="square" anchor="t" lIns="9144" rIns="9144" tIns="6400" bIns="6400">
             <a:noAutofit/>
           </a:bodyPr>
           <a:lstStyle/>
@@ -5337,6 +5257,9 @@
               <a:lnSpc>
                 <a:spcPct val="132000"/>
               </a:lnSpc>
+              <a:spcAft>
+                <a:spcPts val="123"/>
+              </a:spcAft>
             </a:pPr>
             <a:r>
               <a:rPr sz="1030" b="0" i="0">
@@ -5349,34 +5272,14 @@
               <a:t>• 지하철에서 들은 기묘한 대화 한 줄, 독특한 직업군의 은어, 계절별 빛과 냄새를 메모장에 즉시 기록</a:t>
             </a:r>
           </a:p>
-        </p:txBody>
-      </p:sp>
-      <p:sp>
-        <p:nvSpPr>
-          <p:cNvPr id="26" name="TextBox 25"/>
-          <p:cNvSpPr txBox="1"/>
-          <p:nvPr/>
-        </p:nvSpPr>
-        <p:spPr>
-          <a:xfrm>
-            <a:off x="4544568" y="3614524"/>
-            <a:ext cx="3099816" cy="872534"/>
-          </a:xfrm>
-          <a:prstGeom prst="rect">
-            <a:avLst/>
-          </a:prstGeom>
-          <a:noFill/>
-        </p:spPr>
-        <p:txBody>
-          <a:bodyPr wrap="square" anchor="t" lIns="9144" rIns="9144" tIns="0" bIns="0">
-            <a:noAutofit/>
-          </a:bodyPr>
-          <a:lstStyle/>
           <a:p>
             <a:pPr algn="l">
               <a:lnSpc>
                 <a:spcPct val="132000"/>
               </a:lnSpc>
+              <a:spcAft>
+                <a:spcPts val="123"/>
+              </a:spcAft>
             </a:pPr>
             <a:r>
               <a:rPr sz="1030" b="0" i="0">
@@ -5389,29 +5292,6 @@
               <a:t>• 마음에 드는 소설을 읽을 때는 독자로서 한 번, 작가로서 ‘어떻게 이 감정을 설계했는가’ 분석하며 한 번 더 필사·해부</a:t>
             </a:r>
           </a:p>
-        </p:txBody>
-      </p:sp>
-      <p:sp>
-        <p:nvSpPr>
-          <p:cNvPr id="27" name="TextBox 26"/>
-          <p:cNvSpPr txBox="1"/>
-          <p:nvPr/>
-        </p:nvSpPr>
-        <p:spPr>
-          <a:xfrm>
-            <a:off x="4544568" y="4502756"/>
-            <a:ext cx="3099816" cy="593194"/>
-          </a:xfrm>
-          <a:prstGeom prst="rect">
-            <a:avLst/>
-          </a:prstGeom>
-          <a:noFill/>
-        </p:spPr>
-        <p:txBody>
-          <a:bodyPr wrap="square" anchor="t" lIns="9144" rIns="9144" tIns="0" bIns="0">
-            <a:noAutofit/>
-          </a:bodyPr>
-          <a:lstStyle/>
           <a:p>
             <a:pPr algn="l">
               <a:lnSpc>
@@ -5433,7 +5313,7 @@
       </p:sp>
       <p:sp>
         <p:nvSpPr>
-          <p:cNvPr id="28" name="Rounded Rectangle 27"/>
+          <p:cNvPr id="24" name="Rounded Rectangle 23"/>
           <p:cNvSpPr/>
           <p:nvPr/>
         </p:nvSpPr>
@@ -5481,7 +5361,7 @@
       </p:sp>
       <p:sp>
         <p:nvSpPr>
-          <p:cNvPr id="29" name="Rectangle 28"/>
+          <p:cNvPr id="25" name="Rectangle 24"/>
           <p:cNvSpPr/>
           <p:nvPr/>
         </p:nvSpPr>
@@ -5525,7 +5405,7 @@
       </p:sp>
       <p:sp>
         <p:nvSpPr>
-          <p:cNvPr id="30" name="TextBox 29"/>
+          <p:cNvPr id="26" name="TextBox 25"/>
           <p:cNvSpPr txBox="1"/>
           <p:nvPr/>
         </p:nvSpPr>
@@ -5565,7 +5445,7 @@
       </p:sp>
       <p:sp>
         <p:nvSpPr>
-          <p:cNvPr id="31" name="TextBox 30"/>
+          <p:cNvPr id="27" name="TextBox 26"/>
           <p:cNvSpPr txBox="1"/>
           <p:nvPr/>
         </p:nvSpPr>
@@ -5605,7 +5485,7 @@
       </p:sp>
       <p:sp>
         <p:nvSpPr>
-          <p:cNvPr id="32" name="Rounded Rectangle 31"/>
+          <p:cNvPr id="28" name="Rounded Rectangle 27"/>
           <p:cNvSpPr/>
           <p:nvPr/>
         </p:nvSpPr>
@@ -5653,7 +5533,7 @@
       </p:sp>
       <p:sp>
         <p:nvSpPr>
-          <p:cNvPr id="33" name="TextBox 32"/>
+          <p:cNvPr id="29" name="TextBox 28"/>
           <p:cNvSpPr txBox="1"/>
           <p:nvPr/>
         </p:nvSpPr>
@@ -5693,22 +5573,22 @@
       </p:sp>
       <p:sp>
         <p:nvSpPr>
-          <p:cNvPr id="34" name="TextBox 33"/>
-          <p:cNvSpPr txBox="1"/>
-          <p:nvPr/>
-        </p:nvSpPr>
-        <p:spPr>
-          <a:xfrm>
-            <a:off x="8293608" y="3005632"/>
-            <a:ext cx="3099816" cy="686308"/>
-          </a:xfrm>
-          <a:prstGeom prst="rect">
-            <a:avLst/>
-          </a:prstGeom>
-          <a:noFill/>
-        </p:spPr>
-        <p:txBody>
-          <a:bodyPr wrap="square" anchor="t" lIns="9144" rIns="9144" tIns="0" bIns="0">
+          <p:cNvPr id="30" name="TextBox 29"/>
+          <p:cNvSpPr txBox="1"/>
+          <p:nvPr/>
+        </p:nvSpPr>
+        <p:spPr>
+          <a:xfrm>
+            <a:off x="8293608" y="2999232"/>
+            <a:ext cx="3099816" cy="2103120"/>
+          </a:xfrm>
+          <a:prstGeom prst="rect">
+            <a:avLst/>
+          </a:prstGeom>
+          <a:noFill/>
+        </p:spPr>
+        <p:txBody>
+          <a:bodyPr wrap="square" anchor="t" lIns="9144" rIns="9144" tIns="6400" bIns="6400">
             <a:noAutofit/>
           </a:bodyPr>
           <a:lstStyle/>
@@ -5717,6 +5597,9 @@
               <a:lnSpc>
                 <a:spcPct val="132000"/>
               </a:lnSpc>
+              <a:spcAft>
+                <a:spcPts val="123"/>
+              </a:spcAft>
             </a:pPr>
             <a:r>
               <a:rPr sz="1030" b="0" i="0">
@@ -5729,34 +5612,14 @@
               <a:t>• 처음부터 거대한 10권짜리 세계관에 매몰되기보다, 원고지 70~100매 분량의 단편으로 기승전결 완주 훈련</a:t>
             </a:r>
           </a:p>
-        </p:txBody>
-      </p:sp>
-      <p:sp>
-        <p:nvSpPr>
-          <p:cNvPr id="35" name="TextBox 34"/>
-          <p:cNvSpPr txBox="1"/>
-          <p:nvPr/>
-        </p:nvSpPr>
-        <p:spPr>
-          <a:xfrm>
-            <a:off x="8293608" y="3707638"/>
-            <a:ext cx="3099816" cy="686308"/>
-          </a:xfrm>
-          <a:prstGeom prst="rect">
-            <a:avLst/>
-          </a:prstGeom>
-          <a:noFill/>
-        </p:spPr>
-        <p:txBody>
-          <a:bodyPr wrap="square" anchor="t" lIns="9144" rIns="9144" tIns="0" bIns="0">
-            <a:noAutofit/>
-          </a:bodyPr>
-          <a:lstStyle/>
           <a:p>
             <a:pPr algn="l">
               <a:lnSpc>
                 <a:spcPct val="132000"/>
               </a:lnSpc>
+              <a:spcAft>
+                <a:spcPts val="123"/>
+              </a:spcAft>
             </a:pPr>
             <a:r>
               <a:rPr sz="1030" b="0" i="0">
@@ -5769,29 +5632,6 @@
               <a:t>• 첫 초고가 마음에 들지 않는 것은 당신의 재능이 부족해서가 아니라 안목이 높기 때문임을 기억</a:t>
             </a:r>
           </a:p>
-        </p:txBody>
-      </p:sp>
-      <p:sp>
-        <p:nvSpPr>
-          <p:cNvPr id="36" name="TextBox 35"/>
-          <p:cNvSpPr txBox="1"/>
-          <p:nvPr/>
-        </p:nvSpPr>
-        <p:spPr>
-          <a:xfrm>
-            <a:off x="8293608" y="4409643"/>
-            <a:ext cx="3099816" cy="686308"/>
-          </a:xfrm>
-          <a:prstGeom prst="rect">
-            <a:avLst/>
-          </a:prstGeom>
-          <a:noFill/>
-        </p:spPr>
-        <p:txBody>
-          <a:bodyPr wrap="square" anchor="t" lIns="9144" rIns="9144" tIns="0" bIns="0">
-            <a:noAutofit/>
-          </a:bodyPr>
-          <a:lstStyle/>
           <a:p>
             <a:pPr algn="l">
               <a:lnSpc>
@@ -5813,7 +5653,7 @@
       </p:sp>
       <p:sp>
         <p:nvSpPr>
-          <p:cNvPr id="37" name="Rounded Rectangle 36"/>
+          <p:cNvPr id="31" name="Rounded Rectangle 30"/>
           <p:cNvSpPr/>
           <p:nvPr/>
         </p:nvSpPr>
@@ -5859,7 +5699,7 @@
       </p:sp>
       <p:sp>
         <p:nvSpPr>
-          <p:cNvPr id="38" name="TextBox 37"/>
+          <p:cNvPr id="32" name="TextBox 31"/>
           <p:cNvSpPr txBox="1"/>
           <p:nvPr/>
         </p:nvSpPr>
@@ -5899,7 +5739,7 @@
       </p:sp>
       <p:sp>
         <p:nvSpPr>
-          <p:cNvPr id="39" name="TextBox 38"/>
+          <p:cNvPr id="33" name="TextBox 32"/>
           <p:cNvSpPr txBox="1"/>
           <p:nvPr/>
         </p:nvSpPr>
@@ -6561,16 +6401,16 @@
         </p:nvSpPr>
         <p:spPr>
           <a:xfrm>
-            <a:off x="832104" y="2189073"/>
-            <a:ext cx="4983480" cy="271068"/>
-          </a:xfrm>
-          <a:prstGeom prst="rect">
-            <a:avLst/>
-          </a:prstGeom>
-          <a:noFill/>
-        </p:spPr>
-        <p:txBody>
-          <a:bodyPr wrap="square" anchor="t" lIns="18288" rIns="18288" tIns="0" bIns="0">
+            <a:off x="832104" y="2176272"/>
+            <a:ext cx="4983480" cy="868680"/>
+          </a:xfrm>
+          <a:prstGeom prst="rect">
+            <a:avLst/>
+          </a:prstGeom>
+          <a:noFill/>
+        </p:spPr>
+        <p:txBody>
+          <a:bodyPr wrap="square" anchor="t" lIns="18288" rIns="18288" tIns="12801" bIns="12801">
             <a:noAutofit/>
           </a:bodyPr>
           <a:lstStyle/>
@@ -6579,6 +6419,9 @@
               <a:lnSpc>
                 <a:spcPct val="128000"/>
               </a:lnSpc>
+              <a:spcAft>
+                <a:spcPts val="117"/>
+              </a:spcAft>
             </a:pPr>
             <a:r>
               <a:rPr sz="980" b="0" i="0">
@@ -6591,34 +6434,14 @@
               <a:t>• 익숙한 일상 속 낯선 균열을 포착해 독자의 질문을 유도</a:t>
             </a:r>
           </a:p>
-        </p:txBody>
-      </p:sp>
-      <p:sp>
-        <p:nvSpPr>
-          <p:cNvPr id="17" name="TextBox 16"/>
-          <p:cNvSpPr txBox="1"/>
-          <p:nvPr/>
-        </p:nvSpPr>
-        <p:spPr>
-          <a:xfrm>
-            <a:off x="832104" y="2475077"/>
-            <a:ext cx="4983480" cy="271068"/>
-          </a:xfrm>
-          <a:prstGeom prst="rect">
-            <a:avLst/>
-          </a:prstGeom>
-          <a:noFill/>
-        </p:spPr>
-        <p:txBody>
-          <a:bodyPr wrap="square" anchor="t" lIns="18288" rIns="18288" tIns="0" bIns="0">
-            <a:noAutofit/>
-          </a:bodyPr>
-          <a:lstStyle/>
           <a:p>
             <a:pPr algn="l">
               <a:lnSpc>
                 <a:spcPct val="128000"/>
               </a:lnSpc>
+              <a:spcAft>
+                <a:spcPts val="117"/>
+              </a:spcAft>
             </a:pPr>
             <a:r>
               <a:rPr sz="980" b="0" i="0">
@@ -6631,29 +6454,6 @@
               <a:t>• 단순한 설정 나열이 아닌 주인공이 겪을 윤리적·현실적 딜레마 내포</a:t>
             </a:r>
           </a:p>
-        </p:txBody>
-      </p:sp>
-      <p:sp>
-        <p:nvSpPr>
-          <p:cNvPr id="18" name="TextBox 17"/>
-          <p:cNvSpPr txBox="1"/>
-          <p:nvPr/>
-        </p:nvSpPr>
-        <p:spPr>
-          <a:xfrm>
-            <a:off x="832104" y="2761081"/>
-            <a:ext cx="4983480" cy="271068"/>
-          </a:xfrm>
-          <a:prstGeom prst="rect">
-            <a:avLst/>
-          </a:prstGeom>
-          <a:noFill/>
-        </p:spPr>
-        <p:txBody>
-          <a:bodyPr wrap="square" anchor="t" lIns="18288" rIns="18288" tIns="0" bIns="0">
-            <a:noAutofit/>
-          </a:bodyPr>
-          <a:lstStyle/>
           <a:p>
             <a:pPr algn="l">
               <a:lnSpc>
@@ -6675,7 +6475,7 @@
       </p:sp>
       <p:sp>
         <p:nvSpPr>
-          <p:cNvPr id="19" name="Rounded Rectangle 18"/>
+          <p:cNvPr id="17" name="Rounded Rectangle 16"/>
           <p:cNvSpPr/>
           <p:nvPr/>
         </p:nvSpPr>
@@ -6721,7 +6521,7 @@
       </p:sp>
       <p:sp>
         <p:nvSpPr>
-          <p:cNvPr id="20" name="TextBox 19"/>
+          <p:cNvPr id="18" name="TextBox 17"/>
           <p:cNvSpPr txBox="1"/>
           <p:nvPr/>
         </p:nvSpPr>
@@ -6761,7 +6561,7 @@
       </p:sp>
       <p:sp>
         <p:nvSpPr>
-          <p:cNvPr id="21" name="Rounded Rectangle 20"/>
+          <p:cNvPr id="19" name="Rounded Rectangle 18"/>
           <p:cNvSpPr/>
           <p:nvPr/>
         </p:nvSpPr>
@@ -6809,7 +6609,7 @@
       </p:sp>
       <p:sp>
         <p:nvSpPr>
-          <p:cNvPr id="22" name="Rectangle 21"/>
+          <p:cNvPr id="20" name="Rectangle 19"/>
           <p:cNvSpPr/>
           <p:nvPr/>
         </p:nvSpPr>
@@ -6853,7 +6653,7 @@
       </p:sp>
       <p:sp>
         <p:nvSpPr>
-          <p:cNvPr id="23" name="Rounded Rectangle 22"/>
+          <p:cNvPr id="21" name="Rounded Rectangle 20"/>
           <p:cNvSpPr/>
           <p:nvPr/>
         </p:nvSpPr>
@@ -6899,7 +6699,7 @@
       </p:sp>
       <p:sp>
         <p:nvSpPr>
-          <p:cNvPr id="24" name="TextBox 23"/>
+          <p:cNvPr id="22" name="TextBox 21"/>
           <p:cNvSpPr txBox="1"/>
           <p:nvPr/>
         </p:nvSpPr>
@@ -6939,7 +6739,7 @@
       </p:sp>
       <p:sp>
         <p:nvSpPr>
-          <p:cNvPr id="25" name="TextBox 24"/>
+          <p:cNvPr id="23" name="TextBox 22"/>
           <p:cNvSpPr txBox="1"/>
           <p:nvPr/>
         </p:nvSpPr>
@@ -6979,7 +6779,7 @@
       </p:sp>
       <p:sp>
         <p:nvSpPr>
-          <p:cNvPr id="26" name="TextBox 25"/>
+          <p:cNvPr id="24" name="TextBox 23"/>
           <p:cNvSpPr txBox="1"/>
           <p:nvPr/>
         </p:nvSpPr>
@@ -7019,22 +6819,22 @@
       </p:sp>
       <p:sp>
         <p:nvSpPr>
-          <p:cNvPr id="27" name="TextBox 26"/>
-          <p:cNvSpPr txBox="1"/>
-          <p:nvPr/>
-        </p:nvSpPr>
-        <p:spPr>
-          <a:xfrm>
-            <a:off x="6437376" y="2189073"/>
-            <a:ext cx="4983480" cy="271068"/>
-          </a:xfrm>
-          <a:prstGeom prst="rect">
-            <a:avLst/>
-          </a:prstGeom>
-          <a:noFill/>
-        </p:spPr>
-        <p:txBody>
-          <a:bodyPr wrap="square" anchor="t" lIns="18288" rIns="18288" tIns="0" bIns="0">
+          <p:cNvPr id="25" name="TextBox 24"/>
+          <p:cNvSpPr txBox="1"/>
+          <p:nvPr/>
+        </p:nvSpPr>
+        <p:spPr>
+          <a:xfrm>
+            <a:off x="6437376" y="2176272"/>
+            <a:ext cx="4983480" cy="868680"/>
+          </a:xfrm>
+          <a:prstGeom prst="rect">
+            <a:avLst/>
+          </a:prstGeom>
+          <a:noFill/>
+        </p:spPr>
+        <p:txBody>
+          <a:bodyPr wrap="square" anchor="t" lIns="18288" rIns="18288" tIns="12801" bIns="12801">
             <a:noAutofit/>
           </a:bodyPr>
           <a:lstStyle/>
@@ -7043,6 +6843,9 @@
               <a:lnSpc>
                 <a:spcPct val="128000"/>
               </a:lnSpc>
+              <a:spcAft>
+                <a:spcPts val="117"/>
+              </a:spcAft>
             </a:pPr>
             <a:r>
               <a:rPr sz="980" b="0" i="0">
@@ -7055,34 +6858,14 @@
               <a:t>• 완벽한 영웅보다 결함과 모순을 지닌 인물에게 독자가 감정이입</a:t>
             </a:r>
           </a:p>
-        </p:txBody>
-      </p:sp>
-      <p:sp>
-        <p:nvSpPr>
-          <p:cNvPr id="28" name="TextBox 27"/>
-          <p:cNvSpPr txBox="1"/>
-          <p:nvPr/>
-        </p:nvSpPr>
-        <p:spPr>
-          <a:xfrm>
-            <a:off x="6437376" y="2475077"/>
-            <a:ext cx="4983480" cy="271068"/>
-          </a:xfrm>
-          <a:prstGeom prst="rect">
-            <a:avLst/>
-          </a:prstGeom>
-          <a:noFill/>
-        </p:spPr>
-        <p:txBody>
-          <a:bodyPr wrap="square" anchor="t" lIns="18288" rIns="18288" tIns="0" bIns="0">
-            <a:noAutofit/>
-          </a:bodyPr>
-          <a:lstStyle/>
           <a:p>
             <a:pPr algn="l">
               <a:lnSpc>
                 <a:spcPct val="128000"/>
               </a:lnSpc>
+              <a:spcAft>
+                <a:spcPts val="117"/>
+              </a:spcAft>
             </a:pPr>
             <a:r>
               <a:rPr sz="980" b="0" i="0">
@@ -7095,29 +6878,6 @@
               <a:t>• 외면적 목표를 추구하는 과정에서 내면의 거짓 믿음이 깨지는 성장</a:t>
             </a:r>
           </a:p>
-        </p:txBody>
-      </p:sp>
-      <p:sp>
-        <p:nvSpPr>
-          <p:cNvPr id="29" name="TextBox 28"/>
-          <p:cNvSpPr txBox="1"/>
-          <p:nvPr/>
-        </p:nvSpPr>
-        <p:spPr>
-          <a:xfrm>
-            <a:off x="6437376" y="2761081"/>
-            <a:ext cx="4983480" cy="271068"/>
-          </a:xfrm>
-          <a:prstGeom prst="rect">
-            <a:avLst/>
-          </a:prstGeom>
-          <a:noFill/>
-        </p:spPr>
-        <p:txBody>
-          <a:bodyPr wrap="square" anchor="t" lIns="18288" rIns="18288" tIns="0" bIns="0">
-            <a:noAutofit/>
-          </a:bodyPr>
-          <a:lstStyle/>
           <a:p>
             <a:pPr algn="l">
               <a:lnSpc>
@@ -7139,7 +6899,7 @@
       </p:sp>
       <p:sp>
         <p:nvSpPr>
-          <p:cNvPr id="30" name="Rounded Rectangle 29"/>
+          <p:cNvPr id="26" name="Rounded Rectangle 25"/>
           <p:cNvSpPr/>
           <p:nvPr/>
         </p:nvSpPr>
@@ -7185,7 +6945,7 @@
       </p:sp>
       <p:sp>
         <p:nvSpPr>
-          <p:cNvPr id="31" name="TextBox 30"/>
+          <p:cNvPr id="27" name="TextBox 26"/>
           <p:cNvSpPr txBox="1"/>
           <p:nvPr/>
         </p:nvSpPr>
@@ -7225,7 +6985,7 @@
       </p:sp>
       <p:sp>
         <p:nvSpPr>
-          <p:cNvPr id="32" name="Rounded Rectangle 31"/>
+          <p:cNvPr id="28" name="Rounded Rectangle 27"/>
           <p:cNvSpPr/>
           <p:nvPr/>
         </p:nvSpPr>
@@ -7273,7 +7033,7 @@
       </p:sp>
       <p:sp>
         <p:nvSpPr>
-          <p:cNvPr id="33" name="Rectangle 32"/>
+          <p:cNvPr id="29" name="Rectangle 28"/>
           <p:cNvSpPr/>
           <p:nvPr/>
         </p:nvSpPr>
@@ -7317,7 +7077,7 @@
       </p:sp>
       <p:sp>
         <p:nvSpPr>
-          <p:cNvPr id="34" name="Rounded Rectangle 33"/>
+          <p:cNvPr id="30" name="Rounded Rectangle 29"/>
           <p:cNvSpPr/>
           <p:nvPr/>
         </p:nvSpPr>
@@ -7363,7 +7123,7 @@
       </p:sp>
       <p:sp>
         <p:nvSpPr>
-          <p:cNvPr id="35" name="TextBox 34"/>
+          <p:cNvPr id="31" name="TextBox 30"/>
           <p:cNvSpPr txBox="1"/>
           <p:nvPr/>
         </p:nvSpPr>
@@ -7403,7 +7163,7 @@
       </p:sp>
       <p:sp>
         <p:nvSpPr>
-          <p:cNvPr id="36" name="TextBox 35"/>
+          <p:cNvPr id="32" name="TextBox 31"/>
           <p:cNvSpPr txBox="1"/>
           <p:nvPr/>
         </p:nvSpPr>
@@ -7443,7 +7203,7 @@
       </p:sp>
       <p:sp>
         <p:nvSpPr>
-          <p:cNvPr id="37" name="TextBox 36"/>
+          <p:cNvPr id="33" name="TextBox 32"/>
           <p:cNvSpPr txBox="1"/>
           <p:nvPr/>
         </p:nvSpPr>
@@ -7483,22 +7243,22 @@
       </p:sp>
       <p:sp>
         <p:nvSpPr>
-          <p:cNvPr id="38" name="TextBox 37"/>
-          <p:cNvSpPr txBox="1"/>
-          <p:nvPr/>
-        </p:nvSpPr>
-        <p:spPr>
-          <a:xfrm>
-            <a:off x="832104" y="4401921"/>
-            <a:ext cx="4983480" cy="271068"/>
-          </a:xfrm>
-          <a:prstGeom prst="rect">
-            <a:avLst/>
-          </a:prstGeom>
-          <a:noFill/>
-        </p:spPr>
-        <p:txBody>
-          <a:bodyPr wrap="square" anchor="t" lIns="18288" rIns="18288" tIns="0" bIns="0">
+          <p:cNvPr id="34" name="TextBox 33"/>
+          <p:cNvSpPr txBox="1"/>
+          <p:nvPr/>
+        </p:nvSpPr>
+        <p:spPr>
+          <a:xfrm>
+            <a:off x="832104" y="4389120"/>
+            <a:ext cx="4983480" cy="868680"/>
+          </a:xfrm>
+          <a:prstGeom prst="rect">
+            <a:avLst/>
+          </a:prstGeom>
+          <a:noFill/>
+        </p:spPr>
+        <p:txBody>
+          <a:bodyPr wrap="square" anchor="t" lIns="18288" rIns="18288" tIns="12801" bIns="12801">
             <a:noAutofit/>
           </a:bodyPr>
           <a:lstStyle/>
@@ -7507,6 +7267,9 @@
               <a:lnSpc>
                 <a:spcPct val="128000"/>
               </a:lnSpc>
+              <a:spcAft>
+                <a:spcPts val="117"/>
+              </a:spcAft>
             </a:pPr>
             <a:r>
               <a:rPr sz="980" b="0" i="0">
@@ -7519,34 +7282,14 @@
               <a:t>• 우연에 기댄 해결(데우스 엑스 마키나)을 배제하고 인물의 선택으로 전개</a:t>
             </a:r>
           </a:p>
-        </p:txBody>
-      </p:sp>
-      <p:sp>
-        <p:nvSpPr>
-          <p:cNvPr id="39" name="TextBox 38"/>
-          <p:cNvSpPr txBox="1"/>
-          <p:nvPr/>
-        </p:nvSpPr>
-        <p:spPr>
-          <a:xfrm>
-            <a:off x="832104" y="4687925"/>
-            <a:ext cx="4983480" cy="271068"/>
-          </a:xfrm>
-          <a:prstGeom prst="rect">
-            <a:avLst/>
-          </a:prstGeom>
-          <a:noFill/>
-        </p:spPr>
-        <p:txBody>
-          <a:bodyPr wrap="square" anchor="t" lIns="18288" rIns="18288" tIns="0" bIns="0">
-            <a:noAutofit/>
-          </a:bodyPr>
-          <a:lstStyle/>
           <a:p>
             <a:pPr algn="l">
               <a:lnSpc>
                 <a:spcPct val="128000"/>
               </a:lnSpc>
+              <a:spcAft>
+                <a:spcPts val="117"/>
+              </a:spcAft>
             </a:pPr>
             <a:r>
               <a:rPr sz="980" b="0" i="0">
@@ -7559,29 +7302,6 @@
               <a:t>• 점진적으로 판돈(Stakes)을 높여 주인공을 퇴로 없는 막다른 골목으로 압박</a:t>
             </a:r>
           </a:p>
-        </p:txBody>
-      </p:sp>
-      <p:sp>
-        <p:nvSpPr>
-          <p:cNvPr id="40" name="TextBox 39"/>
-          <p:cNvSpPr txBox="1"/>
-          <p:nvPr/>
-        </p:nvSpPr>
-        <p:spPr>
-          <a:xfrm>
-            <a:off x="832104" y="4973929"/>
-            <a:ext cx="4983480" cy="271068"/>
-          </a:xfrm>
-          <a:prstGeom prst="rect">
-            <a:avLst/>
-          </a:prstGeom>
-          <a:noFill/>
-        </p:spPr>
-        <p:txBody>
-          <a:bodyPr wrap="square" anchor="t" lIns="18288" rIns="18288" tIns="0" bIns="0">
-            <a:noAutofit/>
-          </a:bodyPr>
-          <a:lstStyle/>
           <a:p>
             <a:pPr algn="l">
               <a:lnSpc>
@@ -7603,7 +7323,7 @@
       </p:sp>
       <p:sp>
         <p:nvSpPr>
-          <p:cNvPr id="41" name="Rounded Rectangle 40"/>
+          <p:cNvPr id="35" name="Rounded Rectangle 34"/>
           <p:cNvSpPr/>
           <p:nvPr/>
         </p:nvSpPr>
@@ -7649,7 +7369,7 @@
       </p:sp>
       <p:sp>
         <p:nvSpPr>
-          <p:cNvPr id="42" name="TextBox 41"/>
+          <p:cNvPr id="36" name="TextBox 35"/>
           <p:cNvSpPr txBox="1"/>
           <p:nvPr/>
         </p:nvSpPr>
@@ -7689,7 +7409,7 @@
       </p:sp>
       <p:sp>
         <p:nvSpPr>
-          <p:cNvPr id="43" name="Rounded Rectangle 42"/>
+          <p:cNvPr id="37" name="Rounded Rectangle 36"/>
           <p:cNvSpPr/>
           <p:nvPr/>
         </p:nvSpPr>
@@ -7737,7 +7457,7 @@
       </p:sp>
       <p:sp>
         <p:nvSpPr>
-          <p:cNvPr id="44" name="Rectangle 43"/>
+          <p:cNvPr id="38" name="Rectangle 37"/>
           <p:cNvSpPr/>
           <p:nvPr/>
         </p:nvSpPr>
@@ -7781,7 +7501,7 @@
       </p:sp>
       <p:sp>
         <p:nvSpPr>
-          <p:cNvPr id="45" name="Rounded Rectangle 44"/>
+          <p:cNvPr id="39" name="Rounded Rectangle 38"/>
           <p:cNvSpPr/>
           <p:nvPr/>
         </p:nvSpPr>
@@ -7827,7 +7547,7 @@
       </p:sp>
       <p:sp>
         <p:nvSpPr>
-          <p:cNvPr id="46" name="TextBox 45"/>
+          <p:cNvPr id="40" name="TextBox 39"/>
           <p:cNvSpPr txBox="1"/>
           <p:nvPr/>
         </p:nvSpPr>
@@ -7867,7 +7587,7 @@
       </p:sp>
       <p:sp>
         <p:nvSpPr>
-          <p:cNvPr id="47" name="TextBox 46"/>
+          <p:cNvPr id="41" name="TextBox 40"/>
           <p:cNvSpPr txBox="1"/>
           <p:nvPr/>
         </p:nvSpPr>
@@ -7907,7 +7627,7 @@
       </p:sp>
       <p:sp>
         <p:nvSpPr>
-          <p:cNvPr id="48" name="TextBox 47"/>
+          <p:cNvPr id="42" name="TextBox 41"/>
           <p:cNvSpPr txBox="1"/>
           <p:nvPr/>
         </p:nvSpPr>
@@ -7947,22 +7667,22 @@
       </p:sp>
       <p:sp>
         <p:nvSpPr>
-          <p:cNvPr id="49" name="TextBox 48"/>
-          <p:cNvSpPr txBox="1"/>
-          <p:nvPr/>
-        </p:nvSpPr>
-        <p:spPr>
-          <a:xfrm>
-            <a:off x="6437376" y="4401921"/>
-            <a:ext cx="4983480" cy="271068"/>
-          </a:xfrm>
-          <a:prstGeom prst="rect">
-            <a:avLst/>
-          </a:prstGeom>
-          <a:noFill/>
-        </p:spPr>
-        <p:txBody>
-          <a:bodyPr wrap="square" anchor="t" lIns="18288" rIns="18288" tIns="0" bIns="0">
+          <p:cNvPr id="43" name="TextBox 42"/>
+          <p:cNvSpPr txBox="1"/>
+          <p:nvPr/>
+        </p:nvSpPr>
+        <p:spPr>
+          <a:xfrm>
+            <a:off x="6437376" y="4389120"/>
+            <a:ext cx="4983480" cy="868680"/>
+          </a:xfrm>
+          <a:prstGeom prst="rect">
+            <a:avLst/>
+          </a:prstGeom>
+          <a:noFill/>
+        </p:spPr>
+        <p:txBody>
+          <a:bodyPr wrap="square" anchor="t" lIns="18288" rIns="18288" tIns="12801" bIns="12801">
             <a:noAutofit/>
           </a:bodyPr>
           <a:lstStyle/>
@@ -7971,6 +7691,9 @@
               <a:lnSpc>
                 <a:spcPct val="128000"/>
               </a:lnSpc>
+              <a:spcAft>
+                <a:spcPts val="117"/>
+              </a:spcAft>
             </a:pPr>
             <a:r>
               <a:rPr sz="980" b="0" i="0">
@@ -7983,34 +7706,14 @@
               <a:t>• 오감의 디테일과 구체적 행동으로 인물의 감정선을 시각화</a:t>
             </a:r>
           </a:p>
-        </p:txBody>
-      </p:sp>
-      <p:sp>
-        <p:nvSpPr>
-          <p:cNvPr id="50" name="TextBox 49"/>
-          <p:cNvSpPr txBox="1"/>
-          <p:nvPr/>
-        </p:nvSpPr>
-        <p:spPr>
-          <a:xfrm>
-            <a:off x="6437376" y="4687925"/>
-            <a:ext cx="4983480" cy="271068"/>
-          </a:xfrm>
-          <a:prstGeom prst="rect">
-            <a:avLst/>
-          </a:prstGeom>
-          <a:noFill/>
-        </p:spPr>
-        <p:txBody>
-          <a:bodyPr wrap="square" anchor="t" lIns="18288" rIns="18288" tIns="0" bIns="0">
-            <a:noAutofit/>
-          </a:bodyPr>
-          <a:lstStyle/>
           <a:p>
             <a:pPr algn="l">
               <a:lnSpc>
                 <a:spcPct val="128000"/>
               </a:lnSpc>
+              <a:spcAft>
+                <a:spcPts val="117"/>
+              </a:spcAft>
             </a:pPr>
             <a:r>
               <a:rPr sz="980" b="0" i="0">
@@ -8023,29 +7726,6 @@
               <a:t>• 인물의 성격과 관계의 권력 구도가 묻어나는 입체적인 대사 설계</a:t>
             </a:r>
           </a:p>
-        </p:txBody>
-      </p:sp>
-      <p:sp>
-        <p:nvSpPr>
-          <p:cNvPr id="51" name="TextBox 50"/>
-          <p:cNvSpPr txBox="1"/>
-          <p:nvPr/>
-        </p:nvSpPr>
-        <p:spPr>
-          <a:xfrm>
-            <a:off x="6437376" y="4973929"/>
-            <a:ext cx="4983480" cy="271068"/>
-          </a:xfrm>
-          <a:prstGeom prst="rect">
-            <a:avLst/>
-          </a:prstGeom>
-          <a:noFill/>
-        </p:spPr>
-        <p:txBody>
-          <a:bodyPr wrap="square" anchor="t" lIns="18288" rIns="18288" tIns="0" bIns="0">
-            <a:noAutofit/>
-          </a:bodyPr>
-          <a:lstStyle/>
           <a:p>
             <a:pPr algn="l">
               <a:lnSpc>
@@ -8067,7 +7747,7 @@
       </p:sp>
       <p:sp>
         <p:nvSpPr>
-          <p:cNvPr id="52" name="Rounded Rectangle 51"/>
+          <p:cNvPr id="44" name="Rounded Rectangle 43"/>
           <p:cNvSpPr/>
           <p:nvPr/>
         </p:nvSpPr>
@@ -8113,7 +7793,7 @@
       </p:sp>
       <p:sp>
         <p:nvSpPr>
-          <p:cNvPr id="53" name="TextBox 52"/>
+          <p:cNvPr id="45" name="TextBox 44"/>
           <p:cNvSpPr txBox="1"/>
           <p:nvPr/>
         </p:nvSpPr>
@@ -8153,7 +7833,7 @@
       </p:sp>
       <p:sp>
         <p:nvSpPr>
-          <p:cNvPr id="54" name="Rounded Rectangle 53"/>
+          <p:cNvPr id="46" name="Rounded Rectangle 45"/>
           <p:cNvSpPr/>
           <p:nvPr/>
         </p:nvSpPr>
@@ -8199,7 +7879,7 @@
       </p:sp>
       <p:sp>
         <p:nvSpPr>
-          <p:cNvPr id="55" name="TextBox 54"/>
+          <p:cNvPr id="47" name="TextBox 46"/>
           <p:cNvSpPr txBox="1"/>
           <p:nvPr/>
         </p:nvSpPr>
@@ -15603,16 +15283,16 @@
         </p:nvSpPr>
         <p:spPr>
           <a:xfrm>
-            <a:off x="7808975" y="5163616"/>
-            <a:ext cx="3584448" cy="327964"/>
-          </a:xfrm>
-          <a:prstGeom prst="rect">
-            <a:avLst/>
-          </a:prstGeom>
-          <a:noFill/>
-        </p:spPr>
-        <p:txBody>
-          <a:bodyPr wrap="square" anchor="t" lIns="9144" rIns="9144" tIns="0" bIns="0">
+            <a:off x="7808975" y="5157216"/>
+            <a:ext cx="3584448" cy="1024128"/>
+          </a:xfrm>
+          <a:prstGeom prst="rect">
+            <a:avLst/>
+          </a:prstGeom>
+          <a:noFill/>
+        </p:spPr>
+        <p:txBody>
+          <a:bodyPr wrap="square" anchor="t" lIns="9144" rIns="9144" tIns="6400" bIns="6400">
             <a:noAutofit/>
           </a:bodyPr>
           <a:lstStyle/>
@@ -15621,6 +15301,9 @@
               <a:lnSpc>
                 <a:spcPct val="128000"/>
               </a:lnSpc>
+              <a:spcAft>
+                <a:spcPts val="108"/>
+              </a:spcAft>
             </a:pPr>
             <a:r>
               <a:rPr sz="900" b="0" i="0">
@@ -15633,34 +15316,14 @@
               <a:t>• 장면의 시작과 끝 사이에 인물의 상황·감정의 부호(+/-)가 바뀌었는가?</a:t>
             </a:r>
           </a:p>
-        </p:txBody>
-      </p:sp>
-      <p:sp>
-        <p:nvSpPr>
-          <p:cNvPr id="51" name="TextBox 50"/>
-          <p:cNvSpPr txBox="1"/>
-          <p:nvPr/>
-        </p:nvSpPr>
-        <p:spPr>
-          <a:xfrm>
-            <a:off x="7808975" y="5505297"/>
-            <a:ext cx="3584448" cy="327964"/>
-          </a:xfrm>
-          <a:prstGeom prst="rect">
-            <a:avLst/>
-          </a:prstGeom>
-          <a:noFill/>
-        </p:spPr>
-        <p:txBody>
-          <a:bodyPr wrap="square" anchor="t" lIns="9144" rIns="9144" tIns="0" bIns="0">
-            <a:noAutofit/>
-          </a:bodyPr>
-          <a:lstStyle/>
           <a:p>
             <a:pPr algn="l">
               <a:lnSpc>
                 <a:spcPct val="128000"/>
               </a:lnSpc>
+              <a:spcAft>
+                <a:spcPts val="108"/>
+              </a:spcAft>
             </a:pPr>
             <a:r>
               <a:rPr sz="900" b="0" i="0">
@@ -15673,29 +15336,6 @@
               <a:t>• 플롯을 전진시키거나 인물의 핵심 본성을 드러내는가?</a:t>
             </a:r>
           </a:p>
-        </p:txBody>
-      </p:sp>
-      <p:sp>
-        <p:nvSpPr>
-          <p:cNvPr id="52" name="TextBox 51"/>
-          <p:cNvSpPr txBox="1"/>
-          <p:nvPr/>
-        </p:nvSpPr>
-        <p:spPr>
-          <a:xfrm>
-            <a:off x="7808975" y="5846978"/>
-            <a:ext cx="3584448" cy="327964"/>
-          </a:xfrm>
-          <a:prstGeom prst="rect">
-            <a:avLst/>
-          </a:prstGeom>
-          <a:noFill/>
-        </p:spPr>
-        <p:txBody>
-          <a:bodyPr wrap="square" anchor="t" lIns="9144" rIns="9144" tIns="0" bIns="0">
-            <a:noAutofit/>
-          </a:bodyPr>
-          <a:lstStyle/>
           <a:p>
             <a:pPr algn="l">
               <a:lnSpc>
@@ -16557,16 +16197,16 @@
         </p:nvSpPr>
         <p:spPr>
           <a:xfrm>
-            <a:off x="685800" y="1926640"/>
-            <a:ext cx="1691639" cy="397078"/>
-          </a:xfrm>
-          <a:prstGeom prst="rect">
-            <a:avLst/>
-          </a:prstGeom>
-          <a:noFill/>
-        </p:spPr>
-        <p:txBody>
-          <a:bodyPr wrap="square" anchor="t" lIns="9144" rIns="9144" tIns="0" bIns="0">
+            <a:off x="685800" y="1920240"/>
+            <a:ext cx="1691639" cy="822960"/>
+          </a:xfrm>
+          <a:prstGeom prst="rect">
+            <a:avLst/>
+          </a:prstGeom>
+          <a:noFill/>
+        </p:spPr>
+        <p:txBody>
+          <a:bodyPr wrap="square" anchor="ctr" lIns="9144" rIns="9144" tIns="6400" bIns="6400">
             <a:noAutofit/>
           </a:bodyPr>
           <a:lstStyle/>
@@ -16575,6 +16215,9 @@
               <a:lnSpc>
                 <a:spcPct val="122000"/>
               </a:lnSpc>
+              <a:spcAft>
+                <a:spcPts val="126"/>
+              </a:spcAft>
             </a:pPr>
             <a:r>
               <a:rPr sz="1050" b="1" i="0">
@@ -16587,29 +16230,6 @@
               <a:t>1인칭 주인공 시점</a:t>
             </a:r>
           </a:p>
-        </p:txBody>
-      </p:sp>
-      <p:sp>
-        <p:nvSpPr>
-          <p:cNvPr id="22" name="TextBox 21"/>
-          <p:cNvSpPr txBox="1"/>
-          <p:nvPr/>
-        </p:nvSpPr>
-        <p:spPr>
-          <a:xfrm>
-            <a:off x="685800" y="2339721"/>
-            <a:ext cx="1691639" cy="397078"/>
-          </a:xfrm>
-          <a:prstGeom prst="rect">
-            <a:avLst/>
-          </a:prstGeom>
-          <a:noFill/>
-        </p:spPr>
-        <p:txBody>
-          <a:bodyPr wrap="square" anchor="t" lIns="9144" rIns="9144" tIns="0" bIns="0">
-            <a:noAutofit/>
-          </a:bodyPr>
-          <a:lstStyle/>
           <a:p>
             <a:pPr algn="l">
               <a:lnSpc>
@@ -16631,7 +16251,7 @@
       </p:sp>
       <p:sp>
         <p:nvSpPr>
-          <p:cNvPr id="23" name="Rectangle 22"/>
+          <p:cNvPr id="22" name="Rectangle 21"/>
           <p:cNvSpPr/>
           <p:nvPr/>
         </p:nvSpPr>
@@ -16677,7 +16297,7 @@
       </p:sp>
       <p:sp>
         <p:nvSpPr>
-          <p:cNvPr id="24" name="TextBox 23"/>
+          <p:cNvPr id="23" name="TextBox 22"/>
           <p:cNvSpPr txBox="1"/>
           <p:nvPr/>
         </p:nvSpPr>
@@ -16717,7 +16337,7 @@
       </p:sp>
       <p:sp>
         <p:nvSpPr>
-          <p:cNvPr id="25" name="Rectangle 24"/>
+          <p:cNvPr id="24" name="Rectangle 23"/>
           <p:cNvSpPr/>
           <p:nvPr/>
         </p:nvSpPr>
@@ -16763,22 +16383,22 @@
       </p:sp>
       <p:sp>
         <p:nvSpPr>
-          <p:cNvPr id="26" name="TextBox 25"/>
-          <p:cNvSpPr txBox="1"/>
-          <p:nvPr/>
-        </p:nvSpPr>
-        <p:spPr>
-          <a:xfrm>
-            <a:off x="5074919" y="1926640"/>
-            <a:ext cx="2148839" cy="259994"/>
-          </a:xfrm>
-          <a:prstGeom prst="rect">
-            <a:avLst/>
-          </a:prstGeom>
-          <a:noFill/>
-        </p:spPr>
-        <p:txBody>
-          <a:bodyPr wrap="square" anchor="t" lIns="9144" rIns="9144" tIns="0" bIns="0">
+          <p:cNvPr id="25" name="TextBox 24"/>
+          <p:cNvSpPr txBox="1"/>
+          <p:nvPr/>
+        </p:nvSpPr>
+        <p:spPr>
+          <a:xfrm>
+            <a:off x="5074919" y="1920240"/>
+            <a:ext cx="2148839" cy="822960"/>
+          </a:xfrm>
+          <a:prstGeom prst="rect">
+            <a:avLst/>
+          </a:prstGeom>
+          <a:noFill/>
+        </p:spPr>
+        <p:txBody>
+          <a:bodyPr wrap="square" anchor="ctr" lIns="9144" rIns="9144" tIns="6400" bIns="6400">
             <a:noAutofit/>
           </a:bodyPr>
           <a:lstStyle/>
@@ -16787,6 +16407,9 @@
               <a:lnSpc>
                 <a:spcPct val="122000"/>
               </a:lnSpc>
+              <a:spcAft>
+                <a:spcPts val="118"/>
+              </a:spcAft>
             </a:pPr>
             <a:r>
               <a:rPr sz="990" b="0" i="0">
@@ -16799,34 +16422,14 @@
               <a:t>• 독자와 주인공의 즉각적 밀착</a:t>
             </a:r>
           </a:p>
-        </p:txBody>
-      </p:sp>
-      <p:sp>
-        <p:nvSpPr>
-          <p:cNvPr id="27" name="TextBox 26"/>
-          <p:cNvSpPr txBox="1"/>
-          <p:nvPr/>
-        </p:nvSpPr>
-        <p:spPr>
-          <a:xfrm>
-            <a:off x="5074919" y="2201722"/>
-            <a:ext cx="2148839" cy="259994"/>
-          </a:xfrm>
-          <a:prstGeom prst="rect">
-            <a:avLst/>
-          </a:prstGeom>
-          <a:noFill/>
-        </p:spPr>
-        <p:txBody>
-          <a:bodyPr wrap="square" anchor="t" lIns="9144" rIns="9144" tIns="0" bIns="0">
-            <a:noAutofit/>
-          </a:bodyPr>
-          <a:lstStyle/>
           <a:p>
             <a:pPr algn="l">
               <a:lnSpc>
                 <a:spcPct val="122000"/>
               </a:lnSpc>
+              <a:spcAft>
+                <a:spcPts val="118"/>
+              </a:spcAft>
             </a:pPr>
             <a:r>
               <a:rPr sz="990" b="0" i="0">
@@ -16839,29 +16442,6 @@
               <a:t>• 화자의 독특한 목소리·유머 극대화</a:t>
             </a:r>
           </a:p>
-        </p:txBody>
-      </p:sp>
-      <p:sp>
-        <p:nvSpPr>
-          <p:cNvPr id="28" name="TextBox 27"/>
-          <p:cNvSpPr txBox="1"/>
-          <p:nvPr/>
-        </p:nvSpPr>
-        <p:spPr>
-          <a:xfrm>
-            <a:off x="5074919" y="2476804"/>
-            <a:ext cx="2148839" cy="259994"/>
-          </a:xfrm>
-          <a:prstGeom prst="rect">
-            <a:avLst/>
-          </a:prstGeom>
-          <a:noFill/>
-        </p:spPr>
-        <p:txBody>
-          <a:bodyPr wrap="square" anchor="t" lIns="9144" rIns="9144" tIns="0" bIns="0">
-            <a:noAutofit/>
-          </a:bodyPr>
-          <a:lstStyle/>
           <a:p>
             <a:pPr algn="l">
               <a:lnSpc>
@@ -16883,7 +16463,7 @@
       </p:sp>
       <p:sp>
         <p:nvSpPr>
-          <p:cNvPr id="29" name="Rectangle 28"/>
+          <p:cNvPr id="26" name="Rectangle 25"/>
           <p:cNvSpPr/>
           <p:nvPr/>
         </p:nvSpPr>
@@ -16929,22 +16509,22 @@
       </p:sp>
       <p:sp>
         <p:nvSpPr>
-          <p:cNvPr id="30" name="TextBox 29"/>
-          <p:cNvSpPr txBox="1"/>
-          <p:nvPr/>
-        </p:nvSpPr>
-        <p:spPr>
-          <a:xfrm>
-            <a:off x="7406640" y="1926640"/>
-            <a:ext cx="2057400" cy="397535"/>
-          </a:xfrm>
-          <a:prstGeom prst="rect">
-            <a:avLst/>
-          </a:prstGeom>
-          <a:noFill/>
-        </p:spPr>
-        <p:txBody>
-          <a:bodyPr wrap="square" anchor="t" lIns="9144" rIns="9144" tIns="0" bIns="0">
+          <p:cNvPr id="27" name="TextBox 26"/>
+          <p:cNvSpPr txBox="1"/>
+          <p:nvPr/>
+        </p:nvSpPr>
+        <p:spPr>
+          <a:xfrm>
+            <a:off x="7406640" y="1920240"/>
+            <a:ext cx="2057400" cy="822960"/>
+          </a:xfrm>
+          <a:prstGeom prst="rect">
+            <a:avLst/>
+          </a:prstGeom>
+          <a:noFill/>
+        </p:spPr>
+        <p:txBody>
+          <a:bodyPr wrap="square" anchor="ctr" lIns="9144" rIns="9144" tIns="6400" bIns="6400">
             <a:noAutofit/>
           </a:bodyPr>
           <a:lstStyle/>
@@ -16953,6 +16533,9 @@
               <a:lnSpc>
                 <a:spcPct val="122000"/>
               </a:lnSpc>
+              <a:spcAft>
+                <a:spcPts val="118"/>
+              </a:spcAft>
             </a:pPr>
             <a:r>
               <a:rPr sz="990" b="0" i="0">
@@ -16965,29 +16548,6 @@
               <a:t>• 주인공이 없는 현장의 사건 서술 불가</a:t>
             </a:r>
           </a:p>
-        </p:txBody>
-      </p:sp>
-      <p:sp>
-        <p:nvSpPr>
-          <p:cNvPr id="31" name="TextBox 30"/>
-          <p:cNvSpPr txBox="1"/>
-          <p:nvPr/>
-        </p:nvSpPr>
-        <p:spPr>
-          <a:xfrm>
-            <a:off x="7406640" y="2339263"/>
-            <a:ext cx="2057400" cy="397535"/>
-          </a:xfrm>
-          <a:prstGeom prst="rect">
-            <a:avLst/>
-          </a:prstGeom>
-          <a:noFill/>
-        </p:spPr>
-        <p:txBody>
-          <a:bodyPr wrap="square" anchor="t" lIns="9144" rIns="9144" tIns="0" bIns="0">
-            <a:noAutofit/>
-          </a:bodyPr>
-          <a:lstStyle/>
           <a:p>
             <a:pPr algn="l">
               <a:lnSpc>
@@ -17009,7 +16569,7 @@
       </p:sp>
       <p:sp>
         <p:nvSpPr>
-          <p:cNvPr id="32" name="Rectangle 31"/>
+          <p:cNvPr id="28" name="Rectangle 27"/>
           <p:cNvSpPr/>
           <p:nvPr/>
         </p:nvSpPr>
@@ -17055,22 +16615,22 @@
       </p:sp>
       <p:sp>
         <p:nvSpPr>
-          <p:cNvPr id="33" name="TextBox 32"/>
-          <p:cNvSpPr txBox="1"/>
-          <p:nvPr/>
-        </p:nvSpPr>
-        <p:spPr>
-          <a:xfrm>
-            <a:off x="9646919" y="1926640"/>
-            <a:ext cx="1856231" cy="397535"/>
-          </a:xfrm>
-          <a:prstGeom prst="rect">
-            <a:avLst/>
-          </a:prstGeom>
-          <a:noFill/>
-        </p:spPr>
-        <p:txBody>
-          <a:bodyPr wrap="square" anchor="t" lIns="9144" rIns="9144" tIns="0" bIns="0">
+          <p:cNvPr id="29" name="TextBox 28"/>
+          <p:cNvSpPr txBox="1"/>
+          <p:nvPr/>
+        </p:nvSpPr>
+        <p:spPr>
+          <a:xfrm>
+            <a:off x="9646919" y="1920240"/>
+            <a:ext cx="1856231" cy="822960"/>
+          </a:xfrm>
+          <a:prstGeom prst="rect">
+            <a:avLst/>
+          </a:prstGeom>
+          <a:noFill/>
+        </p:spPr>
+        <p:txBody>
+          <a:bodyPr wrap="square" anchor="ctr" lIns="9144" rIns="9144" tIns="6400" bIns="6400">
             <a:noAutofit/>
           </a:bodyPr>
           <a:lstStyle/>
@@ -17079,6 +16639,9 @@
               <a:lnSpc>
                 <a:spcPct val="122000"/>
               </a:lnSpc>
+              <a:spcAft>
+                <a:spcPts val="118"/>
+              </a:spcAft>
             </a:pPr>
             <a:r>
               <a:rPr sz="990" b="0" i="0">
@@ -17091,29 +16654,6 @@
               <a:t>청춘 성장소설, 느와르,</a:t>
             </a:r>
           </a:p>
-        </p:txBody>
-      </p:sp>
-      <p:sp>
-        <p:nvSpPr>
-          <p:cNvPr id="34" name="TextBox 33"/>
-          <p:cNvSpPr txBox="1"/>
-          <p:nvPr/>
-        </p:nvSpPr>
-        <p:spPr>
-          <a:xfrm>
-            <a:off x="9646919" y="2339263"/>
-            <a:ext cx="1856231" cy="397535"/>
-          </a:xfrm>
-          <a:prstGeom prst="rect">
-            <a:avLst/>
-          </a:prstGeom>
-          <a:noFill/>
-        </p:spPr>
-        <p:txBody>
-          <a:bodyPr wrap="square" anchor="t" lIns="9144" rIns="9144" tIns="0" bIns="0">
-            <a:noAutofit/>
-          </a:bodyPr>
-          <a:lstStyle/>
           <a:p>
             <a:pPr algn="l">
               <a:lnSpc>
@@ -17135,7 +16675,7 @@
       </p:sp>
       <p:sp>
         <p:nvSpPr>
-          <p:cNvPr id="35" name="Rectangle 34"/>
+          <p:cNvPr id="30" name="Rectangle 29"/>
           <p:cNvSpPr/>
           <p:nvPr/>
         </p:nvSpPr>
@@ -17181,22 +16721,22 @@
       </p:sp>
       <p:sp>
         <p:nvSpPr>
-          <p:cNvPr id="36" name="TextBox 35"/>
-          <p:cNvSpPr txBox="1"/>
-          <p:nvPr/>
-        </p:nvSpPr>
-        <p:spPr>
-          <a:xfrm>
-            <a:off x="685800" y="2895904"/>
-            <a:ext cx="1691639" cy="397078"/>
-          </a:xfrm>
-          <a:prstGeom prst="rect">
-            <a:avLst/>
-          </a:prstGeom>
-          <a:noFill/>
-        </p:spPr>
-        <p:txBody>
-          <a:bodyPr wrap="square" anchor="t" lIns="9144" rIns="9144" tIns="0" bIns="0">
+          <p:cNvPr id="31" name="TextBox 30"/>
+          <p:cNvSpPr txBox="1"/>
+          <p:nvPr/>
+        </p:nvSpPr>
+        <p:spPr>
+          <a:xfrm>
+            <a:off x="685800" y="2889504"/>
+            <a:ext cx="1691639" cy="822960"/>
+          </a:xfrm>
+          <a:prstGeom prst="rect">
+            <a:avLst/>
+          </a:prstGeom>
+          <a:noFill/>
+        </p:spPr>
+        <p:txBody>
+          <a:bodyPr wrap="square" anchor="ctr" lIns="9144" rIns="9144" tIns="6400" bIns="6400">
             <a:noAutofit/>
           </a:bodyPr>
           <a:lstStyle/>
@@ -17205,6 +16745,9 @@
               <a:lnSpc>
                 <a:spcPct val="122000"/>
               </a:lnSpc>
+              <a:spcAft>
+                <a:spcPts val="126"/>
+              </a:spcAft>
             </a:pPr>
             <a:r>
               <a:rPr sz="1050" b="1" i="0">
@@ -17217,29 +16760,6 @@
               <a:t>3인칭 제한 시점</a:t>
             </a:r>
           </a:p>
-        </p:txBody>
-      </p:sp>
-      <p:sp>
-        <p:nvSpPr>
-          <p:cNvPr id="37" name="TextBox 36"/>
-          <p:cNvSpPr txBox="1"/>
-          <p:nvPr/>
-        </p:nvSpPr>
-        <p:spPr>
-          <a:xfrm>
-            <a:off x="685800" y="3308985"/>
-            <a:ext cx="1691639" cy="397078"/>
-          </a:xfrm>
-          <a:prstGeom prst="rect">
-            <a:avLst/>
-          </a:prstGeom>
-          <a:noFill/>
-        </p:spPr>
-        <p:txBody>
-          <a:bodyPr wrap="square" anchor="t" lIns="9144" rIns="9144" tIns="0" bIns="0">
-            <a:noAutofit/>
-          </a:bodyPr>
-          <a:lstStyle/>
           <a:p>
             <a:pPr algn="l">
               <a:lnSpc>
@@ -17261,7 +16781,7 @@
       </p:sp>
       <p:sp>
         <p:nvSpPr>
-          <p:cNvPr id="38" name="Rectangle 37"/>
+          <p:cNvPr id="32" name="Rectangle 31"/>
           <p:cNvSpPr/>
           <p:nvPr/>
         </p:nvSpPr>
@@ -17307,7 +16827,7 @@
       </p:sp>
       <p:sp>
         <p:nvSpPr>
-          <p:cNvPr id="39" name="TextBox 38"/>
+          <p:cNvPr id="33" name="TextBox 32"/>
           <p:cNvSpPr txBox="1"/>
           <p:nvPr/>
         </p:nvSpPr>
@@ -17347,7 +16867,7 @@
       </p:sp>
       <p:sp>
         <p:nvSpPr>
-          <p:cNvPr id="40" name="Rectangle 39"/>
+          <p:cNvPr id="34" name="Rectangle 33"/>
           <p:cNvSpPr/>
           <p:nvPr/>
         </p:nvSpPr>
@@ -17393,22 +16913,22 @@
       </p:sp>
       <p:sp>
         <p:nvSpPr>
-          <p:cNvPr id="41" name="TextBox 40"/>
-          <p:cNvSpPr txBox="1"/>
-          <p:nvPr/>
-        </p:nvSpPr>
-        <p:spPr>
-          <a:xfrm>
-            <a:off x="5074919" y="2895904"/>
-            <a:ext cx="2148839" cy="534018"/>
-          </a:xfrm>
-          <a:prstGeom prst="rect">
-            <a:avLst/>
-          </a:prstGeom>
-          <a:noFill/>
-        </p:spPr>
-        <p:txBody>
-          <a:bodyPr wrap="square" anchor="t" lIns="9144" rIns="9144" tIns="0" bIns="0">
+          <p:cNvPr id="35" name="TextBox 34"/>
+          <p:cNvSpPr txBox="1"/>
+          <p:nvPr/>
+        </p:nvSpPr>
+        <p:spPr>
+          <a:xfrm>
+            <a:off x="5074919" y="2889504"/>
+            <a:ext cx="2148839" cy="822960"/>
+          </a:xfrm>
+          <a:prstGeom prst="rect">
+            <a:avLst/>
+          </a:prstGeom>
+          <a:noFill/>
+        </p:spPr>
+        <p:txBody>
+          <a:bodyPr wrap="square" anchor="ctr" lIns="9144" rIns="9144" tIns="6400" bIns="6400">
             <a:noAutofit/>
           </a:bodyPr>
           <a:lstStyle/>
@@ -17417,6 +16937,9 @@
               <a:lnSpc>
                 <a:spcPct val="122000"/>
               </a:lnSpc>
+              <a:spcAft>
+                <a:spcPts val="118"/>
+              </a:spcAft>
             </a:pPr>
             <a:r>
               <a:rPr sz="990" b="0" i="0">
@@ -17429,29 +16952,6 @@
               <a:t>• 1인칭의 깊은 정서적 몰입감과 3인칭의 객관적 묘사력을 동시에 확보</a:t>
             </a:r>
           </a:p>
-        </p:txBody>
-      </p:sp>
-      <p:sp>
-        <p:nvSpPr>
-          <p:cNvPr id="42" name="TextBox 41"/>
-          <p:cNvSpPr txBox="1"/>
-          <p:nvPr/>
-        </p:nvSpPr>
-        <p:spPr>
-          <a:xfrm>
-            <a:off x="5074919" y="3445011"/>
-            <a:ext cx="2148839" cy="261051"/>
-          </a:xfrm>
-          <a:prstGeom prst="rect">
-            <a:avLst/>
-          </a:prstGeom>
-          <a:noFill/>
-        </p:spPr>
-        <p:txBody>
-          <a:bodyPr wrap="square" anchor="t" lIns="9144" rIns="9144" tIns="0" bIns="0">
-            <a:noAutofit/>
-          </a:bodyPr>
-          <a:lstStyle/>
           <a:p>
             <a:pPr algn="l">
               <a:lnSpc>
@@ -17473,7 +16973,7 @@
       </p:sp>
       <p:sp>
         <p:nvSpPr>
-          <p:cNvPr id="43" name="Rectangle 42"/>
+          <p:cNvPr id="36" name="Rectangle 35"/>
           <p:cNvSpPr/>
           <p:nvPr/>
         </p:nvSpPr>
@@ -17519,7 +17019,7 @@
       </p:sp>
       <p:sp>
         <p:nvSpPr>
-          <p:cNvPr id="44" name="TextBox 43"/>
+          <p:cNvPr id="37" name="TextBox 36"/>
           <p:cNvSpPr txBox="1"/>
           <p:nvPr/>
         </p:nvSpPr>
@@ -17559,7 +17059,7 @@
       </p:sp>
       <p:sp>
         <p:nvSpPr>
-          <p:cNvPr id="45" name="Rectangle 44"/>
+          <p:cNvPr id="38" name="Rectangle 37"/>
           <p:cNvSpPr/>
           <p:nvPr/>
         </p:nvSpPr>
@@ -17605,22 +17105,22 @@
       </p:sp>
       <p:sp>
         <p:nvSpPr>
-          <p:cNvPr id="46" name="TextBox 45"/>
-          <p:cNvSpPr txBox="1"/>
-          <p:nvPr/>
-        </p:nvSpPr>
-        <p:spPr>
-          <a:xfrm>
-            <a:off x="9646919" y="2895904"/>
-            <a:ext cx="1856231" cy="397535"/>
-          </a:xfrm>
-          <a:prstGeom prst="rect">
-            <a:avLst/>
-          </a:prstGeom>
-          <a:noFill/>
-        </p:spPr>
-        <p:txBody>
-          <a:bodyPr wrap="square" anchor="t" lIns="9144" rIns="9144" tIns="0" bIns="0">
+          <p:cNvPr id="39" name="TextBox 38"/>
+          <p:cNvSpPr txBox="1"/>
+          <p:nvPr/>
+        </p:nvSpPr>
+        <p:spPr>
+          <a:xfrm>
+            <a:off x="9646919" y="2889504"/>
+            <a:ext cx="1856231" cy="822960"/>
+          </a:xfrm>
+          <a:prstGeom prst="rect">
+            <a:avLst/>
+          </a:prstGeom>
+          <a:noFill/>
+        </p:spPr>
+        <p:txBody>
+          <a:bodyPr wrap="square" anchor="ctr" lIns="9144" rIns="9144" tIns="6400" bIns="6400">
             <a:noAutofit/>
           </a:bodyPr>
           <a:lstStyle/>
@@ -17629,6 +17129,9 @@
               <a:lnSpc>
                 <a:spcPct val="122000"/>
               </a:lnSpc>
+              <a:spcAft>
+                <a:spcPts val="118"/>
+              </a:spcAft>
             </a:pPr>
             <a:r>
               <a:rPr sz="990" b="0" i="0">
@@ -17641,29 +17144,6 @@
               <a:t>현대 문학 전반, 장르소설,</a:t>
             </a:r>
           </a:p>
-        </p:txBody>
-      </p:sp>
-      <p:sp>
-        <p:nvSpPr>
-          <p:cNvPr id="47" name="TextBox 46"/>
-          <p:cNvSpPr txBox="1"/>
-          <p:nvPr/>
-        </p:nvSpPr>
-        <p:spPr>
-          <a:xfrm>
-            <a:off x="9646919" y="3308527"/>
-            <a:ext cx="1856231" cy="397535"/>
-          </a:xfrm>
-          <a:prstGeom prst="rect">
-            <a:avLst/>
-          </a:prstGeom>
-          <a:noFill/>
-        </p:spPr>
-        <p:txBody>
-          <a:bodyPr wrap="square" anchor="t" lIns="9144" rIns="9144" tIns="0" bIns="0">
-            <a:noAutofit/>
-          </a:bodyPr>
-          <a:lstStyle/>
           <a:p>
             <a:pPr algn="l">
               <a:lnSpc>
@@ -17685,7 +17165,7 @@
       </p:sp>
       <p:sp>
         <p:nvSpPr>
-          <p:cNvPr id="48" name="Rectangle 47"/>
+          <p:cNvPr id="40" name="Rectangle 39"/>
           <p:cNvSpPr/>
           <p:nvPr/>
         </p:nvSpPr>
@@ -17731,22 +17211,22 @@
       </p:sp>
       <p:sp>
         <p:nvSpPr>
-          <p:cNvPr id="49" name="TextBox 48"/>
-          <p:cNvSpPr txBox="1"/>
-          <p:nvPr/>
-        </p:nvSpPr>
-        <p:spPr>
-          <a:xfrm>
-            <a:off x="685800" y="3865168"/>
-            <a:ext cx="1691639" cy="397078"/>
-          </a:xfrm>
-          <a:prstGeom prst="rect">
-            <a:avLst/>
-          </a:prstGeom>
-          <a:noFill/>
-        </p:spPr>
-        <p:txBody>
-          <a:bodyPr wrap="square" anchor="t" lIns="9144" rIns="9144" tIns="0" bIns="0">
+          <p:cNvPr id="41" name="TextBox 40"/>
+          <p:cNvSpPr txBox="1"/>
+          <p:nvPr/>
+        </p:nvSpPr>
+        <p:spPr>
+          <a:xfrm>
+            <a:off x="685800" y="3858768"/>
+            <a:ext cx="1691639" cy="822960"/>
+          </a:xfrm>
+          <a:prstGeom prst="rect">
+            <a:avLst/>
+          </a:prstGeom>
+          <a:noFill/>
+        </p:spPr>
+        <p:txBody>
+          <a:bodyPr wrap="square" anchor="ctr" lIns="9144" rIns="9144" tIns="6400" bIns="6400">
             <a:noAutofit/>
           </a:bodyPr>
           <a:lstStyle/>
@@ -17755,6 +17235,9 @@
               <a:lnSpc>
                 <a:spcPct val="122000"/>
               </a:lnSpc>
+              <a:spcAft>
+                <a:spcPts val="126"/>
+              </a:spcAft>
             </a:pPr>
             <a:r>
               <a:rPr sz="1050" b="1" i="0">
@@ -17767,29 +17250,6 @@
               <a:t>3인칭 전지적 시점</a:t>
             </a:r>
           </a:p>
-        </p:txBody>
-      </p:sp>
-      <p:sp>
-        <p:nvSpPr>
-          <p:cNvPr id="50" name="TextBox 49"/>
-          <p:cNvSpPr txBox="1"/>
-          <p:nvPr/>
-        </p:nvSpPr>
-        <p:spPr>
-          <a:xfrm>
-            <a:off x="685800" y="4278249"/>
-            <a:ext cx="1691639" cy="397078"/>
-          </a:xfrm>
-          <a:prstGeom prst="rect">
-            <a:avLst/>
-          </a:prstGeom>
-          <a:noFill/>
-        </p:spPr>
-        <p:txBody>
-          <a:bodyPr wrap="square" anchor="t" lIns="9144" rIns="9144" tIns="0" bIns="0">
-            <a:noAutofit/>
-          </a:bodyPr>
-          <a:lstStyle/>
           <a:p>
             <a:pPr algn="l">
               <a:lnSpc>
@@ -17811,7 +17271,7 @@
       </p:sp>
       <p:sp>
         <p:nvSpPr>
-          <p:cNvPr id="51" name="Rectangle 50"/>
+          <p:cNvPr id="42" name="Rectangle 41"/>
           <p:cNvSpPr/>
           <p:nvPr/>
         </p:nvSpPr>
@@ -17857,7 +17317,7 @@
       </p:sp>
       <p:sp>
         <p:nvSpPr>
-          <p:cNvPr id="52" name="TextBox 51"/>
+          <p:cNvPr id="43" name="TextBox 42"/>
           <p:cNvSpPr txBox="1"/>
           <p:nvPr/>
         </p:nvSpPr>
@@ -17897,7 +17357,7 @@
       </p:sp>
       <p:sp>
         <p:nvSpPr>
-          <p:cNvPr id="53" name="Rectangle 52"/>
+          <p:cNvPr id="44" name="Rectangle 43"/>
           <p:cNvSpPr/>
           <p:nvPr/>
         </p:nvSpPr>
@@ -17943,22 +17403,22 @@
       </p:sp>
       <p:sp>
         <p:nvSpPr>
-          <p:cNvPr id="54" name="TextBox 53"/>
-          <p:cNvSpPr txBox="1"/>
-          <p:nvPr/>
-        </p:nvSpPr>
-        <p:spPr>
-          <a:xfrm>
-            <a:off x="5074919" y="3865168"/>
-            <a:ext cx="2148839" cy="261051"/>
-          </a:xfrm>
-          <a:prstGeom prst="rect">
-            <a:avLst/>
-          </a:prstGeom>
-          <a:noFill/>
-        </p:spPr>
-        <p:txBody>
-          <a:bodyPr wrap="square" anchor="t" lIns="9144" rIns="9144" tIns="0" bIns="0">
+          <p:cNvPr id="45" name="TextBox 44"/>
+          <p:cNvSpPr txBox="1"/>
+          <p:nvPr/>
+        </p:nvSpPr>
+        <p:spPr>
+          <a:xfrm>
+            <a:off x="5074919" y="3858768"/>
+            <a:ext cx="2148839" cy="822960"/>
+          </a:xfrm>
+          <a:prstGeom prst="rect">
+            <a:avLst/>
+          </a:prstGeom>
+          <a:noFill/>
+        </p:spPr>
+        <p:txBody>
+          <a:bodyPr wrap="square" anchor="ctr" lIns="9144" rIns="9144" tIns="6400" bIns="6400">
             <a:noAutofit/>
           </a:bodyPr>
           <a:lstStyle/>
@@ -17967,6 +17427,9 @@
               <a:lnSpc>
                 <a:spcPct val="122000"/>
               </a:lnSpc>
+              <a:spcAft>
+                <a:spcPts val="118"/>
+              </a:spcAft>
             </a:pPr>
             <a:r>
               <a:rPr sz="990" b="0" i="0">
@@ -17979,29 +17442,6 @@
               <a:t>• 방대한 세계관과 시대상을 조망</a:t>
             </a:r>
           </a:p>
-        </p:txBody>
-      </p:sp>
-      <p:sp>
-        <p:nvSpPr>
-          <p:cNvPr id="55" name="TextBox 54"/>
-          <p:cNvSpPr txBox="1"/>
-          <p:nvPr/>
-        </p:nvSpPr>
-        <p:spPr>
-          <a:xfrm>
-            <a:off x="5074919" y="4141308"/>
-            <a:ext cx="2148839" cy="534018"/>
-          </a:xfrm>
-          <a:prstGeom prst="rect">
-            <a:avLst/>
-          </a:prstGeom>
-          <a:noFill/>
-        </p:spPr>
-        <p:txBody>
-          <a:bodyPr wrap="square" anchor="t" lIns="9144" rIns="9144" tIns="0" bIns="0">
-            <a:noAutofit/>
-          </a:bodyPr>
-          <a:lstStyle/>
           <a:p>
             <a:pPr algn="l">
               <a:lnSpc>
@@ -18023,7 +17463,7 @@
       </p:sp>
       <p:sp>
         <p:nvSpPr>
-          <p:cNvPr id="56" name="Rectangle 55"/>
+          <p:cNvPr id="46" name="Rectangle 45"/>
           <p:cNvSpPr/>
           <p:nvPr/>
         </p:nvSpPr>
@@ -18069,7 +17509,7 @@
       </p:sp>
       <p:sp>
         <p:nvSpPr>
-          <p:cNvPr id="57" name="TextBox 56"/>
+          <p:cNvPr id="47" name="TextBox 46"/>
           <p:cNvSpPr txBox="1"/>
           <p:nvPr/>
         </p:nvSpPr>
@@ -18109,7 +17549,7 @@
       </p:sp>
       <p:sp>
         <p:nvSpPr>
-          <p:cNvPr id="58" name="Rectangle 57"/>
+          <p:cNvPr id="48" name="Rectangle 47"/>
           <p:cNvSpPr/>
           <p:nvPr/>
         </p:nvSpPr>
@@ -18155,22 +17595,22 @@
       </p:sp>
       <p:sp>
         <p:nvSpPr>
-          <p:cNvPr id="59" name="TextBox 58"/>
-          <p:cNvSpPr txBox="1"/>
-          <p:nvPr/>
-        </p:nvSpPr>
-        <p:spPr>
-          <a:xfrm>
-            <a:off x="9646919" y="3865168"/>
-            <a:ext cx="1856231" cy="397535"/>
-          </a:xfrm>
-          <a:prstGeom prst="rect">
-            <a:avLst/>
-          </a:prstGeom>
-          <a:noFill/>
-        </p:spPr>
-        <p:txBody>
-          <a:bodyPr wrap="square" anchor="t" lIns="9144" rIns="9144" tIns="0" bIns="0">
+          <p:cNvPr id="49" name="TextBox 48"/>
+          <p:cNvSpPr txBox="1"/>
+          <p:nvPr/>
+        </p:nvSpPr>
+        <p:spPr>
+          <a:xfrm>
+            <a:off x="9646919" y="3858768"/>
+            <a:ext cx="1856231" cy="822960"/>
+          </a:xfrm>
+          <a:prstGeom prst="rect">
+            <a:avLst/>
+          </a:prstGeom>
+          <a:noFill/>
+        </p:spPr>
+        <p:txBody>
+          <a:bodyPr wrap="square" anchor="ctr" lIns="9144" rIns="9144" tIns="6400" bIns="6400">
             <a:noAutofit/>
           </a:bodyPr>
           <a:lstStyle/>
@@ -18179,6 +17619,9 @@
               <a:lnSpc>
                 <a:spcPct val="122000"/>
               </a:lnSpc>
+              <a:spcAft>
+                <a:spcPts val="118"/>
+              </a:spcAft>
             </a:pPr>
             <a:r>
               <a:rPr sz="990" b="0" i="0">
@@ -18191,29 +17634,6 @@
               <a:t>대하 역사소설, 가족 사가(Saga),</a:t>
             </a:r>
           </a:p>
-        </p:txBody>
-      </p:sp>
-      <p:sp>
-        <p:nvSpPr>
-          <p:cNvPr id="60" name="TextBox 59"/>
-          <p:cNvSpPr txBox="1"/>
-          <p:nvPr/>
-        </p:nvSpPr>
-        <p:spPr>
-          <a:xfrm>
-            <a:off x="9646919" y="4277791"/>
-            <a:ext cx="1856231" cy="397535"/>
-          </a:xfrm>
-          <a:prstGeom prst="rect">
-            <a:avLst/>
-          </a:prstGeom>
-          <a:noFill/>
-        </p:spPr>
-        <p:txBody>
-          <a:bodyPr wrap="square" anchor="t" lIns="9144" rIns="9144" tIns="0" bIns="0">
-            <a:noAutofit/>
-          </a:bodyPr>
-          <a:lstStyle/>
           <a:p>
             <a:pPr algn="l">
               <a:lnSpc>
@@ -18235,7 +17655,7 @@
       </p:sp>
       <p:sp>
         <p:nvSpPr>
-          <p:cNvPr id="61" name="Rectangle 60"/>
+          <p:cNvPr id="50" name="Rectangle 49"/>
           <p:cNvSpPr/>
           <p:nvPr/>
         </p:nvSpPr>
@@ -18281,22 +17701,22 @@
       </p:sp>
       <p:sp>
         <p:nvSpPr>
-          <p:cNvPr id="62" name="TextBox 61"/>
-          <p:cNvSpPr txBox="1"/>
-          <p:nvPr/>
-        </p:nvSpPr>
-        <p:spPr>
-          <a:xfrm>
-            <a:off x="685800" y="4834432"/>
-            <a:ext cx="1691639" cy="397078"/>
-          </a:xfrm>
-          <a:prstGeom prst="rect">
-            <a:avLst/>
-          </a:prstGeom>
-          <a:noFill/>
-        </p:spPr>
-        <p:txBody>
-          <a:bodyPr wrap="square" anchor="t" lIns="9144" rIns="9144" tIns="0" bIns="0">
+          <p:cNvPr id="51" name="TextBox 50"/>
+          <p:cNvSpPr txBox="1"/>
+          <p:nvPr/>
+        </p:nvSpPr>
+        <p:spPr>
+          <a:xfrm>
+            <a:off x="685800" y="4828032"/>
+            <a:ext cx="1691639" cy="822960"/>
+          </a:xfrm>
+          <a:prstGeom prst="rect">
+            <a:avLst/>
+          </a:prstGeom>
+          <a:noFill/>
+        </p:spPr>
+        <p:txBody>
+          <a:bodyPr wrap="square" anchor="ctr" lIns="9144" rIns="9144" tIns="6400" bIns="6400">
             <a:noAutofit/>
           </a:bodyPr>
           <a:lstStyle/>
@@ -18305,6 +17725,9 @@
               <a:lnSpc>
                 <a:spcPct val="122000"/>
               </a:lnSpc>
+              <a:spcAft>
+                <a:spcPts val="126"/>
+              </a:spcAft>
             </a:pPr>
             <a:r>
               <a:rPr sz="1050" b="1" i="0">
@@ -18317,29 +17740,6 @@
               <a:t>다중 교차 시점</a:t>
             </a:r>
           </a:p>
-        </p:txBody>
-      </p:sp>
-      <p:sp>
-        <p:nvSpPr>
-          <p:cNvPr id="63" name="TextBox 62"/>
-          <p:cNvSpPr txBox="1"/>
-          <p:nvPr/>
-        </p:nvSpPr>
-        <p:spPr>
-          <a:xfrm>
-            <a:off x="685800" y="5247513"/>
-            <a:ext cx="1691639" cy="397078"/>
-          </a:xfrm>
-          <a:prstGeom prst="rect">
-            <a:avLst/>
-          </a:prstGeom>
-          <a:noFill/>
-        </p:spPr>
-        <p:txBody>
-          <a:bodyPr wrap="square" anchor="t" lIns="9144" rIns="9144" tIns="0" bIns="0">
-            <a:noAutofit/>
-          </a:bodyPr>
-          <a:lstStyle/>
           <a:p>
             <a:pPr algn="l">
               <a:lnSpc>
@@ -18361,7 +17761,7 @@
       </p:sp>
       <p:sp>
         <p:nvSpPr>
-          <p:cNvPr id="64" name="Rectangle 63"/>
+          <p:cNvPr id="52" name="Rectangle 51"/>
           <p:cNvSpPr/>
           <p:nvPr/>
         </p:nvSpPr>
@@ -18407,7 +17807,7 @@
       </p:sp>
       <p:sp>
         <p:nvSpPr>
-          <p:cNvPr id="65" name="TextBox 64"/>
+          <p:cNvPr id="53" name="TextBox 52"/>
           <p:cNvSpPr txBox="1"/>
           <p:nvPr/>
         </p:nvSpPr>
@@ -18447,7 +17847,7 @@
       </p:sp>
       <p:sp>
         <p:nvSpPr>
-          <p:cNvPr id="66" name="Rectangle 65"/>
+          <p:cNvPr id="54" name="Rectangle 53"/>
           <p:cNvSpPr/>
           <p:nvPr/>
         </p:nvSpPr>
@@ -18493,22 +17893,22 @@
       </p:sp>
       <p:sp>
         <p:nvSpPr>
-          <p:cNvPr id="67" name="TextBox 66"/>
-          <p:cNvSpPr txBox="1"/>
-          <p:nvPr/>
-        </p:nvSpPr>
-        <p:spPr>
-          <a:xfrm>
-            <a:off x="5074919" y="4834432"/>
-            <a:ext cx="2148839" cy="261051"/>
-          </a:xfrm>
-          <a:prstGeom prst="rect">
-            <a:avLst/>
-          </a:prstGeom>
-          <a:noFill/>
-        </p:spPr>
-        <p:txBody>
-          <a:bodyPr wrap="square" anchor="t" lIns="9144" rIns="9144" tIns="0" bIns="0">
+          <p:cNvPr id="55" name="TextBox 54"/>
+          <p:cNvSpPr txBox="1"/>
+          <p:nvPr/>
+        </p:nvSpPr>
+        <p:spPr>
+          <a:xfrm>
+            <a:off x="5074919" y="4828032"/>
+            <a:ext cx="2148839" cy="822960"/>
+          </a:xfrm>
+          <a:prstGeom prst="rect">
+            <a:avLst/>
+          </a:prstGeom>
+          <a:noFill/>
+        </p:spPr>
+        <p:txBody>
+          <a:bodyPr wrap="square" anchor="ctr" lIns="9144" rIns="9144" tIns="6400" bIns="6400">
             <a:noAutofit/>
           </a:bodyPr>
           <a:lstStyle/>
@@ -18517,6 +17917,9 @@
               <a:lnSpc>
                 <a:spcPct val="122000"/>
               </a:lnSpc>
+              <a:spcAft>
+                <a:spcPts val="118"/>
+              </a:spcAft>
             </a:pPr>
             <a:r>
               <a:rPr sz="990" b="0" i="0">
@@ -18529,29 +17932,6 @@
               <a:t>• 주인공과 적대자 양측의 정당성 부여</a:t>
             </a:r>
           </a:p>
-        </p:txBody>
-      </p:sp>
-      <p:sp>
-        <p:nvSpPr>
-          <p:cNvPr id="68" name="TextBox 67"/>
-          <p:cNvSpPr txBox="1"/>
-          <p:nvPr/>
-        </p:nvSpPr>
-        <p:spPr>
-          <a:xfrm>
-            <a:off x="5074919" y="5110572"/>
-            <a:ext cx="2148839" cy="534018"/>
-          </a:xfrm>
-          <a:prstGeom prst="rect">
-            <a:avLst/>
-          </a:prstGeom>
-          <a:noFill/>
-        </p:spPr>
-        <p:txBody>
-          <a:bodyPr wrap="square" anchor="t" lIns="9144" rIns="9144" tIns="0" bIns="0">
-            <a:noAutofit/>
-          </a:bodyPr>
-          <a:lstStyle/>
           <a:p>
             <a:pPr algn="l">
               <a:lnSpc>
@@ -18573,7 +17953,7 @@
       </p:sp>
       <p:sp>
         <p:nvSpPr>
-          <p:cNvPr id="69" name="Rectangle 68"/>
+          <p:cNvPr id="56" name="Rectangle 55"/>
           <p:cNvSpPr/>
           <p:nvPr/>
         </p:nvSpPr>
@@ -18619,22 +17999,22 @@
       </p:sp>
       <p:sp>
         <p:nvSpPr>
-          <p:cNvPr id="70" name="TextBox 69"/>
-          <p:cNvSpPr txBox="1"/>
-          <p:nvPr/>
-        </p:nvSpPr>
-        <p:spPr>
-          <a:xfrm>
-            <a:off x="7406640" y="4834432"/>
-            <a:ext cx="2057400" cy="520994"/>
-          </a:xfrm>
-          <a:prstGeom prst="rect">
-            <a:avLst/>
-          </a:prstGeom>
-          <a:noFill/>
-        </p:spPr>
-        <p:txBody>
-          <a:bodyPr wrap="square" anchor="t" lIns="9144" rIns="9144" tIns="0" bIns="0">
+          <p:cNvPr id="57" name="TextBox 56"/>
+          <p:cNvSpPr txBox="1"/>
+          <p:nvPr/>
+        </p:nvSpPr>
+        <p:spPr>
+          <a:xfrm>
+            <a:off x="7406640" y="4828032"/>
+            <a:ext cx="2057400" cy="822960"/>
+          </a:xfrm>
+          <a:prstGeom prst="rect">
+            <a:avLst/>
+          </a:prstGeom>
+          <a:noFill/>
+        </p:spPr>
+        <p:txBody>
+          <a:bodyPr wrap="square" anchor="ctr" lIns="9144" rIns="9144" tIns="6400" bIns="6400">
             <a:noAutofit/>
           </a:bodyPr>
           <a:lstStyle/>
@@ -18643,6 +18023,9 @@
               <a:lnSpc>
                 <a:spcPct val="122000"/>
               </a:lnSpc>
+              <a:spcAft>
+                <a:spcPts val="106"/>
+              </a:spcAft>
             </a:pPr>
             <a:r>
               <a:rPr sz="890" b="0" i="0">
@@ -18655,29 +18038,6 @@
               <a:t>• 시점 인물 간 목소리가 비슷하면 독자가 화자를 혼동</a:t>
             </a:r>
           </a:p>
-        </p:txBody>
-      </p:sp>
-      <p:sp>
-        <p:nvSpPr>
-          <p:cNvPr id="71" name="TextBox 70"/>
-          <p:cNvSpPr txBox="1"/>
-          <p:nvPr/>
-        </p:nvSpPr>
-        <p:spPr>
-          <a:xfrm>
-            <a:off x="7406640" y="5368991"/>
-            <a:ext cx="2057400" cy="275600"/>
-          </a:xfrm>
-          <a:prstGeom prst="rect">
-            <a:avLst/>
-          </a:prstGeom>
-          <a:noFill/>
-        </p:spPr>
-        <p:txBody>
-          <a:bodyPr wrap="square" anchor="t" lIns="9144" rIns="9144" tIns="0" bIns="0">
-            <a:noAutofit/>
-          </a:bodyPr>
-          <a:lstStyle/>
           <a:p>
             <a:pPr algn="l">
               <a:lnSpc>
@@ -18699,7 +18059,7 @@
       </p:sp>
       <p:sp>
         <p:nvSpPr>
-          <p:cNvPr id="72" name="Rectangle 71"/>
+          <p:cNvPr id="58" name="Rectangle 57"/>
           <p:cNvSpPr/>
           <p:nvPr/>
         </p:nvSpPr>
@@ -18745,22 +18105,22 @@
       </p:sp>
       <p:sp>
         <p:nvSpPr>
-          <p:cNvPr id="73" name="TextBox 72"/>
-          <p:cNvSpPr txBox="1"/>
-          <p:nvPr/>
-        </p:nvSpPr>
-        <p:spPr>
-          <a:xfrm>
-            <a:off x="9646919" y="4834432"/>
-            <a:ext cx="1856231" cy="397535"/>
-          </a:xfrm>
-          <a:prstGeom prst="rect">
-            <a:avLst/>
-          </a:prstGeom>
-          <a:noFill/>
-        </p:spPr>
-        <p:txBody>
-          <a:bodyPr wrap="square" anchor="t" lIns="9144" rIns="9144" tIns="0" bIns="0">
+          <p:cNvPr id="59" name="TextBox 58"/>
+          <p:cNvSpPr txBox="1"/>
+          <p:nvPr/>
+        </p:nvSpPr>
+        <p:spPr>
+          <a:xfrm>
+            <a:off x="9646919" y="4828032"/>
+            <a:ext cx="1856231" cy="822960"/>
+          </a:xfrm>
+          <a:prstGeom prst="rect">
+            <a:avLst/>
+          </a:prstGeom>
+          <a:noFill/>
+        </p:spPr>
+        <p:txBody>
+          <a:bodyPr wrap="square" anchor="ctr" lIns="9144" rIns="9144" tIns="6400" bIns="6400">
             <a:noAutofit/>
           </a:bodyPr>
           <a:lstStyle/>
@@ -18769,6 +18129,9 @@
               <a:lnSpc>
                 <a:spcPct val="122000"/>
               </a:lnSpc>
+              <a:spcAft>
+                <a:spcPts val="118"/>
+              </a:spcAft>
             </a:pPr>
             <a:r>
               <a:rPr sz="990" b="0" i="0">
@@ -18781,29 +18144,6 @@
               <a:t>군상극, 범죄 스릴러,</a:t>
             </a:r>
           </a:p>
-        </p:txBody>
-      </p:sp>
-      <p:sp>
-        <p:nvSpPr>
-          <p:cNvPr id="74" name="TextBox 73"/>
-          <p:cNvSpPr txBox="1"/>
-          <p:nvPr/>
-        </p:nvSpPr>
-        <p:spPr>
-          <a:xfrm>
-            <a:off x="9646919" y="5247055"/>
-            <a:ext cx="1856231" cy="397535"/>
-          </a:xfrm>
-          <a:prstGeom prst="rect">
-            <a:avLst/>
-          </a:prstGeom>
-          <a:noFill/>
-        </p:spPr>
-        <p:txBody>
-          <a:bodyPr wrap="square" anchor="t" lIns="9144" rIns="9144" tIns="0" bIns="0">
-            <a:noAutofit/>
-          </a:bodyPr>
-          <a:lstStyle/>
           <a:p>
             <a:pPr algn="l">
               <a:lnSpc>
@@ -18825,7 +18165,7 @@
       </p:sp>
       <p:sp>
         <p:nvSpPr>
-          <p:cNvPr id="75" name="Rounded Rectangle 74"/>
+          <p:cNvPr id="60" name="Rounded Rectangle 59"/>
           <p:cNvSpPr/>
           <p:nvPr/>
         </p:nvSpPr>
@@ -18873,7 +18213,7 @@
       </p:sp>
       <p:sp>
         <p:nvSpPr>
-          <p:cNvPr id="76" name="TextBox 75"/>
+          <p:cNvPr id="61" name="TextBox 60"/>
           <p:cNvSpPr txBox="1"/>
           <p:nvPr/>
         </p:nvSpPr>
@@ -21471,16 +20811,16 @@
         </p:nvSpPr>
         <p:spPr>
           <a:xfrm>
-            <a:off x="804672" y="1908352"/>
-            <a:ext cx="3749039" cy="247611"/>
-          </a:xfrm>
-          <a:prstGeom prst="rect">
-            <a:avLst/>
-          </a:prstGeom>
-          <a:noFill/>
-        </p:spPr>
-        <p:txBody>
-          <a:bodyPr wrap="square" anchor="t" lIns="9144" rIns="9144" tIns="0" bIns="0">
+            <a:off x="804672" y="1901952"/>
+            <a:ext cx="3749039" cy="1051560"/>
+          </a:xfrm>
+          <a:prstGeom prst="rect">
+            <a:avLst/>
+          </a:prstGeom>
+          <a:noFill/>
+        </p:spPr>
+        <p:txBody>
+          <a:bodyPr wrap="square" anchor="t" lIns="9144" rIns="9144" tIns="6400" bIns="6400">
             <a:noAutofit/>
           </a:bodyPr>
           <a:lstStyle/>
@@ -21489,6 +20829,9 @@
               <a:lnSpc>
                 <a:spcPct val="132000"/>
               </a:lnSpc>
+              <a:spcAft>
+                <a:spcPts val="108"/>
+              </a:spcAft>
             </a:pPr>
             <a:r>
               <a:rPr sz="900" b="0" i="0">
@@ -21501,34 +20844,14 @@
               <a:t>“초고를 쓸 때는 내면의 편집자를 방문 밖에 가두어라.”</a:t>
             </a:r>
           </a:p>
-        </p:txBody>
-      </p:sp>
-      <p:sp>
-        <p:nvSpPr>
-          <p:cNvPr id="13" name="TextBox 12"/>
-          <p:cNvSpPr txBox="1"/>
-          <p:nvPr/>
-        </p:nvSpPr>
-        <p:spPr>
-          <a:xfrm>
-            <a:off x="804672" y="2169680"/>
-            <a:ext cx="3749039" cy="247611"/>
-          </a:xfrm>
-          <a:prstGeom prst="rect">
-            <a:avLst/>
-          </a:prstGeom>
-          <a:noFill/>
-        </p:spPr>
-        <p:txBody>
-          <a:bodyPr wrap="square" anchor="t" lIns="9144" rIns="9144" tIns="0" bIns="0">
-            <a:noAutofit/>
-          </a:bodyPr>
-          <a:lstStyle/>
           <a:p>
             <a:pPr algn="l">
               <a:lnSpc>
                 <a:spcPct val="132000"/>
               </a:lnSpc>
+              <a:spcAft>
+                <a:spcPts val="108"/>
+              </a:spcAft>
             </a:pPr>
             <a:r>
               <a:rPr sz="900" b="0" i="0">
@@ -21541,29 +20864,6 @@
               <a:t/>
             </a:r>
           </a:p>
-        </p:txBody>
-      </p:sp>
-      <p:sp>
-        <p:nvSpPr>
-          <p:cNvPr id="14" name="TextBox 13"/>
-          <p:cNvSpPr txBox="1"/>
-          <p:nvPr/>
-        </p:nvSpPr>
-        <p:spPr>
-          <a:xfrm>
-            <a:off x="804672" y="2431007"/>
-            <a:ext cx="3749039" cy="516103"/>
-          </a:xfrm>
-          <a:prstGeom prst="rect">
-            <a:avLst/>
-          </a:prstGeom>
-          <a:noFill/>
-        </p:spPr>
-        <p:txBody>
-          <a:bodyPr wrap="square" anchor="t" lIns="9144" rIns="9144" tIns="0" bIns="0">
-            <a:noAutofit/>
-          </a:bodyPr>
-          <a:lstStyle/>
           <a:p>
             <a:pPr algn="l">
               <a:lnSpc>
@@ -21585,7 +20885,7 @@
       </p:sp>
       <p:sp>
         <p:nvSpPr>
-          <p:cNvPr id="15" name="Rounded Rectangle 14"/>
+          <p:cNvPr id="13" name="Rounded Rectangle 12"/>
           <p:cNvSpPr/>
           <p:nvPr/>
         </p:nvSpPr>
@@ -21633,7 +20933,7 @@
       </p:sp>
       <p:sp>
         <p:nvSpPr>
-          <p:cNvPr id="16" name="TextBox 15"/>
+          <p:cNvPr id="14" name="TextBox 13"/>
           <p:cNvSpPr txBox="1"/>
           <p:nvPr/>
         </p:nvSpPr>
@@ -21673,7 +20973,7 @@
       </p:sp>
       <p:sp>
         <p:nvSpPr>
-          <p:cNvPr id="17" name="Rectangle 16"/>
+          <p:cNvPr id="15" name="Rectangle 14"/>
           <p:cNvSpPr/>
           <p:nvPr/>
         </p:nvSpPr>
@@ -21717,7 +21017,7 @@
       </p:sp>
       <p:sp>
         <p:nvSpPr>
-          <p:cNvPr id="18" name="TextBox 17"/>
+          <p:cNvPr id="16" name="TextBox 15"/>
           <p:cNvSpPr txBox="1"/>
           <p:nvPr/>
         </p:nvSpPr>
@@ -21757,7 +21057,7 @@
       </p:sp>
       <p:sp>
         <p:nvSpPr>
-          <p:cNvPr id="19" name="Rectangle 18"/>
+          <p:cNvPr id="17" name="Rectangle 16"/>
           <p:cNvSpPr/>
           <p:nvPr/>
         </p:nvSpPr>
@@ -21801,7 +21101,7 @@
       </p:sp>
       <p:sp>
         <p:nvSpPr>
-          <p:cNvPr id="20" name="TextBox 19"/>
+          <p:cNvPr id="18" name="TextBox 17"/>
           <p:cNvSpPr txBox="1"/>
           <p:nvPr/>
         </p:nvSpPr>
@@ -21841,7 +21141,7 @@
       </p:sp>
       <p:sp>
         <p:nvSpPr>
-          <p:cNvPr id="21" name="Rectangle 20"/>
+          <p:cNvPr id="19" name="Rectangle 18"/>
           <p:cNvSpPr/>
           <p:nvPr/>
         </p:nvSpPr>
@@ -21885,7 +21185,7 @@
       </p:sp>
       <p:sp>
         <p:nvSpPr>
-          <p:cNvPr id="22" name="TextBox 21"/>
+          <p:cNvPr id="20" name="TextBox 19"/>
           <p:cNvSpPr txBox="1"/>
           <p:nvPr/>
         </p:nvSpPr>
@@ -21925,22 +21225,22 @@
       </p:sp>
       <p:sp>
         <p:nvSpPr>
-          <p:cNvPr id="23" name="TextBox 22"/>
-          <p:cNvSpPr txBox="1"/>
-          <p:nvPr/>
-        </p:nvSpPr>
-        <p:spPr>
-          <a:xfrm>
-            <a:off x="950976" y="4048048"/>
-            <a:ext cx="3474720" cy="238353"/>
-          </a:xfrm>
-          <a:prstGeom prst="rect">
-            <a:avLst/>
-          </a:prstGeom>
-          <a:noFill/>
-        </p:spPr>
-        <p:txBody>
-          <a:bodyPr wrap="square" anchor="t" lIns="9144" rIns="9144" tIns="0" bIns="0">
+          <p:cNvPr id="21" name="TextBox 20"/>
+          <p:cNvSpPr txBox="1"/>
+          <p:nvPr/>
+        </p:nvSpPr>
+        <p:spPr>
+          <a:xfrm>
+            <a:off x="950976" y="4041648"/>
+            <a:ext cx="3474720" cy="502920"/>
+          </a:xfrm>
+          <a:prstGeom prst="rect">
+            <a:avLst/>
+          </a:prstGeom>
+          <a:noFill/>
+        </p:spPr>
+        <p:txBody>
+          <a:bodyPr wrap="square" anchor="t" lIns="9144" rIns="9144" tIns="6400" bIns="6400">
             <a:noAutofit/>
           </a:bodyPr>
           <a:lstStyle/>
@@ -21949,6 +21249,9 @@
               <a:lnSpc>
                 <a:spcPct val="125000"/>
               </a:lnSpc>
+              <a:spcAft>
+                <a:spcPts val="105"/>
+              </a:spcAft>
             </a:pPr>
             <a:r>
               <a:rPr sz="880" b="0" i="0">
@@ -21961,29 +21264,6 @@
               <a:t>• 기획·구조 설계 (20%)  • 초고 집필 (30%)</a:t>
             </a:r>
           </a:p>
-        </p:txBody>
-      </p:sp>
-      <p:sp>
-        <p:nvSpPr>
-          <p:cNvPr id="24" name="TextBox 23"/>
-          <p:cNvSpPr txBox="1"/>
-          <p:nvPr/>
-        </p:nvSpPr>
-        <p:spPr>
-          <a:xfrm>
-            <a:off x="950976" y="4299813"/>
-            <a:ext cx="3474720" cy="238353"/>
-          </a:xfrm>
-          <a:prstGeom prst="rect">
-            <a:avLst/>
-          </a:prstGeom>
-          <a:noFill/>
-        </p:spPr>
-        <p:txBody>
-          <a:bodyPr wrap="square" anchor="t" lIns="9144" rIns="9144" tIns="0" bIns="0">
-            <a:noAutofit/>
-          </a:bodyPr>
-          <a:lstStyle/>
           <a:p>
             <a:pPr algn="l">
               <a:lnSpc>
@@ -22005,7 +21285,7 @@
       </p:sp>
       <p:sp>
         <p:nvSpPr>
-          <p:cNvPr id="25" name="Rounded Rectangle 24"/>
+          <p:cNvPr id="22" name="Rounded Rectangle 21"/>
           <p:cNvSpPr/>
           <p:nvPr/>
         </p:nvSpPr>
@@ -22051,7 +21331,7 @@
       </p:sp>
       <p:sp>
         <p:nvSpPr>
-          <p:cNvPr id="26" name="TextBox 25"/>
+          <p:cNvPr id="23" name="TextBox 22"/>
           <p:cNvSpPr txBox="1"/>
           <p:nvPr/>
         </p:nvSpPr>
@@ -22091,7 +21371,7 @@
       </p:sp>
       <p:sp>
         <p:nvSpPr>
-          <p:cNvPr id="27" name="TextBox 26"/>
+          <p:cNvPr id="24" name="TextBox 23"/>
           <p:cNvSpPr txBox="1"/>
           <p:nvPr/>
         </p:nvSpPr>
@@ -22131,7 +21411,7 @@
       </p:sp>
       <p:sp>
         <p:nvSpPr>
-          <p:cNvPr id="28" name="Rounded Rectangle 27"/>
+          <p:cNvPr id="25" name="Rounded Rectangle 24"/>
           <p:cNvSpPr/>
           <p:nvPr/>
         </p:nvSpPr>
@@ -22179,7 +21459,7 @@
       </p:sp>
       <p:sp>
         <p:nvSpPr>
-          <p:cNvPr id="29" name="Rectangle 28"/>
+          <p:cNvPr id="26" name="Rectangle 25"/>
           <p:cNvSpPr/>
           <p:nvPr/>
         </p:nvSpPr>
@@ -22223,7 +21503,7 @@
       </p:sp>
       <p:sp>
         <p:nvSpPr>
-          <p:cNvPr id="30" name="Rounded Rectangle 29"/>
+          <p:cNvPr id="27" name="Rounded Rectangle 26"/>
           <p:cNvSpPr/>
           <p:nvPr/>
         </p:nvSpPr>
@@ -22269,7 +21549,7 @@
       </p:sp>
       <p:sp>
         <p:nvSpPr>
-          <p:cNvPr id="31" name="TextBox 30"/>
+          <p:cNvPr id="28" name="TextBox 27"/>
           <p:cNvSpPr txBox="1"/>
           <p:nvPr/>
         </p:nvSpPr>
@@ -22309,7 +21589,7 @@
       </p:sp>
       <p:sp>
         <p:nvSpPr>
-          <p:cNvPr id="32" name="TextBox 31"/>
+          <p:cNvPr id="29" name="TextBox 28"/>
           <p:cNvSpPr txBox="1"/>
           <p:nvPr/>
         </p:nvSpPr>
@@ -22349,7 +21629,7 @@
       </p:sp>
       <p:sp>
         <p:nvSpPr>
-          <p:cNvPr id="33" name="TextBox 32"/>
+          <p:cNvPr id="30" name="TextBox 29"/>
           <p:cNvSpPr txBox="1"/>
           <p:nvPr/>
         </p:nvSpPr>
@@ -22389,22 +21669,22 @@
       </p:sp>
       <p:sp>
         <p:nvSpPr>
-          <p:cNvPr id="34" name="TextBox 33"/>
-          <p:cNvSpPr txBox="1"/>
-          <p:nvPr/>
-        </p:nvSpPr>
-        <p:spPr>
-          <a:xfrm>
-            <a:off x="5193792" y="2091232"/>
-            <a:ext cx="6217920" cy="254508"/>
-          </a:xfrm>
-          <a:prstGeom prst="rect">
-            <a:avLst/>
-          </a:prstGeom>
-          <a:noFill/>
-        </p:spPr>
-        <p:txBody>
-          <a:bodyPr wrap="square" anchor="t" lIns="9144" rIns="9144" tIns="0" bIns="0">
+          <p:cNvPr id="31" name="TextBox 30"/>
+          <p:cNvSpPr txBox="1"/>
+          <p:nvPr/>
+        </p:nvSpPr>
+        <p:spPr>
+          <a:xfrm>
+            <a:off x="5193792" y="2084832"/>
+            <a:ext cx="6217920" cy="804672"/>
+          </a:xfrm>
+          <a:prstGeom prst="rect">
+            <a:avLst/>
+          </a:prstGeom>
+          <a:noFill/>
+        </p:spPr>
+        <p:txBody>
+          <a:bodyPr wrap="square" anchor="t" lIns="9144" rIns="9144" tIns="6400" bIns="6400">
             <a:noAutofit/>
           </a:bodyPr>
           <a:lstStyle/>
@@ -22413,6 +21693,9 @@
               <a:lnSpc>
                 <a:spcPct val="126000"/>
               </a:lnSpc>
+              <a:spcAft>
+                <a:spcPts val="111"/>
+              </a:spcAft>
             </a:pPr>
             <a:r>
               <a:rPr sz="930" b="0" i="0">
@@ -22425,34 +21708,14 @@
               <a:t>✓ 주인공의 욕망과 행동이 시작부터 클라이맥스까지 일관되게 이어지는가?</a:t>
             </a:r>
           </a:p>
-        </p:txBody>
-      </p:sp>
-      <p:sp>
-        <p:nvSpPr>
-          <p:cNvPr id="35" name="TextBox 34"/>
-          <p:cNvSpPr txBox="1"/>
-          <p:nvPr/>
-        </p:nvSpPr>
-        <p:spPr>
-          <a:xfrm>
-            <a:off x="5193792" y="2359914"/>
-            <a:ext cx="6217920" cy="254508"/>
-          </a:xfrm>
-          <a:prstGeom prst="rect">
-            <a:avLst/>
-          </a:prstGeom>
-          <a:noFill/>
-        </p:spPr>
-        <p:txBody>
-          <a:bodyPr wrap="square" anchor="t" lIns="9144" rIns="9144" tIns="0" bIns="0">
-            <a:noAutofit/>
-          </a:bodyPr>
-          <a:lstStyle/>
           <a:p>
             <a:pPr algn="l">
               <a:lnSpc>
                 <a:spcPct val="126000"/>
               </a:lnSpc>
+              <a:spcAft>
+                <a:spcPts val="111"/>
+              </a:spcAft>
             </a:pPr>
             <a:r>
               <a:rPr sz="930" b="0" i="0">
@@ -22465,29 +21728,6 @@
               <a:t>✓ 중반부가 늘어지지 않는가? (기능이 겹치는 장면과 인물을 과감히 통합·삭제)</a:t>
             </a:r>
           </a:p>
-        </p:txBody>
-      </p:sp>
-      <p:sp>
-        <p:nvSpPr>
-          <p:cNvPr id="36" name="TextBox 35"/>
-          <p:cNvSpPr txBox="1"/>
-          <p:nvPr/>
-        </p:nvSpPr>
-        <p:spPr>
-          <a:xfrm>
-            <a:off x="5193792" y="2628595"/>
-            <a:ext cx="6217920" cy="254508"/>
-          </a:xfrm>
-          <a:prstGeom prst="rect">
-            <a:avLst/>
-          </a:prstGeom>
-          <a:noFill/>
-        </p:spPr>
-        <p:txBody>
-          <a:bodyPr wrap="square" anchor="t" lIns="9144" rIns="9144" tIns="0" bIns="0">
-            <a:noAutofit/>
-          </a:bodyPr>
-          <a:lstStyle/>
           <a:p>
             <a:pPr algn="l">
               <a:lnSpc>
@@ -22509,7 +21749,7 @@
       </p:sp>
       <p:sp>
         <p:nvSpPr>
-          <p:cNvPr id="37" name="Rounded Rectangle 36"/>
+          <p:cNvPr id="32" name="Rounded Rectangle 31"/>
           <p:cNvSpPr/>
           <p:nvPr/>
         </p:nvSpPr>
@@ -22557,7 +21797,7 @@
       </p:sp>
       <p:sp>
         <p:nvSpPr>
-          <p:cNvPr id="38" name="Rectangle 37"/>
+          <p:cNvPr id="33" name="Rectangle 32"/>
           <p:cNvSpPr/>
           <p:nvPr/>
         </p:nvSpPr>
@@ -22601,7 +21841,7 @@
       </p:sp>
       <p:sp>
         <p:nvSpPr>
-          <p:cNvPr id="39" name="Rounded Rectangle 38"/>
+          <p:cNvPr id="34" name="Rounded Rectangle 33"/>
           <p:cNvSpPr/>
           <p:nvPr/>
         </p:nvSpPr>
@@ -22647,7 +21887,7 @@
       </p:sp>
       <p:sp>
         <p:nvSpPr>
-          <p:cNvPr id="40" name="TextBox 39"/>
+          <p:cNvPr id="35" name="TextBox 34"/>
           <p:cNvSpPr txBox="1"/>
           <p:nvPr/>
         </p:nvSpPr>
@@ -22687,7 +21927,7 @@
       </p:sp>
       <p:sp>
         <p:nvSpPr>
-          <p:cNvPr id="41" name="TextBox 40"/>
+          <p:cNvPr id="36" name="TextBox 35"/>
           <p:cNvSpPr txBox="1"/>
           <p:nvPr/>
         </p:nvSpPr>
@@ -22727,7 +21967,7 @@
       </p:sp>
       <p:sp>
         <p:nvSpPr>
-          <p:cNvPr id="42" name="TextBox 41"/>
+          <p:cNvPr id="37" name="TextBox 36"/>
           <p:cNvSpPr txBox="1"/>
           <p:nvPr/>
         </p:nvSpPr>
@@ -22767,22 +22007,22 @@
       </p:sp>
       <p:sp>
         <p:nvSpPr>
-          <p:cNvPr id="43" name="TextBox 42"/>
-          <p:cNvSpPr txBox="1"/>
-          <p:nvPr/>
-        </p:nvSpPr>
-        <p:spPr>
-          <a:xfrm>
-            <a:off x="5193792" y="3755440"/>
-            <a:ext cx="6217920" cy="254508"/>
-          </a:xfrm>
-          <a:prstGeom prst="rect">
-            <a:avLst/>
-          </a:prstGeom>
-          <a:noFill/>
-        </p:spPr>
-        <p:txBody>
-          <a:bodyPr wrap="square" anchor="t" lIns="9144" rIns="9144" tIns="0" bIns="0">
+          <p:cNvPr id="38" name="TextBox 37"/>
+          <p:cNvSpPr txBox="1"/>
+          <p:nvPr/>
+        </p:nvSpPr>
+        <p:spPr>
+          <a:xfrm>
+            <a:off x="5193792" y="3749039"/>
+            <a:ext cx="6217920" cy="804672"/>
+          </a:xfrm>
+          <a:prstGeom prst="rect">
+            <a:avLst/>
+          </a:prstGeom>
+          <a:noFill/>
+        </p:spPr>
+        <p:txBody>
+          <a:bodyPr wrap="square" anchor="t" lIns="9144" rIns="9144" tIns="6400" bIns="6400">
             <a:noAutofit/>
           </a:bodyPr>
           <a:lstStyle/>
@@ -22791,6 +22031,9 @@
               <a:lnSpc>
                 <a:spcPct val="126000"/>
               </a:lnSpc>
+              <a:spcAft>
+                <a:spcPts val="111"/>
+              </a:spcAft>
             </a:pPr>
             <a:r>
               <a:rPr sz="930" b="0" i="0">
@@ -22803,34 +22046,14 @@
               <a:t>✓ 각 장면의 첫 문장이 흥미롭고 마지막 문장이 다음 장면을 궁금하게 만드는가?</a:t>
             </a:r>
           </a:p>
-        </p:txBody>
-      </p:sp>
-      <p:sp>
-        <p:nvSpPr>
-          <p:cNvPr id="44" name="TextBox 43"/>
-          <p:cNvSpPr txBox="1"/>
-          <p:nvPr/>
-        </p:nvSpPr>
-        <p:spPr>
-          <a:xfrm>
-            <a:off x="5193792" y="4024121"/>
-            <a:ext cx="6217920" cy="254508"/>
-          </a:xfrm>
-          <a:prstGeom prst="rect">
-            <a:avLst/>
-          </a:prstGeom>
-          <a:noFill/>
-        </p:spPr>
-        <p:txBody>
-          <a:bodyPr wrap="square" anchor="t" lIns="9144" rIns="9144" tIns="0" bIns="0">
-            <a:noAutofit/>
-          </a:bodyPr>
-          <a:lstStyle/>
           <a:p>
             <a:pPr algn="l">
               <a:lnSpc>
                 <a:spcPct val="126000"/>
               </a:lnSpc>
+              <a:spcAft>
+                <a:spcPts val="111"/>
+              </a:spcAft>
             </a:pPr>
             <a:r>
               <a:rPr sz="930" b="0" i="0">
@@ -22843,29 +22066,6 @@
               <a:t>✓ 한 장면 안에서 시점(POV)이 흔들리거나 설명(Tell)이 과도한 구간은 없는가?</a:t>
             </a:r>
           </a:p>
-        </p:txBody>
-      </p:sp>
-      <p:sp>
-        <p:nvSpPr>
-          <p:cNvPr id="45" name="TextBox 44"/>
-          <p:cNvSpPr txBox="1"/>
-          <p:nvPr/>
-        </p:nvSpPr>
-        <p:spPr>
-          <a:xfrm>
-            <a:off x="5193792" y="4292803"/>
-            <a:ext cx="6217920" cy="254508"/>
-          </a:xfrm>
-          <a:prstGeom prst="rect">
-            <a:avLst/>
-          </a:prstGeom>
-          <a:noFill/>
-        </p:spPr>
-        <p:txBody>
-          <a:bodyPr wrap="square" anchor="t" lIns="9144" rIns="9144" tIns="0" bIns="0">
-            <a:noAutofit/>
-          </a:bodyPr>
-          <a:lstStyle/>
           <a:p>
             <a:pPr algn="l">
               <a:lnSpc>
@@ -22887,7 +22087,7 @@
       </p:sp>
       <p:sp>
         <p:nvSpPr>
-          <p:cNvPr id="46" name="Rounded Rectangle 45"/>
+          <p:cNvPr id="39" name="Rounded Rectangle 38"/>
           <p:cNvSpPr/>
           <p:nvPr/>
         </p:nvSpPr>
@@ -22935,7 +22135,7 @@
       </p:sp>
       <p:sp>
         <p:nvSpPr>
-          <p:cNvPr id="47" name="Rectangle 46"/>
+          <p:cNvPr id="40" name="Rectangle 39"/>
           <p:cNvSpPr/>
           <p:nvPr/>
         </p:nvSpPr>
@@ -22979,7 +22179,7 @@
       </p:sp>
       <p:sp>
         <p:nvSpPr>
-          <p:cNvPr id="48" name="Rounded Rectangle 47"/>
+          <p:cNvPr id="41" name="Rounded Rectangle 40"/>
           <p:cNvSpPr/>
           <p:nvPr/>
         </p:nvSpPr>
@@ -23025,7 +22225,7 @@
       </p:sp>
       <p:sp>
         <p:nvSpPr>
-          <p:cNvPr id="49" name="TextBox 48"/>
+          <p:cNvPr id="42" name="TextBox 41"/>
           <p:cNvSpPr txBox="1"/>
           <p:nvPr/>
         </p:nvSpPr>
@@ -23065,7 +22265,7 @@
       </p:sp>
       <p:sp>
         <p:nvSpPr>
-          <p:cNvPr id="50" name="TextBox 49"/>
+          <p:cNvPr id="43" name="TextBox 42"/>
           <p:cNvSpPr txBox="1"/>
           <p:nvPr/>
         </p:nvSpPr>
@@ -23105,7 +22305,7 @@
       </p:sp>
       <p:sp>
         <p:nvSpPr>
-          <p:cNvPr id="51" name="TextBox 50"/>
+          <p:cNvPr id="44" name="TextBox 43"/>
           <p:cNvSpPr txBox="1"/>
           <p:nvPr/>
         </p:nvSpPr>
@@ -23145,22 +22345,22 @@
       </p:sp>
       <p:sp>
         <p:nvSpPr>
-          <p:cNvPr id="52" name="TextBox 51"/>
-          <p:cNvSpPr txBox="1"/>
-          <p:nvPr/>
-        </p:nvSpPr>
-        <p:spPr>
-          <a:xfrm>
-            <a:off x="5193792" y="5419648"/>
-            <a:ext cx="6217920" cy="254508"/>
-          </a:xfrm>
-          <a:prstGeom prst="rect">
-            <a:avLst/>
-          </a:prstGeom>
-          <a:noFill/>
-        </p:spPr>
-        <p:txBody>
-          <a:bodyPr wrap="square" anchor="t" lIns="9144" rIns="9144" tIns="0" bIns="0">
+          <p:cNvPr id="45" name="TextBox 44"/>
+          <p:cNvSpPr txBox="1"/>
+          <p:nvPr/>
+        </p:nvSpPr>
+        <p:spPr>
+          <a:xfrm>
+            <a:off x="5193792" y="5413248"/>
+            <a:ext cx="6217920" cy="804672"/>
+          </a:xfrm>
+          <a:prstGeom prst="rect">
+            <a:avLst/>
+          </a:prstGeom>
+          <a:noFill/>
+        </p:spPr>
+        <p:txBody>
+          <a:bodyPr wrap="square" anchor="t" lIns="9144" rIns="9144" tIns="6400" bIns="6400">
             <a:noAutofit/>
           </a:bodyPr>
           <a:lstStyle/>
@@ -23169,6 +22369,9 @@
               <a:lnSpc>
                 <a:spcPct val="126000"/>
               </a:lnSpc>
+              <a:spcAft>
+                <a:spcPts val="111"/>
+              </a:spcAft>
             </a:pPr>
             <a:r>
               <a:rPr sz="930" b="0" i="0">
@@ -23181,34 +22384,14 @@
               <a:t>✓ 상투적 부사(‘매우, 정말, 문득, 갑자기’)와 번역투(‘~에 다름 아니다, ~로부터’) 제거</a:t>
             </a:r>
           </a:p>
-        </p:txBody>
-      </p:sp>
-      <p:sp>
-        <p:nvSpPr>
-          <p:cNvPr id="53" name="TextBox 52"/>
-          <p:cNvSpPr txBox="1"/>
-          <p:nvPr/>
-        </p:nvSpPr>
-        <p:spPr>
-          <a:xfrm>
-            <a:off x="5193792" y="5688330"/>
-            <a:ext cx="6217920" cy="254508"/>
-          </a:xfrm>
-          <a:prstGeom prst="rect">
-            <a:avLst/>
-          </a:prstGeom>
-          <a:noFill/>
-        </p:spPr>
-        <p:txBody>
-          <a:bodyPr wrap="square" anchor="t" lIns="9144" rIns="9144" tIns="0" bIns="0">
-            <a:noAutofit/>
-          </a:bodyPr>
-          <a:lstStyle/>
           <a:p>
             <a:pPr algn="l">
               <a:lnSpc>
                 <a:spcPct val="126000"/>
               </a:lnSpc>
+              <a:spcAft>
+                <a:spcPts val="111"/>
+              </a:spcAft>
             </a:pPr>
             <a:r>
               <a:rPr sz="930" b="0" i="0">
@@ -23221,29 +22404,6 @@
               <a:t>✓ 한 문장에 중복된 주어(‘그는 ~ 그의 ~’)와 불필요한 피동형(‘~되어졌다’) 교정</a:t>
             </a:r>
           </a:p>
-        </p:txBody>
-      </p:sp>
-      <p:sp>
-        <p:nvSpPr>
-          <p:cNvPr id="54" name="TextBox 53"/>
-          <p:cNvSpPr txBox="1"/>
-          <p:nvPr/>
-        </p:nvSpPr>
-        <p:spPr>
-          <a:xfrm>
-            <a:off x="5193792" y="5957011"/>
-            <a:ext cx="6217920" cy="254508"/>
-          </a:xfrm>
-          <a:prstGeom prst="rect">
-            <a:avLst/>
-          </a:prstGeom>
-          <a:noFill/>
-        </p:spPr>
-        <p:txBody>
-          <a:bodyPr wrap="square" anchor="t" lIns="9144" rIns="9144" tIns="0" bIns="0">
-            <a:noAutofit/>
-          </a:bodyPr>
-          <a:lstStyle/>
           <a:p>
             <a:pPr algn="l">
               <a:lnSpc>
